--- a/Programacion II/Clases/Clase 1 - Introduccion a POO/Presentacion.pptx
+++ b/Programacion II/Clases/Clase 1 - Introduccion a POO/Presentacion.pptx
@@ -38,6 +38,12 @@
     <p:sldId id="286" r:id="rId37"/>
     <p:sldId id="287" r:id="rId38"/>
     <p:sldId id="288" r:id="rId39"/>
+    <p:sldId id="289" r:id="rId40"/>
+    <p:sldId id="290" r:id="rId41"/>
+    <p:sldId id="291" r:id="rId42"/>
+    <p:sldId id="292" r:id="rId43"/>
+    <p:sldId id="293" r:id="rId44"/>
+    <p:sldId id="294" r:id="rId45"/>
   </p:sldIdLst>
   <p:sldSz cx="12191695" cy="6858000" type="screen4x3"/>
   <p:notesSz cx="6858000" cy="9144000"/>
@@ -3638,7 +3644,7 @@
                 </a:solidFill>
                 <a:latin typeface="Calibri"/>
               </a:rPr>
-              <a:t>En Programacion I el estudiante trabajo con programacion estructurada:... (2/2)</a:t>
+              <a:t>En Programacion I el estudiante trabajo con programacion estructurada:... (1/2)</a:t>
             </a:r>
           </a:p>
         </p:txBody>
@@ -3677,7 +3683,7 @@
                 </a:solidFill>
                 <a:latin typeface="Calibri"/>
               </a:rPr>
-              <a:t>–   Y nada en el lenguaje impide que nombres tenga diez elementos y edades solo nueve: la consistencia depende de que todos los programadores se acuerden de mantenerla.</a:t>
+              <a:t>–   En Programacion I el estudiante trabajo con programacion estructurada: los datos por un lado y las funciones por otro.</a:t>
             </a:r>
           </a:p>
           <a:p>
@@ -3693,7 +3699,7 @@
                 </a:solidFill>
                 <a:latin typeface="Calibri"/>
               </a:rPr>
-              <a:t>–   La programacion orientada a objetos propone una unidad distinta: un tipo llamado Mascota que reune en un mismo lugar el estado, que son los datos de la mascota, y el comportamiento, que son las operaciones que se le pueden hacer.</a:t>
+              <a:t>–   Para registrar mascotas en la clinica se declaraban arreglos paralelos: String[] nombres, String[] especies, int[] edades, y la mascota numero cinco era la casilla cinco de los tres arreglos al mismo tiempo.</a:t>
             </a:r>
           </a:p>
           <a:p>
@@ -3709,7 +3715,23 @@
                 </a:solidFill>
                 <a:latin typeface="Calibri"/>
               </a:rPr>
-              <a:t>–   La ganancia no es estetica: agregar un dato pasa a ser una linea en un solo archivo, y la responsabilidad de mantener la consistencia queda dentro del tipo y no repartida en la cabeza del equipo.</a:t>
+              <a:t>–   Agregar un dato nuevo, por ejemplo si la mascota esta activa, obliga a abrir todas las funciones que reciben esos arreglos y agregarles un parametro.</a:t>
+            </a:r>
+          </a:p>
+          <a:p>
+            <a:pPr>
+              <a:spcAft>
+                <a:spcPts val="800"/>
+              </a:spcAft>
+            </a:pPr>
+            <a:r>
+              <a:rPr sz="2000" b="0" i="0">
+                <a:solidFill>
+                  <a:srgbClr val="333333"/>
+                </a:solidFill>
+                <a:latin typeface="Calibri"/>
+              </a:rPr>
+              <a:t>–   Y nada en el lenguaje impide que nombres tenga diez elementos y edades solo nueve: la consistencia depende de que todos los programadores se acuerden de mantenerla.</a:t>
             </a:r>
           </a:p>
         </p:txBody>
@@ -3890,7 +3912,7 @@
                 </a:solidFill>
                 <a:latin typeface="Calibri"/>
               </a:rPr>
-              <a:t>Ahora el punto que decide el semestre, y por eso va temprano: que es un... (1/2)</a:t>
+              <a:t>En Programacion I el estudiante trabajo con programacion estructurada:... (2/2)</a:t>
             </a:r>
           </a:p>
         </p:txBody>
@@ -3929,7 +3951,7 @@
                 </a:solidFill>
                 <a:latin typeface="Calibri"/>
               </a:rPr>
-              <a:t>–   Ahora el punto que decide el semestre, y por eso va temprano: que es un objeto en la memoria.</a:t>
+              <a:t>–   La programacion orientada a objetos propone una unidad distinta: un tipo llamado Mascota que reune en un mismo lugar el estado, que son los datos de la mascota, y el comportamiento, que son las operaciones que se le pueden hacer.</a:t>
             </a:r>
           </a:p>
           <a:p>
@@ -3945,55 +3967,7 @@
                 </a:solidFill>
                 <a:latin typeface="Calibri"/>
               </a:rPr>
-              <a:t>–   En Java una variable local vive en la pila, una zona pequena y ordenada asociada al metodo que se esta ejecutando, mientras que el objeto creado con new vive en el monton, una zona grande donde el programa reserva espacio a medida que lo necesita.</a:t>
-            </a:r>
-          </a:p>
-          <a:p>
-            <a:pPr>
-              <a:spcAft>
-                <a:spcPts val="800"/>
-              </a:spcAft>
-            </a:pPr>
-            <a:r>
-              <a:rPr sz="2000" b="0" i="0">
-                <a:solidFill>
-                  <a:srgbClr val="333333"/>
-                </a:solidFill>
-                <a:latin typeface="Calibri"/>
-              </a:rPr>
-              <a:t>–   La consecuencia es que la variable no guarda el objeto: guarda una referencia, que es un valor que indica donde esta el objeto.</a:t>
-            </a:r>
-          </a:p>
-          <a:p>
-            <a:pPr>
-              <a:spcAft>
-                <a:spcPts val="800"/>
-              </a:spcAft>
-            </a:pPr>
-            <a:r>
-              <a:rPr sz="2000" b="0" i="0">
-                <a:solidFill>
-                  <a:srgbClr val="333333"/>
-                </a:solidFill>
-                <a:latin typeface="Calibri"/>
-              </a:rPr>
-              <a:t>–   La imagen que funciona en clase es que la variable es el control remoto y el objeto es el televisor: se pueden tener dos controles del mismo televisor, y apretar el boton en cualquiera de los dos cambia el mismo aparato.</a:t>
-            </a:r>
-          </a:p>
-          <a:p>
-            <a:pPr>
-              <a:spcAft>
-                <a:spcPts val="800"/>
-              </a:spcAft>
-            </a:pPr>
-            <a:r>
-              <a:rPr sz="2000" b="0" i="0">
-                <a:solidFill>
-                  <a:srgbClr val="333333"/>
-                </a:solidFill>
-                <a:latin typeface="Calibri"/>
-              </a:rPr>
-              <a:t>–   Escrito en el tablero: Mascota a = new Mascota("Luna", "Canino", 3); despues Mascota b = a; despues b.setEdad(4); y finalmente System.out.println(a.getEdad()) imprime 4, aunque nadie toco la variable a.</a:t>
+              <a:t>–   La ganancia no es estetica: agregar un dato pasa a ser una linea en un solo archivo, y la responsabilidad de mantener la consistencia queda dentro del tipo y no repartida en la cabeza del equipo.</a:t>
             </a:r>
           </a:p>
         </p:txBody>
@@ -4174,7 +4148,7 @@
                 </a:solidFill>
                 <a:latin typeface="Calibri"/>
               </a:rPr>
-              <a:t>Ahora el punto que decide el semestre, y por eso va temprano: que es un... (2/2)</a:t>
+              <a:t>Ahora el punto que decide el semestre, y por eso va temprano: que es un... (1/2)</a:t>
             </a:r>
           </a:p>
         </p:txBody>
@@ -4213,7 +4187,7 @@
                 </a:solidFill>
                 <a:latin typeface="Calibri"/>
               </a:rPr>
-              <a:t>–   No hay dos mascotas, hay una con dos nombres.</a:t>
+              <a:t>–   Ahora el punto que decide el semestre, y por eso va temprano: que es un objeto en la memoria.</a:t>
             </a:r>
           </a:p>
           <a:p>
@@ -4229,7 +4203,7 @@
                 </a:solidFill>
                 <a:latin typeface="Calibri"/>
               </a:rPr>
-              <a:t>–   El contraste hay que hacerlo en el mismo tablero con tipos primitivos: int x = 3; int y = x; y = 5; y x sigue valiendo 3, porque ahi si se copio el valor.</a:t>
+              <a:t>–   La consecuencia es que la variable no guarda el objeto: guarda una referencia, que es un valor que indica donde esta el objeto.</a:t>
             </a:r>
           </a:p>
           <a:p>
@@ -4245,7 +4219,7 @@
                 </a:solidFill>
                 <a:latin typeface="Calibri"/>
               </a:rPr>
-              <a:t>–   Java tiene exactamente ocho tipos primitivos (byte, short, int, long, float, double, char y boolean) y esa es regla dura del lenguaje: todo lo demas, incluido String, se maneja por referencia.</a:t>
+              <a:t>–   La imagen que funciona en clase es que la variable es el control remoto y el objeto es el televisor: se pueden tener dos controles del mismo televisor, y apretar el boton en cualquiera de los dos cambia el mismo aparato.</a:t>
             </a:r>
           </a:p>
           <a:p>
@@ -4261,7 +4235,7 @@
                 </a:solidFill>
                 <a:latin typeface="Calibri"/>
               </a:rPr>
-              <a:t>–   De aqui se deriva un tercer hecho que conviene decir hoy aunque se practique despues: cuando se pasa un objeto a un metodo, el metodo puede modificar el objeto y quien llamo vera el cambio</a:t>
+              <a:t>–   Escrito en el tablero: Mascota a =; despues Mascota b = a; despues b.setEdad(4); y finalmente imprime 4, aunque nadie toco la variable a.</a:t>
             </a:r>
           </a:p>
           <a:p>
@@ -4277,7 +4251,7 @@
                 </a:solidFill>
                 <a:latin typeface="Calibri"/>
               </a:rPr>
-              <a:t>–   Pero si el metodo reasigna su parametro con un new, la variable de afuera no se enteran de nada.</a:t>
+              <a:t>–   El contraste hay que hacerlo en el mismo tablero con tipos primitivos: int x = 3; int y = x; y = 5; y x sigue valiendo 3, porque ahi si se copio el valor.</a:t>
             </a:r>
           </a:p>
         </p:txBody>
@@ -4458,7 +4432,7 @@
                 </a:solidFill>
                 <a:latin typeface="Calibri"/>
               </a:rPr>
-              <a:t>De lo anterior sale la pregunta que aparece sin falta en las primeras... (1/2)</a:t>
+              <a:t>Ahora el punto que decide el semestre, y por eso va temprano: que es un... (2/2)</a:t>
             </a:r>
           </a:p>
         </p:txBody>
@@ -4497,7 +4471,7 @@
                 </a:solidFill>
                 <a:latin typeface="Calibri"/>
               </a:rPr>
-              <a:t>–   De lo anterior sale la pregunta que aparece sin falta en las primeras semanas: por que mascota1 == mascota2 dice que son distintas si tienen los mismos datos.</a:t>
+              <a:t>–   Java tiene exactamente ocho tipos primitivos (byte, short, int, long, float, double, char y boolean) y esa es regla dura del lenguaje: todo lo demas, incluido String, se maneja por referencia.</a:t>
             </a:r>
           </a:p>
           <a:p>
@@ -4513,7 +4487,7 @@
                 </a:solidFill>
                 <a:latin typeface="Calibri"/>
               </a:rPr>
-              <a:t>–   La respuesta es exacta y hay que darla asi: el operador == compara referencias, es decir pregunta si las dos variables apuntan al mismo objeto, no si los objetos se parecen.</a:t>
+              <a:t>–   De aqui se deriva un tercer hecho que conviene decir hoy aunque se practique despues: cuando se pasa un objeto a un metodo, el metodo puede modificar el objeto y quien llamo vera el cambio</a:t>
             </a:r>
           </a:p>
           <a:p>
@@ -4529,39 +4503,7 @@
                 </a:solidFill>
                 <a:latin typeface="Calibri"/>
               </a:rPr>
-              <a:t>–   Dos objetos Mascota creados con new a partir de la misma linea de un archivo CSV son dos televisores identicos en fabrica y en habitaciones distintas: == devuelve false y esta bien, porque no son el mismo.</a:t>
-            </a:r>
-          </a:p>
-          <a:p>
-            <a:pPr>
-              <a:spcAft>
-                <a:spcPts val="800"/>
-              </a:spcAft>
-            </a:pPr>
-            <a:r>
-              <a:rPr sz="2000" b="0" i="0">
-                <a:solidFill>
-                  <a:srgbClr val="333333"/>
-                </a:solidFill>
-                <a:latin typeface="Calibri"/>
-              </a:rPr>
-              <a:t>–   Para comparar contenido existe el metodo equals, con una trampa que hay que enunciar: el equals que toda clase hereda de Object hace exactamente lo mismo que ==, asi que mientras usted no lo sobrescriba, equals tampoco compara contenido.</a:t>
-            </a:r>
-          </a:p>
-          <a:p>
-            <a:pPr>
-              <a:spcAft>
-                <a:spcPts val="800"/>
-              </a:spcAft>
-            </a:pPr>
-            <a:r>
-              <a:rPr sz="2000" b="0" i="0">
-                <a:solidFill>
-                  <a:srgbClr val="333333"/>
-                </a:solidFill>
-                <a:latin typeface="Calibri"/>
-              </a:rPr>
-              <a:t>–   Sobrescribirlo significa escribirlo en Mascota para que dos mascotas sean iguales cuando su identificador sea igual.</a:t>
+              <a:t>–   Pero si el metodo reasigna su parametro con un new, la variable de afuera no se enteran de nada.</a:t>
             </a:r>
           </a:p>
         </p:txBody>
@@ -4742,21 +4684,141 @@
                 </a:solidFill>
                 <a:latin typeface="Calibri"/>
               </a:rPr>
-              <a:t>De lo anterior sale la pregunta que aparece sin falta en las primeras... (2/2)</a:t>
-            </a:r>
-          </a:p>
-        </p:txBody>
-      </p:sp>
-      <p:sp>
-        <p:nvSpPr>
-          <p:cNvPr id="5" name="TextBox 4"/>
+              <a:t>Ahora el punto que decide el semestre, y por... — sintaxis</a:t>
+            </a:r>
+          </a:p>
+        </p:txBody>
+      </p:sp>
+      <p:sp>
+        <p:nvSpPr>
+          <p:cNvPr id="5" name="Rounded Rectangle 4"/>
+          <p:cNvSpPr/>
+          <p:nvPr/>
+        </p:nvSpPr>
+        <p:spPr>
+          <a:xfrm>
+            <a:off x="457200" y="1261872"/>
+            <a:ext cx="11277295" cy="5093208"/>
+          </a:xfrm>
+          <a:prstGeom prst="roundRect">
+            <a:avLst>
+              <a:gd name="adj" fmla="val 12000"/>
+            </a:avLst>
+          </a:prstGeom>
+          <a:solidFill>
+            <a:srgbClr val="1E2A38"/>
+          </a:solidFill>
+          <a:ln>
+            <a:noFill/>
+          </a:ln>
+        </p:spPr>
+        <p:style>
+          <a:lnRef idx="1">
+            <a:schemeClr val="accent1"/>
+          </a:lnRef>
+          <a:fillRef idx="3">
+            <a:schemeClr val="accent1"/>
+          </a:fillRef>
+          <a:effectRef idx="2">
+            <a:schemeClr val="accent1"/>
+          </a:effectRef>
+          <a:fontRef idx="minor">
+            <a:schemeClr val="lt1"/>
+          </a:fontRef>
+        </p:style>
+        <p:txBody>
+          <a:bodyPr rtlCol="0" anchor="ctr"/>
+          <a:lstStyle/>
+          <a:p>
+            <a:pPr algn="ctr"/>
+          </a:p>
+        </p:txBody>
+      </p:sp>
+      <p:sp>
+        <p:nvSpPr>
+          <p:cNvPr id="6" name="Rectangle 5"/>
+          <p:cNvSpPr/>
+          <p:nvPr/>
+        </p:nvSpPr>
+        <p:spPr>
+          <a:xfrm>
+            <a:off x="457200" y="1261872"/>
+            <a:ext cx="11277295" cy="320040"/>
+          </a:xfrm>
+          <a:prstGeom prst="rect">
+            <a:avLst/>
+          </a:prstGeom>
+          <a:solidFill>
+            <a:srgbClr val="095292"/>
+          </a:solidFill>
+          <a:ln>
+            <a:noFill/>
+          </a:ln>
+        </p:spPr>
+        <p:style>
+          <a:lnRef idx="1">
+            <a:schemeClr val="accent1"/>
+          </a:lnRef>
+          <a:fillRef idx="3">
+            <a:schemeClr val="accent1"/>
+          </a:fillRef>
+          <a:effectRef idx="2">
+            <a:schemeClr val="accent1"/>
+          </a:effectRef>
+          <a:fontRef idx="minor">
+            <a:schemeClr val="lt1"/>
+          </a:fontRef>
+        </p:style>
+        <p:txBody>
+          <a:bodyPr rtlCol="0" anchor="ctr"/>
+          <a:lstStyle/>
+          <a:p>
+            <a:pPr algn="ctr"/>
+          </a:p>
+        </p:txBody>
+      </p:sp>
+      <p:sp>
+        <p:nvSpPr>
+          <p:cNvPr id="7" name="TextBox 6"/>
           <p:cNvSpPr txBox="1"/>
           <p:nvPr/>
         </p:nvSpPr>
         <p:spPr>
           <a:xfrm>
-            <a:off x="457200" y="1170432"/>
-            <a:ext cx="11277295" cy="5230368"/>
+            <a:off x="685800" y="1307592"/>
+            <a:ext cx="10820095" cy="256032"/>
+          </a:xfrm>
+          <a:prstGeom prst="rect">
+            <a:avLst/>
+          </a:prstGeom>
+          <a:noFill/>
+        </p:spPr>
+        <p:txBody>
+          <a:bodyPr wrap="square" anchor="ctr"/>
+          <a:lstStyle/>
+          <a:p>
+            <a:r>
+              <a:rPr sz="1000" b="1" i="0">
+                <a:solidFill>
+                  <a:srgbClr val="269CCB"/>
+                </a:solidFill>
+                <a:latin typeface="Calibri"/>
+              </a:rPr>
+              <a:t>● ● ●</a:t>
+            </a:r>
+          </a:p>
+        </p:txBody>
+      </p:sp>
+      <p:sp>
+        <p:nvSpPr>
+          <p:cNvPr id="8" name="TextBox 7"/>
+          <p:cNvSpPr txBox="1"/>
+          <p:nvPr/>
+        </p:nvSpPr>
+        <p:spPr>
+          <a:xfrm>
+            <a:off x="777240" y="1719072"/>
+            <a:ext cx="10637215" cy="4453128"/>
           </a:xfrm>
           <a:prstGeom prst="rect">
             <a:avLst/>
@@ -4771,72 +4833,56 @@
           <a:p>
             <a:pPr>
               <a:spcAft>
-                <a:spcPts val="800"/>
+                <a:spcPts val="400"/>
               </a:spcAft>
             </a:pPr>
             <a:r>
-              <a:rPr sz="2000" b="0" i="0">
-                <a:solidFill>
-                  <a:srgbClr val="333333"/>
-                </a:solidFill>
-                <a:latin typeface="Calibri"/>
-              </a:rPr>
-              <a:t>–   Y viene una regla del lenguaje que no es opcional: si sobrescribe equals debe sobrescribir tambien hashCode, porque las estructuras que se veran en la Clase 4, HashMap y HashSet, ubican los objetos usando hashCode antes de compararlos</a:t>
+              <a:rPr sz="1400" b="0" i="0">
+                <a:solidFill>
+                  <a:srgbClr val="FFFFFF"/>
+                </a:solidFill>
+                <a:latin typeface="Calibri"/>
+              </a:rPr>
+              <a:t>new Mascota("Luna", "Canino", 3)</a:t>
             </a:r>
           </a:p>
           <a:p>
             <a:pPr>
               <a:spcAft>
-                <a:spcPts val="800"/>
+                <a:spcPts val="400"/>
               </a:spcAft>
             </a:pPr>
             <a:r>
-              <a:rPr sz="2000" b="0" i="0">
-                <a:solidFill>
-                  <a:srgbClr val="333333"/>
-                </a:solidFill>
-                <a:latin typeface="Calibri"/>
-              </a:rPr>
-              <a:t>–   Y dos objetos iguales que devuelven codigos distintos terminan guardados como si fueran diferentes.</a:t>
+              <a:rPr sz="1400" b="0" i="0">
+                <a:solidFill>
+                  <a:srgbClr val="FFFFFF"/>
+                </a:solidFill>
+                <a:latin typeface="Calibri"/>
+              </a:rPr>
+              <a:t/>
             </a:r>
           </a:p>
           <a:p>
             <a:pPr>
               <a:spcAft>
-                <a:spcPts val="800"/>
+                <a:spcPts val="400"/>
               </a:spcAft>
             </a:pPr>
             <a:r>
-              <a:rPr sz="2000" b="0" i="0">
-                <a:solidFill>
-                  <a:srgbClr val="333333"/>
-                </a:solidFill>
-                <a:latin typeface="Calibri"/>
-              </a:rPr>
-              <a:t>–   Un ultimo detalle que produce mucha confusion: con cadenas de texto escritas literalmente en el codigo, == a veces devuelve true porque Java reutiliza los literales identicos en una zona comun, pero new String("Luna") == "Luna" devuelve false.</a:t>
-            </a:r>
-          </a:p>
-          <a:p>
-            <a:pPr>
-              <a:spcAft>
-                <a:spcPts val="800"/>
-              </a:spcAft>
-            </a:pPr>
-            <a:r>
-              <a:rPr sz="2000" b="0" i="0">
-                <a:solidFill>
-                  <a:srgbClr val="333333"/>
-                </a:solidFill>
-                <a:latin typeface="Calibri"/>
-              </a:rPr>
-              <a:t>–   Por eso la regla practica del curso es sin excepciones: con objetos nunca se usa ==, se usa equals; == se reserva para primitivos y para preguntar si algo es null.</a:t>
-            </a:r>
-          </a:p>
-        </p:txBody>
-      </p:sp>
-      <p:sp>
-        <p:nvSpPr>
-          <p:cNvPr id="6" name="TextBox 5"/>
+              <a:rPr sz="1400" b="0" i="0">
+                <a:solidFill>
+                  <a:srgbClr val="FFFFFF"/>
+                </a:solidFill>
+                <a:latin typeface="Calibri"/>
+              </a:rPr>
+              <a:t>System.out.println(a.getEdad())</a:t>
+            </a:r>
+          </a:p>
+        </p:txBody>
+      </p:sp>
+      <p:sp>
+        <p:nvSpPr>
+          <p:cNvPr id="9" name="TextBox 8"/>
           <p:cNvSpPr txBox="1"/>
           <p:nvPr/>
         </p:nvSpPr>
@@ -5010,7 +5056,7 @@
                 </a:solidFill>
                 <a:latin typeface="Calibri"/>
               </a:rPr>
-              <a:t>Recien ahora tiene sentido la analogia clasica (1/2)</a:t>
+              <a:t>De lo anterior sale la pregunta que aparece sin falta en las primeras... (1/2)</a:t>
             </a:r>
           </a:p>
         </p:txBody>
@@ -5049,7 +5095,7 @@
                 </a:solidFill>
                 <a:latin typeface="Calibri"/>
               </a:rPr>
-              <a:t>–   Recien ahora tiene sentido la analogia clasica.</a:t>
+              <a:t>–   De lo anterior sale la pregunta que aparece sin falta en las primeras semanas: por que mascota1 == mascota2 dice que son distintas si tienen los mismos datos.</a:t>
             </a:r>
           </a:p>
           <a:p>
@@ -5065,7 +5111,7 @@
                 </a:solidFill>
                 <a:latin typeface="Calibri"/>
               </a:rPr>
-              <a:t>–   La clase es el molde y el objeto es la pieza fabricada con ese molde; el acto de fabricar se llama instanciar y se hace con new, y por eso objeto e instancia son sinonimos.</a:t>
+              <a:t>–   Dos objetos Mascota creados con new a partir de la misma linea de un archivo CSV son dos televisores identicos en fabrica y en habitaciones distintas: == devuelve false y esta bien, porque no son el mismo.</a:t>
             </a:r>
           </a:p>
           <a:p>
@@ -5081,71 +5127,7 @@
                 </a:solidFill>
                 <a:latin typeface="Calibri"/>
               </a:rPr>
-              <a:t>–   Mascota es la clase: declara que toda mascota tiene nombre, especie y edad.</a:t>
-            </a:r>
-          </a:p>
-          <a:p>
-            <a:pPr>
-              <a:spcAft>
-                <a:spcPts val="800"/>
-              </a:spcAft>
-            </a:pPr>
-            <a:r>
-              <a:rPr sz="2000" b="0" i="0">
-                <a:solidFill>
-                  <a:srgbClr val="333333"/>
-                </a:solidFill>
-                <a:latin typeface="Calibri"/>
-              </a:rPr>
-              <a:t>–   La mascota con nombre Luna, especie Canino y edad 3 es una instancia.</a:t>
-            </a:r>
-          </a:p>
-          <a:p>
-            <a:pPr>
-              <a:spcAft>
-                <a:spcPts val="800"/>
-              </a:spcAft>
-            </a:pPr>
-            <a:r>
-              <a:rPr sz="2000" b="0" i="0">
-                <a:solidFill>
-                  <a:srgbClr val="333333"/>
-                </a:solidFill>
-                <a:latin typeface="Calibri"/>
-              </a:rPr>
-              <a:t>–   La analogia es util pero tiene tres limites que hay que decir en voz alta, porque el estudiante que se queda solo con la analogia la estira mal.</a:t>
-            </a:r>
-          </a:p>
-          <a:p>
-            <a:pPr>
-              <a:spcAft>
-                <a:spcPts val="800"/>
-              </a:spcAft>
-            </a:pPr>
-            <a:r>
-              <a:rPr sz="2000" b="0" i="0">
-                <a:solidFill>
-                  <a:srgbClr val="333333"/>
-                </a:solidFill>
-                <a:latin typeface="Calibri"/>
-              </a:rPr>
-              <a:t>–   Primero, un molde fisico no sabe cuantas piezas produjo, y una clase tampoco lleva por si sola la lista de sus objetos: si VetCare necesita saber cuantas mascotas se han creado, alguien tiene que programar ese conteo.</a:t>
-            </a:r>
-          </a:p>
-          <a:p>
-            <a:pPr>
-              <a:spcAft>
-                <a:spcPts val="800"/>
-              </a:spcAft>
-            </a:pPr>
-            <a:r>
-              <a:rPr sz="2000" b="0" i="0">
-                <a:solidFill>
-                  <a:srgbClr val="333333"/>
-                </a:solidFill>
-                <a:latin typeface="Calibri"/>
-              </a:rPr>
-              <a:t>–   Segundo, la clase no define solo la forma, define tambien el comportamiento: un plano de casa no cocina, mientras que Mascota si sabe calcular si esta al dia con sus vacunas.</a:t>
+              <a:t>–   Para comparar contenido existe el metodo equals, con una trampa que hay que enunciar: el equals que toda clase hereda de Object hace exactamente lo mismo que ==, asi que mientras usted no lo sobrescriba, equals tampoco compara contenido.</a:t>
             </a:r>
           </a:p>
         </p:txBody>
@@ -5326,7 +5308,7 @@
                 </a:solidFill>
                 <a:latin typeface="Calibri"/>
               </a:rPr>
-              <a:t>Recien ahora tiene sentido la analogia clasica (2/2)</a:t>
+              <a:t>De lo anterior sale la pregunta que aparece sin falta en las primeras... (2/2)</a:t>
             </a:r>
           </a:p>
         </p:txBody>
@@ -5365,7 +5347,7 @@
                 </a:solidFill>
                 <a:latin typeface="Calibri"/>
               </a:rPr>
-              <a:t>–   Tercero, existen miembros que pertenecen a la clase y no a cada objeto, y se marcan con la palabra static: un static int totalMascotas existe una sola vez aunque haya mil mascotas, y se lee como Mascota.totalMascotas y no como luna.totalMascotas.</a:t>
+              <a:t>–   Y viene una regla del lenguaje que no es opcional: si sobrescribe equals debe sobrescribir tambien hashCode, porque las estructuras que se veran en la Clase 4, HashMap y HashSet, ubican los objetos usando hashCode antes de compararlos</a:t>
             </a:r>
           </a:p>
           <a:p>
@@ -5381,7 +5363,7 @@
                 </a:solidFill>
                 <a:latin typeface="Calibri"/>
               </a:rPr>
-              <a:t>–   En VetCare el uso legitimo de hoy es generar el siguiente identificador con un contador compartido.</a:t>
+              <a:t>–   Y dos objetos iguales que devuelven codigos distintos terminan guardados como si fueran diferentes.</a:t>
             </a:r>
           </a:p>
           <a:p>
@@ -5397,23 +5379,7 @@
                 </a:solidFill>
                 <a:latin typeface="Calibri"/>
               </a:rPr>
-              <a:t>–   Y conviene una advertencia que ahorra dolores: static es la puerta de regreso a la programacion estructurada</a:t>
-            </a:r>
-          </a:p>
-          <a:p>
-            <a:pPr>
-              <a:spcAft>
-                <a:spcPts val="800"/>
-              </a:spcAft>
-            </a:pPr>
-            <a:r>
-              <a:rPr sz="2000" b="0" i="0">
-                <a:solidFill>
-                  <a:srgbClr val="333333"/>
-                </a:solidFill>
-                <a:latin typeface="Calibri"/>
-              </a:rPr>
-              <a:t>–   Porque una clase llena de metodos static es un archivo de funciones con otro nombre; en la Clase 7 static reaparece con criterio al estudiar Singleton.</a:t>
+              <a:t>–   Un ultimo detalle que produce mucha confusion: con cadenas de texto escritas literalmente en el codigo, == a veces devuelve true porque Java reutiliza los literales identicos en una zona comun, pero new String("Luna") == "Luna" devuelve false.</a:t>
             </a:r>
           </a:p>
         </p:txBody>
@@ -5594,7 +5560,7 @@
                 </a:solidFill>
                 <a:latin typeface="Calibri"/>
               </a:rPr>
-              <a:t>El encapsulamiento se ensena mal cuando se presenta como la orden de... (1/2)</a:t>
+              <a:t>Recien ahora tiene sentido la analogia clasica (1/2)</a:t>
             </a:r>
           </a:p>
         </p:txBody>
@@ -5633,7 +5599,7 @@
                 </a:solidFill>
                 <a:latin typeface="Calibri"/>
               </a:rPr>
-              <a:t>–   El encapsulamiento se ensena mal cuando se presenta como la orden de poner private y generar getters.</a:t>
+              <a:t>–   La clase es el molde y el objeto es la pieza fabricada con ese molde; el acto de fabricar se llama instanciar y se hace con new, y por eso objeto e instancia son sinonimos.</a:t>
             </a:r>
           </a:p>
           <a:p>
@@ -5649,7 +5615,7 @@
                 </a:solidFill>
                 <a:latin typeface="Calibri"/>
               </a:rPr>
-              <a:t>–   Se ensena bien cuando se muestra el problema que resuelve, y en VetCare el problema tiene nombre.</a:t>
+              <a:t>–   Mascota es la clase: declara que toda mascota tiene nombre, especie y edad.</a:t>
             </a:r>
           </a:p>
           <a:p>
@@ -5665,7 +5631,7 @@
                 </a:solidFill>
                 <a:latin typeface="Calibri"/>
               </a:rPr>
-              <a:t>–   La clinica tiene una regla del proyecto: una mascota inactiva no puede agendar cita, y toda inactivacion debe quedar con motivo y fecha.</a:t>
+              <a:t>–   La mascota con nombre Luna, especie Canino y edad 3 es una instancia.</a:t>
             </a:r>
           </a:p>
           <a:p>
@@ -5681,7 +5647,7 @@
                 </a:solidFill>
                 <a:latin typeface="Calibri"/>
               </a:rPr>
-              <a:t>–   Suponga que el atributo se declaro como public boolean activa.</a:t>
+              <a:t>–   La analogia es util pero tiene tres limites que hay que decir en voz alta, porque el estudiante que se queda solo con la analogia la estira mal.</a:t>
             </a:r>
           </a:p>
           <a:p>
@@ -5697,7 +5663,7 @@
                 </a:solidFill>
                 <a:latin typeface="Calibri"/>
               </a:rPr>
-              <a:t>–   Entonces cualquier linea de cualquier archivo del sistema puede escribir luna.activa = false</a:t>
+              <a:t>–   Primero, un molde fisico no sabe cuantas piezas produjo, y una clase tampoco lleva por si sola la lista de sus objetos: si VetCare necesita saber cuantas mascotas se han creado, alguien tiene que programar ese conteo.</a:t>
             </a:r>
           </a:p>
           <a:p>
@@ -5713,39 +5679,7 @@
                 </a:solidFill>
                 <a:latin typeface="Calibri"/>
               </a:rPr>
-              <a:t>–   Y la afirmacion toda mascota inactiva tiene motivo y fecha de inactivacion, que es lo que llamamos una invariante porque debe ser verdadera durante toda la vida del objeto, se rompe sin dejar rastro.</a:t>
-            </a:r>
-          </a:p>
-          <a:p>
-            <a:pPr>
-              <a:spcAft>
-                <a:spcPts val="800"/>
-              </a:spcAft>
-            </a:pPr>
-            <a:r>
-              <a:rPr sz="2000" b="0" i="0">
-                <a:solidFill>
-                  <a:srgbClr val="333333"/>
-                </a:solidFill>
-                <a:latin typeface="Calibri"/>
-              </a:rPr>
-              <a:t>–   Peor todavia: para encontrar quien la rompio hay que revisar el proyecto completo, porque el compilador permite esa asignacion en cualquier parte.</a:t>
-            </a:r>
-          </a:p>
-          <a:p>
-            <a:pPr>
-              <a:spcAft>
-                <a:spcPts val="800"/>
-              </a:spcAft>
-            </a:pPr>
-            <a:r>
-              <a:rPr sz="2000" b="0" i="0">
-                <a:solidFill>
-                  <a:srgbClr val="333333"/>
-                </a:solidFill>
-                <a:latin typeface="Calibri"/>
-              </a:rPr>
-              <a:t>–   Si en cambio el atributo es private y la unica forma de apagarlo es el metodo inactivar(String motivo), que exige el motivo, guarda la fecha y deja registro, entonces existe un unico lugar en el mundo donde una mascota puede volverse inactiva.</a:t>
+              <a:t>–   Segundo, la clase no define solo la forma, define tambien el comportamiento: un plano de casa no cocina, mientras que Mascota si sabe calcular si esta al dia con sus vacunas.</a:t>
             </a:r>
           </a:p>
         </p:txBody>
@@ -5926,7 +5860,7 @@
                 </a:solidFill>
                 <a:latin typeface="Calibri"/>
               </a:rPr>
-              <a:t>El encapsulamiento se ensena mal cuando se presenta como la orden de... (2/2)</a:t>
+              <a:t>Recien ahora tiene sentido la analogia clasica (2/2)</a:t>
             </a:r>
           </a:p>
         </p:txBody>
@@ -5965,7 +5899,7 @@
                 </a:solidFill>
                 <a:latin typeface="Calibri"/>
               </a:rPr>
-              <a:t>–   Lo mismo pasa con la edad: luna.edad = -3 es aceptado por el compilador sin una queja, mientras que un setEdad que lanza IllegalArgumentException cuando el valor es negativo detiene el error en el instante en que se comete y no tres pantallas despues.</a:t>
+              <a:t>–   Tercero, existen miembros que pertenecen a la clase y no a cada objeto, y se marcan con la palabra static: un static int totalMascotas existe una sola vez aunque haya mil mascotas, y se lee como Mascota.totalMascotas y no como luna.totalMascotas.</a:t>
             </a:r>
           </a:p>
           <a:p>
@@ -5981,7 +5915,7 @@
                 </a:solidFill>
                 <a:latin typeface="Calibri"/>
               </a:rPr>
-              <a:t>–   Y aqui va la parte honesta que casi nunca se dice: usar el atajo del entorno de desarrollo para generar getters y setters de los quince campos no es encapsular.</a:t>
+              <a:t>–   En VetCare el uso legitimo de hoy es generar el siguiente identificador con un contador compartido.</a:t>
             </a:r>
           </a:p>
           <a:p>
@@ -5997,7 +5931,7 @@
                 </a:solidFill>
                 <a:latin typeface="Calibri"/>
               </a:rPr>
-              <a:t>–   Si existe un setActiva(boolean) publico, el campo sigue siendo publico con dos pasos extra.</a:t>
+              <a:t>–   Y conviene una advertencia que ahorra dolores: static es la puerta de regreso a la programacion estructurada</a:t>
             </a:r>
           </a:p>
           <a:p>
@@ -6013,55 +5947,7 @@
                 </a:solidFill>
                 <a:latin typeface="Calibri"/>
               </a:rPr>
-              <a:t>–   Encapsular es exponer operaciones del dominio, inactivar, agendar, aplicarVacuna, y no casillas.</a:t>
-            </a:r>
-          </a:p>
-          <a:p>
-            <a:pPr>
-              <a:spcAft>
-                <a:spcPts val="800"/>
-              </a:spcAft>
-            </a:pPr>
-            <a:r>
-              <a:rPr sz="2000" b="0" i="0">
-                <a:solidFill>
-                  <a:srgbClr val="333333"/>
-                </a:solidFill>
-                <a:latin typeface="Calibri"/>
-              </a:rPr>
-              <a:t>–   La pregunta del estudiante llega sola: si igual funciona con public, para que me complico.</a:t>
-            </a:r>
-          </a:p>
-          <a:p>
-            <a:pPr>
-              <a:spcAft>
-                <a:spcPts val="800"/>
-              </a:spcAft>
-            </a:pPr>
-            <a:r>
-              <a:rPr sz="2000" b="0" i="0">
-                <a:solidFill>
-                  <a:srgbClr val="333333"/>
-                </a:solidFill>
-                <a:latin typeface="Calibri"/>
-              </a:rPr>
-              <a:t>–   La respuesta concreta es que funciona hoy, con un archivo y con usted como unico autor</a:t>
-            </a:r>
-          </a:p>
-          <a:p>
-            <a:pPr>
-              <a:spcAft>
-                <a:spcPts val="800"/>
-              </a:spcAft>
-            </a:pPr>
-            <a:r>
-              <a:rPr sz="2000" b="0" i="0">
-                <a:solidFill>
-                  <a:srgbClr val="333333"/>
-                </a:solidFill>
-                <a:latin typeface="Calibri"/>
-              </a:rPr>
-              <a:t>–   En la Clase 12, integrando modulos de tres companeros, quien escriba la pantalla de facturacion pondra activa en false por comodidad y usted perdera una tarde buscando por que las citas desaparecieron.</a:t>
+              <a:t>–   Porque una clase llena de metodos static es un archivo de funciones con otro nombre; en la Clase 7 static reaparece con criterio al estudiar Singleton.</a:t>
             </a:r>
           </a:p>
         </p:txBody>
@@ -6242,7 +6128,7 @@
                 </a:solidFill>
                 <a:latin typeface="Calibri"/>
               </a:rPr>
-              <a:t>El constructor es la pieza que garantiza que el objeto nazca valido (1/2)</a:t>
+              <a:t>El encapsulamiento se ensena mal cuando se presenta como la orden de... (1/2)</a:t>
             </a:r>
           </a:p>
         </p:txBody>
@@ -6281,7 +6167,7 @@
                 </a:solidFill>
                 <a:latin typeface="Calibri"/>
               </a:rPr>
-              <a:t>–   El constructor es la pieza que garantiza que el objeto nazca valido.</a:t>
+              <a:t>–   La clinica tiene una regla del proyecto: una mascota inactiva no puede agendar cita, y toda inactivacion debe quedar con motivo y fecha.</a:t>
             </a:r>
           </a:p>
           <a:p>
@@ -6297,7 +6183,7 @@
                 </a:solidFill>
                 <a:latin typeface="Calibri"/>
               </a:rPr>
-              <a:t>–   Es un metodo especial que se llama igual que la clase, no declara tipo de retorno y se ejecuta una sola vez, en el momento de la creacion.</a:t>
+              <a:t>–   Suponga que el atributo se declaro como public boolean activa.</a:t>
             </a:r>
           </a:p>
           <a:p>
@@ -6313,7 +6199,7 @@
                 </a:solidFill>
                 <a:latin typeface="Calibri"/>
               </a:rPr>
-              <a:t>–   La instruccion new hace dos cosas: reserva la memoria en el monton y llama al constructor.</a:t>
+              <a:t>–   Entonces cualquier linea de cualquier archivo del sistema puede escribir luna.activa = false</a:t>
             </a:r>
           </a:p>
           <a:p>
@@ -6329,7 +6215,7 @@
                 </a:solidFill>
                 <a:latin typeface="Calibri"/>
               </a:rPr>
-              <a:t>–   Si la clase no declara ninguno, Java agrega uno sin parametros; en el instante en que usted escribe un constructor con parametros, el vacio desaparece</a:t>
+              <a:t>–   Y la afirmacion toda mascota inactiva tiene motivo y fecha de inactivacion, que es lo que llamamos una invariante porque debe ser verdadera durante toda la vida del objeto, se rompe sin dejar rastro.</a:t>
             </a:r>
           </a:p>
           <a:p>
@@ -6345,7 +6231,7 @@
                 </a:solidFill>
                 <a:latin typeface="Calibri"/>
               </a:rPr>
-              <a:t>–   Y ese es literalmente el primer error de compilacion del curso cuando alguien sigue escribiendo new Mascota() en otro archivo.</a:t>
+              <a:t>–   Peor todavia: para encontrar quien la rompio hay que revisar el proyecto completo, porque el compilador permite esa asignacion en cualquier parte.</a:t>
             </a:r>
           </a:p>
           <a:p>
@@ -6361,7 +6247,7 @@
                 </a:solidFill>
                 <a:latin typeface="Calibri"/>
               </a:rPr>
-              <a:t>–   La responsabilidad del constructor es la validacion: si el nombre llega null o vacio, lanza; si la edad llega negativa, lanza; y como consecuencia, en todo el programa no puede existir una Mascota sin nombre.</a:t>
+              <a:t>–   Si en cambio el atributo es private y la unica forma de apagarlo es el metodo inactivar(String motivo), que exige el motivo, guarda la fecha y deja registro, entonces existe un unico lugar en el mundo donde una mascota puede volverse inactiva.</a:t>
             </a:r>
           </a:p>
         </p:txBody>
@@ -6873,7 +6759,7 @@
                 </a:solidFill>
                 <a:latin typeface="Calibri"/>
               </a:rPr>
-              <a:t>El constructor es la pieza que garantiza que el objeto nazca valido (2/2)</a:t>
+              <a:t>El encapsulamiento se ensena mal cuando se presenta como la orden de... (2/2)</a:t>
             </a:r>
           </a:p>
         </p:txBody>
@@ -6912,7 +6798,7 @@
                 </a:solidFill>
                 <a:latin typeface="Calibri"/>
               </a:rPr>
-              <a:t>–   Eso elimina una familia entera de errores aguas abajo, porque nadie tendra que preguntarse mas adelante si el nombre podria estar vacio.</a:t>
+              <a:t>–   Lo mismo pasa con la edad: luna.edad = -3 es aceptado por el compilador sin una queja, mientras que un setEdad que lanza IllegalArgumentException cuando el valor es negativo detiene el error en el instante en que se comete y no tres pantallas despues.</a:t>
             </a:r>
           </a:p>
           <a:p>
@@ -6928,7 +6814,7 @@
                 </a:solidFill>
                 <a:latin typeface="Calibri"/>
               </a:rPr>
-              <a:t>–   El anti patron a evitar es el constructor vacio seguido de cinco setters: permite que exista un objeto a medio llenar que viajara hasta la interfaz grafica de la Clase 4 y fallara alli</a:t>
+              <a:t>–   Y aqui va la parte honesta que casi nunca se dice: usar el atajo del entorno de desarrollo para generar getters y setters de los quince campos no es encapsular.</a:t>
             </a:r>
           </a:p>
           <a:p>
@@ -6944,7 +6830,7 @@
                 </a:solidFill>
                 <a:latin typeface="Calibri"/>
               </a:rPr>
-              <a:t>–   A doscientas lineas del lugar donde en realidad se creo mal, que es el peor escenario de depuracion posible.</a:t>
+              <a:t>–   Si existe un setActiva(boolean) publico, el campo sigue siendo publico con dos pasos extra.</a:t>
             </a:r>
           </a:p>
           <a:p>
@@ -6960,7 +6846,23 @@
                 </a:solidFill>
                 <a:latin typeface="Calibri"/>
               </a:rPr>
-              <a:t>–   Como convencion, no como regla, si un constructor pide mas de cuatro o cinco parametros es senal de que la clase esta juntando cosas que no pertenecen al mismo concepto.</a:t>
+              <a:t>–   Encapsular es exponer operaciones del dominio, inactivar, agendar, aplicarVacuna, y no casillas.</a:t>
+            </a:r>
+          </a:p>
+          <a:p>
+            <a:pPr>
+              <a:spcAft>
+                <a:spcPts val="800"/>
+              </a:spcAft>
+            </a:pPr>
+            <a:r>
+              <a:rPr sz="2000" b="0" i="0">
+                <a:solidFill>
+                  <a:srgbClr val="333333"/>
+                </a:solidFill>
+                <a:latin typeface="Calibri"/>
+              </a:rPr>
+              <a:t>–   La pregunta del estudiante llega sola: si igual funciona con public, para que me complico.</a:t>
             </a:r>
           </a:p>
         </p:txBody>
@@ -7141,7 +7043,7 @@
                 </a:solidFill>
                 <a:latin typeface="Calibri"/>
               </a:rPr>
-              <a:t>Queda el error mas frecuente de Java, y hay que nombrarlo hoy porque su... (1/2)</a:t>
+              <a:t>El constructor es la pieza que garantiza que el objeto nazca valido (1/2)</a:t>
             </a:r>
           </a:p>
         </p:txBody>
@@ -7180,7 +7082,7 @@
                 </a:solidFill>
                 <a:latin typeface="Calibri"/>
               </a:rPr>
-              <a:t>–   Queda el error mas frecuente de Java, y hay que nombrarlo hoy porque su causa es todo lo anterior. null significa que la referencia no apunta a ningun objeto: es un control remoto sin televisor.</a:t>
+              <a:t>–   El constructor es la pieza que garantiza que el objeto nazca valido.</a:t>
             </a:r>
           </a:p>
           <a:p>
@@ -7196,7 +7098,7 @@
                 </a:solidFill>
                 <a:latin typeface="Calibri"/>
               </a:rPr>
-              <a:t>–   No es cero, no es cadena vacia y no es un objeto con los campos en blanco; es la ausencia de destino.</a:t>
+              <a:t>–   Es un metodo especial que se llama igual que la clase, no declara tipo de retorno y se ejecuta una sola vez, en el momento de la creacion.</a:t>
             </a:r>
           </a:p>
           <a:p>
@@ -7212,7 +7114,7 @@
                 </a:solidFill>
                 <a:latin typeface="Calibri"/>
               </a:rPr>
-              <a:t>–   NullPointerException es lo que ocurre cuando el programa intenta usar esa referencia, por ejemplo llamando un metodo o leyendo un campo.</a:t>
+              <a:t>–   La instruccion new hace dos cosas: reserva la memoria en el monton y llama al constructor.</a:t>
             </a:r>
           </a:p>
           <a:p>
@@ -7228,7 +7130,7 @@
                 </a:solidFill>
                 <a:latin typeface="Calibri"/>
               </a:rPr>
-              <a:t>–   Los tres casos que produciran esa excepcion en VetCare son predecibles: un metodo buscarMascota(id) que devuelve null cuando no encuentra nada y un llamador que hace m.getNombre() sin preguntar</a:t>
+              <a:t>–   Si la clase no declara ninguno, Java agrega uno sin parametros; en el instante en que usted escribe un constructor con parametros, el vacio desaparece</a:t>
             </a:r>
           </a:p>
           <a:p>
@@ -7244,7 +7146,7 @@
                 </a:solidFill>
                 <a:latin typeface="Calibri"/>
               </a:rPr>
-              <a:t>–   Una Cita cuya Mascota nunca se asigno; y una lista declarada pero no inicializada.</a:t>
+              <a:t>–   Y ese es literalmente el primer error de compilacion del curso cuando alguien sigue escribiendo new Mascota() en otro archivo.</a:t>
             </a:r>
           </a:p>
           <a:p>
@@ -7260,7 +7162,7 @@
                 </a:solidFill>
                 <a:latin typeface="Calibri"/>
               </a:rPr>
-              <a:t>–   Dato citable: Tony Hoare introdujo la referencia nula en 1965 y en una conferencia de 2009 la llamo publicamente su error de mil millones de dolares.</a:t>
+              <a:t>–   La responsabilidad del constructor es la validacion: si el nombre llega null o vacio, lanza; si la edad llega negativa, lanza; y como consecuencia, en todo el programa no puede existir una Mascota sin nombre.</a:t>
             </a:r>
           </a:p>
         </p:txBody>
@@ -7441,7 +7343,7 @@
                 </a:solidFill>
                 <a:latin typeface="Calibri"/>
               </a:rPr>
-              <a:t>Queda el error mas frecuente de Java, y hay que nombrarlo hoy porque su... (2/2)</a:t>
+              <a:t>El constructor es la pieza que garantiza que el objeto nazca valido (2/2)</a:t>
             </a:r>
           </a:p>
         </p:txBody>
@@ -7480,7 +7382,7 @@
                 </a:solidFill>
                 <a:latin typeface="Calibri"/>
               </a:rPr>
-              <a:t>–   Las encuestas y los reportes de errores en produccion la ubican de forma consistente como la excepcion mas frecuente en aplicaciones Java, y conviene presentarlo asi, como observacion de la industria y no como ley.</a:t>
+              <a:t>–   El anti patron a evitar es el constructor vacio seguido de cinco setters: permite que exista un objeto a medio llenar que viajara hasta la interfaz grafica de la Clase 4 y fallara alli</a:t>
             </a:r>
           </a:p>
           <a:p>
@@ -7496,7 +7398,7 @@
                 </a:solidFill>
                 <a:latin typeface="Calibri"/>
               </a:rPr>
-              <a:t>–   Las defensas, en orden de utilidad real: validar en el constructor para que no nazcan objetos incompletos; nunca devolver null en un metodo que devuelve una coleccion, sino una lista vacia</a:t>
+              <a:t>–   A doscientas lineas del lugar donde en realidad se creo mal, que es el peor escenario de depuracion posible.</a:t>
             </a:r>
           </a:p>
           <a:p>
@@ -7512,39 +7414,7 @@
                 </a:solidFill>
                 <a:latin typeface="Calibri"/>
               </a:rPr>
-              <a:t>–   Usar Optional cuando la ausencia es un resultado legitimo de una busqueda; y leer el mensaje de la excepcion, porque desde Java 14 el mensaje indica cual variable exacta era null.</a:t>
-            </a:r>
-          </a:p>
-          <a:p>
-            <a:pPr>
-              <a:spcAft>
-                <a:spcPts val="800"/>
-              </a:spcAft>
-            </a:pPr>
-            <a:r>
-              <a:rPr sz="2000" b="0" i="0">
-                <a:solidFill>
-                  <a:srgbClr val="333333"/>
-                </a:solidFill>
-                <a:latin typeface="Calibri"/>
-              </a:rPr>
-              <a:t>–   Pregunta previsible: entonces le pongo cadena vacia y listo.</a:t>
-            </a:r>
-          </a:p>
-          <a:p>
-            <a:pPr>
-              <a:spcAft>
-                <a:spcPts val="800"/>
-              </a:spcAft>
-            </a:pPr>
-            <a:r>
-              <a:rPr sz="2000" b="0" i="0">
-                <a:solidFill>
-                  <a:srgbClr val="333333"/>
-                </a:solidFill>
-                <a:latin typeface="Calibri"/>
-              </a:rPr>
-              <a:t>–   No: eso no resuelve el problema, lo esconde, y cambia una excepcion clara por un dato falso guardado en el archivo de la Clase 9.</a:t>
+              <a:t>–   Como convencion, no como regla, si un constructor pide mas de cuatro o cinco parametros es senal de que la clase esta juntando cosas que no pertenecen al mismo concepto.</a:t>
             </a:r>
           </a:p>
         </p:txBody>
@@ -7725,7 +7595,7 @@
                 </a:solidFill>
                 <a:latin typeface="Calibri"/>
               </a:rPr>
-              <a:t>El entorno cierra la clase y tiene dos reglas duras que producen el... (1/2)</a:t>
+              <a:t>Queda el error mas frecuente de Java, y hay que nombrarlo hoy porque su... (1/2)</a:t>
             </a:r>
           </a:p>
         </p:txBody>
@@ -7764,7 +7634,7 @@
                 </a:solidFill>
                 <a:latin typeface="Calibri"/>
               </a:rPr>
-              <a:t>–   El entorno cierra la clase y tiene dos reglas duras que producen el noventa por ciento de los tropiezos del primer dia.</a:t>
+              <a:t>–   Queda el error mas frecuente de Java, y hay que nombrarlo hoy porque su causa es todo lo anterior. null significa que la referencia no apunta a ningun objeto: es un control remoto sin televisor.</a:t>
             </a:r>
           </a:p>
           <a:p>
@@ -7780,7 +7650,7 @@
                 </a:solidFill>
                 <a:latin typeface="Calibri"/>
               </a:rPr>
-              <a:t>–   El JDK debe estar instalado en una version de soporte extendido, 17 o 21, y se verifica con java -version en la consola, no confiando en la pantalla del instalador</a:t>
+              <a:t>–   No es cero, no es cadena vacia y no es un objeto con los campos en blanco; es la ausencia de destino.</a:t>
             </a:r>
           </a:p>
           <a:p>
@@ -7796,7 +7666,7 @@
                 </a:solidFill>
                 <a:latin typeface="Calibri"/>
               </a:rPr>
-              <a:t>–   Y un archivo.java contiene una clase publica cuyo nombre coincide caracter por caracter con el nombre del archivo, mayusculas incluidas, de modo que la clase Mascota vive en Mascota.java y en ningun otro lugar.</a:t>
+              <a:t>–   NullPointerException es lo que ocurre cuando el programa intenta usar esa referencia, por ejemplo llamando un metodo o leyendo un campo.</a:t>
             </a:r>
           </a:p>
           <a:p>
@@ -7812,7 +7682,7 @@
                 </a:solidFill>
                 <a:latin typeface="Calibri"/>
               </a:rPr>
-              <a:t>–   El comando javac compila a un archivo.class con bytecode y java lo ejecuta; el entorno de desarrollo hace ambas cosas por dentro, y verlo una vez en consola evita que el estudiante crea que Java es el boton verde del IDE.</a:t>
+              <a:t>–   Los tres casos que produciran esa excepcion en VetCare son predecibles: un metodo buscarMascota(id) que devuelve null cuando no encuentra nada y un llamador que hace m.getNombre() sin preguntar</a:t>
             </a:r>
           </a:p>
           <a:p>
@@ -7828,7 +7698,7 @@
                 </a:solidFill>
                 <a:latin typeface="Calibri"/>
               </a:rPr>
-              <a:t>–   El amarre con la Clase 2 conviene decirlo explicito al cerrar: hoy quedaron mascota1, mascota2 y mascota3 como variables sueltas, y eso no escala a una clinica con cuatrocientos pacientes, asi que la proxima clase entra ArrayList de Mascota.</a:t>
+              <a:t>–   Una Cita cuya Mascota nunca se asigno; y una lista declarada pero no inicializada.</a:t>
             </a:r>
           </a:p>
         </p:txBody>
@@ -8009,7 +7879,7 @@
                 </a:solidFill>
                 <a:latin typeface="Calibri"/>
               </a:rPr>
-              <a:t>El entorno cierra la clase y tiene dos reglas duras que producen el... (2/2)</a:t>
+              <a:t>Queda el error mas frecuente de Java, y hay que nombrarlo hoy porque su... (2/2)</a:t>
             </a:r>
           </a:p>
         </p:txBody>
@@ -8048,7 +7918,7 @@
                 </a:solidFill>
                 <a:latin typeface="Calibri"/>
               </a:rPr>
-              <a:t>–   Todo lo de hoy se vuelve indispensable ahi: la lista guarda referencias y no copias, de modo que modificar el objeto cambia lo que la lista muestra</a:t>
+              <a:t>–   Dato citable: Tony Hoare introdujo la referencia nula en 1965 y en una conferencia de 2009 la llamo publicamente su error de mil millones de dolares.</a:t>
             </a:r>
           </a:p>
           <a:p>
@@ -8064,7 +7934,7 @@
                 </a:solidFill>
                 <a:latin typeface="Calibri"/>
               </a:rPr>
-              <a:t>–   Los metodos contains e indexOf usan equals, asi que sin sobrescribirlo la busqueda por identificador fallara sin dar error</a:t>
+              <a:t>–   Las defensas, en orden de utilidad real: validar en el constructor para que no nazcan objetos incompletos; nunca devolver null en un metodo que devuelve una coleccion, sino una lista vacia</a:t>
             </a:r>
           </a:p>
           <a:p>
@@ -8080,7 +7950,7 @@
                 </a:solidFill>
                 <a:latin typeface="Calibri"/>
               </a:rPr>
-              <a:t>–   Y en la Clase 9, al guardar en CSV, hara falta un constructor que reciba una linea de texto y valide, es decir el mismo constructor de hoy.</a:t>
+              <a:t>–   Usar Optional cuando la ausencia es un resultado legitimo de una busqueda; y leer el mensaje de la excepcion, porque desde Java 14 el mensaje indica cual variable exacta era null.</a:t>
             </a:r>
           </a:p>
           <a:p>
@@ -8096,7 +7966,23 @@
                 </a:solidFill>
                 <a:latin typeface="Calibri"/>
               </a:rPr>
-              <a:t>–   La Clase 13 formalizara con try-catch lo que hoy se hizo a mano lanzando IllegalArgumentException.</a:t>
+              <a:t>–   Pregunta previsible: entonces le pongo cadena vacia y listo.</a:t>
+            </a:r>
+          </a:p>
+          <a:p>
+            <a:pPr>
+              <a:spcAft>
+                <a:spcPts val="800"/>
+              </a:spcAft>
+            </a:pPr>
+            <a:r>
+              <a:rPr sz="2000" b="0" i="0">
+                <a:solidFill>
+                  <a:srgbClr val="333333"/>
+                </a:solidFill>
+                <a:latin typeface="Calibri"/>
+              </a:rPr>
+              <a:t>–   No: eso no resuelve el problema, lo esconde, y cambia una excepcion clara por un dato falso guardado en el archivo de la Clase 9.</a:t>
             </a:r>
           </a:p>
         </p:txBody>
@@ -8277,141 +8163,21 @@
                 </a:solidFill>
                 <a:latin typeface="Calibri"/>
               </a:rPr>
-              <a:t>La primera clase de VetCare</a:t>
-            </a:r>
-          </a:p>
-        </p:txBody>
-      </p:sp>
-      <p:sp>
-        <p:nvSpPr>
-          <p:cNvPr id="5" name="Rounded Rectangle 4"/>
-          <p:cNvSpPr/>
-          <p:nvPr/>
-        </p:nvSpPr>
-        <p:spPr>
-          <a:xfrm>
-            <a:off x="457200" y="1261872"/>
-            <a:ext cx="11277295" cy="4773168"/>
-          </a:xfrm>
-          <a:prstGeom prst="roundRect">
-            <a:avLst>
-              <a:gd name="adj" fmla="val 12000"/>
-            </a:avLst>
-          </a:prstGeom>
-          <a:solidFill>
-            <a:srgbClr val="1E2A38"/>
-          </a:solidFill>
-          <a:ln>
-            <a:noFill/>
-          </a:ln>
-        </p:spPr>
-        <p:style>
-          <a:lnRef idx="1">
-            <a:schemeClr val="accent1"/>
-          </a:lnRef>
-          <a:fillRef idx="3">
-            <a:schemeClr val="accent1"/>
-          </a:fillRef>
-          <a:effectRef idx="2">
-            <a:schemeClr val="accent1"/>
-          </a:effectRef>
-          <a:fontRef idx="minor">
-            <a:schemeClr val="lt1"/>
-          </a:fontRef>
-        </p:style>
-        <p:txBody>
-          <a:bodyPr rtlCol="0" anchor="ctr"/>
-          <a:lstStyle/>
-          <a:p>
-            <a:pPr algn="ctr"/>
-          </a:p>
-        </p:txBody>
-      </p:sp>
-      <p:sp>
-        <p:nvSpPr>
-          <p:cNvPr id="6" name="Rectangle 5"/>
-          <p:cNvSpPr/>
-          <p:nvPr/>
-        </p:nvSpPr>
-        <p:spPr>
-          <a:xfrm>
-            <a:off x="457200" y="1261872"/>
-            <a:ext cx="11277295" cy="320040"/>
-          </a:xfrm>
-          <a:prstGeom prst="rect">
-            <a:avLst/>
-          </a:prstGeom>
-          <a:solidFill>
-            <a:srgbClr val="095292"/>
-          </a:solidFill>
-          <a:ln>
-            <a:noFill/>
-          </a:ln>
-        </p:spPr>
-        <p:style>
-          <a:lnRef idx="1">
-            <a:schemeClr val="accent1"/>
-          </a:lnRef>
-          <a:fillRef idx="3">
-            <a:schemeClr val="accent1"/>
-          </a:fillRef>
-          <a:effectRef idx="2">
-            <a:schemeClr val="accent1"/>
-          </a:effectRef>
-          <a:fontRef idx="minor">
-            <a:schemeClr val="lt1"/>
-          </a:fontRef>
-        </p:style>
-        <p:txBody>
-          <a:bodyPr rtlCol="0" anchor="ctr"/>
-          <a:lstStyle/>
-          <a:p>
-            <a:pPr algn="ctr"/>
-          </a:p>
-        </p:txBody>
-      </p:sp>
-      <p:sp>
-        <p:nvSpPr>
-          <p:cNvPr id="7" name="TextBox 6"/>
+              <a:t>El entorno cierra la clase y tiene dos reglas duras que producen el... (1/2)</a:t>
+            </a:r>
+          </a:p>
+        </p:txBody>
+      </p:sp>
+      <p:sp>
+        <p:nvSpPr>
+          <p:cNvPr id="5" name="TextBox 4"/>
           <p:cNvSpPr txBox="1"/>
           <p:nvPr/>
         </p:nvSpPr>
         <p:spPr>
           <a:xfrm>
-            <a:off x="685800" y="1307592"/>
-            <a:ext cx="10820095" cy="256032"/>
-          </a:xfrm>
-          <a:prstGeom prst="rect">
-            <a:avLst/>
-          </a:prstGeom>
-          <a:noFill/>
-        </p:spPr>
-        <p:txBody>
-          <a:bodyPr wrap="square" anchor="ctr"/>
-          <a:lstStyle/>
-          <a:p>
-            <a:r>
-              <a:rPr sz="1000" b="1" i="0">
-                <a:solidFill>
-                  <a:srgbClr val="269CCB"/>
-                </a:solidFill>
-                <a:latin typeface="Calibri"/>
-              </a:rPr>
-              <a:t>● ● ●</a:t>
-            </a:r>
-          </a:p>
-        </p:txBody>
-      </p:sp>
-      <p:sp>
-        <p:nvSpPr>
-          <p:cNvPr id="8" name="TextBox 7"/>
-          <p:cNvSpPr txBox="1"/>
-          <p:nvPr/>
-        </p:nvSpPr>
-        <p:spPr>
-          <a:xfrm>
-            <a:off x="777240" y="1719072"/>
-            <a:ext cx="10637215" cy="4133087"/>
+            <a:off x="457200" y="1170432"/>
+            <a:ext cx="11277295" cy="5230368"/>
           </a:xfrm>
           <a:prstGeom prst="rect">
             <a:avLst/>
@@ -8426,299 +8192,72 @@
           <a:p>
             <a:pPr>
               <a:spcAft>
-                <a:spcPts val="371"/>
+                <a:spcPts val="800"/>
               </a:spcAft>
             </a:pPr>
             <a:r>
-              <a:rPr sz="1300" b="0" i="0">
-                <a:solidFill>
-                  <a:srgbClr val="FFFFFF"/>
-                </a:solidFill>
-                <a:latin typeface="Calibri"/>
-              </a:rPr>
-              <a:t>public class Mascota {</a:t>
+              <a:rPr sz="2000" b="0" i="0">
+                <a:solidFill>
+                  <a:srgbClr val="333333"/>
+                </a:solidFill>
+                <a:latin typeface="Calibri"/>
+              </a:rPr>
+              <a:t>–   El JDK debe estar instalado en una version de soporte extendido, 17 o 21, y se verifica con java -version en la consola, no confiando en la pantalla del instalador</a:t>
             </a:r>
           </a:p>
           <a:p>
             <a:pPr>
               <a:spcAft>
-                <a:spcPts val="371"/>
+                <a:spcPts val="800"/>
               </a:spcAft>
             </a:pPr>
             <a:r>
-              <a:rPr sz="1300" b="0" i="0">
-                <a:solidFill>
-                  <a:srgbClr val="FFFFFF"/>
-                </a:solidFill>
-                <a:latin typeface="Calibri"/>
-              </a:rPr>
-              <a:t>    private String id;          // private = nadie lo toca desde afuera</a:t>
+              <a:rPr sz="2000" b="0" i="0">
+                <a:solidFill>
+                  <a:srgbClr val="333333"/>
+                </a:solidFill>
+                <a:latin typeface="Calibri"/>
+              </a:rPr>
+              <a:t>–   Y un archivo.java contiene una clase publica cuyo nombre coincide caracter por caracter con el nombre del archivo, mayusculas incluidas, de modo que la clase Mascota vive en Mascota.java y en ningun otro lugar.</a:t>
             </a:r>
           </a:p>
           <a:p>
             <a:pPr>
               <a:spcAft>
-                <a:spcPts val="371"/>
+                <a:spcPts val="800"/>
               </a:spcAft>
             </a:pPr>
             <a:r>
-              <a:rPr sz="1300" b="0" i="0">
-                <a:solidFill>
-                  <a:srgbClr val="FFFFFF"/>
-                </a:solidFill>
-                <a:latin typeface="Calibri"/>
-              </a:rPr>
-              <a:t>    private String nombre;</a:t>
+              <a:rPr sz="2000" b="0" i="0">
+                <a:solidFill>
+                  <a:srgbClr val="333333"/>
+                </a:solidFill>
+                <a:latin typeface="Calibri"/>
+              </a:rPr>
+              <a:t>–   El comando javac compila a un archivo.class con bytecode y java lo ejecuta; el entorno de desarrollo hace ambas cosas por dentro, y verlo una vez en consola evita que el estudiante crea que Java es el boton verde del IDE.</a:t>
             </a:r>
           </a:p>
           <a:p>
             <a:pPr>
               <a:spcAft>
-                <a:spcPts val="371"/>
+                <a:spcPts val="800"/>
               </a:spcAft>
             </a:pPr>
             <a:r>
-              <a:rPr sz="1300" b="0" i="0">
-                <a:solidFill>
-                  <a:srgbClr val="FFFFFF"/>
-                </a:solidFill>
-                <a:latin typeface="Calibri"/>
-              </a:rPr>
-              <a:t>    private String especie;</a:t>
-            </a:r>
-          </a:p>
-          <a:p>
-            <a:pPr>
-              <a:spcAft>
-                <a:spcPts val="371"/>
-              </a:spcAft>
-            </a:pPr>
-            <a:r>
-              <a:rPr sz="1300" b="0" i="0">
-                <a:solidFill>
-                  <a:srgbClr val="FFFFFF"/>
-                </a:solidFill>
-                <a:latin typeface="Calibri"/>
-              </a:rPr>
-              <a:t/>
-            </a:r>
-          </a:p>
-          <a:p>
-            <a:pPr>
-              <a:spcAft>
-                <a:spcPts val="371"/>
-              </a:spcAft>
-            </a:pPr>
-            <a:r>
-              <a:rPr sz="1300" b="0" i="0">
-                <a:solidFill>
-                  <a:srgbClr val="FFFFFF"/>
-                </a:solidFill>
-                <a:latin typeface="Calibri"/>
-              </a:rPr>
-              <a:t>    public Mascota(String id, String nombre, String especie) {</a:t>
-            </a:r>
-          </a:p>
-          <a:p>
-            <a:pPr>
-              <a:spcAft>
-                <a:spcPts val="371"/>
-              </a:spcAft>
-            </a:pPr>
-            <a:r>
-              <a:rPr sz="1300" b="0" i="0">
-                <a:solidFill>
-                  <a:srgbClr val="FFFFFF"/>
-                </a:solidFill>
-                <a:latin typeface="Calibri"/>
-              </a:rPr>
-              <a:t>        this.id = id;           // this. distingue atributo de parametro</a:t>
-            </a:r>
-          </a:p>
-          <a:p>
-            <a:pPr>
-              <a:spcAft>
-                <a:spcPts val="371"/>
-              </a:spcAft>
-            </a:pPr>
-            <a:r>
-              <a:rPr sz="1300" b="0" i="0">
-                <a:solidFill>
-                  <a:srgbClr val="FFFFFF"/>
-                </a:solidFill>
-                <a:latin typeface="Calibri"/>
-              </a:rPr>
-              <a:t>        this.nombre = nombre;</a:t>
-            </a:r>
-          </a:p>
-          <a:p>
-            <a:pPr>
-              <a:spcAft>
-                <a:spcPts val="371"/>
-              </a:spcAft>
-            </a:pPr>
-            <a:r>
-              <a:rPr sz="1300" b="0" i="0">
-                <a:solidFill>
-                  <a:srgbClr val="FFFFFF"/>
-                </a:solidFill>
-                <a:latin typeface="Calibri"/>
-              </a:rPr>
-              <a:t>        this.especie = especie;</a:t>
-            </a:r>
-          </a:p>
-          <a:p>
-            <a:pPr>
-              <a:spcAft>
-                <a:spcPts val="371"/>
-              </a:spcAft>
-            </a:pPr>
-            <a:r>
-              <a:rPr sz="1300" b="0" i="0">
-                <a:solidFill>
-                  <a:srgbClr val="FFFFFF"/>
-                </a:solidFill>
-                <a:latin typeface="Calibri"/>
-              </a:rPr>
-              <a:t>    }</a:t>
-            </a:r>
-          </a:p>
-          <a:p>
-            <a:pPr>
-              <a:spcAft>
-                <a:spcPts val="371"/>
-              </a:spcAft>
-            </a:pPr>
-            <a:r>
-              <a:rPr sz="1300" b="0" i="0">
-                <a:solidFill>
-                  <a:srgbClr val="FFFFFF"/>
-                </a:solidFill>
-                <a:latin typeface="Calibri"/>
-              </a:rPr>
-              <a:t/>
-            </a:r>
-          </a:p>
-          <a:p>
-            <a:pPr>
-              <a:spcAft>
-                <a:spcPts val="371"/>
-              </a:spcAft>
-            </a:pPr>
-            <a:r>
-              <a:rPr sz="1300" b="0" i="0">
-                <a:solidFill>
-                  <a:srgbClr val="FFFFFF"/>
-                </a:solidFill>
-                <a:latin typeface="Calibri"/>
-              </a:rPr>
-              <a:t>    @Override</a:t>
-            </a:r>
-          </a:p>
-          <a:p>
-            <a:pPr>
-              <a:spcAft>
-                <a:spcPts val="371"/>
-              </a:spcAft>
-            </a:pPr>
-            <a:r>
-              <a:rPr sz="1300" b="0" i="0">
-                <a:solidFill>
-                  <a:srgbClr val="FFFFFF"/>
-                </a:solidFill>
-                <a:latin typeface="Calibri"/>
-              </a:rPr>
-              <a:t>    public String toString() {  // sin esto se imprime vetcare.Mascota@6d06d69c</a:t>
-            </a:r>
-          </a:p>
-          <a:p>
-            <a:pPr>
-              <a:spcAft>
-                <a:spcPts val="371"/>
-              </a:spcAft>
-            </a:pPr>
-            <a:r>
-              <a:rPr sz="1300" b="0" i="0">
-                <a:solidFill>
-                  <a:srgbClr val="FFFFFF"/>
-                </a:solidFill>
-                <a:latin typeface="Calibri"/>
-              </a:rPr>
-              <a:t>        return id + " - " + nombre + " (" + especie + ")";</a:t>
-            </a:r>
-          </a:p>
-          <a:p>
-            <a:pPr>
-              <a:spcAft>
-                <a:spcPts val="371"/>
-              </a:spcAft>
-            </a:pPr>
-            <a:r>
-              <a:rPr sz="1300" b="0" i="0">
-                <a:solidFill>
-                  <a:srgbClr val="FFFFFF"/>
-                </a:solidFill>
-                <a:latin typeface="Calibri"/>
-              </a:rPr>
-              <a:t>    }</a:t>
-            </a:r>
-          </a:p>
-          <a:p>
-            <a:pPr>
-              <a:spcAft>
-                <a:spcPts val="371"/>
-              </a:spcAft>
-            </a:pPr>
-            <a:r>
-              <a:rPr sz="1300" b="0" i="0">
-                <a:solidFill>
-                  <a:srgbClr val="FFFFFF"/>
-                </a:solidFill>
-                <a:latin typeface="Calibri"/>
-              </a:rPr>
-              <a:t>}</a:t>
-            </a:r>
-          </a:p>
-        </p:txBody>
-      </p:sp>
-      <p:sp>
-        <p:nvSpPr>
-          <p:cNvPr id="9" name="TextBox 8"/>
-          <p:cNvSpPr txBox="1"/>
-          <p:nvPr/>
-        </p:nvSpPr>
-        <p:spPr>
-          <a:xfrm>
-            <a:off x="457200" y="6080760"/>
-            <a:ext cx="11277295" cy="320040"/>
-          </a:xfrm>
-          <a:prstGeom prst="rect">
-            <a:avLst/>
-          </a:prstGeom>
-          <a:noFill/>
-        </p:spPr>
-        <p:txBody>
-          <a:bodyPr wrap="square">
-            <a:spAutoFit/>
-          </a:bodyPr>
-          <a:lstStyle/>
-          <a:p>
-            <a:pPr algn="ctr"/>
-            <a:r>
-              <a:rPr sz="1200" b="0" i="1">
-                <a:solidFill>
-                  <a:srgbClr val="666666"/>
-                </a:solidFill>
-                <a:latin typeface="Calibri"/>
-              </a:rPr>
-              <a:t>La clase es el molde; cada new Mascota(...) fabrica un objeto distinto con ese molde.</a:t>
-            </a:r>
-          </a:p>
-        </p:txBody>
-      </p:sp>
-      <p:sp>
-        <p:nvSpPr>
-          <p:cNvPr id="10" name="TextBox 9"/>
+              <a:rPr sz="2000" b="0" i="0">
+                <a:solidFill>
+                  <a:srgbClr val="333333"/>
+                </a:solidFill>
+                <a:latin typeface="Calibri"/>
+              </a:rPr>
+              <a:t>–   El amarre con la Clase 2 conviene decirlo explicito al cerrar: hoy quedaron mascota1, mascota2 y mascota3 como variables sueltas, y eso no escala a una clinica con cuatrocientos pacientes, asi que la proxima clase entra ArrayList de Mascota.</a:t>
+            </a:r>
+          </a:p>
+        </p:txBody>
+      </p:sp>
+      <p:sp>
+        <p:nvSpPr>
+          <p:cNvPr id="6" name="TextBox 5"/>
           <p:cNvSpPr txBox="1"/>
           <p:nvPr/>
         </p:nvSpPr>
@@ -8892,7 +8431,7 @@
                 </a:solidFill>
                 <a:latin typeface="Calibri"/>
               </a:rPr>
-              <a:t>Demo del dia</a:t>
+              <a:t>El entorno cierra la clase y tiene dos reglas duras que producen el... (2/2)</a:t>
             </a:r>
           </a:p>
         </p:txBody>
@@ -8931,25 +8470,7 @@
                 </a:solidFill>
                 <a:latin typeface="Calibri"/>
               </a:rPr>
-              <a:t>–   </a:t>
-            </a:r>
-            <a:r>
-              <a:rPr sz="2000" b="1" i="0">
-                <a:solidFill>
-                  <a:srgbClr val="333333"/>
-                </a:solidFill>
-                <a:latin typeface="Calibri"/>
-              </a:rPr>
-              <a:t>Herramienta:</a:t>
-            </a:r>
-            <a:r>
-              <a:rPr sz="2000" b="0" i="0">
-                <a:solidFill>
-                  <a:srgbClr val="333333"/>
-                </a:solidFill>
-                <a:latin typeface="Calibri"/>
-              </a:rPr>
-              <a:t> Visual Studio Code (Java)</a:t>
+              <a:t>–   Todo lo de hoy se vuelve indispensable ahi: la lista guarda referencias y no copias, de modo que modificar el objeto cambia lo que la lista muestra</a:t>
             </a:r>
           </a:p>
           <a:p>
@@ -8965,25 +8486,7 @@
                 </a:solidFill>
                 <a:latin typeface="Calibri"/>
               </a:rPr>
-              <a:t>–   </a:t>
-            </a:r>
-            <a:r>
-              <a:rPr sz="2000" b="1" i="0">
-                <a:solidFill>
-                  <a:srgbClr val="333333"/>
-                </a:solidFill>
-                <a:latin typeface="Calibri"/>
-              </a:rPr>
-              <a:t>Demo:</a:t>
-            </a:r>
-            <a:r>
-              <a:rPr sz="2000" b="0" i="0">
-                <a:solidFill>
-                  <a:srgbClr val="333333"/>
-                </a:solidFill>
-                <a:latin typeface="Calibri"/>
-              </a:rPr>
-              <a:t> Escribir en vivo la clase Mascota y un main que instancia dos mascotas con datos distintos, mostrando que salen del mismo molde</a:t>
+              <a:t>–   Los metodos contains e indexOf usan equals, asi que sin sobrescribirlo la busqueda por identificador fallara sin dar error</a:t>
             </a:r>
           </a:p>
           <a:p>
@@ -8999,7 +8502,23 @@
                 </a:solidFill>
                 <a:latin typeface="Calibri"/>
               </a:rPr>
-              <a:t>–   Mismo dominio VetCare — no otro ejemplo.</a:t>
+              <a:t>–   Y en la Clase 9, al guardar en CSV, hara falta un constructor que reciba una linea de texto y valide, es decir el mismo constructor de hoy.</a:t>
+            </a:r>
+          </a:p>
+          <a:p>
+            <a:pPr>
+              <a:spcAft>
+                <a:spcPts val="800"/>
+              </a:spcAft>
+            </a:pPr>
+            <a:r>
+              <a:rPr sz="2000" b="0" i="0">
+                <a:solidFill>
+                  <a:srgbClr val="333333"/>
+                </a:solidFill>
+                <a:latin typeface="Calibri"/>
+              </a:rPr>
+              <a:t>–   La Clase 13 formalizara con try-catch lo que hoy se hizo a mano lanzando IllegalArgumentException.</a:t>
             </a:r>
           </a:p>
         </p:txBody>
@@ -9180,21 +8699,141 @@
                 </a:solidFill>
                 <a:latin typeface="Calibri"/>
               </a:rPr>
-              <a:t>Taller PI — por que importa</a:t>
-            </a:r>
-          </a:p>
-        </p:txBody>
-      </p:sp>
-      <p:sp>
-        <p:nvSpPr>
-          <p:cNvPr id="5" name="TextBox 4"/>
+              <a:t>Mascota.java — class Mascota</a:t>
+            </a:r>
+          </a:p>
+        </p:txBody>
+      </p:sp>
+      <p:sp>
+        <p:nvSpPr>
+          <p:cNvPr id="5" name="Rounded Rectangle 4"/>
+          <p:cNvSpPr/>
+          <p:nvPr/>
+        </p:nvSpPr>
+        <p:spPr>
+          <a:xfrm>
+            <a:off x="457200" y="1261872"/>
+            <a:ext cx="11277295" cy="5093208"/>
+          </a:xfrm>
+          <a:prstGeom prst="roundRect">
+            <a:avLst>
+              <a:gd name="adj" fmla="val 12000"/>
+            </a:avLst>
+          </a:prstGeom>
+          <a:solidFill>
+            <a:srgbClr val="1E2A38"/>
+          </a:solidFill>
+          <a:ln>
+            <a:noFill/>
+          </a:ln>
+        </p:spPr>
+        <p:style>
+          <a:lnRef idx="1">
+            <a:schemeClr val="accent1"/>
+          </a:lnRef>
+          <a:fillRef idx="3">
+            <a:schemeClr val="accent1"/>
+          </a:fillRef>
+          <a:effectRef idx="2">
+            <a:schemeClr val="accent1"/>
+          </a:effectRef>
+          <a:fontRef idx="minor">
+            <a:schemeClr val="lt1"/>
+          </a:fontRef>
+        </p:style>
+        <p:txBody>
+          <a:bodyPr rtlCol="0" anchor="ctr"/>
+          <a:lstStyle/>
+          <a:p>
+            <a:pPr algn="ctr"/>
+          </a:p>
+        </p:txBody>
+      </p:sp>
+      <p:sp>
+        <p:nvSpPr>
+          <p:cNvPr id="6" name="Rectangle 5"/>
+          <p:cNvSpPr/>
+          <p:nvPr/>
+        </p:nvSpPr>
+        <p:spPr>
+          <a:xfrm>
+            <a:off x="457200" y="1261872"/>
+            <a:ext cx="11277295" cy="320040"/>
+          </a:xfrm>
+          <a:prstGeom prst="rect">
+            <a:avLst/>
+          </a:prstGeom>
+          <a:solidFill>
+            <a:srgbClr val="095292"/>
+          </a:solidFill>
+          <a:ln>
+            <a:noFill/>
+          </a:ln>
+        </p:spPr>
+        <p:style>
+          <a:lnRef idx="1">
+            <a:schemeClr val="accent1"/>
+          </a:lnRef>
+          <a:fillRef idx="3">
+            <a:schemeClr val="accent1"/>
+          </a:fillRef>
+          <a:effectRef idx="2">
+            <a:schemeClr val="accent1"/>
+          </a:effectRef>
+          <a:fontRef idx="minor">
+            <a:schemeClr val="lt1"/>
+          </a:fontRef>
+        </p:style>
+        <p:txBody>
+          <a:bodyPr rtlCol="0" anchor="ctr"/>
+          <a:lstStyle/>
+          <a:p>
+            <a:pPr algn="ctr"/>
+          </a:p>
+        </p:txBody>
+      </p:sp>
+      <p:sp>
+        <p:nvSpPr>
+          <p:cNvPr id="7" name="TextBox 6"/>
           <p:cNvSpPr txBox="1"/>
           <p:nvPr/>
         </p:nvSpPr>
         <p:spPr>
           <a:xfrm>
-            <a:off x="457200" y="1170432"/>
-            <a:ext cx="11277295" cy="5230368"/>
+            <a:off x="685800" y="1307592"/>
+            <a:ext cx="10820095" cy="256032"/>
+          </a:xfrm>
+          <a:prstGeom prst="rect">
+            <a:avLst/>
+          </a:prstGeom>
+          <a:noFill/>
+        </p:spPr>
+        <p:txBody>
+          <a:bodyPr wrap="square" anchor="ctr"/>
+          <a:lstStyle/>
+          <a:p>
+            <a:r>
+              <a:rPr sz="1000" b="1" i="0">
+                <a:solidFill>
+                  <a:srgbClr val="269CCB"/>
+                </a:solidFill>
+                <a:latin typeface="Calibri"/>
+              </a:rPr>
+              <a:t>● ● ●</a:t>
+            </a:r>
+          </a:p>
+        </p:txBody>
+      </p:sp>
+      <p:sp>
+        <p:nvSpPr>
+          <p:cNvPr id="8" name="TextBox 7"/>
+          <p:cNvSpPr txBox="1"/>
+          <p:nvPr/>
+        </p:nvSpPr>
+        <p:spPr>
+          <a:xfrm>
+            <a:off x="777240" y="1719072"/>
+            <a:ext cx="10637215" cy="4453128"/>
           </a:xfrm>
           <a:prstGeom prst="rect">
             <a:avLst/>
@@ -9209,74 +8848,120 @@
           <a:p>
             <a:pPr>
               <a:spcAft>
-                <a:spcPts val="800"/>
+                <a:spcPts val="400"/>
               </a:spcAft>
             </a:pPr>
             <a:r>
-              <a:rPr sz="2000" b="0" i="0">
-                <a:solidFill>
-                  <a:srgbClr val="333333"/>
-                </a:solidFill>
-                <a:latin typeface="Calibri"/>
-              </a:rPr>
-              <a:t>–   </a:t>
-            </a:r>
-            <a:r>
-              <a:rPr sz="2000" b="1" i="0">
-                <a:solidFill>
-                  <a:srgbClr val="333333"/>
-                </a:solidFill>
-                <a:latin typeface="Calibri"/>
-              </a:rPr>
-              <a:t>Por que importa al PI:</a:t>
-            </a:r>
-            <a:r>
-              <a:rPr sz="2000" b="0" i="0">
-                <a:solidFill>
-                  <a:srgbClr val="333333"/>
-                </a:solidFill>
-                <a:latin typeface="Calibri"/>
-              </a:rPr>
-              <a:t> la clase Mascota que escriba hoy es la semilla de todo VetCare; las clases siguientes se apoyan en ella.</a:t>
+              <a:rPr sz="1400" b="0" i="0">
+                <a:solidFill>
+                  <a:srgbClr val="FFFFFF"/>
+                </a:solidFill>
+                <a:latin typeface="Calibri"/>
+              </a:rPr>
+              <a:t>public class Mascota {</a:t>
             </a:r>
           </a:p>
           <a:p>
             <a:pPr>
               <a:spcAft>
-                <a:spcPts val="800"/>
+                <a:spcPts val="400"/>
               </a:spcAft>
             </a:pPr>
             <a:r>
-              <a:rPr sz="2000" b="0" i="0">
-                <a:solidFill>
-                  <a:srgbClr val="333333"/>
-                </a:solidFill>
-                <a:latin typeface="Calibri"/>
-              </a:rPr>
-              <a:t>–   Sin entorno funcionando no se puede avanzar en ninguna sesion posterior: por eso hoy se resuelve.</a:t>
+              <a:rPr sz="1400" b="0" i="0">
+                <a:solidFill>
+                  <a:srgbClr val="FFFFFF"/>
+                </a:solidFill>
+                <a:latin typeface="Calibri"/>
+              </a:rPr>
+              <a:t/>
             </a:r>
           </a:p>
           <a:p>
             <a:pPr>
               <a:spcAft>
-                <a:spcPts val="800"/>
+                <a:spcPts val="400"/>
               </a:spcAft>
             </a:pPr>
             <a:r>
-              <a:rPr sz="2000" b="0" i="0">
-                <a:solidFill>
-                  <a:srgbClr val="333333"/>
-                </a:solidFill>
-                <a:latin typeface="Calibri"/>
-              </a:rPr>
-              <a:t>–   El diagnostico de hoy no tiene nota: sirve para calibrar el ritmo de las proximas clases.</a:t>
-            </a:r>
-          </a:p>
-        </p:txBody>
-      </p:sp>
-      <p:sp>
-        <p:nvSpPr>
-          <p:cNvPr id="6" name="TextBox 5"/>
+              <a:rPr sz="1400" b="0" i="0">
+                <a:solidFill>
+                  <a:srgbClr val="FFFFFF"/>
+                </a:solidFill>
+                <a:latin typeface="Calibri"/>
+              </a:rPr>
+              <a:t>    private String id;</a:t>
+            </a:r>
+          </a:p>
+          <a:p>
+            <a:pPr>
+              <a:spcAft>
+                <a:spcPts val="400"/>
+              </a:spcAft>
+            </a:pPr>
+            <a:r>
+              <a:rPr sz="1400" b="0" i="0">
+                <a:solidFill>
+                  <a:srgbClr val="FFFFFF"/>
+                </a:solidFill>
+                <a:latin typeface="Calibri"/>
+              </a:rPr>
+              <a:t>    private String nombre;</a:t>
+            </a:r>
+          </a:p>
+          <a:p>
+            <a:pPr>
+              <a:spcAft>
+                <a:spcPts val="400"/>
+              </a:spcAft>
+            </a:pPr>
+            <a:r>
+              <a:rPr sz="1400" b="0" i="0">
+                <a:solidFill>
+                  <a:srgbClr val="FFFFFF"/>
+                </a:solidFill>
+                <a:latin typeface="Calibri"/>
+              </a:rPr>
+              <a:t>    private String especie;</a:t>
+            </a:r>
+          </a:p>
+          <a:p>
+            <a:pPr>
+              <a:spcAft>
+                <a:spcPts val="400"/>
+              </a:spcAft>
+            </a:pPr>
+            <a:r>
+              <a:rPr sz="1400" b="0" i="0">
+                <a:solidFill>
+                  <a:srgbClr val="FFFFFF"/>
+                </a:solidFill>
+                <a:latin typeface="Calibri"/>
+              </a:rPr>
+              <a:t>    private int edad;</a:t>
+            </a:r>
+          </a:p>
+          <a:p>
+            <a:pPr>
+              <a:spcAft>
+                <a:spcPts val="400"/>
+              </a:spcAft>
+            </a:pPr>
+            <a:r>
+              <a:rPr sz="1400" b="0" i="0">
+                <a:solidFill>
+                  <a:srgbClr val="FFFFFF"/>
+                </a:solidFill>
+                <a:latin typeface="Calibri"/>
+              </a:rPr>
+              <a:t/>
+            </a:r>
+          </a:p>
+        </p:txBody>
+      </p:sp>
+      <p:sp>
+        <p:nvSpPr>
+          <p:cNvPr id="9" name="TextBox 8"/>
           <p:cNvSpPr txBox="1"/>
           <p:nvPr/>
         </p:nvSpPr>
@@ -9450,21 +9135,141 @@
                 </a:solidFill>
                 <a:latin typeface="Calibri"/>
               </a:rPr>
-              <a:t>Taller PI — punto de partida</a:t>
-            </a:r>
-          </a:p>
-        </p:txBody>
-      </p:sp>
-      <p:sp>
-        <p:nvSpPr>
-          <p:cNvPr id="5" name="TextBox 4"/>
+              <a:t>Mascota.java — Mascota()</a:t>
+            </a:r>
+          </a:p>
+        </p:txBody>
+      </p:sp>
+      <p:sp>
+        <p:nvSpPr>
+          <p:cNvPr id="5" name="Rounded Rectangle 4"/>
+          <p:cNvSpPr/>
+          <p:nvPr/>
+        </p:nvSpPr>
+        <p:spPr>
+          <a:xfrm>
+            <a:off x="457200" y="1261872"/>
+            <a:ext cx="11277295" cy="5093208"/>
+          </a:xfrm>
+          <a:prstGeom prst="roundRect">
+            <a:avLst>
+              <a:gd name="adj" fmla="val 12000"/>
+            </a:avLst>
+          </a:prstGeom>
+          <a:solidFill>
+            <a:srgbClr val="1E2A38"/>
+          </a:solidFill>
+          <a:ln>
+            <a:noFill/>
+          </a:ln>
+        </p:spPr>
+        <p:style>
+          <a:lnRef idx="1">
+            <a:schemeClr val="accent1"/>
+          </a:lnRef>
+          <a:fillRef idx="3">
+            <a:schemeClr val="accent1"/>
+          </a:fillRef>
+          <a:effectRef idx="2">
+            <a:schemeClr val="accent1"/>
+          </a:effectRef>
+          <a:fontRef idx="minor">
+            <a:schemeClr val="lt1"/>
+          </a:fontRef>
+        </p:style>
+        <p:txBody>
+          <a:bodyPr rtlCol="0" anchor="ctr"/>
+          <a:lstStyle/>
+          <a:p>
+            <a:pPr algn="ctr"/>
+          </a:p>
+        </p:txBody>
+      </p:sp>
+      <p:sp>
+        <p:nvSpPr>
+          <p:cNvPr id="6" name="Rectangle 5"/>
+          <p:cNvSpPr/>
+          <p:nvPr/>
+        </p:nvSpPr>
+        <p:spPr>
+          <a:xfrm>
+            <a:off x="457200" y="1261872"/>
+            <a:ext cx="11277295" cy="320040"/>
+          </a:xfrm>
+          <a:prstGeom prst="rect">
+            <a:avLst/>
+          </a:prstGeom>
+          <a:solidFill>
+            <a:srgbClr val="095292"/>
+          </a:solidFill>
+          <a:ln>
+            <a:noFill/>
+          </a:ln>
+        </p:spPr>
+        <p:style>
+          <a:lnRef idx="1">
+            <a:schemeClr val="accent1"/>
+          </a:lnRef>
+          <a:fillRef idx="3">
+            <a:schemeClr val="accent1"/>
+          </a:fillRef>
+          <a:effectRef idx="2">
+            <a:schemeClr val="accent1"/>
+          </a:effectRef>
+          <a:fontRef idx="minor">
+            <a:schemeClr val="lt1"/>
+          </a:fontRef>
+        </p:style>
+        <p:txBody>
+          <a:bodyPr rtlCol="0" anchor="ctr"/>
+          <a:lstStyle/>
+          <a:p>
+            <a:pPr algn="ctr"/>
+          </a:p>
+        </p:txBody>
+      </p:sp>
+      <p:sp>
+        <p:nvSpPr>
+          <p:cNvPr id="7" name="TextBox 6"/>
           <p:cNvSpPr txBox="1"/>
           <p:nvPr/>
         </p:nvSpPr>
         <p:spPr>
           <a:xfrm>
-            <a:off x="457200" y="1170432"/>
-            <a:ext cx="11277295" cy="5230368"/>
+            <a:off x="685800" y="1307592"/>
+            <a:ext cx="10820095" cy="256032"/>
+          </a:xfrm>
+          <a:prstGeom prst="rect">
+            <a:avLst/>
+          </a:prstGeom>
+          <a:noFill/>
+        </p:spPr>
+        <p:txBody>
+          <a:bodyPr wrap="square" anchor="ctr"/>
+          <a:lstStyle/>
+          <a:p>
+            <a:r>
+              <a:rPr sz="1000" b="1" i="0">
+                <a:solidFill>
+                  <a:srgbClr val="269CCB"/>
+                </a:solidFill>
+                <a:latin typeface="Calibri"/>
+              </a:rPr>
+              <a:t>● ● ●</a:t>
+            </a:r>
+          </a:p>
+        </p:txBody>
+      </p:sp>
+      <p:sp>
+        <p:nvSpPr>
+          <p:cNvPr id="8" name="TextBox 7"/>
+          <p:cNvSpPr txBox="1"/>
+          <p:nvPr/>
+        </p:nvSpPr>
+        <p:spPr>
+          <a:xfrm>
+            <a:off x="777240" y="1719072"/>
+            <a:ext cx="10637215" cy="4453128"/>
           </a:xfrm>
           <a:prstGeom prst="rect">
             <a:avLst/>
@@ -9479,56 +9284,216 @@
           <a:p>
             <a:pPr>
               <a:spcAft>
-                <a:spcPts val="800"/>
+                <a:spcPts val="400"/>
               </a:spcAft>
             </a:pPr>
             <a:r>
-              <a:rPr sz="2000" b="0" i="0">
-                <a:solidFill>
-                  <a:srgbClr val="333333"/>
-                </a:solidFill>
-                <a:latin typeface="Calibri"/>
-              </a:rPr>
-              <a:t>–   Dominio: clinica veterinaria Huellitas, que hoy lleva toda su gestion en papel.</a:t>
+              <a:rPr sz="1400" b="0" i="0">
+                <a:solidFill>
+                  <a:srgbClr val="FFFFFF"/>
+                </a:solidFill>
+                <a:latin typeface="Calibri"/>
+              </a:rPr>
+              <a:t>    public Mascota(String id, String nombre, String especie, int edad) {</a:t>
             </a:r>
           </a:p>
           <a:p>
             <a:pPr>
               <a:spcAft>
-                <a:spcPts val="800"/>
+                <a:spcPts val="400"/>
               </a:spcAft>
             </a:pPr>
             <a:r>
-              <a:rPr sz="2000" b="0" i="0">
-                <a:solidFill>
-                  <a:srgbClr val="333333"/>
-                </a:solidFill>
-                <a:latin typeface="Calibri"/>
-              </a:rPr>
-              <a:t>–   Herramienta: VS Code con el Extension Pack for Java y el JDK 17+ instalado.</a:t>
+              <a:rPr sz="1400" b="0" i="0">
+                <a:solidFill>
+                  <a:srgbClr val="FFFFFF"/>
+                </a:solidFill>
+                <a:latin typeface="Calibri"/>
+              </a:rPr>
+              <a:t>        this.id = id;</a:t>
             </a:r>
           </a:p>
           <a:p>
             <a:pPr>
               <a:spcAft>
-                <a:spcPts val="800"/>
+                <a:spcPts val="400"/>
               </a:spcAft>
             </a:pPr>
             <a:r>
-              <a:rPr sz="2000" b="0" i="0">
-                <a:solidFill>
-                  <a:srgbClr val="333333"/>
-                </a:solidFill>
-                <a:latin typeface="Calibri"/>
-              </a:rPr>
-              <a:t>–   Se parte de cero: no hay codigo previo del proyecto.</a:t>
-            </a:r>
-          </a:p>
-        </p:txBody>
-      </p:sp>
-      <p:sp>
-        <p:nvSpPr>
-          <p:cNvPr id="6" name="TextBox 5"/>
+              <a:rPr sz="1400" b="0" i="0">
+                <a:solidFill>
+                  <a:srgbClr val="FFFFFF"/>
+                </a:solidFill>
+                <a:latin typeface="Calibri"/>
+              </a:rPr>
+              <a:t>        this.nombre = nombre;</a:t>
+            </a:r>
+          </a:p>
+          <a:p>
+            <a:pPr>
+              <a:spcAft>
+                <a:spcPts val="400"/>
+              </a:spcAft>
+            </a:pPr>
+            <a:r>
+              <a:rPr sz="1400" b="0" i="0">
+                <a:solidFill>
+                  <a:srgbClr val="FFFFFF"/>
+                </a:solidFill>
+                <a:latin typeface="Calibri"/>
+              </a:rPr>
+              <a:t>        this.especie = especie;</a:t>
+            </a:r>
+          </a:p>
+          <a:p>
+            <a:pPr>
+              <a:spcAft>
+                <a:spcPts val="400"/>
+              </a:spcAft>
+            </a:pPr>
+            <a:r>
+              <a:rPr sz="1400" b="0" i="0">
+                <a:solidFill>
+                  <a:srgbClr val="FFFFFF"/>
+                </a:solidFill>
+                <a:latin typeface="Calibri"/>
+              </a:rPr>
+              <a:t>        this.edad = edad;</a:t>
+            </a:r>
+          </a:p>
+          <a:p>
+            <a:pPr>
+              <a:spcAft>
+                <a:spcPts val="400"/>
+              </a:spcAft>
+            </a:pPr>
+            <a:r>
+              <a:rPr sz="1400" b="0" i="0">
+                <a:solidFill>
+                  <a:srgbClr val="FFFFFF"/>
+                </a:solidFill>
+                <a:latin typeface="Calibri"/>
+              </a:rPr>
+              <a:t>    }</a:t>
+            </a:r>
+          </a:p>
+          <a:p>
+            <a:pPr>
+              <a:spcAft>
+                <a:spcPts val="400"/>
+              </a:spcAft>
+            </a:pPr>
+            <a:r>
+              <a:rPr sz="1400" b="0" i="0">
+                <a:solidFill>
+                  <a:srgbClr val="FFFFFF"/>
+                </a:solidFill>
+                <a:latin typeface="Calibri"/>
+              </a:rPr>
+              <a:t/>
+            </a:r>
+          </a:p>
+          <a:p>
+            <a:pPr>
+              <a:spcAft>
+                <a:spcPts val="400"/>
+              </a:spcAft>
+            </a:pPr>
+            <a:r>
+              <a:rPr sz="1400" b="0" i="0">
+                <a:solidFill>
+                  <a:srgbClr val="FFFFFF"/>
+                </a:solidFill>
+                <a:latin typeface="Calibri"/>
+              </a:rPr>
+              <a:t>    public String getId() { return id; }</a:t>
+            </a:r>
+          </a:p>
+          <a:p>
+            <a:pPr>
+              <a:spcAft>
+                <a:spcPts val="400"/>
+              </a:spcAft>
+            </a:pPr>
+            <a:r>
+              <a:rPr sz="1400" b="0" i="0">
+                <a:solidFill>
+                  <a:srgbClr val="FFFFFF"/>
+                </a:solidFill>
+                <a:latin typeface="Calibri"/>
+              </a:rPr>
+              <a:t>    public String getNombre() { return nombre; }</a:t>
+            </a:r>
+          </a:p>
+          <a:p>
+            <a:pPr>
+              <a:spcAft>
+                <a:spcPts val="400"/>
+              </a:spcAft>
+            </a:pPr>
+            <a:r>
+              <a:rPr sz="1400" b="0" i="0">
+                <a:solidFill>
+                  <a:srgbClr val="FFFFFF"/>
+                </a:solidFill>
+                <a:latin typeface="Calibri"/>
+              </a:rPr>
+              <a:t>    public String getEspecie() { return especie; }</a:t>
+            </a:r>
+          </a:p>
+          <a:p>
+            <a:pPr>
+              <a:spcAft>
+                <a:spcPts val="400"/>
+              </a:spcAft>
+            </a:pPr>
+            <a:r>
+              <a:rPr sz="1400" b="0" i="0">
+                <a:solidFill>
+                  <a:srgbClr val="FFFFFF"/>
+                </a:solidFill>
+                <a:latin typeface="Calibri"/>
+              </a:rPr>
+              <a:t>    public int getEdad() { return edad; }</a:t>
+            </a:r>
+          </a:p>
+          <a:p>
+            <a:pPr>
+              <a:spcAft>
+                <a:spcPts val="400"/>
+              </a:spcAft>
+            </a:pPr>
+            <a:r>
+              <a:rPr sz="1400" b="0" i="0">
+                <a:solidFill>
+                  <a:srgbClr val="FFFFFF"/>
+                </a:solidFill>
+                <a:latin typeface="Calibri"/>
+              </a:rPr>
+              <a:t/>
+            </a:r>
+          </a:p>
+          <a:p>
+            <a:pPr>
+              <a:spcAft>
+                <a:spcPts val="400"/>
+              </a:spcAft>
+            </a:pPr>
+            <a:r>
+              <a:rPr sz="1400" b="0" i="0">
+                <a:solidFill>
+                  <a:srgbClr val="FFFFFF"/>
+                </a:solidFill>
+                <a:latin typeface="Calibri"/>
+              </a:rPr>
+              <a:t>    /** El objeto se defiende: una edad negativa no tiene sentido en el dominio. */</a:t>
+            </a:r>
+          </a:p>
+        </p:txBody>
+      </p:sp>
+      <p:sp>
+        <p:nvSpPr>
+          <p:cNvPr id="9" name="TextBox 8"/>
           <p:cNvSpPr txBox="1"/>
           <p:nvPr/>
         </p:nvSpPr>
@@ -9702,7 +9667,7 @@
                 </a:solidFill>
                 <a:latin typeface="Calibri"/>
               </a:rPr>
-              <a:t>Taller PI — pasos guiados</a:t>
+              <a:t>Mascota.java — setEdad()</a:t>
             </a:r>
           </a:p>
         </p:txBody>
@@ -9715,8 +9680,8 @@
         </p:nvSpPr>
         <p:spPr>
           <a:xfrm>
-            <a:off x="457200" y="1234440"/>
-            <a:ext cx="11277295" cy="950976"/>
+            <a:off x="457200" y="1261872"/>
+            <a:ext cx="11277295" cy="5093208"/>
           </a:xfrm>
           <a:prstGeom prst="roundRect">
             <a:avLst>
@@ -9724,7 +9689,7 @@
             </a:avLst>
           </a:prstGeom>
           <a:solidFill>
-            <a:srgbClr val="F2F2F2"/>
+            <a:srgbClr val="1E2A38"/>
           </a:solidFill>
           <a:ln>
             <a:noFill/>
@@ -9754,19 +9719,17 @@
       </p:sp>
       <p:sp>
         <p:nvSpPr>
-          <p:cNvPr id="6" name="Rounded Rectangle 5"/>
+          <p:cNvPr id="6" name="Rectangle 5"/>
           <p:cNvSpPr/>
           <p:nvPr/>
         </p:nvSpPr>
         <p:spPr>
           <a:xfrm>
-            <a:off x="594360" y="1490472"/>
-            <a:ext cx="438912" cy="438912"/>
-          </a:xfrm>
-          <a:prstGeom prst="roundRect">
-            <a:avLst>
-              <a:gd name="adj" fmla="val 12000"/>
-            </a:avLst>
+            <a:off x="457200" y="1261872"/>
+            <a:ext cx="11277295" cy="320040"/>
+          </a:xfrm>
+          <a:prstGeom prst="rect">
+            <a:avLst/>
           </a:prstGeom>
           <a:solidFill>
             <a:srgbClr val="095292"/>
@@ -9805,8 +9768,8 @@
         </p:nvSpPr>
         <p:spPr>
           <a:xfrm>
-            <a:off x="594360" y="1490472"/>
-            <a:ext cx="438912" cy="438912"/>
+            <a:off x="685800" y="1307592"/>
+            <a:ext cx="10820095" cy="256032"/>
           </a:xfrm>
           <a:prstGeom prst="rect">
             <a:avLst/>
@@ -9817,15 +9780,14 @@
           <a:bodyPr wrap="square" anchor="ctr"/>
           <a:lstStyle/>
           <a:p>
-            <a:pPr algn="ctr"/>
-            <a:r>
-              <a:rPr sz="1600" b="1" i="0">
-                <a:solidFill>
-                  <a:srgbClr val="FFFFFF"/>
-                </a:solidFill>
-                <a:latin typeface="Calibri"/>
-              </a:rPr>
-              <a:t>1</a:t>
+            <a:r>
+              <a:rPr sz="1000" b="1" i="0">
+                <a:solidFill>
+                  <a:srgbClr val="269CCB"/>
+                </a:solidFill>
+                <a:latin typeface="Calibri"/>
+              </a:rPr>
+              <a:t>● ● ●</a:t>
             </a:r>
           </a:p>
         </p:txBody>
@@ -9838,8 +9800,8 @@
         </p:nvSpPr>
         <p:spPr>
           <a:xfrm>
-            <a:off x="1188720" y="1325880"/>
-            <a:ext cx="10271455" cy="786384"/>
+            <a:off x="777240" y="1719072"/>
+            <a:ext cx="10637215" cy="4453128"/>
           </a:xfrm>
           <a:prstGeom prst="rect">
             <a:avLst/>
@@ -9847,644 +9809,159 @@
           <a:noFill/>
         </p:spPr>
         <p:txBody>
-          <a:bodyPr wrap="square" anchor="ctr"/>
-          <a:lstStyle/>
-          <a:p>
-            <a:r>
-              <a:rPr sz="1500" b="1" i="0">
-                <a:solidFill>
-                  <a:srgbClr val="095292"/>
-                </a:solidFill>
-                <a:latin typeface="Calibri"/>
-              </a:rPr>
-              <a:t>Instale y verifique el entorno (JDK 17+ y VS Code con el Extension Pack for Java) y cree un proyecto Java llamado VetCare con paquete vetcare. Este paso es el objetivo real del bloque: nadie puede quedarse sin entorno funcionando.</a:t>
-            </a:r>
-          </a:p>
-        </p:txBody>
-      </p:sp>
-      <p:sp>
-        <p:nvSpPr>
-          <p:cNvPr id="9" name="Rounded Rectangle 8"/>
-          <p:cNvSpPr/>
-          <p:nvPr/>
-        </p:nvSpPr>
-        <p:spPr>
-          <a:xfrm>
-            <a:off x="457200" y="2276856"/>
-            <a:ext cx="11277295" cy="950976"/>
-          </a:xfrm>
-          <a:prstGeom prst="roundRect">
-            <a:avLst>
-              <a:gd name="adj" fmla="val 12000"/>
-            </a:avLst>
-          </a:prstGeom>
-          <a:solidFill>
-            <a:srgbClr val="E8F4FA"/>
-          </a:solidFill>
-          <a:ln>
-            <a:noFill/>
-          </a:ln>
-        </p:spPr>
-        <p:style>
-          <a:lnRef idx="1">
-            <a:schemeClr val="accent1"/>
-          </a:lnRef>
-          <a:fillRef idx="3">
-            <a:schemeClr val="accent1"/>
-          </a:fillRef>
-          <a:effectRef idx="2">
-            <a:schemeClr val="accent1"/>
-          </a:effectRef>
-          <a:fontRef idx="minor">
-            <a:schemeClr val="lt1"/>
-          </a:fontRef>
-        </p:style>
-        <p:txBody>
-          <a:bodyPr rtlCol="0" anchor="ctr"/>
-          <a:lstStyle/>
-          <a:p>
-            <a:pPr algn="ctr"/>
-          </a:p>
-        </p:txBody>
-      </p:sp>
-      <p:sp>
-        <p:nvSpPr>
-          <p:cNvPr id="10" name="Rounded Rectangle 9"/>
-          <p:cNvSpPr/>
-          <p:nvPr/>
-        </p:nvSpPr>
-        <p:spPr>
-          <a:xfrm>
-            <a:off x="594360" y="2532888"/>
-            <a:ext cx="438912" cy="438912"/>
-          </a:xfrm>
-          <a:prstGeom prst="roundRect">
-            <a:avLst>
-              <a:gd name="adj" fmla="val 12000"/>
-            </a:avLst>
-          </a:prstGeom>
-          <a:solidFill>
-            <a:srgbClr val="095292"/>
-          </a:solidFill>
-          <a:ln>
-            <a:noFill/>
-          </a:ln>
-        </p:spPr>
-        <p:style>
-          <a:lnRef idx="1">
-            <a:schemeClr val="accent1"/>
-          </a:lnRef>
-          <a:fillRef idx="3">
-            <a:schemeClr val="accent1"/>
-          </a:fillRef>
-          <a:effectRef idx="2">
-            <a:schemeClr val="accent1"/>
-          </a:effectRef>
-          <a:fontRef idx="minor">
-            <a:schemeClr val="lt1"/>
-          </a:fontRef>
-        </p:style>
-        <p:txBody>
-          <a:bodyPr rtlCol="0" anchor="ctr"/>
-          <a:lstStyle/>
-          <a:p>
-            <a:pPr algn="ctr"/>
-          </a:p>
-        </p:txBody>
-      </p:sp>
-      <p:sp>
-        <p:nvSpPr>
-          <p:cNvPr id="11" name="TextBox 10"/>
-          <p:cNvSpPr txBox="1"/>
-          <p:nvPr/>
-        </p:nvSpPr>
-        <p:spPr>
-          <a:xfrm>
-            <a:off x="594360" y="2532888"/>
-            <a:ext cx="438912" cy="438912"/>
-          </a:xfrm>
-          <a:prstGeom prst="rect">
-            <a:avLst/>
-          </a:prstGeom>
-          <a:noFill/>
-        </p:spPr>
-        <p:txBody>
-          <a:bodyPr wrap="square" anchor="ctr"/>
-          <a:lstStyle/>
-          <a:p>
-            <a:pPr algn="ctr"/>
-            <a:r>
-              <a:rPr sz="1600" b="1" i="0">
+          <a:bodyPr wrap="square">
+            <a:spAutoFit/>
+          </a:bodyPr>
+          <a:lstStyle/>
+          <a:p>
+            <a:pPr>
+              <a:spcAft>
+                <a:spcPts val="400"/>
+              </a:spcAft>
+            </a:pPr>
+            <a:r>
+              <a:rPr sz="1400" b="0" i="0">
                 <a:solidFill>
                   <a:srgbClr val="FFFFFF"/>
                 </a:solidFill>
                 <a:latin typeface="Calibri"/>
               </a:rPr>
-              <a:t>2</a:t>
-            </a:r>
-          </a:p>
-        </p:txBody>
-      </p:sp>
-      <p:sp>
-        <p:nvSpPr>
-          <p:cNvPr id="12" name="TextBox 11"/>
-          <p:cNvSpPr txBox="1"/>
-          <p:nvPr/>
-        </p:nvSpPr>
-        <p:spPr>
-          <a:xfrm>
-            <a:off x="1188720" y="2368296"/>
-            <a:ext cx="10271455" cy="786384"/>
-          </a:xfrm>
-          <a:prstGeom prst="rect">
-            <a:avLst/>
-          </a:prstGeom>
-          <a:noFill/>
-        </p:spPr>
-        <p:txBody>
-          <a:bodyPr wrap="square" anchor="ctr"/>
-          <a:lstStyle/>
-          <a:p>
-            <a:r>
-              <a:rPr sz="1500" b="1" i="0">
-                <a:solidFill>
-                  <a:srgbClr val="095292"/>
-                </a:solidFill>
-                <a:latin typeface="Calibri"/>
-              </a:rPr>
-              <a:t>Escriba la clase Mascota con al menos tres atributos privados (id, nombre, especie) y un constructor que los reciba todos.</a:t>
-            </a:r>
-          </a:p>
-        </p:txBody>
-      </p:sp>
-      <p:sp>
-        <p:nvSpPr>
-          <p:cNvPr id="13" name="Rounded Rectangle 12"/>
-          <p:cNvSpPr/>
-          <p:nvPr/>
-        </p:nvSpPr>
-        <p:spPr>
-          <a:xfrm>
-            <a:off x="457200" y="3319272"/>
-            <a:ext cx="11277295" cy="950976"/>
-          </a:xfrm>
-          <a:prstGeom prst="roundRect">
-            <a:avLst>
-              <a:gd name="adj" fmla="val 12000"/>
-            </a:avLst>
-          </a:prstGeom>
-          <a:solidFill>
-            <a:srgbClr val="F2F2F2"/>
-          </a:solidFill>
-          <a:ln>
-            <a:noFill/>
-          </a:ln>
-        </p:spPr>
-        <p:style>
-          <a:lnRef idx="1">
-            <a:schemeClr val="accent1"/>
-          </a:lnRef>
-          <a:fillRef idx="3">
-            <a:schemeClr val="accent1"/>
-          </a:fillRef>
-          <a:effectRef idx="2">
-            <a:schemeClr val="accent1"/>
-          </a:effectRef>
-          <a:fontRef idx="minor">
-            <a:schemeClr val="lt1"/>
-          </a:fontRef>
-        </p:style>
-        <p:txBody>
-          <a:bodyPr rtlCol="0" anchor="ctr"/>
-          <a:lstStyle/>
-          <a:p>
-            <a:pPr algn="ctr"/>
-          </a:p>
-        </p:txBody>
-      </p:sp>
-      <p:sp>
-        <p:nvSpPr>
-          <p:cNvPr id="14" name="Rounded Rectangle 13"/>
-          <p:cNvSpPr/>
-          <p:nvPr/>
-        </p:nvSpPr>
-        <p:spPr>
-          <a:xfrm>
-            <a:off x="594360" y="3575304"/>
-            <a:ext cx="438912" cy="438912"/>
-          </a:xfrm>
-          <a:prstGeom prst="roundRect">
-            <a:avLst>
-              <a:gd name="adj" fmla="val 12000"/>
-            </a:avLst>
-          </a:prstGeom>
-          <a:solidFill>
-            <a:srgbClr val="095292"/>
-          </a:solidFill>
-          <a:ln>
-            <a:noFill/>
-          </a:ln>
-        </p:spPr>
-        <p:style>
-          <a:lnRef idx="1">
-            <a:schemeClr val="accent1"/>
-          </a:lnRef>
-          <a:fillRef idx="3">
-            <a:schemeClr val="accent1"/>
-          </a:fillRef>
-          <a:effectRef idx="2">
-            <a:schemeClr val="accent1"/>
-          </a:effectRef>
-          <a:fontRef idx="minor">
-            <a:schemeClr val="lt1"/>
-          </a:fontRef>
-        </p:style>
-        <p:txBody>
-          <a:bodyPr rtlCol="0" anchor="ctr"/>
-          <a:lstStyle/>
-          <a:p>
-            <a:pPr algn="ctr"/>
-          </a:p>
-        </p:txBody>
-      </p:sp>
-      <p:sp>
-        <p:nvSpPr>
-          <p:cNvPr id="15" name="TextBox 14"/>
-          <p:cNvSpPr txBox="1"/>
-          <p:nvPr/>
-        </p:nvSpPr>
-        <p:spPr>
-          <a:xfrm>
-            <a:off x="594360" y="3575304"/>
-            <a:ext cx="438912" cy="438912"/>
-          </a:xfrm>
-          <a:prstGeom prst="rect">
-            <a:avLst/>
-          </a:prstGeom>
-          <a:noFill/>
-        </p:spPr>
-        <p:txBody>
-          <a:bodyPr wrap="square" anchor="ctr"/>
-          <a:lstStyle/>
-          <a:p>
-            <a:pPr algn="ctr"/>
-            <a:r>
-              <a:rPr sz="1600" b="1" i="0">
+              <a:t>    public void setEdad(int edad) {</a:t>
+            </a:r>
+          </a:p>
+          <a:p>
+            <a:pPr>
+              <a:spcAft>
+                <a:spcPts val="400"/>
+              </a:spcAft>
+            </a:pPr>
+            <a:r>
+              <a:rPr sz="1400" b="0" i="0">
                 <a:solidFill>
                   <a:srgbClr val="FFFFFF"/>
                 </a:solidFill>
                 <a:latin typeface="Calibri"/>
               </a:rPr>
-              <a:t>3</a:t>
-            </a:r>
-          </a:p>
-        </p:txBody>
-      </p:sp>
-      <p:sp>
-        <p:nvSpPr>
-          <p:cNvPr id="16" name="TextBox 15"/>
-          <p:cNvSpPr txBox="1"/>
-          <p:nvPr/>
-        </p:nvSpPr>
-        <p:spPr>
-          <a:xfrm>
-            <a:off x="1188720" y="3410712"/>
-            <a:ext cx="10271455" cy="786384"/>
-          </a:xfrm>
-          <a:prstGeom prst="rect">
-            <a:avLst/>
-          </a:prstGeom>
-          <a:noFill/>
-        </p:spPr>
-        <p:txBody>
-          <a:bodyPr wrap="square" anchor="ctr"/>
-          <a:lstStyle/>
-          <a:p>
-            <a:r>
-              <a:rPr sz="1500" b="1" i="0">
-                <a:solidFill>
-                  <a:srgbClr val="095292"/>
-                </a:solidFill>
-                <a:latin typeface="Calibri"/>
-              </a:rPr>
-              <a:t>Agregue al menos un getter y sobreescriba toString() para que la mascota se imprima de forma legible.</a:t>
-            </a:r>
-          </a:p>
-        </p:txBody>
-      </p:sp>
-      <p:sp>
-        <p:nvSpPr>
-          <p:cNvPr id="17" name="Rounded Rectangle 16"/>
-          <p:cNvSpPr/>
-          <p:nvPr/>
-        </p:nvSpPr>
-        <p:spPr>
-          <a:xfrm>
-            <a:off x="457200" y="4361688"/>
-            <a:ext cx="11277295" cy="950976"/>
-          </a:xfrm>
-          <a:prstGeom prst="roundRect">
-            <a:avLst>
-              <a:gd name="adj" fmla="val 12000"/>
-            </a:avLst>
-          </a:prstGeom>
-          <a:solidFill>
-            <a:srgbClr val="E8F4FA"/>
-          </a:solidFill>
-          <a:ln>
-            <a:noFill/>
-          </a:ln>
-        </p:spPr>
-        <p:style>
-          <a:lnRef idx="1">
-            <a:schemeClr val="accent1"/>
-          </a:lnRef>
-          <a:fillRef idx="3">
-            <a:schemeClr val="accent1"/>
-          </a:fillRef>
-          <a:effectRef idx="2">
-            <a:schemeClr val="accent1"/>
-          </a:effectRef>
-          <a:fontRef idx="minor">
-            <a:schemeClr val="lt1"/>
-          </a:fontRef>
-        </p:style>
-        <p:txBody>
-          <a:bodyPr rtlCol="0" anchor="ctr"/>
-          <a:lstStyle/>
-          <a:p>
-            <a:pPr algn="ctr"/>
-          </a:p>
-        </p:txBody>
-      </p:sp>
-      <p:sp>
-        <p:nvSpPr>
-          <p:cNvPr id="18" name="Rounded Rectangle 17"/>
-          <p:cNvSpPr/>
-          <p:nvPr/>
-        </p:nvSpPr>
-        <p:spPr>
-          <a:xfrm>
-            <a:off x="594360" y="4617720"/>
-            <a:ext cx="438912" cy="438912"/>
-          </a:xfrm>
-          <a:prstGeom prst="roundRect">
-            <a:avLst>
-              <a:gd name="adj" fmla="val 12000"/>
-            </a:avLst>
-          </a:prstGeom>
-          <a:solidFill>
-            <a:srgbClr val="095292"/>
-          </a:solidFill>
-          <a:ln>
-            <a:noFill/>
-          </a:ln>
-        </p:spPr>
-        <p:style>
-          <a:lnRef idx="1">
-            <a:schemeClr val="accent1"/>
-          </a:lnRef>
-          <a:fillRef idx="3">
-            <a:schemeClr val="accent1"/>
-          </a:fillRef>
-          <a:effectRef idx="2">
-            <a:schemeClr val="accent1"/>
-          </a:effectRef>
-          <a:fontRef idx="minor">
-            <a:schemeClr val="lt1"/>
-          </a:fontRef>
-        </p:style>
-        <p:txBody>
-          <a:bodyPr rtlCol="0" anchor="ctr"/>
-          <a:lstStyle/>
-          <a:p>
-            <a:pPr algn="ctr"/>
-          </a:p>
-        </p:txBody>
-      </p:sp>
-      <p:sp>
-        <p:nvSpPr>
-          <p:cNvPr id="19" name="TextBox 18"/>
-          <p:cNvSpPr txBox="1"/>
-          <p:nvPr/>
-        </p:nvSpPr>
-        <p:spPr>
-          <a:xfrm>
-            <a:off x="594360" y="4617720"/>
-            <a:ext cx="438912" cy="438912"/>
-          </a:xfrm>
-          <a:prstGeom prst="rect">
-            <a:avLst/>
-          </a:prstGeom>
-          <a:noFill/>
-        </p:spPr>
-        <p:txBody>
-          <a:bodyPr wrap="square" anchor="ctr"/>
-          <a:lstStyle/>
-          <a:p>
-            <a:pPr algn="ctr"/>
-            <a:r>
-              <a:rPr sz="1600" b="1" i="0">
+              <a:t>        if (edad &lt; 0) {</a:t>
+            </a:r>
+          </a:p>
+          <a:p>
+            <a:pPr>
+              <a:spcAft>
+                <a:spcPts val="400"/>
+              </a:spcAft>
+            </a:pPr>
+            <a:r>
+              <a:rPr sz="1400" b="0" i="0">
                 <a:solidFill>
                   <a:srgbClr val="FFFFFF"/>
                 </a:solidFill>
                 <a:latin typeface="Calibri"/>
               </a:rPr>
-              <a:t>4</a:t>
-            </a:r>
-          </a:p>
-        </p:txBody>
-      </p:sp>
-      <p:sp>
-        <p:nvSpPr>
-          <p:cNvPr id="20" name="TextBox 19"/>
-          <p:cNvSpPr txBox="1"/>
-          <p:nvPr/>
-        </p:nvSpPr>
-        <p:spPr>
-          <a:xfrm>
-            <a:off x="1188720" y="4453128"/>
-            <a:ext cx="10271455" cy="786384"/>
-          </a:xfrm>
-          <a:prstGeom prst="rect">
-            <a:avLst/>
-          </a:prstGeom>
-          <a:noFill/>
-        </p:spPr>
-        <p:txBody>
-          <a:bodyPr wrap="square" anchor="ctr"/>
-          <a:lstStyle/>
-          <a:p>
-            <a:r>
-              <a:rPr sz="1500" b="1" i="0">
-                <a:solidFill>
-                  <a:srgbClr val="095292"/>
-                </a:solidFill>
-                <a:latin typeface="Calibri"/>
-              </a:rPr>
-              <a:t>En el main, cree DOS objetos Mascota con datos distintos e imprimalos: debe verse que salen del mismo molde pero con valores diferentes.</a:t>
-            </a:r>
-          </a:p>
-        </p:txBody>
-      </p:sp>
-      <p:sp>
-        <p:nvSpPr>
-          <p:cNvPr id="21" name="Rounded Rectangle 20"/>
-          <p:cNvSpPr/>
-          <p:nvPr/>
-        </p:nvSpPr>
-        <p:spPr>
-          <a:xfrm>
-            <a:off x="457200" y="5404104"/>
-            <a:ext cx="11277295" cy="950976"/>
-          </a:xfrm>
-          <a:prstGeom prst="roundRect">
-            <a:avLst>
-              <a:gd name="adj" fmla="val 12000"/>
-            </a:avLst>
-          </a:prstGeom>
-          <a:solidFill>
-            <a:srgbClr val="F2F2F2"/>
-          </a:solidFill>
-          <a:ln>
-            <a:noFill/>
-          </a:ln>
-        </p:spPr>
-        <p:style>
-          <a:lnRef idx="1">
-            <a:schemeClr val="accent1"/>
-          </a:lnRef>
-          <a:fillRef idx="3">
-            <a:schemeClr val="accent1"/>
-          </a:fillRef>
-          <a:effectRef idx="2">
-            <a:schemeClr val="accent1"/>
-          </a:effectRef>
-          <a:fontRef idx="minor">
-            <a:schemeClr val="lt1"/>
-          </a:fontRef>
-        </p:style>
-        <p:txBody>
-          <a:bodyPr rtlCol="0" anchor="ctr"/>
-          <a:lstStyle/>
-          <a:p>
-            <a:pPr algn="ctr"/>
-          </a:p>
-        </p:txBody>
-      </p:sp>
-      <p:sp>
-        <p:nvSpPr>
-          <p:cNvPr id="22" name="Rounded Rectangle 21"/>
-          <p:cNvSpPr/>
-          <p:nvPr/>
-        </p:nvSpPr>
-        <p:spPr>
-          <a:xfrm>
-            <a:off x="594360" y="5660136"/>
-            <a:ext cx="438912" cy="438912"/>
-          </a:xfrm>
-          <a:prstGeom prst="roundRect">
-            <a:avLst>
-              <a:gd name="adj" fmla="val 12000"/>
-            </a:avLst>
-          </a:prstGeom>
-          <a:solidFill>
-            <a:srgbClr val="095292"/>
-          </a:solidFill>
-          <a:ln>
-            <a:noFill/>
-          </a:ln>
-        </p:spPr>
-        <p:style>
-          <a:lnRef idx="1">
-            <a:schemeClr val="accent1"/>
-          </a:lnRef>
-          <a:fillRef idx="3">
-            <a:schemeClr val="accent1"/>
-          </a:fillRef>
-          <a:effectRef idx="2">
-            <a:schemeClr val="accent1"/>
-          </a:effectRef>
-          <a:fontRef idx="minor">
-            <a:schemeClr val="lt1"/>
-          </a:fontRef>
-        </p:style>
-        <p:txBody>
-          <a:bodyPr rtlCol="0" anchor="ctr"/>
-          <a:lstStyle/>
-          <a:p>
-            <a:pPr algn="ctr"/>
-          </a:p>
-        </p:txBody>
-      </p:sp>
-      <p:sp>
-        <p:nvSpPr>
-          <p:cNvPr id="23" name="TextBox 22"/>
-          <p:cNvSpPr txBox="1"/>
-          <p:nvPr/>
-        </p:nvSpPr>
-        <p:spPr>
-          <a:xfrm>
-            <a:off x="594360" y="5660136"/>
-            <a:ext cx="438912" cy="438912"/>
-          </a:xfrm>
-          <a:prstGeom prst="rect">
-            <a:avLst/>
-          </a:prstGeom>
-          <a:noFill/>
-        </p:spPr>
-        <p:txBody>
-          <a:bodyPr wrap="square" anchor="ctr"/>
-          <a:lstStyle/>
-          <a:p>
-            <a:pPr algn="ctr"/>
-            <a:r>
-              <a:rPr sz="1600" b="1" i="0">
+              <a:t>            System.out.println("Edad invalida, se conserva la anterior: " + this.edad);</a:t>
+            </a:r>
+          </a:p>
+          <a:p>
+            <a:pPr>
+              <a:spcAft>
+                <a:spcPts val="400"/>
+              </a:spcAft>
+            </a:pPr>
+            <a:r>
+              <a:rPr sz="1400" b="0" i="0">
                 <a:solidFill>
                   <a:srgbClr val="FFFFFF"/>
                 </a:solidFill>
                 <a:latin typeface="Calibri"/>
               </a:rPr>
-              <a:t>5</a:t>
-            </a:r>
-          </a:p>
-        </p:txBody>
-      </p:sp>
-      <p:sp>
-        <p:nvSpPr>
-          <p:cNvPr id="24" name="TextBox 23"/>
-          <p:cNvSpPr txBox="1"/>
-          <p:nvPr/>
-        </p:nvSpPr>
-        <p:spPr>
-          <a:xfrm>
-            <a:off x="1188720" y="5495544"/>
-            <a:ext cx="10271455" cy="786384"/>
-          </a:xfrm>
-          <a:prstGeom prst="rect">
-            <a:avLst/>
-          </a:prstGeom>
-          <a:noFill/>
-        </p:spPr>
-        <p:txBody>
-          <a:bodyPr wrap="square" anchor="ctr"/>
-          <a:lstStyle/>
-          <a:p>
-            <a:r>
-              <a:rPr sz="1500" b="1" i="0">
-                <a:solidFill>
-                  <a:srgbClr val="095292"/>
-                </a:solidFill>
-                <a:latin typeface="Calibri"/>
-              </a:rPr>
-              <a:t>Si termina antes: agregue un setter que valide (por ejemplo, que rechace una edad negativa) y pruebelo desde el main.</a:t>
-            </a:r>
-          </a:p>
-        </p:txBody>
-      </p:sp>
-      <p:sp>
-        <p:nvSpPr>
-          <p:cNvPr id="25" name="TextBox 24"/>
+              <a:t>            return;</a:t>
+            </a:r>
+          </a:p>
+          <a:p>
+            <a:pPr>
+              <a:spcAft>
+                <a:spcPts val="400"/>
+              </a:spcAft>
+            </a:pPr>
+            <a:r>
+              <a:rPr sz="1400" b="0" i="0">
+                <a:solidFill>
+                  <a:srgbClr val="FFFFFF"/>
+                </a:solidFill>
+                <a:latin typeface="Calibri"/>
+              </a:rPr>
+              <a:t>        }</a:t>
+            </a:r>
+          </a:p>
+          <a:p>
+            <a:pPr>
+              <a:spcAft>
+                <a:spcPts val="400"/>
+              </a:spcAft>
+            </a:pPr>
+            <a:r>
+              <a:rPr sz="1400" b="0" i="0">
+                <a:solidFill>
+                  <a:srgbClr val="FFFFFF"/>
+                </a:solidFill>
+                <a:latin typeface="Calibri"/>
+              </a:rPr>
+              <a:t>        this.edad = edad;</a:t>
+            </a:r>
+          </a:p>
+          <a:p>
+            <a:pPr>
+              <a:spcAft>
+                <a:spcPts val="400"/>
+              </a:spcAft>
+            </a:pPr>
+            <a:r>
+              <a:rPr sz="1400" b="0" i="0">
+                <a:solidFill>
+                  <a:srgbClr val="FFFFFF"/>
+                </a:solidFill>
+                <a:latin typeface="Calibri"/>
+              </a:rPr>
+              <a:t>    }</a:t>
+            </a:r>
+          </a:p>
+          <a:p>
+            <a:pPr>
+              <a:spcAft>
+                <a:spcPts val="400"/>
+              </a:spcAft>
+            </a:pPr>
+            <a:r>
+              <a:rPr sz="1400" b="0" i="0">
+                <a:solidFill>
+                  <a:srgbClr val="FFFFFF"/>
+                </a:solidFill>
+                <a:latin typeface="Calibri"/>
+              </a:rPr>
+              <a:t/>
+            </a:r>
+          </a:p>
+          <a:p>
+            <a:pPr>
+              <a:spcAft>
+                <a:spcPts val="400"/>
+              </a:spcAft>
+            </a:pPr>
+            <a:r>
+              <a:rPr sz="1400" b="0" i="0">
+                <a:solidFill>
+                  <a:srgbClr val="FFFFFF"/>
+                </a:solidFill>
+                <a:latin typeface="Calibri"/>
+              </a:rPr>
+              <a:t>    @Override</a:t>
+            </a:r>
+          </a:p>
+        </p:txBody>
+      </p:sp>
+      <p:sp>
+        <p:nvSpPr>
+          <p:cNvPr id="9" name="TextBox 8"/>
           <p:cNvSpPr txBox="1"/>
           <p:nvPr/>
         </p:nvSpPr>
@@ -11510,7 +10987,7 @@
                 </a:solidFill>
                 <a:latin typeface="Calibri"/>
               </a:rPr>
-              <a:t>Antes de entregar — autochequeo</a:t>
+              <a:t>Mascota.java — main()</a:t>
             </a:r>
           </a:p>
         </p:txBody>
@@ -11524,7 +11001,7 @@
         <p:spPr>
           <a:xfrm>
             <a:off x="457200" y="1261872"/>
-            <a:ext cx="11277295" cy="566928"/>
+            <a:ext cx="11277295" cy="5093208"/>
           </a:xfrm>
           <a:prstGeom prst="roundRect">
             <a:avLst>
@@ -11532,7 +11009,7 @@
             </a:avLst>
           </a:prstGeom>
           <a:solidFill>
-            <a:srgbClr val="F2F2F2"/>
+            <a:srgbClr val="1E2A38"/>
           </a:solidFill>
           <a:ln>
             <a:noFill/>
@@ -11568,19 +11045,17 @@
         </p:nvSpPr>
         <p:spPr>
           <a:xfrm>
-            <a:off x="640080" y="1408175"/>
-            <a:ext cx="274320" cy="274320"/>
+            <a:off x="457200" y="1261872"/>
+            <a:ext cx="11277295" cy="320040"/>
           </a:xfrm>
           <a:prstGeom prst="rect">
             <a:avLst/>
           </a:prstGeom>
           <a:solidFill>
-            <a:srgbClr val="FFFFFF"/>
+            <a:srgbClr val="095292"/>
           </a:solidFill>
           <a:ln>
-            <a:solidFill>
-              <a:srgbClr val="333333"/>
-            </a:solidFill>
+            <a:noFill/>
           </a:ln>
         </p:spPr>
         <p:style>
@@ -11607,44 +11082,33 @@
       </p:sp>
       <p:sp>
         <p:nvSpPr>
-          <p:cNvPr id="7" name="Rectangle 6"/>
-          <p:cNvSpPr/>
-          <p:nvPr/>
-        </p:nvSpPr>
-        <p:spPr>
-          <a:xfrm>
-            <a:off x="640080" y="1408175"/>
-            <a:ext cx="73152" cy="274320"/>
-          </a:xfrm>
-          <a:prstGeom prst="rect">
-            <a:avLst/>
-          </a:prstGeom>
-          <a:solidFill>
-            <a:srgbClr val="269CCB"/>
-          </a:solidFill>
-          <a:ln>
-            <a:noFill/>
-          </a:ln>
-        </p:spPr>
-        <p:style>
-          <a:lnRef idx="1">
-            <a:schemeClr val="accent1"/>
-          </a:lnRef>
-          <a:fillRef idx="3">
-            <a:schemeClr val="accent1"/>
-          </a:fillRef>
-          <a:effectRef idx="2">
-            <a:schemeClr val="accent1"/>
-          </a:effectRef>
-          <a:fontRef idx="minor">
-            <a:schemeClr val="lt1"/>
-          </a:fontRef>
-        </p:style>
-        <p:txBody>
-          <a:bodyPr rtlCol="0" anchor="ctr"/>
-          <a:lstStyle/>
-          <a:p>
-            <a:pPr algn="ctr"/>
+          <p:cNvPr id="7" name="TextBox 6"/>
+          <p:cNvSpPr txBox="1"/>
+          <p:nvPr/>
+        </p:nvSpPr>
+        <p:spPr>
+          <a:xfrm>
+            <a:off x="685800" y="1307592"/>
+            <a:ext cx="10820095" cy="256032"/>
+          </a:xfrm>
+          <a:prstGeom prst="rect">
+            <a:avLst/>
+          </a:prstGeom>
+          <a:noFill/>
+        </p:spPr>
+        <p:txBody>
+          <a:bodyPr wrap="square" anchor="ctr"/>
+          <a:lstStyle/>
+          <a:p>
+            <a:r>
+              <a:rPr sz="1000" b="1" i="0">
+                <a:solidFill>
+                  <a:srgbClr val="269CCB"/>
+                </a:solidFill>
+                <a:latin typeface="Calibri"/>
+              </a:rPr>
+              <a:t>● ● ●</a:t>
+            </a:r>
           </a:p>
         </p:txBody>
       </p:sp>
@@ -11656,8 +11120,8 @@
         </p:nvSpPr>
         <p:spPr>
           <a:xfrm>
-            <a:off x="1097280" y="1353312"/>
-            <a:ext cx="10362895" cy="402336"/>
+            <a:off x="777240" y="1719072"/>
+            <a:ext cx="10637215" cy="4453128"/>
           </a:xfrm>
           <a:prstGeom prst="rect">
             <a:avLst/>
@@ -11665,354 +11129,175 @@
           <a:noFill/>
         </p:spPr>
         <p:txBody>
-          <a:bodyPr wrap="square" anchor="ctr"/>
-          <a:lstStyle/>
-          <a:p>
-            <a:r>
-              <a:rPr sz="1500" b="0" i="0">
-                <a:solidFill>
-                  <a:srgbClr val="333333"/>
-                </a:solidFill>
-                <a:latin typeface="Calibri"/>
-              </a:rPr>
-              <a:t>¿Los atributos quedaron private o los deje accesibles desde fuera?</a:t>
-            </a:r>
-          </a:p>
-        </p:txBody>
-      </p:sp>
-      <p:sp>
-        <p:nvSpPr>
-          <p:cNvPr id="9" name="Rounded Rectangle 8"/>
-          <p:cNvSpPr/>
-          <p:nvPr/>
-        </p:nvSpPr>
-        <p:spPr>
-          <a:xfrm>
-            <a:off x="457200" y="1938528"/>
-            <a:ext cx="11277295" cy="566928"/>
-          </a:xfrm>
-          <a:prstGeom prst="roundRect">
-            <a:avLst>
-              <a:gd name="adj" fmla="val 12000"/>
-            </a:avLst>
-          </a:prstGeom>
-          <a:solidFill>
-            <a:srgbClr val="F2F2F2"/>
-          </a:solidFill>
-          <a:ln>
-            <a:noFill/>
-          </a:ln>
-        </p:spPr>
-        <p:style>
-          <a:lnRef idx="1">
-            <a:schemeClr val="accent1"/>
-          </a:lnRef>
-          <a:fillRef idx="3">
-            <a:schemeClr val="accent1"/>
-          </a:fillRef>
-          <a:effectRef idx="2">
-            <a:schemeClr val="accent1"/>
-          </a:effectRef>
-          <a:fontRef idx="minor">
-            <a:schemeClr val="lt1"/>
-          </a:fontRef>
-        </p:style>
-        <p:txBody>
-          <a:bodyPr rtlCol="0" anchor="ctr"/>
-          <a:lstStyle/>
-          <a:p>
-            <a:pPr algn="ctr"/>
-          </a:p>
-        </p:txBody>
-      </p:sp>
-      <p:sp>
-        <p:nvSpPr>
-          <p:cNvPr id="10" name="Rectangle 9"/>
-          <p:cNvSpPr/>
-          <p:nvPr/>
-        </p:nvSpPr>
-        <p:spPr>
-          <a:xfrm>
-            <a:off x="640080" y="2084832"/>
-            <a:ext cx="274320" cy="274320"/>
-          </a:xfrm>
-          <a:prstGeom prst="rect">
-            <a:avLst/>
-          </a:prstGeom>
-          <a:solidFill>
-            <a:srgbClr val="FFFFFF"/>
-          </a:solidFill>
-          <a:ln>
-            <a:solidFill>
-              <a:srgbClr val="333333"/>
-            </a:solidFill>
-          </a:ln>
-        </p:spPr>
-        <p:style>
-          <a:lnRef idx="1">
-            <a:schemeClr val="accent1"/>
-          </a:lnRef>
-          <a:fillRef idx="3">
-            <a:schemeClr val="accent1"/>
-          </a:fillRef>
-          <a:effectRef idx="2">
-            <a:schemeClr val="accent1"/>
-          </a:effectRef>
-          <a:fontRef idx="minor">
-            <a:schemeClr val="lt1"/>
-          </a:fontRef>
-        </p:style>
-        <p:txBody>
-          <a:bodyPr rtlCol="0" anchor="ctr"/>
-          <a:lstStyle/>
-          <a:p>
-            <a:pPr algn="ctr"/>
-          </a:p>
-        </p:txBody>
-      </p:sp>
-      <p:sp>
-        <p:nvSpPr>
-          <p:cNvPr id="11" name="Rectangle 10"/>
-          <p:cNvSpPr/>
-          <p:nvPr/>
-        </p:nvSpPr>
-        <p:spPr>
-          <a:xfrm>
-            <a:off x="640080" y="2084832"/>
-            <a:ext cx="73152" cy="274320"/>
-          </a:xfrm>
-          <a:prstGeom prst="rect">
-            <a:avLst/>
-          </a:prstGeom>
-          <a:solidFill>
-            <a:srgbClr val="269CCB"/>
-          </a:solidFill>
-          <a:ln>
-            <a:noFill/>
-          </a:ln>
-        </p:spPr>
-        <p:style>
-          <a:lnRef idx="1">
-            <a:schemeClr val="accent1"/>
-          </a:lnRef>
-          <a:fillRef idx="3">
-            <a:schemeClr val="accent1"/>
-          </a:fillRef>
-          <a:effectRef idx="2">
-            <a:schemeClr val="accent1"/>
-          </a:effectRef>
-          <a:fontRef idx="minor">
-            <a:schemeClr val="lt1"/>
-          </a:fontRef>
-        </p:style>
-        <p:txBody>
-          <a:bodyPr rtlCol="0" anchor="ctr"/>
-          <a:lstStyle/>
-          <a:p>
-            <a:pPr algn="ctr"/>
-          </a:p>
-        </p:txBody>
-      </p:sp>
-      <p:sp>
-        <p:nvSpPr>
-          <p:cNvPr id="12" name="TextBox 11"/>
-          <p:cNvSpPr txBox="1"/>
-          <p:nvPr/>
-        </p:nvSpPr>
-        <p:spPr>
-          <a:xfrm>
-            <a:off x="1097280" y="2029968"/>
-            <a:ext cx="10362895" cy="402336"/>
-          </a:xfrm>
-          <a:prstGeom prst="rect">
-            <a:avLst/>
-          </a:prstGeom>
-          <a:noFill/>
-        </p:spPr>
-        <p:txBody>
-          <a:bodyPr wrap="square" anchor="ctr"/>
-          <a:lstStyle/>
-          <a:p>
-            <a:r>
-              <a:rPr sz="1500" b="0" i="0">
-                <a:solidFill>
-                  <a:srgbClr val="333333"/>
-                </a:solidFill>
-                <a:latin typeface="Calibri"/>
-              </a:rPr>
-              <a:t>¿El constructor inicializa TODOS los atributos?</a:t>
-            </a:r>
-          </a:p>
-        </p:txBody>
-      </p:sp>
-      <p:sp>
-        <p:nvSpPr>
-          <p:cNvPr id="13" name="Rounded Rectangle 12"/>
-          <p:cNvSpPr/>
-          <p:nvPr/>
-        </p:nvSpPr>
-        <p:spPr>
-          <a:xfrm>
-            <a:off x="457200" y="2615184"/>
-            <a:ext cx="11277295" cy="566928"/>
-          </a:xfrm>
-          <a:prstGeom prst="roundRect">
-            <a:avLst>
-              <a:gd name="adj" fmla="val 12000"/>
-            </a:avLst>
-          </a:prstGeom>
-          <a:solidFill>
-            <a:srgbClr val="F2F2F2"/>
-          </a:solidFill>
-          <a:ln>
-            <a:noFill/>
-          </a:ln>
-        </p:spPr>
-        <p:style>
-          <a:lnRef idx="1">
-            <a:schemeClr val="accent1"/>
-          </a:lnRef>
-          <a:fillRef idx="3">
-            <a:schemeClr val="accent1"/>
-          </a:fillRef>
-          <a:effectRef idx="2">
-            <a:schemeClr val="accent1"/>
-          </a:effectRef>
-          <a:fontRef idx="minor">
-            <a:schemeClr val="lt1"/>
-          </a:fontRef>
-        </p:style>
-        <p:txBody>
-          <a:bodyPr rtlCol="0" anchor="ctr"/>
-          <a:lstStyle/>
-          <a:p>
-            <a:pPr algn="ctr"/>
-          </a:p>
-        </p:txBody>
-      </p:sp>
-      <p:sp>
-        <p:nvSpPr>
-          <p:cNvPr id="14" name="Rectangle 13"/>
-          <p:cNvSpPr/>
-          <p:nvPr/>
-        </p:nvSpPr>
-        <p:spPr>
-          <a:xfrm>
-            <a:off x="640080" y="2761488"/>
-            <a:ext cx="274320" cy="274320"/>
-          </a:xfrm>
-          <a:prstGeom prst="rect">
-            <a:avLst/>
-          </a:prstGeom>
-          <a:solidFill>
-            <a:srgbClr val="FFFFFF"/>
-          </a:solidFill>
-          <a:ln>
-            <a:solidFill>
-              <a:srgbClr val="333333"/>
-            </a:solidFill>
-          </a:ln>
-        </p:spPr>
-        <p:style>
-          <a:lnRef idx="1">
-            <a:schemeClr val="accent1"/>
-          </a:lnRef>
-          <a:fillRef idx="3">
-            <a:schemeClr val="accent1"/>
-          </a:fillRef>
-          <a:effectRef idx="2">
-            <a:schemeClr val="accent1"/>
-          </a:effectRef>
-          <a:fontRef idx="minor">
-            <a:schemeClr val="lt1"/>
-          </a:fontRef>
-        </p:style>
-        <p:txBody>
-          <a:bodyPr rtlCol="0" anchor="ctr"/>
-          <a:lstStyle/>
-          <a:p>
-            <a:pPr algn="ctr"/>
-          </a:p>
-        </p:txBody>
-      </p:sp>
-      <p:sp>
-        <p:nvSpPr>
-          <p:cNvPr id="15" name="Rectangle 14"/>
-          <p:cNvSpPr/>
-          <p:nvPr/>
-        </p:nvSpPr>
-        <p:spPr>
-          <a:xfrm>
-            <a:off x="640080" y="2761488"/>
-            <a:ext cx="73152" cy="274320"/>
-          </a:xfrm>
-          <a:prstGeom prst="rect">
-            <a:avLst/>
-          </a:prstGeom>
-          <a:solidFill>
-            <a:srgbClr val="269CCB"/>
-          </a:solidFill>
-          <a:ln>
-            <a:noFill/>
-          </a:ln>
-        </p:spPr>
-        <p:style>
-          <a:lnRef idx="1">
-            <a:schemeClr val="accent1"/>
-          </a:lnRef>
-          <a:fillRef idx="3">
-            <a:schemeClr val="accent1"/>
-          </a:fillRef>
-          <a:effectRef idx="2">
-            <a:schemeClr val="accent1"/>
-          </a:effectRef>
-          <a:fontRef idx="minor">
-            <a:schemeClr val="lt1"/>
-          </a:fontRef>
-        </p:style>
-        <p:txBody>
-          <a:bodyPr rtlCol="0" anchor="ctr"/>
-          <a:lstStyle/>
-          <a:p>
-            <a:pPr algn="ctr"/>
-          </a:p>
-        </p:txBody>
-      </p:sp>
-      <p:sp>
-        <p:nvSpPr>
-          <p:cNvPr id="16" name="TextBox 15"/>
-          <p:cNvSpPr txBox="1"/>
-          <p:nvPr/>
-        </p:nvSpPr>
-        <p:spPr>
-          <a:xfrm>
-            <a:off x="1097280" y="2706624"/>
-            <a:ext cx="10362895" cy="402336"/>
-          </a:xfrm>
-          <a:prstGeom prst="rect">
-            <a:avLst/>
-          </a:prstGeom>
-          <a:noFill/>
-        </p:spPr>
-        <p:txBody>
-          <a:bodyPr wrap="square" anchor="ctr"/>
-          <a:lstStyle/>
-          <a:p>
-            <a:r>
-              <a:rPr sz="1500" b="0" i="0">
-                <a:solidFill>
-                  <a:srgbClr val="333333"/>
-                </a:solidFill>
-                <a:latin typeface="Calibri"/>
-              </a:rPr>
-              <a:t>¿Sobreescribi toString() o estoy imprimiendo la direccion de memoria?</a:t>
-            </a:r>
-          </a:p>
-        </p:txBody>
-      </p:sp>
-      <p:sp>
-        <p:nvSpPr>
-          <p:cNvPr id="17" name="TextBox 16"/>
+          <a:bodyPr wrap="square">
+            <a:spAutoFit/>
+          </a:bodyPr>
+          <a:lstStyle/>
+          <a:p>
+            <a:pPr>
+              <a:spcAft>
+                <a:spcPts val="400"/>
+              </a:spcAft>
+            </a:pPr>
+            <a:r>
+              <a:rPr sz="1400" b="0" i="0">
+                <a:solidFill>
+                  <a:srgbClr val="FFFFFF"/>
+                </a:solidFill>
+                <a:latin typeface="Calibri"/>
+              </a:rPr>
+              <a:t>    public static void main(String[] args) {</a:t>
+            </a:r>
+          </a:p>
+          <a:p>
+            <a:pPr>
+              <a:spcAft>
+                <a:spcPts val="400"/>
+              </a:spcAft>
+            </a:pPr>
+            <a:r>
+              <a:rPr sz="1400" b="0" i="0">
+                <a:solidFill>
+                  <a:srgbClr val="FFFFFF"/>
+                </a:solidFill>
+                <a:latin typeface="Calibri"/>
+              </a:rPr>
+              <a:t>        Mascota luna = new Mascota("M-001", "Luna", "Canino", 3);</a:t>
+            </a:r>
+          </a:p>
+          <a:p>
+            <a:pPr>
+              <a:spcAft>
+                <a:spcPts val="400"/>
+              </a:spcAft>
+            </a:pPr>
+            <a:r>
+              <a:rPr sz="1400" b="0" i="0">
+                <a:solidFill>
+                  <a:srgbClr val="FFFFFF"/>
+                </a:solidFill>
+                <a:latin typeface="Calibri"/>
+              </a:rPr>
+              <a:t>        Mascota michi = new Mascota("M-002", "Michi", "Felino", 5);</a:t>
+            </a:r>
+          </a:p>
+          <a:p>
+            <a:pPr>
+              <a:spcAft>
+                <a:spcPts val="400"/>
+              </a:spcAft>
+            </a:pPr>
+            <a:r>
+              <a:rPr sz="1400" b="0" i="0">
+                <a:solidFill>
+                  <a:srgbClr val="FFFFFF"/>
+                </a:solidFill>
+                <a:latin typeface="Calibri"/>
+              </a:rPr>
+              <a:t>        System.out.println("Pacientes registrados hoy en Huellitas:");</a:t>
+            </a:r>
+          </a:p>
+          <a:p>
+            <a:pPr>
+              <a:spcAft>
+                <a:spcPts val="400"/>
+              </a:spcAft>
+            </a:pPr>
+            <a:r>
+              <a:rPr sz="1400" b="0" i="0">
+                <a:solidFill>
+                  <a:srgbClr val="FFFFFF"/>
+                </a:solidFill>
+                <a:latin typeface="Calibri"/>
+              </a:rPr>
+              <a:t>        System.out.println(luna);</a:t>
+            </a:r>
+          </a:p>
+          <a:p>
+            <a:pPr>
+              <a:spcAft>
+                <a:spcPts val="400"/>
+              </a:spcAft>
+            </a:pPr>
+            <a:r>
+              <a:rPr sz="1400" b="0" i="0">
+                <a:solidFill>
+                  <a:srgbClr val="FFFFFF"/>
+                </a:solidFill>
+                <a:latin typeface="Calibri"/>
+              </a:rPr>
+              <a:t>        System.out.println(michi);</a:t>
+            </a:r>
+          </a:p>
+          <a:p>
+            <a:pPr>
+              <a:spcAft>
+                <a:spcPts val="400"/>
+              </a:spcAft>
+            </a:pPr>
+            <a:r>
+              <a:rPr sz="1400" b="0" i="0">
+                <a:solidFill>
+                  <a:srgbClr val="FFFFFF"/>
+                </a:solidFill>
+                <a:latin typeface="Calibri"/>
+              </a:rPr>
+              <a:t>        luna.setEdad(-2);</a:t>
+            </a:r>
+          </a:p>
+          <a:p>
+            <a:pPr>
+              <a:spcAft>
+                <a:spcPts val="400"/>
+              </a:spcAft>
+            </a:pPr>
+            <a:r>
+              <a:rPr sz="1400" b="0" i="0">
+                <a:solidFill>
+                  <a:srgbClr val="FFFFFF"/>
+                </a:solidFill>
+                <a:latin typeface="Calibri"/>
+              </a:rPr>
+              <a:t>    }</a:t>
+            </a:r>
+          </a:p>
+          <a:p>
+            <a:pPr>
+              <a:spcAft>
+                <a:spcPts val="400"/>
+              </a:spcAft>
+            </a:pPr>
+            <a:r>
+              <a:rPr sz="1400" b="0" i="0">
+                <a:solidFill>
+                  <a:srgbClr val="FFFFFF"/>
+                </a:solidFill>
+                <a:latin typeface="Calibri"/>
+              </a:rPr>
+              <a:t>}</a:t>
+            </a:r>
+          </a:p>
+          <a:p>
+            <a:pPr>
+              <a:spcAft>
+                <a:spcPts val="400"/>
+              </a:spcAft>
+            </a:pPr>
+            <a:r>
+              <a:rPr sz="1400" b="0" i="0">
+                <a:solidFill>
+                  <a:srgbClr val="FFFFFF"/>
+                </a:solidFill>
+                <a:latin typeface="Calibri"/>
+              </a:rPr>
+              <a:t/>
+            </a:r>
+          </a:p>
+        </p:txBody>
+      </p:sp>
+      <p:sp>
+        <p:nvSpPr>
+          <p:cNvPr id="9" name="TextBox 8"/>
           <p:cNvSpPr txBox="1"/>
           <p:nvPr/>
         </p:nvSpPr>
@@ -12186,21 +11471,141 @@
                 </a:solidFill>
                 <a:latin typeface="Calibri"/>
               </a:rPr>
-              <a:t>Criterios de exito / entregable</a:t>
-            </a:r>
-          </a:p>
-        </p:txBody>
-      </p:sp>
-      <p:sp>
-        <p:nvSpPr>
-          <p:cNvPr id="5" name="TextBox 4"/>
+              <a:t>La primera clase de VetCare</a:t>
+            </a:r>
+          </a:p>
+        </p:txBody>
+      </p:sp>
+      <p:sp>
+        <p:nvSpPr>
+          <p:cNvPr id="5" name="Rounded Rectangle 4"/>
+          <p:cNvSpPr/>
+          <p:nvPr/>
+        </p:nvSpPr>
+        <p:spPr>
+          <a:xfrm>
+            <a:off x="457200" y="1261872"/>
+            <a:ext cx="11277295" cy="4773168"/>
+          </a:xfrm>
+          <a:prstGeom prst="roundRect">
+            <a:avLst>
+              <a:gd name="adj" fmla="val 12000"/>
+            </a:avLst>
+          </a:prstGeom>
+          <a:solidFill>
+            <a:srgbClr val="1E2A38"/>
+          </a:solidFill>
+          <a:ln>
+            <a:noFill/>
+          </a:ln>
+        </p:spPr>
+        <p:style>
+          <a:lnRef idx="1">
+            <a:schemeClr val="accent1"/>
+          </a:lnRef>
+          <a:fillRef idx="3">
+            <a:schemeClr val="accent1"/>
+          </a:fillRef>
+          <a:effectRef idx="2">
+            <a:schemeClr val="accent1"/>
+          </a:effectRef>
+          <a:fontRef idx="minor">
+            <a:schemeClr val="lt1"/>
+          </a:fontRef>
+        </p:style>
+        <p:txBody>
+          <a:bodyPr rtlCol="0" anchor="ctr"/>
+          <a:lstStyle/>
+          <a:p>
+            <a:pPr algn="ctr"/>
+          </a:p>
+        </p:txBody>
+      </p:sp>
+      <p:sp>
+        <p:nvSpPr>
+          <p:cNvPr id="6" name="Rectangle 5"/>
+          <p:cNvSpPr/>
+          <p:nvPr/>
+        </p:nvSpPr>
+        <p:spPr>
+          <a:xfrm>
+            <a:off x="457200" y="1261872"/>
+            <a:ext cx="11277295" cy="320040"/>
+          </a:xfrm>
+          <a:prstGeom prst="rect">
+            <a:avLst/>
+          </a:prstGeom>
+          <a:solidFill>
+            <a:srgbClr val="095292"/>
+          </a:solidFill>
+          <a:ln>
+            <a:noFill/>
+          </a:ln>
+        </p:spPr>
+        <p:style>
+          <a:lnRef idx="1">
+            <a:schemeClr val="accent1"/>
+          </a:lnRef>
+          <a:fillRef idx="3">
+            <a:schemeClr val="accent1"/>
+          </a:fillRef>
+          <a:effectRef idx="2">
+            <a:schemeClr val="accent1"/>
+          </a:effectRef>
+          <a:fontRef idx="minor">
+            <a:schemeClr val="lt1"/>
+          </a:fontRef>
+        </p:style>
+        <p:txBody>
+          <a:bodyPr rtlCol="0" anchor="ctr"/>
+          <a:lstStyle/>
+          <a:p>
+            <a:pPr algn="ctr"/>
+          </a:p>
+        </p:txBody>
+      </p:sp>
+      <p:sp>
+        <p:nvSpPr>
+          <p:cNvPr id="7" name="TextBox 6"/>
           <p:cNvSpPr txBox="1"/>
           <p:nvPr/>
         </p:nvSpPr>
         <p:spPr>
           <a:xfrm>
-            <a:off x="457200" y="1170432"/>
-            <a:ext cx="11277295" cy="5230368"/>
+            <a:off x="685800" y="1307592"/>
+            <a:ext cx="10820095" cy="256032"/>
+          </a:xfrm>
+          <a:prstGeom prst="rect">
+            <a:avLst/>
+          </a:prstGeom>
+          <a:noFill/>
+        </p:spPr>
+        <p:txBody>
+          <a:bodyPr wrap="square" anchor="ctr"/>
+          <a:lstStyle/>
+          <a:p>
+            <a:r>
+              <a:rPr sz="1000" b="1" i="0">
+                <a:solidFill>
+                  <a:srgbClr val="269CCB"/>
+                </a:solidFill>
+                <a:latin typeface="Calibri"/>
+              </a:rPr>
+              <a:t>● ● ●</a:t>
+            </a:r>
+          </a:p>
+        </p:txBody>
+      </p:sp>
+      <p:sp>
+        <p:nvSpPr>
+          <p:cNvPr id="8" name="TextBox 7"/>
+          <p:cNvSpPr txBox="1"/>
+          <p:nvPr/>
+        </p:nvSpPr>
+        <p:spPr>
+          <a:xfrm>
+            <a:off x="777240" y="1719072"/>
+            <a:ext cx="10637215" cy="4133087"/>
           </a:xfrm>
           <a:prstGeom prst="rect">
             <a:avLst/>
@@ -12215,212 +11620,299 @@
           <a:p>
             <a:pPr>
               <a:spcAft>
-                <a:spcPts val="800"/>
+                <a:spcPts val="371"/>
               </a:spcAft>
             </a:pPr>
             <a:r>
-              <a:rPr sz="2000" b="0" i="0">
-                <a:solidFill>
-                  <a:srgbClr val="333333"/>
-                </a:solidFill>
-                <a:latin typeface="Calibri"/>
-              </a:rPr>
-              <a:t>–   </a:t>
-            </a:r>
-            <a:r>
-              <a:rPr sz="2000" b="1" i="0">
-                <a:solidFill>
-                  <a:srgbClr val="333333"/>
-                </a:solidFill>
-                <a:latin typeface="Calibri"/>
-              </a:rPr>
-              <a:t>Entregable:</a:t>
-            </a:r>
-            <a:r>
-              <a:rPr sz="2000" b="0" i="0">
-                <a:solidFill>
-                  <a:srgbClr val="333333"/>
-                </a:solidFill>
-                <a:latin typeface="Calibri"/>
-              </a:rPr>
-              <a:t> Proyecto Java con la clase Mascota (atributos privados, constructor y toString) y un main que crea dos objetos distintos</a:t>
+              <a:rPr sz="1300" b="0" i="0">
+                <a:solidFill>
+                  <a:srgbClr val="FFFFFF"/>
+                </a:solidFill>
+                <a:latin typeface="Calibri"/>
+              </a:rPr>
+              <a:t>public class Mascota {</a:t>
             </a:r>
           </a:p>
           <a:p>
             <a:pPr>
               <a:spcAft>
-                <a:spcPts val="800"/>
+                <a:spcPts val="371"/>
               </a:spcAft>
             </a:pPr>
             <a:r>
-              <a:rPr sz="2000" b="0" i="0">
-                <a:solidFill>
-                  <a:srgbClr val="333333"/>
-                </a:solidFill>
-                <a:latin typeface="Calibri"/>
-              </a:rPr>
-              <a:t>–   </a:t>
-            </a:r>
-            <a:r>
-              <a:rPr sz="2000" b="1" i="0">
-                <a:solidFill>
-                  <a:srgbClr val="333333"/>
-                </a:solidFill>
-                <a:latin typeface="Calibri"/>
-              </a:rPr>
-              <a:t>Exito:</a:t>
-            </a:r>
-            <a:r>
-              <a:rPr sz="2000" b="0" i="0">
-                <a:solidFill>
-                  <a:srgbClr val="333333"/>
-                </a:solidFill>
-                <a:latin typeface="Calibri"/>
-              </a:rPr>
-              <a:t> El proyecto compila y ejecuta sin errores en VS Code.</a:t>
+              <a:rPr sz="1300" b="0" i="0">
+                <a:solidFill>
+                  <a:srgbClr val="FFFFFF"/>
+                </a:solidFill>
+                <a:latin typeface="Calibri"/>
+              </a:rPr>
+              <a:t>    private String id;          // private = nadie lo toca desde afuera</a:t>
             </a:r>
           </a:p>
           <a:p>
             <a:pPr>
               <a:spcAft>
-                <a:spcPts val="800"/>
+                <a:spcPts val="371"/>
               </a:spcAft>
             </a:pPr>
             <a:r>
-              <a:rPr sz="2000" b="0" i="0">
-                <a:solidFill>
-                  <a:srgbClr val="333333"/>
-                </a:solidFill>
-                <a:latin typeface="Calibri"/>
-              </a:rPr>
-              <a:t>–   </a:t>
-            </a:r>
-            <a:r>
-              <a:rPr sz="2000" b="1" i="0">
-                <a:solidFill>
-                  <a:srgbClr val="333333"/>
-                </a:solidFill>
-                <a:latin typeface="Calibri"/>
-              </a:rPr>
-              <a:t>Exito:</a:t>
-            </a:r>
-            <a:r>
-              <a:rPr sz="2000" b="0" i="0">
-                <a:solidFill>
-                  <a:srgbClr val="333333"/>
-                </a:solidFill>
-                <a:latin typeface="Calibri"/>
-              </a:rPr>
-              <a:t> La clase Mascota tiene atributos private y un constructor que los inicializa todos.</a:t>
+              <a:rPr sz="1300" b="0" i="0">
+                <a:solidFill>
+                  <a:srgbClr val="FFFFFF"/>
+                </a:solidFill>
+                <a:latin typeface="Calibri"/>
+              </a:rPr>
+              <a:t>    private String nombre;</a:t>
             </a:r>
           </a:p>
           <a:p>
             <a:pPr>
               <a:spcAft>
-                <a:spcPts val="800"/>
+                <a:spcPts val="371"/>
               </a:spcAft>
             </a:pPr>
             <a:r>
-              <a:rPr sz="2000" b="0" i="0">
-                <a:solidFill>
-                  <a:srgbClr val="333333"/>
-                </a:solidFill>
-                <a:latin typeface="Calibri"/>
-              </a:rPr>
-              <a:t>–   </a:t>
-            </a:r>
-            <a:r>
-              <a:rPr sz="2000" b="1" i="0">
-                <a:solidFill>
-                  <a:srgbClr val="333333"/>
-                </a:solidFill>
-                <a:latin typeface="Calibri"/>
-              </a:rPr>
-              <a:t>Exito:</a:t>
-            </a:r>
-            <a:r>
-              <a:rPr sz="2000" b="0" i="0">
-                <a:solidFill>
-                  <a:srgbClr val="333333"/>
-                </a:solidFill>
-                <a:latin typeface="Calibri"/>
-              </a:rPr>
-              <a:t> El main crea dos objetos distintos de la misma clase.</a:t>
+              <a:rPr sz="1300" b="0" i="0">
+                <a:solidFill>
+                  <a:srgbClr val="FFFFFF"/>
+                </a:solidFill>
+                <a:latin typeface="Calibri"/>
+              </a:rPr>
+              <a:t>    private String especie;</a:t>
             </a:r>
           </a:p>
           <a:p>
             <a:pPr>
               <a:spcAft>
-                <a:spcPts val="800"/>
+                <a:spcPts val="371"/>
               </a:spcAft>
             </a:pPr>
             <a:r>
-              <a:rPr sz="2000" b="0" i="0">
-                <a:solidFill>
-                  <a:srgbClr val="333333"/>
-                </a:solidFill>
-                <a:latin typeface="Calibri"/>
-              </a:rPr>
-              <a:t>–   </a:t>
-            </a:r>
-            <a:r>
-              <a:rPr sz="2000" b="1" i="0">
-                <a:solidFill>
-                  <a:srgbClr val="333333"/>
-                </a:solidFill>
-                <a:latin typeface="Calibri"/>
-              </a:rPr>
-              <a:t>Exito:</a:t>
-            </a:r>
-            <a:r>
-              <a:rPr sz="2000" b="0" i="0">
-                <a:solidFill>
-                  <a:srgbClr val="333333"/>
-                </a:solidFill>
-                <a:latin typeface="Calibri"/>
-              </a:rPr>
-              <a:t> Al imprimir una mascota se ve texto legible, no vetcare.Mascota@6d06d69c.</a:t>
+              <a:rPr sz="1300" b="0" i="0">
+                <a:solidFill>
+                  <a:srgbClr val="FFFFFF"/>
+                </a:solidFill>
+                <a:latin typeface="Calibri"/>
+              </a:rPr>
+              <a:t/>
             </a:r>
           </a:p>
           <a:p>
             <a:pPr>
               <a:spcAft>
-                <a:spcPts val="800"/>
+                <a:spcPts val="371"/>
               </a:spcAft>
             </a:pPr>
             <a:r>
-              <a:rPr sz="2000" b="0" i="0">
-                <a:solidFill>
-                  <a:srgbClr val="333333"/>
-                </a:solidFill>
-                <a:latin typeface="Calibri"/>
-              </a:rPr>
-              <a:t>–   </a:t>
-            </a:r>
-            <a:r>
-              <a:rPr sz="2000" b="1" i="0">
-                <a:solidFill>
-                  <a:srgbClr val="333333"/>
-                </a:solidFill>
-                <a:latin typeface="Calibri"/>
-              </a:rPr>
-              <a:t>Entrega en la plataforma del curso</a:t>
-            </a:r>
-            <a:r>
-              <a:rPr sz="2000" b="0" i="0">
-                <a:solidFill>
-                  <a:srgbClr val="333333"/>
-                </a:solidFill>
-                <a:latin typeface="Calibri"/>
-              </a:rPr>
-              <a:t> — en la fecha que indique el docente.</a:t>
-            </a:r>
-          </a:p>
-        </p:txBody>
-      </p:sp>
-      <p:sp>
-        <p:nvSpPr>
-          <p:cNvPr id="6" name="TextBox 5"/>
+              <a:rPr sz="1300" b="0" i="0">
+                <a:solidFill>
+                  <a:srgbClr val="FFFFFF"/>
+                </a:solidFill>
+                <a:latin typeface="Calibri"/>
+              </a:rPr>
+              <a:t>    public Mascota(String id, String nombre, String especie) {</a:t>
+            </a:r>
+          </a:p>
+          <a:p>
+            <a:pPr>
+              <a:spcAft>
+                <a:spcPts val="371"/>
+              </a:spcAft>
+            </a:pPr>
+            <a:r>
+              <a:rPr sz="1300" b="0" i="0">
+                <a:solidFill>
+                  <a:srgbClr val="FFFFFF"/>
+                </a:solidFill>
+                <a:latin typeface="Calibri"/>
+              </a:rPr>
+              <a:t>        this.id = id;           // this. distingue atributo de parametro</a:t>
+            </a:r>
+          </a:p>
+          <a:p>
+            <a:pPr>
+              <a:spcAft>
+                <a:spcPts val="371"/>
+              </a:spcAft>
+            </a:pPr>
+            <a:r>
+              <a:rPr sz="1300" b="0" i="0">
+                <a:solidFill>
+                  <a:srgbClr val="FFFFFF"/>
+                </a:solidFill>
+                <a:latin typeface="Calibri"/>
+              </a:rPr>
+              <a:t>        this.nombre = nombre;</a:t>
+            </a:r>
+          </a:p>
+          <a:p>
+            <a:pPr>
+              <a:spcAft>
+                <a:spcPts val="371"/>
+              </a:spcAft>
+            </a:pPr>
+            <a:r>
+              <a:rPr sz="1300" b="0" i="0">
+                <a:solidFill>
+                  <a:srgbClr val="FFFFFF"/>
+                </a:solidFill>
+                <a:latin typeface="Calibri"/>
+              </a:rPr>
+              <a:t>        this.especie = especie;</a:t>
+            </a:r>
+          </a:p>
+          <a:p>
+            <a:pPr>
+              <a:spcAft>
+                <a:spcPts val="371"/>
+              </a:spcAft>
+            </a:pPr>
+            <a:r>
+              <a:rPr sz="1300" b="0" i="0">
+                <a:solidFill>
+                  <a:srgbClr val="FFFFFF"/>
+                </a:solidFill>
+                <a:latin typeface="Calibri"/>
+              </a:rPr>
+              <a:t>    }</a:t>
+            </a:r>
+          </a:p>
+          <a:p>
+            <a:pPr>
+              <a:spcAft>
+                <a:spcPts val="371"/>
+              </a:spcAft>
+            </a:pPr>
+            <a:r>
+              <a:rPr sz="1300" b="0" i="0">
+                <a:solidFill>
+                  <a:srgbClr val="FFFFFF"/>
+                </a:solidFill>
+                <a:latin typeface="Calibri"/>
+              </a:rPr>
+              <a:t/>
+            </a:r>
+          </a:p>
+          <a:p>
+            <a:pPr>
+              <a:spcAft>
+                <a:spcPts val="371"/>
+              </a:spcAft>
+            </a:pPr>
+            <a:r>
+              <a:rPr sz="1300" b="0" i="0">
+                <a:solidFill>
+                  <a:srgbClr val="FFFFFF"/>
+                </a:solidFill>
+                <a:latin typeface="Calibri"/>
+              </a:rPr>
+              <a:t>    @Override</a:t>
+            </a:r>
+          </a:p>
+          <a:p>
+            <a:pPr>
+              <a:spcAft>
+                <a:spcPts val="371"/>
+              </a:spcAft>
+            </a:pPr>
+            <a:r>
+              <a:rPr sz="1300" b="0" i="0">
+                <a:solidFill>
+                  <a:srgbClr val="FFFFFF"/>
+                </a:solidFill>
+                <a:latin typeface="Calibri"/>
+              </a:rPr>
+              <a:t>    public String toString() {  // sin esto se imprime vetcare.Mascota@6d06d69c</a:t>
+            </a:r>
+          </a:p>
+          <a:p>
+            <a:pPr>
+              <a:spcAft>
+                <a:spcPts val="371"/>
+              </a:spcAft>
+            </a:pPr>
+            <a:r>
+              <a:rPr sz="1300" b="0" i="0">
+                <a:solidFill>
+                  <a:srgbClr val="FFFFFF"/>
+                </a:solidFill>
+                <a:latin typeface="Calibri"/>
+              </a:rPr>
+              <a:t>        return id + " - " + nombre + " (" + especie + ")";</a:t>
+            </a:r>
+          </a:p>
+          <a:p>
+            <a:pPr>
+              <a:spcAft>
+                <a:spcPts val="371"/>
+              </a:spcAft>
+            </a:pPr>
+            <a:r>
+              <a:rPr sz="1300" b="0" i="0">
+                <a:solidFill>
+                  <a:srgbClr val="FFFFFF"/>
+                </a:solidFill>
+                <a:latin typeface="Calibri"/>
+              </a:rPr>
+              <a:t>    }</a:t>
+            </a:r>
+          </a:p>
+          <a:p>
+            <a:pPr>
+              <a:spcAft>
+                <a:spcPts val="371"/>
+              </a:spcAft>
+            </a:pPr>
+            <a:r>
+              <a:rPr sz="1300" b="0" i="0">
+                <a:solidFill>
+                  <a:srgbClr val="FFFFFF"/>
+                </a:solidFill>
+                <a:latin typeface="Calibri"/>
+              </a:rPr>
+              <a:t>}</a:t>
+            </a:r>
+          </a:p>
+        </p:txBody>
+      </p:sp>
+      <p:sp>
+        <p:nvSpPr>
+          <p:cNvPr id="9" name="TextBox 8"/>
+          <p:cNvSpPr txBox="1"/>
+          <p:nvPr/>
+        </p:nvSpPr>
+        <p:spPr>
+          <a:xfrm>
+            <a:off x="457200" y="6080760"/>
+            <a:ext cx="11277295" cy="320040"/>
+          </a:xfrm>
+          <a:prstGeom prst="rect">
+            <a:avLst/>
+          </a:prstGeom>
+          <a:noFill/>
+        </p:spPr>
+        <p:txBody>
+          <a:bodyPr wrap="square">
+            <a:spAutoFit/>
+          </a:bodyPr>
+          <a:lstStyle/>
+          <a:p>
+            <a:pPr algn="ctr"/>
+            <a:r>
+              <a:rPr sz="1200" b="0" i="1">
+                <a:solidFill>
+                  <a:srgbClr val="666666"/>
+                </a:solidFill>
+                <a:latin typeface="Calibri"/>
+              </a:rPr>
+              <a:t>La clase es el molde; cada new Mascota(...) fabrica un objeto distinto con ese molde.</a:t>
+            </a:r>
+          </a:p>
+        </p:txBody>
+      </p:sp>
+      <p:sp>
+        <p:nvSpPr>
+          <p:cNvPr id="10" name="TextBox 9"/>
           <p:cNvSpPr txBox="1"/>
           <p:nvPr/>
         </p:nvSpPr>
@@ -12594,109 +12086,21 @@
                 </a:solidFill>
                 <a:latin typeface="Calibri"/>
               </a:rPr>
-              <a:t>Para el PI esta semana</a:t>
-            </a:r>
-          </a:p>
-        </p:txBody>
-      </p:sp>
-      <p:sp>
-        <p:nvSpPr>
-          <p:cNvPr id="5" name="Rounded Rectangle 4"/>
-          <p:cNvSpPr/>
-          <p:nvPr/>
-        </p:nvSpPr>
-        <p:spPr>
-          <a:xfrm>
-            <a:off x="457200" y="1261872"/>
-            <a:ext cx="11277295" cy="1051560"/>
-          </a:xfrm>
-          <a:prstGeom prst="roundRect">
-            <a:avLst>
-              <a:gd name="adj" fmla="val 12000"/>
-            </a:avLst>
-          </a:prstGeom>
-          <a:solidFill>
-            <a:srgbClr val="E8F4FA"/>
-          </a:solidFill>
-          <a:ln>
-            <a:noFill/>
-          </a:ln>
-        </p:spPr>
-        <p:style>
-          <a:lnRef idx="1">
-            <a:schemeClr val="accent1"/>
-          </a:lnRef>
-          <a:fillRef idx="3">
-            <a:schemeClr val="accent1"/>
-          </a:fillRef>
-          <a:effectRef idx="2">
-            <a:schemeClr val="accent1"/>
-          </a:effectRef>
-          <a:fontRef idx="minor">
-            <a:schemeClr val="lt1"/>
-          </a:fontRef>
-        </p:style>
-        <p:txBody>
-          <a:bodyPr rtlCol="0" anchor="ctr"/>
-          <a:lstStyle/>
-          <a:p>
-            <a:pPr algn="ctr"/>
-          </a:p>
-        </p:txBody>
-      </p:sp>
-      <p:sp>
-        <p:nvSpPr>
-          <p:cNvPr id="6" name="Rectangle 5"/>
-          <p:cNvSpPr/>
-          <p:nvPr/>
-        </p:nvSpPr>
-        <p:spPr>
-          <a:xfrm>
-            <a:off x="457200" y="1261872"/>
-            <a:ext cx="128016" cy="1051560"/>
-          </a:xfrm>
-          <a:prstGeom prst="rect">
-            <a:avLst/>
-          </a:prstGeom>
-          <a:solidFill>
-            <a:srgbClr val="269CCB"/>
-          </a:solidFill>
-          <a:ln>
-            <a:noFill/>
-          </a:ln>
-        </p:spPr>
-        <p:style>
-          <a:lnRef idx="1">
-            <a:schemeClr val="accent1"/>
-          </a:lnRef>
-          <a:fillRef idx="3">
-            <a:schemeClr val="accent1"/>
-          </a:fillRef>
-          <a:effectRef idx="2">
-            <a:schemeClr val="accent1"/>
-          </a:effectRef>
-          <a:fontRef idx="minor">
-            <a:schemeClr val="lt1"/>
-          </a:fontRef>
-        </p:style>
-        <p:txBody>
-          <a:bodyPr rtlCol="0" anchor="ctr"/>
-          <a:lstStyle/>
-          <a:p>
-            <a:pPr algn="ctr"/>
-          </a:p>
-        </p:txBody>
-      </p:sp>
-      <p:sp>
-        <p:nvSpPr>
-          <p:cNvPr id="7" name="TextBox 6"/>
+              <a:t>Demo del dia</a:t>
+            </a:r>
+          </a:p>
+        </p:txBody>
+      </p:sp>
+      <p:sp>
+        <p:nvSpPr>
+          <p:cNvPr id="5" name="TextBox 4"/>
           <p:cNvSpPr txBox="1"/>
           <p:nvPr/>
         </p:nvSpPr>
         <p:spPr>
           <a:xfrm>
-            <a:off x="777240" y="1399031"/>
-            <a:ext cx="10774375" cy="822959"/>
+            <a:off x="457200" y="1170432"/>
+            <a:ext cx="11277295" cy="5230368"/>
           </a:xfrm>
           <a:prstGeom prst="rect">
             <a:avLst/>
@@ -12709,313 +12113,94 @@
           </a:bodyPr>
           <a:lstStyle/>
           <a:p>
-            <a:r>
-              <a:rPr sz="1200" b="1" i="0">
-                <a:solidFill>
-                  <a:srgbClr val="269CCB"/>
-                </a:solidFill>
-                <a:latin typeface="Calibri"/>
-              </a:rPr>
-              <a:t>Info</a:t>
-            </a:r>
-          </a:p>
-          <a:p>
             <a:pPr>
-              <a:spcBef>
-                <a:spcPts val="400"/>
-              </a:spcBef>
+              <a:spcAft>
+                <a:spcPts val="800"/>
+              </a:spcAft>
             </a:pPr>
             <a:r>
-              <a:rPr sz="1400" b="0" i="0">
+              <a:rPr sz="2000" b="0" i="0">
                 <a:solidFill>
                   <a:srgbClr val="333333"/>
                 </a:solidFill>
                 <a:latin typeface="Calibri"/>
               </a:rPr>
-              <a:t>Hito: Entorno de desarrollo listo y la primera clase del dominio VetCare escrita</a:t>
-            </a:r>
-          </a:p>
-        </p:txBody>
-      </p:sp>
-      <p:sp>
-        <p:nvSpPr>
-          <p:cNvPr id="8" name="Rounded Rectangle 7"/>
-          <p:cNvSpPr/>
-          <p:nvPr/>
-        </p:nvSpPr>
-        <p:spPr>
-          <a:xfrm>
-            <a:off x="457200" y="2478024"/>
-            <a:ext cx="11277295" cy="1051560"/>
-          </a:xfrm>
-          <a:prstGeom prst="roundRect">
-            <a:avLst>
-              <a:gd name="adj" fmla="val 12000"/>
-            </a:avLst>
-          </a:prstGeom>
-          <a:solidFill>
-            <a:srgbClr val="FFF8E1"/>
-          </a:solidFill>
-          <a:ln>
-            <a:noFill/>
-          </a:ln>
-        </p:spPr>
-        <p:style>
-          <a:lnRef idx="1">
-            <a:schemeClr val="accent1"/>
-          </a:lnRef>
-          <a:fillRef idx="3">
-            <a:schemeClr val="accent1"/>
-          </a:fillRef>
-          <a:effectRef idx="2">
-            <a:schemeClr val="accent1"/>
-          </a:effectRef>
-          <a:fontRef idx="minor">
-            <a:schemeClr val="lt1"/>
-          </a:fontRef>
-        </p:style>
-        <p:txBody>
-          <a:bodyPr rtlCol="0" anchor="ctr"/>
-          <a:lstStyle/>
-          <a:p>
-            <a:pPr algn="ctr"/>
-          </a:p>
-        </p:txBody>
-      </p:sp>
-      <p:sp>
-        <p:nvSpPr>
-          <p:cNvPr id="9" name="Rectangle 8"/>
-          <p:cNvSpPr/>
-          <p:nvPr/>
-        </p:nvSpPr>
-        <p:spPr>
-          <a:xfrm>
-            <a:off x="457200" y="2478024"/>
-            <a:ext cx="128016" cy="1051560"/>
-          </a:xfrm>
-          <a:prstGeom prst="rect">
-            <a:avLst/>
-          </a:prstGeom>
-          <a:solidFill>
-            <a:srgbClr val="FFD000"/>
-          </a:solidFill>
-          <a:ln>
-            <a:noFill/>
-          </a:ln>
-        </p:spPr>
-        <p:style>
-          <a:lnRef idx="1">
-            <a:schemeClr val="accent1"/>
-          </a:lnRef>
-          <a:fillRef idx="3">
-            <a:schemeClr val="accent1"/>
-          </a:fillRef>
-          <a:effectRef idx="2">
-            <a:schemeClr val="accent1"/>
-          </a:effectRef>
-          <a:fontRef idx="minor">
-            <a:schemeClr val="lt1"/>
-          </a:fontRef>
-        </p:style>
-        <p:txBody>
-          <a:bodyPr rtlCol="0" anchor="ctr"/>
-          <a:lstStyle/>
-          <a:p>
-            <a:pPr algn="ctr"/>
-          </a:p>
-        </p:txBody>
-      </p:sp>
-      <p:sp>
-        <p:nvSpPr>
-          <p:cNvPr id="10" name="TextBox 9"/>
-          <p:cNvSpPr txBox="1"/>
-          <p:nvPr/>
-        </p:nvSpPr>
-        <p:spPr>
-          <a:xfrm>
-            <a:off x="777240" y="2615184"/>
-            <a:ext cx="10774375" cy="822959"/>
-          </a:xfrm>
-          <a:prstGeom prst="rect">
-            <a:avLst/>
-          </a:prstGeom>
-          <a:noFill/>
-        </p:spPr>
-        <p:txBody>
-          <a:bodyPr wrap="square">
-            <a:spAutoFit/>
-          </a:bodyPr>
-          <a:lstStyle/>
-          <a:p>
-            <a:r>
-              <a:rPr sz="1200" b="1" i="0">
-                <a:solidFill>
-                  <a:srgbClr val="FFD000"/>
-                </a:solidFill>
-                <a:latin typeface="Calibri"/>
-              </a:rPr>
-              <a:t>Aclaración</a:t>
+              <a:t>–   </a:t>
+            </a:r>
+            <a:r>
+              <a:rPr sz="2000" b="1" i="0">
+                <a:solidFill>
+                  <a:srgbClr val="333333"/>
+                </a:solidFill>
+                <a:latin typeface="Calibri"/>
+              </a:rPr>
+              <a:t>Herramienta:</a:t>
+            </a:r>
+            <a:r>
+              <a:rPr sz="2000" b="0" i="0">
+                <a:solidFill>
+                  <a:srgbClr val="333333"/>
+                </a:solidFill>
+                <a:latin typeface="Calibri"/>
+              </a:rPr>
+              <a:t> Visual Studio Code (Java)</a:t>
             </a:r>
           </a:p>
           <a:p>
             <a:pPr>
-              <a:spcBef>
-                <a:spcPts val="400"/>
-              </a:spcBef>
+              <a:spcAft>
+                <a:spcPts val="800"/>
+              </a:spcAft>
             </a:pPr>
             <a:r>
-              <a:rPr sz="1400" b="0" i="0">
+              <a:rPr sz="2000" b="0" i="0">
                 <a:solidFill>
                   <a:srgbClr val="333333"/>
                 </a:solidFill>
                 <a:latin typeface="Calibri"/>
               </a:rPr>
-              <a:t>Enunciado completo: Clases/Proyecto Integrador/ (VetCare).</a:t>
-            </a:r>
-          </a:p>
-        </p:txBody>
-      </p:sp>
-      <p:sp>
-        <p:nvSpPr>
-          <p:cNvPr id="11" name="Rounded Rectangle 10"/>
-          <p:cNvSpPr/>
-          <p:nvPr/>
-        </p:nvSpPr>
-        <p:spPr>
-          <a:xfrm>
-            <a:off x="457200" y="3694176"/>
-            <a:ext cx="11277295" cy="1051560"/>
-          </a:xfrm>
-          <a:prstGeom prst="roundRect">
-            <a:avLst>
-              <a:gd name="adj" fmla="val 12000"/>
-            </a:avLst>
-          </a:prstGeom>
-          <a:solidFill>
-            <a:srgbClr val="FBE4E4"/>
-          </a:solidFill>
-          <a:ln>
-            <a:noFill/>
-          </a:ln>
-        </p:spPr>
-        <p:style>
-          <a:lnRef idx="1">
-            <a:schemeClr val="accent1"/>
-          </a:lnRef>
-          <a:fillRef idx="3">
-            <a:schemeClr val="accent1"/>
-          </a:fillRef>
-          <a:effectRef idx="2">
-            <a:schemeClr val="accent1"/>
-          </a:effectRef>
-          <a:fontRef idx="minor">
-            <a:schemeClr val="lt1"/>
-          </a:fontRef>
-        </p:style>
-        <p:txBody>
-          <a:bodyPr rtlCol="0" anchor="ctr"/>
-          <a:lstStyle/>
-          <a:p>
-            <a:pPr algn="ctr"/>
-          </a:p>
-        </p:txBody>
-      </p:sp>
-      <p:sp>
-        <p:nvSpPr>
-          <p:cNvPr id="12" name="Rectangle 11"/>
-          <p:cNvSpPr/>
-          <p:nvPr/>
-        </p:nvSpPr>
-        <p:spPr>
-          <a:xfrm>
-            <a:off x="457200" y="3694176"/>
-            <a:ext cx="128016" cy="1051560"/>
-          </a:xfrm>
-          <a:prstGeom prst="rect">
-            <a:avLst/>
-          </a:prstGeom>
-          <a:solidFill>
-            <a:srgbClr val="A02030"/>
-          </a:solidFill>
-          <a:ln>
-            <a:noFill/>
-          </a:ln>
-        </p:spPr>
-        <p:style>
-          <a:lnRef idx="1">
-            <a:schemeClr val="accent1"/>
-          </a:lnRef>
-          <a:fillRef idx="3">
-            <a:schemeClr val="accent1"/>
-          </a:fillRef>
-          <a:effectRef idx="2">
-            <a:schemeClr val="accent1"/>
-          </a:effectRef>
-          <a:fontRef idx="minor">
-            <a:schemeClr val="lt1"/>
-          </a:fontRef>
-        </p:style>
-        <p:txBody>
-          <a:bodyPr rtlCol="0" anchor="ctr"/>
-          <a:lstStyle/>
-          <a:p>
-            <a:pPr algn="ctr"/>
-          </a:p>
-        </p:txBody>
-      </p:sp>
-      <p:sp>
-        <p:nvSpPr>
-          <p:cNvPr id="13" name="TextBox 12"/>
-          <p:cNvSpPr txBox="1"/>
-          <p:nvPr/>
-        </p:nvSpPr>
-        <p:spPr>
-          <a:xfrm>
-            <a:off x="777240" y="3831336"/>
-            <a:ext cx="10774375" cy="822959"/>
-          </a:xfrm>
-          <a:prstGeom prst="rect">
-            <a:avLst/>
-          </a:prstGeom>
-          <a:noFill/>
-        </p:spPr>
-        <p:txBody>
-          <a:bodyPr wrap="square">
-            <a:spAutoFit/>
-          </a:bodyPr>
-          <a:lstStyle/>
-          <a:p>
-            <a:r>
-              <a:rPr sz="1200" b="1" i="0">
-                <a:solidFill>
-                  <a:srgbClr val="A02030"/>
-                </a:solidFill>
-                <a:latin typeface="Calibri"/>
-              </a:rPr>
-              <a:t>Atención</a:t>
+              <a:t>–   </a:t>
+            </a:r>
+            <a:r>
+              <a:rPr sz="2000" b="1" i="0">
+                <a:solidFill>
+                  <a:srgbClr val="333333"/>
+                </a:solidFill>
+                <a:latin typeface="Calibri"/>
+              </a:rPr>
+              <a:t>Demo:</a:t>
+            </a:r>
+            <a:r>
+              <a:rPr sz="2000" b="0" i="0">
+                <a:solidFill>
+                  <a:srgbClr val="333333"/>
+                </a:solidFill>
+                <a:latin typeface="Calibri"/>
+              </a:rPr>
+              <a:t> Escribir en vivo la clase Mascota y un main que instancia dos mascotas con datos distintos, mostrando que salen del mismo molde</a:t>
             </a:r>
           </a:p>
           <a:p>
             <a:pPr>
-              <a:spcBef>
-                <a:spcPts val="400"/>
-              </a:spcBef>
+              <a:spcAft>
+                <a:spcPts val="800"/>
+              </a:spcAft>
             </a:pPr>
             <a:r>
-              <a:rPr sz="1400" b="0" i="0">
+              <a:rPr sz="2000" b="0" i="0">
                 <a:solidFill>
                   <a:srgbClr val="333333"/>
                 </a:solidFill>
                 <a:latin typeface="Calibri"/>
               </a:rPr>
-              <a:t>Entrega del taller, si el docente lo asigna · en la fecha que indique el docente.</a:t>
-            </a:r>
-          </a:p>
-        </p:txBody>
-      </p:sp>
-      <p:sp>
-        <p:nvSpPr>
-          <p:cNvPr id="14" name="TextBox 13"/>
+              <a:t>–   Mismo dominio VetCare — no otro ejemplo.</a:t>
+            </a:r>
+          </a:p>
+        </p:txBody>
+      </p:sp>
+      <p:sp>
+        <p:nvSpPr>
+          <p:cNvPr id="6" name="TextBox 5"/>
           <p:cNvSpPr txBox="1"/>
           <p:nvPr/>
         </p:nvSpPr>
@@ -13083,6 +12268,3163 @@
         <p:spPr>
           <a:xfrm>
             <a:off x="0" y="0"/>
+            <a:ext cx="12191695" cy="960120"/>
+          </a:xfrm>
+          <a:prstGeom prst="rect">
+            <a:avLst/>
+          </a:prstGeom>
+          <a:solidFill>
+            <a:srgbClr val="095292"/>
+          </a:solidFill>
+          <a:ln>
+            <a:noFill/>
+          </a:ln>
+        </p:spPr>
+        <p:style>
+          <a:lnRef idx="1">
+            <a:schemeClr val="accent1"/>
+          </a:lnRef>
+          <a:fillRef idx="3">
+            <a:schemeClr val="accent1"/>
+          </a:fillRef>
+          <a:effectRef idx="2">
+            <a:schemeClr val="accent1"/>
+          </a:effectRef>
+          <a:fontRef idx="minor">
+            <a:schemeClr val="lt1"/>
+          </a:fontRef>
+        </p:style>
+        <p:txBody>
+          <a:bodyPr rtlCol="0" anchor="ctr"/>
+          <a:lstStyle/>
+          <a:p>
+            <a:pPr algn="ctr"/>
+          </a:p>
+        </p:txBody>
+      </p:sp>
+      <p:sp>
+        <p:nvSpPr>
+          <p:cNvPr id="3" name="Rectangle 2"/>
+          <p:cNvSpPr/>
+          <p:nvPr/>
+        </p:nvSpPr>
+        <p:spPr>
+          <a:xfrm>
+            <a:off x="0" y="960120"/>
+            <a:ext cx="12191695" cy="41148"/>
+          </a:xfrm>
+          <a:prstGeom prst="rect">
+            <a:avLst/>
+          </a:prstGeom>
+          <a:solidFill>
+            <a:srgbClr val="FFD000"/>
+          </a:solidFill>
+          <a:ln>
+            <a:noFill/>
+          </a:ln>
+        </p:spPr>
+        <p:style>
+          <a:lnRef idx="1">
+            <a:schemeClr val="accent1"/>
+          </a:lnRef>
+          <a:fillRef idx="3">
+            <a:schemeClr val="accent1"/>
+          </a:fillRef>
+          <a:effectRef idx="2">
+            <a:schemeClr val="accent1"/>
+          </a:effectRef>
+          <a:fontRef idx="minor">
+            <a:schemeClr val="lt1"/>
+          </a:fontRef>
+        </p:style>
+        <p:txBody>
+          <a:bodyPr rtlCol="0" anchor="ctr"/>
+          <a:lstStyle/>
+          <a:p>
+            <a:pPr algn="ctr"/>
+          </a:p>
+        </p:txBody>
+      </p:sp>
+      <p:sp>
+        <p:nvSpPr>
+          <p:cNvPr id="4" name="TextBox 3"/>
+          <p:cNvSpPr txBox="1"/>
+          <p:nvPr/>
+        </p:nvSpPr>
+        <p:spPr>
+          <a:xfrm>
+            <a:off x="457200" y="164592"/>
+            <a:ext cx="11277295" cy="502920"/>
+          </a:xfrm>
+          <a:prstGeom prst="rect">
+            <a:avLst/>
+          </a:prstGeom>
+          <a:noFill/>
+        </p:spPr>
+        <p:txBody>
+          <a:bodyPr wrap="square">
+            <a:spAutoFit/>
+          </a:bodyPr>
+          <a:lstStyle/>
+          <a:p>
+            <a:r>
+              <a:rPr sz="2600" b="1" i="0">
+                <a:solidFill>
+                  <a:srgbClr val="FFFFFF"/>
+                </a:solidFill>
+                <a:latin typeface="Calibri"/>
+              </a:rPr>
+              <a:t>Taller PI — por que importa</a:t>
+            </a:r>
+          </a:p>
+        </p:txBody>
+      </p:sp>
+      <p:sp>
+        <p:nvSpPr>
+          <p:cNvPr id="5" name="TextBox 4"/>
+          <p:cNvSpPr txBox="1"/>
+          <p:nvPr/>
+        </p:nvSpPr>
+        <p:spPr>
+          <a:xfrm>
+            <a:off x="457200" y="1170432"/>
+            <a:ext cx="11277295" cy="5230368"/>
+          </a:xfrm>
+          <a:prstGeom prst="rect">
+            <a:avLst/>
+          </a:prstGeom>
+          <a:noFill/>
+        </p:spPr>
+        <p:txBody>
+          <a:bodyPr wrap="square">
+            <a:spAutoFit/>
+          </a:bodyPr>
+          <a:lstStyle/>
+          <a:p>
+            <a:pPr>
+              <a:spcAft>
+                <a:spcPts val="800"/>
+              </a:spcAft>
+            </a:pPr>
+            <a:r>
+              <a:rPr sz="2000" b="0" i="0">
+                <a:solidFill>
+                  <a:srgbClr val="333333"/>
+                </a:solidFill>
+                <a:latin typeface="Calibri"/>
+              </a:rPr>
+              <a:t>–   </a:t>
+            </a:r>
+            <a:r>
+              <a:rPr sz="2000" b="1" i="0">
+                <a:solidFill>
+                  <a:srgbClr val="333333"/>
+                </a:solidFill>
+                <a:latin typeface="Calibri"/>
+              </a:rPr>
+              <a:t>Por que importa al PI:</a:t>
+            </a:r>
+            <a:r>
+              <a:rPr sz="2000" b="0" i="0">
+                <a:solidFill>
+                  <a:srgbClr val="333333"/>
+                </a:solidFill>
+                <a:latin typeface="Calibri"/>
+              </a:rPr>
+              <a:t> la clase Mascota que escriba hoy es la semilla de todo VetCare; las clases siguientes se apoyan en ella.</a:t>
+            </a:r>
+          </a:p>
+          <a:p>
+            <a:pPr>
+              <a:spcAft>
+                <a:spcPts val="800"/>
+              </a:spcAft>
+            </a:pPr>
+            <a:r>
+              <a:rPr sz="2000" b="0" i="0">
+                <a:solidFill>
+                  <a:srgbClr val="333333"/>
+                </a:solidFill>
+                <a:latin typeface="Calibri"/>
+              </a:rPr>
+              <a:t>–   Sin entorno funcionando no se puede avanzar en ninguna sesion posterior: por eso hoy se resuelve.</a:t>
+            </a:r>
+          </a:p>
+          <a:p>
+            <a:pPr>
+              <a:spcAft>
+                <a:spcPts val="800"/>
+              </a:spcAft>
+            </a:pPr>
+            <a:r>
+              <a:rPr sz="2000" b="0" i="0">
+                <a:solidFill>
+                  <a:srgbClr val="333333"/>
+                </a:solidFill>
+                <a:latin typeface="Calibri"/>
+              </a:rPr>
+              <a:t>–   El diagnostico de hoy no tiene nota: sirve para calibrar el ritmo de las proximas clases.</a:t>
+            </a:r>
+          </a:p>
+        </p:txBody>
+      </p:sp>
+      <p:sp>
+        <p:nvSpPr>
+          <p:cNvPr id="6" name="TextBox 5"/>
+          <p:cNvSpPr txBox="1"/>
+          <p:nvPr/>
+        </p:nvSpPr>
+        <p:spPr>
+          <a:xfrm>
+            <a:off x="11185855" y="6473952"/>
+            <a:ext cx="640080" cy="274320"/>
+          </a:xfrm>
+          <a:prstGeom prst="rect">
+            <a:avLst/>
+          </a:prstGeom>
+          <a:noFill/>
+        </p:spPr>
+        <p:txBody>
+          <a:bodyPr wrap="square">
+            <a:spAutoFit/>
+          </a:bodyPr>
+          <a:lstStyle/>
+          <a:p>
+            <a:pPr algn="r"/>
+            <a:r>
+              <a:rPr sz="1100" b="0" i="0">
+                <a:solidFill>
+                  <a:srgbClr val="666666"/>
+                </a:solidFill>
+                <a:latin typeface="Calibri"/>
+              </a:rPr>
+              <a:t>33</a:t>
+            </a:r>
+          </a:p>
+        </p:txBody>
+      </p:sp>
+    </p:spTree>
+  </p:cSld>
+  <p:clrMapOvr>
+    <a:masterClrMapping/>
+  </p:clrMapOvr>
+</p:sld>
+</file>
+
+<file path=ppt/slides/slide34.xml><?xml version="1.0" encoding="utf-8"?>
+<p:sld xmlns:a="http://schemas.openxmlformats.org/drawingml/2006/main" xmlns:p="http://schemas.openxmlformats.org/presentationml/2006/main" xmlns:r="http://schemas.openxmlformats.org/officeDocument/2006/relationships">
+  <p:cSld>
+    <p:bg>
+      <p:bgPr>
+        <a:solidFill>
+          <a:srgbClr val="FFFFFF"/>
+        </a:solidFill>
+        <a:effectLst/>
+      </p:bgPr>
+    </p:bg>
+    <p:spTree>
+      <p:nvGrpSpPr>
+        <p:cNvPr id="1" name=""/>
+        <p:cNvGrpSpPr/>
+        <p:nvPr/>
+      </p:nvGrpSpPr>
+      <p:grpSpPr/>
+      <p:sp>
+        <p:nvSpPr>
+          <p:cNvPr id="2" name="Rectangle 1"/>
+          <p:cNvSpPr/>
+          <p:nvPr/>
+        </p:nvSpPr>
+        <p:spPr>
+          <a:xfrm>
+            <a:off x="0" y="0"/>
+            <a:ext cx="12191695" cy="960120"/>
+          </a:xfrm>
+          <a:prstGeom prst="rect">
+            <a:avLst/>
+          </a:prstGeom>
+          <a:solidFill>
+            <a:srgbClr val="095292"/>
+          </a:solidFill>
+          <a:ln>
+            <a:noFill/>
+          </a:ln>
+        </p:spPr>
+        <p:style>
+          <a:lnRef idx="1">
+            <a:schemeClr val="accent1"/>
+          </a:lnRef>
+          <a:fillRef idx="3">
+            <a:schemeClr val="accent1"/>
+          </a:fillRef>
+          <a:effectRef idx="2">
+            <a:schemeClr val="accent1"/>
+          </a:effectRef>
+          <a:fontRef idx="minor">
+            <a:schemeClr val="lt1"/>
+          </a:fontRef>
+        </p:style>
+        <p:txBody>
+          <a:bodyPr rtlCol="0" anchor="ctr"/>
+          <a:lstStyle/>
+          <a:p>
+            <a:pPr algn="ctr"/>
+          </a:p>
+        </p:txBody>
+      </p:sp>
+      <p:sp>
+        <p:nvSpPr>
+          <p:cNvPr id="3" name="Rectangle 2"/>
+          <p:cNvSpPr/>
+          <p:nvPr/>
+        </p:nvSpPr>
+        <p:spPr>
+          <a:xfrm>
+            <a:off x="0" y="960120"/>
+            <a:ext cx="12191695" cy="41148"/>
+          </a:xfrm>
+          <a:prstGeom prst="rect">
+            <a:avLst/>
+          </a:prstGeom>
+          <a:solidFill>
+            <a:srgbClr val="FFD000"/>
+          </a:solidFill>
+          <a:ln>
+            <a:noFill/>
+          </a:ln>
+        </p:spPr>
+        <p:style>
+          <a:lnRef idx="1">
+            <a:schemeClr val="accent1"/>
+          </a:lnRef>
+          <a:fillRef idx="3">
+            <a:schemeClr val="accent1"/>
+          </a:fillRef>
+          <a:effectRef idx="2">
+            <a:schemeClr val="accent1"/>
+          </a:effectRef>
+          <a:fontRef idx="minor">
+            <a:schemeClr val="lt1"/>
+          </a:fontRef>
+        </p:style>
+        <p:txBody>
+          <a:bodyPr rtlCol="0" anchor="ctr"/>
+          <a:lstStyle/>
+          <a:p>
+            <a:pPr algn="ctr"/>
+          </a:p>
+        </p:txBody>
+      </p:sp>
+      <p:sp>
+        <p:nvSpPr>
+          <p:cNvPr id="4" name="TextBox 3"/>
+          <p:cNvSpPr txBox="1"/>
+          <p:nvPr/>
+        </p:nvSpPr>
+        <p:spPr>
+          <a:xfrm>
+            <a:off x="457200" y="164592"/>
+            <a:ext cx="11277295" cy="502920"/>
+          </a:xfrm>
+          <a:prstGeom prst="rect">
+            <a:avLst/>
+          </a:prstGeom>
+          <a:noFill/>
+        </p:spPr>
+        <p:txBody>
+          <a:bodyPr wrap="square">
+            <a:spAutoFit/>
+          </a:bodyPr>
+          <a:lstStyle/>
+          <a:p>
+            <a:r>
+              <a:rPr sz="2600" b="1" i="0">
+                <a:solidFill>
+                  <a:srgbClr val="FFFFFF"/>
+                </a:solidFill>
+                <a:latin typeface="Calibri"/>
+              </a:rPr>
+              <a:t>Taller PI — punto de partida</a:t>
+            </a:r>
+          </a:p>
+        </p:txBody>
+      </p:sp>
+      <p:sp>
+        <p:nvSpPr>
+          <p:cNvPr id="5" name="TextBox 4"/>
+          <p:cNvSpPr txBox="1"/>
+          <p:nvPr/>
+        </p:nvSpPr>
+        <p:spPr>
+          <a:xfrm>
+            <a:off x="457200" y="1170432"/>
+            <a:ext cx="11277295" cy="5230368"/>
+          </a:xfrm>
+          <a:prstGeom prst="rect">
+            <a:avLst/>
+          </a:prstGeom>
+          <a:noFill/>
+        </p:spPr>
+        <p:txBody>
+          <a:bodyPr wrap="square">
+            <a:spAutoFit/>
+          </a:bodyPr>
+          <a:lstStyle/>
+          <a:p>
+            <a:pPr>
+              <a:spcAft>
+                <a:spcPts val="800"/>
+              </a:spcAft>
+            </a:pPr>
+            <a:r>
+              <a:rPr sz="2000" b="0" i="0">
+                <a:solidFill>
+                  <a:srgbClr val="333333"/>
+                </a:solidFill>
+                <a:latin typeface="Calibri"/>
+              </a:rPr>
+              <a:t>–   Dominio: clinica veterinaria Huellitas, que hoy lleva toda su gestion en papel.</a:t>
+            </a:r>
+          </a:p>
+          <a:p>
+            <a:pPr>
+              <a:spcAft>
+                <a:spcPts val="800"/>
+              </a:spcAft>
+            </a:pPr>
+            <a:r>
+              <a:rPr sz="2000" b="0" i="0">
+                <a:solidFill>
+                  <a:srgbClr val="333333"/>
+                </a:solidFill>
+                <a:latin typeface="Calibri"/>
+              </a:rPr>
+              <a:t>–   Herramienta: VS Code con el Extension Pack for Java y el JDK 17+ instalado.</a:t>
+            </a:r>
+          </a:p>
+          <a:p>
+            <a:pPr>
+              <a:spcAft>
+                <a:spcPts val="800"/>
+              </a:spcAft>
+            </a:pPr>
+            <a:r>
+              <a:rPr sz="2000" b="0" i="0">
+                <a:solidFill>
+                  <a:srgbClr val="333333"/>
+                </a:solidFill>
+                <a:latin typeface="Calibri"/>
+              </a:rPr>
+              <a:t>–   Se parte de cero: no hay codigo previo del proyecto.</a:t>
+            </a:r>
+          </a:p>
+        </p:txBody>
+      </p:sp>
+      <p:sp>
+        <p:nvSpPr>
+          <p:cNvPr id="6" name="TextBox 5"/>
+          <p:cNvSpPr txBox="1"/>
+          <p:nvPr/>
+        </p:nvSpPr>
+        <p:spPr>
+          <a:xfrm>
+            <a:off x="11185855" y="6473952"/>
+            <a:ext cx="640080" cy="274320"/>
+          </a:xfrm>
+          <a:prstGeom prst="rect">
+            <a:avLst/>
+          </a:prstGeom>
+          <a:noFill/>
+        </p:spPr>
+        <p:txBody>
+          <a:bodyPr wrap="square">
+            <a:spAutoFit/>
+          </a:bodyPr>
+          <a:lstStyle/>
+          <a:p>
+            <a:pPr algn="r"/>
+            <a:r>
+              <a:rPr sz="1100" b="0" i="0">
+                <a:solidFill>
+                  <a:srgbClr val="666666"/>
+                </a:solidFill>
+                <a:latin typeface="Calibri"/>
+              </a:rPr>
+              <a:t>34</a:t>
+            </a:r>
+          </a:p>
+        </p:txBody>
+      </p:sp>
+    </p:spTree>
+  </p:cSld>
+  <p:clrMapOvr>
+    <a:masterClrMapping/>
+  </p:clrMapOvr>
+</p:sld>
+</file>
+
+<file path=ppt/slides/slide35.xml><?xml version="1.0" encoding="utf-8"?>
+<p:sld xmlns:a="http://schemas.openxmlformats.org/drawingml/2006/main" xmlns:p="http://schemas.openxmlformats.org/presentationml/2006/main" xmlns:r="http://schemas.openxmlformats.org/officeDocument/2006/relationships">
+  <p:cSld>
+    <p:bg>
+      <p:bgPr>
+        <a:solidFill>
+          <a:srgbClr val="FFFFFF"/>
+        </a:solidFill>
+        <a:effectLst/>
+      </p:bgPr>
+    </p:bg>
+    <p:spTree>
+      <p:nvGrpSpPr>
+        <p:cNvPr id="1" name=""/>
+        <p:cNvGrpSpPr/>
+        <p:nvPr/>
+      </p:nvGrpSpPr>
+      <p:grpSpPr/>
+      <p:sp>
+        <p:nvSpPr>
+          <p:cNvPr id="2" name="Rectangle 1"/>
+          <p:cNvSpPr/>
+          <p:nvPr/>
+        </p:nvSpPr>
+        <p:spPr>
+          <a:xfrm>
+            <a:off x="0" y="0"/>
+            <a:ext cx="12191695" cy="960120"/>
+          </a:xfrm>
+          <a:prstGeom prst="rect">
+            <a:avLst/>
+          </a:prstGeom>
+          <a:solidFill>
+            <a:srgbClr val="095292"/>
+          </a:solidFill>
+          <a:ln>
+            <a:noFill/>
+          </a:ln>
+        </p:spPr>
+        <p:style>
+          <a:lnRef idx="1">
+            <a:schemeClr val="accent1"/>
+          </a:lnRef>
+          <a:fillRef idx="3">
+            <a:schemeClr val="accent1"/>
+          </a:fillRef>
+          <a:effectRef idx="2">
+            <a:schemeClr val="accent1"/>
+          </a:effectRef>
+          <a:fontRef idx="minor">
+            <a:schemeClr val="lt1"/>
+          </a:fontRef>
+        </p:style>
+        <p:txBody>
+          <a:bodyPr rtlCol="0" anchor="ctr"/>
+          <a:lstStyle/>
+          <a:p>
+            <a:pPr algn="ctr"/>
+          </a:p>
+        </p:txBody>
+      </p:sp>
+      <p:sp>
+        <p:nvSpPr>
+          <p:cNvPr id="3" name="Rectangle 2"/>
+          <p:cNvSpPr/>
+          <p:nvPr/>
+        </p:nvSpPr>
+        <p:spPr>
+          <a:xfrm>
+            <a:off x="0" y="960120"/>
+            <a:ext cx="12191695" cy="41148"/>
+          </a:xfrm>
+          <a:prstGeom prst="rect">
+            <a:avLst/>
+          </a:prstGeom>
+          <a:solidFill>
+            <a:srgbClr val="FFD000"/>
+          </a:solidFill>
+          <a:ln>
+            <a:noFill/>
+          </a:ln>
+        </p:spPr>
+        <p:style>
+          <a:lnRef idx="1">
+            <a:schemeClr val="accent1"/>
+          </a:lnRef>
+          <a:fillRef idx="3">
+            <a:schemeClr val="accent1"/>
+          </a:fillRef>
+          <a:effectRef idx="2">
+            <a:schemeClr val="accent1"/>
+          </a:effectRef>
+          <a:fontRef idx="minor">
+            <a:schemeClr val="lt1"/>
+          </a:fontRef>
+        </p:style>
+        <p:txBody>
+          <a:bodyPr rtlCol="0" anchor="ctr"/>
+          <a:lstStyle/>
+          <a:p>
+            <a:pPr algn="ctr"/>
+          </a:p>
+        </p:txBody>
+      </p:sp>
+      <p:sp>
+        <p:nvSpPr>
+          <p:cNvPr id="4" name="TextBox 3"/>
+          <p:cNvSpPr txBox="1"/>
+          <p:nvPr/>
+        </p:nvSpPr>
+        <p:spPr>
+          <a:xfrm>
+            <a:off x="457200" y="164592"/>
+            <a:ext cx="11277295" cy="502920"/>
+          </a:xfrm>
+          <a:prstGeom prst="rect">
+            <a:avLst/>
+          </a:prstGeom>
+          <a:noFill/>
+        </p:spPr>
+        <p:txBody>
+          <a:bodyPr wrap="square">
+            <a:spAutoFit/>
+          </a:bodyPr>
+          <a:lstStyle/>
+          <a:p>
+            <a:r>
+              <a:rPr sz="2600" b="1" i="0">
+                <a:solidFill>
+                  <a:srgbClr val="FFFFFF"/>
+                </a:solidFill>
+                <a:latin typeface="Calibri"/>
+              </a:rPr>
+              <a:t>Taller PI — pasos guiados</a:t>
+            </a:r>
+          </a:p>
+        </p:txBody>
+      </p:sp>
+      <p:sp>
+        <p:nvSpPr>
+          <p:cNvPr id="5" name="Rounded Rectangle 4"/>
+          <p:cNvSpPr/>
+          <p:nvPr/>
+        </p:nvSpPr>
+        <p:spPr>
+          <a:xfrm>
+            <a:off x="457200" y="1234440"/>
+            <a:ext cx="11277295" cy="950976"/>
+          </a:xfrm>
+          <a:prstGeom prst="roundRect">
+            <a:avLst>
+              <a:gd name="adj" fmla="val 12000"/>
+            </a:avLst>
+          </a:prstGeom>
+          <a:solidFill>
+            <a:srgbClr val="F2F2F2"/>
+          </a:solidFill>
+          <a:ln>
+            <a:noFill/>
+          </a:ln>
+        </p:spPr>
+        <p:style>
+          <a:lnRef idx="1">
+            <a:schemeClr val="accent1"/>
+          </a:lnRef>
+          <a:fillRef idx="3">
+            <a:schemeClr val="accent1"/>
+          </a:fillRef>
+          <a:effectRef idx="2">
+            <a:schemeClr val="accent1"/>
+          </a:effectRef>
+          <a:fontRef idx="minor">
+            <a:schemeClr val="lt1"/>
+          </a:fontRef>
+        </p:style>
+        <p:txBody>
+          <a:bodyPr rtlCol="0" anchor="ctr"/>
+          <a:lstStyle/>
+          <a:p>
+            <a:pPr algn="ctr"/>
+          </a:p>
+        </p:txBody>
+      </p:sp>
+      <p:sp>
+        <p:nvSpPr>
+          <p:cNvPr id="6" name="Rounded Rectangle 5"/>
+          <p:cNvSpPr/>
+          <p:nvPr/>
+        </p:nvSpPr>
+        <p:spPr>
+          <a:xfrm>
+            <a:off x="594360" y="1490472"/>
+            <a:ext cx="438912" cy="438912"/>
+          </a:xfrm>
+          <a:prstGeom prst="roundRect">
+            <a:avLst>
+              <a:gd name="adj" fmla="val 12000"/>
+            </a:avLst>
+          </a:prstGeom>
+          <a:solidFill>
+            <a:srgbClr val="095292"/>
+          </a:solidFill>
+          <a:ln>
+            <a:noFill/>
+          </a:ln>
+        </p:spPr>
+        <p:style>
+          <a:lnRef idx="1">
+            <a:schemeClr val="accent1"/>
+          </a:lnRef>
+          <a:fillRef idx="3">
+            <a:schemeClr val="accent1"/>
+          </a:fillRef>
+          <a:effectRef idx="2">
+            <a:schemeClr val="accent1"/>
+          </a:effectRef>
+          <a:fontRef idx="minor">
+            <a:schemeClr val="lt1"/>
+          </a:fontRef>
+        </p:style>
+        <p:txBody>
+          <a:bodyPr rtlCol="0" anchor="ctr"/>
+          <a:lstStyle/>
+          <a:p>
+            <a:pPr algn="ctr"/>
+          </a:p>
+        </p:txBody>
+      </p:sp>
+      <p:sp>
+        <p:nvSpPr>
+          <p:cNvPr id="7" name="TextBox 6"/>
+          <p:cNvSpPr txBox="1"/>
+          <p:nvPr/>
+        </p:nvSpPr>
+        <p:spPr>
+          <a:xfrm>
+            <a:off x="594360" y="1490472"/>
+            <a:ext cx="438912" cy="438912"/>
+          </a:xfrm>
+          <a:prstGeom prst="rect">
+            <a:avLst/>
+          </a:prstGeom>
+          <a:noFill/>
+        </p:spPr>
+        <p:txBody>
+          <a:bodyPr wrap="square" anchor="ctr"/>
+          <a:lstStyle/>
+          <a:p>
+            <a:pPr algn="ctr"/>
+            <a:r>
+              <a:rPr sz="1600" b="1" i="0">
+                <a:solidFill>
+                  <a:srgbClr val="FFFFFF"/>
+                </a:solidFill>
+                <a:latin typeface="Calibri"/>
+              </a:rPr>
+              <a:t>1</a:t>
+            </a:r>
+          </a:p>
+        </p:txBody>
+      </p:sp>
+      <p:sp>
+        <p:nvSpPr>
+          <p:cNvPr id="8" name="TextBox 7"/>
+          <p:cNvSpPr txBox="1"/>
+          <p:nvPr/>
+        </p:nvSpPr>
+        <p:spPr>
+          <a:xfrm>
+            <a:off x="1188720" y="1325880"/>
+            <a:ext cx="10271455" cy="786384"/>
+          </a:xfrm>
+          <a:prstGeom prst="rect">
+            <a:avLst/>
+          </a:prstGeom>
+          <a:noFill/>
+        </p:spPr>
+        <p:txBody>
+          <a:bodyPr wrap="square" anchor="ctr"/>
+          <a:lstStyle/>
+          <a:p>
+            <a:r>
+              <a:rPr sz="1500" b="1" i="0">
+                <a:solidFill>
+                  <a:srgbClr val="095292"/>
+                </a:solidFill>
+                <a:latin typeface="Calibri"/>
+              </a:rPr>
+              <a:t>Instale y verifique el entorno (JDK 17+ y VS Code con el Extension Pack for Java) y cree un proyecto Java llamado VetCare con paquete vetcare. Este paso es el objetivo real del bloque: nadie puede quedarse sin entorno funcionando.</a:t>
+            </a:r>
+          </a:p>
+        </p:txBody>
+      </p:sp>
+      <p:sp>
+        <p:nvSpPr>
+          <p:cNvPr id="9" name="Rounded Rectangle 8"/>
+          <p:cNvSpPr/>
+          <p:nvPr/>
+        </p:nvSpPr>
+        <p:spPr>
+          <a:xfrm>
+            <a:off x="457200" y="2276856"/>
+            <a:ext cx="11277295" cy="950976"/>
+          </a:xfrm>
+          <a:prstGeom prst="roundRect">
+            <a:avLst>
+              <a:gd name="adj" fmla="val 12000"/>
+            </a:avLst>
+          </a:prstGeom>
+          <a:solidFill>
+            <a:srgbClr val="E8F4FA"/>
+          </a:solidFill>
+          <a:ln>
+            <a:noFill/>
+          </a:ln>
+        </p:spPr>
+        <p:style>
+          <a:lnRef idx="1">
+            <a:schemeClr val="accent1"/>
+          </a:lnRef>
+          <a:fillRef idx="3">
+            <a:schemeClr val="accent1"/>
+          </a:fillRef>
+          <a:effectRef idx="2">
+            <a:schemeClr val="accent1"/>
+          </a:effectRef>
+          <a:fontRef idx="minor">
+            <a:schemeClr val="lt1"/>
+          </a:fontRef>
+        </p:style>
+        <p:txBody>
+          <a:bodyPr rtlCol="0" anchor="ctr"/>
+          <a:lstStyle/>
+          <a:p>
+            <a:pPr algn="ctr"/>
+          </a:p>
+        </p:txBody>
+      </p:sp>
+      <p:sp>
+        <p:nvSpPr>
+          <p:cNvPr id="10" name="Rounded Rectangle 9"/>
+          <p:cNvSpPr/>
+          <p:nvPr/>
+        </p:nvSpPr>
+        <p:spPr>
+          <a:xfrm>
+            <a:off x="594360" y="2532888"/>
+            <a:ext cx="438912" cy="438912"/>
+          </a:xfrm>
+          <a:prstGeom prst="roundRect">
+            <a:avLst>
+              <a:gd name="adj" fmla="val 12000"/>
+            </a:avLst>
+          </a:prstGeom>
+          <a:solidFill>
+            <a:srgbClr val="095292"/>
+          </a:solidFill>
+          <a:ln>
+            <a:noFill/>
+          </a:ln>
+        </p:spPr>
+        <p:style>
+          <a:lnRef idx="1">
+            <a:schemeClr val="accent1"/>
+          </a:lnRef>
+          <a:fillRef idx="3">
+            <a:schemeClr val="accent1"/>
+          </a:fillRef>
+          <a:effectRef idx="2">
+            <a:schemeClr val="accent1"/>
+          </a:effectRef>
+          <a:fontRef idx="minor">
+            <a:schemeClr val="lt1"/>
+          </a:fontRef>
+        </p:style>
+        <p:txBody>
+          <a:bodyPr rtlCol="0" anchor="ctr"/>
+          <a:lstStyle/>
+          <a:p>
+            <a:pPr algn="ctr"/>
+          </a:p>
+        </p:txBody>
+      </p:sp>
+      <p:sp>
+        <p:nvSpPr>
+          <p:cNvPr id="11" name="TextBox 10"/>
+          <p:cNvSpPr txBox="1"/>
+          <p:nvPr/>
+        </p:nvSpPr>
+        <p:spPr>
+          <a:xfrm>
+            <a:off x="594360" y="2532888"/>
+            <a:ext cx="438912" cy="438912"/>
+          </a:xfrm>
+          <a:prstGeom prst="rect">
+            <a:avLst/>
+          </a:prstGeom>
+          <a:noFill/>
+        </p:spPr>
+        <p:txBody>
+          <a:bodyPr wrap="square" anchor="ctr"/>
+          <a:lstStyle/>
+          <a:p>
+            <a:pPr algn="ctr"/>
+            <a:r>
+              <a:rPr sz="1600" b="1" i="0">
+                <a:solidFill>
+                  <a:srgbClr val="FFFFFF"/>
+                </a:solidFill>
+                <a:latin typeface="Calibri"/>
+              </a:rPr>
+              <a:t>2</a:t>
+            </a:r>
+          </a:p>
+        </p:txBody>
+      </p:sp>
+      <p:sp>
+        <p:nvSpPr>
+          <p:cNvPr id="12" name="TextBox 11"/>
+          <p:cNvSpPr txBox="1"/>
+          <p:nvPr/>
+        </p:nvSpPr>
+        <p:spPr>
+          <a:xfrm>
+            <a:off x="1188720" y="2368296"/>
+            <a:ext cx="10271455" cy="786384"/>
+          </a:xfrm>
+          <a:prstGeom prst="rect">
+            <a:avLst/>
+          </a:prstGeom>
+          <a:noFill/>
+        </p:spPr>
+        <p:txBody>
+          <a:bodyPr wrap="square" anchor="ctr"/>
+          <a:lstStyle/>
+          <a:p>
+            <a:r>
+              <a:rPr sz="1500" b="1" i="0">
+                <a:solidFill>
+                  <a:srgbClr val="095292"/>
+                </a:solidFill>
+                <a:latin typeface="Calibri"/>
+              </a:rPr>
+              <a:t>Escriba la clase Mascota con al menos tres atributos privados (id, nombre, especie) y un constructor que los reciba todos.</a:t>
+            </a:r>
+          </a:p>
+        </p:txBody>
+      </p:sp>
+      <p:sp>
+        <p:nvSpPr>
+          <p:cNvPr id="13" name="Rounded Rectangle 12"/>
+          <p:cNvSpPr/>
+          <p:nvPr/>
+        </p:nvSpPr>
+        <p:spPr>
+          <a:xfrm>
+            <a:off x="457200" y="3319272"/>
+            <a:ext cx="11277295" cy="950976"/>
+          </a:xfrm>
+          <a:prstGeom prst="roundRect">
+            <a:avLst>
+              <a:gd name="adj" fmla="val 12000"/>
+            </a:avLst>
+          </a:prstGeom>
+          <a:solidFill>
+            <a:srgbClr val="F2F2F2"/>
+          </a:solidFill>
+          <a:ln>
+            <a:noFill/>
+          </a:ln>
+        </p:spPr>
+        <p:style>
+          <a:lnRef idx="1">
+            <a:schemeClr val="accent1"/>
+          </a:lnRef>
+          <a:fillRef idx="3">
+            <a:schemeClr val="accent1"/>
+          </a:fillRef>
+          <a:effectRef idx="2">
+            <a:schemeClr val="accent1"/>
+          </a:effectRef>
+          <a:fontRef idx="minor">
+            <a:schemeClr val="lt1"/>
+          </a:fontRef>
+        </p:style>
+        <p:txBody>
+          <a:bodyPr rtlCol="0" anchor="ctr"/>
+          <a:lstStyle/>
+          <a:p>
+            <a:pPr algn="ctr"/>
+          </a:p>
+        </p:txBody>
+      </p:sp>
+      <p:sp>
+        <p:nvSpPr>
+          <p:cNvPr id="14" name="Rounded Rectangle 13"/>
+          <p:cNvSpPr/>
+          <p:nvPr/>
+        </p:nvSpPr>
+        <p:spPr>
+          <a:xfrm>
+            <a:off x="594360" y="3575304"/>
+            <a:ext cx="438912" cy="438912"/>
+          </a:xfrm>
+          <a:prstGeom prst="roundRect">
+            <a:avLst>
+              <a:gd name="adj" fmla="val 12000"/>
+            </a:avLst>
+          </a:prstGeom>
+          <a:solidFill>
+            <a:srgbClr val="095292"/>
+          </a:solidFill>
+          <a:ln>
+            <a:noFill/>
+          </a:ln>
+        </p:spPr>
+        <p:style>
+          <a:lnRef idx="1">
+            <a:schemeClr val="accent1"/>
+          </a:lnRef>
+          <a:fillRef idx="3">
+            <a:schemeClr val="accent1"/>
+          </a:fillRef>
+          <a:effectRef idx="2">
+            <a:schemeClr val="accent1"/>
+          </a:effectRef>
+          <a:fontRef idx="minor">
+            <a:schemeClr val="lt1"/>
+          </a:fontRef>
+        </p:style>
+        <p:txBody>
+          <a:bodyPr rtlCol="0" anchor="ctr"/>
+          <a:lstStyle/>
+          <a:p>
+            <a:pPr algn="ctr"/>
+          </a:p>
+        </p:txBody>
+      </p:sp>
+      <p:sp>
+        <p:nvSpPr>
+          <p:cNvPr id="15" name="TextBox 14"/>
+          <p:cNvSpPr txBox="1"/>
+          <p:nvPr/>
+        </p:nvSpPr>
+        <p:spPr>
+          <a:xfrm>
+            <a:off x="594360" y="3575304"/>
+            <a:ext cx="438912" cy="438912"/>
+          </a:xfrm>
+          <a:prstGeom prst="rect">
+            <a:avLst/>
+          </a:prstGeom>
+          <a:noFill/>
+        </p:spPr>
+        <p:txBody>
+          <a:bodyPr wrap="square" anchor="ctr"/>
+          <a:lstStyle/>
+          <a:p>
+            <a:pPr algn="ctr"/>
+            <a:r>
+              <a:rPr sz="1600" b="1" i="0">
+                <a:solidFill>
+                  <a:srgbClr val="FFFFFF"/>
+                </a:solidFill>
+                <a:latin typeface="Calibri"/>
+              </a:rPr>
+              <a:t>3</a:t>
+            </a:r>
+          </a:p>
+        </p:txBody>
+      </p:sp>
+      <p:sp>
+        <p:nvSpPr>
+          <p:cNvPr id="16" name="TextBox 15"/>
+          <p:cNvSpPr txBox="1"/>
+          <p:nvPr/>
+        </p:nvSpPr>
+        <p:spPr>
+          <a:xfrm>
+            <a:off x="1188720" y="3410712"/>
+            <a:ext cx="10271455" cy="786384"/>
+          </a:xfrm>
+          <a:prstGeom prst="rect">
+            <a:avLst/>
+          </a:prstGeom>
+          <a:noFill/>
+        </p:spPr>
+        <p:txBody>
+          <a:bodyPr wrap="square" anchor="ctr"/>
+          <a:lstStyle/>
+          <a:p>
+            <a:r>
+              <a:rPr sz="1500" b="1" i="0">
+                <a:solidFill>
+                  <a:srgbClr val="095292"/>
+                </a:solidFill>
+                <a:latin typeface="Calibri"/>
+              </a:rPr>
+              <a:t>Agregue al menos un getter y sobreescriba toString() para que la mascota se imprima de forma legible.</a:t>
+            </a:r>
+          </a:p>
+        </p:txBody>
+      </p:sp>
+      <p:sp>
+        <p:nvSpPr>
+          <p:cNvPr id="17" name="Rounded Rectangle 16"/>
+          <p:cNvSpPr/>
+          <p:nvPr/>
+        </p:nvSpPr>
+        <p:spPr>
+          <a:xfrm>
+            <a:off x="457200" y="4361688"/>
+            <a:ext cx="11277295" cy="950976"/>
+          </a:xfrm>
+          <a:prstGeom prst="roundRect">
+            <a:avLst>
+              <a:gd name="adj" fmla="val 12000"/>
+            </a:avLst>
+          </a:prstGeom>
+          <a:solidFill>
+            <a:srgbClr val="E8F4FA"/>
+          </a:solidFill>
+          <a:ln>
+            <a:noFill/>
+          </a:ln>
+        </p:spPr>
+        <p:style>
+          <a:lnRef idx="1">
+            <a:schemeClr val="accent1"/>
+          </a:lnRef>
+          <a:fillRef idx="3">
+            <a:schemeClr val="accent1"/>
+          </a:fillRef>
+          <a:effectRef idx="2">
+            <a:schemeClr val="accent1"/>
+          </a:effectRef>
+          <a:fontRef idx="minor">
+            <a:schemeClr val="lt1"/>
+          </a:fontRef>
+        </p:style>
+        <p:txBody>
+          <a:bodyPr rtlCol="0" anchor="ctr"/>
+          <a:lstStyle/>
+          <a:p>
+            <a:pPr algn="ctr"/>
+          </a:p>
+        </p:txBody>
+      </p:sp>
+      <p:sp>
+        <p:nvSpPr>
+          <p:cNvPr id="18" name="Rounded Rectangle 17"/>
+          <p:cNvSpPr/>
+          <p:nvPr/>
+        </p:nvSpPr>
+        <p:spPr>
+          <a:xfrm>
+            <a:off x="594360" y="4617720"/>
+            <a:ext cx="438912" cy="438912"/>
+          </a:xfrm>
+          <a:prstGeom prst="roundRect">
+            <a:avLst>
+              <a:gd name="adj" fmla="val 12000"/>
+            </a:avLst>
+          </a:prstGeom>
+          <a:solidFill>
+            <a:srgbClr val="095292"/>
+          </a:solidFill>
+          <a:ln>
+            <a:noFill/>
+          </a:ln>
+        </p:spPr>
+        <p:style>
+          <a:lnRef idx="1">
+            <a:schemeClr val="accent1"/>
+          </a:lnRef>
+          <a:fillRef idx="3">
+            <a:schemeClr val="accent1"/>
+          </a:fillRef>
+          <a:effectRef idx="2">
+            <a:schemeClr val="accent1"/>
+          </a:effectRef>
+          <a:fontRef idx="minor">
+            <a:schemeClr val="lt1"/>
+          </a:fontRef>
+        </p:style>
+        <p:txBody>
+          <a:bodyPr rtlCol="0" anchor="ctr"/>
+          <a:lstStyle/>
+          <a:p>
+            <a:pPr algn="ctr"/>
+          </a:p>
+        </p:txBody>
+      </p:sp>
+      <p:sp>
+        <p:nvSpPr>
+          <p:cNvPr id="19" name="TextBox 18"/>
+          <p:cNvSpPr txBox="1"/>
+          <p:nvPr/>
+        </p:nvSpPr>
+        <p:spPr>
+          <a:xfrm>
+            <a:off x="594360" y="4617720"/>
+            <a:ext cx="438912" cy="438912"/>
+          </a:xfrm>
+          <a:prstGeom prst="rect">
+            <a:avLst/>
+          </a:prstGeom>
+          <a:noFill/>
+        </p:spPr>
+        <p:txBody>
+          <a:bodyPr wrap="square" anchor="ctr"/>
+          <a:lstStyle/>
+          <a:p>
+            <a:pPr algn="ctr"/>
+            <a:r>
+              <a:rPr sz="1600" b="1" i="0">
+                <a:solidFill>
+                  <a:srgbClr val="FFFFFF"/>
+                </a:solidFill>
+                <a:latin typeface="Calibri"/>
+              </a:rPr>
+              <a:t>4</a:t>
+            </a:r>
+          </a:p>
+        </p:txBody>
+      </p:sp>
+      <p:sp>
+        <p:nvSpPr>
+          <p:cNvPr id="20" name="TextBox 19"/>
+          <p:cNvSpPr txBox="1"/>
+          <p:nvPr/>
+        </p:nvSpPr>
+        <p:spPr>
+          <a:xfrm>
+            <a:off x="1188720" y="4453128"/>
+            <a:ext cx="10271455" cy="786384"/>
+          </a:xfrm>
+          <a:prstGeom prst="rect">
+            <a:avLst/>
+          </a:prstGeom>
+          <a:noFill/>
+        </p:spPr>
+        <p:txBody>
+          <a:bodyPr wrap="square" anchor="ctr"/>
+          <a:lstStyle/>
+          <a:p>
+            <a:r>
+              <a:rPr sz="1500" b="1" i="0">
+                <a:solidFill>
+                  <a:srgbClr val="095292"/>
+                </a:solidFill>
+                <a:latin typeface="Calibri"/>
+              </a:rPr>
+              <a:t>En el main, cree DOS objetos Mascota con datos distintos e imprimalos: debe verse que salen del mismo molde pero con valores diferentes.</a:t>
+            </a:r>
+          </a:p>
+        </p:txBody>
+      </p:sp>
+      <p:sp>
+        <p:nvSpPr>
+          <p:cNvPr id="21" name="Rounded Rectangle 20"/>
+          <p:cNvSpPr/>
+          <p:nvPr/>
+        </p:nvSpPr>
+        <p:spPr>
+          <a:xfrm>
+            <a:off x="457200" y="5404104"/>
+            <a:ext cx="11277295" cy="950976"/>
+          </a:xfrm>
+          <a:prstGeom prst="roundRect">
+            <a:avLst>
+              <a:gd name="adj" fmla="val 12000"/>
+            </a:avLst>
+          </a:prstGeom>
+          <a:solidFill>
+            <a:srgbClr val="F2F2F2"/>
+          </a:solidFill>
+          <a:ln>
+            <a:noFill/>
+          </a:ln>
+        </p:spPr>
+        <p:style>
+          <a:lnRef idx="1">
+            <a:schemeClr val="accent1"/>
+          </a:lnRef>
+          <a:fillRef idx="3">
+            <a:schemeClr val="accent1"/>
+          </a:fillRef>
+          <a:effectRef idx="2">
+            <a:schemeClr val="accent1"/>
+          </a:effectRef>
+          <a:fontRef idx="minor">
+            <a:schemeClr val="lt1"/>
+          </a:fontRef>
+        </p:style>
+        <p:txBody>
+          <a:bodyPr rtlCol="0" anchor="ctr"/>
+          <a:lstStyle/>
+          <a:p>
+            <a:pPr algn="ctr"/>
+          </a:p>
+        </p:txBody>
+      </p:sp>
+      <p:sp>
+        <p:nvSpPr>
+          <p:cNvPr id="22" name="Rounded Rectangle 21"/>
+          <p:cNvSpPr/>
+          <p:nvPr/>
+        </p:nvSpPr>
+        <p:spPr>
+          <a:xfrm>
+            <a:off x="594360" y="5660136"/>
+            <a:ext cx="438912" cy="438912"/>
+          </a:xfrm>
+          <a:prstGeom prst="roundRect">
+            <a:avLst>
+              <a:gd name="adj" fmla="val 12000"/>
+            </a:avLst>
+          </a:prstGeom>
+          <a:solidFill>
+            <a:srgbClr val="095292"/>
+          </a:solidFill>
+          <a:ln>
+            <a:noFill/>
+          </a:ln>
+        </p:spPr>
+        <p:style>
+          <a:lnRef idx="1">
+            <a:schemeClr val="accent1"/>
+          </a:lnRef>
+          <a:fillRef idx="3">
+            <a:schemeClr val="accent1"/>
+          </a:fillRef>
+          <a:effectRef idx="2">
+            <a:schemeClr val="accent1"/>
+          </a:effectRef>
+          <a:fontRef idx="minor">
+            <a:schemeClr val="lt1"/>
+          </a:fontRef>
+        </p:style>
+        <p:txBody>
+          <a:bodyPr rtlCol="0" anchor="ctr"/>
+          <a:lstStyle/>
+          <a:p>
+            <a:pPr algn="ctr"/>
+          </a:p>
+        </p:txBody>
+      </p:sp>
+      <p:sp>
+        <p:nvSpPr>
+          <p:cNvPr id="23" name="TextBox 22"/>
+          <p:cNvSpPr txBox="1"/>
+          <p:nvPr/>
+        </p:nvSpPr>
+        <p:spPr>
+          <a:xfrm>
+            <a:off x="594360" y="5660136"/>
+            <a:ext cx="438912" cy="438912"/>
+          </a:xfrm>
+          <a:prstGeom prst="rect">
+            <a:avLst/>
+          </a:prstGeom>
+          <a:noFill/>
+        </p:spPr>
+        <p:txBody>
+          <a:bodyPr wrap="square" anchor="ctr"/>
+          <a:lstStyle/>
+          <a:p>
+            <a:pPr algn="ctr"/>
+            <a:r>
+              <a:rPr sz="1600" b="1" i="0">
+                <a:solidFill>
+                  <a:srgbClr val="FFFFFF"/>
+                </a:solidFill>
+                <a:latin typeface="Calibri"/>
+              </a:rPr>
+              <a:t>5</a:t>
+            </a:r>
+          </a:p>
+        </p:txBody>
+      </p:sp>
+      <p:sp>
+        <p:nvSpPr>
+          <p:cNvPr id="24" name="TextBox 23"/>
+          <p:cNvSpPr txBox="1"/>
+          <p:nvPr/>
+        </p:nvSpPr>
+        <p:spPr>
+          <a:xfrm>
+            <a:off x="1188720" y="5495544"/>
+            <a:ext cx="10271455" cy="786384"/>
+          </a:xfrm>
+          <a:prstGeom prst="rect">
+            <a:avLst/>
+          </a:prstGeom>
+          <a:noFill/>
+        </p:spPr>
+        <p:txBody>
+          <a:bodyPr wrap="square" anchor="ctr"/>
+          <a:lstStyle/>
+          <a:p>
+            <a:r>
+              <a:rPr sz="1500" b="1" i="0">
+                <a:solidFill>
+                  <a:srgbClr val="095292"/>
+                </a:solidFill>
+                <a:latin typeface="Calibri"/>
+              </a:rPr>
+              <a:t>Si termina antes: agregue un setter que valide (por ejemplo, que rechace una edad negativa) y pruebelo desde el main.</a:t>
+            </a:r>
+          </a:p>
+        </p:txBody>
+      </p:sp>
+      <p:sp>
+        <p:nvSpPr>
+          <p:cNvPr id="25" name="TextBox 24"/>
+          <p:cNvSpPr txBox="1"/>
+          <p:nvPr/>
+        </p:nvSpPr>
+        <p:spPr>
+          <a:xfrm>
+            <a:off x="11185855" y="6473952"/>
+            <a:ext cx="640080" cy="274320"/>
+          </a:xfrm>
+          <a:prstGeom prst="rect">
+            <a:avLst/>
+          </a:prstGeom>
+          <a:noFill/>
+        </p:spPr>
+        <p:txBody>
+          <a:bodyPr wrap="square">
+            <a:spAutoFit/>
+          </a:bodyPr>
+          <a:lstStyle/>
+          <a:p>
+            <a:pPr algn="r"/>
+            <a:r>
+              <a:rPr sz="1100" b="0" i="0">
+                <a:solidFill>
+                  <a:srgbClr val="666666"/>
+                </a:solidFill>
+                <a:latin typeface="Calibri"/>
+              </a:rPr>
+              <a:t>35</a:t>
+            </a:r>
+          </a:p>
+        </p:txBody>
+      </p:sp>
+    </p:spTree>
+  </p:cSld>
+  <p:clrMapOvr>
+    <a:masterClrMapping/>
+  </p:clrMapOvr>
+</p:sld>
+</file>
+
+<file path=ppt/slides/slide36.xml><?xml version="1.0" encoding="utf-8"?>
+<p:sld xmlns:a="http://schemas.openxmlformats.org/drawingml/2006/main" xmlns:p="http://schemas.openxmlformats.org/presentationml/2006/main" xmlns:r="http://schemas.openxmlformats.org/officeDocument/2006/relationships">
+  <p:cSld>
+    <p:bg>
+      <p:bgPr>
+        <a:solidFill>
+          <a:srgbClr val="FFFFFF"/>
+        </a:solidFill>
+        <a:effectLst/>
+      </p:bgPr>
+    </p:bg>
+    <p:spTree>
+      <p:nvGrpSpPr>
+        <p:cNvPr id="1" name=""/>
+        <p:cNvGrpSpPr/>
+        <p:nvPr/>
+      </p:nvGrpSpPr>
+      <p:grpSpPr/>
+      <p:sp>
+        <p:nvSpPr>
+          <p:cNvPr id="2" name="Rectangle 1"/>
+          <p:cNvSpPr/>
+          <p:nvPr/>
+        </p:nvSpPr>
+        <p:spPr>
+          <a:xfrm>
+            <a:off x="0" y="0"/>
+            <a:ext cx="12191695" cy="960120"/>
+          </a:xfrm>
+          <a:prstGeom prst="rect">
+            <a:avLst/>
+          </a:prstGeom>
+          <a:solidFill>
+            <a:srgbClr val="095292"/>
+          </a:solidFill>
+          <a:ln>
+            <a:noFill/>
+          </a:ln>
+        </p:spPr>
+        <p:style>
+          <a:lnRef idx="1">
+            <a:schemeClr val="accent1"/>
+          </a:lnRef>
+          <a:fillRef idx="3">
+            <a:schemeClr val="accent1"/>
+          </a:fillRef>
+          <a:effectRef idx="2">
+            <a:schemeClr val="accent1"/>
+          </a:effectRef>
+          <a:fontRef idx="minor">
+            <a:schemeClr val="lt1"/>
+          </a:fontRef>
+        </p:style>
+        <p:txBody>
+          <a:bodyPr rtlCol="0" anchor="ctr"/>
+          <a:lstStyle/>
+          <a:p>
+            <a:pPr algn="ctr"/>
+          </a:p>
+        </p:txBody>
+      </p:sp>
+      <p:sp>
+        <p:nvSpPr>
+          <p:cNvPr id="3" name="Rectangle 2"/>
+          <p:cNvSpPr/>
+          <p:nvPr/>
+        </p:nvSpPr>
+        <p:spPr>
+          <a:xfrm>
+            <a:off x="0" y="960120"/>
+            <a:ext cx="12191695" cy="41148"/>
+          </a:xfrm>
+          <a:prstGeom prst="rect">
+            <a:avLst/>
+          </a:prstGeom>
+          <a:solidFill>
+            <a:srgbClr val="FFD000"/>
+          </a:solidFill>
+          <a:ln>
+            <a:noFill/>
+          </a:ln>
+        </p:spPr>
+        <p:style>
+          <a:lnRef idx="1">
+            <a:schemeClr val="accent1"/>
+          </a:lnRef>
+          <a:fillRef idx="3">
+            <a:schemeClr val="accent1"/>
+          </a:fillRef>
+          <a:effectRef idx="2">
+            <a:schemeClr val="accent1"/>
+          </a:effectRef>
+          <a:fontRef idx="minor">
+            <a:schemeClr val="lt1"/>
+          </a:fontRef>
+        </p:style>
+        <p:txBody>
+          <a:bodyPr rtlCol="0" anchor="ctr"/>
+          <a:lstStyle/>
+          <a:p>
+            <a:pPr algn="ctr"/>
+          </a:p>
+        </p:txBody>
+      </p:sp>
+      <p:sp>
+        <p:nvSpPr>
+          <p:cNvPr id="4" name="TextBox 3"/>
+          <p:cNvSpPr txBox="1"/>
+          <p:nvPr/>
+        </p:nvSpPr>
+        <p:spPr>
+          <a:xfrm>
+            <a:off x="457200" y="164592"/>
+            <a:ext cx="11277295" cy="502920"/>
+          </a:xfrm>
+          <a:prstGeom prst="rect">
+            <a:avLst/>
+          </a:prstGeom>
+          <a:noFill/>
+        </p:spPr>
+        <p:txBody>
+          <a:bodyPr wrap="square">
+            <a:spAutoFit/>
+          </a:bodyPr>
+          <a:lstStyle/>
+          <a:p>
+            <a:r>
+              <a:rPr sz="2600" b="1" i="0">
+                <a:solidFill>
+                  <a:srgbClr val="FFFFFF"/>
+                </a:solidFill>
+                <a:latin typeface="Calibri"/>
+              </a:rPr>
+              <a:t>Antes de entregar — autochequeo</a:t>
+            </a:r>
+          </a:p>
+        </p:txBody>
+      </p:sp>
+      <p:sp>
+        <p:nvSpPr>
+          <p:cNvPr id="5" name="Rounded Rectangle 4"/>
+          <p:cNvSpPr/>
+          <p:nvPr/>
+        </p:nvSpPr>
+        <p:spPr>
+          <a:xfrm>
+            <a:off x="457200" y="1261872"/>
+            <a:ext cx="11277295" cy="566928"/>
+          </a:xfrm>
+          <a:prstGeom prst="roundRect">
+            <a:avLst>
+              <a:gd name="adj" fmla="val 12000"/>
+            </a:avLst>
+          </a:prstGeom>
+          <a:solidFill>
+            <a:srgbClr val="F2F2F2"/>
+          </a:solidFill>
+          <a:ln>
+            <a:noFill/>
+          </a:ln>
+        </p:spPr>
+        <p:style>
+          <a:lnRef idx="1">
+            <a:schemeClr val="accent1"/>
+          </a:lnRef>
+          <a:fillRef idx="3">
+            <a:schemeClr val="accent1"/>
+          </a:fillRef>
+          <a:effectRef idx="2">
+            <a:schemeClr val="accent1"/>
+          </a:effectRef>
+          <a:fontRef idx="minor">
+            <a:schemeClr val="lt1"/>
+          </a:fontRef>
+        </p:style>
+        <p:txBody>
+          <a:bodyPr rtlCol="0" anchor="ctr"/>
+          <a:lstStyle/>
+          <a:p>
+            <a:pPr algn="ctr"/>
+          </a:p>
+        </p:txBody>
+      </p:sp>
+      <p:sp>
+        <p:nvSpPr>
+          <p:cNvPr id="6" name="Rectangle 5"/>
+          <p:cNvSpPr/>
+          <p:nvPr/>
+        </p:nvSpPr>
+        <p:spPr>
+          <a:xfrm>
+            <a:off x="640080" y="1408175"/>
+            <a:ext cx="274320" cy="274320"/>
+          </a:xfrm>
+          <a:prstGeom prst="rect">
+            <a:avLst/>
+          </a:prstGeom>
+          <a:solidFill>
+            <a:srgbClr val="FFFFFF"/>
+          </a:solidFill>
+          <a:ln>
+            <a:solidFill>
+              <a:srgbClr val="333333"/>
+            </a:solidFill>
+          </a:ln>
+        </p:spPr>
+        <p:style>
+          <a:lnRef idx="1">
+            <a:schemeClr val="accent1"/>
+          </a:lnRef>
+          <a:fillRef idx="3">
+            <a:schemeClr val="accent1"/>
+          </a:fillRef>
+          <a:effectRef idx="2">
+            <a:schemeClr val="accent1"/>
+          </a:effectRef>
+          <a:fontRef idx="minor">
+            <a:schemeClr val="lt1"/>
+          </a:fontRef>
+        </p:style>
+        <p:txBody>
+          <a:bodyPr rtlCol="0" anchor="ctr"/>
+          <a:lstStyle/>
+          <a:p>
+            <a:pPr algn="ctr"/>
+          </a:p>
+        </p:txBody>
+      </p:sp>
+      <p:sp>
+        <p:nvSpPr>
+          <p:cNvPr id="7" name="Rectangle 6"/>
+          <p:cNvSpPr/>
+          <p:nvPr/>
+        </p:nvSpPr>
+        <p:spPr>
+          <a:xfrm>
+            <a:off x="640080" y="1408175"/>
+            <a:ext cx="73152" cy="274320"/>
+          </a:xfrm>
+          <a:prstGeom prst="rect">
+            <a:avLst/>
+          </a:prstGeom>
+          <a:solidFill>
+            <a:srgbClr val="269CCB"/>
+          </a:solidFill>
+          <a:ln>
+            <a:noFill/>
+          </a:ln>
+        </p:spPr>
+        <p:style>
+          <a:lnRef idx="1">
+            <a:schemeClr val="accent1"/>
+          </a:lnRef>
+          <a:fillRef idx="3">
+            <a:schemeClr val="accent1"/>
+          </a:fillRef>
+          <a:effectRef idx="2">
+            <a:schemeClr val="accent1"/>
+          </a:effectRef>
+          <a:fontRef idx="minor">
+            <a:schemeClr val="lt1"/>
+          </a:fontRef>
+        </p:style>
+        <p:txBody>
+          <a:bodyPr rtlCol="0" anchor="ctr"/>
+          <a:lstStyle/>
+          <a:p>
+            <a:pPr algn="ctr"/>
+          </a:p>
+        </p:txBody>
+      </p:sp>
+      <p:sp>
+        <p:nvSpPr>
+          <p:cNvPr id="8" name="TextBox 7"/>
+          <p:cNvSpPr txBox="1"/>
+          <p:nvPr/>
+        </p:nvSpPr>
+        <p:spPr>
+          <a:xfrm>
+            <a:off x="1097280" y="1353312"/>
+            <a:ext cx="10362895" cy="402336"/>
+          </a:xfrm>
+          <a:prstGeom prst="rect">
+            <a:avLst/>
+          </a:prstGeom>
+          <a:noFill/>
+        </p:spPr>
+        <p:txBody>
+          <a:bodyPr wrap="square" anchor="ctr"/>
+          <a:lstStyle/>
+          <a:p>
+            <a:r>
+              <a:rPr sz="1500" b="0" i="0">
+                <a:solidFill>
+                  <a:srgbClr val="333333"/>
+                </a:solidFill>
+                <a:latin typeface="Calibri"/>
+              </a:rPr>
+              <a:t>¿Los atributos quedaron private o los deje accesibles desde fuera?</a:t>
+            </a:r>
+          </a:p>
+        </p:txBody>
+      </p:sp>
+      <p:sp>
+        <p:nvSpPr>
+          <p:cNvPr id="9" name="Rounded Rectangle 8"/>
+          <p:cNvSpPr/>
+          <p:nvPr/>
+        </p:nvSpPr>
+        <p:spPr>
+          <a:xfrm>
+            <a:off x="457200" y="1938528"/>
+            <a:ext cx="11277295" cy="566928"/>
+          </a:xfrm>
+          <a:prstGeom prst="roundRect">
+            <a:avLst>
+              <a:gd name="adj" fmla="val 12000"/>
+            </a:avLst>
+          </a:prstGeom>
+          <a:solidFill>
+            <a:srgbClr val="F2F2F2"/>
+          </a:solidFill>
+          <a:ln>
+            <a:noFill/>
+          </a:ln>
+        </p:spPr>
+        <p:style>
+          <a:lnRef idx="1">
+            <a:schemeClr val="accent1"/>
+          </a:lnRef>
+          <a:fillRef idx="3">
+            <a:schemeClr val="accent1"/>
+          </a:fillRef>
+          <a:effectRef idx="2">
+            <a:schemeClr val="accent1"/>
+          </a:effectRef>
+          <a:fontRef idx="minor">
+            <a:schemeClr val="lt1"/>
+          </a:fontRef>
+        </p:style>
+        <p:txBody>
+          <a:bodyPr rtlCol="0" anchor="ctr"/>
+          <a:lstStyle/>
+          <a:p>
+            <a:pPr algn="ctr"/>
+          </a:p>
+        </p:txBody>
+      </p:sp>
+      <p:sp>
+        <p:nvSpPr>
+          <p:cNvPr id="10" name="Rectangle 9"/>
+          <p:cNvSpPr/>
+          <p:nvPr/>
+        </p:nvSpPr>
+        <p:spPr>
+          <a:xfrm>
+            <a:off x="640080" y="2084832"/>
+            <a:ext cx="274320" cy="274320"/>
+          </a:xfrm>
+          <a:prstGeom prst="rect">
+            <a:avLst/>
+          </a:prstGeom>
+          <a:solidFill>
+            <a:srgbClr val="FFFFFF"/>
+          </a:solidFill>
+          <a:ln>
+            <a:solidFill>
+              <a:srgbClr val="333333"/>
+            </a:solidFill>
+          </a:ln>
+        </p:spPr>
+        <p:style>
+          <a:lnRef idx="1">
+            <a:schemeClr val="accent1"/>
+          </a:lnRef>
+          <a:fillRef idx="3">
+            <a:schemeClr val="accent1"/>
+          </a:fillRef>
+          <a:effectRef idx="2">
+            <a:schemeClr val="accent1"/>
+          </a:effectRef>
+          <a:fontRef idx="minor">
+            <a:schemeClr val="lt1"/>
+          </a:fontRef>
+        </p:style>
+        <p:txBody>
+          <a:bodyPr rtlCol="0" anchor="ctr"/>
+          <a:lstStyle/>
+          <a:p>
+            <a:pPr algn="ctr"/>
+          </a:p>
+        </p:txBody>
+      </p:sp>
+      <p:sp>
+        <p:nvSpPr>
+          <p:cNvPr id="11" name="Rectangle 10"/>
+          <p:cNvSpPr/>
+          <p:nvPr/>
+        </p:nvSpPr>
+        <p:spPr>
+          <a:xfrm>
+            <a:off x="640080" y="2084832"/>
+            <a:ext cx="73152" cy="274320"/>
+          </a:xfrm>
+          <a:prstGeom prst="rect">
+            <a:avLst/>
+          </a:prstGeom>
+          <a:solidFill>
+            <a:srgbClr val="269CCB"/>
+          </a:solidFill>
+          <a:ln>
+            <a:noFill/>
+          </a:ln>
+        </p:spPr>
+        <p:style>
+          <a:lnRef idx="1">
+            <a:schemeClr val="accent1"/>
+          </a:lnRef>
+          <a:fillRef idx="3">
+            <a:schemeClr val="accent1"/>
+          </a:fillRef>
+          <a:effectRef idx="2">
+            <a:schemeClr val="accent1"/>
+          </a:effectRef>
+          <a:fontRef idx="minor">
+            <a:schemeClr val="lt1"/>
+          </a:fontRef>
+        </p:style>
+        <p:txBody>
+          <a:bodyPr rtlCol="0" anchor="ctr"/>
+          <a:lstStyle/>
+          <a:p>
+            <a:pPr algn="ctr"/>
+          </a:p>
+        </p:txBody>
+      </p:sp>
+      <p:sp>
+        <p:nvSpPr>
+          <p:cNvPr id="12" name="TextBox 11"/>
+          <p:cNvSpPr txBox="1"/>
+          <p:nvPr/>
+        </p:nvSpPr>
+        <p:spPr>
+          <a:xfrm>
+            <a:off x="1097280" y="2029968"/>
+            <a:ext cx="10362895" cy="402336"/>
+          </a:xfrm>
+          <a:prstGeom prst="rect">
+            <a:avLst/>
+          </a:prstGeom>
+          <a:noFill/>
+        </p:spPr>
+        <p:txBody>
+          <a:bodyPr wrap="square" anchor="ctr"/>
+          <a:lstStyle/>
+          <a:p>
+            <a:r>
+              <a:rPr sz="1500" b="0" i="0">
+                <a:solidFill>
+                  <a:srgbClr val="333333"/>
+                </a:solidFill>
+                <a:latin typeface="Calibri"/>
+              </a:rPr>
+              <a:t>¿El constructor inicializa TODOS los atributos?</a:t>
+            </a:r>
+          </a:p>
+        </p:txBody>
+      </p:sp>
+      <p:sp>
+        <p:nvSpPr>
+          <p:cNvPr id="13" name="Rounded Rectangle 12"/>
+          <p:cNvSpPr/>
+          <p:nvPr/>
+        </p:nvSpPr>
+        <p:spPr>
+          <a:xfrm>
+            <a:off x="457200" y="2615184"/>
+            <a:ext cx="11277295" cy="566928"/>
+          </a:xfrm>
+          <a:prstGeom prst="roundRect">
+            <a:avLst>
+              <a:gd name="adj" fmla="val 12000"/>
+            </a:avLst>
+          </a:prstGeom>
+          <a:solidFill>
+            <a:srgbClr val="F2F2F2"/>
+          </a:solidFill>
+          <a:ln>
+            <a:noFill/>
+          </a:ln>
+        </p:spPr>
+        <p:style>
+          <a:lnRef idx="1">
+            <a:schemeClr val="accent1"/>
+          </a:lnRef>
+          <a:fillRef idx="3">
+            <a:schemeClr val="accent1"/>
+          </a:fillRef>
+          <a:effectRef idx="2">
+            <a:schemeClr val="accent1"/>
+          </a:effectRef>
+          <a:fontRef idx="minor">
+            <a:schemeClr val="lt1"/>
+          </a:fontRef>
+        </p:style>
+        <p:txBody>
+          <a:bodyPr rtlCol="0" anchor="ctr"/>
+          <a:lstStyle/>
+          <a:p>
+            <a:pPr algn="ctr"/>
+          </a:p>
+        </p:txBody>
+      </p:sp>
+      <p:sp>
+        <p:nvSpPr>
+          <p:cNvPr id="14" name="Rectangle 13"/>
+          <p:cNvSpPr/>
+          <p:nvPr/>
+        </p:nvSpPr>
+        <p:spPr>
+          <a:xfrm>
+            <a:off x="640080" y="2761488"/>
+            <a:ext cx="274320" cy="274320"/>
+          </a:xfrm>
+          <a:prstGeom prst="rect">
+            <a:avLst/>
+          </a:prstGeom>
+          <a:solidFill>
+            <a:srgbClr val="FFFFFF"/>
+          </a:solidFill>
+          <a:ln>
+            <a:solidFill>
+              <a:srgbClr val="333333"/>
+            </a:solidFill>
+          </a:ln>
+        </p:spPr>
+        <p:style>
+          <a:lnRef idx="1">
+            <a:schemeClr val="accent1"/>
+          </a:lnRef>
+          <a:fillRef idx="3">
+            <a:schemeClr val="accent1"/>
+          </a:fillRef>
+          <a:effectRef idx="2">
+            <a:schemeClr val="accent1"/>
+          </a:effectRef>
+          <a:fontRef idx="minor">
+            <a:schemeClr val="lt1"/>
+          </a:fontRef>
+        </p:style>
+        <p:txBody>
+          <a:bodyPr rtlCol="0" anchor="ctr"/>
+          <a:lstStyle/>
+          <a:p>
+            <a:pPr algn="ctr"/>
+          </a:p>
+        </p:txBody>
+      </p:sp>
+      <p:sp>
+        <p:nvSpPr>
+          <p:cNvPr id="15" name="Rectangle 14"/>
+          <p:cNvSpPr/>
+          <p:nvPr/>
+        </p:nvSpPr>
+        <p:spPr>
+          <a:xfrm>
+            <a:off x="640080" y="2761488"/>
+            <a:ext cx="73152" cy="274320"/>
+          </a:xfrm>
+          <a:prstGeom prst="rect">
+            <a:avLst/>
+          </a:prstGeom>
+          <a:solidFill>
+            <a:srgbClr val="269CCB"/>
+          </a:solidFill>
+          <a:ln>
+            <a:noFill/>
+          </a:ln>
+        </p:spPr>
+        <p:style>
+          <a:lnRef idx="1">
+            <a:schemeClr val="accent1"/>
+          </a:lnRef>
+          <a:fillRef idx="3">
+            <a:schemeClr val="accent1"/>
+          </a:fillRef>
+          <a:effectRef idx="2">
+            <a:schemeClr val="accent1"/>
+          </a:effectRef>
+          <a:fontRef idx="minor">
+            <a:schemeClr val="lt1"/>
+          </a:fontRef>
+        </p:style>
+        <p:txBody>
+          <a:bodyPr rtlCol="0" anchor="ctr"/>
+          <a:lstStyle/>
+          <a:p>
+            <a:pPr algn="ctr"/>
+          </a:p>
+        </p:txBody>
+      </p:sp>
+      <p:sp>
+        <p:nvSpPr>
+          <p:cNvPr id="16" name="TextBox 15"/>
+          <p:cNvSpPr txBox="1"/>
+          <p:nvPr/>
+        </p:nvSpPr>
+        <p:spPr>
+          <a:xfrm>
+            <a:off x="1097280" y="2706624"/>
+            <a:ext cx="10362895" cy="402336"/>
+          </a:xfrm>
+          <a:prstGeom prst="rect">
+            <a:avLst/>
+          </a:prstGeom>
+          <a:noFill/>
+        </p:spPr>
+        <p:txBody>
+          <a:bodyPr wrap="square" anchor="ctr"/>
+          <a:lstStyle/>
+          <a:p>
+            <a:r>
+              <a:rPr sz="1500" b="0" i="0">
+                <a:solidFill>
+                  <a:srgbClr val="333333"/>
+                </a:solidFill>
+                <a:latin typeface="Calibri"/>
+              </a:rPr>
+              <a:t>¿Sobreescribi toString() o estoy imprimiendo la direccion de memoria?</a:t>
+            </a:r>
+          </a:p>
+        </p:txBody>
+      </p:sp>
+      <p:sp>
+        <p:nvSpPr>
+          <p:cNvPr id="17" name="TextBox 16"/>
+          <p:cNvSpPr txBox="1"/>
+          <p:nvPr/>
+        </p:nvSpPr>
+        <p:spPr>
+          <a:xfrm>
+            <a:off x="11185855" y="6473952"/>
+            <a:ext cx="640080" cy="274320"/>
+          </a:xfrm>
+          <a:prstGeom prst="rect">
+            <a:avLst/>
+          </a:prstGeom>
+          <a:noFill/>
+        </p:spPr>
+        <p:txBody>
+          <a:bodyPr wrap="square">
+            <a:spAutoFit/>
+          </a:bodyPr>
+          <a:lstStyle/>
+          <a:p>
+            <a:pPr algn="r"/>
+            <a:r>
+              <a:rPr sz="1100" b="0" i="0">
+                <a:solidFill>
+                  <a:srgbClr val="666666"/>
+                </a:solidFill>
+                <a:latin typeface="Calibri"/>
+              </a:rPr>
+              <a:t>36</a:t>
+            </a:r>
+          </a:p>
+        </p:txBody>
+      </p:sp>
+    </p:spTree>
+  </p:cSld>
+  <p:clrMapOvr>
+    <a:masterClrMapping/>
+  </p:clrMapOvr>
+</p:sld>
+</file>
+
+<file path=ppt/slides/slide37.xml><?xml version="1.0" encoding="utf-8"?>
+<p:sld xmlns:a="http://schemas.openxmlformats.org/drawingml/2006/main" xmlns:p="http://schemas.openxmlformats.org/presentationml/2006/main" xmlns:r="http://schemas.openxmlformats.org/officeDocument/2006/relationships">
+  <p:cSld>
+    <p:bg>
+      <p:bgPr>
+        <a:solidFill>
+          <a:srgbClr val="FFFFFF"/>
+        </a:solidFill>
+        <a:effectLst/>
+      </p:bgPr>
+    </p:bg>
+    <p:spTree>
+      <p:nvGrpSpPr>
+        <p:cNvPr id="1" name=""/>
+        <p:cNvGrpSpPr/>
+        <p:nvPr/>
+      </p:nvGrpSpPr>
+      <p:grpSpPr/>
+      <p:sp>
+        <p:nvSpPr>
+          <p:cNvPr id="2" name="Rectangle 1"/>
+          <p:cNvSpPr/>
+          <p:nvPr/>
+        </p:nvSpPr>
+        <p:spPr>
+          <a:xfrm>
+            <a:off x="0" y="0"/>
+            <a:ext cx="12191695" cy="960120"/>
+          </a:xfrm>
+          <a:prstGeom prst="rect">
+            <a:avLst/>
+          </a:prstGeom>
+          <a:solidFill>
+            <a:srgbClr val="095292"/>
+          </a:solidFill>
+          <a:ln>
+            <a:noFill/>
+          </a:ln>
+        </p:spPr>
+        <p:style>
+          <a:lnRef idx="1">
+            <a:schemeClr val="accent1"/>
+          </a:lnRef>
+          <a:fillRef idx="3">
+            <a:schemeClr val="accent1"/>
+          </a:fillRef>
+          <a:effectRef idx="2">
+            <a:schemeClr val="accent1"/>
+          </a:effectRef>
+          <a:fontRef idx="minor">
+            <a:schemeClr val="lt1"/>
+          </a:fontRef>
+        </p:style>
+        <p:txBody>
+          <a:bodyPr rtlCol="0" anchor="ctr"/>
+          <a:lstStyle/>
+          <a:p>
+            <a:pPr algn="ctr"/>
+          </a:p>
+        </p:txBody>
+      </p:sp>
+      <p:sp>
+        <p:nvSpPr>
+          <p:cNvPr id="3" name="Rectangle 2"/>
+          <p:cNvSpPr/>
+          <p:nvPr/>
+        </p:nvSpPr>
+        <p:spPr>
+          <a:xfrm>
+            <a:off x="0" y="960120"/>
+            <a:ext cx="12191695" cy="41148"/>
+          </a:xfrm>
+          <a:prstGeom prst="rect">
+            <a:avLst/>
+          </a:prstGeom>
+          <a:solidFill>
+            <a:srgbClr val="FFD000"/>
+          </a:solidFill>
+          <a:ln>
+            <a:noFill/>
+          </a:ln>
+        </p:spPr>
+        <p:style>
+          <a:lnRef idx="1">
+            <a:schemeClr val="accent1"/>
+          </a:lnRef>
+          <a:fillRef idx="3">
+            <a:schemeClr val="accent1"/>
+          </a:fillRef>
+          <a:effectRef idx="2">
+            <a:schemeClr val="accent1"/>
+          </a:effectRef>
+          <a:fontRef idx="minor">
+            <a:schemeClr val="lt1"/>
+          </a:fontRef>
+        </p:style>
+        <p:txBody>
+          <a:bodyPr rtlCol="0" anchor="ctr"/>
+          <a:lstStyle/>
+          <a:p>
+            <a:pPr algn="ctr"/>
+          </a:p>
+        </p:txBody>
+      </p:sp>
+      <p:sp>
+        <p:nvSpPr>
+          <p:cNvPr id="4" name="TextBox 3"/>
+          <p:cNvSpPr txBox="1"/>
+          <p:nvPr/>
+        </p:nvSpPr>
+        <p:spPr>
+          <a:xfrm>
+            <a:off x="457200" y="164592"/>
+            <a:ext cx="11277295" cy="502920"/>
+          </a:xfrm>
+          <a:prstGeom prst="rect">
+            <a:avLst/>
+          </a:prstGeom>
+          <a:noFill/>
+        </p:spPr>
+        <p:txBody>
+          <a:bodyPr wrap="square">
+            <a:spAutoFit/>
+          </a:bodyPr>
+          <a:lstStyle/>
+          <a:p>
+            <a:r>
+              <a:rPr sz="2600" b="1" i="0">
+                <a:solidFill>
+                  <a:srgbClr val="FFFFFF"/>
+                </a:solidFill>
+                <a:latin typeface="Calibri"/>
+              </a:rPr>
+              <a:t>Criterios de exito / entregable</a:t>
+            </a:r>
+          </a:p>
+        </p:txBody>
+      </p:sp>
+      <p:sp>
+        <p:nvSpPr>
+          <p:cNvPr id="5" name="TextBox 4"/>
+          <p:cNvSpPr txBox="1"/>
+          <p:nvPr/>
+        </p:nvSpPr>
+        <p:spPr>
+          <a:xfrm>
+            <a:off x="457200" y="1170432"/>
+            <a:ext cx="11277295" cy="5230368"/>
+          </a:xfrm>
+          <a:prstGeom prst="rect">
+            <a:avLst/>
+          </a:prstGeom>
+          <a:noFill/>
+        </p:spPr>
+        <p:txBody>
+          <a:bodyPr wrap="square">
+            <a:spAutoFit/>
+          </a:bodyPr>
+          <a:lstStyle/>
+          <a:p>
+            <a:pPr>
+              <a:spcAft>
+                <a:spcPts val="800"/>
+              </a:spcAft>
+            </a:pPr>
+            <a:r>
+              <a:rPr sz="2000" b="0" i="0">
+                <a:solidFill>
+                  <a:srgbClr val="333333"/>
+                </a:solidFill>
+                <a:latin typeface="Calibri"/>
+              </a:rPr>
+              <a:t>–   </a:t>
+            </a:r>
+            <a:r>
+              <a:rPr sz="2000" b="1" i="0">
+                <a:solidFill>
+                  <a:srgbClr val="333333"/>
+                </a:solidFill>
+                <a:latin typeface="Calibri"/>
+              </a:rPr>
+              <a:t>Entregable:</a:t>
+            </a:r>
+            <a:r>
+              <a:rPr sz="2000" b="0" i="0">
+                <a:solidFill>
+                  <a:srgbClr val="333333"/>
+                </a:solidFill>
+                <a:latin typeface="Calibri"/>
+              </a:rPr>
+              <a:t> Proyecto Java con la clase Mascota (atributos privados, constructor y toString) y un main que crea dos objetos distintos</a:t>
+            </a:r>
+          </a:p>
+          <a:p>
+            <a:pPr>
+              <a:spcAft>
+                <a:spcPts val="800"/>
+              </a:spcAft>
+            </a:pPr>
+            <a:r>
+              <a:rPr sz="2000" b="0" i="0">
+                <a:solidFill>
+                  <a:srgbClr val="333333"/>
+                </a:solidFill>
+                <a:latin typeface="Calibri"/>
+              </a:rPr>
+              <a:t>–   </a:t>
+            </a:r>
+            <a:r>
+              <a:rPr sz="2000" b="1" i="0">
+                <a:solidFill>
+                  <a:srgbClr val="333333"/>
+                </a:solidFill>
+                <a:latin typeface="Calibri"/>
+              </a:rPr>
+              <a:t>Exito:</a:t>
+            </a:r>
+            <a:r>
+              <a:rPr sz="2000" b="0" i="0">
+                <a:solidFill>
+                  <a:srgbClr val="333333"/>
+                </a:solidFill>
+                <a:latin typeface="Calibri"/>
+              </a:rPr>
+              <a:t> El proyecto compila y ejecuta sin errores en VS Code.</a:t>
+            </a:r>
+          </a:p>
+          <a:p>
+            <a:pPr>
+              <a:spcAft>
+                <a:spcPts val="800"/>
+              </a:spcAft>
+            </a:pPr>
+            <a:r>
+              <a:rPr sz="2000" b="0" i="0">
+                <a:solidFill>
+                  <a:srgbClr val="333333"/>
+                </a:solidFill>
+                <a:latin typeface="Calibri"/>
+              </a:rPr>
+              <a:t>–   </a:t>
+            </a:r>
+            <a:r>
+              <a:rPr sz="2000" b="1" i="0">
+                <a:solidFill>
+                  <a:srgbClr val="333333"/>
+                </a:solidFill>
+                <a:latin typeface="Calibri"/>
+              </a:rPr>
+              <a:t>Exito:</a:t>
+            </a:r>
+            <a:r>
+              <a:rPr sz="2000" b="0" i="0">
+                <a:solidFill>
+                  <a:srgbClr val="333333"/>
+                </a:solidFill>
+                <a:latin typeface="Calibri"/>
+              </a:rPr>
+              <a:t> La clase Mascota tiene atributos private y un constructor que los inicializa todos.</a:t>
+            </a:r>
+          </a:p>
+          <a:p>
+            <a:pPr>
+              <a:spcAft>
+                <a:spcPts val="800"/>
+              </a:spcAft>
+            </a:pPr>
+            <a:r>
+              <a:rPr sz="2000" b="0" i="0">
+                <a:solidFill>
+                  <a:srgbClr val="333333"/>
+                </a:solidFill>
+                <a:latin typeface="Calibri"/>
+              </a:rPr>
+              <a:t>–   </a:t>
+            </a:r>
+            <a:r>
+              <a:rPr sz="2000" b="1" i="0">
+                <a:solidFill>
+                  <a:srgbClr val="333333"/>
+                </a:solidFill>
+                <a:latin typeface="Calibri"/>
+              </a:rPr>
+              <a:t>Exito:</a:t>
+            </a:r>
+            <a:r>
+              <a:rPr sz="2000" b="0" i="0">
+                <a:solidFill>
+                  <a:srgbClr val="333333"/>
+                </a:solidFill>
+                <a:latin typeface="Calibri"/>
+              </a:rPr>
+              <a:t> El main crea dos objetos distintos de la misma clase.</a:t>
+            </a:r>
+          </a:p>
+          <a:p>
+            <a:pPr>
+              <a:spcAft>
+                <a:spcPts val="800"/>
+              </a:spcAft>
+            </a:pPr>
+            <a:r>
+              <a:rPr sz="2000" b="0" i="0">
+                <a:solidFill>
+                  <a:srgbClr val="333333"/>
+                </a:solidFill>
+                <a:latin typeface="Calibri"/>
+              </a:rPr>
+              <a:t>–   </a:t>
+            </a:r>
+            <a:r>
+              <a:rPr sz="2000" b="1" i="0">
+                <a:solidFill>
+                  <a:srgbClr val="333333"/>
+                </a:solidFill>
+                <a:latin typeface="Calibri"/>
+              </a:rPr>
+              <a:t>Exito:</a:t>
+            </a:r>
+            <a:r>
+              <a:rPr sz="2000" b="0" i="0">
+                <a:solidFill>
+                  <a:srgbClr val="333333"/>
+                </a:solidFill>
+                <a:latin typeface="Calibri"/>
+              </a:rPr>
+              <a:t> Al imprimir una mascota se ve texto legible, no vetcare.Mascota@6d06d69c.</a:t>
+            </a:r>
+          </a:p>
+          <a:p>
+            <a:pPr>
+              <a:spcAft>
+                <a:spcPts val="800"/>
+              </a:spcAft>
+            </a:pPr>
+            <a:r>
+              <a:rPr sz="2000" b="0" i="0">
+                <a:solidFill>
+                  <a:srgbClr val="333333"/>
+                </a:solidFill>
+                <a:latin typeface="Calibri"/>
+              </a:rPr>
+              <a:t>–   </a:t>
+            </a:r>
+            <a:r>
+              <a:rPr sz="2000" b="1" i="0">
+                <a:solidFill>
+                  <a:srgbClr val="333333"/>
+                </a:solidFill>
+                <a:latin typeface="Calibri"/>
+              </a:rPr>
+              <a:t>Entrega en la plataforma del curso</a:t>
+            </a:r>
+            <a:r>
+              <a:rPr sz="2000" b="0" i="0">
+                <a:solidFill>
+                  <a:srgbClr val="333333"/>
+                </a:solidFill>
+                <a:latin typeface="Calibri"/>
+              </a:rPr>
+              <a:t> — en la fecha que indique el docente.</a:t>
+            </a:r>
+          </a:p>
+        </p:txBody>
+      </p:sp>
+      <p:sp>
+        <p:nvSpPr>
+          <p:cNvPr id="6" name="TextBox 5"/>
+          <p:cNvSpPr txBox="1"/>
+          <p:nvPr/>
+        </p:nvSpPr>
+        <p:spPr>
+          <a:xfrm>
+            <a:off x="11185855" y="6473952"/>
+            <a:ext cx="640080" cy="274320"/>
+          </a:xfrm>
+          <a:prstGeom prst="rect">
+            <a:avLst/>
+          </a:prstGeom>
+          <a:noFill/>
+        </p:spPr>
+        <p:txBody>
+          <a:bodyPr wrap="square">
+            <a:spAutoFit/>
+          </a:bodyPr>
+          <a:lstStyle/>
+          <a:p>
+            <a:pPr algn="r"/>
+            <a:r>
+              <a:rPr sz="1100" b="0" i="0">
+                <a:solidFill>
+                  <a:srgbClr val="666666"/>
+                </a:solidFill>
+                <a:latin typeface="Calibri"/>
+              </a:rPr>
+              <a:t>37</a:t>
+            </a:r>
+          </a:p>
+        </p:txBody>
+      </p:sp>
+    </p:spTree>
+  </p:cSld>
+  <p:clrMapOvr>
+    <a:masterClrMapping/>
+  </p:clrMapOvr>
+</p:sld>
+</file>
+
+<file path=ppt/slides/slide38.xml><?xml version="1.0" encoding="utf-8"?>
+<p:sld xmlns:a="http://schemas.openxmlformats.org/drawingml/2006/main" xmlns:p="http://schemas.openxmlformats.org/presentationml/2006/main" xmlns:r="http://schemas.openxmlformats.org/officeDocument/2006/relationships">
+  <p:cSld>
+    <p:bg>
+      <p:bgPr>
+        <a:solidFill>
+          <a:srgbClr val="FFFFFF"/>
+        </a:solidFill>
+        <a:effectLst/>
+      </p:bgPr>
+    </p:bg>
+    <p:spTree>
+      <p:nvGrpSpPr>
+        <p:cNvPr id="1" name=""/>
+        <p:cNvGrpSpPr/>
+        <p:nvPr/>
+      </p:nvGrpSpPr>
+      <p:grpSpPr/>
+      <p:sp>
+        <p:nvSpPr>
+          <p:cNvPr id="2" name="Rectangle 1"/>
+          <p:cNvSpPr/>
+          <p:nvPr/>
+        </p:nvSpPr>
+        <p:spPr>
+          <a:xfrm>
+            <a:off x="0" y="0"/>
+            <a:ext cx="12191695" cy="960120"/>
+          </a:xfrm>
+          <a:prstGeom prst="rect">
+            <a:avLst/>
+          </a:prstGeom>
+          <a:solidFill>
+            <a:srgbClr val="095292"/>
+          </a:solidFill>
+          <a:ln>
+            <a:noFill/>
+          </a:ln>
+        </p:spPr>
+        <p:style>
+          <a:lnRef idx="1">
+            <a:schemeClr val="accent1"/>
+          </a:lnRef>
+          <a:fillRef idx="3">
+            <a:schemeClr val="accent1"/>
+          </a:fillRef>
+          <a:effectRef idx="2">
+            <a:schemeClr val="accent1"/>
+          </a:effectRef>
+          <a:fontRef idx="minor">
+            <a:schemeClr val="lt1"/>
+          </a:fontRef>
+        </p:style>
+        <p:txBody>
+          <a:bodyPr rtlCol="0" anchor="ctr"/>
+          <a:lstStyle/>
+          <a:p>
+            <a:pPr algn="ctr"/>
+          </a:p>
+        </p:txBody>
+      </p:sp>
+      <p:sp>
+        <p:nvSpPr>
+          <p:cNvPr id="3" name="Rectangle 2"/>
+          <p:cNvSpPr/>
+          <p:nvPr/>
+        </p:nvSpPr>
+        <p:spPr>
+          <a:xfrm>
+            <a:off x="0" y="960120"/>
+            <a:ext cx="12191695" cy="41148"/>
+          </a:xfrm>
+          <a:prstGeom prst="rect">
+            <a:avLst/>
+          </a:prstGeom>
+          <a:solidFill>
+            <a:srgbClr val="FFD000"/>
+          </a:solidFill>
+          <a:ln>
+            <a:noFill/>
+          </a:ln>
+        </p:spPr>
+        <p:style>
+          <a:lnRef idx="1">
+            <a:schemeClr val="accent1"/>
+          </a:lnRef>
+          <a:fillRef idx="3">
+            <a:schemeClr val="accent1"/>
+          </a:fillRef>
+          <a:effectRef idx="2">
+            <a:schemeClr val="accent1"/>
+          </a:effectRef>
+          <a:fontRef idx="minor">
+            <a:schemeClr val="lt1"/>
+          </a:fontRef>
+        </p:style>
+        <p:txBody>
+          <a:bodyPr rtlCol="0" anchor="ctr"/>
+          <a:lstStyle/>
+          <a:p>
+            <a:pPr algn="ctr"/>
+          </a:p>
+        </p:txBody>
+      </p:sp>
+      <p:sp>
+        <p:nvSpPr>
+          <p:cNvPr id="4" name="TextBox 3"/>
+          <p:cNvSpPr txBox="1"/>
+          <p:nvPr/>
+        </p:nvSpPr>
+        <p:spPr>
+          <a:xfrm>
+            <a:off x="457200" y="164592"/>
+            <a:ext cx="11277295" cy="502920"/>
+          </a:xfrm>
+          <a:prstGeom prst="rect">
+            <a:avLst/>
+          </a:prstGeom>
+          <a:noFill/>
+        </p:spPr>
+        <p:txBody>
+          <a:bodyPr wrap="square">
+            <a:spAutoFit/>
+          </a:bodyPr>
+          <a:lstStyle/>
+          <a:p>
+            <a:r>
+              <a:rPr sz="2600" b="1" i="0">
+                <a:solidFill>
+                  <a:srgbClr val="FFFFFF"/>
+                </a:solidFill>
+                <a:latin typeface="Calibri"/>
+              </a:rPr>
+              <a:t>Para el PI esta semana</a:t>
+            </a:r>
+          </a:p>
+        </p:txBody>
+      </p:sp>
+      <p:sp>
+        <p:nvSpPr>
+          <p:cNvPr id="5" name="Rounded Rectangle 4"/>
+          <p:cNvSpPr/>
+          <p:nvPr/>
+        </p:nvSpPr>
+        <p:spPr>
+          <a:xfrm>
+            <a:off x="457200" y="1261872"/>
+            <a:ext cx="11277295" cy="1051560"/>
+          </a:xfrm>
+          <a:prstGeom prst="roundRect">
+            <a:avLst>
+              <a:gd name="adj" fmla="val 12000"/>
+            </a:avLst>
+          </a:prstGeom>
+          <a:solidFill>
+            <a:srgbClr val="E8F4FA"/>
+          </a:solidFill>
+          <a:ln>
+            <a:noFill/>
+          </a:ln>
+        </p:spPr>
+        <p:style>
+          <a:lnRef idx="1">
+            <a:schemeClr val="accent1"/>
+          </a:lnRef>
+          <a:fillRef idx="3">
+            <a:schemeClr val="accent1"/>
+          </a:fillRef>
+          <a:effectRef idx="2">
+            <a:schemeClr val="accent1"/>
+          </a:effectRef>
+          <a:fontRef idx="minor">
+            <a:schemeClr val="lt1"/>
+          </a:fontRef>
+        </p:style>
+        <p:txBody>
+          <a:bodyPr rtlCol="0" anchor="ctr"/>
+          <a:lstStyle/>
+          <a:p>
+            <a:pPr algn="ctr"/>
+          </a:p>
+        </p:txBody>
+      </p:sp>
+      <p:sp>
+        <p:nvSpPr>
+          <p:cNvPr id="6" name="Rectangle 5"/>
+          <p:cNvSpPr/>
+          <p:nvPr/>
+        </p:nvSpPr>
+        <p:spPr>
+          <a:xfrm>
+            <a:off x="457200" y="1261872"/>
+            <a:ext cx="128016" cy="1051560"/>
+          </a:xfrm>
+          <a:prstGeom prst="rect">
+            <a:avLst/>
+          </a:prstGeom>
+          <a:solidFill>
+            <a:srgbClr val="269CCB"/>
+          </a:solidFill>
+          <a:ln>
+            <a:noFill/>
+          </a:ln>
+        </p:spPr>
+        <p:style>
+          <a:lnRef idx="1">
+            <a:schemeClr val="accent1"/>
+          </a:lnRef>
+          <a:fillRef idx="3">
+            <a:schemeClr val="accent1"/>
+          </a:fillRef>
+          <a:effectRef idx="2">
+            <a:schemeClr val="accent1"/>
+          </a:effectRef>
+          <a:fontRef idx="minor">
+            <a:schemeClr val="lt1"/>
+          </a:fontRef>
+        </p:style>
+        <p:txBody>
+          <a:bodyPr rtlCol="0" anchor="ctr"/>
+          <a:lstStyle/>
+          <a:p>
+            <a:pPr algn="ctr"/>
+          </a:p>
+        </p:txBody>
+      </p:sp>
+      <p:sp>
+        <p:nvSpPr>
+          <p:cNvPr id="7" name="TextBox 6"/>
+          <p:cNvSpPr txBox="1"/>
+          <p:nvPr/>
+        </p:nvSpPr>
+        <p:spPr>
+          <a:xfrm>
+            <a:off x="777240" y="1399031"/>
+            <a:ext cx="10774375" cy="822959"/>
+          </a:xfrm>
+          <a:prstGeom prst="rect">
+            <a:avLst/>
+          </a:prstGeom>
+          <a:noFill/>
+        </p:spPr>
+        <p:txBody>
+          <a:bodyPr wrap="square">
+            <a:spAutoFit/>
+          </a:bodyPr>
+          <a:lstStyle/>
+          <a:p>
+            <a:r>
+              <a:rPr sz="1200" b="1" i="0">
+                <a:solidFill>
+                  <a:srgbClr val="269CCB"/>
+                </a:solidFill>
+                <a:latin typeface="Calibri"/>
+              </a:rPr>
+              <a:t>Info</a:t>
+            </a:r>
+          </a:p>
+          <a:p>
+            <a:pPr>
+              <a:spcBef>
+                <a:spcPts val="400"/>
+              </a:spcBef>
+            </a:pPr>
+            <a:r>
+              <a:rPr sz="1400" b="0" i="0">
+                <a:solidFill>
+                  <a:srgbClr val="333333"/>
+                </a:solidFill>
+                <a:latin typeface="Calibri"/>
+              </a:rPr>
+              <a:t>Hito: Entorno de desarrollo listo y la primera clase del dominio VetCare escrita</a:t>
+            </a:r>
+          </a:p>
+        </p:txBody>
+      </p:sp>
+      <p:sp>
+        <p:nvSpPr>
+          <p:cNvPr id="8" name="Rounded Rectangle 7"/>
+          <p:cNvSpPr/>
+          <p:nvPr/>
+        </p:nvSpPr>
+        <p:spPr>
+          <a:xfrm>
+            <a:off x="457200" y="2478024"/>
+            <a:ext cx="11277295" cy="1051560"/>
+          </a:xfrm>
+          <a:prstGeom prst="roundRect">
+            <a:avLst>
+              <a:gd name="adj" fmla="val 12000"/>
+            </a:avLst>
+          </a:prstGeom>
+          <a:solidFill>
+            <a:srgbClr val="FFF8E1"/>
+          </a:solidFill>
+          <a:ln>
+            <a:noFill/>
+          </a:ln>
+        </p:spPr>
+        <p:style>
+          <a:lnRef idx="1">
+            <a:schemeClr val="accent1"/>
+          </a:lnRef>
+          <a:fillRef idx="3">
+            <a:schemeClr val="accent1"/>
+          </a:fillRef>
+          <a:effectRef idx="2">
+            <a:schemeClr val="accent1"/>
+          </a:effectRef>
+          <a:fontRef idx="minor">
+            <a:schemeClr val="lt1"/>
+          </a:fontRef>
+        </p:style>
+        <p:txBody>
+          <a:bodyPr rtlCol="0" anchor="ctr"/>
+          <a:lstStyle/>
+          <a:p>
+            <a:pPr algn="ctr"/>
+          </a:p>
+        </p:txBody>
+      </p:sp>
+      <p:sp>
+        <p:nvSpPr>
+          <p:cNvPr id="9" name="Rectangle 8"/>
+          <p:cNvSpPr/>
+          <p:nvPr/>
+        </p:nvSpPr>
+        <p:spPr>
+          <a:xfrm>
+            <a:off x="457200" y="2478024"/>
+            <a:ext cx="128016" cy="1051560"/>
+          </a:xfrm>
+          <a:prstGeom prst="rect">
+            <a:avLst/>
+          </a:prstGeom>
+          <a:solidFill>
+            <a:srgbClr val="FFD000"/>
+          </a:solidFill>
+          <a:ln>
+            <a:noFill/>
+          </a:ln>
+        </p:spPr>
+        <p:style>
+          <a:lnRef idx="1">
+            <a:schemeClr val="accent1"/>
+          </a:lnRef>
+          <a:fillRef idx="3">
+            <a:schemeClr val="accent1"/>
+          </a:fillRef>
+          <a:effectRef idx="2">
+            <a:schemeClr val="accent1"/>
+          </a:effectRef>
+          <a:fontRef idx="minor">
+            <a:schemeClr val="lt1"/>
+          </a:fontRef>
+        </p:style>
+        <p:txBody>
+          <a:bodyPr rtlCol="0" anchor="ctr"/>
+          <a:lstStyle/>
+          <a:p>
+            <a:pPr algn="ctr"/>
+          </a:p>
+        </p:txBody>
+      </p:sp>
+      <p:sp>
+        <p:nvSpPr>
+          <p:cNvPr id="10" name="TextBox 9"/>
+          <p:cNvSpPr txBox="1"/>
+          <p:nvPr/>
+        </p:nvSpPr>
+        <p:spPr>
+          <a:xfrm>
+            <a:off x="777240" y="2615184"/>
+            <a:ext cx="10774375" cy="822959"/>
+          </a:xfrm>
+          <a:prstGeom prst="rect">
+            <a:avLst/>
+          </a:prstGeom>
+          <a:noFill/>
+        </p:spPr>
+        <p:txBody>
+          <a:bodyPr wrap="square">
+            <a:spAutoFit/>
+          </a:bodyPr>
+          <a:lstStyle/>
+          <a:p>
+            <a:r>
+              <a:rPr sz="1200" b="1" i="0">
+                <a:solidFill>
+                  <a:srgbClr val="FFD000"/>
+                </a:solidFill>
+                <a:latin typeface="Calibri"/>
+              </a:rPr>
+              <a:t>Aclaración</a:t>
+            </a:r>
+          </a:p>
+          <a:p>
+            <a:pPr>
+              <a:spcBef>
+                <a:spcPts val="400"/>
+              </a:spcBef>
+            </a:pPr>
+            <a:r>
+              <a:rPr sz="1400" b="0" i="0">
+                <a:solidFill>
+                  <a:srgbClr val="333333"/>
+                </a:solidFill>
+                <a:latin typeface="Calibri"/>
+              </a:rPr>
+              <a:t>Enunciado completo: Clases/Proyecto Integrador/ (VetCare).</a:t>
+            </a:r>
+          </a:p>
+        </p:txBody>
+      </p:sp>
+      <p:sp>
+        <p:nvSpPr>
+          <p:cNvPr id="11" name="Rounded Rectangle 10"/>
+          <p:cNvSpPr/>
+          <p:nvPr/>
+        </p:nvSpPr>
+        <p:spPr>
+          <a:xfrm>
+            <a:off x="457200" y="3694176"/>
+            <a:ext cx="11277295" cy="1051560"/>
+          </a:xfrm>
+          <a:prstGeom prst="roundRect">
+            <a:avLst>
+              <a:gd name="adj" fmla="val 12000"/>
+            </a:avLst>
+          </a:prstGeom>
+          <a:solidFill>
+            <a:srgbClr val="FBE4E4"/>
+          </a:solidFill>
+          <a:ln>
+            <a:noFill/>
+          </a:ln>
+        </p:spPr>
+        <p:style>
+          <a:lnRef idx="1">
+            <a:schemeClr val="accent1"/>
+          </a:lnRef>
+          <a:fillRef idx="3">
+            <a:schemeClr val="accent1"/>
+          </a:fillRef>
+          <a:effectRef idx="2">
+            <a:schemeClr val="accent1"/>
+          </a:effectRef>
+          <a:fontRef idx="minor">
+            <a:schemeClr val="lt1"/>
+          </a:fontRef>
+        </p:style>
+        <p:txBody>
+          <a:bodyPr rtlCol="0" anchor="ctr"/>
+          <a:lstStyle/>
+          <a:p>
+            <a:pPr algn="ctr"/>
+          </a:p>
+        </p:txBody>
+      </p:sp>
+      <p:sp>
+        <p:nvSpPr>
+          <p:cNvPr id="12" name="Rectangle 11"/>
+          <p:cNvSpPr/>
+          <p:nvPr/>
+        </p:nvSpPr>
+        <p:spPr>
+          <a:xfrm>
+            <a:off x="457200" y="3694176"/>
+            <a:ext cx="128016" cy="1051560"/>
+          </a:xfrm>
+          <a:prstGeom prst="rect">
+            <a:avLst/>
+          </a:prstGeom>
+          <a:solidFill>
+            <a:srgbClr val="A02030"/>
+          </a:solidFill>
+          <a:ln>
+            <a:noFill/>
+          </a:ln>
+        </p:spPr>
+        <p:style>
+          <a:lnRef idx="1">
+            <a:schemeClr val="accent1"/>
+          </a:lnRef>
+          <a:fillRef idx="3">
+            <a:schemeClr val="accent1"/>
+          </a:fillRef>
+          <a:effectRef idx="2">
+            <a:schemeClr val="accent1"/>
+          </a:effectRef>
+          <a:fontRef idx="minor">
+            <a:schemeClr val="lt1"/>
+          </a:fontRef>
+        </p:style>
+        <p:txBody>
+          <a:bodyPr rtlCol="0" anchor="ctr"/>
+          <a:lstStyle/>
+          <a:p>
+            <a:pPr algn="ctr"/>
+          </a:p>
+        </p:txBody>
+      </p:sp>
+      <p:sp>
+        <p:nvSpPr>
+          <p:cNvPr id="13" name="TextBox 12"/>
+          <p:cNvSpPr txBox="1"/>
+          <p:nvPr/>
+        </p:nvSpPr>
+        <p:spPr>
+          <a:xfrm>
+            <a:off x="777240" y="3831336"/>
+            <a:ext cx="10774375" cy="822959"/>
+          </a:xfrm>
+          <a:prstGeom prst="rect">
+            <a:avLst/>
+          </a:prstGeom>
+          <a:noFill/>
+        </p:spPr>
+        <p:txBody>
+          <a:bodyPr wrap="square">
+            <a:spAutoFit/>
+          </a:bodyPr>
+          <a:lstStyle/>
+          <a:p>
+            <a:r>
+              <a:rPr sz="1200" b="1" i="0">
+                <a:solidFill>
+                  <a:srgbClr val="A02030"/>
+                </a:solidFill>
+                <a:latin typeface="Calibri"/>
+              </a:rPr>
+              <a:t>Atención</a:t>
+            </a:r>
+          </a:p>
+          <a:p>
+            <a:pPr>
+              <a:spcBef>
+                <a:spcPts val="400"/>
+              </a:spcBef>
+            </a:pPr>
+            <a:r>
+              <a:rPr sz="1400" b="0" i="0">
+                <a:solidFill>
+                  <a:srgbClr val="333333"/>
+                </a:solidFill>
+                <a:latin typeface="Calibri"/>
+              </a:rPr>
+              <a:t>Entrega del taller, si el docente lo asigna · en la fecha que indique el docente.</a:t>
+            </a:r>
+          </a:p>
+        </p:txBody>
+      </p:sp>
+      <p:sp>
+        <p:nvSpPr>
+          <p:cNvPr id="14" name="TextBox 13"/>
+          <p:cNvSpPr txBox="1"/>
+          <p:nvPr/>
+        </p:nvSpPr>
+        <p:spPr>
+          <a:xfrm>
+            <a:off x="11185855" y="6473952"/>
+            <a:ext cx="640080" cy="274320"/>
+          </a:xfrm>
+          <a:prstGeom prst="rect">
+            <a:avLst/>
+          </a:prstGeom>
+          <a:noFill/>
+        </p:spPr>
+        <p:txBody>
+          <a:bodyPr wrap="square">
+            <a:spAutoFit/>
+          </a:bodyPr>
+          <a:lstStyle/>
+          <a:p>
+            <a:pPr algn="r"/>
+            <a:r>
+              <a:rPr sz="1100" b="0" i="0">
+                <a:solidFill>
+                  <a:srgbClr val="666666"/>
+                </a:solidFill>
+                <a:latin typeface="Calibri"/>
+              </a:rPr>
+              <a:t>38</a:t>
+            </a:r>
+          </a:p>
+        </p:txBody>
+      </p:sp>
+    </p:spTree>
+  </p:cSld>
+  <p:clrMapOvr>
+    <a:masterClrMapping/>
+  </p:clrMapOvr>
+</p:sld>
+</file>
+
+<file path=ppt/slides/slide39.xml><?xml version="1.0" encoding="utf-8"?>
+<p:sld xmlns:a="http://schemas.openxmlformats.org/drawingml/2006/main" xmlns:p="http://schemas.openxmlformats.org/presentationml/2006/main" xmlns:r="http://schemas.openxmlformats.org/officeDocument/2006/relationships">
+  <p:cSld>
+    <p:bg>
+      <p:bgPr>
+        <a:solidFill>
+          <a:srgbClr val="FFFFFF"/>
+        </a:solidFill>
+        <a:effectLst/>
+      </p:bgPr>
+    </p:bg>
+    <p:spTree>
+      <p:nvGrpSpPr>
+        <p:cNvPr id="1" name=""/>
+        <p:cNvGrpSpPr/>
+        <p:nvPr/>
+      </p:nvGrpSpPr>
+      <p:grpSpPr/>
+      <p:sp>
+        <p:nvSpPr>
+          <p:cNvPr id="2" name="Rectangle 1"/>
+          <p:cNvSpPr/>
+          <p:nvPr/>
+        </p:nvSpPr>
+        <p:spPr>
+          <a:xfrm>
+            <a:off x="0" y="0"/>
             <a:ext cx="12191695" cy="164592"/>
           </a:xfrm>
           <a:prstGeom prst="rect">
@@ -13460,55 +15802,7 @@
                 </a:solidFill>
                 <a:latin typeface="Calibri"/>
               </a:rPr>
-              <a:t>–   Antes de la POO un programa era una lista de procedimientos que operaban sobre datos sueltos.</a:t>
-            </a:r>
-          </a:p>
-          <a:p>
-            <a:pPr>
-              <a:spcAft>
-                <a:spcPts val="800"/>
-              </a:spcAft>
-            </a:pPr>
-            <a:r>
-              <a:rPr sz="2000" b="0" i="0">
-                <a:solidFill>
-                  <a:srgbClr val="333333"/>
-                </a:solidFill>
-                <a:latin typeface="Calibri"/>
-              </a:rPr>
-              <a:t>–   Cuando el programa crecia, nadie sabia que funcion tocaba que dato, y un cambio pequeno rompia cosas en lugares inesperados.</a:t>
-            </a:r>
-          </a:p>
-          <a:p>
-            <a:pPr>
-              <a:spcAft>
-                <a:spcPts val="800"/>
-              </a:spcAft>
-            </a:pPr>
-            <a:r>
-              <a:rPr sz="2000" b="0" i="0">
-                <a:solidFill>
-                  <a:srgbClr val="333333"/>
-                </a:solidFill>
-                <a:latin typeface="Calibri"/>
-              </a:rPr>
               <a:t>–   La POO propone lo contrario: juntar en una sola unidad, el objeto, los datos y las operaciones que los manipulan.</a:t>
-            </a:r>
-          </a:p>
-          <a:p>
-            <a:pPr>
-              <a:spcAft>
-                <a:spcPts val="800"/>
-              </a:spcAft>
-            </a:pPr>
-            <a:r>
-              <a:rPr sz="2000" b="0" i="0">
-                <a:solidFill>
-                  <a:srgbClr val="333333"/>
-                </a:solidFill>
-                <a:latin typeface="Calibri"/>
-              </a:rPr>
-              <a:t>–   El programa deja de ser una receta y pasa a ser un conjunto de piezas que se hablan entre si.</a:t>
             </a:r>
           </a:p>
           <a:p>
@@ -14044,22 +16338,6 @@
                 </a:solidFill>
                 <a:latin typeface="Calibri"/>
               </a:rPr>
-              <a:t>–   Los cuatro pilares se entienden por el problema que resuelve cada uno.</a:t>
-            </a:r>
-          </a:p>
-          <a:p>
-            <a:pPr>
-              <a:spcAft>
-                <a:spcPts val="800"/>
-              </a:spcAft>
-            </a:pPr>
-            <a:r>
-              <a:rPr sz="2000" b="0" i="0">
-                <a:solidFill>
-                  <a:srgbClr val="333333"/>
-                </a:solidFill>
-                <a:latin typeface="Calibri"/>
-              </a:rPr>
               <a:t>–   Abstraccion es quedarse solo con lo que importa del problema: para la clinica Huellitas, de una mascota importa su especie y su historial, no su color favorito; modelar es decidir que se ignora.</a:t>
             </a:r>
           </a:p>
@@ -14596,39 +16874,7 @@
                 </a:solidFill>
                 <a:latin typeface="Calibri"/>
               </a:rPr>
-              <a:t>–   La instruccion new Mascota("Luna", "Canino", 3) reserva memoria y llama al constructor.</a:t>
-            </a:r>
-          </a:p>
-          <a:p>
-            <a:pPr>
-              <a:spcAft>
-                <a:spcPts val="800"/>
-              </a:spcAft>
-            </a:pPr>
-            <a:r>
-              <a:rPr sz="2000" b="0" i="0">
-                <a:solidFill>
-                  <a:srgbClr val="333333"/>
-                </a:solidFill>
-                <a:latin typeface="Calibri"/>
-              </a:rPr>
               <a:t>–   Si no se escribe ninguno, Java agrega uno vacio por defecto, y ahi es donde aparecen objetos a medio inicializar que despues fallan con NullPointerException en el peor momento.</a:t>
-            </a:r>
-          </a:p>
-          <a:p>
-            <a:pPr>
-              <a:spcAft>
-                <a:spcPts val="800"/>
-              </a:spcAft>
-            </a:pPr>
-            <a:r>
-              <a:rPr sz="2000" b="0" i="0">
-                <a:solidFill>
-                  <a:srgbClr val="333333"/>
-                </a:solidFill>
-                <a:latin typeface="Calibri"/>
-              </a:rPr>
-              <a:t>–   Por eso desde la primera clase se escribe el constructor completo.</a:t>
             </a:r>
           </a:p>
         </p:txBody>
@@ -14809,21 +17055,141 @@
                 </a:solidFill>
                 <a:latin typeface="Calibri"/>
               </a:rPr>
-              <a:t>En Programacion I el estudiante trabajo con programacion estructurada:... (1/2)</a:t>
-            </a:r>
-          </a:p>
-        </p:txBody>
-      </p:sp>
-      <p:sp>
-        <p:nvSpPr>
-          <p:cNvPr id="5" name="TextBox 4"/>
+              <a:t>El constructor es el metodo que se ejecuta al... — sintaxis</a:t>
+            </a:r>
+          </a:p>
+        </p:txBody>
+      </p:sp>
+      <p:sp>
+        <p:nvSpPr>
+          <p:cNvPr id="5" name="Rounded Rectangle 4"/>
+          <p:cNvSpPr/>
+          <p:nvPr/>
+        </p:nvSpPr>
+        <p:spPr>
+          <a:xfrm>
+            <a:off x="457200" y="1261872"/>
+            <a:ext cx="11277295" cy="5093208"/>
+          </a:xfrm>
+          <a:prstGeom prst="roundRect">
+            <a:avLst>
+              <a:gd name="adj" fmla="val 12000"/>
+            </a:avLst>
+          </a:prstGeom>
+          <a:solidFill>
+            <a:srgbClr val="1E2A38"/>
+          </a:solidFill>
+          <a:ln>
+            <a:noFill/>
+          </a:ln>
+        </p:spPr>
+        <p:style>
+          <a:lnRef idx="1">
+            <a:schemeClr val="accent1"/>
+          </a:lnRef>
+          <a:fillRef idx="3">
+            <a:schemeClr val="accent1"/>
+          </a:fillRef>
+          <a:effectRef idx="2">
+            <a:schemeClr val="accent1"/>
+          </a:effectRef>
+          <a:fontRef idx="minor">
+            <a:schemeClr val="lt1"/>
+          </a:fontRef>
+        </p:style>
+        <p:txBody>
+          <a:bodyPr rtlCol="0" anchor="ctr"/>
+          <a:lstStyle/>
+          <a:p>
+            <a:pPr algn="ctr"/>
+          </a:p>
+        </p:txBody>
+      </p:sp>
+      <p:sp>
+        <p:nvSpPr>
+          <p:cNvPr id="6" name="Rectangle 5"/>
+          <p:cNvSpPr/>
+          <p:nvPr/>
+        </p:nvSpPr>
+        <p:spPr>
+          <a:xfrm>
+            <a:off x="457200" y="1261872"/>
+            <a:ext cx="11277295" cy="320040"/>
+          </a:xfrm>
+          <a:prstGeom prst="rect">
+            <a:avLst/>
+          </a:prstGeom>
+          <a:solidFill>
+            <a:srgbClr val="095292"/>
+          </a:solidFill>
+          <a:ln>
+            <a:noFill/>
+          </a:ln>
+        </p:spPr>
+        <p:style>
+          <a:lnRef idx="1">
+            <a:schemeClr val="accent1"/>
+          </a:lnRef>
+          <a:fillRef idx="3">
+            <a:schemeClr val="accent1"/>
+          </a:fillRef>
+          <a:effectRef idx="2">
+            <a:schemeClr val="accent1"/>
+          </a:effectRef>
+          <a:fontRef idx="minor">
+            <a:schemeClr val="lt1"/>
+          </a:fontRef>
+        </p:style>
+        <p:txBody>
+          <a:bodyPr rtlCol="0" anchor="ctr"/>
+          <a:lstStyle/>
+          <a:p>
+            <a:pPr algn="ctr"/>
+          </a:p>
+        </p:txBody>
+      </p:sp>
+      <p:sp>
+        <p:nvSpPr>
+          <p:cNvPr id="7" name="TextBox 6"/>
           <p:cNvSpPr txBox="1"/>
           <p:nvPr/>
         </p:nvSpPr>
         <p:spPr>
           <a:xfrm>
-            <a:off x="457200" y="1170432"/>
-            <a:ext cx="11277295" cy="5230368"/>
+            <a:off x="685800" y="1307592"/>
+            <a:ext cx="10820095" cy="256032"/>
+          </a:xfrm>
+          <a:prstGeom prst="rect">
+            <a:avLst/>
+          </a:prstGeom>
+          <a:noFill/>
+        </p:spPr>
+        <p:txBody>
+          <a:bodyPr wrap="square" anchor="ctr"/>
+          <a:lstStyle/>
+          <a:p>
+            <a:r>
+              <a:rPr sz="1000" b="1" i="0">
+                <a:solidFill>
+                  <a:srgbClr val="269CCB"/>
+                </a:solidFill>
+                <a:latin typeface="Calibri"/>
+              </a:rPr>
+              <a:t>● ● ●</a:t>
+            </a:r>
+          </a:p>
+        </p:txBody>
+      </p:sp>
+      <p:sp>
+        <p:nvSpPr>
+          <p:cNvPr id="8" name="TextBox 7"/>
+          <p:cNvSpPr txBox="1"/>
+          <p:nvPr/>
+        </p:nvSpPr>
+        <p:spPr>
+          <a:xfrm>
+            <a:off x="777240" y="1719072"/>
+            <a:ext cx="10637215" cy="4453128"/>
           </a:xfrm>
           <a:prstGeom prst="rect">
             <a:avLst/>
@@ -14838,104 +17204,24 @@
           <a:p>
             <a:pPr>
               <a:spcAft>
-                <a:spcPts val="800"/>
+                <a:spcPts val="400"/>
               </a:spcAft>
             </a:pPr>
             <a:r>
-              <a:rPr sz="2000" b="0" i="0">
-                <a:solidFill>
-                  <a:srgbClr val="333333"/>
-                </a:solidFill>
-                <a:latin typeface="Calibri"/>
-              </a:rPr>
-              <a:t>–   En Programacion I el estudiante trabajo con programacion estructurada: los datos por un lado y las funciones por otro.</a:t>
-            </a:r>
-          </a:p>
-          <a:p>
-            <a:pPr>
-              <a:spcAft>
-                <a:spcPts val="800"/>
-              </a:spcAft>
-            </a:pPr>
-            <a:r>
-              <a:rPr sz="2000" b="0" i="0">
-                <a:solidFill>
-                  <a:srgbClr val="333333"/>
-                </a:solidFill>
-                <a:latin typeface="Calibri"/>
-              </a:rPr>
-              <a:t>–   Vale la pena hacer visible el limite de ese enfoque con el mismo dominio del proyecto antes de nombrar la palabra objeto.</a:t>
-            </a:r>
-          </a:p>
-          <a:p>
-            <a:pPr>
-              <a:spcAft>
-                <a:spcPts val="800"/>
-              </a:spcAft>
-            </a:pPr>
-            <a:r>
-              <a:rPr sz="2000" b="0" i="0">
-                <a:solidFill>
-                  <a:srgbClr val="333333"/>
-                </a:solidFill>
-                <a:latin typeface="Calibri"/>
-              </a:rPr>
-              <a:t>–   Para registrar mascotas en la clinica se declaraban arreglos paralelos: String[] nombres, String[] especies, int[] edades, y la mascota numero cinco era la casilla cinco de los tres arreglos al mismo tiempo.</a:t>
-            </a:r>
-          </a:p>
-          <a:p>
-            <a:pPr>
-              <a:spcAft>
-                <a:spcPts val="800"/>
-              </a:spcAft>
-            </a:pPr>
-            <a:r>
-              <a:rPr sz="2000" b="0" i="0">
-                <a:solidFill>
-                  <a:srgbClr val="333333"/>
-                </a:solidFill>
-                <a:latin typeface="Calibri"/>
-              </a:rPr>
-              <a:t>–   Eso funciona en un ejercicio de veinte lineas y se cae en cuanto el programa crece, por tres razones concretas.</a:t>
-            </a:r>
-          </a:p>
-          <a:p>
-            <a:pPr>
-              <a:spcAft>
-                <a:spcPts val="800"/>
-              </a:spcAft>
-            </a:pPr>
-            <a:r>
-              <a:rPr sz="2000" b="0" i="0">
-                <a:solidFill>
-                  <a:srgbClr val="333333"/>
-                </a:solidFill>
-                <a:latin typeface="Calibri"/>
-              </a:rPr>
-              <a:t>–   Ordenar la lista por nombre obliga a mover los tres arreglos en perfecta sincronia, y basta olvidar uno para que Luna quede con la edad de otro animal.</a:t>
-            </a:r>
-          </a:p>
-          <a:p>
-            <a:pPr>
-              <a:spcAft>
-                <a:spcPts val="800"/>
-              </a:spcAft>
-            </a:pPr>
-            <a:r>
-              <a:rPr sz="2000" b="0" i="0">
-                <a:solidFill>
-                  <a:srgbClr val="333333"/>
-                </a:solidFill>
-                <a:latin typeface="Calibri"/>
-              </a:rPr>
-              <a:t>–   Agregar un dato nuevo, por ejemplo si la mascota esta activa, obliga a abrir todas las funciones que reciben esos arreglos y agregarles un parametro.</a:t>
-            </a:r>
-          </a:p>
-        </p:txBody>
-      </p:sp>
-      <p:sp>
-        <p:nvSpPr>
-          <p:cNvPr id="6" name="TextBox 5"/>
+              <a:rPr sz="1400" b="0" i="0">
+                <a:solidFill>
+                  <a:srgbClr val="FFFFFF"/>
+                </a:solidFill>
+                <a:latin typeface="Calibri"/>
+              </a:rPr>
+              <a:t>new Mascota("Luna", "Canino", 3)</a:t>
+            </a:r>
+          </a:p>
+        </p:txBody>
+      </p:sp>
+      <p:sp>
+        <p:nvSpPr>
+          <p:cNvPr id="9" name="TextBox 8"/>
           <p:cNvSpPr txBox="1"/>
           <p:nvPr/>
         </p:nvSpPr>

--- a/Programacion II/Clases/Clase 1 - Introduccion a POO/Presentacion.pptx
+++ b/Programacion II/Clases/Clase 1 - Introduccion a POO/Presentacion.pptx
@@ -9,41 +9,35 @@
     <p:sldId id="257" r:id="rId8"/>
     <p:sldId id="258" r:id="rId9"/>
     <p:sldId id="259" r:id="rId10"/>
-    <p:sldId id="260" r:id="rId11"/>
-    <p:sldId id="261" r:id="rId12"/>
-    <p:sldId id="262" r:id="rId13"/>
-    <p:sldId id="263" r:id="rId14"/>
-    <p:sldId id="264" r:id="rId15"/>
-    <p:sldId id="265" r:id="rId16"/>
-    <p:sldId id="266" r:id="rId17"/>
-    <p:sldId id="267" r:id="rId18"/>
-    <p:sldId id="268" r:id="rId19"/>
-    <p:sldId id="269" r:id="rId20"/>
-    <p:sldId id="270" r:id="rId21"/>
-    <p:sldId id="271" r:id="rId22"/>
-    <p:sldId id="272" r:id="rId23"/>
-    <p:sldId id="273" r:id="rId24"/>
-    <p:sldId id="274" r:id="rId25"/>
-    <p:sldId id="275" r:id="rId26"/>
-    <p:sldId id="276" r:id="rId27"/>
-    <p:sldId id="277" r:id="rId28"/>
-    <p:sldId id="278" r:id="rId29"/>
-    <p:sldId id="279" r:id="rId30"/>
-    <p:sldId id="280" r:id="rId31"/>
-    <p:sldId id="281" r:id="rId32"/>
-    <p:sldId id="282" r:id="rId33"/>
-    <p:sldId id="283" r:id="rId34"/>
-    <p:sldId id="284" r:id="rId35"/>
-    <p:sldId id="285" r:id="rId36"/>
-    <p:sldId id="286" r:id="rId37"/>
-    <p:sldId id="287" r:id="rId38"/>
-    <p:sldId id="288" r:id="rId39"/>
-    <p:sldId id="289" r:id="rId40"/>
-    <p:sldId id="290" r:id="rId41"/>
-    <p:sldId id="291" r:id="rId42"/>
-    <p:sldId id="292" r:id="rId43"/>
-    <p:sldId id="293" r:id="rId44"/>
-    <p:sldId id="294" r:id="rId45"/>
+    <p:sldId id="260" r:id="rId12"/>
+    <p:sldId id="261" r:id="rId13"/>
+    <p:sldId id="262" r:id="rId14"/>
+    <p:sldId id="263" r:id="rId15"/>
+    <p:sldId id="264" r:id="rId16"/>
+    <p:sldId id="265" r:id="rId17"/>
+    <p:sldId id="266" r:id="rId18"/>
+    <p:sldId id="267" r:id="rId19"/>
+    <p:sldId id="268" r:id="rId20"/>
+    <p:sldId id="269" r:id="rId21"/>
+    <p:sldId id="270" r:id="rId22"/>
+    <p:sldId id="271" r:id="rId23"/>
+    <p:sldId id="272" r:id="rId24"/>
+    <p:sldId id="273" r:id="rId25"/>
+    <p:sldId id="274" r:id="rId26"/>
+    <p:sldId id="275" r:id="rId27"/>
+    <p:sldId id="276" r:id="rId28"/>
+    <p:sldId id="277" r:id="rId29"/>
+    <p:sldId id="278" r:id="rId30"/>
+    <p:sldId id="279" r:id="rId31"/>
+    <p:sldId id="280" r:id="rId32"/>
+    <p:sldId id="281" r:id="rId33"/>
+    <p:sldId id="282" r:id="rId34"/>
+    <p:sldId id="283" r:id="rId35"/>
+    <p:sldId id="284" r:id="rId36"/>
+    <p:sldId id="285" r:id="rId37"/>
+    <p:sldId id="286" r:id="rId38"/>
+    <p:sldId id="287" r:id="rId39"/>
+    <p:sldId id="288" r:id="rId40"/>
   </p:sldIdLst>
   <p:sldSz cx="12191695" cy="6858000" type="screen4x3"/>
   <p:notesSz cx="6858000" cy="9144000"/>
@@ -143,6 +137,1186 @@
     </a:lvl9pPr>
   </p:defaultTextStyle>
 </p:presentation>
+</file>
+
+<file path=ppt/notesMasters/notesMaster1.xml><?xml version="1.0" encoding="utf-8"?>
+<p:notesMaster xmlns:a="http://schemas.openxmlformats.org/drawingml/2006/main" xmlns:p="http://schemas.openxmlformats.org/presentationml/2006/main" xmlns:r="http://schemas.openxmlformats.org/officeDocument/2006/relationships">
+  <p:cSld>
+    <p:bg>
+      <p:bgRef idx="1001">
+        <a:schemeClr val="bg1"/>
+      </p:bgRef>
+    </p:bg>
+    <p:spTree>
+      <p:nvGrpSpPr>
+        <p:cNvPr id="1" name=""/>
+        <p:cNvGrpSpPr/>
+        <p:nvPr/>
+      </p:nvGrpSpPr>
+      <p:grpSpPr>
+        <a:xfrm>
+          <a:off x="0" y="0"/>
+          <a:ext cx="0" cy="0"/>
+          <a:chOff x="0" y="0"/>
+          <a:chExt cx="0" cy="0"/>
+        </a:xfrm>
+      </p:grpSpPr>
+      <p:sp>
+        <p:nvSpPr>
+          <p:cNvPr id="2" name="Header Placeholder 1"/>
+          <p:cNvSpPr>
+            <a:spLocks noGrp="1"/>
+          </p:cNvSpPr>
+          <p:nvPr>
+            <p:ph type="hdr" sz="quarter"/>
+          </p:nvPr>
+        </p:nvSpPr>
+        <p:spPr>
+          <a:xfrm>
+            <a:off x="0" y="0"/>
+            <a:ext cx="2971800" cy="457200"/>
+          </a:xfrm>
+          <a:prstGeom prst="rect">
+            <a:avLst/>
+          </a:prstGeom>
+        </p:spPr>
+        <p:txBody>
+          <a:bodyPr vert="horz" lIns="91440" tIns="45720" rIns="91440" bIns="45720" rtlCol="0"/>
+          <a:lstStyle>
+            <a:lvl1pPr algn="l">
+              <a:defRPr sz="1200"/>
+            </a:lvl1pPr>
+          </a:lstStyle>
+          <a:p>
+            <a:endParaRPr lang="en-US"/>
+          </a:p>
+        </p:txBody>
+      </p:sp>
+      <p:sp>
+        <p:nvSpPr>
+          <p:cNvPr id="3" name="Date Placeholder 2"/>
+          <p:cNvSpPr>
+            <a:spLocks noGrp="1"/>
+          </p:cNvSpPr>
+          <p:nvPr>
+            <p:ph type="dt" idx="1"/>
+          </p:nvPr>
+        </p:nvSpPr>
+        <p:spPr>
+          <a:xfrm>
+            <a:off x="3884613" y="0"/>
+            <a:ext cx="2971800" cy="457200"/>
+          </a:xfrm>
+          <a:prstGeom prst="rect">
+            <a:avLst/>
+          </a:prstGeom>
+        </p:spPr>
+        <p:txBody>
+          <a:bodyPr vert="horz" lIns="91440" tIns="45720" rIns="91440" bIns="45720" rtlCol="0"/>
+          <a:lstStyle>
+            <a:lvl1pPr algn="r">
+              <a:defRPr sz="1200"/>
+            </a:lvl1pPr>
+          </a:lstStyle>
+          <a:p>
+            <a:fld id="{0F89C1C7-3DCD-1040-A9CF-14679D8B5DDD}" type="datetimeFigureOut">
+              <a:rPr lang="en-US" smtClean="0"/>
+              <a:t>10/17/16</a:t>
+            </a:fld>
+            <a:endParaRPr lang="en-US"/>
+          </a:p>
+        </p:txBody>
+      </p:sp>
+      <p:sp>
+        <p:nvSpPr>
+          <p:cNvPr id="4" name="Slide Image Placeholder 3"/>
+          <p:cNvSpPr>
+            <a:spLocks noGrp="1" noRot="1" noChangeAspect="1"/>
+          </p:cNvSpPr>
+          <p:nvPr>
+            <p:ph type="sldImg" idx="2"/>
+          </p:nvPr>
+        </p:nvSpPr>
+        <p:spPr>
+          <a:xfrm>
+            <a:off x="1143000" y="685800"/>
+            <a:ext cx="4572000" cy="3429000"/>
+          </a:xfrm>
+          <a:prstGeom prst="rect">
+            <a:avLst/>
+          </a:prstGeom>
+          <a:noFill/>
+          <a:ln w="12700">
+            <a:solidFill>
+              <a:prstClr val="black"/>
+            </a:solidFill>
+          </a:ln>
+        </p:spPr>
+        <p:txBody>
+          <a:bodyPr vert="horz" lIns="91440" tIns="45720" rIns="91440" bIns="45720" rtlCol="0" anchor="ctr"/>
+          <a:lstStyle/>
+          <a:p>
+            <a:endParaRPr lang="en-US"/>
+          </a:p>
+        </p:txBody>
+      </p:sp>
+      <p:sp>
+        <p:nvSpPr>
+          <p:cNvPr id="5" name="Notes Placeholder 4"/>
+          <p:cNvSpPr>
+            <a:spLocks noGrp="1"/>
+          </p:cNvSpPr>
+          <p:nvPr>
+            <p:ph type="body" sz="quarter" idx="3"/>
+          </p:nvPr>
+        </p:nvSpPr>
+        <p:spPr>
+          <a:xfrm>
+            <a:off x="685800" y="4343400"/>
+            <a:ext cx="5486400" cy="4114800"/>
+          </a:xfrm>
+          <a:prstGeom prst="rect">
+            <a:avLst/>
+          </a:prstGeom>
+        </p:spPr>
+        <p:txBody>
+          <a:bodyPr vert="horz" lIns="91440" tIns="45720" rIns="91440" bIns="45720" rtlCol="0"/>
+          <a:lstStyle/>
+          <a:p>
+            <a:pPr lvl="0"/>
+            <a:r>
+              <a:rPr lang="en-US" smtClean="0"/>
+              <a:t>Click to edit Master text styles</a:t>
+            </a:r>
+          </a:p>
+          <a:p>
+            <a:pPr lvl="1"/>
+            <a:r>
+              <a:rPr lang="en-US" smtClean="0"/>
+              <a:t>Second level</a:t>
+            </a:r>
+          </a:p>
+          <a:p>
+            <a:pPr lvl="2"/>
+            <a:r>
+              <a:rPr lang="en-US" smtClean="0"/>
+              <a:t>Third level</a:t>
+            </a:r>
+          </a:p>
+          <a:p>
+            <a:pPr lvl="3"/>
+            <a:r>
+              <a:rPr lang="en-US" smtClean="0"/>
+              <a:t>Fourth level</a:t>
+            </a:r>
+          </a:p>
+          <a:p>
+            <a:pPr lvl="4"/>
+            <a:r>
+              <a:rPr lang="en-US" smtClean="0"/>
+              <a:t>Fifth level</a:t>
+            </a:r>
+            <a:endParaRPr lang="en-US"/>
+          </a:p>
+        </p:txBody>
+      </p:sp>
+      <p:sp>
+        <p:nvSpPr>
+          <p:cNvPr id="6" name="Footer Placeholder 5"/>
+          <p:cNvSpPr>
+            <a:spLocks noGrp="1"/>
+          </p:cNvSpPr>
+          <p:nvPr>
+            <p:ph type="ftr" sz="quarter" idx="4"/>
+          </p:nvPr>
+        </p:nvSpPr>
+        <p:spPr>
+          <a:xfrm>
+            <a:off x="0" y="8685213"/>
+            <a:ext cx="2971800" cy="457200"/>
+          </a:xfrm>
+          <a:prstGeom prst="rect">
+            <a:avLst/>
+          </a:prstGeom>
+        </p:spPr>
+        <p:txBody>
+          <a:bodyPr vert="horz" lIns="91440" tIns="45720" rIns="91440" bIns="45720" rtlCol="0" anchor="b"/>
+          <a:lstStyle>
+            <a:lvl1pPr algn="l">
+              <a:defRPr sz="1200"/>
+            </a:lvl1pPr>
+          </a:lstStyle>
+          <a:p>
+            <a:endParaRPr lang="en-US"/>
+          </a:p>
+        </p:txBody>
+      </p:sp>
+      <p:sp>
+        <p:nvSpPr>
+          <p:cNvPr id="7" name="Slide Number Placeholder 6"/>
+          <p:cNvSpPr>
+            <a:spLocks noGrp="1"/>
+          </p:cNvSpPr>
+          <p:nvPr>
+            <p:ph type="sldNum" sz="quarter" idx="5"/>
+          </p:nvPr>
+        </p:nvSpPr>
+        <p:spPr>
+          <a:xfrm>
+            <a:off x="3884613" y="8685213"/>
+            <a:ext cx="2971800" cy="457200"/>
+          </a:xfrm>
+          <a:prstGeom prst="rect">
+            <a:avLst/>
+          </a:prstGeom>
+        </p:spPr>
+        <p:txBody>
+          <a:bodyPr vert="horz" lIns="91440" tIns="45720" rIns="91440" bIns="45720" rtlCol="0" anchor="b"/>
+          <a:lstStyle>
+            <a:lvl1pPr algn="r">
+              <a:defRPr sz="1200"/>
+            </a:lvl1pPr>
+          </a:lstStyle>
+          <a:p>
+            <a:fld id="{BB5E49A5-4136-284D-997B-48E1D791AD67}" type="slidenum">
+              <a:rPr lang="en-US" smtClean="0"/>
+              <a:t>‹#›</a:t>
+            </a:fld>
+            <a:endParaRPr lang="en-US"/>
+          </a:p>
+        </p:txBody>
+      </p:sp>
+    </p:spTree>
+    <p:extLst>
+      <p:ext uri="{BB962C8B-B14F-4D97-AF65-F5344CB8AC3E}">
+        <p14:creationId xmlns:p14="http://schemas.microsoft.com/office/powerpoint/2010/main" val="2623252185"/>
+      </p:ext>
+    </p:extLst>
+  </p:cSld>
+  <p:clrMap bg1="lt1" tx1="dk1" bg2="lt2" tx2="dk2" accent1="accent1" accent2="accent2" accent3="accent3" accent4="accent4" accent5="accent5" accent6="accent6" hlink="hlink" folHlink="folHlink"/>
+  <p:notesStyle>
+    <a:lvl1pPr marL="0" algn="l" defTabSz="457200" rtl="0" eaLnBrk="1" latinLnBrk="0" hangingPunct="1">
+      <a:defRPr sz="1200" kern="1200">
+        <a:solidFill>
+          <a:schemeClr val="tx1"/>
+        </a:solidFill>
+        <a:latin typeface="+mn-lt"/>
+        <a:ea typeface="+mn-ea"/>
+        <a:cs typeface="+mn-cs"/>
+      </a:defRPr>
+    </a:lvl1pPr>
+    <a:lvl2pPr marL="457200" algn="l" defTabSz="457200" rtl="0" eaLnBrk="1" latinLnBrk="0" hangingPunct="1">
+      <a:defRPr sz="1200" kern="1200">
+        <a:solidFill>
+          <a:schemeClr val="tx1"/>
+        </a:solidFill>
+        <a:latin typeface="+mn-lt"/>
+        <a:ea typeface="+mn-ea"/>
+        <a:cs typeface="+mn-cs"/>
+      </a:defRPr>
+    </a:lvl2pPr>
+    <a:lvl3pPr marL="914400" algn="l" defTabSz="457200" rtl="0" eaLnBrk="1" latinLnBrk="0" hangingPunct="1">
+      <a:defRPr sz="1200" kern="1200">
+        <a:solidFill>
+          <a:schemeClr val="tx1"/>
+        </a:solidFill>
+        <a:latin typeface="+mn-lt"/>
+        <a:ea typeface="+mn-ea"/>
+        <a:cs typeface="+mn-cs"/>
+      </a:defRPr>
+    </a:lvl3pPr>
+    <a:lvl4pPr marL="1371600" algn="l" defTabSz="457200" rtl="0" eaLnBrk="1" latinLnBrk="0" hangingPunct="1">
+      <a:defRPr sz="1200" kern="1200">
+        <a:solidFill>
+          <a:schemeClr val="tx1"/>
+        </a:solidFill>
+        <a:latin typeface="+mn-lt"/>
+        <a:ea typeface="+mn-ea"/>
+        <a:cs typeface="+mn-cs"/>
+      </a:defRPr>
+    </a:lvl4pPr>
+    <a:lvl5pPr marL="1828800" algn="l" defTabSz="457200" rtl="0" eaLnBrk="1" latinLnBrk="0" hangingPunct="1">
+      <a:defRPr sz="1200" kern="1200">
+        <a:solidFill>
+          <a:schemeClr val="tx1"/>
+        </a:solidFill>
+        <a:latin typeface="+mn-lt"/>
+        <a:ea typeface="+mn-ea"/>
+        <a:cs typeface="+mn-cs"/>
+      </a:defRPr>
+    </a:lvl5pPr>
+    <a:lvl6pPr marL="2286000" algn="l" defTabSz="457200" rtl="0" eaLnBrk="1" latinLnBrk="0" hangingPunct="1">
+      <a:defRPr sz="1200" kern="1200">
+        <a:solidFill>
+          <a:schemeClr val="tx1"/>
+        </a:solidFill>
+        <a:latin typeface="+mn-lt"/>
+        <a:ea typeface="+mn-ea"/>
+        <a:cs typeface="+mn-cs"/>
+      </a:defRPr>
+    </a:lvl6pPr>
+    <a:lvl7pPr marL="2743200" algn="l" defTabSz="457200" rtl="0" eaLnBrk="1" latinLnBrk="0" hangingPunct="1">
+      <a:defRPr sz="1200" kern="1200">
+        <a:solidFill>
+          <a:schemeClr val="tx1"/>
+        </a:solidFill>
+        <a:latin typeface="+mn-lt"/>
+        <a:ea typeface="+mn-ea"/>
+        <a:cs typeface="+mn-cs"/>
+      </a:defRPr>
+    </a:lvl7pPr>
+    <a:lvl8pPr marL="3200400" algn="l" defTabSz="457200" rtl="0" eaLnBrk="1" latinLnBrk="0" hangingPunct="1">
+      <a:defRPr sz="1200" kern="1200">
+        <a:solidFill>
+          <a:schemeClr val="tx1"/>
+        </a:solidFill>
+        <a:latin typeface="+mn-lt"/>
+        <a:ea typeface="+mn-ea"/>
+        <a:cs typeface="+mn-cs"/>
+      </a:defRPr>
+    </a:lvl8pPr>
+    <a:lvl9pPr marL="3657600" algn="l" defTabSz="457200" rtl="0" eaLnBrk="1" latinLnBrk="0" hangingPunct="1">
+      <a:defRPr sz="1200" kern="1200">
+        <a:solidFill>
+          <a:schemeClr val="tx1"/>
+        </a:solidFill>
+        <a:latin typeface="+mn-lt"/>
+        <a:ea typeface="+mn-ea"/>
+        <a:cs typeface="+mn-cs"/>
+      </a:defRPr>
+    </a:lvl9pPr>
+  </p:notesStyle>
+</p:notesMaster>
+</file>
+
+<file path=ppt/notesSlides/notesSlide1.xml><?xml version="1.0" encoding="utf-8"?>
+<p:notes xmlns:a="http://schemas.openxmlformats.org/drawingml/2006/main" xmlns:p="http://schemas.openxmlformats.org/presentationml/2006/main" xmlns:r="http://schemas.openxmlformats.org/officeDocument/2006/relationships">
+  <p:cSld>
+    <p:spTree>
+      <p:nvGrpSpPr>
+        <p:cNvPr id="1" name=""/>
+        <p:cNvGrpSpPr/>
+        <p:nvPr/>
+      </p:nvGrpSpPr>
+      <p:grpSpPr>
+        <a:xfrm>
+          <a:off x="0" y="0"/>
+          <a:ext cx="0" cy="0"/>
+          <a:chOff x="0" y="0"/>
+          <a:chExt cx="0" cy="0"/>
+        </a:xfrm>
+      </p:grpSpPr>
+      <p:sp>
+        <p:nvSpPr>
+          <p:cNvPr id="2" name="Slide Image Placeholder 1"/>
+          <p:cNvSpPr>
+            <a:spLocks noGrp="1"/>
+          </p:cNvSpPr>
+          <p:nvPr>
+            <p:ph type="sldImg" idx="2"/>
+          </p:nvPr>
+        </p:nvSpPr>
+        <p:spPr/>
+      </p:sp>
+      <p:sp>
+        <p:nvSpPr>
+          <p:cNvPr id="3" name="Notes Placeholder 2"/>
+          <p:cNvSpPr>
+            <a:spLocks noGrp="1"/>
+          </p:cNvSpPr>
+          <p:nvPr>
+            <p:ph type="body" idx="3" sz="quarter"/>
+          </p:nvPr>
+        </p:nvSpPr>
+        <p:spPr/>
+        <p:txBody>
+          <a:bodyPr/>
+          <a:lstStyle/>
+          <a:p>
+            <a:r>
+              <a:t>Antes de la POO un programa era una lista de procedimientos que operaban sobre datos sueltos.</a:t>
+            </a:r>
+          </a:p>
+          <a:p/>
+          <a:p>
+            <a:r>
+              <a:t>Cuando el programa crecia, nadie sabia que funcion tocaba que dato, y un cambio pequeno rompia cosas en lugares inesperados.</a:t>
+            </a:r>
+          </a:p>
+          <a:p/>
+          <a:p>
+            <a:r>
+              <a:t>El programa deja de ser una receta y pasa a ser un conjunto de piezas que se hablan entre si.</a:t>
+            </a:r>
+          </a:p>
+        </p:txBody>
+      </p:sp>
+      <p:sp>
+        <p:nvSpPr>
+          <p:cNvPr id="4" name="Slide Number Placeholder 3"/>
+          <p:cNvSpPr>
+            <a:spLocks noGrp="1"/>
+          </p:cNvSpPr>
+          <p:nvPr>
+            <p:ph type="sldNum" idx="5" sz="quarter"/>
+          </p:nvPr>
+        </p:nvSpPr>
+        <p:spPr/>
+      </p:sp>
+    </p:spTree>
+  </p:cSld>
+  <p:clrMapOvr>
+    <a:masterClrMapping/>
+  </p:clrMapOvr>
+</p:notes>
+</file>
+
+<file path=ppt/notesSlides/notesSlide10.xml><?xml version="1.0" encoding="utf-8"?>
+<p:notes xmlns:a="http://schemas.openxmlformats.org/drawingml/2006/main" xmlns:p="http://schemas.openxmlformats.org/presentationml/2006/main" xmlns:r="http://schemas.openxmlformats.org/officeDocument/2006/relationships">
+  <p:cSld>
+    <p:spTree>
+      <p:nvGrpSpPr>
+        <p:cNvPr id="1" name=""/>
+        <p:cNvGrpSpPr/>
+        <p:nvPr/>
+      </p:nvGrpSpPr>
+      <p:grpSpPr>
+        <a:xfrm>
+          <a:off x="0" y="0"/>
+          <a:ext cx="0" cy="0"/>
+          <a:chOff x="0" y="0"/>
+          <a:chExt cx="0" cy="0"/>
+        </a:xfrm>
+      </p:grpSpPr>
+      <p:sp>
+        <p:nvSpPr>
+          <p:cNvPr id="2" name="Slide Image Placeholder 1"/>
+          <p:cNvSpPr>
+            <a:spLocks noGrp="1"/>
+          </p:cNvSpPr>
+          <p:nvPr>
+            <p:ph type="sldImg" idx="2"/>
+          </p:nvPr>
+        </p:nvSpPr>
+        <p:spPr/>
+      </p:sp>
+      <p:sp>
+        <p:nvSpPr>
+          <p:cNvPr id="3" name="Notes Placeholder 2"/>
+          <p:cNvSpPr>
+            <a:spLocks noGrp="1"/>
+          </p:cNvSpPr>
+          <p:nvPr>
+            <p:ph type="body" idx="3" sz="quarter"/>
+          </p:nvPr>
+        </p:nvSpPr>
+        <p:spPr/>
+        <p:txBody>
+          <a:bodyPr/>
+          <a:lstStyle/>
+          <a:p>
+            <a:r>
+              <a:t>Las encuestas y los reportes de errores en produccion la ubican de forma consistente como la excepcion mas frecuente en aplicaciones Java, y conviene presentarlo asi, como observacion de la industria y no como ley.</a:t>
+            </a:r>
+          </a:p>
+        </p:txBody>
+      </p:sp>
+      <p:sp>
+        <p:nvSpPr>
+          <p:cNvPr id="4" name="Slide Number Placeholder 3"/>
+          <p:cNvSpPr>
+            <a:spLocks noGrp="1"/>
+          </p:cNvSpPr>
+          <p:nvPr>
+            <p:ph type="sldNum" idx="5" sz="quarter"/>
+          </p:nvPr>
+        </p:nvSpPr>
+        <p:spPr/>
+      </p:sp>
+    </p:spTree>
+  </p:cSld>
+  <p:clrMapOvr>
+    <a:masterClrMapping/>
+  </p:clrMapOvr>
+</p:notes>
+</file>
+
+<file path=ppt/notesSlides/notesSlide11.xml><?xml version="1.0" encoding="utf-8"?>
+<p:notes xmlns:a="http://schemas.openxmlformats.org/drawingml/2006/main" xmlns:p="http://schemas.openxmlformats.org/presentationml/2006/main" xmlns:r="http://schemas.openxmlformats.org/officeDocument/2006/relationships">
+  <p:cSld>
+    <p:spTree>
+      <p:nvGrpSpPr>
+        <p:cNvPr id="1" name=""/>
+        <p:cNvGrpSpPr/>
+        <p:nvPr/>
+      </p:nvGrpSpPr>
+      <p:grpSpPr>
+        <a:xfrm>
+          <a:off x="0" y="0"/>
+          <a:ext cx="0" cy="0"/>
+          <a:chOff x="0" y="0"/>
+          <a:chExt cx="0" cy="0"/>
+        </a:xfrm>
+      </p:grpSpPr>
+      <p:sp>
+        <p:nvSpPr>
+          <p:cNvPr id="2" name="Slide Image Placeholder 1"/>
+          <p:cNvSpPr>
+            <a:spLocks noGrp="1"/>
+          </p:cNvSpPr>
+          <p:nvPr>
+            <p:ph type="sldImg" idx="2"/>
+          </p:nvPr>
+        </p:nvSpPr>
+        <p:spPr/>
+      </p:sp>
+      <p:sp>
+        <p:nvSpPr>
+          <p:cNvPr id="3" name="Notes Placeholder 2"/>
+          <p:cNvSpPr>
+            <a:spLocks noGrp="1"/>
+          </p:cNvSpPr>
+          <p:nvPr>
+            <p:ph type="body" idx="3" sz="quarter"/>
+          </p:nvPr>
+        </p:nvSpPr>
+        <p:spPr/>
+        <p:txBody>
+          <a:bodyPr/>
+          <a:lstStyle/>
+          <a:p>
+            <a:r>
+              <a:t>El entorno cierra la clase y tiene dos reglas duras que producen el noventa por ciento de los tropiezos del primer dia.</a:t>
+            </a:r>
+          </a:p>
+        </p:txBody>
+      </p:sp>
+      <p:sp>
+        <p:nvSpPr>
+          <p:cNvPr id="4" name="Slide Number Placeholder 3"/>
+          <p:cNvSpPr>
+            <a:spLocks noGrp="1"/>
+          </p:cNvSpPr>
+          <p:nvPr>
+            <p:ph type="sldNum" idx="5" sz="quarter"/>
+          </p:nvPr>
+        </p:nvSpPr>
+        <p:spPr/>
+      </p:sp>
+    </p:spTree>
+  </p:cSld>
+  <p:clrMapOvr>
+    <a:masterClrMapping/>
+  </p:clrMapOvr>
+</p:notes>
+</file>
+
+<file path=ppt/notesSlides/notesSlide2.xml><?xml version="1.0" encoding="utf-8"?>
+<p:notes xmlns:a="http://schemas.openxmlformats.org/drawingml/2006/main" xmlns:p="http://schemas.openxmlformats.org/presentationml/2006/main" xmlns:r="http://schemas.openxmlformats.org/officeDocument/2006/relationships">
+  <p:cSld>
+    <p:spTree>
+      <p:nvGrpSpPr>
+        <p:cNvPr id="1" name=""/>
+        <p:cNvGrpSpPr/>
+        <p:nvPr/>
+      </p:nvGrpSpPr>
+      <p:grpSpPr>
+        <a:xfrm>
+          <a:off x="0" y="0"/>
+          <a:ext cx="0" cy="0"/>
+          <a:chOff x="0" y="0"/>
+          <a:chExt cx="0" cy="0"/>
+        </a:xfrm>
+      </p:grpSpPr>
+      <p:sp>
+        <p:nvSpPr>
+          <p:cNvPr id="2" name="Slide Image Placeholder 1"/>
+          <p:cNvSpPr>
+            <a:spLocks noGrp="1"/>
+          </p:cNvSpPr>
+          <p:nvPr>
+            <p:ph type="sldImg" idx="2"/>
+          </p:nvPr>
+        </p:nvSpPr>
+        <p:spPr/>
+      </p:sp>
+      <p:sp>
+        <p:nvSpPr>
+          <p:cNvPr id="3" name="Notes Placeholder 2"/>
+          <p:cNvSpPr>
+            <a:spLocks noGrp="1"/>
+          </p:cNvSpPr>
+          <p:nvPr>
+            <p:ph type="body" idx="3" sz="quarter"/>
+          </p:nvPr>
+        </p:nvSpPr>
+        <p:spPr/>
+        <p:txBody>
+          <a:bodyPr/>
+          <a:lstStyle/>
+          <a:p>
+            <a:r>
+              <a:t>Los cuatro pilares se entienden por el problema que resuelve cada uno.</a:t>
+            </a:r>
+          </a:p>
+        </p:txBody>
+      </p:sp>
+      <p:sp>
+        <p:nvSpPr>
+          <p:cNvPr id="4" name="Slide Number Placeholder 3"/>
+          <p:cNvSpPr>
+            <a:spLocks noGrp="1"/>
+          </p:cNvSpPr>
+          <p:nvPr>
+            <p:ph type="sldNum" idx="5" sz="quarter"/>
+          </p:nvPr>
+        </p:nvSpPr>
+        <p:spPr/>
+      </p:sp>
+    </p:spTree>
+  </p:cSld>
+  <p:clrMapOvr>
+    <a:masterClrMapping/>
+  </p:clrMapOvr>
+</p:notes>
+</file>
+
+<file path=ppt/notesSlides/notesSlide3.xml><?xml version="1.0" encoding="utf-8"?>
+<p:notes xmlns:a="http://schemas.openxmlformats.org/drawingml/2006/main" xmlns:p="http://schemas.openxmlformats.org/presentationml/2006/main" xmlns:r="http://schemas.openxmlformats.org/officeDocument/2006/relationships">
+  <p:cSld>
+    <p:spTree>
+      <p:nvGrpSpPr>
+        <p:cNvPr id="1" name=""/>
+        <p:cNvGrpSpPr/>
+        <p:nvPr/>
+      </p:nvGrpSpPr>
+      <p:grpSpPr>
+        <a:xfrm>
+          <a:off x="0" y="0"/>
+          <a:ext cx="0" cy="0"/>
+          <a:chOff x="0" y="0"/>
+          <a:chExt cx="0" cy="0"/>
+        </a:xfrm>
+      </p:grpSpPr>
+      <p:sp>
+        <p:nvSpPr>
+          <p:cNvPr id="2" name="Slide Image Placeholder 1"/>
+          <p:cNvSpPr>
+            <a:spLocks noGrp="1"/>
+          </p:cNvSpPr>
+          <p:nvPr>
+            <p:ph type="sldImg" idx="2"/>
+          </p:nvPr>
+        </p:nvSpPr>
+        <p:spPr/>
+      </p:sp>
+      <p:sp>
+        <p:nvSpPr>
+          <p:cNvPr id="3" name="Notes Placeholder 2"/>
+          <p:cNvSpPr>
+            <a:spLocks noGrp="1"/>
+          </p:cNvSpPr>
+          <p:nvPr>
+            <p:ph type="body" idx="3" sz="quarter"/>
+          </p:nvPr>
+        </p:nvSpPr>
+        <p:spPr/>
+        <p:txBody>
+          <a:bodyPr/>
+          <a:lstStyle/>
+          <a:p>
+            <a:r>
+              <a:t>La instruccion reserva memoria y llama al constructor.</a:t>
+            </a:r>
+          </a:p>
+          <a:p/>
+          <a:p>
+            <a:r>
+              <a:t>Por eso desde la primera clase se escribe el constructor completo.</a:t>
+            </a:r>
+          </a:p>
+        </p:txBody>
+      </p:sp>
+      <p:sp>
+        <p:nvSpPr>
+          <p:cNvPr id="4" name="Slide Number Placeholder 3"/>
+          <p:cNvSpPr>
+            <a:spLocks noGrp="1"/>
+          </p:cNvSpPr>
+          <p:nvPr>
+            <p:ph type="sldNum" idx="5" sz="quarter"/>
+          </p:nvPr>
+        </p:nvSpPr>
+        <p:spPr/>
+      </p:sp>
+    </p:spTree>
+  </p:cSld>
+  <p:clrMapOvr>
+    <a:masterClrMapping/>
+  </p:clrMapOvr>
+</p:notes>
+</file>
+
+<file path=ppt/notesSlides/notesSlide4.xml><?xml version="1.0" encoding="utf-8"?>
+<p:notes xmlns:a="http://schemas.openxmlformats.org/drawingml/2006/main" xmlns:p="http://schemas.openxmlformats.org/presentationml/2006/main" xmlns:r="http://schemas.openxmlformats.org/officeDocument/2006/relationships">
+  <p:cSld>
+    <p:spTree>
+      <p:nvGrpSpPr>
+        <p:cNvPr id="1" name=""/>
+        <p:cNvGrpSpPr/>
+        <p:nvPr/>
+      </p:nvGrpSpPr>
+      <p:grpSpPr>
+        <a:xfrm>
+          <a:off x="0" y="0"/>
+          <a:ext cx="0" cy="0"/>
+          <a:chOff x="0" y="0"/>
+          <a:chExt cx="0" cy="0"/>
+        </a:xfrm>
+      </p:grpSpPr>
+      <p:sp>
+        <p:nvSpPr>
+          <p:cNvPr id="2" name="Slide Image Placeholder 1"/>
+          <p:cNvSpPr>
+            <a:spLocks noGrp="1"/>
+          </p:cNvSpPr>
+          <p:nvPr>
+            <p:ph type="sldImg" idx="2"/>
+          </p:nvPr>
+        </p:nvSpPr>
+        <p:spPr/>
+      </p:sp>
+      <p:sp>
+        <p:nvSpPr>
+          <p:cNvPr id="3" name="Notes Placeholder 2"/>
+          <p:cNvSpPr>
+            <a:spLocks noGrp="1"/>
+          </p:cNvSpPr>
+          <p:nvPr>
+            <p:ph type="body" idx="3" sz="quarter"/>
+          </p:nvPr>
+        </p:nvSpPr>
+        <p:spPr/>
+        <p:txBody>
+          <a:bodyPr/>
+          <a:lstStyle/>
+          <a:p>
+            <a:r>
+              <a:t>Vale la pena hacer visible el limite de ese enfoque con el mismo dominio del proyecto antes de nombrar la palabra objeto.</a:t>
+            </a:r>
+          </a:p>
+          <a:p/>
+          <a:p>
+            <a:r>
+              <a:t>Eso funciona en un ejercicio de veinte lineas y se cae en cuanto el programa crece, por tres razones concretas.</a:t>
+            </a:r>
+          </a:p>
+          <a:p/>
+          <a:p>
+            <a:r>
+              <a:t>Ordenar la lista por nombre obliga a mover los tres arreglos en perfecta sincronia, y basta olvidar uno para que Luna quede con la edad de otro animal.</a:t>
+            </a:r>
+          </a:p>
+        </p:txBody>
+      </p:sp>
+      <p:sp>
+        <p:nvSpPr>
+          <p:cNvPr id="4" name="Slide Number Placeholder 3"/>
+          <p:cNvSpPr>
+            <a:spLocks noGrp="1"/>
+          </p:cNvSpPr>
+          <p:nvPr>
+            <p:ph type="sldNum" idx="5" sz="quarter"/>
+          </p:nvPr>
+        </p:nvSpPr>
+        <p:spPr/>
+      </p:sp>
+    </p:spTree>
+  </p:cSld>
+  <p:clrMapOvr>
+    <a:masterClrMapping/>
+  </p:clrMapOvr>
+</p:notes>
+</file>
+
+<file path=ppt/notesSlides/notesSlide5.xml><?xml version="1.0" encoding="utf-8"?>
+<p:notes xmlns:a="http://schemas.openxmlformats.org/drawingml/2006/main" xmlns:p="http://schemas.openxmlformats.org/presentationml/2006/main" xmlns:r="http://schemas.openxmlformats.org/officeDocument/2006/relationships">
+  <p:cSld>
+    <p:spTree>
+      <p:nvGrpSpPr>
+        <p:cNvPr id="1" name=""/>
+        <p:cNvGrpSpPr/>
+        <p:nvPr/>
+      </p:nvGrpSpPr>
+      <p:grpSpPr>
+        <a:xfrm>
+          <a:off x="0" y="0"/>
+          <a:ext cx="0" cy="0"/>
+          <a:chOff x="0" y="0"/>
+          <a:chExt cx="0" cy="0"/>
+        </a:xfrm>
+      </p:grpSpPr>
+      <p:sp>
+        <p:nvSpPr>
+          <p:cNvPr id="2" name="Slide Image Placeholder 1"/>
+          <p:cNvSpPr>
+            <a:spLocks noGrp="1"/>
+          </p:cNvSpPr>
+          <p:nvPr>
+            <p:ph type="sldImg" idx="2"/>
+          </p:nvPr>
+        </p:nvSpPr>
+        <p:spPr/>
+      </p:sp>
+      <p:sp>
+        <p:nvSpPr>
+          <p:cNvPr id="3" name="Notes Placeholder 2"/>
+          <p:cNvSpPr>
+            <a:spLocks noGrp="1"/>
+          </p:cNvSpPr>
+          <p:nvPr>
+            <p:ph type="body" idx="3" sz="quarter"/>
+          </p:nvPr>
+        </p:nvSpPr>
+        <p:spPr/>
+        <p:txBody>
+          <a:bodyPr/>
+          <a:lstStyle/>
+          <a:p>
+            <a:r>
+              <a:t>En Java una variable local vive en la pila, una zona pequena y ordenada asociada al metodo que se esta ejecutando, mientras que el objeto creado con new vive en el monton, una zona grande donde el programa reserva espacio a medida que lo necesita.</a:t>
+            </a:r>
+          </a:p>
+          <a:p/>
+          <a:p>
+            <a:r>
+              <a:t>No hay dos mascotas, hay una con dos nombres.</a:t>
+            </a:r>
+          </a:p>
+        </p:txBody>
+      </p:sp>
+      <p:sp>
+        <p:nvSpPr>
+          <p:cNvPr id="4" name="Slide Number Placeholder 3"/>
+          <p:cNvSpPr>
+            <a:spLocks noGrp="1"/>
+          </p:cNvSpPr>
+          <p:nvPr>
+            <p:ph type="sldNum" idx="5" sz="quarter"/>
+          </p:nvPr>
+        </p:nvSpPr>
+        <p:spPr/>
+      </p:sp>
+    </p:spTree>
+  </p:cSld>
+  <p:clrMapOvr>
+    <a:masterClrMapping/>
+  </p:clrMapOvr>
+</p:notes>
+</file>
+
+<file path=ppt/notesSlides/notesSlide6.xml><?xml version="1.0" encoding="utf-8"?>
+<p:notes xmlns:a="http://schemas.openxmlformats.org/drawingml/2006/main" xmlns:p="http://schemas.openxmlformats.org/presentationml/2006/main" xmlns:r="http://schemas.openxmlformats.org/officeDocument/2006/relationships">
+  <p:cSld>
+    <p:spTree>
+      <p:nvGrpSpPr>
+        <p:cNvPr id="1" name=""/>
+        <p:cNvGrpSpPr/>
+        <p:nvPr/>
+      </p:nvGrpSpPr>
+      <p:grpSpPr>
+        <a:xfrm>
+          <a:off x="0" y="0"/>
+          <a:ext cx="0" cy="0"/>
+          <a:chOff x="0" y="0"/>
+          <a:chExt cx="0" cy="0"/>
+        </a:xfrm>
+      </p:grpSpPr>
+      <p:sp>
+        <p:nvSpPr>
+          <p:cNvPr id="2" name="Slide Image Placeholder 1"/>
+          <p:cNvSpPr>
+            <a:spLocks noGrp="1"/>
+          </p:cNvSpPr>
+          <p:nvPr>
+            <p:ph type="sldImg" idx="2"/>
+          </p:nvPr>
+        </p:nvSpPr>
+        <p:spPr/>
+      </p:sp>
+      <p:sp>
+        <p:nvSpPr>
+          <p:cNvPr id="3" name="Notes Placeholder 2"/>
+          <p:cNvSpPr>
+            <a:spLocks noGrp="1"/>
+          </p:cNvSpPr>
+          <p:nvPr>
+            <p:ph type="body" idx="3" sz="quarter"/>
+          </p:nvPr>
+        </p:nvSpPr>
+        <p:spPr/>
+        <p:txBody>
+          <a:bodyPr/>
+          <a:lstStyle/>
+          <a:p>
+            <a:r>
+              <a:t>La respuesta es exacta y hay que darla asi: el operador == compara referencias, es decir pregunta si las dos variables apuntan al mismo objeto, no si los objetos se parecen.</a:t>
+            </a:r>
+          </a:p>
+          <a:p/>
+          <a:p>
+            <a:r>
+              <a:t>Sobrescribirlo significa escribirlo en Mascota para que dos mascotas sean iguales cuando su identificador sea igual.</a:t>
+            </a:r>
+          </a:p>
+          <a:p/>
+          <a:p>
+            <a:r>
+              <a:t>Por eso la regla practica del curso es sin excepciones: con objetos nunca se usa ==, se usa equals; == se reserva para primitivos y para preguntar si algo es null.</a:t>
+            </a:r>
+          </a:p>
+        </p:txBody>
+      </p:sp>
+      <p:sp>
+        <p:nvSpPr>
+          <p:cNvPr id="4" name="Slide Number Placeholder 3"/>
+          <p:cNvSpPr>
+            <a:spLocks noGrp="1"/>
+          </p:cNvSpPr>
+          <p:nvPr>
+            <p:ph type="sldNum" idx="5" sz="quarter"/>
+          </p:nvPr>
+        </p:nvSpPr>
+        <p:spPr/>
+      </p:sp>
+    </p:spTree>
+  </p:cSld>
+  <p:clrMapOvr>
+    <a:masterClrMapping/>
+  </p:clrMapOvr>
+</p:notes>
+</file>
+
+<file path=ppt/notesSlides/notesSlide7.xml><?xml version="1.0" encoding="utf-8"?>
+<p:notes xmlns:a="http://schemas.openxmlformats.org/drawingml/2006/main" xmlns:p="http://schemas.openxmlformats.org/presentationml/2006/main" xmlns:r="http://schemas.openxmlformats.org/officeDocument/2006/relationships">
+  <p:cSld>
+    <p:spTree>
+      <p:nvGrpSpPr>
+        <p:cNvPr id="1" name=""/>
+        <p:cNvGrpSpPr/>
+        <p:nvPr/>
+      </p:nvGrpSpPr>
+      <p:grpSpPr>
+        <a:xfrm>
+          <a:off x="0" y="0"/>
+          <a:ext cx="0" cy="0"/>
+          <a:chOff x="0" y="0"/>
+          <a:chExt cx="0" cy="0"/>
+        </a:xfrm>
+      </p:grpSpPr>
+      <p:sp>
+        <p:nvSpPr>
+          <p:cNvPr id="2" name="Slide Image Placeholder 1"/>
+          <p:cNvSpPr>
+            <a:spLocks noGrp="1"/>
+          </p:cNvSpPr>
+          <p:nvPr>
+            <p:ph type="sldImg" idx="2"/>
+          </p:nvPr>
+        </p:nvSpPr>
+        <p:spPr/>
+      </p:sp>
+      <p:sp>
+        <p:nvSpPr>
+          <p:cNvPr id="3" name="Notes Placeholder 2"/>
+          <p:cNvSpPr>
+            <a:spLocks noGrp="1"/>
+          </p:cNvSpPr>
+          <p:nvPr>
+            <p:ph type="body" idx="3" sz="quarter"/>
+          </p:nvPr>
+        </p:nvSpPr>
+        <p:spPr/>
+        <p:txBody>
+          <a:bodyPr/>
+          <a:lstStyle/>
+          <a:p>
+            <a:r>
+              <a:t>Recien ahora tiene sentido la analogia clasica.</a:t>
+            </a:r>
+          </a:p>
+        </p:txBody>
+      </p:sp>
+      <p:sp>
+        <p:nvSpPr>
+          <p:cNvPr id="4" name="Slide Number Placeholder 3"/>
+          <p:cNvSpPr>
+            <a:spLocks noGrp="1"/>
+          </p:cNvSpPr>
+          <p:nvPr>
+            <p:ph type="sldNum" idx="5" sz="quarter"/>
+          </p:nvPr>
+        </p:nvSpPr>
+        <p:spPr/>
+      </p:sp>
+    </p:spTree>
+  </p:cSld>
+  <p:clrMapOvr>
+    <a:masterClrMapping/>
+  </p:clrMapOvr>
+</p:notes>
+</file>
+
+<file path=ppt/notesSlides/notesSlide8.xml><?xml version="1.0" encoding="utf-8"?>
+<p:notes xmlns:a="http://schemas.openxmlformats.org/drawingml/2006/main" xmlns:p="http://schemas.openxmlformats.org/presentationml/2006/main" xmlns:r="http://schemas.openxmlformats.org/officeDocument/2006/relationships">
+  <p:cSld>
+    <p:spTree>
+      <p:nvGrpSpPr>
+        <p:cNvPr id="1" name=""/>
+        <p:cNvGrpSpPr/>
+        <p:nvPr/>
+      </p:nvGrpSpPr>
+      <p:grpSpPr>
+        <a:xfrm>
+          <a:off x="0" y="0"/>
+          <a:ext cx="0" cy="0"/>
+          <a:chOff x="0" y="0"/>
+          <a:chExt cx="0" cy="0"/>
+        </a:xfrm>
+      </p:grpSpPr>
+      <p:sp>
+        <p:nvSpPr>
+          <p:cNvPr id="2" name="Slide Image Placeholder 1"/>
+          <p:cNvSpPr>
+            <a:spLocks noGrp="1"/>
+          </p:cNvSpPr>
+          <p:nvPr>
+            <p:ph type="sldImg" idx="2"/>
+          </p:nvPr>
+        </p:nvSpPr>
+        <p:spPr/>
+      </p:sp>
+      <p:sp>
+        <p:nvSpPr>
+          <p:cNvPr id="3" name="Notes Placeholder 2"/>
+          <p:cNvSpPr>
+            <a:spLocks noGrp="1"/>
+          </p:cNvSpPr>
+          <p:nvPr>
+            <p:ph type="body" idx="3" sz="quarter"/>
+          </p:nvPr>
+        </p:nvSpPr>
+        <p:spPr/>
+        <p:txBody>
+          <a:bodyPr/>
+          <a:lstStyle/>
+          <a:p>
+            <a:r>
+              <a:t>El encapsulamiento se ensena mal cuando se presenta como la orden de poner private y generar getters.</a:t>
+            </a:r>
+          </a:p>
+          <a:p/>
+          <a:p>
+            <a:r>
+              <a:t>Se ensena bien cuando se muestra el problema que resuelve, y en VetCare el problema tiene nombre.</a:t>
+            </a:r>
+          </a:p>
+          <a:p/>
+          <a:p>
+            <a:r>
+              <a:t>La respuesta concreta es que funciona hoy, con un archivo y con usted como unico autor; en la Clase 12, integrando modulos de tres companeros, quien escriba la pantalla de facturacion pondra activa en false por comodidad y usted perdera una tarde buscando por que las citas desaparecieron.</a:t>
+            </a:r>
+          </a:p>
+        </p:txBody>
+      </p:sp>
+      <p:sp>
+        <p:nvSpPr>
+          <p:cNvPr id="4" name="Slide Number Placeholder 3"/>
+          <p:cNvSpPr>
+            <a:spLocks noGrp="1"/>
+          </p:cNvSpPr>
+          <p:nvPr>
+            <p:ph type="sldNum" idx="5" sz="quarter"/>
+          </p:nvPr>
+        </p:nvSpPr>
+        <p:spPr/>
+      </p:sp>
+    </p:spTree>
+  </p:cSld>
+  <p:clrMapOvr>
+    <a:masterClrMapping/>
+  </p:clrMapOvr>
+</p:notes>
+</file>
+
+<file path=ppt/notesSlides/notesSlide9.xml><?xml version="1.0" encoding="utf-8"?>
+<p:notes xmlns:a="http://schemas.openxmlformats.org/drawingml/2006/main" xmlns:p="http://schemas.openxmlformats.org/presentationml/2006/main" xmlns:r="http://schemas.openxmlformats.org/officeDocument/2006/relationships">
+  <p:cSld>
+    <p:spTree>
+      <p:nvGrpSpPr>
+        <p:cNvPr id="1" name=""/>
+        <p:cNvGrpSpPr/>
+        <p:nvPr/>
+      </p:nvGrpSpPr>
+      <p:grpSpPr>
+        <a:xfrm>
+          <a:off x="0" y="0"/>
+          <a:ext cx="0" cy="0"/>
+          <a:chOff x="0" y="0"/>
+          <a:chExt cx="0" cy="0"/>
+        </a:xfrm>
+      </p:grpSpPr>
+      <p:sp>
+        <p:nvSpPr>
+          <p:cNvPr id="2" name="Slide Image Placeholder 1"/>
+          <p:cNvSpPr>
+            <a:spLocks noGrp="1"/>
+          </p:cNvSpPr>
+          <p:nvPr>
+            <p:ph type="sldImg" idx="2"/>
+          </p:nvPr>
+        </p:nvSpPr>
+        <p:spPr/>
+      </p:sp>
+      <p:sp>
+        <p:nvSpPr>
+          <p:cNvPr id="3" name="Notes Placeholder 2"/>
+          <p:cNvSpPr>
+            <a:spLocks noGrp="1"/>
+          </p:cNvSpPr>
+          <p:nvPr>
+            <p:ph type="body" idx="3" sz="quarter"/>
+          </p:nvPr>
+        </p:nvSpPr>
+        <p:spPr/>
+        <p:txBody>
+          <a:bodyPr/>
+          <a:lstStyle/>
+          <a:p>
+            <a:r>
+              <a:t>Eso elimina una familia entera de errores aguas abajo, porque nadie tendra que preguntarse mas adelante si el nombre podria estar vacio.</a:t>
+            </a:r>
+          </a:p>
+        </p:txBody>
+      </p:sp>
+      <p:sp>
+        <p:nvSpPr>
+          <p:cNvPr id="4" name="Slide Number Placeholder 3"/>
+          <p:cNvSpPr>
+            <a:spLocks noGrp="1"/>
+          </p:cNvSpPr>
+          <p:nvPr>
+            <p:ph type="sldNum" idx="5" sz="quarter"/>
+          </p:nvPr>
+        </p:nvSpPr>
+        <p:spPr/>
+      </p:sp>
+    </p:spTree>
+  </p:cSld>
+  <p:clrMapOvr>
+    <a:masterClrMapping/>
+  </p:clrMapOvr>
+</p:notes>
 </file>
 
 <file path=ppt/slideLayouts/slideLayout1.xml><?xml version="1.0" encoding="utf-8"?>
@@ -6428,7 +7602,7 @@
                 </a:solidFill>
                 <a:latin typeface="Calibri"/>
               </a:rPr>
-              <a:t>Encuadre de hoy · Objetivo del PI</a:t>
+              <a:t>Encuadre de hoy</a:t>
             </a:r>
           </a:p>
         </p:txBody>
@@ -6476,7 +7650,7 @@
                 </a:solidFill>
                 <a:latin typeface="Calibri"/>
               </a:rPr>
-              <a:t>Hoy avanzamos VetCare en:</a:t>
+              <a:t>Tema de hoy:</a:t>
             </a:r>
             <a:r>
               <a:rPr sz="2000" b="0" i="0">
@@ -6485,7 +7659,7 @@
                 </a:solidFill>
                 <a:latin typeface="Calibri"/>
               </a:rPr>
-              <a:t> Entorno de desarrollo listo y la primera clase del dominio VetCare escrita</a:t>
+              <a:t> Introduccion a la Programacion Orientada a Objetos — Clase vs objeto y los cuatro pilares</a:t>
             </a:r>
           </a:p>
           <a:p>
@@ -6544,25 +7718,7 @@
                 </a:solidFill>
                 <a:latin typeface="Calibri"/>
               </a:rPr>
-              <a:t>–   </a:t>
-            </a:r>
-            <a:r>
-              <a:rPr sz="2000" b="1" i="0">
-                <a:solidFill>
-                  <a:srgbClr val="333333"/>
-                </a:solidFill>
-                <a:latin typeface="Calibri"/>
-              </a:rPr>
-              <a:t>Entregable de hoy:</a:t>
-            </a:r>
-            <a:r>
-              <a:rPr sz="2000" b="0" i="0">
-                <a:solidFill>
-                  <a:srgbClr val="333333"/>
-                </a:solidFill>
-                <a:latin typeface="Calibri"/>
-              </a:rPr>
-              <a:t> Proyecto Java con la clase Mascota (atributos privados, constructor y toString) y un main que crea dos objetos distintos</a:t>
+              <a:t>–   Primero el concepto, despues el codigo que lo muestra y la demo en vivo.</a:t>
             </a:r>
           </a:p>
           <a:p>
@@ -6578,7 +7734,7 @@
                 </a:solidFill>
                 <a:latin typeface="Calibri"/>
               </a:rPr>
-              <a:t>–   La teoria esta al servicio del producto: al salir, VetCare avanzo.</a:t>
+              <a:t>–   Todo con el mismo dominio: la clinica veterinaria Huellitas (VetCare).</a:t>
             </a:r>
           </a:p>
         </p:txBody>
@@ -10293,7 +11449,7 @@
                 </a:solidFill>
                 <a:latin typeface="Calibri"/>
               </a:rPr>
-              <a:t>Encuadre y repaso del avance</a:t>
+              <a:t>Encuadre y repaso de la clase anterior</a:t>
             </a:r>
           </a:p>
         </p:txBody>
@@ -10638,7 +11794,7 @@
                 </a:solidFill>
                 <a:latin typeface="Calibri"/>
               </a:rPr>
-              <a:t>Taller guiado = avance del PI</a:t>
+              <a:t>Practica (opcional, guia en la carpeta)</a:t>
             </a:r>
           </a:p>
         </p:txBody>
@@ -10753,7 +11909,7 @@
                 </a:solidFill>
                 <a:latin typeface="Calibri"/>
               </a:rPr>
-              <a:t>Criterios de exito y cierre</a:t>
+              <a:t>Repaso de conceptos y cierre</a:t>
             </a:r>
           </a:p>
         </p:txBody>
@@ -12268,3163 +13424,6 @@
         <p:spPr>
           <a:xfrm>
             <a:off x="0" y="0"/>
-            <a:ext cx="12191695" cy="960120"/>
-          </a:xfrm>
-          <a:prstGeom prst="rect">
-            <a:avLst/>
-          </a:prstGeom>
-          <a:solidFill>
-            <a:srgbClr val="095292"/>
-          </a:solidFill>
-          <a:ln>
-            <a:noFill/>
-          </a:ln>
-        </p:spPr>
-        <p:style>
-          <a:lnRef idx="1">
-            <a:schemeClr val="accent1"/>
-          </a:lnRef>
-          <a:fillRef idx="3">
-            <a:schemeClr val="accent1"/>
-          </a:fillRef>
-          <a:effectRef idx="2">
-            <a:schemeClr val="accent1"/>
-          </a:effectRef>
-          <a:fontRef idx="minor">
-            <a:schemeClr val="lt1"/>
-          </a:fontRef>
-        </p:style>
-        <p:txBody>
-          <a:bodyPr rtlCol="0" anchor="ctr"/>
-          <a:lstStyle/>
-          <a:p>
-            <a:pPr algn="ctr"/>
-          </a:p>
-        </p:txBody>
-      </p:sp>
-      <p:sp>
-        <p:nvSpPr>
-          <p:cNvPr id="3" name="Rectangle 2"/>
-          <p:cNvSpPr/>
-          <p:nvPr/>
-        </p:nvSpPr>
-        <p:spPr>
-          <a:xfrm>
-            <a:off x="0" y="960120"/>
-            <a:ext cx="12191695" cy="41148"/>
-          </a:xfrm>
-          <a:prstGeom prst="rect">
-            <a:avLst/>
-          </a:prstGeom>
-          <a:solidFill>
-            <a:srgbClr val="FFD000"/>
-          </a:solidFill>
-          <a:ln>
-            <a:noFill/>
-          </a:ln>
-        </p:spPr>
-        <p:style>
-          <a:lnRef idx="1">
-            <a:schemeClr val="accent1"/>
-          </a:lnRef>
-          <a:fillRef idx="3">
-            <a:schemeClr val="accent1"/>
-          </a:fillRef>
-          <a:effectRef idx="2">
-            <a:schemeClr val="accent1"/>
-          </a:effectRef>
-          <a:fontRef idx="minor">
-            <a:schemeClr val="lt1"/>
-          </a:fontRef>
-        </p:style>
-        <p:txBody>
-          <a:bodyPr rtlCol="0" anchor="ctr"/>
-          <a:lstStyle/>
-          <a:p>
-            <a:pPr algn="ctr"/>
-          </a:p>
-        </p:txBody>
-      </p:sp>
-      <p:sp>
-        <p:nvSpPr>
-          <p:cNvPr id="4" name="TextBox 3"/>
-          <p:cNvSpPr txBox="1"/>
-          <p:nvPr/>
-        </p:nvSpPr>
-        <p:spPr>
-          <a:xfrm>
-            <a:off x="457200" y="164592"/>
-            <a:ext cx="11277295" cy="502920"/>
-          </a:xfrm>
-          <a:prstGeom prst="rect">
-            <a:avLst/>
-          </a:prstGeom>
-          <a:noFill/>
-        </p:spPr>
-        <p:txBody>
-          <a:bodyPr wrap="square">
-            <a:spAutoFit/>
-          </a:bodyPr>
-          <a:lstStyle/>
-          <a:p>
-            <a:r>
-              <a:rPr sz="2600" b="1" i="0">
-                <a:solidFill>
-                  <a:srgbClr val="FFFFFF"/>
-                </a:solidFill>
-                <a:latin typeface="Calibri"/>
-              </a:rPr>
-              <a:t>Taller PI — por que importa</a:t>
-            </a:r>
-          </a:p>
-        </p:txBody>
-      </p:sp>
-      <p:sp>
-        <p:nvSpPr>
-          <p:cNvPr id="5" name="TextBox 4"/>
-          <p:cNvSpPr txBox="1"/>
-          <p:nvPr/>
-        </p:nvSpPr>
-        <p:spPr>
-          <a:xfrm>
-            <a:off x="457200" y="1170432"/>
-            <a:ext cx="11277295" cy="5230368"/>
-          </a:xfrm>
-          <a:prstGeom prst="rect">
-            <a:avLst/>
-          </a:prstGeom>
-          <a:noFill/>
-        </p:spPr>
-        <p:txBody>
-          <a:bodyPr wrap="square">
-            <a:spAutoFit/>
-          </a:bodyPr>
-          <a:lstStyle/>
-          <a:p>
-            <a:pPr>
-              <a:spcAft>
-                <a:spcPts val="800"/>
-              </a:spcAft>
-            </a:pPr>
-            <a:r>
-              <a:rPr sz="2000" b="0" i="0">
-                <a:solidFill>
-                  <a:srgbClr val="333333"/>
-                </a:solidFill>
-                <a:latin typeface="Calibri"/>
-              </a:rPr>
-              <a:t>–   </a:t>
-            </a:r>
-            <a:r>
-              <a:rPr sz="2000" b="1" i="0">
-                <a:solidFill>
-                  <a:srgbClr val="333333"/>
-                </a:solidFill>
-                <a:latin typeface="Calibri"/>
-              </a:rPr>
-              <a:t>Por que importa al PI:</a:t>
-            </a:r>
-            <a:r>
-              <a:rPr sz="2000" b="0" i="0">
-                <a:solidFill>
-                  <a:srgbClr val="333333"/>
-                </a:solidFill>
-                <a:latin typeface="Calibri"/>
-              </a:rPr>
-              <a:t> la clase Mascota que escriba hoy es la semilla de todo VetCare; las clases siguientes se apoyan en ella.</a:t>
-            </a:r>
-          </a:p>
-          <a:p>
-            <a:pPr>
-              <a:spcAft>
-                <a:spcPts val="800"/>
-              </a:spcAft>
-            </a:pPr>
-            <a:r>
-              <a:rPr sz="2000" b="0" i="0">
-                <a:solidFill>
-                  <a:srgbClr val="333333"/>
-                </a:solidFill>
-                <a:latin typeface="Calibri"/>
-              </a:rPr>
-              <a:t>–   Sin entorno funcionando no se puede avanzar en ninguna sesion posterior: por eso hoy se resuelve.</a:t>
-            </a:r>
-          </a:p>
-          <a:p>
-            <a:pPr>
-              <a:spcAft>
-                <a:spcPts val="800"/>
-              </a:spcAft>
-            </a:pPr>
-            <a:r>
-              <a:rPr sz="2000" b="0" i="0">
-                <a:solidFill>
-                  <a:srgbClr val="333333"/>
-                </a:solidFill>
-                <a:latin typeface="Calibri"/>
-              </a:rPr>
-              <a:t>–   El diagnostico de hoy no tiene nota: sirve para calibrar el ritmo de las proximas clases.</a:t>
-            </a:r>
-          </a:p>
-        </p:txBody>
-      </p:sp>
-      <p:sp>
-        <p:nvSpPr>
-          <p:cNvPr id="6" name="TextBox 5"/>
-          <p:cNvSpPr txBox="1"/>
-          <p:nvPr/>
-        </p:nvSpPr>
-        <p:spPr>
-          <a:xfrm>
-            <a:off x="11185855" y="6473952"/>
-            <a:ext cx="640080" cy="274320"/>
-          </a:xfrm>
-          <a:prstGeom prst="rect">
-            <a:avLst/>
-          </a:prstGeom>
-          <a:noFill/>
-        </p:spPr>
-        <p:txBody>
-          <a:bodyPr wrap="square">
-            <a:spAutoFit/>
-          </a:bodyPr>
-          <a:lstStyle/>
-          <a:p>
-            <a:pPr algn="r"/>
-            <a:r>
-              <a:rPr sz="1100" b="0" i="0">
-                <a:solidFill>
-                  <a:srgbClr val="666666"/>
-                </a:solidFill>
-                <a:latin typeface="Calibri"/>
-              </a:rPr>
-              <a:t>33</a:t>
-            </a:r>
-          </a:p>
-        </p:txBody>
-      </p:sp>
-    </p:spTree>
-  </p:cSld>
-  <p:clrMapOvr>
-    <a:masterClrMapping/>
-  </p:clrMapOvr>
-</p:sld>
-</file>
-
-<file path=ppt/slides/slide34.xml><?xml version="1.0" encoding="utf-8"?>
-<p:sld xmlns:a="http://schemas.openxmlformats.org/drawingml/2006/main" xmlns:p="http://schemas.openxmlformats.org/presentationml/2006/main" xmlns:r="http://schemas.openxmlformats.org/officeDocument/2006/relationships">
-  <p:cSld>
-    <p:bg>
-      <p:bgPr>
-        <a:solidFill>
-          <a:srgbClr val="FFFFFF"/>
-        </a:solidFill>
-        <a:effectLst/>
-      </p:bgPr>
-    </p:bg>
-    <p:spTree>
-      <p:nvGrpSpPr>
-        <p:cNvPr id="1" name=""/>
-        <p:cNvGrpSpPr/>
-        <p:nvPr/>
-      </p:nvGrpSpPr>
-      <p:grpSpPr/>
-      <p:sp>
-        <p:nvSpPr>
-          <p:cNvPr id="2" name="Rectangle 1"/>
-          <p:cNvSpPr/>
-          <p:nvPr/>
-        </p:nvSpPr>
-        <p:spPr>
-          <a:xfrm>
-            <a:off x="0" y="0"/>
-            <a:ext cx="12191695" cy="960120"/>
-          </a:xfrm>
-          <a:prstGeom prst="rect">
-            <a:avLst/>
-          </a:prstGeom>
-          <a:solidFill>
-            <a:srgbClr val="095292"/>
-          </a:solidFill>
-          <a:ln>
-            <a:noFill/>
-          </a:ln>
-        </p:spPr>
-        <p:style>
-          <a:lnRef idx="1">
-            <a:schemeClr val="accent1"/>
-          </a:lnRef>
-          <a:fillRef idx="3">
-            <a:schemeClr val="accent1"/>
-          </a:fillRef>
-          <a:effectRef idx="2">
-            <a:schemeClr val="accent1"/>
-          </a:effectRef>
-          <a:fontRef idx="minor">
-            <a:schemeClr val="lt1"/>
-          </a:fontRef>
-        </p:style>
-        <p:txBody>
-          <a:bodyPr rtlCol="0" anchor="ctr"/>
-          <a:lstStyle/>
-          <a:p>
-            <a:pPr algn="ctr"/>
-          </a:p>
-        </p:txBody>
-      </p:sp>
-      <p:sp>
-        <p:nvSpPr>
-          <p:cNvPr id="3" name="Rectangle 2"/>
-          <p:cNvSpPr/>
-          <p:nvPr/>
-        </p:nvSpPr>
-        <p:spPr>
-          <a:xfrm>
-            <a:off x="0" y="960120"/>
-            <a:ext cx="12191695" cy="41148"/>
-          </a:xfrm>
-          <a:prstGeom prst="rect">
-            <a:avLst/>
-          </a:prstGeom>
-          <a:solidFill>
-            <a:srgbClr val="FFD000"/>
-          </a:solidFill>
-          <a:ln>
-            <a:noFill/>
-          </a:ln>
-        </p:spPr>
-        <p:style>
-          <a:lnRef idx="1">
-            <a:schemeClr val="accent1"/>
-          </a:lnRef>
-          <a:fillRef idx="3">
-            <a:schemeClr val="accent1"/>
-          </a:fillRef>
-          <a:effectRef idx="2">
-            <a:schemeClr val="accent1"/>
-          </a:effectRef>
-          <a:fontRef idx="minor">
-            <a:schemeClr val="lt1"/>
-          </a:fontRef>
-        </p:style>
-        <p:txBody>
-          <a:bodyPr rtlCol="0" anchor="ctr"/>
-          <a:lstStyle/>
-          <a:p>
-            <a:pPr algn="ctr"/>
-          </a:p>
-        </p:txBody>
-      </p:sp>
-      <p:sp>
-        <p:nvSpPr>
-          <p:cNvPr id="4" name="TextBox 3"/>
-          <p:cNvSpPr txBox="1"/>
-          <p:nvPr/>
-        </p:nvSpPr>
-        <p:spPr>
-          <a:xfrm>
-            <a:off x="457200" y="164592"/>
-            <a:ext cx="11277295" cy="502920"/>
-          </a:xfrm>
-          <a:prstGeom prst="rect">
-            <a:avLst/>
-          </a:prstGeom>
-          <a:noFill/>
-        </p:spPr>
-        <p:txBody>
-          <a:bodyPr wrap="square">
-            <a:spAutoFit/>
-          </a:bodyPr>
-          <a:lstStyle/>
-          <a:p>
-            <a:r>
-              <a:rPr sz="2600" b="1" i="0">
-                <a:solidFill>
-                  <a:srgbClr val="FFFFFF"/>
-                </a:solidFill>
-                <a:latin typeface="Calibri"/>
-              </a:rPr>
-              <a:t>Taller PI — punto de partida</a:t>
-            </a:r>
-          </a:p>
-        </p:txBody>
-      </p:sp>
-      <p:sp>
-        <p:nvSpPr>
-          <p:cNvPr id="5" name="TextBox 4"/>
-          <p:cNvSpPr txBox="1"/>
-          <p:nvPr/>
-        </p:nvSpPr>
-        <p:spPr>
-          <a:xfrm>
-            <a:off x="457200" y="1170432"/>
-            <a:ext cx="11277295" cy="5230368"/>
-          </a:xfrm>
-          <a:prstGeom prst="rect">
-            <a:avLst/>
-          </a:prstGeom>
-          <a:noFill/>
-        </p:spPr>
-        <p:txBody>
-          <a:bodyPr wrap="square">
-            <a:spAutoFit/>
-          </a:bodyPr>
-          <a:lstStyle/>
-          <a:p>
-            <a:pPr>
-              <a:spcAft>
-                <a:spcPts val="800"/>
-              </a:spcAft>
-            </a:pPr>
-            <a:r>
-              <a:rPr sz="2000" b="0" i="0">
-                <a:solidFill>
-                  <a:srgbClr val="333333"/>
-                </a:solidFill>
-                <a:latin typeface="Calibri"/>
-              </a:rPr>
-              <a:t>–   Dominio: clinica veterinaria Huellitas, que hoy lleva toda su gestion en papel.</a:t>
-            </a:r>
-          </a:p>
-          <a:p>
-            <a:pPr>
-              <a:spcAft>
-                <a:spcPts val="800"/>
-              </a:spcAft>
-            </a:pPr>
-            <a:r>
-              <a:rPr sz="2000" b="0" i="0">
-                <a:solidFill>
-                  <a:srgbClr val="333333"/>
-                </a:solidFill>
-                <a:latin typeface="Calibri"/>
-              </a:rPr>
-              <a:t>–   Herramienta: VS Code con el Extension Pack for Java y el JDK 17+ instalado.</a:t>
-            </a:r>
-          </a:p>
-          <a:p>
-            <a:pPr>
-              <a:spcAft>
-                <a:spcPts val="800"/>
-              </a:spcAft>
-            </a:pPr>
-            <a:r>
-              <a:rPr sz="2000" b="0" i="0">
-                <a:solidFill>
-                  <a:srgbClr val="333333"/>
-                </a:solidFill>
-                <a:latin typeface="Calibri"/>
-              </a:rPr>
-              <a:t>–   Se parte de cero: no hay codigo previo del proyecto.</a:t>
-            </a:r>
-          </a:p>
-        </p:txBody>
-      </p:sp>
-      <p:sp>
-        <p:nvSpPr>
-          <p:cNvPr id="6" name="TextBox 5"/>
-          <p:cNvSpPr txBox="1"/>
-          <p:nvPr/>
-        </p:nvSpPr>
-        <p:spPr>
-          <a:xfrm>
-            <a:off x="11185855" y="6473952"/>
-            <a:ext cx="640080" cy="274320"/>
-          </a:xfrm>
-          <a:prstGeom prst="rect">
-            <a:avLst/>
-          </a:prstGeom>
-          <a:noFill/>
-        </p:spPr>
-        <p:txBody>
-          <a:bodyPr wrap="square">
-            <a:spAutoFit/>
-          </a:bodyPr>
-          <a:lstStyle/>
-          <a:p>
-            <a:pPr algn="r"/>
-            <a:r>
-              <a:rPr sz="1100" b="0" i="0">
-                <a:solidFill>
-                  <a:srgbClr val="666666"/>
-                </a:solidFill>
-                <a:latin typeface="Calibri"/>
-              </a:rPr>
-              <a:t>34</a:t>
-            </a:r>
-          </a:p>
-        </p:txBody>
-      </p:sp>
-    </p:spTree>
-  </p:cSld>
-  <p:clrMapOvr>
-    <a:masterClrMapping/>
-  </p:clrMapOvr>
-</p:sld>
-</file>
-
-<file path=ppt/slides/slide35.xml><?xml version="1.0" encoding="utf-8"?>
-<p:sld xmlns:a="http://schemas.openxmlformats.org/drawingml/2006/main" xmlns:p="http://schemas.openxmlformats.org/presentationml/2006/main" xmlns:r="http://schemas.openxmlformats.org/officeDocument/2006/relationships">
-  <p:cSld>
-    <p:bg>
-      <p:bgPr>
-        <a:solidFill>
-          <a:srgbClr val="FFFFFF"/>
-        </a:solidFill>
-        <a:effectLst/>
-      </p:bgPr>
-    </p:bg>
-    <p:spTree>
-      <p:nvGrpSpPr>
-        <p:cNvPr id="1" name=""/>
-        <p:cNvGrpSpPr/>
-        <p:nvPr/>
-      </p:nvGrpSpPr>
-      <p:grpSpPr/>
-      <p:sp>
-        <p:nvSpPr>
-          <p:cNvPr id="2" name="Rectangle 1"/>
-          <p:cNvSpPr/>
-          <p:nvPr/>
-        </p:nvSpPr>
-        <p:spPr>
-          <a:xfrm>
-            <a:off x="0" y="0"/>
-            <a:ext cx="12191695" cy="960120"/>
-          </a:xfrm>
-          <a:prstGeom prst="rect">
-            <a:avLst/>
-          </a:prstGeom>
-          <a:solidFill>
-            <a:srgbClr val="095292"/>
-          </a:solidFill>
-          <a:ln>
-            <a:noFill/>
-          </a:ln>
-        </p:spPr>
-        <p:style>
-          <a:lnRef idx="1">
-            <a:schemeClr val="accent1"/>
-          </a:lnRef>
-          <a:fillRef idx="3">
-            <a:schemeClr val="accent1"/>
-          </a:fillRef>
-          <a:effectRef idx="2">
-            <a:schemeClr val="accent1"/>
-          </a:effectRef>
-          <a:fontRef idx="minor">
-            <a:schemeClr val="lt1"/>
-          </a:fontRef>
-        </p:style>
-        <p:txBody>
-          <a:bodyPr rtlCol="0" anchor="ctr"/>
-          <a:lstStyle/>
-          <a:p>
-            <a:pPr algn="ctr"/>
-          </a:p>
-        </p:txBody>
-      </p:sp>
-      <p:sp>
-        <p:nvSpPr>
-          <p:cNvPr id="3" name="Rectangle 2"/>
-          <p:cNvSpPr/>
-          <p:nvPr/>
-        </p:nvSpPr>
-        <p:spPr>
-          <a:xfrm>
-            <a:off x="0" y="960120"/>
-            <a:ext cx="12191695" cy="41148"/>
-          </a:xfrm>
-          <a:prstGeom prst="rect">
-            <a:avLst/>
-          </a:prstGeom>
-          <a:solidFill>
-            <a:srgbClr val="FFD000"/>
-          </a:solidFill>
-          <a:ln>
-            <a:noFill/>
-          </a:ln>
-        </p:spPr>
-        <p:style>
-          <a:lnRef idx="1">
-            <a:schemeClr val="accent1"/>
-          </a:lnRef>
-          <a:fillRef idx="3">
-            <a:schemeClr val="accent1"/>
-          </a:fillRef>
-          <a:effectRef idx="2">
-            <a:schemeClr val="accent1"/>
-          </a:effectRef>
-          <a:fontRef idx="minor">
-            <a:schemeClr val="lt1"/>
-          </a:fontRef>
-        </p:style>
-        <p:txBody>
-          <a:bodyPr rtlCol="0" anchor="ctr"/>
-          <a:lstStyle/>
-          <a:p>
-            <a:pPr algn="ctr"/>
-          </a:p>
-        </p:txBody>
-      </p:sp>
-      <p:sp>
-        <p:nvSpPr>
-          <p:cNvPr id="4" name="TextBox 3"/>
-          <p:cNvSpPr txBox="1"/>
-          <p:nvPr/>
-        </p:nvSpPr>
-        <p:spPr>
-          <a:xfrm>
-            <a:off x="457200" y="164592"/>
-            <a:ext cx="11277295" cy="502920"/>
-          </a:xfrm>
-          <a:prstGeom prst="rect">
-            <a:avLst/>
-          </a:prstGeom>
-          <a:noFill/>
-        </p:spPr>
-        <p:txBody>
-          <a:bodyPr wrap="square">
-            <a:spAutoFit/>
-          </a:bodyPr>
-          <a:lstStyle/>
-          <a:p>
-            <a:r>
-              <a:rPr sz="2600" b="1" i="0">
-                <a:solidFill>
-                  <a:srgbClr val="FFFFFF"/>
-                </a:solidFill>
-                <a:latin typeface="Calibri"/>
-              </a:rPr>
-              <a:t>Taller PI — pasos guiados</a:t>
-            </a:r>
-          </a:p>
-        </p:txBody>
-      </p:sp>
-      <p:sp>
-        <p:nvSpPr>
-          <p:cNvPr id="5" name="Rounded Rectangle 4"/>
-          <p:cNvSpPr/>
-          <p:nvPr/>
-        </p:nvSpPr>
-        <p:spPr>
-          <a:xfrm>
-            <a:off x="457200" y="1234440"/>
-            <a:ext cx="11277295" cy="950976"/>
-          </a:xfrm>
-          <a:prstGeom prst="roundRect">
-            <a:avLst>
-              <a:gd name="adj" fmla="val 12000"/>
-            </a:avLst>
-          </a:prstGeom>
-          <a:solidFill>
-            <a:srgbClr val="F2F2F2"/>
-          </a:solidFill>
-          <a:ln>
-            <a:noFill/>
-          </a:ln>
-        </p:spPr>
-        <p:style>
-          <a:lnRef idx="1">
-            <a:schemeClr val="accent1"/>
-          </a:lnRef>
-          <a:fillRef idx="3">
-            <a:schemeClr val="accent1"/>
-          </a:fillRef>
-          <a:effectRef idx="2">
-            <a:schemeClr val="accent1"/>
-          </a:effectRef>
-          <a:fontRef idx="minor">
-            <a:schemeClr val="lt1"/>
-          </a:fontRef>
-        </p:style>
-        <p:txBody>
-          <a:bodyPr rtlCol="0" anchor="ctr"/>
-          <a:lstStyle/>
-          <a:p>
-            <a:pPr algn="ctr"/>
-          </a:p>
-        </p:txBody>
-      </p:sp>
-      <p:sp>
-        <p:nvSpPr>
-          <p:cNvPr id="6" name="Rounded Rectangle 5"/>
-          <p:cNvSpPr/>
-          <p:nvPr/>
-        </p:nvSpPr>
-        <p:spPr>
-          <a:xfrm>
-            <a:off x="594360" y="1490472"/>
-            <a:ext cx="438912" cy="438912"/>
-          </a:xfrm>
-          <a:prstGeom prst="roundRect">
-            <a:avLst>
-              <a:gd name="adj" fmla="val 12000"/>
-            </a:avLst>
-          </a:prstGeom>
-          <a:solidFill>
-            <a:srgbClr val="095292"/>
-          </a:solidFill>
-          <a:ln>
-            <a:noFill/>
-          </a:ln>
-        </p:spPr>
-        <p:style>
-          <a:lnRef idx="1">
-            <a:schemeClr val="accent1"/>
-          </a:lnRef>
-          <a:fillRef idx="3">
-            <a:schemeClr val="accent1"/>
-          </a:fillRef>
-          <a:effectRef idx="2">
-            <a:schemeClr val="accent1"/>
-          </a:effectRef>
-          <a:fontRef idx="minor">
-            <a:schemeClr val="lt1"/>
-          </a:fontRef>
-        </p:style>
-        <p:txBody>
-          <a:bodyPr rtlCol="0" anchor="ctr"/>
-          <a:lstStyle/>
-          <a:p>
-            <a:pPr algn="ctr"/>
-          </a:p>
-        </p:txBody>
-      </p:sp>
-      <p:sp>
-        <p:nvSpPr>
-          <p:cNvPr id="7" name="TextBox 6"/>
-          <p:cNvSpPr txBox="1"/>
-          <p:nvPr/>
-        </p:nvSpPr>
-        <p:spPr>
-          <a:xfrm>
-            <a:off x="594360" y="1490472"/>
-            <a:ext cx="438912" cy="438912"/>
-          </a:xfrm>
-          <a:prstGeom prst="rect">
-            <a:avLst/>
-          </a:prstGeom>
-          <a:noFill/>
-        </p:spPr>
-        <p:txBody>
-          <a:bodyPr wrap="square" anchor="ctr"/>
-          <a:lstStyle/>
-          <a:p>
-            <a:pPr algn="ctr"/>
-            <a:r>
-              <a:rPr sz="1600" b="1" i="0">
-                <a:solidFill>
-                  <a:srgbClr val="FFFFFF"/>
-                </a:solidFill>
-                <a:latin typeface="Calibri"/>
-              </a:rPr>
-              <a:t>1</a:t>
-            </a:r>
-          </a:p>
-        </p:txBody>
-      </p:sp>
-      <p:sp>
-        <p:nvSpPr>
-          <p:cNvPr id="8" name="TextBox 7"/>
-          <p:cNvSpPr txBox="1"/>
-          <p:nvPr/>
-        </p:nvSpPr>
-        <p:spPr>
-          <a:xfrm>
-            <a:off x="1188720" y="1325880"/>
-            <a:ext cx="10271455" cy="786384"/>
-          </a:xfrm>
-          <a:prstGeom prst="rect">
-            <a:avLst/>
-          </a:prstGeom>
-          <a:noFill/>
-        </p:spPr>
-        <p:txBody>
-          <a:bodyPr wrap="square" anchor="ctr"/>
-          <a:lstStyle/>
-          <a:p>
-            <a:r>
-              <a:rPr sz="1500" b="1" i="0">
-                <a:solidFill>
-                  <a:srgbClr val="095292"/>
-                </a:solidFill>
-                <a:latin typeface="Calibri"/>
-              </a:rPr>
-              <a:t>Instale y verifique el entorno (JDK 17+ y VS Code con el Extension Pack for Java) y cree un proyecto Java llamado VetCare con paquete vetcare. Este paso es el objetivo real del bloque: nadie puede quedarse sin entorno funcionando.</a:t>
-            </a:r>
-          </a:p>
-        </p:txBody>
-      </p:sp>
-      <p:sp>
-        <p:nvSpPr>
-          <p:cNvPr id="9" name="Rounded Rectangle 8"/>
-          <p:cNvSpPr/>
-          <p:nvPr/>
-        </p:nvSpPr>
-        <p:spPr>
-          <a:xfrm>
-            <a:off x="457200" y="2276856"/>
-            <a:ext cx="11277295" cy="950976"/>
-          </a:xfrm>
-          <a:prstGeom prst="roundRect">
-            <a:avLst>
-              <a:gd name="adj" fmla="val 12000"/>
-            </a:avLst>
-          </a:prstGeom>
-          <a:solidFill>
-            <a:srgbClr val="E8F4FA"/>
-          </a:solidFill>
-          <a:ln>
-            <a:noFill/>
-          </a:ln>
-        </p:spPr>
-        <p:style>
-          <a:lnRef idx="1">
-            <a:schemeClr val="accent1"/>
-          </a:lnRef>
-          <a:fillRef idx="3">
-            <a:schemeClr val="accent1"/>
-          </a:fillRef>
-          <a:effectRef idx="2">
-            <a:schemeClr val="accent1"/>
-          </a:effectRef>
-          <a:fontRef idx="minor">
-            <a:schemeClr val="lt1"/>
-          </a:fontRef>
-        </p:style>
-        <p:txBody>
-          <a:bodyPr rtlCol="0" anchor="ctr"/>
-          <a:lstStyle/>
-          <a:p>
-            <a:pPr algn="ctr"/>
-          </a:p>
-        </p:txBody>
-      </p:sp>
-      <p:sp>
-        <p:nvSpPr>
-          <p:cNvPr id="10" name="Rounded Rectangle 9"/>
-          <p:cNvSpPr/>
-          <p:nvPr/>
-        </p:nvSpPr>
-        <p:spPr>
-          <a:xfrm>
-            <a:off x="594360" y="2532888"/>
-            <a:ext cx="438912" cy="438912"/>
-          </a:xfrm>
-          <a:prstGeom prst="roundRect">
-            <a:avLst>
-              <a:gd name="adj" fmla="val 12000"/>
-            </a:avLst>
-          </a:prstGeom>
-          <a:solidFill>
-            <a:srgbClr val="095292"/>
-          </a:solidFill>
-          <a:ln>
-            <a:noFill/>
-          </a:ln>
-        </p:spPr>
-        <p:style>
-          <a:lnRef idx="1">
-            <a:schemeClr val="accent1"/>
-          </a:lnRef>
-          <a:fillRef idx="3">
-            <a:schemeClr val="accent1"/>
-          </a:fillRef>
-          <a:effectRef idx="2">
-            <a:schemeClr val="accent1"/>
-          </a:effectRef>
-          <a:fontRef idx="minor">
-            <a:schemeClr val="lt1"/>
-          </a:fontRef>
-        </p:style>
-        <p:txBody>
-          <a:bodyPr rtlCol="0" anchor="ctr"/>
-          <a:lstStyle/>
-          <a:p>
-            <a:pPr algn="ctr"/>
-          </a:p>
-        </p:txBody>
-      </p:sp>
-      <p:sp>
-        <p:nvSpPr>
-          <p:cNvPr id="11" name="TextBox 10"/>
-          <p:cNvSpPr txBox="1"/>
-          <p:nvPr/>
-        </p:nvSpPr>
-        <p:spPr>
-          <a:xfrm>
-            <a:off x="594360" y="2532888"/>
-            <a:ext cx="438912" cy="438912"/>
-          </a:xfrm>
-          <a:prstGeom prst="rect">
-            <a:avLst/>
-          </a:prstGeom>
-          <a:noFill/>
-        </p:spPr>
-        <p:txBody>
-          <a:bodyPr wrap="square" anchor="ctr"/>
-          <a:lstStyle/>
-          <a:p>
-            <a:pPr algn="ctr"/>
-            <a:r>
-              <a:rPr sz="1600" b="1" i="0">
-                <a:solidFill>
-                  <a:srgbClr val="FFFFFF"/>
-                </a:solidFill>
-                <a:latin typeface="Calibri"/>
-              </a:rPr>
-              <a:t>2</a:t>
-            </a:r>
-          </a:p>
-        </p:txBody>
-      </p:sp>
-      <p:sp>
-        <p:nvSpPr>
-          <p:cNvPr id="12" name="TextBox 11"/>
-          <p:cNvSpPr txBox="1"/>
-          <p:nvPr/>
-        </p:nvSpPr>
-        <p:spPr>
-          <a:xfrm>
-            <a:off x="1188720" y="2368296"/>
-            <a:ext cx="10271455" cy="786384"/>
-          </a:xfrm>
-          <a:prstGeom prst="rect">
-            <a:avLst/>
-          </a:prstGeom>
-          <a:noFill/>
-        </p:spPr>
-        <p:txBody>
-          <a:bodyPr wrap="square" anchor="ctr"/>
-          <a:lstStyle/>
-          <a:p>
-            <a:r>
-              <a:rPr sz="1500" b="1" i="0">
-                <a:solidFill>
-                  <a:srgbClr val="095292"/>
-                </a:solidFill>
-                <a:latin typeface="Calibri"/>
-              </a:rPr>
-              <a:t>Escriba la clase Mascota con al menos tres atributos privados (id, nombre, especie) y un constructor que los reciba todos.</a:t>
-            </a:r>
-          </a:p>
-        </p:txBody>
-      </p:sp>
-      <p:sp>
-        <p:nvSpPr>
-          <p:cNvPr id="13" name="Rounded Rectangle 12"/>
-          <p:cNvSpPr/>
-          <p:nvPr/>
-        </p:nvSpPr>
-        <p:spPr>
-          <a:xfrm>
-            <a:off x="457200" y="3319272"/>
-            <a:ext cx="11277295" cy="950976"/>
-          </a:xfrm>
-          <a:prstGeom prst="roundRect">
-            <a:avLst>
-              <a:gd name="adj" fmla="val 12000"/>
-            </a:avLst>
-          </a:prstGeom>
-          <a:solidFill>
-            <a:srgbClr val="F2F2F2"/>
-          </a:solidFill>
-          <a:ln>
-            <a:noFill/>
-          </a:ln>
-        </p:spPr>
-        <p:style>
-          <a:lnRef idx="1">
-            <a:schemeClr val="accent1"/>
-          </a:lnRef>
-          <a:fillRef idx="3">
-            <a:schemeClr val="accent1"/>
-          </a:fillRef>
-          <a:effectRef idx="2">
-            <a:schemeClr val="accent1"/>
-          </a:effectRef>
-          <a:fontRef idx="minor">
-            <a:schemeClr val="lt1"/>
-          </a:fontRef>
-        </p:style>
-        <p:txBody>
-          <a:bodyPr rtlCol="0" anchor="ctr"/>
-          <a:lstStyle/>
-          <a:p>
-            <a:pPr algn="ctr"/>
-          </a:p>
-        </p:txBody>
-      </p:sp>
-      <p:sp>
-        <p:nvSpPr>
-          <p:cNvPr id="14" name="Rounded Rectangle 13"/>
-          <p:cNvSpPr/>
-          <p:nvPr/>
-        </p:nvSpPr>
-        <p:spPr>
-          <a:xfrm>
-            <a:off x="594360" y="3575304"/>
-            <a:ext cx="438912" cy="438912"/>
-          </a:xfrm>
-          <a:prstGeom prst="roundRect">
-            <a:avLst>
-              <a:gd name="adj" fmla="val 12000"/>
-            </a:avLst>
-          </a:prstGeom>
-          <a:solidFill>
-            <a:srgbClr val="095292"/>
-          </a:solidFill>
-          <a:ln>
-            <a:noFill/>
-          </a:ln>
-        </p:spPr>
-        <p:style>
-          <a:lnRef idx="1">
-            <a:schemeClr val="accent1"/>
-          </a:lnRef>
-          <a:fillRef idx="3">
-            <a:schemeClr val="accent1"/>
-          </a:fillRef>
-          <a:effectRef idx="2">
-            <a:schemeClr val="accent1"/>
-          </a:effectRef>
-          <a:fontRef idx="minor">
-            <a:schemeClr val="lt1"/>
-          </a:fontRef>
-        </p:style>
-        <p:txBody>
-          <a:bodyPr rtlCol="0" anchor="ctr"/>
-          <a:lstStyle/>
-          <a:p>
-            <a:pPr algn="ctr"/>
-          </a:p>
-        </p:txBody>
-      </p:sp>
-      <p:sp>
-        <p:nvSpPr>
-          <p:cNvPr id="15" name="TextBox 14"/>
-          <p:cNvSpPr txBox="1"/>
-          <p:nvPr/>
-        </p:nvSpPr>
-        <p:spPr>
-          <a:xfrm>
-            <a:off x="594360" y="3575304"/>
-            <a:ext cx="438912" cy="438912"/>
-          </a:xfrm>
-          <a:prstGeom prst="rect">
-            <a:avLst/>
-          </a:prstGeom>
-          <a:noFill/>
-        </p:spPr>
-        <p:txBody>
-          <a:bodyPr wrap="square" anchor="ctr"/>
-          <a:lstStyle/>
-          <a:p>
-            <a:pPr algn="ctr"/>
-            <a:r>
-              <a:rPr sz="1600" b="1" i="0">
-                <a:solidFill>
-                  <a:srgbClr val="FFFFFF"/>
-                </a:solidFill>
-                <a:latin typeface="Calibri"/>
-              </a:rPr>
-              <a:t>3</a:t>
-            </a:r>
-          </a:p>
-        </p:txBody>
-      </p:sp>
-      <p:sp>
-        <p:nvSpPr>
-          <p:cNvPr id="16" name="TextBox 15"/>
-          <p:cNvSpPr txBox="1"/>
-          <p:nvPr/>
-        </p:nvSpPr>
-        <p:spPr>
-          <a:xfrm>
-            <a:off x="1188720" y="3410712"/>
-            <a:ext cx="10271455" cy="786384"/>
-          </a:xfrm>
-          <a:prstGeom prst="rect">
-            <a:avLst/>
-          </a:prstGeom>
-          <a:noFill/>
-        </p:spPr>
-        <p:txBody>
-          <a:bodyPr wrap="square" anchor="ctr"/>
-          <a:lstStyle/>
-          <a:p>
-            <a:r>
-              <a:rPr sz="1500" b="1" i="0">
-                <a:solidFill>
-                  <a:srgbClr val="095292"/>
-                </a:solidFill>
-                <a:latin typeface="Calibri"/>
-              </a:rPr>
-              <a:t>Agregue al menos un getter y sobreescriba toString() para que la mascota se imprima de forma legible.</a:t>
-            </a:r>
-          </a:p>
-        </p:txBody>
-      </p:sp>
-      <p:sp>
-        <p:nvSpPr>
-          <p:cNvPr id="17" name="Rounded Rectangle 16"/>
-          <p:cNvSpPr/>
-          <p:nvPr/>
-        </p:nvSpPr>
-        <p:spPr>
-          <a:xfrm>
-            <a:off x="457200" y="4361688"/>
-            <a:ext cx="11277295" cy="950976"/>
-          </a:xfrm>
-          <a:prstGeom prst="roundRect">
-            <a:avLst>
-              <a:gd name="adj" fmla="val 12000"/>
-            </a:avLst>
-          </a:prstGeom>
-          <a:solidFill>
-            <a:srgbClr val="E8F4FA"/>
-          </a:solidFill>
-          <a:ln>
-            <a:noFill/>
-          </a:ln>
-        </p:spPr>
-        <p:style>
-          <a:lnRef idx="1">
-            <a:schemeClr val="accent1"/>
-          </a:lnRef>
-          <a:fillRef idx="3">
-            <a:schemeClr val="accent1"/>
-          </a:fillRef>
-          <a:effectRef idx="2">
-            <a:schemeClr val="accent1"/>
-          </a:effectRef>
-          <a:fontRef idx="minor">
-            <a:schemeClr val="lt1"/>
-          </a:fontRef>
-        </p:style>
-        <p:txBody>
-          <a:bodyPr rtlCol="0" anchor="ctr"/>
-          <a:lstStyle/>
-          <a:p>
-            <a:pPr algn="ctr"/>
-          </a:p>
-        </p:txBody>
-      </p:sp>
-      <p:sp>
-        <p:nvSpPr>
-          <p:cNvPr id="18" name="Rounded Rectangle 17"/>
-          <p:cNvSpPr/>
-          <p:nvPr/>
-        </p:nvSpPr>
-        <p:spPr>
-          <a:xfrm>
-            <a:off x="594360" y="4617720"/>
-            <a:ext cx="438912" cy="438912"/>
-          </a:xfrm>
-          <a:prstGeom prst="roundRect">
-            <a:avLst>
-              <a:gd name="adj" fmla="val 12000"/>
-            </a:avLst>
-          </a:prstGeom>
-          <a:solidFill>
-            <a:srgbClr val="095292"/>
-          </a:solidFill>
-          <a:ln>
-            <a:noFill/>
-          </a:ln>
-        </p:spPr>
-        <p:style>
-          <a:lnRef idx="1">
-            <a:schemeClr val="accent1"/>
-          </a:lnRef>
-          <a:fillRef idx="3">
-            <a:schemeClr val="accent1"/>
-          </a:fillRef>
-          <a:effectRef idx="2">
-            <a:schemeClr val="accent1"/>
-          </a:effectRef>
-          <a:fontRef idx="minor">
-            <a:schemeClr val="lt1"/>
-          </a:fontRef>
-        </p:style>
-        <p:txBody>
-          <a:bodyPr rtlCol="0" anchor="ctr"/>
-          <a:lstStyle/>
-          <a:p>
-            <a:pPr algn="ctr"/>
-          </a:p>
-        </p:txBody>
-      </p:sp>
-      <p:sp>
-        <p:nvSpPr>
-          <p:cNvPr id="19" name="TextBox 18"/>
-          <p:cNvSpPr txBox="1"/>
-          <p:nvPr/>
-        </p:nvSpPr>
-        <p:spPr>
-          <a:xfrm>
-            <a:off x="594360" y="4617720"/>
-            <a:ext cx="438912" cy="438912"/>
-          </a:xfrm>
-          <a:prstGeom prst="rect">
-            <a:avLst/>
-          </a:prstGeom>
-          <a:noFill/>
-        </p:spPr>
-        <p:txBody>
-          <a:bodyPr wrap="square" anchor="ctr"/>
-          <a:lstStyle/>
-          <a:p>
-            <a:pPr algn="ctr"/>
-            <a:r>
-              <a:rPr sz="1600" b="1" i="0">
-                <a:solidFill>
-                  <a:srgbClr val="FFFFFF"/>
-                </a:solidFill>
-                <a:latin typeface="Calibri"/>
-              </a:rPr>
-              <a:t>4</a:t>
-            </a:r>
-          </a:p>
-        </p:txBody>
-      </p:sp>
-      <p:sp>
-        <p:nvSpPr>
-          <p:cNvPr id="20" name="TextBox 19"/>
-          <p:cNvSpPr txBox="1"/>
-          <p:nvPr/>
-        </p:nvSpPr>
-        <p:spPr>
-          <a:xfrm>
-            <a:off x="1188720" y="4453128"/>
-            <a:ext cx="10271455" cy="786384"/>
-          </a:xfrm>
-          <a:prstGeom prst="rect">
-            <a:avLst/>
-          </a:prstGeom>
-          <a:noFill/>
-        </p:spPr>
-        <p:txBody>
-          <a:bodyPr wrap="square" anchor="ctr"/>
-          <a:lstStyle/>
-          <a:p>
-            <a:r>
-              <a:rPr sz="1500" b="1" i="0">
-                <a:solidFill>
-                  <a:srgbClr val="095292"/>
-                </a:solidFill>
-                <a:latin typeface="Calibri"/>
-              </a:rPr>
-              <a:t>En el main, cree DOS objetos Mascota con datos distintos e imprimalos: debe verse que salen del mismo molde pero con valores diferentes.</a:t>
-            </a:r>
-          </a:p>
-        </p:txBody>
-      </p:sp>
-      <p:sp>
-        <p:nvSpPr>
-          <p:cNvPr id="21" name="Rounded Rectangle 20"/>
-          <p:cNvSpPr/>
-          <p:nvPr/>
-        </p:nvSpPr>
-        <p:spPr>
-          <a:xfrm>
-            <a:off x="457200" y="5404104"/>
-            <a:ext cx="11277295" cy="950976"/>
-          </a:xfrm>
-          <a:prstGeom prst="roundRect">
-            <a:avLst>
-              <a:gd name="adj" fmla="val 12000"/>
-            </a:avLst>
-          </a:prstGeom>
-          <a:solidFill>
-            <a:srgbClr val="F2F2F2"/>
-          </a:solidFill>
-          <a:ln>
-            <a:noFill/>
-          </a:ln>
-        </p:spPr>
-        <p:style>
-          <a:lnRef idx="1">
-            <a:schemeClr val="accent1"/>
-          </a:lnRef>
-          <a:fillRef idx="3">
-            <a:schemeClr val="accent1"/>
-          </a:fillRef>
-          <a:effectRef idx="2">
-            <a:schemeClr val="accent1"/>
-          </a:effectRef>
-          <a:fontRef idx="minor">
-            <a:schemeClr val="lt1"/>
-          </a:fontRef>
-        </p:style>
-        <p:txBody>
-          <a:bodyPr rtlCol="0" anchor="ctr"/>
-          <a:lstStyle/>
-          <a:p>
-            <a:pPr algn="ctr"/>
-          </a:p>
-        </p:txBody>
-      </p:sp>
-      <p:sp>
-        <p:nvSpPr>
-          <p:cNvPr id="22" name="Rounded Rectangle 21"/>
-          <p:cNvSpPr/>
-          <p:nvPr/>
-        </p:nvSpPr>
-        <p:spPr>
-          <a:xfrm>
-            <a:off x="594360" y="5660136"/>
-            <a:ext cx="438912" cy="438912"/>
-          </a:xfrm>
-          <a:prstGeom prst="roundRect">
-            <a:avLst>
-              <a:gd name="adj" fmla="val 12000"/>
-            </a:avLst>
-          </a:prstGeom>
-          <a:solidFill>
-            <a:srgbClr val="095292"/>
-          </a:solidFill>
-          <a:ln>
-            <a:noFill/>
-          </a:ln>
-        </p:spPr>
-        <p:style>
-          <a:lnRef idx="1">
-            <a:schemeClr val="accent1"/>
-          </a:lnRef>
-          <a:fillRef idx="3">
-            <a:schemeClr val="accent1"/>
-          </a:fillRef>
-          <a:effectRef idx="2">
-            <a:schemeClr val="accent1"/>
-          </a:effectRef>
-          <a:fontRef idx="minor">
-            <a:schemeClr val="lt1"/>
-          </a:fontRef>
-        </p:style>
-        <p:txBody>
-          <a:bodyPr rtlCol="0" anchor="ctr"/>
-          <a:lstStyle/>
-          <a:p>
-            <a:pPr algn="ctr"/>
-          </a:p>
-        </p:txBody>
-      </p:sp>
-      <p:sp>
-        <p:nvSpPr>
-          <p:cNvPr id="23" name="TextBox 22"/>
-          <p:cNvSpPr txBox="1"/>
-          <p:nvPr/>
-        </p:nvSpPr>
-        <p:spPr>
-          <a:xfrm>
-            <a:off x="594360" y="5660136"/>
-            <a:ext cx="438912" cy="438912"/>
-          </a:xfrm>
-          <a:prstGeom prst="rect">
-            <a:avLst/>
-          </a:prstGeom>
-          <a:noFill/>
-        </p:spPr>
-        <p:txBody>
-          <a:bodyPr wrap="square" anchor="ctr"/>
-          <a:lstStyle/>
-          <a:p>
-            <a:pPr algn="ctr"/>
-            <a:r>
-              <a:rPr sz="1600" b="1" i="0">
-                <a:solidFill>
-                  <a:srgbClr val="FFFFFF"/>
-                </a:solidFill>
-                <a:latin typeface="Calibri"/>
-              </a:rPr>
-              <a:t>5</a:t>
-            </a:r>
-          </a:p>
-        </p:txBody>
-      </p:sp>
-      <p:sp>
-        <p:nvSpPr>
-          <p:cNvPr id="24" name="TextBox 23"/>
-          <p:cNvSpPr txBox="1"/>
-          <p:nvPr/>
-        </p:nvSpPr>
-        <p:spPr>
-          <a:xfrm>
-            <a:off x="1188720" y="5495544"/>
-            <a:ext cx="10271455" cy="786384"/>
-          </a:xfrm>
-          <a:prstGeom prst="rect">
-            <a:avLst/>
-          </a:prstGeom>
-          <a:noFill/>
-        </p:spPr>
-        <p:txBody>
-          <a:bodyPr wrap="square" anchor="ctr"/>
-          <a:lstStyle/>
-          <a:p>
-            <a:r>
-              <a:rPr sz="1500" b="1" i="0">
-                <a:solidFill>
-                  <a:srgbClr val="095292"/>
-                </a:solidFill>
-                <a:latin typeface="Calibri"/>
-              </a:rPr>
-              <a:t>Si termina antes: agregue un setter que valide (por ejemplo, que rechace una edad negativa) y pruebelo desde el main.</a:t>
-            </a:r>
-          </a:p>
-        </p:txBody>
-      </p:sp>
-      <p:sp>
-        <p:nvSpPr>
-          <p:cNvPr id="25" name="TextBox 24"/>
-          <p:cNvSpPr txBox="1"/>
-          <p:nvPr/>
-        </p:nvSpPr>
-        <p:spPr>
-          <a:xfrm>
-            <a:off x="11185855" y="6473952"/>
-            <a:ext cx="640080" cy="274320"/>
-          </a:xfrm>
-          <a:prstGeom prst="rect">
-            <a:avLst/>
-          </a:prstGeom>
-          <a:noFill/>
-        </p:spPr>
-        <p:txBody>
-          <a:bodyPr wrap="square">
-            <a:spAutoFit/>
-          </a:bodyPr>
-          <a:lstStyle/>
-          <a:p>
-            <a:pPr algn="r"/>
-            <a:r>
-              <a:rPr sz="1100" b="0" i="0">
-                <a:solidFill>
-                  <a:srgbClr val="666666"/>
-                </a:solidFill>
-                <a:latin typeface="Calibri"/>
-              </a:rPr>
-              <a:t>35</a:t>
-            </a:r>
-          </a:p>
-        </p:txBody>
-      </p:sp>
-    </p:spTree>
-  </p:cSld>
-  <p:clrMapOvr>
-    <a:masterClrMapping/>
-  </p:clrMapOvr>
-</p:sld>
-</file>
-
-<file path=ppt/slides/slide36.xml><?xml version="1.0" encoding="utf-8"?>
-<p:sld xmlns:a="http://schemas.openxmlformats.org/drawingml/2006/main" xmlns:p="http://schemas.openxmlformats.org/presentationml/2006/main" xmlns:r="http://schemas.openxmlformats.org/officeDocument/2006/relationships">
-  <p:cSld>
-    <p:bg>
-      <p:bgPr>
-        <a:solidFill>
-          <a:srgbClr val="FFFFFF"/>
-        </a:solidFill>
-        <a:effectLst/>
-      </p:bgPr>
-    </p:bg>
-    <p:spTree>
-      <p:nvGrpSpPr>
-        <p:cNvPr id="1" name=""/>
-        <p:cNvGrpSpPr/>
-        <p:nvPr/>
-      </p:nvGrpSpPr>
-      <p:grpSpPr/>
-      <p:sp>
-        <p:nvSpPr>
-          <p:cNvPr id="2" name="Rectangle 1"/>
-          <p:cNvSpPr/>
-          <p:nvPr/>
-        </p:nvSpPr>
-        <p:spPr>
-          <a:xfrm>
-            <a:off x="0" y="0"/>
-            <a:ext cx="12191695" cy="960120"/>
-          </a:xfrm>
-          <a:prstGeom prst="rect">
-            <a:avLst/>
-          </a:prstGeom>
-          <a:solidFill>
-            <a:srgbClr val="095292"/>
-          </a:solidFill>
-          <a:ln>
-            <a:noFill/>
-          </a:ln>
-        </p:spPr>
-        <p:style>
-          <a:lnRef idx="1">
-            <a:schemeClr val="accent1"/>
-          </a:lnRef>
-          <a:fillRef idx="3">
-            <a:schemeClr val="accent1"/>
-          </a:fillRef>
-          <a:effectRef idx="2">
-            <a:schemeClr val="accent1"/>
-          </a:effectRef>
-          <a:fontRef idx="minor">
-            <a:schemeClr val="lt1"/>
-          </a:fontRef>
-        </p:style>
-        <p:txBody>
-          <a:bodyPr rtlCol="0" anchor="ctr"/>
-          <a:lstStyle/>
-          <a:p>
-            <a:pPr algn="ctr"/>
-          </a:p>
-        </p:txBody>
-      </p:sp>
-      <p:sp>
-        <p:nvSpPr>
-          <p:cNvPr id="3" name="Rectangle 2"/>
-          <p:cNvSpPr/>
-          <p:nvPr/>
-        </p:nvSpPr>
-        <p:spPr>
-          <a:xfrm>
-            <a:off x="0" y="960120"/>
-            <a:ext cx="12191695" cy="41148"/>
-          </a:xfrm>
-          <a:prstGeom prst="rect">
-            <a:avLst/>
-          </a:prstGeom>
-          <a:solidFill>
-            <a:srgbClr val="FFD000"/>
-          </a:solidFill>
-          <a:ln>
-            <a:noFill/>
-          </a:ln>
-        </p:spPr>
-        <p:style>
-          <a:lnRef idx="1">
-            <a:schemeClr val="accent1"/>
-          </a:lnRef>
-          <a:fillRef idx="3">
-            <a:schemeClr val="accent1"/>
-          </a:fillRef>
-          <a:effectRef idx="2">
-            <a:schemeClr val="accent1"/>
-          </a:effectRef>
-          <a:fontRef idx="minor">
-            <a:schemeClr val="lt1"/>
-          </a:fontRef>
-        </p:style>
-        <p:txBody>
-          <a:bodyPr rtlCol="0" anchor="ctr"/>
-          <a:lstStyle/>
-          <a:p>
-            <a:pPr algn="ctr"/>
-          </a:p>
-        </p:txBody>
-      </p:sp>
-      <p:sp>
-        <p:nvSpPr>
-          <p:cNvPr id="4" name="TextBox 3"/>
-          <p:cNvSpPr txBox="1"/>
-          <p:nvPr/>
-        </p:nvSpPr>
-        <p:spPr>
-          <a:xfrm>
-            <a:off x="457200" y="164592"/>
-            <a:ext cx="11277295" cy="502920"/>
-          </a:xfrm>
-          <a:prstGeom prst="rect">
-            <a:avLst/>
-          </a:prstGeom>
-          <a:noFill/>
-        </p:spPr>
-        <p:txBody>
-          <a:bodyPr wrap="square">
-            <a:spAutoFit/>
-          </a:bodyPr>
-          <a:lstStyle/>
-          <a:p>
-            <a:r>
-              <a:rPr sz="2600" b="1" i="0">
-                <a:solidFill>
-                  <a:srgbClr val="FFFFFF"/>
-                </a:solidFill>
-                <a:latin typeface="Calibri"/>
-              </a:rPr>
-              <a:t>Antes de entregar — autochequeo</a:t>
-            </a:r>
-          </a:p>
-        </p:txBody>
-      </p:sp>
-      <p:sp>
-        <p:nvSpPr>
-          <p:cNvPr id="5" name="Rounded Rectangle 4"/>
-          <p:cNvSpPr/>
-          <p:nvPr/>
-        </p:nvSpPr>
-        <p:spPr>
-          <a:xfrm>
-            <a:off x="457200" y="1261872"/>
-            <a:ext cx="11277295" cy="566928"/>
-          </a:xfrm>
-          <a:prstGeom prst="roundRect">
-            <a:avLst>
-              <a:gd name="adj" fmla="val 12000"/>
-            </a:avLst>
-          </a:prstGeom>
-          <a:solidFill>
-            <a:srgbClr val="F2F2F2"/>
-          </a:solidFill>
-          <a:ln>
-            <a:noFill/>
-          </a:ln>
-        </p:spPr>
-        <p:style>
-          <a:lnRef idx="1">
-            <a:schemeClr val="accent1"/>
-          </a:lnRef>
-          <a:fillRef idx="3">
-            <a:schemeClr val="accent1"/>
-          </a:fillRef>
-          <a:effectRef idx="2">
-            <a:schemeClr val="accent1"/>
-          </a:effectRef>
-          <a:fontRef idx="minor">
-            <a:schemeClr val="lt1"/>
-          </a:fontRef>
-        </p:style>
-        <p:txBody>
-          <a:bodyPr rtlCol="0" anchor="ctr"/>
-          <a:lstStyle/>
-          <a:p>
-            <a:pPr algn="ctr"/>
-          </a:p>
-        </p:txBody>
-      </p:sp>
-      <p:sp>
-        <p:nvSpPr>
-          <p:cNvPr id="6" name="Rectangle 5"/>
-          <p:cNvSpPr/>
-          <p:nvPr/>
-        </p:nvSpPr>
-        <p:spPr>
-          <a:xfrm>
-            <a:off x="640080" y="1408175"/>
-            <a:ext cx="274320" cy="274320"/>
-          </a:xfrm>
-          <a:prstGeom prst="rect">
-            <a:avLst/>
-          </a:prstGeom>
-          <a:solidFill>
-            <a:srgbClr val="FFFFFF"/>
-          </a:solidFill>
-          <a:ln>
-            <a:solidFill>
-              <a:srgbClr val="333333"/>
-            </a:solidFill>
-          </a:ln>
-        </p:spPr>
-        <p:style>
-          <a:lnRef idx="1">
-            <a:schemeClr val="accent1"/>
-          </a:lnRef>
-          <a:fillRef idx="3">
-            <a:schemeClr val="accent1"/>
-          </a:fillRef>
-          <a:effectRef idx="2">
-            <a:schemeClr val="accent1"/>
-          </a:effectRef>
-          <a:fontRef idx="minor">
-            <a:schemeClr val="lt1"/>
-          </a:fontRef>
-        </p:style>
-        <p:txBody>
-          <a:bodyPr rtlCol="0" anchor="ctr"/>
-          <a:lstStyle/>
-          <a:p>
-            <a:pPr algn="ctr"/>
-          </a:p>
-        </p:txBody>
-      </p:sp>
-      <p:sp>
-        <p:nvSpPr>
-          <p:cNvPr id="7" name="Rectangle 6"/>
-          <p:cNvSpPr/>
-          <p:nvPr/>
-        </p:nvSpPr>
-        <p:spPr>
-          <a:xfrm>
-            <a:off x="640080" y="1408175"/>
-            <a:ext cx="73152" cy="274320"/>
-          </a:xfrm>
-          <a:prstGeom prst="rect">
-            <a:avLst/>
-          </a:prstGeom>
-          <a:solidFill>
-            <a:srgbClr val="269CCB"/>
-          </a:solidFill>
-          <a:ln>
-            <a:noFill/>
-          </a:ln>
-        </p:spPr>
-        <p:style>
-          <a:lnRef idx="1">
-            <a:schemeClr val="accent1"/>
-          </a:lnRef>
-          <a:fillRef idx="3">
-            <a:schemeClr val="accent1"/>
-          </a:fillRef>
-          <a:effectRef idx="2">
-            <a:schemeClr val="accent1"/>
-          </a:effectRef>
-          <a:fontRef idx="minor">
-            <a:schemeClr val="lt1"/>
-          </a:fontRef>
-        </p:style>
-        <p:txBody>
-          <a:bodyPr rtlCol="0" anchor="ctr"/>
-          <a:lstStyle/>
-          <a:p>
-            <a:pPr algn="ctr"/>
-          </a:p>
-        </p:txBody>
-      </p:sp>
-      <p:sp>
-        <p:nvSpPr>
-          <p:cNvPr id="8" name="TextBox 7"/>
-          <p:cNvSpPr txBox="1"/>
-          <p:nvPr/>
-        </p:nvSpPr>
-        <p:spPr>
-          <a:xfrm>
-            <a:off x="1097280" y="1353312"/>
-            <a:ext cx="10362895" cy="402336"/>
-          </a:xfrm>
-          <a:prstGeom prst="rect">
-            <a:avLst/>
-          </a:prstGeom>
-          <a:noFill/>
-        </p:spPr>
-        <p:txBody>
-          <a:bodyPr wrap="square" anchor="ctr"/>
-          <a:lstStyle/>
-          <a:p>
-            <a:r>
-              <a:rPr sz="1500" b="0" i="0">
-                <a:solidFill>
-                  <a:srgbClr val="333333"/>
-                </a:solidFill>
-                <a:latin typeface="Calibri"/>
-              </a:rPr>
-              <a:t>¿Los atributos quedaron private o los deje accesibles desde fuera?</a:t>
-            </a:r>
-          </a:p>
-        </p:txBody>
-      </p:sp>
-      <p:sp>
-        <p:nvSpPr>
-          <p:cNvPr id="9" name="Rounded Rectangle 8"/>
-          <p:cNvSpPr/>
-          <p:nvPr/>
-        </p:nvSpPr>
-        <p:spPr>
-          <a:xfrm>
-            <a:off x="457200" y="1938528"/>
-            <a:ext cx="11277295" cy="566928"/>
-          </a:xfrm>
-          <a:prstGeom prst="roundRect">
-            <a:avLst>
-              <a:gd name="adj" fmla="val 12000"/>
-            </a:avLst>
-          </a:prstGeom>
-          <a:solidFill>
-            <a:srgbClr val="F2F2F2"/>
-          </a:solidFill>
-          <a:ln>
-            <a:noFill/>
-          </a:ln>
-        </p:spPr>
-        <p:style>
-          <a:lnRef idx="1">
-            <a:schemeClr val="accent1"/>
-          </a:lnRef>
-          <a:fillRef idx="3">
-            <a:schemeClr val="accent1"/>
-          </a:fillRef>
-          <a:effectRef idx="2">
-            <a:schemeClr val="accent1"/>
-          </a:effectRef>
-          <a:fontRef idx="minor">
-            <a:schemeClr val="lt1"/>
-          </a:fontRef>
-        </p:style>
-        <p:txBody>
-          <a:bodyPr rtlCol="0" anchor="ctr"/>
-          <a:lstStyle/>
-          <a:p>
-            <a:pPr algn="ctr"/>
-          </a:p>
-        </p:txBody>
-      </p:sp>
-      <p:sp>
-        <p:nvSpPr>
-          <p:cNvPr id="10" name="Rectangle 9"/>
-          <p:cNvSpPr/>
-          <p:nvPr/>
-        </p:nvSpPr>
-        <p:spPr>
-          <a:xfrm>
-            <a:off x="640080" y="2084832"/>
-            <a:ext cx="274320" cy="274320"/>
-          </a:xfrm>
-          <a:prstGeom prst="rect">
-            <a:avLst/>
-          </a:prstGeom>
-          <a:solidFill>
-            <a:srgbClr val="FFFFFF"/>
-          </a:solidFill>
-          <a:ln>
-            <a:solidFill>
-              <a:srgbClr val="333333"/>
-            </a:solidFill>
-          </a:ln>
-        </p:spPr>
-        <p:style>
-          <a:lnRef idx="1">
-            <a:schemeClr val="accent1"/>
-          </a:lnRef>
-          <a:fillRef idx="3">
-            <a:schemeClr val="accent1"/>
-          </a:fillRef>
-          <a:effectRef idx="2">
-            <a:schemeClr val="accent1"/>
-          </a:effectRef>
-          <a:fontRef idx="minor">
-            <a:schemeClr val="lt1"/>
-          </a:fontRef>
-        </p:style>
-        <p:txBody>
-          <a:bodyPr rtlCol="0" anchor="ctr"/>
-          <a:lstStyle/>
-          <a:p>
-            <a:pPr algn="ctr"/>
-          </a:p>
-        </p:txBody>
-      </p:sp>
-      <p:sp>
-        <p:nvSpPr>
-          <p:cNvPr id="11" name="Rectangle 10"/>
-          <p:cNvSpPr/>
-          <p:nvPr/>
-        </p:nvSpPr>
-        <p:spPr>
-          <a:xfrm>
-            <a:off x="640080" y="2084832"/>
-            <a:ext cx="73152" cy="274320"/>
-          </a:xfrm>
-          <a:prstGeom prst="rect">
-            <a:avLst/>
-          </a:prstGeom>
-          <a:solidFill>
-            <a:srgbClr val="269CCB"/>
-          </a:solidFill>
-          <a:ln>
-            <a:noFill/>
-          </a:ln>
-        </p:spPr>
-        <p:style>
-          <a:lnRef idx="1">
-            <a:schemeClr val="accent1"/>
-          </a:lnRef>
-          <a:fillRef idx="3">
-            <a:schemeClr val="accent1"/>
-          </a:fillRef>
-          <a:effectRef idx="2">
-            <a:schemeClr val="accent1"/>
-          </a:effectRef>
-          <a:fontRef idx="minor">
-            <a:schemeClr val="lt1"/>
-          </a:fontRef>
-        </p:style>
-        <p:txBody>
-          <a:bodyPr rtlCol="0" anchor="ctr"/>
-          <a:lstStyle/>
-          <a:p>
-            <a:pPr algn="ctr"/>
-          </a:p>
-        </p:txBody>
-      </p:sp>
-      <p:sp>
-        <p:nvSpPr>
-          <p:cNvPr id="12" name="TextBox 11"/>
-          <p:cNvSpPr txBox="1"/>
-          <p:nvPr/>
-        </p:nvSpPr>
-        <p:spPr>
-          <a:xfrm>
-            <a:off x="1097280" y="2029968"/>
-            <a:ext cx="10362895" cy="402336"/>
-          </a:xfrm>
-          <a:prstGeom prst="rect">
-            <a:avLst/>
-          </a:prstGeom>
-          <a:noFill/>
-        </p:spPr>
-        <p:txBody>
-          <a:bodyPr wrap="square" anchor="ctr"/>
-          <a:lstStyle/>
-          <a:p>
-            <a:r>
-              <a:rPr sz="1500" b="0" i="0">
-                <a:solidFill>
-                  <a:srgbClr val="333333"/>
-                </a:solidFill>
-                <a:latin typeface="Calibri"/>
-              </a:rPr>
-              <a:t>¿El constructor inicializa TODOS los atributos?</a:t>
-            </a:r>
-          </a:p>
-        </p:txBody>
-      </p:sp>
-      <p:sp>
-        <p:nvSpPr>
-          <p:cNvPr id="13" name="Rounded Rectangle 12"/>
-          <p:cNvSpPr/>
-          <p:nvPr/>
-        </p:nvSpPr>
-        <p:spPr>
-          <a:xfrm>
-            <a:off x="457200" y="2615184"/>
-            <a:ext cx="11277295" cy="566928"/>
-          </a:xfrm>
-          <a:prstGeom prst="roundRect">
-            <a:avLst>
-              <a:gd name="adj" fmla="val 12000"/>
-            </a:avLst>
-          </a:prstGeom>
-          <a:solidFill>
-            <a:srgbClr val="F2F2F2"/>
-          </a:solidFill>
-          <a:ln>
-            <a:noFill/>
-          </a:ln>
-        </p:spPr>
-        <p:style>
-          <a:lnRef idx="1">
-            <a:schemeClr val="accent1"/>
-          </a:lnRef>
-          <a:fillRef idx="3">
-            <a:schemeClr val="accent1"/>
-          </a:fillRef>
-          <a:effectRef idx="2">
-            <a:schemeClr val="accent1"/>
-          </a:effectRef>
-          <a:fontRef idx="minor">
-            <a:schemeClr val="lt1"/>
-          </a:fontRef>
-        </p:style>
-        <p:txBody>
-          <a:bodyPr rtlCol="0" anchor="ctr"/>
-          <a:lstStyle/>
-          <a:p>
-            <a:pPr algn="ctr"/>
-          </a:p>
-        </p:txBody>
-      </p:sp>
-      <p:sp>
-        <p:nvSpPr>
-          <p:cNvPr id="14" name="Rectangle 13"/>
-          <p:cNvSpPr/>
-          <p:nvPr/>
-        </p:nvSpPr>
-        <p:spPr>
-          <a:xfrm>
-            <a:off x="640080" y="2761488"/>
-            <a:ext cx="274320" cy="274320"/>
-          </a:xfrm>
-          <a:prstGeom prst="rect">
-            <a:avLst/>
-          </a:prstGeom>
-          <a:solidFill>
-            <a:srgbClr val="FFFFFF"/>
-          </a:solidFill>
-          <a:ln>
-            <a:solidFill>
-              <a:srgbClr val="333333"/>
-            </a:solidFill>
-          </a:ln>
-        </p:spPr>
-        <p:style>
-          <a:lnRef idx="1">
-            <a:schemeClr val="accent1"/>
-          </a:lnRef>
-          <a:fillRef idx="3">
-            <a:schemeClr val="accent1"/>
-          </a:fillRef>
-          <a:effectRef idx="2">
-            <a:schemeClr val="accent1"/>
-          </a:effectRef>
-          <a:fontRef idx="minor">
-            <a:schemeClr val="lt1"/>
-          </a:fontRef>
-        </p:style>
-        <p:txBody>
-          <a:bodyPr rtlCol="0" anchor="ctr"/>
-          <a:lstStyle/>
-          <a:p>
-            <a:pPr algn="ctr"/>
-          </a:p>
-        </p:txBody>
-      </p:sp>
-      <p:sp>
-        <p:nvSpPr>
-          <p:cNvPr id="15" name="Rectangle 14"/>
-          <p:cNvSpPr/>
-          <p:nvPr/>
-        </p:nvSpPr>
-        <p:spPr>
-          <a:xfrm>
-            <a:off x="640080" y="2761488"/>
-            <a:ext cx="73152" cy="274320"/>
-          </a:xfrm>
-          <a:prstGeom prst="rect">
-            <a:avLst/>
-          </a:prstGeom>
-          <a:solidFill>
-            <a:srgbClr val="269CCB"/>
-          </a:solidFill>
-          <a:ln>
-            <a:noFill/>
-          </a:ln>
-        </p:spPr>
-        <p:style>
-          <a:lnRef idx="1">
-            <a:schemeClr val="accent1"/>
-          </a:lnRef>
-          <a:fillRef idx="3">
-            <a:schemeClr val="accent1"/>
-          </a:fillRef>
-          <a:effectRef idx="2">
-            <a:schemeClr val="accent1"/>
-          </a:effectRef>
-          <a:fontRef idx="minor">
-            <a:schemeClr val="lt1"/>
-          </a:fontRef>
-        </p:style>
-        <p:txBody>
-          <a:bodyPr rtlCol="0" anchor="ctr"/>
-          <a:lstStyle/>
-          <a:p>
-            <a:pPr algn="ctr"/>
-          </a:p>
-        </p:txBody>
-      </p:sp>
-      <p:sp>
-        <p:nvSpPr>
-          <p:cNvPr id="16" name="TextBox 15"/>
-          <p:cNvSpPr txBox="1"/>
-          <p:nvPr/>
-        </p:nvSpPr>
-        <p:spPr>
-          <a:xfrm>
-            <a:off x="1097280" y="2706624"/>
-            <a:ext cx="10362895" cy="402336"/>
-          </a:xfrm>
-          <a:prstGeom prst="rect">
-            <a:avLst/>
-          </a:prstGeom>
-          <a:noFill/>
-        </p:spPr>
-        <p:txBody>
-          <a:bodyPr wrap="square" anchor="ctr"/>
-          <a:lstStyle/>
-          <a:p>
-            <a:r>
-              <a:rPr sz="1500" b="0" i="0">
-                <a:solidFill>
-                  <a:srgbClr val="333333"/>
-                </a:solidFill>
-                <a:latin typeface="Calibri"/>
-              </a:rPr>
-              <a:t>¿Sobreescribi toString() o estoy imprimiendo la direccion de memoria?</a:t>
-            </a:r>
-          </a:p>
-        </p:txBody>
-      </p:sp>
-      <p:sp>
-        <p:nvSpPr>
-          <p:cNvPr id="17" name="TextBox 16"/>
-          <p:cNvSpPr txBox="1"/>
-          <p:nvPr/>
-        </p:nvSpPr>
-        <p:spPr>
-          <a:xfrm>
-            <a:off x="11185855" y="6473952"/>
-            <a:ext cx="640080" cy="274320"/>
-          </a:xfrm>
-          <a:prstGeom prst="rect">
-            <a:avLst/>
-          </a:prstGeom>
-          <a:noFill/>
-        </p:spPr>
-        <p:txBody>
-          <a:bodyPr wrap="square">
-            <a:spAutoFit/>
-          </a:bodyPr>
-          <a:lstStyle/>
-          <a:p>
-            <a:pPr algn="r"/>
-            <a:r>
-              <a:rPr sz="1100" b="0" i="0">
-                <a:solidFill>
-                  <a:srgbClr val="666666"/>
-                </a:solidFill>
-                <a:latin typeface="Calibri"/>
-              </a:rPr>
-              <a:t>36</a:t>
-            </a:r>
-          </a:p>
-        </p:txBody>
-      </p:sp>
-    </p:spTree>
-  </p:cSld>
-  <p:clrMapOvr>
-    <a:masterClrMapping/>
-  </p:clrMapOvr>
-</p:sld>
-</file>
-
-<file path=ppt/slides/slide37.xml><?xml version="1.0" encoding="utf-8"?>
-<p:sld xmlns:a="http://schemas.openxmlformats.org/drawingml/2006/main" xmlns:p="http://schemas.openxmlformats.org/presentationml/2006/main" xmlns:r="http://schemas.openxmlformats.org/officeDocument/2006/relationships">
-  <p:cSld>
-    <p:bg>
-      <p:bgPr>
-        <a:solidFill>
-          <a:srgbClr val="FFFFFF"/>
-        </a:solidFill>
-        <a:effectLst/>
-      </p:bgPr>
-    </p:bg>
-    <p:spTree>
-      <p:nvGrpSpPr>
-        <p:cNvPr id="1" name=""/>
-        <p:cNvGrpSpPr/>
-        <p:nvPr/>
-      </p:nvGrpSpPr>
-      <p:grpSpPr/>
-      <p:sp>
-        <p:nvSpPr>
-          <p:cNvPr id="2" name="Rectangle 1"/>
-          <p:cNvSpPr/>
-          <p:nvPr/>
-        </p:nvSpPr>
-        <p:spPr>
-          <a:xfrm>
-            <a:off x="0" y="0"/>
-            <a:ext cx="12191695" cy="960120"/>
-          </a:xfrm>
-          <a:prstGeom prst="rect">
-            <a:avLst/>
-          </a:prstGeom>
-          <a:solidFill>
-            <a:srgbClr val="095292"/>
-          </a:solidFill>
-          <a:ln>
-            <a:noFill/>
-          </a:ln>
-        </p:spPr>
-        <p:style>
-          <a:lnRef idx="1">
-            <a:schemeClr val="accent1"/>
-          </a:lnRef>
-          <a:fillRef idx="3">
-            <a:schemeClr val="accent1"/>
-          </a:fillRef>
-          <a:effectRef idx="2">
-            <a:schemeClr val="accent1"/>
-          </a:effectRef>
-          <a:fontRef idx="minor">
-            <a:schemeClr val="lt1"/>
-          </a:fontRef>
-        </p:style>
-        <p:txBody>
-          <a:bodyPr rtlCol="0" anchor="ctr"/>
-          <a:lstStyle/>
-          <a:p>
-            <a:pPr algn="ctr"/>
-          </a:p>
-        </p:txBody>
-      </p:sp>
-      <p:sp>
-        <p:nvSpPr>
-          <p:cNvPr id="3" name="Rectangle 2"/>
-          <p:cNvSpPr/>
-          <p:nvPr/>
-        </p:nvSpPr>
-        <p:spPr>
-          <a:xfrm>
-            <a:off x="0" y="960120"/>
-            <a:ext cx="12191695" cy="41148"/>
-          </a:xfrm>
-          <a:prstGeom prst="rect">
-            <a:avLst/>
-          </a:prstGeom>
-          <a:solidFill>
-            <a:srgbClr val="FFD000"/>
-          </a:solidFill>
-          <a:ln>
-            <a:noFill/>
-          </a:ln>
-        </p:spPr>
-        <p:style>
-          <a:lnRef idx="1">
-            <a:schemeClr val="accent1"/>
-          </a:lnRef>
-          <a:fillRef idx="3">
-            <a:schemeClr val="accent1"/>
-          </a:fillRef>
-          <a:effectRef idx="2">
-            <a:schemeClr val="accent1"/>
-          </a:effectRef>
-          <a:fontRef idx="minor">
-            <a:schemeClr val="lt1"/>
-          </a:fontRef>
-        </p:style>
-        <p:txBody>
-          <a:bodyPr rtlCol="0" anchor="ctr"/>
-          <a:lstStyle/>
-          <a:p>
-            <a:pPr algn="ctr"/>
-          </a:p>
-        </p:txBody>
-      </p:sp>
-      <p:sp>
-        <p:nvSpPr>
-          <p:cNvPr id="4" name="TextBox 3"/>
-          <p:cNvSpPr txBox="1"/>
-          <p:nvPr/>
-        </p:nvSpPr>
-        <p:spPr>
-          <a:xfrm>
-            <a:off x="457200" y="164592"/>
-            <a:ext cx="11277295" cy="502920"/>
-          </a:xfrm>
-          <a:prstGeom prst="rect">
-            <a:avLst/>
-          </a:prstGeom>
-          <a:noFill/>
-        </p:spPr>
-        <p:txBody>
-          <a:bodyPr wrap="square">
-            <a:spAutoFit/>
-          </a:bodyPr>
-          <a:lstStyle/>
-          <a:p>
-            <a:r>
-              <a:rPr sz="2600" b="1" i="0">
-                <a:solidFill>
-                  <a:srgbClr val="FFFFFF"/>
-                </a:solidFill>
-                <a:latin typeface="Calibri"/>
-              </a:rPr>
-              <a:t>Criterios de exito / entregable</a:t>
-            </a:r>
-          </a:p>
-        </p:txBody>
-      </p:sp>
-      <p:sp>
-        <p:nvSpPr>
-          <p:cNvPr id="5" name="TextBox 4"/>
-          <p:cNvSpPr txBox="1"/>
-          <p:nvPr/>
-        </p:nvSpPr>
-        <p:spPr>
-          <a:xfrm>
-            <a:off x="457200" y="1170432"/>
-            <a:ext cx="11277295" cy="5230368"/>
-          </a:xfrm>
-          <a:prstGeom prst="rect">
-            <a:avLst/>
-          </a:prstGeom>
-          <a:noFill/>
-        </p:spPr>
-        <p:txBody>
-          <a:bodyPr wrap="square">
-            <a:spAutoFit/>
-          </a:bodyPr>
-          <a:lstStyle/>
-          <a:p>
-            <a:pPr>
-              <a:spcAft>
-                <a:spcPts val="800"/>
-              </a:spcAft>
-            </a:pPr>
-            <a:r>
-              <a:rPr sz="2000" b="0" i="0">
-                <a:solidFill>
-                  <a:srgbClr val="333333"/>
-                </a:solidFill>
-                <a:latin typeface="Calibri"/>
-              </a:rPr>
-              <a:t>–   </a:t>
-            </a:r>
-            <a:r>
-              <a:rPr sz="2000" b="1" i="0">
-                <a:solidFill>
-                  <a:srgbClr val="333333"/>
-                </a:solidFill>
-                <a:latin typeface="Calibri"/>
-              </a:rPr>
-              <a:t>Entregable:</a:t>
-            </a:r>
-            <a:r>
-              <a:rPr sz="2000" b="0" i="0">
-                <a:solidFill>
-                  <a:srgbClr val="333333"/>
-                </a:solidFill>
-                <a:latin typeface="Calibri"/>
-              </a:rPr>
-              <a:t> Proyecto Java con la clase Mascota (atributos privados, constructor y toString) y un main que crea dos objetos distintos</a:t>
-            </a:r>
-          </a:p>
-          <a:p>
-            <a:pPr>
-              <a:spcAft>
-                <a:spcPts val="800"/>
-              </a:spcAft>
-            </a:pPr>
-            <a:r>
-              <a:rPr sz="2000" b="0" i="0">
-                <a:solidFill>
-                  <a:srgbClr val="333333"/>
-                </a:solidFill>
-                <a:latin typeface="Calibri"/>
-              </a:rPr>
-              <a:t>–   </a:t>
-            </a:r>
-            <a:r>
-              <a:rPr sz="2000" b="1" i="0">
-                <a:solidFill>
-                  <a:srgbClr val="333333"/>
-                </a:solidFill>
-                <a:latin typeface="Calibri"/>
-              </a:rPr>
-              <a:t>Exito:</a:t>
-            </a:r>
-            <a:r>
-              <a:rPr sz="2000" b="0" i="0">
-                <a:solidFill>
-                  <a:srgbClr val="333333"/>
-                </a:solidFill>
-                <a:latin typeface="Calibri"/>
-              </a:rPr>
-              <a:t> El proyecto compila y ejecuta sin errores en VS Code.</a:t>
-            </a:r>
-          </a:p>
-          <a:p>
-            <a:pPr>
-              <a:spcAft>
-                <a:spcPts val="800"/>
-              </a:spcAft>
-            </a:pPr>
-            <a:r>
-              <a:rPr sz="2000" b="0" i="0">
-                <a:solidFill>
-                  <a:srgbClr val="333333"/>
-                </a:solidFill>
-                <a:latin typeface="Calibri"/>
-              </a:rPr>
-              <a:t>–   </a:t>
-            </a:r>
-            <a:r>
-              <a:rPr sz="2000" b="1" i="0">
-                <a:solidFill>
-                  <a:srgbClr val="333333"/>
-                </a:solidFill>
-                <a:latin typeface="Calibri"/>
-              </a:rPr>
-              <a:t>Exito:</a:t>
-            </a:r>
-            <a:r>
-              <a:rPr sz="2000" b="0" i="0">
-                <a:solidFill>
-                  <a:srgbClr val="333333"/>
-                </a:solidFill>
-                <a:latin typeface="Calibri"/>
-              </a:rPr>
-              <a:t> La clase Mascota tiene atributos private y un constructor que los inicializa todos.</a:t>
-            </a:r>
-          </a:p>
-          <a:p>
-            <a:pPr>
-              <a:spcAft>
-                <a:spcPts val="800"/>
-              </a:spcAft>
-            </a:pPr>
-            <a:r>
-              <a:rPr sz="2000" b="0" i="0">
-                <a:solidFill>
-                  <a:srgbClr val="333333"/>
-                </a:solidFill>
-                <a:latin typeface="Calibri"/>
-              </a:rPr>
-              <a:t>–   </a:t>
-            </a:r>
-            <a:r>
-              <a:rPr sz="2000" b="1" i="0">
-                <a:solidFill>
-                  <a:srgbClr val="333333"/>
-                </a:solidFill>
-                <a:latin typeface="Calibri"/>
-              </a:rPr>
-              <a:t>Exito:</a:t>
-            </a:r>
-            <a:r>
-              <a:rPr sz="2000" b="0" i="0">
-                <a:solidFill>
-                  <a:srgbClr val="333333"/>
-                </a:solidFill>
-                <a:latin typeface="Calibri"/>
-              </a:rPr>
-              <a:t> El main crea dos objetos distintos de la misma clase.</a:t>
-            </a:r>
-          </a:p>
-          <a:p>
-            <a:pPr>
-              <a:spcAft>
-                <a:spcPts val="800"/>
-              </a:spcAft>
-            </a:pPr>
-            <a:r>
-              <a:rPr sz="2000" b="0" i="0">
-                <a:solidFill>
-                  <a:srgbClr val="333333"/>
-                </a:solidFill>
-                <a:latin typeface="Calibri"/>
-              </a:rPr>
-              <a:t>–   </a:t>
-            </a:r>
-            <a:r>
-              <a:rPr sz="2000" b="1" i="0">
-                <a:solidFill>
-                  <a:srgbClr val="333333"/>
-                </a:solidFill>
-                <a:latin typeface="Calibri"/>
-              </a:rPr>
-              <a:t>Exito:</a:t>
-            </a:r>
-            <a:r>
-              <a:rPr sz="2000" b="0" i="0">
-                <a:solidFill>
-                  <a:srgbClr val="333333"/>
-                </a:solidFill>
-                <a:latin typeface="Calibri"/>
-              </a:rPr>
-              <a:t> Al imprimir una mascota se ve texto legible, no vetcare.Mascota@6d06d69c.</a:t>
-            </a:r>
-          </a:p>
-          <a:p>
-            <a:pPr>
-              <a:spcAft>
-                <a:spcPts val="800"/>
-              </a:spcAft>
-            </a:pPr>
-            <a:r>
-              <a:rPr sz="2000" b="0" i="0">
-                <a:solidFill>
-                  <a:srgbClr val="333333"/>
-                </a:solidFill>
-                <a:latin typeface="Calibri"/>
-              </a:rPr>
-              <a:t>–   </a:t>
-            </a:r>
-            <a:r>
-              <a:rPr sz="2000" b="1" i="0">
-                <a:solidFill>
-                  <a:srgbClr val="333333"/>
-                </a:solidFill>
-                <a:latin typeface="Calibri"/>
-              </a:rPr>
-              <a:t>Entrega en la plataforma del curso</a:t>
-            </a:r>
-            <a:r>
-              <a:rPr sz="2000" b="0" i="0">
-                <a:solidFill>
-                  <a:srgbClr val="333333"/>
-                </a:solidFill>
-                <a:latin typeface="Calibri"/>
-              </a:rPr>
-              <a:t> — en la fecha que indique el docente.</a:t>
-            </a:r>
-          </a:p>
-        </p:txBody>
-      </p:sp>
-      <p:sp>
-        <p:nvSpPr>
-          <p:cNvPr id="6" name="TextBox 5"/>
-          <p:cNvSpPr txBox="1"/>
-          <p:nvPr/>
-        </p:nvSpPr>
-        <p:spPr>
-          <a:xfrm>
-            <a:off x="11185855" y="6473952"/>
-            <a:ext cx="640080" cy="274320"/>
-          </a:xfrm>
-          <a:prstGeom prst="rect">
-            <a:avLst/>
-          </a:prstGeom>
-          <a:noFill/>
-        </p:spPr>
-        <p:txBody>
-          <a:bodyPr wrap="square">
-            <a:spAutoFit/>
-          </a:bodyPr>
-          <a:lstStyle/>
-          <a:p>
-            <a:pPr algn="r"/>
-            <a:r>
-              <a:rPr sz="1100" b="0" i="0">
-                <a:solidFill>
-                  <a:srgbClr val="666666"/>
-                </a:solidFill>
-                <a:latin typeface="Calibri"/>
-              </a:rPr>
-              <a:t>37</a:t>
-            </a:r>
-          </a:p>
-        </p:txBody>
-      </p:sp>
-    </p:spTree>
-  </p:cSld>
-  <p:clrMapOvr>
-    <a:masterClrMapping/>
-  </p:clrMapOvr>
-</p:sld>
-</file>
-
-<file path=ppt/slides/slide38.xml><?xml version="1.0" encoding="utf-8"?>
-<p:sld xmlns:a="http://schemas.openxmlformats.org/drawingml/2006/main" xmlns:p="http://schemas.openxmlformats.org/presentationml/2006/main" xmlns:r="http://schemas.openxmlformats.org/officeDocument/2006/relationships">
-  <p:cSld>
-    <p:bg>
-      <p:bgPr>
-        <a:solidFill>
-          <a:srgbClr val="FFFFFF"/>
-        </a:solidFill>
-        <a:effectLst/>
-      </p:bgPr>
-    </p:bg>
-    <p:spTree>
-      <p:nvGrpSpPr>
-        <p:cNvPr id="1" name=""/>
-        <p:cNvGrpSpPr/>
-        <p:nvPr/>
-      </p:nvGrpSpPr>
-      <p:grpSpPr/>
-      <p:sp>
-        <p:nvSpPr>
-          <p:cNvPr id="2" name="Rectangle 1"/>
-          <p:cNvSpPr/>
-          <p:nvPr/>
-        </p:nvSpPr>
-        <p:spPr>
-          <a:xfrm>
-            <a:off x="0" y="0"/>
-            <a:ext cx="12191695" cy="960120"/>
-          </a:xfrm>
-          <a:prstGeom prst="rect">
-            <a:avLst/>
-          </a:prstGeom>
-          <a:solidFill>
-            <a:srgbClr val="095292"/>
-          </a:solidFill>
-          <a:ln>
-            <a:noFill/>
-          </a:ln>
-        </p:spPr>
-        <p:style>
-          <a:lnRef idx="1">
-            <a:schemeClr val="accent1"/>
-          </a:lnRef>
-          <a:fillRef idx="3">
-            <a:schemeClr val="accent1"/>
-          </a:fillRef>
-          <a:effectRef idx="2">
-            <a:schemeClr val="accent1"/>
-          </a:effectRef>
-          <a:fontRef idx="minor">
-            <a:schemeClr val="lt1"/>
-          </a:fontRef>
-        </p:style>
-        <p:txBody>
-          <a:bodyPr rtlCol="0" anchor="ctr"/>
-          <a:lstStyle/>
-          <a:p>
-            <a:pPr algn="ctr"/>
-          </a:p>
-        </p:txBody>
-      </p:sp>
-      <p:sp>
-        <p:nvSpPr>
-          <p:cNvPr id="3" name="Rectangle 2"/>
-          <p:cNvSpPr/>
-          <p:nvPr/>
-        </p:nvSpPr>
-        <p:spPr>
-          <a:xfrm>
-            <a:off x="0" y="960120"/>
-            <a:ext cx="12191695" cy="41148"/>
-          </a:xfrm>
-          <a:prstGeom prst="rect">
-            <a:avLst/>
-          </a:prstGeom>
-          <a:solidFill>
-            <a:srgbClr val="FFD000"/>
-          </a:solidFill>
-          <a:ln>
-            <a:noFill/>
-          </a:ln>
-        </p:spPr>
-        <p:style>
-          <a:lnRef idx="1">
-            <a:schemeClr val="accent1"/>
-          </a:lnRef>
-          <a:fillRef idx="3">
-            <a:schemeClr val="accent1"/>
-          </a:fillRef>
-          <a:effectRef idx="2">
-            <a:schemeClr val="accent1"/>
-          </a:effectRef>
-          <a:fontRef idx="minor">
-            <a:schemeClr val="lt1"/>
-          </a:fontRef>
-        </p:style>
-        <p:txBody>
-          <a:bodyPr rtlCol="0" anchor="ctr"/>
-          <a:lstStyle/>
-          <a:p>
-            <a:pPr algn="ctr"/>
-          </a:p>
-        </p:txBody>
-      </p:sp>
-      <p:sp>
-        <p:nvSpPr>
-          <p:cNvPr id="4" name="TextBox 3"/>
-          <p:cNvSpPr txBox="1"/>
-          <p:nvPr/>
-        </p:nvSpPr>
-        <p:spPr>
-          <a:xfrm>
-            <a:off x="457200" y="164592"/>
-            <a:ext cx="11277295" cy="502920"/>
-          </a:xfrm>
-          <a:prstGeom prst="rect">
-            <a:avLst/>
-          </a:prstGeom>
-          <a:noFill/>
-        </p:spPr>
-        <p:txBody>
-          <a:bodyPr wrap="square">
-            <a:spAutoFit/>
-          </a:bodyPr>
-          <a:lstStyle/>
-          <a:p>
-            <a:r>
-              <a:rPr sz="2600" b="1" i="0">
-                <a:solidFill>
-                  <a:srgbClr val="FFFFFF"/>
-                </a:solidFill>
-                <a:latin typeface="Calibri"/>
-              </a:rPr>
-              <a:t>Para el PI esta semana</a:t>
-            </a:r>
-          </a:p>
-        </p:txBody>
-      </p:sp>
-      <p:sp>
-        <p:nvSpPr>
-          <p:cNvPr id="5" name="Rounded Rectangle 4"/>
-          <p:cNvSpPr/>
-          <p:nvPr/>
-        </p:nvSpPr>
-        <p:spPr>
-          <a:xfrm>
-            <a:off x="457200" y="1261872"/>
-            <a:ext cx="11277295" cy="1051560"/>
-          </a:xfrm>
-          <a:prstGeom prst="roundRect">
-            <a:avLst>
-              <a:gd name="adj" fmla="val 12000"/>
-            </a:avLst>
-          </a:prstGeom>
-          <a:solidFill>
-            <a:srgbClr val="E8F4FA"/>
-          </a:solidFill>
-          <a:ln>
-            <a:noFill/>
-          </a:ln>
-        </p:spPr>
-        <p:style>
-          <a:lnRef idx="1">
-            <a:schemeClr val="accent1"/>
-          </a:lnRef>
-          <a:fillRef idx="3">
-            <a:schemeClr val="accent1"/>
-          </a:fillRef>
-          <a:effectRef idx="2">
-            <a:schemeClr val="accent1"/>
-          </a:effectRef>
-          <a:fontRef idx="minor">
-            <a:schemeClr val="lt1"/>
-          </a:fontRef>
-        </p:style>
-        <p:txBody>
-          <a:bodyPr rtlCol="0" anchor="ctr"/>
-          <a:lstStyle/>
-          <a:p>
-            <a:pPr algn="ctr"/>
-          </a:p>
-        </p:txBody>
-      </p:sp>
-      <p:sp>
-        <p:nvSpPr>
-          <p:cNvPr id="6" name="Rectangle 5"/>
-          <p:cNvSpPr/>
-          <p:nvPr/>
-        </p:nvSpPr>
-        <p:spPr>
-          <a:xfrm>
-            <a:off x="457200" y="1261872"/>
-            <a:ext cx="128016" cy="1051560"/>
-          </a:xfrm>
-          <a:prstGeom prst="rect">
-            <a:avLst/>
-          </a:prstGeom>
-          <a:solidFill>
-            <a:srgbClr val="269CCB"/>
-          </a:solidFill>
-          <a:ln>
-            <a:noFill/>
-          </a:ln>
-        </p:spPr>
-        <p:style>
-          <a:lnRef idx="1">
-            <a:schemeClr val="accent1"/>
-          </a:lnRef>
-          <a:fillRef idx="3">
-            <a:schemeClr val="accent1"/>
-          </a:fillRef>
-          <a:effectRef idx="2">
-            <a:schemeClr val="accent1"/>
-          </a:effectRef>
-          <a:fontRef idx="minor">
-            <a:schemeClr val="lt1"/>
-          </a:fontRef>
-        </p:style>
-        <p:txBody>
-          <a:bodyPr rtlCol="0" anchor="ctr"/>
-          <a:lstStyle/>
-          <a:p>
-            <a:pPr algn="ctr"/>
-          </a:p>
-        </p:txBody>
-      </p:sp>
-      <p:sp>
-        <p:nvSpPr>
-          <p:cNvPr id="7" name="TextBox 6"/>
-          <p:cNvSpPr txBox="1"/>
-          <p:nvPr/>
-        </p:nvSpPr>
-        <p:spPr>
-          <a:xfrm>
-            <a:off x="777240" y="1399031"/>
-            <a:ext cx="10774375" cy="822959"/>
-          </a:xfrm>
-          <a:prstGeom prst="rect">
-            <a:avLst/>
-          </a:prstGeom>
-          <a:noFill/>
-        </p:spPr>
-        <p:txBody>
-          <a:bodyPr wrap="square">
-            <a:spAutoFit/>
-          </a:bodyPr>
-          <a:lstStyle/>
-          <a:p>
-            <a:r>
-              <a:rPr sz="1200" b="1" i="0">
-                <a:solidFill>
-                  <a:srgbClr val="269CCB"/>
-                </a:solidFill>
-                <a:latin typeface="Calibri"/>
-              </a:rPr>
-              <a:t>Info</a:t>
-            </a:r>
-          </a:p>
-          <a:p>
-            <a:pPr>
-              <a:spcBef>
-                <a:spcPts val="400"/>
-              </a:spcBef>
-            </a:pPr>
-            <a:r>
-              <a:rPr sz="1400" b="0" i="0">
-                <a:solidFill>
-                  <a:srgbClr val="333333"/>
-                </a:solidFill>
-                <a:latin typeface="Calibri"/>
-              </a:rPr>
-              <a:t>Hito: Entorno de desarrollo listo y la primera clase del dominio VetCare escrita</a:t>
-            </a:r>
-          </a:p>
-        </p:txBody>
-      </p:sp>
-      <p:sp>
-        <p:nvSpPr>
-          <p:cNvPr id="8" name="Rounded Rectangle 7"/>
-          <p:cNvSpPr/>
-          <p:nvPr/>
-        </p:nvSpPr>
-        <p:spPr>
-          <a:xfrm>
-            <a:off x="457200" y="2478024"/>
-            <a:ext cx="11277295" cy="1051560"/>
-          </a:xfrm>
-          <a:prstGeom prst="roundRect">
-            <a:avLst>
-              <a:gd name="adj" fmla="val 12000"/>
-            </a:avLst>
-          </a:prstGeom>
-          <a:solidFill>
-            <a:srgbClr val="FFF8E1"/>
-          </a:solidFill>
-          <a:ln>
-            <a:noFill/>
-          </a:ln>
-        </p:spPr>
-        <p:style>
-          <a:lnRef idx="1">
-            <a:schemeClr val="accent1"/>
-          </a:lnRef>
-          <a:fillRef idx="3">
-            <a:schemeClr val="accent1"/>
-          </a:fillRef>
-          <a:effectRef idx="2">
-            <a:schemeClr val="accent1"/>
-          </a:effectRef>
-          <a:fontRef idx="minor">
-            <a:schemeClr val="lt1"/>
-          </a:fontRef>
-        </p:style>
-        <p:txBody>
-          <a:bodyPr rtlCol="0" anchor="ctr"/>
-          <a:lstStyle/>
-          <a:p>
-            <a:pPr algn="ctr"/>
-          </a:p>
-        </p:txBody>
-      </p:sp>
-      <p:sp>
-        <p:nvSpPr>
-          <p:cNvPr id="9" name="Rectangle 8"/>
-          <p:cNvSpPr/>
-          <p:nvPr/>
-        </p:nvSpPr>
-        <p:spPr>
-          <a:xfrm>
-            <a:off x="457200" y="2478024"/>
-            <a:ext cx="128016" cy="1051560"/>
-          </a:xfrm>
-          <a:prstGeom prst="rect">
-            <a:avLst/>
-          </a:prstGeom>
-          <a:solidFill>
-            <a:srgbClr val="FFD000"/>
-          </a:solidFill>
-          <a:ln>
-            <a:noFill/>
-          </a:ln>
-        </p:spPr>
-        <p:style>
-          <a:lnRef idx="1">
-            <a:schemeClr val="accent1"/>
-          </a:lnRef>
-          <a:fillRef idx="3">
-            <a:schemeClr val="accent1"/>
-          </a:fillRef>
-          <a:effectRef idx="2">
-            <a:schemeClr val="accent1"/>
-          </a:effectRef>
-          <a:fontRef idx="minor">
-            <a:schemeClr val="lt1"/>
-          </a:fontRef>
-        </p:style>
-        <p:txBody>
-          <a:bodyPr rtlCol="0" anchor="ctr"/>
-          <a:lstStyle/>
-          <a:p>
-            <a:pPr algn="ctr"/>
-          </a:p>
-        </p:txBody>
-      </p:sp>
-      <p:sp>
-        <p:nvSpPr>
-          <p:cNvPr id="10" name="TextBox 9"/>
-          <p:cNvSpPr txBox="1"/>
-          <p:nvPr/>
-        </p:nvSpPr>
-        <p:spPr>
-          <a:xfrm>
-            <a:off x="777240" y="2615184"/>
-            <a:ext cx="10774375" cy="822959"/>
-          </a:xfrm>
-          <a:prstGeom prst="rect">
-            <a:avLst/>
-          </a:prstGeom>
-          <a:noFill/>
-        </p:spPr>
-        <p:txBody>
-          <a:bodyPr wrap="square">
-            <a:spAutoFit/>
-          </a:bodyPr>
-          <a:lstStyle/>
-          <a:p>
-            <a:r>
-              <a:rPr sz="1200" b="1" i="0">
-                <a:solidFill>
-                  <a:srgbClr val="FFD000"/>
-                </a:solidFill>
-                <a:latin typeface="Calibri"/>
-              </a:rPr>
-              <a:t>Aclaración</a:t>
-            </a:r>
-          </a:p>
-          <a:p>
-            <a:pPr>
-              <a:spcBef>
-                <a:spcPts val="400"/>
-              </a:spcBef>
-            </a:pPr>
-            <a:r>
-              <a:rPr sz="1400" b="0" i="0">
-                <a:solidFill>
-                  <a:srgbClr val="333333"/>
-                </a:solidFill>
-                <a:latin typeface="Calibri"/>
-              </a:rPr>
-              <a:t>Enunciado completo: Clases/Proyecto Integrador/ (VetCare).</a:t>
-            </a:r>
-          </a:p>
-        </p:txBody>
-      </p:sp>
-      <p:sp>
-        <p:nvSpPr>
-          <p:cNvPr id="11" name="Rounded Rectangle 10"/>
-          <p:cNvSpPr/>
-          <p:nvPr/>
-        </p:nvSpPr>
-        <p:spPr>
-          <a:xfrm>
-            <a:off x="457200" y="3694176"/>
-            <a:ext cx="11277295" cy="1051560"/>
-          </a:xfrm>
-          <a:prstGeom prst="roundRect">
-            <a:avLst>
-              <a:gd name="adj" fmla="val 12000"/>
-            </a:avLst>
-          </a:prstGeom>
-          <a:solidFill>
-            <a:srgbClr val="FBE4E4"/>
-          </a:solidFill>
-          <a:ln>
-            <a:noFill/>
-          </a:ln>
-        </p:spPr>
-        <p:style>
-          <a:lnRef idx="1">
-            <a:schemeClr val="accent1"/>
-          </a:lnRef>
-          <a:fillRef idx="3">
-            <a:schemeClr val="accent1"/>
-          </a:fillRef>
-          <a:effectRef idx="2">
-            <a:schemeClr val="accent1"/>
-          </a:effectRef>
-          <a:fontRef idx="minor">
-            <a:schemeClr val="lt1"/>
-          </a:fontRef>
-        </p:style>
-        <p:txBody>
-          <a:bodyPr rtlCol="0" anchor="ctr"/>
-          <a:lstStyle/>
-          <a:p>
-            <a:pPr algn="ctr"/>
-          </a:p>
-        </p:txBody>
-      </p:sp>
-      <p:sp>
-        <p:nvSpPr>
-          <p:cNvPr id="12" name="Rectangle 11"/>
-          <p:cNvSpPr/>
-          <p:nvPr/>
-        </p:nvSpPr>
-        <p:spPr>
-          <a:xfrm>
-            <a:off x="457200" y="3694176"/>
-            <a:ext cx="128016" cy="1051560"/>
-          </a:xfrm>
-          <a:prstGeom prst="rect">
-            <a:avLst/>
-          </a:prstGeom>
-          <a:solidFill>
-            <a:srgbClr val="A02030"/>
-          </a:solidFill>
-          <a:ln>
-            <a:noFill/>
-          </a:ln>
-        </p:spPr>
-        <p:style>
-          <a:lnRef idx="1">
-            <a:schemeClr val="accent1"/>
-          </a:lnRef>
-          <a:fillRef idx="3">
-            <a:schemeClr val="accent1"/>
-          </a:fillRef>
-          <a:effectRef idx="2">
-            <a:schemeClr val="accent1"/>
-          </a:effectRef>
-          <a:fontRef idx="minor">
-            <a:schemeClr val="lt1"/>
-          </a:fontRef>
-        </p:style>
-        <p:txBody>
-          <a:bodyPr rtlCol="0" anchor="ctr"/>
-          <a:lstStyle/>
-          <a:p>
-            <a:pPr algn="ctr"/>
-          </a:p>
-        </p:txBody>
-      </p:sp>
-      <p:sp>
-        <p:nvSpPr>
-          <p:cNvPr id="13" name="TextBox 12"/>
-          <p:cNvSpPr txBox="1"/>
-          <p:nvPr/>
-        </p:nvSpPr>
-        <p:spPr>
-          <a:xfrm>
-            <a:off x="777240" y="3831336"/>
-            <a:ext cx="10774375" cy="822959"/>
-          </a:xfrm>
-          <a:prstGeom prst="rect">
-            <a:avLst/>
-          </a:prstGeom>
-          <a:noFill/>
-        </p:spPr>
-        <p:txBody>
-          <a:bodyPr wrap="square">
-            <a:spAutoFit/>
-          </a:bodyPr>
-          <a:lstStyle/>
-          <a:p>
-            <a:r>
-              <a:rPr sz="1200" b="1" i="0">
-                <a:solidFill>
-                  <a:srgbClr val="A02030"/>
-                </a:solidFill>
-                <a:latin typeface="Calibri"/>
-              </a:rPr>
-              <a:t>Atención</a:t>
-            </a:r>
-          </a:p>
-          <a:p>
-            <a:pPr>
-              <a:spcBef>
-                <a:spcPts val="400"/>
-              </a:spcBef>
-            </a:pPr>
-            <a:r>
-              <a:rPr sz="1400" b="0" i="0">
-                <a:solidFill>
-                  <a:srgbClr val="333333"/>
-                </a:solidFill>
-                <a:latin typeface="Calibri"/>
-              </a:rPr>
-              <a:t>Entrega del taller, si el docente lo asigna · en la fecha que indique el docente.</a:t>
-            </a:r>
-          </a:p>
-        </p:txBody>
-      </p:sp>
-      <p:sp>
-        <p:nvSpPr>
-          <p:cNvPr id="14" name="TextBox 13"/>
-          <p:cNvSpPr txBox="1"/>
-          <p:nvPr/>
-        </p:nvSpPr>
-        <p:spPr>
-          <a:xfrm>
-            <a:off x="11185855" y="6473952"/>
-            <a:ext cx="640080" cy="274320"/>
-          </a:xfrm>
-          <a:prstGeom prst="rect">
-            <a:avLst/>
-          </a:prstGeom>
-          <a:noFill/>
-        </p:spPr>
-        <p:txBody>
-          <a:bodyPr wrap="square">
-            <a:spAutoFit/>
-          </a:bodyPr>
-          <a:lstStyle/>
-          <a:p>
-            <a:pPr algn="r"/>
-            <a:r>
-              <a:rPr sz="1100" b="0" i="0">
-                <a:solidFill>
-                  <a:srgbClr val="666666"/>
-                </a:solidFill>
-                <a:latin typeface="Calibri"/>
-              </a:rPr>
-              <a:t>38</a:t>
-            </a:r>
-          </a:p>
-        </p:txBody>
-      </p:sp>
-    </p:spTree>
-  </p:cSld>
-  <p:clrMapOvr>
-    <a:masterClrMapping/>
-  </p:clrMapOvr>
-</p:sld>
-</file>
-
-<file path=ppt/slides/slide39.xml><?xml version="1.0" encoding="utf-8"?>
-<p:sld xmlns:a="http://schemas.openxmlformats.org/drawingml/2006/main" xmlns:p="http://schemas.openxmlformats.org/presentationml/2006/main" xmlns:r="http://schemas.openxmlformats.org/officeDocument/2006/relationships">
-  <p:cSld>
-    <p:bg>
-      <p:bgPr>
-        <a:solidFill>
-          <a:srgbClr val="FFFFFF"/>
-        </a:solidFill>
-        <a:effectLst/>
-      </p:bgPr>
-    </p:bg>
-    <p:spTree>
-      <p:nvGrpSpPr>
-        <p:cNvPr id="1" name=""/>
-        <p:cNvGrpSpPr/>
-        <p:nvPr/>
-      </p:nvGrpSpPr>
-      <p:grpSpPr/>
-      <p:sp>
-        <p:nvSpPr>
-          <p:cNvPr id="2" name="Rectangle 1"/>
-          <p:cNvSpPr/>
-          <p:nvPr/>
-        </p:nvSpPr>
-        <p:spPr>
-          <a:xfrm>
-            <a:off x="0" y="0"/>
             <a:ext cx="12191695" cy="164592"/>
           </a:xfrm>
           <a:prstGeom prst="rect">
@@ -15511,7 +13510,7 @@
                 </a:solidFill>
                 <a:latin typeface="Calibri"/>
               </a:rPr>
-              <a:t>Clase 1 · VetCare avanza</a:t>
+              <a:t>Clase 1 · Introduccion a la Programacion Orientada a Objetos</a:t>
             </a:r>
           </a:p>
         </p:txBody>
@@ -15550,7 +13549,7 @@
                 </a:solidFill>
                 <a:latin typeface="Calibri"/>
               </a:rPr>
-              <a:t>Entorno de desarrollo listo y la primera clase del dominio VetCare escrita</a:t>
+              <a:t>Clase vs objeto y los cuatro pilares</a:t>
             </a:r>
           </a:p>
           <a:p>
@@ -15566,7 +13565,7 @@
                 </a:solidFill>
                 <a:latin typeface="Calibri"/>
               </a:rPr>
-              <a:t>Entregable: Proyecto Java con la clase Mascota (atributos privados, constructor y toString) y un main que crea dos objetos distintos</a:t>
+              <a:t>Repasa las laminas de concepto y el codigo de la demo</a:t>
             </a:r>
           </a:p>
           <a:p>
@@ -15582,7 +13581,7 @@
                 </a:solidFill>
                 <a:latin typeface="Calibri"/>
               </a:rPr>
-              <a:t>Siguiente clase: continuamos el hilo del PI</a:t>
+              <a:t>Siguiente clase: continuamos el hilo del tema</a:t>
             </a:r>
           </a:p>
         </p:txBody>
@@ -17580,4 +15579,324 @@
   </a:objectDefaults>
   <a:extraClrSchemeLst/>
 </a:theme>
+</file>
+
+<file path=ppt/theme/theme2.xml><?xml version="1.0" encoding="utf-8"?>
+<a:theme xmlns:a="http://schemas.openxmlformats.org/drawingml/2006/main" name="Office Theme">
+  <a:themeElements>
+    <a:clrScheme name="Office">
+      <a:dk1>
+        <a:sysClr val="windowText" lastClr="000000"/>
+      </a:dk1>
+      <a:lt1>
+        <a:sysClr val="window" lastClr="FFFFFF"/>
+      </a:lt1>
+      <a:dk2>
+        <a:srgbClr val="1F497D"/>
+      </a:dk2>
+      <a:lt2>
+        <a:srgbClr val="EEECE1"/>
+      </a:lt2>
+      <a:accent1>
+        <a:srgbClr val="4F81BD"/>
+      </a:accent1>
+      <a:accent2>
+        <a:srgbClr val="C0504D"/>
+      </a:accent2>
+      <a:accent3>
+        <a:srgbClr val="9BBB59"/>
+      </a:accent3>
+      <a:accent4>
+        <a:srgbClr val="8064A2"/>
+      </a:accent4>
+      <a:accent5>
+        <a:srgbClr val="4BACC6"/>
+      </a:accent5>
+      <a:accent6>
+        <a:srgbClr val="F79646"/>
+      </a:accent6>
+      <a:hlink>
+        <a:srgbClr val="0000FF"/>
+      </a:hlink>
+      <a:folHlink>
+        <a:srgbClr val="800080"/>
+      </a:folHlink>
+    </a:clrScheme>
+    <a:fontScheme name="Office">
+      <a:majorFont>
+        <a:latin typeface="Calibri"/>
+        <a:ea typeface=""/>
+        <a:cs typeface=""/>
+        <a:font script="Jpan" typeface="ＭＳ Ｐゴシック"/>
+        <a:font script="Hang" typeface="맑은 고딕"/>
+        <a:font script="Hans" typeface="宋体"/>
+        <a:font script="Hant" typeface="新細明體"/>
+        <a:font script="Arab" typeface="Times New Roman"/>
+        <a:font script="Hebr" typeface="Times New Roman"/>
+        <a:font script="Thai" typeface="Angsana New"/>
+        <a:font script="Ethi" typeface="Nyala"/>
+        <a:font script="Beng" typeface="Vrinda"/>
+        <a:font script="Gujr" typeface="Shruti"/>
+        <a:font script="Khmr" typeface="MoolBoran"/>
+        <a:font script="Knda" typeface="Tunga"/>
+        <a:font script="Guru" typeface="Raavi"/>
+        <a:font script="Cans" typeface="Euphemia"/>
+        <a:font script="Cher" typeface="Plantagenet Cherokee"/>
+        <a:font script="Yiii" typeface="Microsoft Yi Baiti"/>
+        <a:font script="Tibt" typeface="Microsoft Himalaya"/>
+        <a:font script="Thaa" typeface="MV Boli"/>
+        <a:font script="Deva" typeface="Mangal"/>
+        <a:font script="Telu" typeface="Gautami"/>
+        <a:font script="Taml" typeface="Latha"/>
+        <a:font script="Syrc" typeface="Estrangelo Edessa"/>
+        <a:font script="Orya" typeface="Kalinga"/>
+        <a:font script="Mlym" typeface="Kartika"/>
+        <a:font script="Laoo" typeface="DokChampa"/>
+        <a:font script="Sinh" typeface="Iskoola Pota"/>
+        <a:font script="Mong" typeface="Mongolian Baiti"/>
+        <a:font script="Viet" typeface="Times New Roman"/>
+        <a:font script="Uigh" typeface="Microsoft Uighur"/>
+        <a:font script="Geor" typeface="Sylfaen"/>
+      </a:majorFont>
+      <a:minorFont>
+        <a:latin typeface="Calibri"/>
+        <a:ea typeface=""/>
+        <a:cs typeface=""/>
+        <a:font script="Jpan" typeface="ＭＳ Ｐゴシック"/>
+        <a:font script="Hang" typeface="맑은 고딕"/>
+        <a:font script="Hans" typeface="宋体"/>
+        <a:font script="Hant" typeface="新細明體"/>
+        <a:font script="Arab" typeface="Arial"/>
+        <a:font script="Hebr" typeface="Arial"/>
+        <a:font script="Thai" typeface="Cordia New"/>
+        <a:font script="Ethi" typeface="Nyala"/>
+        <a:font script="Beng" typeface="Vrinda"/>
+        <a:font script="Gujr" typeface="Shruti"/>
+        <a:font script="Khmr" typeface="DaunPenh"/>
+        <a:font script="Knda" typeface="Tunga"/>
+        <a:font script="Guru" typeface="Raavi"/>
+        <a:font script="Cans" typeface="Euphemia"/>
+        <a:font script="Cher" typeface="Plantagenet Cherokee"/>
+        <a:font script="Yiii" typeface="Microsoft Yi Baiti"/>
+        <a:font script="Tibt" typeface="Microsoft Himalaya"/>
+        <a:font script="Thaa" typeface="MV Boli"/>
+        <a:font script="Deva" typeface="Mangal"/>
+        <a:font script="Telu" typeface="Gautami"/>
+        <a:font script="Taml" typeface="Latha"/>
+        <a:font script="Syrc" typeface="Estrangelo Edessa"/>
+        <a:font script="Orya" typeface="Kalinga"/>
+        <a:font script="Mlym" typeface="Kartika"/>
+        <a:font script="Laoo" typeface="DokChampa"/>
+        <a:font script="Sinh" typeface="Iskoola Pota"/>
+        <a:font script="Mong" typeface="Mongolian Baiti"/>
+        <a:font script="Viet" typeface="Arial"/>
+        <a:font script="Uigh" typeface="Microsoft Uighur"/>
+        <a:font script="Geor" typeface="Sylfaen"/>
+      </a:minorFont>
+    </a:fontScheme>
+    <a:fmtScheme name="Office">
+      <a:fillStyleLst>
+        <a:solidFill>
+          <a:schemeClr val="phClr"/>
+        </a:solidFill>
+        <a:gradFill rotWithShape="1">
+          <a:gsLst>
+            <a:gs pos="0">
+              <a:schemeClr val="phClr">
+                <a:tint val="50000"/>
+                <a:satMod val="300000"/>
+              </a:schemeClr>
+            </a:gs>
+            <a:gs pos="35000">
+              <a:schemeClr val="phClr">
+                <a:tint val="37000"/>
+                <a:satMod val="300000"/>
+              </a:schemeClr>
+            </a:gs>
+            <a:gs pos="100000">
+              <a:schemeClr val="phClr">
+                <a:tint val="15000"/>
+                <a:satMod val="350000"/>
+              </a:schemeClr>
+            </a:gs>
+          </a:gsLst>
+          <a:lin ang="16200000" scaled="1"/>
+        </a:gradFill>
+        <a:gradFill rotWithShape="1">
+          <a:gsLst>
+            <a:gs pos="0">
+              <a:schemeClr val="phClr">
+                <a:tint val="100000"/>
+                <a:shade val="100000"/>
+                <a:satMod val="130000"/>
+              </a:schemeClr>
+            </a:gs>
+            <a:gs pos="100000">
+              <a:schemeClr val="phClr">
+                <a:tint val="50000"/>
+                <a:shade val="100000"/>
+                <a:satMod val="350000"/>
+              </a:schemeClr>
+            </a:gs>
+          </a:gsLst>
+          <a:lin ang="16200000" scaled="0"/>
+        </a:gradFill>
+      </a:fillStyleLst>
+      <a:lnStyleLst>
+        <a:ln w="9525" cap="flat" cmpd="sng" algn="ctr">
+          <a:solidFill>
+            <a:schemeClr val="phClr">
+              <a:shade val="95000"/>
+              <a:satMod val="105000"/>
+            </a:schemeClr>
+          </a:solidFill>
+          <a:prstDash val="solid"/>
+        </a:ln>
+        <a:ln w="25400" cap="flat" cmpd="sng" algn="ctr">
+          <a:solidFill>
+            <a:schemeClr val="phClr"/>
+          </a:solidFill>
+          <a:prstDash val="solid"/>
+        </a:ln>
+        <a:ln w="38100" cap="flat" cmpd="sng" algn="ctr">
+          <a:solidFill>
+            <a:schemeClr val="phClr"/>
+          </a:solidFill>
+          <a:prstDash val="solid"/>
+        </a:ln>
+      </a:lnStyleLst>
+      <a:effectStyleLst>
+        <a:effectStyle>
+          <a:effectLst>
+            <a:outerShdw blurRad="40000" dist="20000" dir="5400000" rotWithShape="0">
+              <a:srgbClr val="000000">
+                <a:alpha val="38000"/>
+              </a:srgbClr>
+            </a:outerShdw>
+          </a:effectLst>
+        </a:effectStyle>
+        <a:effectStyle>
+          <a:effectLst>
+            <a:outerShdw blurRad="40000" dist="23000" dir="5400000" rotWithShape="0">
+              <a:srgbClr val="000000">
+                <a:alpha val="35000"/>
+              </a:srgbClr>
+            </a:outerShdw>
+          </a:effectLst>
+        </a:effectStyle>
+        <a:effectStyle>
+          <a:effectLst>
+            <a:outerShdw blurRad="40000" dist="23000" dir="5400000" rotWithShape="0">
+              <a:srgbClr val="000000">
+                <a:alpha val="35000"/>
+              </a:srgbClr>
+            </a:outerShdw>
+          </a:effectLst>
+          <a:scene3d>
+            <a:camera prst="orthographicFront">
+              <a:rot lat="0" lon="0" rev="0"/>
+            </a:camera>
+            <a:lightRig rig="threePt" dir="t">
+              <a:rot lat="0" lon="0" rev="1200000"/>
+            </a:lightRig>
+          </a:scene3d>
+          <a:sp3d>
+            <a:bevelT w="63500" h="25400"/>
+          </a:sp3d>
+        </a:effectStyle>
+      </a:effectStyleLst>
+      <a:bgFillStyleLst>
+        <a:solidFill>
+          <a:schemeClr val="phClr"/>
+        </a:solidFill>
+        <a:gradFill rotWithShape="1">
+          <a:gsLst>
+            <a:gs pos="0">
+              <a:schemeClr val="phClr">
+                <a:tint val="40000"/>
+                <a:satMod val="350000"/>
+              </a:schemeClr>
+            </a:gs>
+            <a:gs pos="40000">
+              <a:schemeClr val="phClr">
+                <a:tint val="45000"/>
+                <a:shade val="99000"/>
+                <a:satMod val="350000"/>
+              </a:schemeClr>
+            </a:gs>
+            <a:gs pos="100000">
+              <a:schemeClr val="phClr">
+                <a:shade val="20000"/>
+                <a:satMod val="255000"/>
+              </a:schemeClr>
+            </a:gs>
+          </a:gsLst>
+          <a:path path="circle">
+            <a:fillToRect l="50000" t="-80000" r="50000" b="180000"/>
+          </a:path>
+        </a:gradFill>
+        <a:gradFill rotWithShape="1">
+          <a:gsLst>
+            <a:gs pos="0">
+              <a:schemeClr val="phClr">
+                <a:tint val="80000"/>
+                <a:satMod val="300000"/>
+              </a:schemeClr>
+            </a:gs>
+            <a:gs pos="100000">
+              <a:schemeClr val="phClr">
+                <a:shade val="30000"/>
+                <a:satMod val="200000"/>
+              </a:schemeClr>
+            </a:gs>
+          </a:gsLst>
+          <a:path path="circle">
+            <a:fillToRect l="50000" t="50000" r="50000" b="50000"/>
+          </a:path>
+        </a:gradFill>
+      </a:bgFillStyleLst>
+    </a:fmtScheme>
+  </a:themeElements>
+  <a:objectDefaults>
+    <a:spDef>
+      <a:spPr/>
+      <a:bodyPr/>
+      <a:lstStyle/>
+      <a:style>
+        <a:lnRef idx="1">
+          <a:schemeClr val="accent1"/>
+        </a:lnRef>
+        <a:fillRef idx="3">
+          <a:schemeClr val="accent1"/>
+        </a:fillRef>
+        <a:effectRef idx="2">
+          <a:schemeClr val="accent1"/>
+        </a:effectRef>
+        <a:fontRef idx="minor">
+          <a:schemeClr val="lt1"/>
+        </a:fontRef>
+      </a:style>
+    </a:spDef>
+    <a:lnDef>
+      <a:spPr/>
+      <a:bodyPr/>
+      <a:lstStyle/>
+      <a:style>
+        <a:lnRef idx="2">
+          <a:schemeClr val="accent1"/>
+        </a:lnRef>
+        <a:fillRef idx="0">
+          <a:schemeClr val="accent1"/>
+        </a:fillRef>
+        <a:effectRef idx="1">
+          <a:schemeClr val="accent1"/>
+        </a:effectRef>
+        <a:fontRef idx="minor">
+          <a:schemeClr val="tx1"/>
+        </a:fontRef>
+      </a:style>
+    </a:lnDef>
+  </a:objectDefaults>
+  <a:extraClrSchemeLst/>
+</a:theme>
 </file>
--- a/Programacion II/Clases/Clase 1 - Introduccion a POO/Presentacion.pptx
+++ b/Programacion II/Clases/Clase 1 - Introduccion a POO/Presentacion.pptx
@@ -1218,7 +1218,7 @@
           <a:p/>
           <a:p>
             <a:r>
-              <a:t>Se ensena bien cuando se muestra el problema que resuelve, y en VetCare el problema tiene nombre.</a:t>
+              <a:t>Se ensena bien cuando se muestra el problema que resuelve, y en el sistema de la clinica el problema tiene nombre.</a:t>
             </a:r>
           </a:p>
           <a:p/>
@@ -6837,7 +6837,7 @@
                 </a:solidFill>
                 <a:latin typeface="Calibri"/>
               </a:rPr>
-              <a:t>–   Primero, un molde fisico no sabe cuantas piezas produjo, y una clase tampoco lleva por si sola la lista de sus objetos: si VetCare necesita saber cuantas mascotas se han creado, alguien tiene que programar ese conteo.</a:t>
+              <a:t>–   Primero, un molde fisico no sabe cuantas piezas produjo, y una clase tampoco lleva por si sola la lista de sus objetos: si el sistema de la clinica necesita saber cuantas mascotas se han creado, alguien tiene que programar ese conteo.</a:t>
             </a:r>
           </a:p>
           <a:p>
@@ -7089,7 +7089,7 @@
                 </a:solidFill>
                 <a:latin typeface="Calibri"/>
               </a:rPr>
-              <a:t>–   En VetCare el uso legitimo de hoy es generar el siguiente identificador con un contador compartido.</a:t>
+              <a:t>–   En el sistema de la clinica el uso legitimo de hoy es generar el siguiente identificador con un contador compartido.</a:t>
             </a:r>
           </a:p>
           <a:p>
@@ -7734,7 +7734,7 @@
                 </a:solidFill>
                 <a:latin typeface="Calibri"/>
               </a:rPr>
-              <a:t>–   Todo con el mismo dominio: la clinica veterinaria Huellitas (VetCare).</a:t>
+              <a:t>–   Todo con el mismo dominio: una clinica veterinaria.</a:t>
             </a:r>
           </a:p>
         </p:txBody>
@@ -8838,7 +8838,7 @@
                 </a:solidFill>
                 <a:latin typeface="Calibri"/>
               </a:rPr>
-              <a:t>–   Los tres casos que produciran esa excepcion en VetCare son predecibles: un metodo buscarMascota(id) que devuelve null cuando no encuentra nada y un llamador que hace m.getNombre() sin preguntar</a:t>
+              <a:t>–   Los tres casos que produciran esa excepcion en el sistema de la clinica son predecibles: un metodo buscarMascota(id) que devuelve null cuando no encuentra nada y un llamador que hace m.getNombre() sin preguntar</a:t>
             </a:r>
           </a:p>
           <a:p>
@@ -11679,7 +11679,7 @@
                 </a:solidFill>
                 <a:latin typeface="Calibri"/>
               </a:rPr>
-              <a:t>Demo en vivo sobre VetCare</a:t>
+              <a:t>Demo en vivo sobre el tema</a:t>
             </a:r>
           </a:p>
         </p:txBody>
@@ -12350,7 +12350,7 @@
                 </a:solidFill>
                 <a:latin typeface="Calibri"/>
               </a:rPr>
-              <a:t>        System.out.println("Pacientes registrados hoy en Huellitas:");</a:t>
+              <a:t>        System.out.println("Pacientes registrados hoy en la clinica:");</a:t>
             </a:r>
           </a:p>
           <a:p>
@@ -12627,7 +12627,7 @@
                 </a:solidFill>
                 <a:latin typeface="Calibri"/>
               </a:rPr>
-              <a:t>La primera clase de VetCare</a:t>
+              <a:t>La primera clase del sistema de la clinica</a:t>
             </a:r>
           </a:p>
         </p:txBody>
@@ -12978,7 +12978,7 @@
                 </a:solidFill>
                 <a:latin typeface="Calibri"/>
               </a:rPr>
-              <a:t>    public String toString() {  // sin esto se imprime vetcare.Mascota@6d06d69c</a:t>
+              <a:t>    public String toString() {  // sin esto se imprime clinica.Mascota@6d06d69c</a:t>
             </a:r>
           </a:p>
           <a:p>
@@ -13349,7 +13349,7 @@
                 </a:solidFill>
                 <a:latin typeface="Calibri"/>
               </a:rPr>
-              <a:t>–   Mismo dominio VetCare — no otro ejemplo.</a:t>
+              <a:t>–   Mismo dominio de la clinica — no otro ejemplo.</a:t>
             </a:r>
           </a:p>
         </p:txBody>
@@ -13817,7 +13817,7 @@
                 </a:solidFill>
                 <a:latin typeface="Calibri"/>
               </a:rPr>
-              <a:t>–   En VetCare, en vez de tener por un lado un arreglo de nombres y por otro un arreglo de edades que hay que mantener sincronizados a mano, se tiene una clase Mascota que guarda juntos su nombre, su especie y su edad.</a:t>
+              <a:t>–   En el sistema de la clinica, en vez de tener por un lado un arreglo de nombres y por otro un arreglo de edades que hay que mantener sincronizados a mano, se tiene una clase Mascota que guarda juntos su nombre, su especie y su edad.</a:t>
             </a:r>
           </a:p>
         </p:txBody>
@@ -14337,7 +14337,7 @@
                 </a:solidFill>
                 <a:latin typeface="Calibri"/>
               </a:rPr>
-              <a:t>–   Abstraccion es quedarse solo con lo que importa del problema: para la clinica Huellitas, de una mascota importa su especie y su historial, no su color favorito; modelar es decidir que se ignora.</a:t>
+              <a:t>–   Abstraccion es quedarse solo con lo que importa del problema: para la clinica, de una mascota importa su especie y su historial, no su color favorito; modelar es decidir que se ignora.</a:t>
             </a:r>
           </a:p>
           <a:p>

--- a/Programacion II/Clases/Clase 1 - Introduccion a POO/Presentacion.pptx
+++ b/Programacion II/Clases/Clase 1 - Introduccion a POO/Presentacion.pptx
@@ -9277,118 +9277,14 @@
       </p:sp>
       <p:sp>
         <p:nvSpPr>
-          <p:cNvPr id="5" name="Rounded Rectangle 4"/>
-          <p:cNvSpPr/>
-          <p:nvPr/>
-        </p:nvSpPr>
-        <p:spPr>
-          <a:xfrm>
-            <a:off x="5797149" y="1573813"/>
-            <a:ext cx="6010497" cy="4057845"/>
-          </a:xfrm>
-          <a:prstGeom prst="roundRect">
-            <a:avLst>
-              <a:gd name="adj" fmla="val 4000"/>
-            </a:avLst>
-          </a:prstGeom>
-          <a:solidFill>
-            <a:srgbClr val="E8EEF4"/>
-          </a:solidFill>
-          <a:ln>
-            <a:noFill/>
-          </a:ln>
-        </p:spPr>
-        <p:style>
-          <a:lnRef idx="1">
-            <a:schemeClr val="accent1"/>
-          </a:lnRef>
-          <a:fillRef idx="3">
-            <a:schemeClr val="accent1"/>
-          </a:fillRef>
-          <a:effectRef idx="2">
-            <a:schemeClr val="accent1"/>
-          </a:effectRef>
-          <a:fontRef idx="minor">
-            <a:schemeClr val="lt1"/>
-          </a:fontRef>
-        </p:style>
-        <p:txBody>
-          <a:bodyPr rtlCol="0" anchor="ctr"/>
-          <a:lstStyle/>
-          <a:p>
-            <a:pPr algn="ctr"/>
-          </a:p>
-        </p:txBody>
-      </p:sp>
-      <p:pic>
-        <p:nvPicPr>
-          <p:cNvPr id="6" name="Picture 5" descr="java-programming-laptop-screen-code.jpg"/>
-          <p:cNvPicPr>
-            <a:picLocks noChangeAspect="1"/>
-          </p:cNvPicPr>
-          <p:nvPr/>
-        </p:nvPicPr>
-        <p:blipFill>
-          <a:blip r:embed="rId2"/>
-          <a:stretch>
-            <a:fillRect/>
-          </a:stretch>
-        </p:blipFill>
-        <p:spPr>
-          <a:xfrm>
-            <a:off x="5870301" y="1646965"/>
-            <a:ext cx="5864193" cy="3911541"/>
-          </a:xfrm>
-          <a:prstGeom prst="rect">
-            <a:avLst/>
-          </a:prstGeom>
-        </p:spPr>
-      </p:pic>
-      <p:sp>
-        <p:nvSpPr>
-          <p:cNvPr id="7" name="TextBox 6"/>
+          <p:cNvPr id="5" name="TextBox 4"/>
           <p:cNvSpPr txBox="1"/>
           <p:nvPr/>
         </p:nvSpPr>
         <p:spPr>
           <a:xfrm>
-            <a:off x="5870301" y="5961888"/>
-            <a:ext cx="5864193" cy="320040"/>
-          </a:xfrm>
-          <a:prstGeom prst="rect">
-            <a:avLst/>
-          </a:prstGeom>
-          <a:noFill/>
-        </p:spPr>
-        <p:txBody>
-          <a:bodyPr wrap="square">
-            <a:spAutoFit/>
-          </a:bodyPr>
-          <a:lstStyle/>
-          <a:p>
-            <a:pPr algn="ctr"/>
-            <a:r>
-              <a:rPr sz="1100" b="0" i="1">
-                <a:solidFill>
-                  <a:srgbClr val="666666"/>
-                </a:solidFill>
-                <a:latin typeface="Calibri"/>
-              </a:rPr>
-              <a:t>Foto: Daniil Komov · Pexels</a:t>
-            </a:r>
-          </a:p>
-        </p:txBody>
-      </p:sp>
-      <p:sp>
-        <p:nvSpPr>
-          <p:cNvPr id="8" name="TextBox 7"/>
-          <p:cNvSpPr txBox="1"/>
-          <p:nvPr/>
-        </p:nvSpPr>
-        <p:spPr>
-          <a:xfrm>
-            <a:off x="457200" y="1353312"/>
-            <a:ext cx="5093061" cy="5047488"/>
+            <a:off x="457200" y="1170432"/>
+            <a:ext cx="11277295" cy="5230368"/>
           </a:xfrm>
           <a:prstGeom prst="rect">
             <a:avLst/>
@@ -9452,7 +9348,7 @@
       </p:sp>
       <p:sp>
         <p:nvSpPr>
-          <p:cNvPr id="9" name="TextBox 8"/>
+          <p:cNvPr id="6" name="TextBox 5"/>
           <p:cNvSpPr txBox="1"/>
           <p:nvPr/>
         </p:nvSpPr>
@@ -9633,118 +9529,14 @@
       </p:sp>
       <p:sp>
         <p:nvSpPr>
-          <p:cNvPr id="5" name="Rounded Rectangle 4"/>
-          <p:cNvSpPr/>
-          <p:nvPr/>
-        </p:nvSpPr>
-        <p:spPr>
-          <a:xfrm>
-            <a:off x="5797149" y="1573813"/>
-            <a:ext cx="6010497" cy="4057845"/>
-          </a:xfrm>
-          <a:prstGeom prst="roundRect">
-            <a:avLst>
-              <a:gd name="adj" fmla="val 4000"/>
-            </a:avLst>
-          </a:prstGeom>
-          <a:solidFill>
-            <a:srgbClr val="E8EEF4"/>
-          </a:solidFill>
-          <a:ln>
-            <a:noFill/>
-          </a:ln>
-        </p:spPr>
-        <p:style>
-          <a:lnRef idx="1">
-            <a:schemeClr val="accent1"/>
-          </a:lnRef>
-          <a:fillRef idx="3">
-            <a:schemeClr val="accent1"/>
-          </a:fillRef>
-          <a:effectRef idx="2">
-            <a:schemeClr val="accent1"/>
-          </a:effectRef>
-          <a:fontRef idx="minor">
-            <a:schemeClr val="lt1"/>
-          </a:fontRef>
-        </p:style>
-        <p:txBody>
-          <a:bodyPr rtlCol="0" anchor="ctr"/>
-          <a:lstStyle/>
-          <a:p>
-            <a:pPr algn="ctr"/>
-          </a:p>
-        </p:txBody>
-      </p:sp>
-      <p:pic>
-        <p:nvPicPr>
-          <p:cNvPr id="6" name="Picture 5" descr="laptop-code-live-demo.jpg"/>
-          <p:cNvPicPr>
-            <a:picLocks noChangeAspect="1"/>
-          </p:cNvPicPr>
-          <p:nvPr/>
-        </p:nvPicPr>
-        <p:blipFill>
-          <a:blip r:embed="rId2"/>
-          <a:stretch>
-            <a:fillRect/>
-          </a:stretch>
-        </p:blipFill>
-        <p:spPr>
-          <a:xfrm>
-            <a:off x="5870301" y="1646965"/>
-            <a:ext cx="5864193" cy="3911541"/>
-          </a:xfrm>
-          <a:prstGeom prst="rect">
-            <a:avLst/>
-          </a:prstGeom>
-        </p:spPr>
-      </p:pic>
-      <p:sp>
-        <p:nvSpPr>
-          <p:cNvPr id="7" name="TextBox 6"/>
+          <p:cNvPr id="5" name="TextBox 4"/>
           <p:cNvSpPr txBox="1"/>
           <p:nvPr/>
         </p:nvSpPr>
         <p:spPr>
           <a:xfrm>
-            <a:off x="5870301" y="5961888"/>
-            <a:ext cx="5864193" cy="320040"/>
-          </a:xfrm>
-          <a:prstGeom prst="rect">
-            <a:avLst/>
-          </a:prstGeom>
-          <a:noFill/>
-        </p:spPr>
-        <p:txBody>
-          <a:bodyPr wrap="square">
-            <a:spAutoFit/>
-          </a:bodyPr>
-          <a:lstStyle/>
-          <a:p>
-            <a:pPr algn="ctr"/>
-            <a:r>
-              <a:rPr sz="1100" b="0" i="1">
-                <a:solidFill>
-                  <a:srgbClr val="666666"/>
-                </a:solidFill>
-                <a:latin typeface="Calibri"/>
-              </a:rPr>
-              <a:t>Foto: olia danilevich · Pexels</a:t>
-            </a:r>
-          </a:p>
-        </p:txBody>
-      </p:sp>
-      <p:sp>
-        <p:nvSpPr>
-          <p:cNvPr id="8" name="TextBox 7"/>
-          <p:cNvSpPr txBox="1"/>
-          <p:nvPr/>
-        </p:nvSpPr>
-        <p:spPr>
-          <a:xfrm>
-            <a:off x="457200" y="1353312"/>
-            <a:ext cx="5093061" cy="5047488"/>
+            <a:off x="457200" y="1170432"/>
+            <a:ext cx="11277295" cy="5230368"/>
           </a:xfrm>
           <a:prstGeom prst="rect">
             <a:avLst/>
@@ -9844,7 +9636,7 @@
       </p:sp>
       <p:sp>
         <p:nvSpPr>
-          <p:cNvPr id="9" name="TextBox 8"/>
+          <p:cNvPr id="6" name="TextBox 5"/>
           <p:cNvSpPr txBox="1"/>
           <p:nvPr/>
         </p:nvSpPr>
@@ -10257,118 +10049,14 @@
       </p:sp>
       <p:sp>
         <p:nvSpPr>
-          <p:cNvPr id="5" name="Rounded Rectangle 4"/>
-          <p:cNvSpPr/>
-          <p:nvPr/>
-        </p:nvSpPr>
-        <p:spPr>
-          <a:xfrm>
-            <a:off x="5797149" y="1573813"/>
-            <a:ext cx="6010497" cy="4057845"/>
-          </a:xfrm>
-          <a:prstGeom prst="roundRect">
-            <a:avLst>
-              <a:gd name="adj" fmla="val 4000"/>
-            </a:avLst>
-          </a:prstGeom>
-          <a:solidFill>
-            <a:srgbClr val="E8EEF4"/>
-          </a:solidFill>
-          <a:ln>
-            <a:noFill/>
-          </a:ln>
-        </p:spPr>
-        <p:style>
-          <a:lnRef idx="1">
-            <a:schemeClr val="accent1"/>
-          </a:lnRef>
-          <a:fillRef idx="3">
-            <a:schemeClr val="accent1"/>
-          </a:fillRef>
-          <a:effectRef idx="2">
-            <a:schemeClr val="accent1"/>
-          </a:effectRef>
-          <a:fontRef idx="minor">
-            <a:schemeClr val="lt1"/>
-          </a:fontRef>
-        </p:style>
-        <p:txBody>
-          <a:bodyPr rtlCol="0" anchor="ctr"/>
-          <a:lstStyle/>
-          <a:p>
-            <a:pPr algn="ctr"/>
-          </a:p>
-        </p:txBody>
-      </p:sp>
-      <p:pic>
-        <p:nvPicPr>
-          <p:cNvPr id="6" name="Picture 5" descr="notebook-planning-desk-coffee.jpg"/>
-          <p:cNvPicPr>
-            <a:picLocks noChangeAspect="1"/>
-          </p:cNvPicPr>
-          <p:nvPr/>
-        </p:nvPicPr>
-        <p:blipFill>
-          <a:blip r:embed="rId2"/>
-          <a:stretch>
-            <a:fillRect/>
-          </a:stretch>
-        </p:blipFill>
-        <p:spPr>
-          <a:xfrm>
-            <a:off x="5870301" y="1646965"/>
-            <a:ext cx="5864193" cy="3911541"/>
-          </a:xfrm>
-          <a:prstGeom prst="rect">
-            <a:avLst/>
-          </a:prstGeom>
-        </p:spPr>
-      </p:pic>
-      <p:sp>
-        <p:nvSpPr>
-          <p:cNvPr id="7" name="TextBox 6"/>
+          <p:cNvPr id="5" name="TextBox 4"/>
           <p:cNvSpPr txBox="1"/>
           <p:nvPr/>
         </p:nvSpPr>
         <p:spPr>
           <a:xfrm>
-            <a:off x="5870301" y="5961888"/>
-            <a:ext cx="5864193" cy="320040"/>
-          </a:xfrm>
-          <a:prstGeom prst="rect">
-            <a:avLst/>
-          </a:prstGeom>
-          <a:noFill/>
-        </p:spPr>
-        <p:txBody>
-          <a:bodyPr wrap="square">
-            <a:spAutoFit/>
-          </a:bodyPr>
-          <a:lstStyle/>
-          <a:p>
-            <a:pPr algn="ctr"/>
-            <a:r>
-              <a:rPr sz="1100" b="0" i="1">
-                <a:solidFill>
-                  <a:srgbClr val="666666"/>
-                </a:solidFill>
-                <a:latin typeface="Calibri"/>
-              </a:rPr>
-              <a:t>Foto: Cup of  Couple · Pexels</a:t>
-            </a:r>
-          </a:p>
-        </p:txBody>
-      </p:sp>
-      <p:sp>
-        <p:nvSpPr>
-          <p:cNvPr id="8" name="TextBox 7"/>
-          <p:cNvSpPr txBox="1"/>
-          <p:nvPr/>
-        </p:nvSpPr>
-        <p:spPr>
-          <a:xfrm>
-            <a:off x="457200" y="1353312"/>
-            <a:ext cx="5093061" cy="5047488"/>
+            <a:off x="457200" y="1170432"/>
+            <a:ext cx="11277295" cy="5230368"/>
           </a:xfrm>
           <a:prstGeom prst="rect">
             <a:avLst/>
@@ -10493,7 +10181,7 @@
       </p:sp>
       <p:sp>
         <p:nvSpPr>
-          <p:cNvPr id="9" name="TextBox 8"/>
+          <p:cNvPr id="6" name="TextBox 5"/>
           <p:cNvSpPr txBox="1"/>
           <p:nvPr/>
         </p:nvSpPr>
@@ -15187,118 +14875,14 @@
       </p:sp>
       <p:sp>
         <p:nvSpPr>
-          <p:cNvPr id="5" name="Rounded Rectangle 4"/>
-          <p:cNvSpPr/>
-          <p:nvPr/>
-        </p:nvSpPr>
-        <p:spPr>
-          <a:xfrm>
-            <a:off x="5797149" y="1573813"/>
-            <a:ext cx="6010497" cy="4057845"/>
-          </a:xfrm>
-          <a:prstGeom prst="roundRect">
-            <a:avLst>
-              <a:gd name="adj" fmla="val 4000"/>
-            </a:avLst>
-          </a:prstGeom>
-          <a:solidFill>
-            <a:srgbClr val="E8EEF4"/>
-          </a:solidFill>
-          <a:ln>
-            <a:noFill/>
-          </a:ln>
-        </p:spPr>
-        <p:style>
-          <a:lnRef idx="1">
-            <a:schemeClr val="accent1"/>
-          </a:lnRef>
-          <a:fillRef idx="3">
-            <a:schemeClr val="accent1"/>
-          </a:fillRef>
-          <a:effectRef idx="2">
-            <a:schemeClr val="accent1"/>
-          </a:effectRef>
-          <a:fontRef idx="minor">
-            <a:schemeClr val="lt1"/>
-          </a:fontRef>
-        </p:style>
-        <p:txBody>
-          <a:bodyPr rtlCol="0" anchor="ctr"/>
-          <a:lstStyle/>
-          <a:p>
-            <a:pPr algn="ctr"/>
-          </a:p>
-        </p:txBody>
-      </p:sp>
-      <p:pic>
-        <p:nvPicPr>
-          <p:cNvPr id="6" name="Picture 5" descr="capsule-pills-closeup.jpg"/>
-          <p:cNvPicPr>
-            <a:picLocks noChangeAspect="1"/>
-          </p:cNvPicPr>
-          <p:nvPr/>
-        </p:nvPicPr>
-        <p:blipFill>
-          <a:blip r:embed="rId2"/>
-          <a:stretch>
-            <a:fillRect/>
-          </a:stretch>
-        </p:blipFill>
-        <p:spPr>
-          <a:xfrm>
-            <a:off x="5870301" y="1646965"/>
-            <a:ext cx="5864193" cy="3911541"/>
-          </a:xfrm>
-          <a:prstGeom prst="rect">
-            <a:avLst/>
-          </a:prstGeom>
-        </p:spPr>
-      </p:pic>
-      <p:sp>
-        <p:nvSpPr>
-          <p:cNvPr id="7" name="TextBox 6"/>
+          <p:cNvPr id="5" name="TextBox 4"/>
           <p:cNvSpPr txBox="1"/>
           <p:nvPr/>
         </p:nvSpPr>
         <p:spPr>
           <a:xfrm>
-            <a:off x="5870301" y="5961888"/>
-            <a:ext cx="5864193" cy="320040"/>
-          </a:xfrm>
-          <a:prstGeom prst="rect">
-            <a:avLst/>
-          </a:prstGeom>
-          <a:noFill/>
-        </p:spPr>
-        <p:txBody>
-          <a:bodyPr wrap="square">
-            <a:spAutoFit/>
-          </a:bodyPr>
-          <a:lstStyle/>
-          <a:p>
-            <a:pPr algn="ctr"/>
-            <a:r>
-              <a:rPr sz="1100" b="0" i="1">
-                <a:solidFill>
-                  <a:srgbClr val="666666"/>
-                </a:solidFill>
-                <a:latin typeface="Calibri"/>
-              </a:rPr>
-              <a:t>Foto: Odin Mcraig · Pexels</a:t>
-            </a:r>
-          </a:p>
-        </p:txBody>
-      </p:sp>
-      <p:sp>
-        <p:nvSpPr>
-          <p:cNvPr id="8" name="TextBox 7"/>
-          <p:cNvSpPr txBox="1"/>
-          <p:nvPr/>
-        </p:nvSpPr>
-        <p:spPr>
-          <a:xfrm>
-            <a:off x="457200" y="1353312"/>
-            <a:ext cx="5093061" cy="5047488"/>
+            <a:off x="457200" y="1170432"/>
+            <a:ext cx="11277295" cy="5230368"/>
           </a:xfrm>
           <a:prstGeom prst="rect">
             <a:avLst/>
@@ -15362,7 +14946,7 @@
       </p:sp>
       <p:sp>
         <p:nvSpPr>
-          <p:cNvPr id="9" name="TextBox 8"/>
+          <p:cNvPr id="6" name="TextBox 5"/>
           <p:cNvSpPr txBox="1"/>
           <p:nvPr/>
         </p:nvSpPr>

--- a/Programacion II/Clases/Clase 1 - Introduccion a POO/Presentacion.pptx
+++ b/Programacion II/Clases/Clase 1 - Introduccion a POO/Presentacion.pptx
@@ -9277,14 +9277,83 @@
       </p:sp>
       <p:sp>
         <p:nvSpPr>
-          <p:cNvPr id="5" name="TextBox 4"/>
+          <p:cNvPr id="5" name="Rounded Rectangle 4"/>
+          <p:cNvSpPr/>
+          <p:nvPr/>
+        </p:nvSpPr>
+        <p:spPr>
+          <a:xfrm>
+            <a:off x="5797149" y="1343926"/>
+            <a:ext cx="6010497" cy="4837658"/>
+          </a:xfrm>
+          <a:prstGeom prst="roundRect">
+            <a:avLst>
+              <a:gd name="adj" fmla="val 4000"/>
+            </a:avLst>
+          </a:prstGeom>
+          <a:solidFill>
+            <a:srgbClr val="E8EEF4"/>
+          </a:solidFill>
+          <a:ln>
+            <a:noFill/>
+          </a:ln>
+        </p:spPr>
+        <p:style>
+          <a:lnRef idx="1">
+            <a:schemeClr val="accent1"/>
+          </a:lnRef>
+          <a:fillRef idx="3">
+            <a:schemeClr val="accent1"/>
+          </a:fillRef>
+          <a:effectRef idx="2">
+            <a:schemeClr val="accent1"/>
+          </a:effectRef>
+          <a:fontRef idx="minor">
+            <a:schemeClr val="lt1"/>
+          </a:fontRef>
+        </p:style>
+        <p:txBody>
+          <a:bodyPr rtlCol="0" anchor="ctr"/>
+          <a:lstStyle/>
+          <a:p>
+            <a:pPr algn="ctr"/>
+          </a:p>
+        </p:txBody>
+      </p:sp>
+      <p:pic>
+        <p:nvPicPr>
+          <p:cNvPr id="6" name="Picture 5" descr="ilus-entorno-jdk-paso1.png"/>
+          <p:cNvPicPr>
+            <a:picLocks noChangeAspect="1"/>
+          </p:cNvPicPr>
+          <p:nvPr/>
+        </p:nvPicPr>
+        <p:blipFill>
+          <a:blip r:embed="rId2"/>
+          <a:stretch>
+            <a:fillRect/>
+          </a:stretch>
+        </p:blipFill>
+        <p:spPr>
+          <a:xfrm>
+            <a:off x="5870301" y="1417078"/>
+            <a:ext cx="5864193" cy="4691354"/>
+          </a:xfrm>
+          <a:prstGeom prst="rect">
+            <a:avLst/>
+          </a:prstGeom>
+        </p:spPr>
+      </p:pic>
+      <p:sp>
+        <p:nvSpPr>
+          <p:cNvPr id="7" name="TextBox 6"/>
           <p:cNvSpPr txBox="1"/>
           <p:nvPr/>
         </p:nvSpPr>
         <p:spPr>
           <a:xfrm>
-            <a:off x="457200" y="1170432"/>
-            <a:ext cx="11277295" cy="5230368"/>
+            <a:off x="457200" y="1353312"/>
+            <a:ext cx="5093061" cy="5047488"/>
           </a:xfrm>
           <a:prstGeom prst="rect">
             <a:avLst/>
@@ -9348,7 +9417,7 @@
       </p:sp>
       <p:sp>
         <p:nvSpPr>
-          <p:cNvPr id="6" name="TextBox 5"/>
+          <p:cNvPr id="8" name="TextBox 7"/>
           <p:cNvSpPr txBox="1"/>
           <p:nvPr/>
         </p:nvSpPr>
@@ -9529,14 +9598,83 @@
       </p:sp>
       <p:sp>
         <p:nvSpPr>
-          <p:cNvPr id="5" name="TextBox 4"/>
+          <p:cNvPr id="5" name="Rounded Rectangle 4"/>
+          <p:cNvSpPr/>
+          <p:nvPr/>
+        </p:nvSpPr>
+        <p:spPr>
+          <a:xfrm>
+            <a:off x="5797149" y="1343926"/>
+            <a:ext cx="6010497" cy="4837658"/>
+          </a:xfrm>
+          <a:prstGeom prst="roundRect">
+            <a:avLst>
+              <a:gd name="adj" fmla="val 4000"/>
+            </a:avLst>
+          </a:prstGeom>
+          <a:solidFill>
+            <a:srgbClr val="E8EEF4"/>
+          </a:solidFill>
+          <a:ln>
+            <a:noFill/>
+          </a:ln>
+        </p:spPr>
+        <p:style>
+          <a:lnRef idx="1">
+            <a:schemeClr val="accent1"/>
+          </a:lnRef>
+          <a:fillRef idx="3">
+            <a:schemeClr val="accent1"/>
+          </a:fillRef>
+          <a:effectRef idx="2">
+            <a:schemeClr val="accent1"/>
+          </a:effectRef>
+          <a:fontRef idx="minor">
+            <a:schemeClr val="lt1"/>
+          </a:fontRef>
+        </p:style>
+        <p:txBody>
+          <a:bodyPr rtlCol="0" anchor="ctr"/>
+          <a:lstStyle/>
+          <a:p>
+            <a:pPr algn="ctr"/>
+          </a:p>
+        </p:txBody>
+      </p:sp>
+      <p:pic>
+        <p:nvPicPr>
+          <p:cNvPr id="6" name="Picture 5" descr="ilus-demo-paso1.png"/>
+          <p:cNvPicPr>
+            <a:picLocks noChangeAspect="1"/>
+          </p:cNvPicPr>
+          <p:nvPr/>
+        </p:nvPicPr>
+        <p:blipFill>
+          <a:blip r:embed="rId2"/>
+          <a:stretch>
+            <a:fillRect/>
+          </a:stretch>
+        </p:blipFill>
+        <p:spPr>
+          <a:xfrm>
+            <a:off x="5870301" y="1417078"/>
+            <a:ext cx="5864193" cy="4691354"/>
+          </a:xfrm>
+          <a:prstGeom prst="rect">
+            <a:avLst/>
+          </a:prstGeom>
+        </p:spPr>
+      </p:pic>
+      <p:sp>
+        <p:nvSpPr>
+          <p:cNvPr id="7" name="TextBox 6"/>
           <p:cNvSpPr txBox="1"/>
           <p:nvPr/>
         </p:nvSpPr>
         <p:spPr>
           <a:xfrm>
-            <a:off x="457200" y="1170432"/>
-            <a:ext cx="11277295" cy="5230368"/>
+            <a:off x="457200" y="1353312"/>
+            <a:ext cx="5093061" cy="5047488"/>
           </a:xfrm>
           <a:prstGeom prst="rect">
             <a:avLst/>
@@ -9636,7 +9774,7 @@
       </p:sp>
       <p:sp>
         <p:nvSpPr>
-          <p:cNvPr id="6" name="TextBox 5"/>
+          <p:cNvPr id="8" name="TextBox 7"/>
           <p:cNvSpPr txBox="1"/>
           <p:nvPr/>
         </p:nvSpPr>
@@ -14381,9 +14519,33 @@
           </a:prstGeom>
         </p:spPr>
       </p:pic>
-      <p:sp>
-        <p:nvSpPr>
-          <p:cNvPr id="18" name="TextBox 17"/>
+      <p:pic>
+        <p:nvPicPr>
+          <p:cNvPr id="10" name="Picture 9" descr="igual-equals-paso5.png"/>
+          <p:cNvPicPr>
+            <a:picLocks noChangeAspect="1"/>
+          </p:cNvPicPr>
+          <p:nvPr/>
+        </p:nvPicPr>
+        <p:blipFill>
+          <a:blip r:embed="rId6"/>
+          <a:stretch>
+            <a:fillRect/>
+          </a:stretch>
+        </p:blipFill>
+        <p:spPr>
+          <a:xfrm>
+            <a:off x="5876318" y="1261872"/>
+            <a:ext cx="5852160" cy="4681728"/>
+          </a:xfrm>
+          <a:prstGeom prst="rect">
+            <a:avLst/>
+          </a:prstGeom>
+        </p:spPr>
+      </p:pic>
+      <p:sp>
+        <p:nvSpPr>
+          <p:cNvPr id="23" name="TextBox 22"/>
           <p:cNvSpPr txBox="1"/>
           <p:nvPr/>
         </p:nvSpPr>
@@ -14418,7 +14580,7 @@
       </p:sp>
       <p:sp>
         <p:nvSpPr>
-          <p:cNvPr id="19" name="TextBox 18"/>
+          <p:cNvPr id="24" name="TextBox 23"/>
           <p:cNvSpPr txBox="1"/>
           <p:nvPr/>
         </p:nvSpPr>
@@ -14505,7 +14667,7 @@
       </p:sp>
       <p:sp>
         <p:nvSpPr>
-          <p:cNvPr id="20" name="TextBox 19"/>
+          <p:cNvPr id="25" name="TextBox 24"/>
           <p:cNvSpPr txBox="1"/>
           <p:nvPr/>
         </p:nvSpPr>
@@ -14710,6 +14872,59 @@
                       </p:childTnLst>
                     </p:cTn>
                   </p:par>
+                  <p:par>
+                    <p:cTn id="18" fill="hold">
+                      <p:stCondLst>
+                        <p:cond delay="indefinite"/>
+                      </p:stCondLst>
+                      <p:childTnLst>
+                        <p:par>
+                          <p:cTn id="19" fill="hold">
+                            <p:stCondLst>
+                              <p:cond delay="0"/>
+                            </p:stCondLst>
+                            <p:childTnLst>
+                              <p:par>
+                                <p:cTn id="20" presetID="10" presetClass="entr" presetSubtype="0" fill="hold" nodeType="clickEffect">
+                                  <p:stCondLst>
+                                    <p:cond delay="0"/>
+                                  </p:stCondLst>
+                                  <p:childTnLst>
+                                    <p:set>
+                                      <p:cBhvr>
+                                        <p:cTn id="21" dur="1" fill="hold">
+                                          <p:stCondLst>
+                                            <p:cond delay="0"/>
+                                          </p:stCondLst>
+                                        </p:cTn>
+                                        <p:tgtEl>
+                                          <p:spTgt spid="10"/>
+                                        </p:tgtEl>
+                                        <p:attrNameLst>
+                                          <p:attrName>style.visibility</p:attrName>
+                                        </p:attrNameLst>
+                                      </p:cBhvr>
+                                      <p:to>
+                                        <p:strVal val="visible"/>
+                                      </p:to>
+                                    </p:set>
+                                    <p:animEffect transition="in" filter="fade">
+                                      <p:cBhvr>
+                                        <p:cTn id="22" dur="450"/>
+                                        <p:tgtEl>
+                                          <p:spTgt spid="10"/>
+                                        </p:tgtEl>
+                                      </p:cBhvr>
+                                    </p:animEffect>
+                                  </p:childTnLst>
+                                </p:cTn>
+                              </p:par>
+                            </p:childTnLst>
+                          </p:cTn>
+                        </p:par>
+                      </p:childTnLst>
+                    </p:cTn>
+                  </p:par>
                 </p:childTnLst>
               </p:cTn>
               <p:prevCondLst>
@@ -14875,14 +15090,83 @@
       </p:sp>
       <p:sp>
         <p:nvSpPr>
-          <p:cNvPr id="5" name="TextBox 4"/>
+          <p:cNvPr id="5" name="Rounded Rectangle 4"/>
+          <p:cNvSpPr/>
+          <p:nvPr/>
+        </p:nvSpPr>
+        <p:spPr>
+          <a:xfrm>
+            <a:off x="5797149" y="1343926"/>
+            <a:ext cx="6010497" cy="4837658"/>
+          </a:xfrm>
+          <a:prstGeom prst="roundRect">
+            <a:avLst>
+              <a:gd name="adj" fmla="val 4000"/>
+            </a:avLst>
+          </a:prstGeom>
+          <a:solidFill>
+            <a:srgbClr val="E8EEF4"/>
+          </a:solidFill>
+          <a:ln>
+            <a:noFill/>
+          </a:ln>
+        </p:spPr>
+        <p:style>
+          <a:lnRef idx="1">
+            <a:schemeClr val="accent1"/>
+          </a:lnRef>
+          <a:fillRef idx="3">
+            <a:schemeClr val="accent1"/>
+          </a:fillRef>
+          <a:effectRef idx="2">
+            <a:schemeClr val="accent1"/>
+          </a:effectRef>
+          <a:fontRef idx="minor">
+            <a:schemeClr val="lt1"/>
+          </a:fontRef>
+        </p:style>
+        <p:txBody>
+          <a:bodyPr rtlCol="0" anchor="ctr"/>
+          <a:lstStyle/>
+          <a:p>
+            <a:pPr algn="ctr"/>
+          </a:p>
+        </p:txBody>
+      </p:sp>
+      <p:pic>
+        <p:nvPicPr>
+          <p:cNvPr id="6" name="Picture 5" descr="ilus-abstraccion-encapsulamiento-paso1.png"/>
+          <p:cNvPicPr>
+            <a:picLocks noChangeAspect="1"/>
+          </p:cNvPicPr>
+          <p:nvPr/>
+        </p:nvPicPr>
+        <p:blipFill>
+          <a:blip r:embed="rId2"/>
+          <a:stretch>
+            <a:fillRect/>
+          </a:stretch>
+        </p:blipFill>
+        <p:spPr>
+          <a:xfrm>
+            <a:off x="5870301" y="1417078"/>
+            <a:ext cx="5864193" cy="4691354"/>
+          </a:xfrm>
+          <a:prstGeom prst="rect">
+            <a:avLst/>
+          </a:prstGeom>
+        </p:spPr>
+      </p:pic>
+      <p:sp>
+        <p:nvSpPr>
+          <p:cNvPr id="7" name="TextBox 6"/>
           <p:cNvSpPr txBox="1"/>
           <p:nvPr/>
         </p:nvSpPr>
         <p:spPr>
           <a:xfrm>
-            <a:off x="457200" y="1170432"/>
-            <a:ext cx="11277295" cy="5230368"/>
+            <a:off x="457200" y="1353312"/>
+            <a:ext cx="5093061" cy="5047488"/>
           </a:xfrm>
           <a:prstGeom prst="rect">
             <a:avLst/>
@@ -14946,7 +15230,7 @@
       </p:sp>
       <p:sp>
         <p:nvSpPr>
-          <p:cNvPr id="6" name="TextBox 5"/>
+          <p:cNvPr id="8" name="TextBox 7"/>
           <p:cNvSpPr txBox="1"/>
           <p:nvPr/>
         </p:nvSpPr>

--- a/Programacion II/Clases/Clase 1 - Introduccion a POO/Presentacion.pptx
+++ b/Programacion II/Clases/Clase 1 - Introduccion a POO/Presentacion.pptx
@@ -5305,7 +5305,7 @@
         <p:spPr>
           <a:xfrm>
             <a:off x="457200" y="1261872"/>
-            <a:ext cx="11277295" cy="4144525"/>
+            <a:ext cx="11277295" cy="3028315"/>
           </a:xfrm>
           <a:prstGeom prst="roundRect">
             <a:avLst>
@@ -5554,8 +5554,8 @@
         </p:nvSpPr>
         <p:spPr>
           <a:xfrm>
-            <a:off x="1188720" y="1719072"/>
-            <a:ext cx="10271455" cy="3550165"/>
+            <a:off x="685800" y="1719072"/>
+            <a:ext cx="502920" cy="2433955"/>
           </a:xfrm>
           <a:prstGeom prst="rect">
             <a:avLst/>
@@ -5568,410 +5568,131 @@
           </a:bodyPr>
           <a:lstStyle/>
           <a:p>
-            <a:pPr>
+            <a:pPr algn="r">
               <a:spcAft>
-                <a:spcPts val="428"/>
+                <a:spcPts val="342"/>
               </a:spcAft>
             </a:pPr>
             <a:r>
-              <a:rPr sz="2000" i="1" b="0">
-                <a:solidFill>
-                  <a:srgbClr val="6A9955"/>
-                </a:solidFill>
-                <a:latin typeface="Consolas"/>
-              </a:rPr>
-              <a:t>/** El objeto se defiende: una edad negativa no tiene sentido en el dominio. */</a:t>
-            </a:r>
-          </a:p>
-          <a:p>
-            <a:pPr>
+              <a:rPr sz="1600" i="0" b="0">
+                <a:solidFill>
+                  <a:srgbClr val="858585"/>
+                </a:solidFill>
+                <a:latin typeface="Consolas"/>
+              </a:rPr>
+              <a:t>1</a:t>
+            </a:r>
+          </a:p>
+          <a:p>
+            <a:pPr algn="r">
               <a:spcAft>
-                <a:spcPts val="428"/>
+                <a:spcPts val="342"/>
               </a:spcAft>
             </a:pPr>
             <a:r>
-              <a:rPr sz="2000" i="0" b="0">
-                <a:solidFill>
-                  <a:srgbClr val="569CD6"/>
-                </a:solidFill>
-                <a:latin typeface="Consolas"/>
-              </a:rPr>
-              <a:t>public</a:t>
-            </a:r>
-            <a:r>
-              <a:rPr sz="2000" i="0" b="0">
-                <a:solidFill>
-                  <a:srgbClr val="D4D4D4"/>
-                </a:solidFill>
-                <a:latin typeface="Consolas"/>
-              </a:rPr>
-              <a:t> </a:t>
-            </a:r>
-            <a:r>
-              <a:rPr sz="2000" i="0" b="0">
-                <a:solidFill>
-                  <a:srgbClr val="569CD6"/>
-                </a:solidFill>
-                <a:latin typeface="Consolas"/>
-              </a:rPr>
-              <a:t>void</a:t>
-            </a:r>
-            <a:r>
-              <a:rPr sz="2000" i="0" b="0">
-                <a:solidFill>
-                  <a:srgbClr val="D4D4D4"/>
-                </a:solidFill>
-                <a:latin typeface="Consolas"/>
-              </a:rPr>
-              <a:t> </a:t>
-            </a:r>
-            <a:r>
-              <a:rPr sz="2000" i="0" b="0">
-                <a:solidFill>
-                  <a:srgbClr val="DCDCAA"/>
-                </a:solidFill>
-                <a:latin typeface="Consolas"/>
-              </a:rPr>
-              <a:t>setEdad</a:t>
-            </a:r>
-            <a:r>
-              <a:rPr sz="2000" i="0" b="0">
-                <a:solidFill>
-                  <a:srgbClr val="D4D4D4"/>
-                </a:solidFill>
-                <a:latin typeface="Consolas"/>
-              </a:rPr>
-              <a:t>(</a:t>
-            </a:r>
-            <a:r>
-              <a:rPr sz="2000" i="0" b="0">
-                <a:solidFill>
-                  <a:srgbClr val="4EC9B0"/>
-                </a:solidFill>
-                <a:latin typeface="Consolas"/>
-              </a:rPr>
-              <a:t>int</a:t>
-            </a:r>
-            <a:r>
-              <a:rPr sz="2000" i="0" b="0">
-                <a:solidFill>
-                  <a:srgbClr val="D4D4D4"/>
-                </a:solidFill>
-                <a:latin typeface="Consolas"/>
-              </a:rPr>
-              <a:t> </a:t>
-            </a:r>
-            <a:r>
-              <a:rPr sz="2000" i="0" b="0">
-                <a:solidFill>
-                  <a:srgbClr val="D4D4D4"/>
-                </a:solidFill>
-                <a:latin typeface="Consolas"/>
-              </a:rPr>
-              <a:t>edad</a:t>
-            </a:r>
-            <a:r>
-              <a:rPr sz="2000" i="0" b="0">
-                <a:solidFill>
-                  <a:srgbClr val="D4D4D4"/>
-                </a:solidFill>
-                <a:latin typeface="Consolas"/>
-              </a:rPr>
-              <a:t>) {</a:t>
-            </a:r>
-          </a:p>
-          <a:p>
-            <a:pPr>
+              <a:rPr sz="1600" i="0" b="0">
+                <a:solidFill>
+                  <a:srgbClr val="858585"/>
+                </a:solidFill>
+                <a:latin typeface="Consolas"/>
+              </a:rPr>
+              <a:t>2</a:t>
+            </a:r>
+          </a:p>
+          <a:p>
+            <a:pPr algn="r">
               <a:spcAft>
-                <a:spcPts val="428"/>
+                <a:spcPts val="342"/>
               </a:spcAft>
             </a:pPr>
             <a:r>
-              <a:rPr sz="2000" i="0" b="0">
-                <a:solidFill>
-                  <a:srgbClr val="D4D4D4"/>
-                </a:solidFill>
-                <a:latin typeface="Consolas"/>
-              </a:rPr>
-              <a:t>    </a:t>
-            </a:r>
-            <a:r>
-              <a:rPr sz="2000" i="0" b="0">
-                <a:solidFill>
-                  <a:srgbClr val="569CD6"/>
-                </a:solidFill>
-                <a:latin typeface="Consolas"/>
-              </a:rPr>
-              <a:t>if</a:t>
-            </a:r>
-            <a:r>
-              <a:rPr sz="2000" i="0" b="0">
-                <a:solidFill>
-                  <a:srgbClr val="D4D4D4"/>
-                </a:solidFill>
-                <a:latin typeface="Consolas"/>
-              </a:rPr>
-              <a:t> (</a:t>
-            </a:r>
-            <a:r>
-              <a:rPr sz="2000" i="0" b="0">
-                <a:solidFill>
-                  <a:srgbClr val="D4D4D4"/>
-                </a:solidFill>
-                <a:latin typeface="Consolas"/>
-              </a:rPr>
-              <a:t>edad</a:t>
-            </a:r>
-            <a:r>
-              <a:rPr sz="2000" i="0" b="0">
-                <a:solidFill>
-                  <a:srgbClr val="D4D4D4"/>
-                </a:solidFill>
-                <a:latin typeface="Consolas"/>
-              </a:rPr>
-              <a:t> &lt; </a:t>
-            </a:r>
-            <a:r>
-              <a:rPr sz="2000" i="0" b="0">
-                <a:solidFill>
-                  <a:srgbClr val="B5CEA8"/>
-                </a:solidFill>
-                <a:latin typeface="Consolas"/>
-              </a:rPr>
-              <a:t>0</a:t>
-            </a:r>
-            <a:r>
-              <a:rPr sz="2000" i="0" b="0">
-                <a:solidFill>
-                  <a:srgbClr val="D4D4D4"/>
-                </a:solidFill>
-                <a:latin typeface="Consolas"/>
-              </a:rPr>
-              <a:t>) {</a:t>
-            </a:r>
-          </a:p>
-          <a:p>
-            <a:pPr>
+              <a:rPr sz="1600" i="0" b="0">
+                <a:solidFill>
+                  <a:srgbClr val="858585"/>
+                </a:solidFill>
+                <a:latin typeface="Consolas"/>
+              </a:rPr>
+              <a:t>3</a:t>
+            </a:r>
+          </a:p>
+          <a:p>
+            <a:pPr algn="r">
               <a:spcAft>
-                <a:spcPts val="428"/>
+                <a:spcPts val="342"/>
               </a:spcAft>
             </a:pPr>
             <a:r>
-              <a:rPr sz="2000" i="0" b="0">
-                <a:solidFill>
-                  <a:srgbClr val="D4D4D4"/>
-                </a:solidFill>
-                <a:latin typeface="Consolas"/>
-              </a:rPr>
-              <a:t>        </a:t>
-            </a:r>
-            <a:r>
-              <a:rPr sz="2000" i="0" b="0">
-                <a:solidFill>
-                  <a:srgbClr val="DCDCAA"/>
-                </a:solidFill>
-                <a:latin typeface="Consolas"/>
-              </a:rPr>
-              <a:t>System.out.println</a:t>
-            </a:r>
-            <a:r>
-              <a:rPr sz="2000" i="0" b="0">
-                <a:solidFill>
-                  <a:srgbClr val="D4D4D4"/>
-                </a:solidFill>
-                <a:latin typeface="Consolas"/>
-              </a:rPr>
-              <a:t>(</a:t>
-            </a:r>
-            <a:r>
-              <a:rPr sz="2000" i="0" b="0">
-                <a:solidFill>
-                  <a:srgbClr val="CE9178"/>
-                </a:solidFill>
-                <a:latin typeface="Consolas"/>
-              </a:rPr>
-              <a:t>"Edad invalida, se conserva la anterior: "</a:t>
-            </a:r>
-            <a:r>
-              <a:rPr sz="2000" i="0" b="0">
-                <a:solidFill>
-                  <a:srgbClr val="D4D4D4"/>
-                </a:solidFill>
-                <a:latin typeface="Consolas"/>
-              </a:rPr>
-              <a:t> + </a:t>
-            </a:r>
-            <a:r>
-              <a:rPr sz="2000" i="0" b="0">
-                <a:solidFill>
-                  <a:srgbClr val="569CD6"/>
-                </a:solidFill>
-                <a:latin typeface="Consolas"/>
-              </a:rPr>
-              <a:t>this</a:t>
-            </a:r>
-            <a:r>
-              <a:rPr sz="2000" i="0" b="0">
-                <a:solidFill>
-                  <a:srgbClr val="D4D4D4"/>
-                </a:solidFill>
-                <a:latin typeface="Consolas"/>
-              </a:rPr>
-              <a:t>.</a:t>
-            </a:r>
-            <a:r>
-              <a:rPr sz="2000" i="0" b="0">
-                <a:solidFill>
-                  <a:srgbClr val="D4D4D4"/>
-                </a:solidFill>
-                <a:latin typeface="Consolas"/>
-              </a:rPr>
-              <a:t>edad</a:t>
-            </a:r>
-            <a:r>
-              <a:rPr sz="2000" i="0" b="0">
-                <a:solidFill>
-                  <a:srgbClr val="D4D4D4"/>
-                </a:solidFill>
-                <a:latin typeface="Consolas"/>
-              </a:rPr>
-              <a:t>);</a:t>
-            </a:r>
-          </a:p>
-          <a:p>
-            <a:pPr>
+              <a:rPr sz="1600" i="0" b="0">
+                <a:solidFill>
+                  <a:srgbClr val="858585"/>
+                </a:solidFill>
+                <a:latin typeface="Consolas"/>
+              </a:rPr>
+              <a:t>4</a:t>
+            </a:r>
+          </a:p>
+          <a:p>
+            <a:pPr algn="r">
               <a:spcAft>
-                <a:spcPts val="428"/>
+                <a:spcPts val="342"/>
               </a:spcAft>
             </a:pPr>
             <a:r>
-              <a:rPr sz="2000" i="0" b="0">
-                <a:solidFill>
-                  <a:srgbClr val="D4D4D4"/>
-                </a:solidFill>
-                <a:latin typeface="Consolas"/>
-              </a:rPr>
-              <a:t>        </a:t>
-            </a:r>
-            <a:r>
-              <a:rPr sz="2000" i="0" b="0">
-                <a:solidFill>
-                  <a:srgbClr val="569CD6"/>
-                </a:solidFill>
-                <a:latin typeface="Consolas"/>
-              </a:rPr>
-              <a:t>return</a:t>
-            </a:r>
-            <a:r>
-              <a:rPr sz="2000" i="0" b="0">
-                <a:solidFill>
-                  <a:srgbClr val="D4D4D4"/>
-                </a:solidFill>
-                <a:latin typeface="Consolas"/>
-              </a:rPr>
-              <a:t>;</a:t>
-            </a:r>
-          </a:p>
-          <a:p>
-            <a:pPr>
+              <a:rPr sz="1600" i="0" b="0">
+                <a:solidFill>
+                  <a:srgbClr val="858585"/>
+                </a:solidFill>
+                <a:latin typeface="Consolas"/>
+              </a:rPr>
+              <a:t>5</a:t>
+            </a:r>
+          </a:p>
+          <a:p>
+            <a:pPr algn="r">
               <a:spcAft>
-                <a:spcPts val="428"/>
+                <a:spcPts val="342"/>
               </a:spcAft>
             </a:pPr>
             <a:r>
-              <a:rPr sz="2000" i="0" b="0">
-                <a:solidFill>
-                  <a:srgbClr val="D4D4D4"/>
-                </a:solidFill>
-                <a:latin typeface="Consolas"/>
-              </a:rPr>
-              <a:t>    }</a:t>
-            </a:r>
-          </a:p>
-          <a:p>
-            <a:pPr>
+              <a:rPr sz="1600" i="0" b="0">
+                <a:solidFill>
+                  <a:srgbClr val="858585"/>
+                </a:solidFill>
+                <a:latin typeface="Consolas"/>
+              </a:rPr>
+              <a:t>6</a:t>
+            </a:r>
+          </a:p>
+          <a:p>
+            <a:pPr algn="r">
               <a:spcAft>
-                <a:spcPts val="428"/>
+                <a:spcPts val="342"/>
               </a:spcAft>
             </a:pPr>
             <a:r>
-              <a:rPr sz="2000" i="0" b="0">
-                <a:solidFill>
-                  <a:srgbClr val="D4D4D4"/>
-                </a:solidFill>
-                <a:latin typeface="Consolas"/>
-              </a:rPr>
-              <a:t>    </a:t>
-            </a:r>
-            <a:r>
-              <a:rPr sz="2000" i="0" b="0">
-                <a:solidFill>
-                  <a:srgbClr val="569CD6"/>
-                </a:solidFill>
-                <a:latin typeface="Consolas"/>
-              </a:rPr>
-              <a:t>this</a:t>
-            </a:r>
-            <a:r>
-              <a:rPr sz="2000" i="0" b="0">
-                <a:solidFill>
-                  <a:srgbClr val="D4D4D4"/>
-                </a:solidFill>
-                <a:latin typeface="Consolas"/>
-              </a:rPr>
-              <a:t>.</a:t>
-            </a:r>
-            <a:r>
-              <a:rPr sz="2000" i="0" b="0">
-                <a:solidFill>
-                  <a:srgbClr val="D4D4D4"/>
-                </a:solidFill>
-                <a:latin typeface="Consolas"/>
-              </a:rPr>
-              <a:t>edad</a:t>
-            </a:r>
-            <a:r>
-              <a:rPr sz="2000" i="0" b="0">
-                <a:solidFill>
-                  <a:srgbClr val="D4D4D4"/>
-                </a:solidFill>
-                <a:latin typeface="Consolas"/>
-              </a:rPr>
-              <a:t> = </a:t>
-            </a:r>
-            <a:r>
-              <a:rPr sz="2000" i="0" b="0">
-                <a:solidFill>
-                  <a:srgbClr val="D4D4D4"/>
-                </a:solidFill>
-                <a:latin typeface="Consolas"/>
-              </a:rPr>
-              <a:t>edad</a:t>
-            </a:r>
-            <a:r>
-              <a:rPr sz="2000" i="0" b="0">
-                <a:solidFill>
-                  <a:srgbClr val="D4D4D4"/>
-                </a:solidFill>
-                <a:latin typeface="Consolas"/>
-              </a:rPr>
-              <a:t>;</a:t>
-            </a:r>
-          </a:p>
-          <a:p>
-            <a:pPr>
+              <a:rPr sz="1600" i="0" b="0">
+                <a:solidFill>
+                  <a:srgbClr val="858585"/>
+                </a:solidFill>
+                <a:latin typeface="Consolas"/>
+              </a:rPr>
+              <a:t>7</a:t>
+            </a:r>
+          </a:p>
+          <a:p>
+            <a:pPr algn="r">
               <a:spcAft>
-                <a:spcPts val="428"/>
+                <a:spcPts val="342"/>
               </a:spcAft>
             </a:pPr>
             <a:r>
-              <a:rPr sz="2000" i="0" b="0">
-                <a:solidFill>
-                  <a:srgbClr val="D4D4D4"/>
-                </a:solidFill>
-                <a:latin typeface="Consolas"/>
-              </a:rPr>
-              <a:t>}</a:t>
+              <a:rPr sz="1600" i="0" b="0">
+                <a:solidFill>
+                  <a:srgbClr val="858585"/>
+                </a:solidFill>
+                <a:latin typeface="Consolas"/>
+              </a:rPr>
+              <a:t>8</a:t>
             </a:r>
           </a:p>
         </p:txBody>
@@ -5984,8 +5705,8 @@
         </p:nvSpPr>
         <p:spPr>
           <a:xfrm>
-            <a:off x="457200" y="6035040"/>
-            <a:ext cx="11277295" cy="365760"/>
+            <a:off x="1188720" y="1719072"/>
+            <a:ext cx="10271455" cy="2433955"/>
           </a:xfrm>
           <a:prstGeom prst="rect">
             <a:avLst/>
@@ -5998,6 +5719,436 @@
           </a:bodyPr>
           <a:lstStyle/>
           <a:p>
+            <a:pPr>
+              <a:spcAft>
+                <a:spcPts val="342"/>
+              </a:spcAft>
+            </a:pPr>
+            <a:r>
+              <a:rPr sz="1600" i="1" b="0">
+                <a:solidFill>
+                  <a:srgbClr val="6A9955"/>
+                </a:solidFill>
+                <a:latin typeface="Consolas"/>
+              </a:rPr>
+              <a:t>/** El objeto se defiende: una edad negativa no tiene sentido en el dominio. */</a:t>
+            </a:r>
+          </a:p>
+          <a:p>
+            <a:pPr>
+              <a:spcAft>
+                <a:spcPts val="342"/>
+              </a:spcAft>
+            </a:pPr>
+            <a:r>
+              <a:rPr sz="1600" i="0" b="0">
+                <a:solidFill>
+                  <a:srgbClr val="569CD6"/>
+                </a:solidFill>
+                <a:latin typeface="Consolas"/>
+              </a:rPr>
+              <a:t>public</a:t>
+            </a:r>
+            <a:r>
+              <a:rPr sz="1600" i="0" b="0">
+                <a:solidFill>
+                  <a:srgbClr val="D4D4D4"/>
+                </a:solidFill>
+                <a:latin typeface="Consolas"/>
+              </a:rPr>
+              <a:t> </a:t>
+            </a:r>
+            <a:r>
+              <a:rPr sz="1600" i="0" b="0">
+                <a:solidFill>
+                  <a:srgbClr val="569CD6"/>
+                </a:solidFill>
+                <a:latin typeface="Consolas"/>
+              </a:rPr>
+              <a:t>void</a:t>
+            </a:r>
+            <a:r>
+              <a:rPr sz="1600" i="0" b="0">
+                <a:solidFill>
+                  <a:srgbClr val="D4D4D4"/>
+                </a:solidFill>
+                <a:latin typeface="Consolas"/>
+              </a:rPr>
+              <a:t> </a:t>
+            </a:r>
+            <a:r>
+              <a:rPr sz="1600" i="0" b="0">
+                <a:solidFill>
+                  <a:srgbClr val="DCDCAA"/>
+                </a:solidFill>
+                <a:latin typeface="Consolas"/>
+              </a:rPr>
+              <a:t>setEdad</a:t>
+            </a:r>
+            <a:r>
+              <a:rPr sz="1600" i="0" b="0">
+                <a:solidFill>
+                  <a:srgbClr val="D4D4D4"/>
+                </a:solidFill>
+                <a:latin typeface="Consolas"/>
+              </a:rPr>
+              <a:t>(</a:t>
+            </a:r>
+            <a:r>
+              <a:rPr sz="1600" i="0" b="0">
+                <a:solidFill>
+                  <a:srgbClr val="4EC9B0"/>
+                </a:solidFill>
+                <a:latin typeface="Consolas"/>
+              </a:rPr>
+              <a:t>int</a:t>
+            </a:r>
+            <a:r>
+              <a:rPr sz="1600" i="0" b="0">
+                <a:solidFill>
+                  <a:srgbClr val="D4D4D4"/>
+                </a:solidFill>
+                <a:latin typeface="Consolas"/>
+              </a:rPr>
+              <a:t> </a:t>
+            </a:r>
+            <a:r>
+              <a:rPr sz="1600" i="0" b="0">
+                <a:solidFill>
+                  <a:srgbClr val="D4D4D4"/>
+                </a:solidFill>
+                <a:latin typeface="Consolas"/>
+              </a:rPr>
+              <a:t>edad</a:t>
+            </a:r>
+            <a:r>
+              <a:rPr sz="1600" i="0" b="0">
+                <a:solidFill>
+                  <a:srgbClr val="D4D4D4"/>
+                </a:solidFill>
+                <a:latin typeface="Consolas"/>
+              </a:rPr>
+              <a:t>) {</a:t>
+            </a:r>
+          </a:p>
+          <a:p>
+            <a:pPr>
+              <a:spcAft>
+                <a:spcPts val="342"/>
+              </a:spcAft>
+            </a:pPr>
+            <a:r>
+              <a:rPr sz="1600" i="0" b="0">
+                <a:solidFill>
+                  <a:srgbClr val="D4D4D4"/>
+                </a:solidFill>
+                <a:latin typeface="Consolas"/>
+              </a:rPr>
+              <a:t>    </a:t>
+            </a:r>
+            <a:r>
+              <a:rPr sz="1600" i="0" b="0">
+                <a:solidFill>
+                  <a:srgbClr val="569CD6"/>
+                </a:solidFill>
+                <a:latin typeface="Consolas"/>
+              </a:rPr>
+              <a:t>if</a:t>
+            </a:r>
+            <a:r>
+              <a:rPr sz="1600" i="0" b="0">
+                <a:solidFill>
+                  <a:srgbClr val="D4D4D4"/>
+                </a:solidFill>
+                <a:latin typeface="Consolas"/>
+              </a:rPr>
+              <a:t> (</a:t>
+            </a:r>
+            <a:r>
+              <a:rPr sz="1600" i="0" b="0">
+                <a:solidFill>
+                  <a:srgbClr val="D4D4D4"/>
+                </a:solidFill>
+                <a:latin typeface="Consolas"/>
+              </a:rPr>
+              <a:t>edad</a:t>
+            </a:r>
+            <a:r>
+              <a:rPr sz="1600" i="0" b="0">
+                <a:solidFill>
+                  <a:srgbClr val="D4D4D4"/>
+                </a:solidFill>
+                <a:latin typeface="Consolas"/>
+              </a:rPr>
+              <a:t> &lt; </a:t>
+            </a:r>
+            <a:r>
+              <a:rPr sz="1600" i="0" b="0">
+                <a:solidFill>
+                  <a:srgbClr val="B5CEA8"/>
+                </a:solidFill>
+                <a:latin typeface="Consolas"/>
+              </a:rPr>
+              <a:t>0</a:t>
+            </a:r>
+            <a:r>
+              <a:rPr sz="1600" i="0" b="0">
+                <a:solidFill>
+                  <a:srgbClr val="D4D4D4"/>
+                </a:solidFill>
+                <a:latin typeface="Consolas"/>
+              </a:rPr>
+              <a:t>) {</a:t>
+            </a:r>
+          </a:p>
+          <a:p>
+            <a:pPr>
+              <a:spcAft>
+                <a:spcPts val="342"/>
+              </a:spcAft>
+            </a:pPr>
+            <a:r>
+              <a:rPr sz="1600" i="0" b="0">
+                <a:solidFill>
+                  <a:srgbClr val="D4D4D4"/>
+                </a:solidFill>
+                <a:latin typeface="Consolas"/>
+              </a:rPr>
+              <a:t>        </a:t>
+            </a:r>
+            <a:r>
+              <a:rPr sz="1600" i="0" b="0">
+                <a:solidFill>
+                  <a:srgbClr val="DCDCAA"/>
+                </a:solidFill>
+                <a:latin typeface="Consolas"/>
+              </a:rPr>
+              <a:t>System.out.println</a:t>
+            </a:r>
+            <a:r>
+              <a:rPr sz="1600" i="0" b="0">
+                <a:solidFill>
+                  <a:srgbClr val="D4D4D4"/>
+                </a:solidFill>
+                <a:latin typeface="Consolas"/>
+              </a:rPr>
+              <a:t>(</a:t>
+            </a:r>
+            <a:r>
+              <a:rPr sz="1600" i="0" b="0">
+                <a:solidFill>
+                  <a:srgbClr val="CE9178"/>
+                </a:solidFill>
+                <a:latin typeface="Consolas"/>
+              </a:rPr>
+              <a:t>"Edad invalida, se conserva la anterior: "</a:t>
+            </a:r>
+            <a:r>
+              <a:rPr sz="1600" i="0" b="0">
+                <a:solidFill>
+                  <a:srgbClr val="D4D4D4"/>
+                </a:solidFill>
+                <a:latin typeface="Consolas"/>
+              </a:rPr>
+              <a:t> + </a:t>
+            </a:r>
+            <a:r>
+              <a:rPr sz="1600" i="0" b="0">
+                <a:solidFill>
+                  <a:srgbClr val="569CD6"/>
+                </a:solidFill>
+                <a:latin typeface="Consolas"/>
+              </a:rPr>
+              <a:t>this</a:t>
+            </a:r>
+            <a:r>
+              <a:rPr sz="1600" i="0" b="0">
+                <a:solidFill>
+                  <a:srgbClr val="D4D4D4"/>
+                </a:solidFill>
+                <a:latin typeface="Consolas"/>
+              </a:rPr>
+              <a:t>.</a:t>
+            </a:r>
+            <a:r>
+              <a:rPr sz="1600" i="0" b="0">
+                <a:solidFill>
+                  <a:srgbClr val="D4D4D4"/>
+                </a:solidFill>
+                <a:latin typeface="Consolas"/>
+              </a:rPr>
+              <a:t>edad</a:t>
+            </a:r>
+            <a:r>
+              <a:rPr sz="1600" i="0" b="0">
+                <a:solidFill>
+                  <a:srgbClr val="D4D4D4"/>
+                </a:solidFill>
+                <a:latin typeface="Consolas"/>
+              </a:rPr>
+              <a:t>);</a:t>
+            </a:r>
+          </a:p>
+          <a:p>
+            <a:pPr>
+              <a:spcAft>
+                <a:spcPts val="342"/>
+              </a:spcAft>
+            </a:pPr>
+            <a:r>
+              <a:rPr sz="1600" i="0" b="0">
+                <a:solidFill>
+                  <a:srgbClr val="D4D4D4"/>
+                </a:solidFill>
+                <a:latin typeface="Consolas"/>
+              </a:rPr>
+              <a:t>        </a:t>
+            </a:r>
+            <a:r>
+              <a:rPr sz="1600" i="0" b="0">
+                <a:solidFill>
+                  <a:srgbClr val="569CD6"/>
+                </a:solidFill>
+                <a:latin typeface="Consolas"/>
+              </a:rPr>
+              <a:t>return</a:t>
+            </a:r>
+            <a:r>
+              <a:rPr sz="1600" i="0" b="0">
+                <a:solidFill>
+                  <a:srgbClr val="D4D4D4"/>
+                </a:solidFill>
+                <a:latin typeface="Consolas"/>
+              </a:rPr>
+              <a:t>;</a:t>
+            </a:r>
+          </a:p>
+          <a:p>
+            <a:pPr>
+              <a:spcAft>
+                <a:spcPts val="342"/>
+              </a:spcAft>
+            </a:pPr>
+            <a:r>
+              <a:rPr sz="1600" i="0" b="0">
+                <a:solidFill>
+                  <a:srgbClr val="D4D4D4"/>
+                </a:solidFill>
+                <a:latin typeface="Consolas"/>
+              </a:rPr>
+              <a:t>    }</a:t>
+            </a:r>
+          </a:p>
+          <a:p>
+            <a:pPr>
+              <a:spcAft>
+                <a:spcPts val="342"/>
+              </a:spcAft>
+            </a:pPr>
+            <a:r>
+              <a:rPr sz="1600" i="0" b="0">
+                <a:solidFill>
+                  <a:srgbClr val="D4D4D4"/>
+                </a:solidFill>
+                <a:latin typeface="Consolas"/>
+              </a:rPr>
+              <a:t>    </a:t>
+            </a:r>
+            <a:r>
+              <a:rPr sz="1600" i="0" b="0">
+                <a:solidFill>
+                  <a:srgbClr val="569CD6"/>
+                </a:solidFill>
+                <a:latin typeface="Consolas"/>
+              </a:rPr>
+              <a:t>this</a:t>
+            </a:r>
+            <a:r>
+              <a:rPr sz="1600" i="0" b="0">
+                <a:solidFill>
+                  <a:srgbClr val="D4D4D4"/>
+                </a:solidFill>
+                <a:latin typeface="Consolas"/>
+              </a:rPr>
+              <a:t>.</a:t>
+            </a:r>
+            <a:r>
+              <a:rPr sz="1600" i="0" b="0">
+                <a:solidFill>
+                  <a:srgbClr val="D4D4D4"/>
+                </a:solidFill>
+                <a:latin typeface="Consolas"/>
+              </a:rPr>
+              <a:t>edad</a:t>
+            </a:r>
+            <a:r>
+              <a:rPr sz="1600" i="0" b="0">
+                <a:solidFill>
+                  <a:srgbClr val="D4D4D4"/>
+                </a:solidFill>
+                <a:latin typeface="Consolas"/>
+              </a:rPr>
+              <a:t> = </a:t>
+            </a:r>
+            <a:r>
+              <a:rPr sz="1600" i="0" b="0">
+                <a:solidFill>
+                  <a:srgbClr val="D4D4D4"/>
+                </a:solidFill>
+                <a:latin typeface="Consolas"/>
+              </a:rPr>
+              <a:t>edad</a:t>
+            </a:r>
+            <a:r>
+              <a:rPr sz="1600" i="0" b="0">
+                <a:solidFill>
+                  <a:srgbClr val="D4D4D4"/>
+                </a:solidFill>
+                <a:latin typeface="Consolas"/>
+              </a:rPr>
+              <a:t>;</a:t>
+            </a:r>
+          </a:p>
+          <a:p>
+            <a:pPr>
+              <a:spcAft>
+                <a:spcPts val="342"/>
+              </a:spcAft>
+            </a:pPr>
+            <a:r>
+              <a:rPr sz="1600" i="0" b="0">
+                <a:solidFill>
+                  <a:srgbClr val="D4D4D4"/>
+                </a:solidFill>
+                <a:latin typeface="Consolas"/>
+              </a:rPr>
+              <a:t>}</a:t>
+            </a:r>
+          </a:p>
+        </p:txBody>
+      </p:sp>
+      <p:sp>
+        <p:nvSpPr>
+          <p:cNvPr id="13" name="TextBox 12"/>
+          <p:cNvSpPr txBox="1"/>
+          <p:nvPr/>
+        </p:nvSpPr>
+        <p:spPr>
+          <a:xfrm>
+            <a:off x="457200" y="6035040"/>
+            <a:ext cx="11277295" cy="365760"/>
+          </a:xfrm>
+          <a:prstGeom prst="rect">
+            <a:avLst/>
+          </a:prstGeom>
+          <a:noFill/>
+        </p:spPr>
+        <p:txBody>
+          <a:bodyPr wrap="square">
+            <a:spAutoFit/>
+          </a:bodyPr>
+          <a:lstStyle/>
+          <a:p>
             <a:pPr algn="ctr"/>
             <a:r>
               <a:rPr sz="1300" b="0" i="1">
@@ -6013,7 +6164,7 @@
       </p:sp>
       <p:sp>
         <p:nvSpPr>
-          <p:cNvPr id="13" name="TextBox 12"/>
+          <p:cNvPr id="14" name="TextBox 13"/>
           <p:cNvSpPr txBox="1"/>
           <p:nvPr/>
         </p:nvSpPr>
@@ -7297,7 +7448,7 @@
         <p:spPr>
           <a:xfrm>
             <a:off x="457200" y="1261872"/>
-            <a:ext cx="11277295" cy="4568884"/>
+            <a:ext cx="11277295" cy="4398352"/>
           </a:xfrm>
           <a:prstGeom prst="roundRect">
             <a:avLst>
@@ -7547,7 +7698,7 @@
         <p:spPr>
           <a:xfrm>
             <a:off x="685800" y="1719072"/>
-            <a:ext cx="502920" cy="3974524"/>
+            <a:ext cx="502920" cy="3803992"/>
           </a:xfrm>
           <a:prstGeom prst="rect">
             <a:avLst/>
@@ -7562,11 +7713,11 @@
           <a:p>
             <a:pPr algn="r">
               <a:spcAft>
-                <a:spcPts val="428"/>
+                <a:spcPts val="407"/>
               </a:spcAft>
             </a:pPr>
             <a:r>
-              <a:rPr sz="2000" i="0" b="0">
+              <a:rPr sz="1900" i="0" b="0">
                 <a:solidFill>
                   <a:srgbClr val="858585"/>
                 </a:solidFill>
@@ -7578,11 +7729,11 @@
           <a:p>
             <a:pPr algn="r">
               <a:spcAft>
-                <a:spcPts val="428"/>
+                <a:spcPts val="407"/>
               </a:spcAft>
             </a:pPr>
             <a:r>
-              <a:rPr sz="2000" i="0" b="0">
+              <a:rPr sz="1900" i="0" b="0">
                 <a:solidFill>
                   <a:srgbClr val="858585"/>
                 </a:solidFill>
@@ -7594,11 +7745,11 @@
           <a:p>
             <a:pPr algn="r">
               <a:spcAft>
-                <a:spcPts val="428"/>
+                <a:spcPts val="407"/>
               </a:spcAft>
             </a:pPr>
             <a:r>
-              <a:rPr sz="2000" i="0" b="0">
+              <a:rPr sz="1900" i="0" b="0">
                 <a:solidFill>
                   <a:srgbClr val="858585"/>
                 </a:solidFill>
@@ -7610,11 +7761,11 @@
           <a:p>
             <a:pPr algn="r">
               <a:spcAft>
-                <a:spcPts val="428"/>
+                <a:spcPts val="407"/>
               </a:spcAft>
             </a:pPr>
             <a:r>
-              <a:rPr sz="2000" i="0" b="0">
+              <a:rPr sz="1900" i="0" b="0">
                 <a:solidFill>
                   <a:srgbClr val="858585"/>
                 </a:solidFill>
@@ -7626,11 +7777,11 @@
           <a:p>
             <a:pPr algn="r">
               <a:spcAft>
-                <a:spcPts val="428"/>
+                <a:spcPts val="407"/>
               </a:spcAft>
             </a:pPr>
             <a:r>
-              <a:rPr sz="2000" i="0" b="0">
+              <a:rPr sz="1900" i="0" b="0">
                 <a:solidFill>
                   <a:srgbClr val="858585"/>
                 </a:solidFill>
@@ -7642,11 +7793,11 @@
           <a:p>
             <a:pPr algn="r">
               <a:spcAft>
-                <a:spcPts val="428"/>
+                <a:spcPts val="407"/>
               </a:spcAft>
             </a:pPr>
             <a:r>
-              <a:rPr sz="2000" i="0" b="0">
+              <a:rPr sz="1900" i="0" b="0">
                 <a:solidFill>
                   <a:srgbClr val="858585"/>
                 </a:solidFill>
@@ -7658,11 +7809,11 @@
           <a:p>
             <a:pPr algn="r">
               <a:spcAft>
-                <a:spcPts val="428"/>
+                <a:spcPts val="407"/>
               </a:spcAft>
             </a:pPr>
             <a:r>
-              <a:rPr sz="2000" i="0" b="0">
+              <a:rPr sz="1900" i="0" b="0">
                 <a:solidFill>
                   <a:srgbClr val="858585"/>
                 </a:solidFill>
@@ -7674,11 +7825,11 @@
           <a:p>
             <a:pPr algn="r">
               <a:spcAft>
-                <a:spcPts val="428"/>
+                <a:spcPts val="407"/>
               </a:spcAft>
             </a:pPr>
             <a:r>
-              <a:rPr sz="2000" i="0" b="0">
+              <a:rPr sz="1900" i="0" b="0">
                 <a:solidFill>
                   <a:srgbClr val="858585"/>
                 </a:solidFill>
@@ -7690,11 +7841,11 @@
           <a:p>
             <a:pPr algn="r">
               <a:spcAft>
-                <a:spcPts val="428"/>
+                <a:spcPts val="407"/>
               </a:spcAft>
             </a:pPr>
             <a:r>
-              <a:rPr sz="2000" i="0" b="0">
+              <a:rPr sz="1900" i="0" b="0">
                 <a:solidFill>
                   <a:srgbClr val="858585"/>
                 </a:solidFill>
@@ -7706,11 +7857,11 @@
           <a:p>
             <a:pPr algn="r">
               <a:spcAft>
-                <a:spcPts val="428"/>
+                <a:spcPts val="407"/>
               </a:spcAft>
             </a:pPr>
             <a:r>
-              <a:rPr sz="2000" i="0" b="0">
+              <a:rPr sz="1900" i="0" b="0">
                 <a:solidFill>
                   <a:srgbClr val="858585"/>
                 </a:solidFill>
@@ -7722,11 +7873,11 @@
           <a:p>
             <a:pPr algn="r">
               <a:spcAft>
-                <a:spcPts val="428"/>
+                <a:spcPts val="407"/>
               </a:spcAft>
             </a:pPr>
             <a:r>
-              <a:rPr sz="2000" i="0" b="0">
+              <a:rPr sz="1900" i="0" b="0">
                 <a:solidFill>
                   <a:srgbClr val="858585"/>
                 </a:solidFill>
@@ -7746,7 +7897,7 @@
         <p:spPr>
           <a:xfrm>
             <a:off x="1188720" y="1719072"/>
-            <a:ext cx="10271455" cy="3974524"/>
+            <a:ext cx="10271455" cy="3803992"/>
           </a:xfrm>
           <a:prstGeom prst="rect">
             <a:avLst/>
@@ -7761,11 +7912,11 @@
           <a:p>
             <a:pPr>
               <a:spcAft>
-                <a:spcPts val="428"/>
+                <a:spcPts val="407"/>
               </a:spcAft>
             </a:pPr>
             <a:r>
-              <a:rPr sz="2000" i="0" b="0">
+              <a:rPr sz="1900" i="0" b="0">
                 <a:solidFill>
                   <a:srgbClr val="569CD6"/>
                 </a:solidFill>
@@ -7774,7 +7925,7 @@
               <a:t>private</a:t>
             </a:r>
             <a:r>
-              <a:rPr sz="2000" i="0" b="0">
+              <a:rPr sz="1900" i="0" b="0">
                 <a:solidFill>
                   <a:srgbClr val="D4D4D4"/>
                 </a:solidFill>
@@ -7783,7 +7934,7 @@
               <a:t> </a:t>
             </a:r>
             <a:r>
-              <a:rPr sz="2000" i="0" b="0">
+              <a:rPr sz="1900" i="0" b="0">
                 <a:solidFill>
                   <a:srgbClr val="4EC9B0"/>
                 </a:solidFill>
@@ -7792,7 +7943,7 @@
               <a:t>String</a:t>
             </a:r>
             <a:r>
-              <a:rPr sz="2000" i="0" b="0">
+              <a:rPr sz="1900" i="0" b="0">
                 <a:solidFill>
                   <a:srgbClr val="D4D4D4"/>
                 </a:solidFill>
@@ -7801,7 +7952,7 @@
               <a:t> </a:t>
             </a:r>
             <a:r>
-              <a:rPr sz="2000" i="0" b="0">
+              <a:rPr sz="1900" i="0" b="0">
                 <a:solidFill>
                   <a:srgbClr val="D4D4D4"/>
                 </a:solidFill>
@@ -7810,7 +7961,7 @@
               <a:t>id</a:t>
             </a:r>
             <a:r>
-              <a:rPr sz="2000" i="0" b="0">
+              <a:rPr sz="1900" i="0" b="0">
                 <a:solidFill>
                   <a:srgbClr val="D4D4D4"/>
                 </a:solidFill>
@@ -7822,11 +7973,11 @@
           <a:p>
             <a:pPr>
               <a:spcAft>
-                <a:spcPts val="428"/>
+                <a:spcPts val="407"/>
               </a:spcAft>
             </a:pPr>
             <a:r>
-              <a:rPr sz="2000" i="0" b="0">
+              <a:rPr sz="1900" i="0" b="0">
                 <a:solidFill>
                   <a:srgbClr val="569CD6"/>
                 </a:solidFill>
@@ -7835,7 +7986,7 @@
               <a:t>private</a:t>
             </a:r>
             <a:r>
-              <a:rPr sz="2000" i="0" b="0">
+              <a:rPr sz="1900" i="0" b="0">
                 <a:solidFill>
                   <a:srgbClr val="D4D4D4"/>
                 </a:solidFill>
@@ -7844,7 +7995,7 @@
               <a:t> </a:t>
             </a:r>
             <a:r>
-              <a:rPr sz="2000" i="0" b="0">
+              <a:rPr sz="1900" i="0" b="0">
                 <a:solidFill>
                   <a:srgbClr val="4EC9B0"/>
                 </a:solidFill>
@@ -7853,7 +8004,7 @@
               <a:t>String</a:t>
             </a:r>
             <a:r>
-              <a:rPr sz="2000" i="0" b="0">
+              <a:rPr sz="1900" i="0" b="0">
                 <a:solidFill>
                   <a:srgbClr val="D4D4D4"/>
                 </a:solidFill>
@@ -7862,7 +8013,7 @@
               <a:t> </a:t>
             </a:r>
             <a:r>
-              <a:rPr sz="2000" i="0" b="0">
+              <a:rPr sz="1900" i="0" b="0">
                 <a:solidFill>
                   <a:srgbClr val="D4D4D4"/>
                 </a:solidFill>
@@ -7871,7 +8022,7 @@
               <a:t>nombre</a:t>
             </a:r>
             <a:r>
-              <a:rPr sz="2000" i="0" b="0">
+              <a:rPr sz="1900" i="0" b="0">
                 <a:solidFill>
                   <a:srgbClr val="D4D4D4"/>
                 </a:solidFill>
@@ -7883,11 +8034,11 @@
           <a:p>
             <a:pPr>
               <a:spcAft>
-                <a:spcPts val="428"/>
+                <a:spcPts val="407"/>
               </a:spcAft>
             </a:pPr>
             <a:r>
-              <a:rPr sz="2000" i="0" b="0">
+              <a:rPr sz="1900" i="0" b="0">
                 <a:solidFill>
                   <a:srgbClr val="569CD6"/>
                 </a:solidFill>
@@ -7896,7 +8047,7 @@
               <a:t>private</a:t>
             </a:r>
             <a:r>
-              <a:rPr sz="2000" i="0" b="0">
+              <a:rPr sz="1900" i="0" b="0">
                 <a:solidFill>
                   <a:srgbClr val="D4D4D4"/>
                 </a:solidFill>
@@ -7905,7 +8056,7 @@
               <a:t> </a:t>
             </a:r>
             <a:r>
-              <a:rPr sz="2000" i="0" b="0">
+              <a:rPr sz="1900" i="0" b="0">
                 <a:solidFill>
                   <a:srgbClr val="4EC9B0"/>
                 </a:solidFill>
@@ -7914,7 +8065,7 @@
               <a:t>String</a:t>
             </a:r>
             <a:r>
-              <a:rPr sz="2000" i="0" b="0">
+              <a:rPr sz="1900" i="0" b="0">
                 <a:solidFill>
                   <a:srgbClr val="D4D4D4"/>
                 </a:solidFill>
@@ -7923,7 +8074,7 @@
               <a:t> </a:t>
             </a:r>
             <a:r>
-              <a:rPr sz="2000" i="0" b="0">
+              <a:rPr sz="1900" i="0" b="0">
                 <a:solidFill>
                   <a:srgbClr val="D4D4D4"/>
                 </a:solidFill>
@@ -7932,7 +8083,7 @@
               <a:t>especie</a:t>
             </a:r>
             <a:r>
-              <a:rPr sz="2000" i="0" b="0">
+              <a:rPr sz="1900" i="0" b="0">
                 <a:solidFill>
                   <a:srgbClr val="D4D4D4"/>
                 </a:solidFill>
@@ -7944,11 +8095,11 @@
           <a:p>
             <a:pPr>
               <a:spcAft>
-                <a:spcPts val="428"/>
+                <a:spcPts val="407"/>
               </a:spcAft>
             </a:pPr>
             <a:r>
-              <a:rPr sz="2000" i="0" b="0">
+              <a:rPr sz="1900" i="0" b="0">
                 <a:solidFill>
                   <a:srgbClr val="569CD6"/>
                 </a:solidFill>
@@ -7957,7 +8108,7 @@
               <a:t>private</a:t>
             </a:r>
             <a:r>
-              <a:rPr sz="2000" i="0" b="0">
+              <a:rPr sz="1900" i="0" b="0">
                 <a:solidFill>
                   <a:srgbClr val="D4D4D4"/>
                 </a:solidFill>
@@ -7966,7 +8117,7 @@
               <a:t> </a:t>
             </a:r>
             <a:r>
-              <a:rPr sz="2000" i="0" b="0">
+              <a:rPr sz="1900" i="0" b="0">
                 <a:solidFill>
                   <a:srgbClr val="4EC9B0"/>
                 </a:solidFill>
@@ -7975,7 +8126,7 @@
               <a:t>int</a:t>
             </a:r>
             <a:r>
-              <a:rPr sz="2000" i="0" b="0">
+              <a:rPr sz="1900" i="0" b="0">
                 <a:solidFill>
                   <a:srgbClr val="D4D4D4"/>
                 </a:solidFill>
@@ -7984,7 +8135,7 @@
               <a:t> </a:t>
             </a:r>
             <a:r>
-              <a:rPr sz="2000" i="0" b="0">
+              <a:rPr sz="1900" i="0" b="0">
                 <a:solidFill>
                   <a:srgbClr val="D4D4D4"/>
                 </a:solidFill>
@@ -7993,7 +8144,7 @@
               <a:t>edad</a:t>
             </a:r>
             <a:r>
-              <a:rPr sz="2000" i="0" b="0">
+              <a:rPr sz="1900" i="0" b="0">
                 <a:solidFill>
                   <a:srgbClr val="D4D4D4"/>
                 </a:solidFill>
@@ -8005,11 +8156,11 @@
           <a:p>
             <a:pPr>
               <a:spcAft>
-                <a:spcPts val="428"/>
+                <a:spcPts val="407"/>
               </a:spcAft>
             </a:pPr>
             <a:r>
-              <a:rPr sz="2000" i="0" b="0">
+              <a:rPr sz="1900" i="0" b="0">
                 <a:solidFill>
                   <a:srgbClr val="D4D4D4"/>
                 </a:solidFill>
@@ -8021,11 +8172,11 @@
           <a:p>
             <a:pPr>
               <a:spcAft>
-                <a:spcPts val="428"/>
+                <a:spcPts val="407"/>
               </a:spcAft>
             </a:pPr>
             <a:r>
-              <a:rPr sz="2000" i="0" b="0">
+              <a:rPr sz="1900" i="0" b="0">
                 <a:solidFill>
                   <a:srgbClr val="569CD6"/>
                 </a:solidFill>
@@ -8034,7 +8185,7 @@
               <a:t>public</a:t>
             </a:r>
             <a:r>
-              <a:rPr sz="2000" i="0" b="0">
+              <a:rPr sz="1900" i="0" b="0">
                 <a:solidFill>
                   <a:srgbClr val="D4D4D4"/>
                 </a:solidFill>
@@ -8043,7 +8194,7 @@
               <a:t> </a:t>
             </a:r>
             <a:r>
-              <a:rPr sz="2000" i="0" b="0">
+              <a:rPr sz="1900" i="0" b="0">
                 <a:solidFill>
                   <a:srgbClr val="DCDCAA"/>
                 </a:solidFill>
@@ -8052,7 +8203,7 @@
               <a:t>Mascota</a:t>
             </a:r>
             <a:r>
-              <a:rPr sz="2000" i="0" b="0">
+              <a:rPr sz="1900" i="0" b="0">
                 <a:solidFill>
                   <a:srgbClr val="D4D4D4"/>
                 </a:solidFill>
@@ -8061,7 +8212,7 @@
               <a:t>(</a:t>
             </a:r>
             <a:r>
-              <a:rPr sz="2000" i="0" b="0">
+              <a:rPr sz="1900" i="0" b="0">
                 <a:solidFill>
                   <a:srgbClr val="4EC9B0"/>
                 </a:solidFill>
@@ -8070,7 +8221,7 @@
               <a:t>String</a:t>
             </a:r>
             <a:r>
-              <a:rPr sz="2000" i="0" b="0">
+              <a:rPr sz="1900" i="0" b="0">
                 <a:solidFill>
                   <a:srgbClr val="D4D4D4"/>
                 </a:solidFill>
@@ -8079,7 +8230,7 @@
               <a:t> </a:t>
             </a:r>
             <a:r>
-              <a:rPr sz="2000" i="0" b="0">
+              <a:rPr sz="1900" i="0" b="0">
                 <a:solidFill>
                   <a:srgbClr val="D4D4D4"/>
                 </a:solidFill>
@@ -8088,7 +8239,7 @@
               <a:t>id</a:t>
             </a:r>
             <a:r>
-              <a:rPr sz="2000" i="0" b="0">
+              <a:rPr sz="1900" i="0" b="0">
                 <a:solidFill>
                   <a:srgbClr val="D4D4D4"/>
                 </a:solidFill>
@@ -8097,7 +8248,7 @@
               <a:t>, </a:t>
             </a:r>
             <a:r>
-              <a:rPr sz="2000" i="0" b="0">
+              <a:rPr sz="1900" i="0" b="0">
                 <a:solidFill>
                   <a:srgbClr val="4EC9B0"/>
                 </a:solidFill>
@@ -8106,7 +8257,7 @@
               <a:t>String</a:t>
             </a:r>
             <a:r>
-              <a:rPr sz="2000" i="0" b="0">
+              <a:rPr sz="1900" i="0" b="0">
                 <a:solidFill>
                   <a:srgbClr val="D4D4D4"/>
                 </a:solidFill>
@@ -8115,7 +8266,7 @@
               <a:t> </a:t>
             </a:r>
             <a:r>
-              <a:rPr sz="2000" i="0" b="0">
+              <a:rPr sz="1900" i="0" b="0">
                 <a:solidFill>
                   <a:srgbClr val="D4D4D4"/>
                 </a:solidFill>
@@ -8124,7 +8275,7 @@
               <a:t>nombre</a:t>
             </a:r>
             <a:r>
-              <a:rPr sz="2000" i="0" b="0">
+              <a:rPr sz="1900" i="0" b="0">
                 <a:solidFill>
                   <a:srgbClr val="D4D4D4"/>
                 </a:solidFill>
@@ -8133,7 +8284,7 @@
               <a:t>, </a:t>
             </a:r>
             <a:r>
-              <a:rPr sz="2000" i="0" b="0">
+              <a:rPr sz="1900" i="0" b="0">
                 <a:solidFill>
                   <a:srgbClr val="4EC9B0"/>
                 </a:solidFill>
@@ -8142,7 +8293,7 @@
               <a:t>String</a:t>
             </a:r>
             <a:r>
-              <a:rPr sz="2000" i="0" b="0">
+              <a:rPr sz="1900" i="0" b="0">
                 <a:solidFill>
                   <a:srgbClr val="D4D4D4"/>
                 </a:solidFill>
@@ -8151,7 +8302,7 @@
               <a:t> </a:t>
             </a:r>
             <a:r>
-              <a:rPr sz="2000" i="0" b="0">
+              <a:rPr sz="1900" i="0" b="0">
                 <a:solidFill>
                   <a:srgbClr val="D4D4D4"/>
                 </a:solidFill>
@@ -8160,7 +8311,7 @@
               <a:t>especie</a:t>
             </a:r>
             <a:r>
-              <a:rPr sz="2000" i="0" b="0">
+              <a:rPr sz="1900" i="0" b="0">
                 <a:solidFill>
                   <a:srgbClr val="D4D4D4"/>
                 </a:solidFill>
@@ -8169,7 +8320,7 @@
               <a:t>, </a:t>
             </a:r>
             <a:r>
-              <a:rPr sz="2000" i="0" b="0">
+              <a:rPr sz="1900" i="0" b="0">
                 <a:solidFill>
                   <a:srgbClr val="4EC9B0"/>
                 </a:solidFill>
@@ -8178,7 +8329,7 @@
               <a:t>int</a:t>
             </a:r>
             <a:r>
-              <a:rPr sz="2000" i="0" b="0">
+              <a:rPr sz="1900" i="0" b="0">
                 <a:solidFill>
                   <a:srgbClr val="D4D4D4"/>
                 </a:solidFill>
@@ -8187,7 +8338,7 @@
               <a:t> </a:t>
             </a:r>
             <a:r>
-              <a:rPr sz="2000" i="0" b="0">
+              <a:rPr sz="1900" i="0" b="0">
                 <a:solidFill>
                   <a:srgbClr val="D4D4D4"/>
                 </a:solidFill>
@@ -8196,7 +8347,7 @@
               <a:t>edad</a:t>
             </a:r>
             <a:r>
-              <a:rPr sz="2000" i="0" b="0">
+              <a:rPr sz="1900" i="0" b="0">
                 <a:solidFill>
                   <a:srgbClr val="D4D4D4"/>
                 </a:solidFill>
@@ -8208,11 +8359,11 @@
           <a:p>
             <a:pPr>
               <a:spcAft>
-                <a:spcPts val="428"/>
+                <a:spcPts val="407"/>
               </a:spcAft>
             </a:pPr>
             <a:r>
-              <a:rPr sz="2000" i="0" b="0">
+              <a:rPr sz="1900" i="0" b="0">
                 <a:solidFill>
                   <a:srgbClr val="D4D4D4"/>
                 </a:solidFill>
@@ -8221,7 +8372,7 @@
               <a:t>    </a:t>
             </a:r>
             <a:r>
-              <a:rPr sz="2000" i="0" b="0">
+              <a:rPr sz="1900" i="0" b="0">
                 <a:solidFill>
                   <a:srgbClr val="569CD6"/>
                 </a:solidFill>
@@ -8230,7 +8381,7 @@
               <a:t>this</a:t>
             </a:r>
             <a:r>
-              <a:rPr sz="2000" i="0" b="0">
+              <a:rPr sz="1900" i="0" b="0">
                 <a:solidFill>
                   <a:srgbClr val="D4D4D4"/>
                 </a:solidFill>
@@ -8239,7 +8390,7 @@
               <a:t>.</a:t>
             </a:r>
             <a:r>
-              <a:rPr sz="2000" i="0" b="0">
+              <a:rPr sz="1900" i="0" b="0">
                 <a:solidFill>
                   <a:srgbClr val="D4D4D4"/>
                 </a:solidFill>
@@ -8248,7 +8399,7 @@
               <a:t>id</a:t>
             </a:r>
             <a:r>
-              <a:rPr sz="2000" i="0" b="0">
+              <a:rPr sz="1900" i="0" b="0">
                 <a:solidFill>
                   <a:srgbClr val="D4D4D4"/>
                 </a:solidFill>
@@ -8257,7 +8408,7 @@
               <a:t> = </a:t>
             </a:r>
             <a:r>
-              <a:rPr sz="2000" i="0" b="0">
+              <a:rPr sz="1900" i="0" b="0">
                 <a:solidFill>
                   <a:srgbClr val="D4D4D4"/>
                 </a:solidFill>
@@ -8266,7 +8417,7 @@
               <a:t>id</a:t>
             </a:r>
             <a:r>
-              <a:rPr sz="2000" i="0" b="0">
+              <a:rPr sz="1900" i="0" b="0">
                 <a:solidFill>
                   <a:srgbClr val="D4D4D4"/>
                 </a:solidFill>
@@ -8278,11 +8429,11 @@
           <a:p>
             <a:pPr>
               <a:spcAft>
-                <a:spcPts val="428"/>
+                <a:spcPts val="407"/>
               </a:spcAft>
             </a:pPr>
             <a:r>
-              <a:rPr sz="2000" i="0" b="0">
+              <a:rPr sz="1900" i="0" b="0">
                 <a:solidFill>
                   <a:srgbClr val="D4D4D4"/>
                 </a:solidFill>
@@ -8291,7 +8442,7 @@
               <a:t>    </a:t>
             </a:r>
             <a:r>
-              <a:rPr sz="2000" i="0" b="0">
+              <a:rPr sz="1900" i="0" b="0">
                 <a:solidFill>
                   <a:srgbClr val="569CD6"/>
                 </a:solidFill>
@@ -8300,7 +8451,7 @@
               <a:t>this</a:t>
             </a:r>
             <a:r>
-              <a:rPr sz="2000" i="0" b="0">
+              <a:rPr sz="1900" i="0" b="0">
                 <a:solidFill>
                   <a:srgbClr val="D4D4D4"/>
                 </a:solidFill>
@@ -8309,7 +8460,7 @@
               <a:t>.</a:t>
             </a:r>
             <a:r>
-              <a:rPr sz="2000" i="0" b="0">
+              <a:rPr sz="1900" i="0" b="0">
                 <a:solidFill>
                   <a:srgbClr val="D4D4D4"/>
                 </a:solidFill>
@@ -8318,7 +8469,7 @@
               <a:t>nombre</a:t>
             </a:r>
             <a:r>
-              <a:rPr sz="2000" i="0" b="0">
+              <a:rPr sz="1900" i="0" b="0">
                 <a:solidFill>
                   <a:srgbClr val="D4D4D4"/>
                 </a:solidFill>
@@ -8327,7 +8478,7 @@
               <a:t> = </a:t>
             </a:r>
             <a:r>
-              <a:rPr sz="2000" i="0" b="0">
+              <a:rPr sz="1900" i="0" b="0">
                 <a:solidFill>
                   <a:srgbClr val="D4D4D4"/>
                 </a:solidFill>
@@ -8336,7 +8487,7 @@
               <a:t>nombre</a:t>
             </a:r>
             <a:r>
-              <a:rPr sz="2000" i="0" b="0">
+              <a:rPr sz="1900" i="0" b="0">
                 <a:solidFill>
                   <a:srgbClr val="D4D4D4"/>
                 </a:solidFill>
@@ -8348,11 +8499,11 @@
           <a:p>
             <a:pPr>
               <a:spcAft>
-                <a:spcPts val="428"/>
+                <a:spcPts val="407"/>
               </a:spcAft>
             </a:pPr>
             <a:r>
-              <a:rPr sz="2000" i="0" b="0">
+              <a:rPr sz="1900" i="0" b="0">
                 <a:solidFill>
                   <a:srgbClr val="D4D4D4"/>
                 </a:solidFill>
@@ -8361,7 +8512,7 @@
               <a:t>    </a:t>
             </a:r>
             <a:r>
-              <a:rPr sz="2000" i="0" b="0">
+              <a:rPr sz="1900" i="0" b="0">
                 <a:solidFill>
                   <a:srgbClr val="569CD6"/>
                 </a:solidFill>
@@ -8370,7 +8521,7 @@
               <a:t>this</a:t>
             </a:r>
             <a:r>
-              <a:rPr sz="2000" i="0" b="0">
+              <a:rPr sz="1900" i="0" b="0">
                 <a:solidFill>
                   <a:srgbClr val="D4D4D4"/>
                 </a:solidFill>
@@ -8379,7 +8530,7 @@
               <a:t>.</a:t>
             </a:r>
             <a:r>
-              <a:rPr sz="2000" i="0" b="0">
+              <a:rPr sz="1900" i="0" b="0">
                 <a:solidFill>
                   <a:srgbClr val="D4D4D4"/>
                 </a:solidFill>
@@ -8388,7 +8539,7 @@
               <a:t>especie</a:t>
             </a:r>
             <a:r>
-              <a:rPr sz="2000" i="0" b="0">
+              <a:rPr sz="1900" i="0" b="0">
                 <a:solidFill>
                   <a:srgbClr val="D4D4D4"/>
                 </a:solidFill>
@@ -8397,7 +8548,7 @@
               <a:t> = </a:t>
             </a:r>
             <a:r>
-              <a:rPr sz="2000" i="0" b="0">
+              <a:rPr sz="1900" i="0" b="0">
                 <a:solidFill>
                   <a:srgbClr val="D4D4D4"/>
                 </a:solidFill>
@@ -8406,7 +8557,7 @@
               <a:t>especie</a:t>
             </a:r>
             <a:r>
-              <a:rPr sz="2000" i="0" b="0">
+              <a:rPr sz="1900" i="0" b="0">
                 <a:solidFill>
                   <a:srgbClr val="D4D4D4"/>
                 </a:solidFill>
@@ -8418,11 +8569,11 @@
           <a:p>
             <a:pPr>
               <a:spcAft>
-                <a:spcPts val="428"/>
+                <a:spcPts val="407"/>
               </a:spcAft>
             </a:pPr>
             <a:r>
-              <a:rPr sz="2000" i="0" b="0">
+              <a:rPr sz="1900" i="0" b="0">
                 <a:solidFill>
                   <a:srgbClr val="D4D4D4"/>
                 </a:solidFill>
@@ -8431,7 +8582,7 @@
               <a:t>    </a:t>
             </a:r>
             <a:r>
-              <a:rPr sz="2000" i="0" b="0">
+              <a:rPr sz="1900" i="0" b="0">
                 <a:solidFill>
                   <a:srgbClr val="569CD6"/>
                 </a:solidFill>
@@ -8440,7 +8591,7 @@
               <a:t>this</a:t>
             </a:r>
             <a:r>
-              <a:rPr sz="2000" i="0" b="0">
+              <a:rPr sz="1900" i="0" b="0">
                 <a:solidFill>
                   <a:srgbClr val="D4D4D4"/>
                 </a:solidFill>
@@ -8449,7 +8600,7 @@
               <a:t>.</a:t>
             </a:r>
             <a:r>
-              <a:rPr sz="2000" i="0" b="0">
+              <a:rPr sz="1900" i="0" b="0">
                 <a:solidFill>
                   <a:srgbClr val="D4D4D4"/>
                 </a:solidFill>
@@ -8458,7 +8609,7 @@
               <a:t>edad</a:t>
             </a:r>
             <a:r>
-              <a:rPr sz="2000" i="0" b="0">
+              <a:rPr sz="1900" i="0" b="0">
                 <a:solidFill>
                   <a:srgbClr val="D4D4D4"/>
                 </a:solidFill>
@@ -8467,7 +8618,7 @@
               <a:t> = </a:t>
             </a:r>
             <a:r>
-              <a:rPr sz="2000" i="0" b="0">
+              <a:rPr sz="1900" i="0" b="0">
                 <a:solidFill>
                   <a:srgbClr val="D4D4D4"/>
                 </a:solidFill>
@@ -8476,7 +8627,7 @@
               <a:t>edad</a:t>
             </a:r>
             <a:r>
-              <a:rPr sz="2000" i="0" b="0">
+              <a:rPr sz="1900" i="0" b="0">
                 <a:solidFill>
                   <a:srgbClr val="D4D4D4"/>
                 </a:solidFill>
@@ -8488,11 +8639,11 @@
           <a:p>
             <a:pPr>
               <a:spcAft>
-                <a:spcPts val="428"/>
+                <a:spcPts val="407"/>
               </a:spcAft>
             </a:pPr>
             <a:r>
-              <a:rPr sz="2000" i="0" b="0">
+              <a:rPr sz="1900" i="0" b="0">
                 <a:solidFill>
                   <a:srgbClr val="D4D4D4"/>
                 </a:solidFill>

--- a/Programacion II/Clases/Clase 1 - Introduccion a POO/Presentacion.pptx
+++ b/Programacion II/Clases/Clase 1 - Introduccion a POO/Presentacion.pptx
@@ -607,6 +607,246 @@
           <a:p/>
           <a:p>
             <a:r>
+              <a:t>El constructor es la pieza que garantiza que el objeto nazca valido. Es un metodo especial que se llama igual que la clase, no declara tipo de retorno y se ejecuta una sola vez, en el momento de la creacion. La instruccion new hace dos cosas: reserva la memoria en el monton y llama al constructor. Si la clase no declara ninguno, Java agrega uno sin parametros; en el instante en que usted escribe un constructor con parametros, el vacio desaparece, y ese es literalmente el primer error de compilacion del curso cuando alguien sigue escribiendo new Mascota() en otro archivo. La responsabilidad del constructor es la validacion: si el nombre llega null o vacio, lanza; si la edad llega negativa, lanza; y como consecuencia, en todo el programa no puede existir una Mascota sin nombre. Eso elimina una familia entera de errores aguas abajo, porque nadie tendra que preguntarse mas adelante si el nombre podria estar vacio. El anti patron a evitar es el constructor vacio seguido de cinco setters: permite que exista un objeto a medio llenar que viajara hasta la interfaz grafica de la Clase 4 y fallara alli, a doscientas lineas del lugar donde en realidad se creo mal, que es el peor escenario de depuracion posible. Como convencion, no como regla, si un constructor pide mas de cuatro o cinco parametros es senal de que la clase esta juntando cosas que no pertenecen al mismo concepto.</a:t>
+            </a:r>
+          </a:p>
+          <a:p/>
+          <a:p>
+            <a:r>
+              <a:t>El constructor es el metodo que se ejecuta al crear el objeto y deja sus atributos en un estado valido. La instruccion new Mascota("Luna", "Canino", 3) reserva memoria y llama al constructor. Si no se escribe ninguno, Java agrega uno vacio por defecto, y ahi es donde aparecen objetos a medio inicializar que despues fallan con NullPointerException en el peor momento. Por eso desde la primera clase se escribe el constructor completo.</a:t>
+            </a:r>
+          </a:p>
+        </p:txBody>
+      </p:sp>
+      <p:sp>
+        <p:nvSpPr>
+          <p:cNvPr id="4" name="Slide Number Placeholder 3"/>
+          <p:cNvSpPr>
+            <a:spLocks noGrp="1"/>
+          </p:cNvSpPr>
+          <p:nvPr>
+            <p:ph type="sldNum" idx="5" sz="quarter"/>
+          </p:nvPr>
+        </p:nvSpPr>
+        <p:spPr/>
+      </p:sp>
+    </p:spTree>
+  </p:cSld>
+  <p:clrMapOvr>
+    <a:masterClrMapping/>
+  </p:clrMapOvr>
+</p:notes>
+</file>
+
+<file path=ppt/notesSlides/notesSlide11.xml><?xml version="1.0" encoding="utf-8"?>
+<p:notes xmlns:a="http://schemas.openxmlformats.org/drawingml/2006/main" xmlns:p="http://schemas.openxmlformats.org/presentationml/2006/main" xmlns:r="http://schemas.openxmlformats.org/officeDocument/2006/relationships">
+  <p:cSld>
+    <p:spTree>
+      <p:nvGrpSpPr>
+        <p:cNvPr id="1" name=""/>
+        <p:cNvGrpSpPr/>
+        <p:nvPr/>
+      </p:nvGrpSpPr>
+      <p:grpSpPr>
+        <a:xfrm>
+          <a:off x="0" y="0"/>
+          <a:ext cx="0" cy="0"/>
+          <a:chOff x="0" y="0"/>
+          <a:chExt cx="0" cy="0"/>
+        </a:xfrm>
+      </p:grpSpPr>
+      <p:sp>
+        <p:nvSpPr>
+          <p:cNvPr id="2" name="Slide Image Placeholder 1"/>
+          <p:cNvSpPr>
+            <a:spLocks noGrp="1"/>
+          </p:cNvSpPr>
+          <p:nvPr>
+            <p:ph type="sldImg" idx="2"/>
+          </p:nvPr>
+        </p:nvSpPr>
+        <p:spPr/>
+      </p:sp>
+      <p:sp>
+        <p:nvSpPr>
+          <p:cNvPr id="3" name="Notes Placeholder 2"/>
+          <p:cNvSpPr>
+            <a:spLocks noGrp="1"/>
+          </p:cNvSpPr>
+          <p:nvPr>
+            <p:ph type="body" idx="3" sz="quarter"/>
+          </p:nvPr>
+        </p:nvSpPr>
+        <p:spPr/>
+        <p:txBody>
+          <a:bodyPr/>
+          <a:lstStyle/>
+          <a:p>
+            <a:r>
+              <a:t>COMO CORRERLO: es un programa completo. Se copia entero en un archivo Main.java (o en cualquier compilador de Java en linea) y se ejecuta: no necesita la lamina anterior ni otro archivo.</a:t>
+            </a:r>
+          </a:p>
+          <a:p/>
+          <a:p>
+            <a:r>
+              <a:t>SALIDA ESPERADA:</a:t>
+            </a:r>
+          </a:p>
+          <a:p/>
+          <a:p>
+            <a:r>
+              <a:t>Rocky tiene 9 anios</a:t>
+            </a:r>
+          </a:p>
+        </p:txBody>
+      </p:sp>
+      <p:sp>
+        <p:nvSpPr>
+          <p:cNvPr id="4" name="Slide Number Placeholder 3"/>
+          <p:cNvSpPr>
+            <a:spLocks noGrp="1"/>
+          </p:cNvSpPr>
+          <p:nvPr>
+            <p:ph type="sldNum" idx="5" sz="quarter"/>
+          </p:nvPr>
+        </p:nvSpPr>
+        <p:spPr/>
+      </p:sp>
+    </p:spTree>
+  </p:cSld>
+  <p:clrMapOvr>
+    <a:masterClrMapping/>
+  </p:clrMapOvr>
+</p:notes>
+</file>
+
+<file path=ppt/notesSlides/notesSlide12.xml><?xml version="1.0" encoding="utf-8"?>
+<p:notes xmlns:a="http://schemas.openxmlformats.org/drawingml/2006/main" xmlns:p="http://schemas.openxmlformats.org/presentationml/2006/main" xmlns:r="http://schemas.openxmlformats.org/officeDocument/2006/relationships">
+  <p:cSld>
+    <p:spTree>
+      <p:nvGrpSpPr>
+        <p:cNvPr id="1" name=""/>
+        <p:cNvGrpSpPr/>
+        <p:nvPr/>
+      </p:nvGrpSpPr>
+      <p:grpSpPr>
+        <a:xfrm>
+          <a:off x="0" y="0"/>
+          <a:ext cx="0" cy="0"/>
+          <a:chOff x="0" y="0"/>
+          <a:chExt cx="0" cy="0"/>
+        </a:xfrm>
+      </p:grpSpPr>
+      <p:sp>
+        <p:nvSpPr>
+          <p:cNvPr id="2" name="Slide Image Placeholder 1"/>
+          <p:cNvSpPr>
+            <a:spLocks noGrp="1"/>
+          </p:cNvSpPr>
+          <p:nvPr>
+            <p:ph type="sldImg" idx="2"/>
+          </p:nvPr>
+        </p:nvSpPr>
+        <p:spPr/>
+      </p:sp>
+      <p:sp>
+        <p:nvSpPr>
+          <p:cNvPr id="3" name="Notes Placeholder 2"/>
+          <p:cNvSpPr>
+            <a:spLocks noGrp="1"/>
+          </p:cNvSpPr>
+          <p:nvPr>
+            <p:ph type="body" idx="3" sz="quarter"/>
+          </p:nvPr>
+        </p:nvSpPr>
+        <p:spPr/>
+        <p:txBody>
+          <a:bodyPr/>
+          <a:lstStyle/>
+          <a:p>
+            <a:r>
+              <a:t>DESARROLLO (para explicarlo, no se proyecta):</a:t>
+            </a:r>
+          </a:p>
+          <a:p/>
+          <a:p>
+            <a:r>
+              <a:t>Queda el error mas frecuente de Java, y hay que nombrarlo hoy porque su causa es todo lo anterior. null significa que la referencia no apunta a ningun objeto: es un control remoto sin televisor. No es cero, no es cadena vacia y no es un objeto con los campos en blanco; es la ausencia de destino. NullPointerException es lo que ocurre cuando el programa intenta usar esa referencia, por ejemplo llamando un metodo o leyendo un campo. Los tres casos que produciran esa excepcion en el sistema de la clinica son predecibles: un metodo buscarMascota(id) que devuelve null cuando no encuentra nada y un llamador que hace m.getNombre() sin preguntar; una Cita cuya Mascota nunca se asigno; y una lista declarada pero no inicializada. Dato citable: Tony Hoare introdujo la referencia nula en 1965 y en una conferencia de 2009 la llamo publicamente su error de mil millones de dolares. Las encuestas y los reportes de errores en produccion la ubican de forma consistente como la excepcion mas frecuente en aplicaciones Java, y conviene presentarlo asi, como observacion de la industria y no como ley. Las defensas, en orden de utilidad real: validar en el constructor para que no nazcan objetos incompletos; nunca devolver null en un metodo que devuelve una coleccion, sino una lista vacia; usar Optional cuando la ausencia es un resultado legitimo de una busqueda; y leer el mensaje de la excepcion, porque desde Java 14 el mensaje indica cual variable exacta era null. Pregunta previsible: entonces le pongo cadena vacia y listo. No: eso no resuelve el problema, lo esconde, y cambia una excepcion clara por un dato falso guardado en el archivo de la Clase 9.</a:t>
+            </a:r>
+          </a:p>
+        </p:txBody>
+      </p:sp>
+      <p:sp>
+        <p:nvSpPr>
+          <p:cNvPr id="4" name="Slide Number Placeholder 3"/>
+          <p:cNvSpPr>
+            <a:spLocks noGrp="1"/>
+          </p:cNvSpPr>
+          <p:nvPr>
+            <p:ph type="sldNum" idx="5" sz="quarter"/>
+          </p:nvPr>
+        </p:nvSpPr>
+        <p:spPr/>
+      </p:sp>
+    </p:spTree>
+  </p:cSld>
+  <p:clrMapOvr>
+    <a:masterClrMapping/>
+  </p:clrMapOvr>
+</p:notes>
+</file>
+
+<file path=ppt/notesSlides/notesSlide13.xml><?xml version="1.0" encoding="utf-8"?>
+<p:notes xmlns:a="http://schemas.openxmlformats.org/drawingml/2006/main" xmlns:p="http://schemas.openxmlformats.org/presentationml/2006/main" xmlns:r="http://schemas.openxmlformats.org/officeDocument/2006/relationships">
+  <p:cSld>
+    <p:spTree>
+      <p:nvGrpSpPr>
+        <p:cNvPr id="1" name=""/>
+        <p:cNvGrpSpPr/>
+        <p:nvPr/>
+      </p:nvGrpSpPr>
+      <p:grpSpPr>
+        <a:xfrm>
+          <a:off x="0" y="0"/>
+          <a:ext cx="0" cy="0"/>
+          <a:chOff x="0" y="0"/>
+          <a:chExt cx="0" cy="0"/>
+        </a:xfrm>
+      </p:grpSpPr>
+      <p:sp>
+        <p:nvSpPr>
+          <p:cNvPr id="2" name="Slide Image Placeholder 1"/>
+          <p:cNvSpPr>
+            <a:spLocks noGrp="1"/>
+          </p:cNvSpPr>
+          <p:nvPr>
+            <p:ph type="sldImg" idx="2"/>
+          </p:nvPr>
+        </p:nvSpPr>
+        <p:spPr/>
+      </p:sp>
+      <p:sp>
+        <p:nvSpPr>
+          <p:cNvPr id="3" name="Notes Placeholder 2"/>
+          <p:cNvSpPr>
+            <a:spLocks noGrp="1"/>
+          </p:cNvSpPr>
+          <p:nvPr>
+            <p:ph type="body" idx="3" sz="quarter"/>
+          </p:nvPr>
+        </p:nvSpPr>
+        <p:spPr/>
+        <p:txBody>
+          <a:bodyPr/>
+          <a:lstStyle/>
+          <a:p>
+            <a:r>
+              <a:t>DESARROLLO (para explicarlo, no se proyecta):</a:t>
+            </a:r>
+          </a:p>
+          <a:p/>
+          <a:p>
+            <a:r>
               <a:t>El entorno cierra la clase y tiene dos reglas duras que producen el noventa por ciento de los tropiezos del primer dia. El JDK debe estar instalado en una version de soporte extendido, 17 o 21, y se verifica con java -version en la consola, no confiando en la pantalla del instalador; y un archivo .java contiene una clase publica cuyo nombre coincide caracter por caracter con el nombre del archivo, mayusculas incluidas, de modo que la clase Mascota vive en Mascota.java y en ningun otro lugar. El comando javac compila a un archivo .class con bytecode y java lo ejecuta; el entorno de desarrollo hace ambas cosas por dentro, y verlo una vez en consola evita que el estudiante crea que Java es el boton verde del IDE. El amarre con la Clase 2 conviene decirlo explicito al cerrar: hoy quedaron mascota1, mascota2 y mascota3 como variables sueltas, y eso no escala a una clinica con cuatrocientos pacientes, asi que la proxima clase entra ArrayList de Mascota. Todo lo de hoy se vuelve indispensable ahi: la lista guarda referencias y no copias, de modo que modificar el objeto cambia lo que la lista muestra; los metodos contains e indexOf usan equals, asi que sin sobrescribirlo la busqueda por identificador fallara sin dar error; y en la Clase 9, al guardar en CSV, hara falta un constructor que reciba una linea de texto y valide, es decir el mismo constructor de hoy. La Clase 13 formalizara con try-catch lo que hoy se hizo a mano lanzando IllegalArgumentException.</a:t>
             </a:r>
           </a:p>
@@ -759,13 +999,31 @@
           <a:lstStyle/>
           <a:p>
             <a:r>
-              <a:t>DESARROLLO (para explicarlo, no se proyecta):</a:t>
+              <a:t>COMO CORRERLO: es un programa completo. Se copia entero en un archivo Main.java (o en cualquier compilador de Java en linea) y se ejecuta: no necesita la lamina anterior ni otro archivo.</a:t>
             </a:r>
           </a:p>
           <a:p/>
           <a:p>
             <a:r>
-              <a:t>Ahora el punto que decide el semestre, y por eso va temprano: que es un objeto en la memoria. En Java una variable local vive en la pila, una zona pequena y ordenada asociada al metodo que se esta ejecutando, mientras que el objeto creado con new vive en el monton, una zona grande donde el programa reserva espacio a medida que lo necesita. La consecuencia es que la variable no guarda el objeto: guarda una referencia, que es un valor que indica donde esta el objeto. La imagen que funciona en clase es que la variable es el control remoto y el objeto es el televisor: se pueden tener dos controles del mismo televisor, y apretar el boton en cualquiera de los dos cambia el mismo aparato. Escrito en el tablero: Mascota a = new Mascota("Luna", "Canino", 3); despues Mascota b = a; despues b.setEdad(4); y finalmente System.out.println(a.getEdad()) imprime 4, aunque nadie toco la variable a. No hay dos mascotas, hay una con dos nombres. El contraste hay que hacerlo en el mismo tablero con tipos primitivos: int x = 3; int y = x; y = 5; y x sigue valiendo 3, porque ahi si se copio el valor. Java tiene exactamente ocho tipos primitivos (byte, short, int, long, float, double, char y boolean) y esa es regla dura del lenguaje: todo lo demas, incluido String, se maneja por referencia. De aqui se deriva un tercer hecho que conviene decir hoy aunque se practique despues: cuando se pasa un objeto a un metodo, el metodo puede modificar el objeto y quien llamo vera el cambio, pero si el metodo reasigna su parametro con un new, la variable de afuera no se enteran de nada.</a:t>
+              <a:t>SALIDA ESPERADA:</a:t>
+            </a:r>
+          </a:p>
+          <a:p/>
+          <a:p>
+            <a:r>
+              <a:t>Pacientes registrados hoy:</a:t>
+            </a:r>
+          </a:p>
+          <a:p/>
+          <a:p>
+            <a:r>
+              <a:t>M-001 - Luna (Canino, 3 anios)</a:t>
+            </a:r>
+          </a:p>
+          <a:p/>
+          <a:p>
+            <a:r>
+              <a:t>M-002 - Michi (Felino, 5 anios)</a:t>
             </a:r>
           </a:p>
         </p:txBody>
@@ -841,7 +1099,7 @@
           <a:p/>
           <a:p>
             <a:r>
-              <a:t>De lo anterior sale la pregunta que aparece sin falta en las primeras semanas: por que mascota1 == mascota2 dice que son distintas si tienen los mismos datos. La respuesta es exacta y hay que darla asi: el operador == compara referencias, es decir pregunta si las dos variables apuntan al mismo objeto, no si los objetos se parecen. Dos objetos Mascota creados con new a partir de la misma linea de un archivo CSV son dos televisores identicos en fabrica y en habitaciones distintas: == devuelve false y esta bien, porque no son el mismo. Para comparar contenido existe el metodo equals, con una trampa que hay que enunciar: el equals que toda clase hereda de Object hace exactamente lo mismo que ==, asi que mientras usted no lo sobrescriba, equals tampoco compara contenido. Sobrescribirlo significa escribirlo en Mascota para que dos mascotas sean iguales cuando su identificador sea igual. Y viene una regla del lenguaje que no es opcional: si sobrescribe equals debe sobrescribir tambien hashCode, porque las estructuras que se veran en la Clase 4, HashMap y HashSet, ubican los objetos usando hashCode antes de compararlos, y dos objetos iguales que devuelven codigos distintos terminan guardados como si fueran diferentes. Un ultimo detalle que produce mucha confusion: con cadenas de texto escritas literalmente en el codigo, == a veces devuelve true porque Java reutiliza los literales identicos en una zona comun, pero new String("Luna") == "Luna" devuelve false. Por eso la regla practica del curso es sin excepciones: con objetos nunca se usa ==, se usa equals; == se reserva para primitivos y para preguntar si algo es null.</a:t>
+              <a:t>Ahora el punto que decide el semestre, y por eso va temprano: que es un objeto en la memoria. En Java una variable local vive en la pila, una zona pequena y ordenada asociada al metodo que se esta ejecutando, mientras que el objeto creado con new vive en el monton, una zona grande donde el programa reserva espacio a medida que lo necesita. La consecuencia es que la variable no guarda el objeto: guarda una referencia, que es un valor que indica donde esta el objeto. La imagen que funciona en clase es que la variable es el control remoto y el objeto es el televisor: se pueden tener dos controles del mismo televisor, y apretar el boton en cualquiera de los dos cambia el mismo aparato. Escrito en el tablero: Mascota a = new Mascota("Luna", "Canino", 3); despues Mascota b = a; despues b.setEdad(4); y finalmente System.out.println(a.getEdad()) imprime 4, aunque nadie toco la variable a. No hay dos mascotas, hay una con dos nombres. El contraste hay que hacerlo en el mismo tablero con tipos primitivos: int x = 3; int y = x; y = 5; y x sigue valiendo 3, porque ahi si se copio el valor. Java tiene exactamente ocho tipos primitivos (byte, short, int, long, float, double, char y boolean) y esa es regla dura del lenguaje: todo lo demas, incluido String, se maneja por referencia. De aqui se deriva un tercer hecho que conviene decir hoy aunque se practique despues: cuando se pasa un objeto a un metodo, el metodo puede modificar el objeto y quien llamo vera el cambio, pero si el metodo reasigna su parametro con un new, la variable de afuera no se enteran de nada.</a:t>
             </a:r>
           </a:p>
         </p:txBody>
@@ -917,7 +1175,7 @@
           <a:p/>
           <a:p>
             <a:r>
-              <a:t>Los cuatro pilares se entienden por el problema que resuelve cada uno. Abstraccion es quedarse solo con lo que importa del problema: para la clinica, de una mascota importa su especie y su historial, no su color favorito; modelar es decidir que se ignora. Encapsulamiento es que los datos de un objeto no se tocan directamente desde afuera sino a traves de metodos: el atributo va private y se expone con getters y setters, de modo que el objeto pueda validar (por ejemplo, rechazar una edad negativa) en vez de quedar a merced de quien lo use.</a:t>
+              <a:t>De lo anterior sale la pregunta que aparece sin falta en las primeras semanas: por que mascota1 == mascota2 dice que son distintas si tienen los mismos datos. La respuesta es exacta y hay que darla asi: el operador == compara referencias, es decir pregunta si las dos variables apuntan al mismo objeto, no si los objetos se parecen. Dos objetos Mascota creados con new a partir de la misma linea de un archivo CSV son dos televisores identicos en fabrica y en habitaciones distintas: == devuelve false y esta bien, porque no son el mismo. Para comparar contenido existe el metodo equals, con una trampa que hay que enunciar: el equals que toda clase hereda de Object hace exactamente lo mismo que ==, asi que mientras usted no lo sobrescriba, equals tampoco compara contenido. Sobrescribirlo significa escribirlo en Mascota para que dos mascotas sean iguales cuando su identificador sea igual. Y viene una regla del lenguaje que no es opcional: si sobrescribe equals debe sobrescribir tambien hashCode, porque las estructuras que se veran en la Clase 4, HashMap y HashSet, ubican los objetos usando hashCode antes de compararlos, y dos objetos iguales que devuelven codigos distintos terminan guardados como si fueran diferentes. Un ultimo detalle que produce mucha confusion: con cadenas de texto escritas literalmente en el codigo, == a veces devuelve true porque Java reutiliza los literales identicos en una zona comun, pero new String("Luna") == "Luna" devuelve false. Por eso la regla practica del curso es sin excepciones: con objetos nunca se usa ==, se usa equals; == se reserva para primitivos y para preguntar si algo es null.</a:t>
             </a:r>
           </a:p>
         </p:txBody>
@@ -993,7 +1251,7 @@
           <a:p/>
           <a:p>
             <a:r>
-              <a:t>El encapsulamiento se ensena mal cuando se presenta como la orden de poner private y generar getters. Se ensena bien cuando se muestra el problema que resuelve, y en el sistema de la clinica el problema tiene nombre. La clinica tiene una regla del proyecto: una mascota inactiva no puede agendar cita, y toda inactivacion debe quedar con motivo y fecha. Suponga que el atributo se declaro como public boolean activa. Entonces cualquier linea de cualquier archivo del sistema puede escribir luna.activa = false, y la afirmacion toda mascota inactiva tiene motivo y fecha de inactivacion, que es lo que llamamos una invariante porque debe ser verdadera durante toda la vida del objeto, se rompe sin dejar rastro. Peor todavia: para encontrar quien la rompio hay que revisar el proyecto completo, porque el compilador permite esa asignacion en cualquier parte. Si en cambio el atributo es private y la unica forma de apagarlo es el metodo inactivar(String motivo), que exige el motivo, guarda la fecha y deja registro, entonces existe un unico lugar en el mundo donde una mascota puede volverse inactiva. Lo mismo pasa con la edad: luna.edad = -3 es aceptado por el compilador sin una queja, mientras que un setEdad que lanza IllegalArgumentException cuando el valor es negativo detiene el error en el instante en que se comete y no tres pantallas despues. Y aqui va la parte honesta que casi nunca se dice: usar el atajo del entorno de desarrollo para generar getters y setters de los quince campos no es encapsular. Si existe un setActiva(boolean) publico, el campo sigue siendo publico con dos pasos extra. Encapsular es exponer operaciones del dominio, inactivar, agendar, aplicarVacuna, y no casillas. La pregunta del estudiante llega sola: si igual funciona con public, para que me complico. La respuesta concreta es que funciona hoy, con un archivo y con usted como unico autor; en la Clase 12, integrando modulos de tres companeros, quien escriba la pantalla de facturacion pondra activa en false por comodidad y usted perdera una tarde buscando por que las citas desaparecieron.</a:t>
+              <a:t>Los cuatro pilares se entienden por el problema que resuelve cada uno. Abstraccion es quedarse solo con lo que importa del problema: para la clinica, de una mascota importa su especie y su historial, no su color favorito; modelar es decidir que se ignora. Encapsulamiento es que los datos de un objeto no se tocan directamente desde afuera sino a traves de metodos: el atributo va private y se expone con getters y setters, de modo que el objeto pueda validar (por ejemplo, rechazar una edad negativa) en vez de quedar a merced de quien lo use.</a:t>
             </a:r>
           </a:p>
         </p:txBody>
@@ -1069,7 +1327,7 @@
           <a:p/>
           <a:p>
             <a:r>
-              <a:t>Herencia es que una clase puede extender a otra y reutilizar lo que ya define: Perro extends Mascota hereda nombre y edad, y agrega lo suyo. Advertencia importante: la herencia se sobreusa, y solo aplica cuando de verdad hay una relacion 'es un' (un perro ES una mascota); si la relacion es 'tiene un', no es herencia sino composicion. Polimorfismo es que el mismo mensaje produce comportamientos distintos segun el objeto que lo recibe: si Perro y Gato heredan de Mascota y ambos redefinen hacerSonido(), recorrer una lista de mascotas y llamar ese metodo produce Guau o Miau segun el objeto real, sin que el codigo que recorre la lista necesite saber de que tipo es cada una.</a:t>
+              <a:t>El encapsulamiento se ensena mal cuando se presenta como la orden de poner private y generar getters. Se ensena bien cuando se muestra el problema que resuelve, y en el sistema de la clinica el problema tiene nombre. La clinica tiene una regla del proyecto: una mascota inactiva no puede agendar cita, y toda inactivacion debe quedar con motivo y fecha. Suponga que el atributo se declaro como public boolean activa. Entonces cualquier linea de cualquier archivo del sistema puede escribir luna.activa = false, y la afirmacion toda mascota inactiva tiene motivo y fecha de inactivacion, que es lo que llamamos una invariante porque debe ser verdadera durante toda la vida del objeto, se rompe sin dejar rastro. Peor todavia: para encontrar quien la rompio hay que revisar el proyecto completo, porque el compilador permite esa asignacion en cualquier parte. Si en cambio el atributo es private y la unica forma de apagarlo es el metodo inactivar(String motivo), que exige el motivo, guarda la fecha y deja registro, entonces existe un unico lugar en el mundo donde una mascota puede volverse inactiva. Lo mismo pasa con la edad: luna.edad = -3 es aceptado por el compilador sin una queja, mientras que un setEdad que lanza IllegalArgumentException cuando el valor es negativo detiene el error en el instante en que se comete y no tres pantallas despues. Y aqui va la parte honesta que casi nunca se dice: usar el atajo del entorno de desarrollo para generar getters y setters de los quince campos no es encapsular. Si existe un setActiva(boolean) publico, el campo sigue siendo publico con dos pasos extra. Encapsular es exponer operaciones del dominio, inactivar, agendar, aplicarVacuna, y no casillas. La pregunta del estudiante llega sola: si igual funciona con public, para que me complico. La respuesta concreta es que funciona hoy, con un archivo y con usted como unico autor; en la Clase 12, integrando modulos de tres companeros, quien escriba la pantalla de facturacion pondra activa en false por comodidad y usted perdera una tarde buscando por que las citas desaparecieron.</a:t>
             </a:r>
           </a:p>
         </p:txBody>
@@ -1139,19 +1397,31 @@
           <a:lstStyle/>
           <a:p>
             <a:r>
-              <a:t>DESARROLLO (para explicarlo, no se proyecta):</a:t>
+              <a:t>COMO CORRERLO: es un programa completo. Se copia entero en un archivo Main.java (o en cualquier compilador de Java en linea) y se ejecuta: no necesita la lamina anterior ni otro archivo.</a:t>
             </a:r>
           </a:p>
           <a:p/>
           <a:p>
             <a:r>
-              <a:t>El constructor es la pieza que garantiza que el objeto nazca valido. Es un metodo especial que se llama igual que la clase, no declara tipo de retorno y se ejecuta una sola vez, en el momento de la creacion. La instruccion new hace dos cosas: reserva la memoria en el monton y llama al constructor. Si la clase no declara ninguno, Java agrega uno sin parametros; en el instante en que usted escribe un constructor con parametros, el vacio desaparece, y ese es literalmente el primer error de compilacion del curso cuando alguien sigue escribiendo new Mascota() en otro archivo. La responsabilidad del constructor es la validacion: si el nombre llega null o vacio, lanza; si la edad llega negativa, lanza; y como consecuencia, en todo el programa no puede existir una Mascota sin nombre. Eso elimina una familia entera de errores aguas abajo, porque nadie tendra que preguntarse mas adelante si el nombre podria estar vacio. El anti patron a evitar es el constructor vacio seguido de cinco setters: permite que exista un objeto a medio llenar que viajara hasta la interfaz grafica de la Clase 4 y fallara alli, a doscientas lineas del lugar donde en realidad se creo mal, que es el peor escenario de depuracion posible. Como convencion, no como regla, si un constructor pide mas de cuatro o cinco parametros es senal de que la clase esta juntando cosas que no pertenecen al mismo concepto.</a:t>
+              <a:t>SALIDA ESPERADA:</a:t>
             </a:r>
           </a:p>
           <a:p/>
           <a:p>
             <a:r>
-              <a:t>El constructor es el metodo que se ejecuta al crear el objeto y deja sus atributos en un estado valido. La instruccion new Mascota("Luna", "Canino", 3) reserva memoria y llama al constructor. Si no se escribe ninguno, Java agrega uno vacio por defecto, y ahi es donde aparecen objetos a medio inicializar que despues fallan con NullPointerException en el peor momento. Por eso desde la primera clase se escribe el constructor completo.</a:t>
+              <a:t>Luna (4 anios)</a:t>
+            </a:r>
+          </a:p>
+          <a:p/>
+          <a:p>
+            <a:r>
+              <a:t>Edad invalida, sigue en 4</a:t>
+            </a:r>
+          </a:p>
+          <a:p/>
+          <a:p>
+            <a:r>
+              <a:t>Luna (4 anios)</a:t>
             </a:r>
           </a:p>
         </p:txBody>
@@ -1227,7 +1497,7 @@
           <a:p/>
           <a:p>
             <a:r>
-              <a:t>Queda el error mas frecuente de Java, y hay que nombrarlo hoy porque su causa es todo lo anterior. null significa que la referencia no apunta a ningun objeto: es un control remoto sin televisor. No es cero, no es cadena vacia y no es un objeto con los campos en blanco; es la ausencia de destino. NullPointerException es lo que ocurre cuando el programa intenta usar esa referencia, por ejemplo llamando un metodo o leyendo un campo. Los tres casos que produciran esa excepcion en el sistema de la clinica son predecibles: un metodo buscarMascota(id) que devuelve null cuando no encuentra nada y un llamador que hace m.getNombre() sin preguntar; una Cita cuya Mascota nunca se asigno; y una lista declarada pero no inicializada. Dato citable: Tony Hoare introdujo la referencia nula en 1965 y en una conferencia de 2009 la llamo publicamente su error de mil millones de dolares. Las encuestas y los reportes de errores en produccion la ubican de forma consistente como la excepcion mas frecuente en aplicaciones Java, y conviene presentarlo asi, como observacion de la industria y no como ley. Las defensas, en orden de utilidad real: validar en el constructor para que no nazcan objetos incompletos; nunca devolver null en un metodo que devuelve una coleccion, sino una lista vacia; usar Optional cuando la ausencia es un resultado legitimo de una busqueda; y leer el mensaje de la excepcion, porque desde Java 14 el mensaje indica cual variable exacta era null. Pregunta previsible: entonces le pongo cadena vacia y listo. No: eso no resuelve el problema, lo esconde, y cambia una excepcion clara por un dato falso guardado en el archivo de la Clase 9.</a:t>
+              <a:t>Herencia es que una clase puede extender a otra y reutilizar lo que ya define: Perro extends Mascota hereda nombre y edad, y agrega lo suyo. Advertencia importante: la herencia se sobreusa, y solo aplica cuando de verdad hay una relacion 'es un' (un perro ES una mascota); si la relacion es 'tiene un', no es herencia sino composicion. Polimorfismo es que el mismo mensaje produce comportamientos distintos segun el objeto que lo recibe: si Perro y Gato heredan de Mascota y ambos redefinen hacerSonido(), recorrer una lista de mascotas y llamar ese metodo produce Guau o Miau segun el objeto real, sin que el codigo que recorre la lista necesite saber de que tipo es cada una.</a:t>
             </a:r>
           </a:p>
         </p:txBody>
@@ -5305,7 +5575,7 @@
         <p:spPr>
           <a:xfrm>
             <a:off x="457200" y="1261872"/>
-            <a:ext cx="11277295" cy="3028315"/>
+            <a:ext cx="11277295" cy="5093208"/>
           </a:xfrm>
           <a:prstGeom prst="roundRect">
             <a:avLst>
@@ -5541,7 +5811,7 @@
                 </a:solidFill>
                 <a:latin typeface="Calibri"/>
               </a:rPr>
-              <a:t>Java</a:t>
+              <a:t>Main.java</a:t>
             </a:r>
           </a:p>
         </p:txBody>
@@ -5555,7 +5825,7 @@
         <p:spPr>
           <a:xfrm>
             <a:off x="685800" y="1719072"/>
-            <a:ext cx="502920" cy="2433955"/>
+            <a:ext cx="502920" cy="4498848"/>
           </a:xfrm>
           <a:prstGeom prst="rect">
             <a:avLst/>
@@ -5570,11 +5840,11 @@
           <a:p>
             <a:pPr algn="r">
               <a:spcAft>
-                <a:spcPts val="342"/>
-              </a:spcAft>
-            </a:pPr>
-            <a:r>
-              <a:rPr sz="1600" i="0" b="0">
+                <a:spcPts val="78"/>
+              </a:spcAft>
+            </a:pPr>
+            <a:r>
+              <a:rPr sz="1100" i="0" b="0">
                 <a:solidFill>
                   <a:srgbClr val="858585"/>
                 </a:solidFill>
@@ -5586,11 +5856,11 @@
           <a:p>
             <a:pPr algn="r">
               <a:spcAft>
-                <a:spcPts val="342"/>
-              </a:spcAft>
-            </a:pPr>
-            <a:r>
-              <a:rPr sz="1600" i="0" b="0">
+                <a:spcPts val="78"/>
+              </a:spcAft>
+            </a:pPr>
+            <a:r>
+              <a:rPr sz="1100" i="0" b="0">
                 <a:solidFill>
                   <a:srgbClr val="858585"/>
                 </a:solidFill>
@@ -5602,11 +5872,11 @@
           <a:p>
             <a:pPr algn="r">
               <a:spcAft>
-                <a:spcPts val="342"/>
-              </a:spcAft>
-            </a:pPr>
-            <a:r>
-              <a:rPr sz="1600" i="0" b="0">
+                <a:spcPts val="78"/>
+              </a:spcAft>
+            </a:pPr>
+            <a:r>
+              <a:rPr sz="1100" i="0" b="0">
                 <a:solidFill>
                   <a:srgbClr val="858585"/>
                 </a:solidFill>
@@ -5618,11 +5888,11 @@
           <a:p>
             <a:pPr algn="r">
               <a:spcAft>
-                <a:spcPts val="342"/>
-              </a:spcAft>
-            </a:pPr>
-            <a:r>
-              <a:rPr sz="1600" i="0" b="0">
+                <a:spcPts val="78"/>
+              </a:spcAft>
+            </a:pPr>
+            <a:r>
+              <a:rPr sz="1100" i="0" b="0">
                 <a:solidFill>
                   <a:srgbClr val="858585"/>
                 </a:solidFill>
@@ -5634,11 +5904,11 @@
           <a:p>
             <a:pPr algn="r">
               <a:spcAft>
-                <a:spcPts val="342"/>
-              </a:spcAft>
-            </a:pPr>
-            <a:r>
-              <a:rPr sz="1600" i="0" b="0">
+                <a:spcPts val="78"/>
+              </a:spcAft>
+            </a:pPr>
+            <a:r>
+              <a:rPr sz="1100" i="0" b="0">
                 <a:solidFill>
                   <a:srgbClr val="858585"/>
                 </a:solidFill>
@@ -5650,11 +5920,11 @@
           <a:p>
             <a:pPr algn="r">
               <a:spcAft>
-                <a:spcPts val="342"/>
-              </a:spcAft>
-            </a:pPr>
-            <a:r>
-              <a:rPr sz="1600" i="0" b="0">
+                <a:spcPts val="78"/>
+              </a:spcAft>
+            </a:pPr>
+            <a:r>
+              <a:rPr sz="1100" i="0" b="0">
                 <a:solidFill>
                   <a:srgbClr val="858585"/>
                 </a:solidFill>
@@ -5666,11 +5936,11 @@
           <a:p>
             <a:pPr algn="r">
               <a:spcAft>
-                <a:spcPts val="342"/>
-              </a:spcAft>
-            </a:pPr>
-            <a:r>
-              <a:rPr sz="1600" i="0" b="0">
+                <a:spcPts val="78"/>
+              </a:spcAft>
+            </a:pPr>
+            <a:r>
+              <a:rPr sz="1100" i="0" b="0">
                 <a:solidFill>
                   <a:srgbClr val="858585"/>
                 </a:solidFill>
@@ -5682,17 +5952,177 @@
           <a:p>
             <a:pPr algn="r">
               <a:spcAft>
-                <a:spcPts val="342"/>
-              </a:spcAft>
-            </a:pPr>
-            <a:r>
-              <a:rPr sz="1600" i="0" b="0">
+                <a:spcPts val="78"/>
+              </a:spcAft>
+            </a:pPr>
+            <a:r>
+              <a:rPr sz="1100" i="0" b="0">
                 <a:solidFill>
                   <a:srgbClr val="858585"/>
                 </a:solidFill>
                 <a:latin typeface="Consolas"/>
               </a:rPr>
               <a:t>8</a:t>
+            </a:r>
+          </a:p>
+          <a:p>
+            <a:pPr algn="r">
+              <a:spcAft>
+                <a:spcPts val="78"/>
+              </a:spcAft>
+            </a:pPr>
+            <a:r>
+              <a:rPr sz="1100" i="0" b="0">
+                <a:solidFill>
+                  <a:srgbClr val="858585"/>
+                </a:solidFill>
+                <a:latin typeface="Consolas"/>
+              </a:rPr>
+              <a:t>9</a:t>
+            </a:r>
+          </a:p>
+          <a:p>
+            <a:pPr algn="r">
+              <a:spcAft>
+                <a:spcPts val="78"/>
+              </a:spcAft>
+            </a:pPr>
+            <a:r>
+              <a:rPr sz="1100" i="0" b="0">
+                <a:solidFill>
+                  <a:srgbClr val="858585"/>
+                </a:solidFill>
+                <a:latin typeface="Consolas"/>
+              </a:rPr>
+              <a:t>10</a:t>
+            </a:r>
+          </a:p>
+          <a:p>
+            <a:pPr algn="r">
+              <a:spcAft>
+                <a:spcPts val="78"/>
+              </a:spcAft>
+            </a:pPr>
+            <a:r>
+              <a:rPr sz="1100" i="0" b="0">
+                <a:solidFill>
+                  <a:srgbClr val="858585"/>
+                </a:solidFill>
+                <a:latin typeface="Consolas"/>
+              </a:rPr>
+              <a:t>11</a:t>
+            </a:r>
+          </a:p>
+          <a:p>
+            <a:pPr algn="r">
+              <a:spcAft>
+                <a:spcPts val="78"/>
+              </a:spcAft>
+            </a:pPr>
+            <a:r>
+              <a:rPr sz="1100" i="0" b="0">
+                <a:solidFill>
+                  <a:srgbClr val="858585"/>
+                </a:solidFill>
+                <a:latin typeface="Consolas"/>
+              </a:rPr>
+              <a:t>12</a:t>
+            </a:r>
+          </a:p>
+          <a:p>
+            <a:pPr algn="r">
+              <a:spcAft>
+                <a:spcPts val="78"/>
+              </a:spcAft>
+            </a:pPr>
+            <a:r>
+              <a:rPr sz="1100" i="0" b="0">
+                <a:solidFill>
+                  <a:srgbClr val="858585"/>
+                </a:solidFill>
+                <a:latin typeface="Consolas"/>
+              </a:rPr>
+              <a:t>13</a:t>
+            </a:r>
+          </a:p>
+          <a:p>
+            <a:pPr algn="r">
+              <a:spcAft>
+                <a:spcPts val="78"/>
+              </a:spcAft>
+            </a:pPr>
+            <a:r>
+              <a:rPr sz="1100" i="0" b="0">
+                <a:solidFill>
+                  <a:srgbClr val="858585"/>
+                </a:solidFill>
+                <a:latin typeface="Consolas"/>
+              </a:rPr>
+              <a:t>14</a:t>
+            </a:r>
+          </a:p>
+          <a:p>
+            <a:pPr algn="r">
+              <a:spcAft>
+                <a:spcPts val="78"/>
+              </a:spcAft>
+            </a:pPr>
+            <a:r>
+              <a:rPr sz="1100" i="0" b="0">
+                <a:solidFill>
+                  <a:srgbClr val="858585"/>
+                </a:solidFill>
+                <a:latin typeface="Consolas"/>
+              </a:rPr>
+              <a:t>15</a:t>
+            </a:r>
+          </a:p>
+          <a:p>
+            <a:pPr algn="r">
+              <a:spcAft>
+                <a:spcPts val="78"/>
+              </a:spcAft>
+            </a:pPr>
+            <a:r>
+              <a:rPr sz="1100" i="0" b="0">
+                <a:solidFill>
+                  <a:srgbClr val="858585"/>
+                </a:solidFill>
+                <a:latin typeface="Consolas"/>
+              </a:rPr>
+              <a:t>16</a:t>
+            </a:r>
+          </a:p>
+          <a:p>
+            <a:pPr algn="r">
+              <a:spcAft>
+                <a:spcPts val="78"/>
+              </a:spcAft>
+            </a:pPr>
+            <a:r>
+              <a:rPr sz="1100" i="0" b="0">
+                <a:solidFill>
+                  <a:srgbClr val="858585"/>
+                </a:solidFill>
+                <a:latin typeface="Consolas"/>
+              </a:rPr>
+              <a:t>17</a:t>
+            </a:r>
+          </a:p>
+          <a:p>
+            <a:pPr algn="r">
+              <a:spcAft>
+                <a:spcPts val="78"/>
+              </a:spcAft>
+            </a:pPr>
+            <a:r>
+              <a:rPr sz="1100" i="0" b="0">
+                <a:solidFill>
+                  <a:srgbClr val="858585"/>
+                </a:solidFill>
+                <a:latin typeface="Consolas"/>
+              </a:rPr>
+              <a:t>18</a:t>
             </a:r>
           </a:p>
         </p:txBody>
@@ -5706,7 +6136,7 @@
         <p:spPr>
           <a:xfrm>
             <a:off x="1188720" y="1719072"/>
-            <a:ext cx="10271455" cy="2433955"/>
+            <a:ext cx="4747107" cy="4498848"/>
           </a:xfrm>
           <a:prstGeom prst="rect">
             <a:avLst/>
@@ -5721,36 +6151,784 @@
           <a:p>
             <a:pPr>
               <a:spcAft>
-                <a:spcPts val="342"/>
-              </a:spcAft>
-            </a:pPr>
-            <a:r>
-              <a:rPr sz="1600" i="1" b="0">
+                <a:spcPts val="78"/>
+              </a:spcAft>
+            </a:pPr>
+            <a:r>
+              <a:rPr sz="1100" i="0" b="0">
+                <a:solidFill>
+                  <a:srgbClr val="569CD6"/>
+                </a:solidFill>
+                <a:latin typeface="Consolas"/>
+              </a:rPr>
+              <a:t>class</a:t>
+            </a:r>
+            <a:r>
+              <a:rPr sz="1100" i="0" b="0">
+                <a:solidFill>
+                  <a:srgbClr val="D4D4D4"/>
+                </a:solidFill>
+                <a:latin typeface="Consolas"/>
+              </a:rPr>
+              <a:t> </a:t>
+            </a:r>
+            <a:r>
+              <a:rPr sz="1100" i="0" b="0">
+                <a:solidFill>
+                  <a:srgbClr val="4EC9B0"/>
+                </a:solidFill>
+                <a:latin typeface="Consolas"/>
+              </a:rPr>
+              <a:t>Main</a:t>
+            </a:r>
+            <a:r>
+              <a:rPr sz="1100" i="0" b="0">
+                <a:solidFill>
+                  <a:srgbClr val="D4D4D4"/>
+                </a:solidFill>
+                <a:latin typeface="Consolas"/>
+              </a:rPr>
+              <a:t> {</a:t>
+            </a:r>
+          </a:p>
+          <a:p>
+            <a:pPr>
+              <a:spcAft>
+                <a:spcPts val="78"/>
+              </a:spcAft>
+            </a:pPr>
+            <a:r>
+              <a:rPr sz="1100" i="0" b="0">
+                <a:solidFill>
+                  <a:srgbClr val="D4D4D4"/>
+                </a:solidFill>
+                <a:latin typeface="Consolas"/>
+              </a:rPr>
+              <a:t>    </a:t>
+            </a:r>
+            <a:r>
+              <a:rPr sz="1100" i="0" b="0">
+                <a:solidFill>
+                  <a:srgbClr val="569CD6"/>
+                </a:solidFill>
+                <a:latin typeface="Consolas"/>
+              </a:rPr>
+              <a:t>public</a:t>
+            </a:r>
+            <a:r>
+              <a:rPr sz="1100" i="0" b="0">
+                <a:solidFill>
+                  <a:srgbClr val="D4D4D4"/>
+                </a:solidFill>
+                <a:latin typeface="Consolas"/>
+              </a:rPr>
+              <a:t> </a:t>
+            </a:r>
+            <a:r>
+              <a:rPr sz="1100" i="0" b="0">
+                <a:solidFill>
+                  <a:srgbClr val="569CD6"/>
+                </a:solidFill>
+                <a:latin typeface="Consolas"/>
+              </a:rPr>
+              <a:t>static</a:t>
+            </a:r>
+            <a:r>
+              <a:rPr sz="1100" i="0" b="0">
+                <a:solidFill>
+                  <a:srgbClr val="D4D4D4"/>
+                </a:solidFill>
+                <a:latin typeface="Consolas"/>
+              </a:rPr>
+              <a:t> </a:t>
+            </a:r>
+            <a:r>
+              <a:rPr sz="1100" i="0" b="0">
+                <a:solidFill>
+                  <a:srgbClr val="569CD6"/>
+                </a:solidFill>
+                <a:latin typeface="Consolas"/>
+              </a:rPr>
+              <a:t>void</a:t>
+            </a:r>
+            <a:r>
+              <a:rPr sz="1100" i="0" b="0">
+                <a:solidFill>
+                  <a:srgbClr val="D4D4D4"/>
+                </a:solidFill>
+                <a:latin typeface="Consolas"/>
+              </a:rPr>
+              <a:t> </a:t>
+            </a:r>
+            <a:r>
+              <a:rPr sz="1100" i="0" b="0">
+                <a:solidFill>
+                  <a:srgbClr val="DCDCAA"/>
+                </a:solidFill>
+                <a:latin typeface="Consolas"/>
+              </a:rPr>
+              <a:t>main</a:t>
+            </a:r>
+            <a:r>
+              <a:rPr sz="1100" i="0" b="0">
+                <a:solidFill>
+                  <a:srgbClr val="D4D4D4"/>
+                </a:solidFill>
+                <a:latin typeface="Consolas"/>
+              </a:rPr>
+              <a:t>(</a:t>
+            </a:r>
+            <a:r>
+              <a:rPr sz="1100" i="0" b="0">
+                <a:solidFill>
+                  <a:srgbClr val="4EC9B0"/>
+                </a:solidFill>
+                <a:latin typeface="Consolas"/>
+              </a:rPr>
+              <a:t>String</a:t>
+            </a:r>
+            <a:r>
+              <a:rPr sz="1100" i="0" b="0">
+                <a:solidFill>
+                  <a:srgbClr val="D4D4D4"/>
+                </a:solidFill>
+                <a:latin typeface="Consolas"/>
+              </a:rPr>
+              <a:t>[] </a:t>
+            </a:r>
+            <a:r>
+              <a:rPr sz="1100" i="0" b="0">
+                <a:solidFill>
+                  <a:srgbClr val="D4D4D4"/>
+                </a:solidFill>
+                <a:latin typeface="Consolas"/>
+              </a:rPr>
+              <a:t>args</a:t>
+            </a:r>
+            <a:r>
+              <a:rPr sz="1100" i="0" b="0">
+                <a:solidFill>
+                  <a:srgbClr val="D4D4D4"/>
+                </a:solidFill>
+                <a:latin typeface="Consolas"/>
+              </a:rPr>
+              <a:t>) {</a:t>
+            </a:r>
+          </a:p>
+          <a:p>
+            <a:pPr>
+              <a:spcAft>
+                <a:spcPts val="78"/>
+              </a:spcAft>
+            </a:pPr>
+            <a:r>
+              <a:rPr sz="1100" i="0" b="0">
+                <a:solidFill>
+                  <a:srgbClr val="D4D4D4"/>
+                </a:solidFill>
+                <a:latin typeface="Consolas"/>
+              </a:rPr>
+              <a:t>        </a:t>
+            </a:r>
+            <a:r>
+              <a:rPr sz="1100" i="0" b="0">
+                <a:solidFill>
+                  <a:srgbClr val="D4D4D4"/>
+                </a:solidFill>
+                <a:latin typeface="Consolas"/>
+              </a:rPr>
+              <a:t>Mascota</a:t>
+            </a:r>
+            <a:r>
+              <a:rPr sz="1100" i="0" b="0">
+                <a:solidFill>
+                  <a:srgbClr val="D4D4D4"/>
+                </a:solidFill>
+                <a:latin typeface="Consolas"/>
+              </a:rPr>
+              <a:t> </a:t>
+            </a:r>
+            <a:r>
+              <a:rPr sz="1100" i="0" b="0">
+                <a:solidFill>
+                  <a:srgbClr val="D4D4D4"/>
+                </a:solidFill>
+                <a:latin typeface="Consolas"/>
+              </a:rPr>
+              <a:t>luna</a:t>
+            </a:r>
+            <a:r>
+              <a:rPr sz="1100" i="0" b="0">
+                <a:solidFill>
+                  <a:srgbClr val="D4D4D4"/>
+                </a:solidFill>
+                <a:latin typeface="Consolas"/>
+              </a:rPr>
+              <a:t> = </a:t>
+            </a:r>
+            <a:r>
+              <a:rPr sz="1100" i="0" b="0">
+                <a:solidFill>
+                  <a:srgbClr val="569CD6"/>
+                </a:solidFill>
+                <a:latin typeface="Consolas"/>
+              </a:rPr>
+              <a:t>new</a:t>
+            </a:r>
+            <a:r>
+              <a:rPr sz="1100" i="0" b="0">
+                <a:solidFill>
+                  <a:srgbClr val="D4D4D4"/>
+                </a:solidFill>
+                <a:latin typeface="Consolas"/>
+              </a:rPr>
+              <a:t> </a:t>
+            </a:r>
+            <a:r>
+              <a:rPr sz="1100" i="0" b="0">
+                <a:solidFill>
+                  <a:srgbClr val="4EC9B0"/>
+                </a:solidFill>
+                <a:latin typeface="Consolas"/>
+              </a:rPr>
+              <a:t>Mascota</a:t>
+            </a:r>
+            <a:r>
+              <a:rPr sz="1100" i="0" b="0">
+                <a:solidFill>
+                  <a:srgbClr val="D4D4D4"/>
+                </a:solidFill>
+                <a:latin typeface="Consolas"/>
+              </a:rPr>
+              <a:t>(</a:t>
+            </a:r>
+            <a:r>
+              <a:rPr sz="1100" i="0" b="0">
+                <a:solidFill>
+                  <a:srgbClr val="CE9178"/>
+                </a:solidFill>
+                <a:latin typeface="Consolas"/>
+              </a:rPr>
+              <a:t>"Luna"</a:t>
+            </a:r>
+            <a:r>
+              <a:rPr sz="1100" i="0" b="0">
+                <a:solidFill>
+                  <a:srgbClr val="D4D4D4"/>
+                </a:solidFill>
+                <a:latin typeface="Consolas"/>
+              </a:rPr>
+              <a:t>, </a:t>
+            </a:r>
+            <a:r>
+              <a:rPr sz="1100" i="0" b="0">
+                <a:solidFill>
+                  <a:srgbClr val="B5CEA8"/>
+                </a:solidFill>
+                <a:latin typeface="Consolas"/>
+              </a:rPr>
+              <a:t>3</a:t>
+            </a:r>
+            <a:r>
+              <a:rPr sz="1100" i="0" b="0">
+                <a:solidFill>
+                  <a:srgbClr val="D4D4D4"/>
+                </a:solidFill>
+                <a:latin typeface="Consolas"/>
+              </a:rPr>
+              <a:t>);</a:t>
+            </a:r>
+          </a:p>
+          <a:p>
+            <a:pPr>
+              <a:spcAft>
+                <a:spcPts val="78"/>
+              </a:spcAft>
+            </a:pPr>
+            <a:r>
+              <a:rPr sz="1100" i="0" b="0">
+                <a:solidFill>
+                  <a:srgbClr val="D4D4D4"/>
+                </a:solidFill>
+                <a:latin typeface="Consolas"/>
+              </a:rPr>
+              <a:t>        </a:t>
+            </a:r>
+            <a:r>
+              <a:rPr sz="1100" i="0" b="0">
+                <a:solidFill>
+                  <a:srgbClr val="DCDCAA"/>
+                </a:solidFill>
+                <a:latin typeface="Consolas"/>
+              </a:rPr>
+              <a:t>luna.setEdad</a:t>
+            </a:r>
+            <a:r>
+              <a:rPr sz="1100" i="0" b="0">
+                <a:solidFill>
+                  <a:srgbClr val="D4D4D4"/>
+                </a:solidFill>
+                <a:latin typeface="Consolas"/>
+              </a:rPr>
+              <a:t>(</a:t>
+            </a:r>
+            <a:r>
+              <a:rPr sz="1100" i="0" b="0">
+                <a:solidFill>
+                  <a:srgbClr val="B5CEA8"/>
+                </a:solidFill>
+                <a:latin typeface="Consolas"/>
+              </a:rPr>
+              <a:t>4</a:t>
+            </a:r>
+            <a:r>
+              <a:rPr sz="1100" i="0" b="0">
+                <a:solidFill>
+                  <a:srgbClr val="D4D4D4"/>
+                </a:solidFill>
+                <a:latin typeface="Consolas"/>
+              </a:rPr>
+              <a:t>);</a:t>
+            </a:r>
+          </a:p>
+          <a:p>
+            <a:pPr>
+              <a:spcAft>
+                <a:spcPts val="78"/>
+              </a:spcAft>
+            </a:pPr>
+            <a:r>
+              <a:rPr sz="1100" i="0" b="0">
+                <a:solidFill>
+                  <a:srgbClr val="D4D4D4"/>
+                </a:solidFill>
+                <a:latin typeface="Consolas"/>
+              </a:rPr>
+              <a:t>        </a:t>
+            </a:r>
+            <a:r>
+              <a:rPr sz="1100" i="0" b="0">
+                <a:solidFill>
+                  <a:srgbClr val="DCDCAA"/>
+                </a:solidFill>
+                <a:latin typeface="Consolas"/>
+              </a:rPr>
+              <a:t>System.out.println</a:t>
+            </a:r>
+            <a:r>
+              <a:rPr sz="1100" i="0" b="0">
+                <a:solidFill>
+                  <a:srgbClr val="D4D4D4"/>
+                </a:solidFill>
+                <a:latin typeface="Consolas"/>
+              </a:rPr>
+              <a:t>(</a:t>
+            </a:r>
+            <a:r>
+              <a:rPr sz="1100" i="0" b="0">
+                <a:solidFill>
+                  <a:srgbClr val="D4D4D4"/>
+                </a:solidFill>
+                <a:latin typeface="Consolas"/>
+              </a:rPr>
+              <a:t>luna</a:t>
+            </a:r>
+            <a:r>
+              <a:rPr sz="1100" i="0" b="0">
+                <a:solidFill>
+                  <a:srgbClr val="D4D4D4"/>
+                </a:solidFill>
+                <a:latin typeface="Consolas"/>
+              </a:rPr>
+              <a:t>);</a:t>
+            </a:r>
+          </a:p>
+          <a:p>
+            <a:pPr>
+              <a:spcAft>
+                <a:spcPts val="78"/>
+              </a:spcAft>
+            </a:pPr>
+            <a:r>
+              <a:rPr sz="1100" i="0" b="0">
+                <a:solidFill>
+                  <a:srgbClr val="D4D4D4"/>
+                </a:solidFill>
+                <a:latin typeface="Consolas"/>
+              </a:rPr>
+              <a:t>        </a:t>
+            </a:r>
+            <a:r>
+              <a:rPr sz="1100" i="0" b="0">
+                <a:solidFill>
+                  <a:srgbClr val="DCDCAA"/>
+                </a:solidFill>
+                <a:latin typeface="Consolas"/>
+              </a:rPr>
+              <a:t>luna.setEdad</a:t>
+            </a:r>
+            <a:r>
+              <a:rPr sz="1100" i="0" b="0">
+                <a:solidFill>
+                  <a:srgbClr val="D4D4D4"/>
+                </a:solidFill>
+                <a:latin typeface="Consolas"/>
+              </a:rPr>
+              <a:t>(-</a:t>
+            </a:r>
+            <a:r>
+              <a:rPr sz="1100" i="0" b="0">
+                <a:solidFill>
+                  <a:srgbClr val="B5CEA8"/>
+                </a:solidFill>
+                <a:latin typeface="Consolas"/>
+              </a:rPr>
+              <a:t>2</a:t>
+            </a:r>
+            <a:r>
+              <a:rPr sz="1100" i="0" b="0">
+                <a:solidFill>
+                  <a:srgbClr val="D4D4D4"/>
+                </a:solidFill>
+                <a:latin typeface="Consolas"/>
+              </a:rPr>
+              <a:t>);   </a:t>
+            </a:r>
+            <a:r>
+              <a:rPr sz="1100" i="1" b="0">
                 <a:solidFill>
                   <a:srgbClr val="6A9955"/>
                 </a:solidFill>
                 <a:latin typeface="Consolas"/>
               </a:rPr>
-              <a:t>/** El objeto se defiende: una edad negativa no tiene sentido en el dominio. */</a:t>
+              <a:t>// el objeto rechaza el dato</a:t>
             </a:r>
           </a:p>
           <a:p>
             <a:pPr>
               <a:spcAft>
-                <a:spcPts val="342"/>
-              </a:spcAft>
-            </a:pPr>
-            <a:r>
-              <a:rPr sz="1600" i="0" b="0">
+                <a:spcPts val="78"/>
+              </a:spcAft>
+            </a:pPr>
+            <a:r>
+              <a:rPr sz="1100" i="0" b="0">
+                <a:solidFill>
+                  <a:srgbClr val="D4D4D4"/>
+                </a:solidFill>
+                <a:latin typeface="Consolas"/>
+              </a:rPr>
+              <a:t>        </a:t>
+            </a:r>
+            <a:r>
+              <a:rPr sz="1100" i="0" b="0">
+                <a:solidFill>
+                  <a:srgbClr val="DCDCAA"/>
+                </a:solidFill>
+                <a:latin typeface="Consolas"/>
+              </a:rPr>
+              <a:t>System.out.println</a:t>
+            </a:r>
+            <a:r>
+              <a:rPr sz="1100" i="0" b="0">
+                <a:solidFill>
+                  <a:srgbClr val="D4D4D4"/>
+                </a:solidFill>
+                <a:latin typeface="Consolas"/>
+              </a:rPr>
+              <a:t>(</a:t>
+            </a:r>
+            <a:r>
+              <a:rPr sz="1100" i="0" b="0">
+                <a:solidFill>
+                  <a:srgbClr val="D4D4D4"/>
+                </a:solidFill>
+                <a:latin typeface="Consolas"/>
+              </a:rPr>
+              <a:t>luna</a:t>
+            </a:r>
+            <a:r>
+              <a:rPr sz="1100" i="0" b="0">
+                <a:solidFill>
+                  <a:srgbClr val="D4D4D4"/>
+                </a:solidFill>
+                <a:latin typeface="Consolas"/>
+              </a:rPr>
+              <a:t>);</a:t>
+            </a:r>
+          </a:p>
+          <a:p>
+            <a:pPr>
+              <a:spcAft>
+                <a:spcPts val="78"/>
+              </a:spcAft>
+            </a:pPr>
+            <a:r>
+              <a:rPr sz="1100" i="0" b="0">
+                <a:solidFill>
+                  <a:srgbClr val="D4D4D4"/>
+                </a:solidFill>
+                <a:latin typeface="Consolas"/>
+              </a:rPr>
+              <a:t>    }</a:t>
+            </a:r>
+          </a:p>
+          <a:p>
+            <a:pPr>
+              <a:spcAft>
+                <a:spcPts val="78"/>
+              </a:spcAft>
+            </a:pPr>
+            <a:r>
+              <a:rPr sz="1100" i="0" b="0">
+                <a:solidFill>
+                  <a:srgbClr val="D4D4D4"/>
+                </a:solidFill>
+                <a:latin typeface="Consolas"/>
+              </a:rPr>
+              <a:t>}</a:t>
+            </a:r>
+          </a:p>
+          <a:p>
+            <a:pPr>
+              <a:spcAft>
+                <a:spcPts val="78"/>
+              </a:spcAft>
+            </a:pPr>
+            <a:r>
+              <a:rPr sz="1100" i="0" b="0">
+                <a:solidFill>
+                  <a:srgbClr val="D4D4D4"/>
+                </a:solidFill>
+                <a:latin typeface="Consolas"/>
+              </a:rPr>
+              <a:t/>
+            </a:r>
+          </a:p>
+          <a:p>
+            <a:pPr>
+              <a:spcAft>
+                <a:spcPts val="78"/>
+              </a:spcAft>
+            </a:pPr>
+            <a:r>
+              <a:rPr sz="1100" i="0" b="0">
                 <a:solidFill>
                   <a:srgbClr val="569CD6"/>
                 </a:solidFill>
                 <a:latin typeface="Consolas"/>
               </a:rPr>
+              <a:t>class</a:t>
+            </a:r>
+            <a:r>
+              <a:rPr sz="1100" i="0" b="0">
+                <a:solidFill>
+                  <a:srgbClr val="D4D4D4"/>
+                </a:solidFill>
+                <a:latin typeface="Consolas"/>
+              </a:rPr>
+              <a:t> </a:t>
+            </a:r>
+            <a:r>
+              <a:rPr sz="1100" i="0" b="0">
+                <a:solidFill>
+                  <a:srgbClr val="4EC9B0"/>
+                </a:solidFill>
+                <a:latin typeface="Consolas"/>
+              </a:rPr>
+              <a:t>Mascota</a:t>
+            </a:r>
+            <a:r>
+              <a:rPr sz="1100" i="0" b="0">
+                <a:solidFill>
+                  <a:srgbClr val="D4D4D4"/>
+                </a:solidFill>
+                <a:latin typeface="Consolas"/>
+              </a:rPr>
+              <a:t> {</a:t>
+            </a:r>
+          </a:p>
+          <a:p>
+            <a:pPr>
+              <a:spcAft>
+                <a:spcPts val="78"/>
+              </a:spcAft>
+            </a:pPr>
+            <a:r>
+              <a:rPr sz="1100" i="0" b="0">
+                <a:solidFill>
+                  <a:srgbClr val="D4D4D4"/>
+                </a:solidFill>
+                <a:latin typeface="Consolas"/>
+              </a:rPr>
+              <a:t>    </a:t>
+            </a:r>
+            <a:r>
+              <a:rPr sz="1100" i="0" b="0">
+                <a:solidFill>
+                  <a:srgbClr val="569CD6"/>
+                </a:solidFill>
+                <a:latin typeface="Consolas"/>
+              </a:rPr>
+              <a:t>private</a:t>
+            </a:r>
+            <a:r>
+              <a:rPr sz="1100" i="0" b="0">
+                <a:solidFill>
+                  <a:srgbClr val="D4D4D4"/>
+                </a:solidFill>
+                <a:latin typeface="Consolas"/>
+              </a:rPr>
+              <a:t> </a:t>
+            </a:r>
+            <a:r>
+              <a:rPr sz="1100" i="0" b="0">
+                <a:solidFill>
+                  <a:srgbClr val="4EC9B0"/>
+                </a:solidFill>
+                <a:latin typeface="Consolas"/>
+              </a:rPr>
+              <a:t>String</a:t>
+            </a:r>
+            <a:r>
+              <a:rPr sz="1100" i="0" b="0">
+                <a:solidFill>
+                  <a:srgbClr val="D4D4D4"/>
+                </a:solidFill>
+                <a:latin typeface="Consolas"/>
+              </a:rPr>
+              <a:t> </a:t>
+            </a:r>
+            <a:r>
+              <a:rPr sz="1100" i="0" b="0">
+                <a:solidFill>
+                  <a:srgbClr val="D4D4D4"/>
+                </a:solidFill>
+                <a:latin typeface="Consolas"/>
+              </a:rPr>
+              <a:t>nombre</a:t>
+            </a:r>
+            <a:r>
+              <a:rPr sz="1100" i="0" b="0">
+                <a:solidFill>
+                  <a:srgbClr val="D4D4D4"/>
+                </a:solidFill>
+                <a:latin typeface="Consolas"/>
+              </a:rPr>
+              <a:t>;</a:t>
+            </a:r>
+          </a:p>
+          <a:p>
+            <a:pPr>
+              <a:spcAft>
+                <a:spcPts val="78"/>
+              </a:spcAft>
+            </a:pPr>
+            <a:r>
+              <a:rPr sz="1100" i="0" b="0">
+                <a:solidFill>
+                  <a:srgbClr val="D4D4D4"/>
+                </a:solidFill>
+                <a:latin typeface="Consolas"/>
+              </a:rPr>
+              <a:t>    </a:t>
+            </a:r>
+            <a:r>
+              <a:rPr sz="1100" i="0" b="0">
+                <a:solidFill>
+                  <a:srgbClr val="569CD6"/>
+                </a:solidFill>
+                <a:latin typeface="Consolas"/>
+              </a:rPr>
+              <a:t>private</a:t>
+            </a:r>
+            <a:r>
+              <a:rPr sz="1100" i="0" b="0">
+                <a:solidFill>
+                  <a:srgbClr val="D4D4D4"/>
+                </a:solidFill>
+                <a:latin typeface="Consolas"/>
+              </a:rPr>
+              <a:t> </a:t>
+            </a:r>
+            <a:r>
+              <a:rPr sz="1100" i="0" b="0">
+                <a:solidFill>
+                  <a:srgbClr val="4EC9B0"/>
+                </a:solidFill>
+                <a:latin typeface="Consolas"/>
+              </a:rPr>
+              <a:t>int</a:t>
+            </a:r>
+            <a:r>
+              <a:rPr sz="1100" i="0" b="0">
+                <a:solidFill>
+                  <a:srgbClr val="D4D4D4"/>
+                </a:solidFill>
+                <a:latin typeface="Consolas"/>
+              </a:rPr>
+              <a:t> </a:t>
+            </a:r>
+            <a:r>
+              <a:rPr sz="1100" i="0" b="0">
+                <a:solidFill>
+                  <a:srgbClr val="D4D4D4"/>
+                </a:solidFill>
+                <a:latin typeface="Consolas"/>
+              </a:rPr>
+              <a:t>edad</a:t>
+            </a:r>
+            <a:r>
+              <a:rPr sz="1100" i="0" b="0">
+                <a:solidFill>
+                  <a:srgbClr val="D4D4D4"/>
+                </a:solidFill>
+                <a:latin typeface="Consolas"/>
+              </a:rPr>
+              <a:t>;</a:t>
+            </a:r>
+          </a:p>
+          <a:p>
+            <a:pPr>
+              <a:spcAft>
+                <a:spcPts val="78"/>
+              </a:spcAft>
+            </a:pPr>
+            <a:r>
+              <a:rPr sz="1100" i="0" b="0">
+                <a:solidFill>
+                  <a:srgbClr val="D4D4D4"/>
+                </a:solidFill>
+                <a:latin typeface="Consolas"/>
+              </a:rPr>
+              <a:t/>
+            </a:r>
+          </a:p>
+          <a:p>
+            <a:pPr>
+              <a:spcAft>
+                <a:spcPts val="78"/>
+              </a:spcAft>
+            </a:pPr>
+            <a:r>
+              <a:rPr sz="1100" i="0" b="0">
+                <a:solidFill>
+                  <a:srgbClr val="D4D4D4"/>
+                </a:solidFill>
+                <a:latin typeface="Consolas"/>
+              </a:rPr>
+              <a:t>    </a:t>
+            </a:r>
+            <a:r>
+              <a:rPr sz="1100" i="0" b="0">
+                <a:solidFill>
+                  <a:srgbClr val="569CD6"/>
+                </a:solidFill>
+                <a:latin typeface="Consolas"/>
+              </a:rPr>
               <a:t>public</a:t>
             </a:r>
             <a:r>
-              <a:rPr sz="1600" i="0" b="0">
+              <a:rPr sz="1100" i="0" b="0">
                 <a:solidFill>
                   <a:srgbClr val="D4D4D4"/>
                 </a:solidFill>
@@ -5759,61 +6937,201 @@
               <a:t> </a:t>
             </a:r>
             <a:r>
-              <a:rPr sz="1600" i="0" b="0">
+              <a:rPr sz="1100" i="0" b="0">
+                <a:solidFill>
+                  <a:srgbClr val="DCDCAA"/>
+                </a:solidFill>
+                <a:latin typeface="Consolas"/>
+              </a:rPr>
+              <a:t>Mascota</a:t>
+            </a:r>
+            <a:r>
+              <a:rPr sz="1100" i="0" b="0">
+                <a:solidFill>
+                  <a:srgbClr val="D4D4D4"/>
+                </a:solidFill>
+                <a:latin typeface="Consolas"/>
+              </a:rPr>
+              <a:t>(</a:t>
+            </a:r>
+            <a:r>
+              <a:rPr sz="1100" i="0" b="0">
+                <a:solidFill>
+                  <a:srgbClr val="4EC9B0"/>
+                </a:solidFill>
+                <a:latin typeface="Consolas"/>
+              </a:rPr>
+              <a:t>String</a:t>
+            </a:r>
+            <a:r>
+              <a:rPr sz="1100" i="0" b="0">
+                <a:solidFill>
+                  <a:srgbClr val="D4D4D4"/>
+                </a:solidFill>
+                <a:latin typeface="Consolas"/>
+              </a:rPr>
+              <a:t> </a:t>
+            </a:r>
+            <a:r>
+              <a:rPr sz="1100" i="0" b="0">
+                <a:solidFill>
+                  <a:srgbClr val="D4D4D4"/>
+                </a:solidFill>
+                <a:latin typeface="Consolas"/>
+              </a:rPr>
+              <a:t>nombre</a:t>
+            </a:r>
+            <a:r>
+              <a:rPr sz="1100" i="0" b="0">
+                <a:solidFill>
+                  <a:srgbClr val="D4D4D4"/>
+                </a:solidFill>
+                <a:latin typeface="Consolas"/>
+              </a:rPr>
+              <a:t>, </a:t>
+            </a:r>
+            <a:r>
+              <a:rPr sz="1100" i="0" b="0">
+                <a:solidFill>
+                  <a:srgbClr val="4EC9B0"/>
+                </a:solidFill>
+                <a:latin typeface="Consolas"/>
+              </a:rPr>
+              <a:t>int</a:t>
+            </a:r>
+            <a:r>
+              <a:rPr sz="1100" i="0" b="0">
+                <a:solidFill>
+                  <a:srgbClr val="D4D4D4"/>
+                </a:solidFill>
+                <a:latin typeface="Consolas"/>
+              </a:rPr>
+              <a:t> </a:t>
+            </a:r>
+            <a:r>
+              <a:rPr sz="1100" i="0" b="0">
+                <a:solidFill>
+                  <a:srgbClr val="D4D4D4"/>
+                </a:solidFill>
+                <a:latin typeface="Consolas"/>
+              </a:rPr>
+              <a:t>edad</a:t>
+            </a:r>
+            <a:r>
+              <a:rPr sz="1100" i="0" b="0">
+                <a:solidFill>
+                  <a:srgbClr val="D4D4D4"/>
+                </a:solidFill>
+                <a:latin typeface="Consolas"/>
+              </a:rPr>
+              <a:t>) {</a:t>
+            </a:r>
+          </a:p>
+          <a:p>
+            <a:pPr>
+              <a:spcAft>
+                <a:spcPts val="78"/>
+              </a:spcAft>
+            </a:pPr>
+            <a:r>
+              <a:rPr sz="1100" i="0" b="0">
+                <a:solidFill>
+                  <a:srgbClr val="D4D4D4"/>
+                </a:solidFill>
+                <a:latin typeface="Consolas"/>
+              </a:rPr>
+              <a:t>        </a:t>
+            </a:r>
+            <a:r>
+              <a:rPr sz="1100" i="0" b="0">
                 <a:solidFill>
                   <a:srgbClr val="569CD6"/>
                 </a:solidFill>
                 <a:latin typeface="Consolas"/>
               </a:rPr>
-              <a:t>void</a:t>
-            </a:r>
-            <a:r>
-              <a:rPr sz="1600" i="0" b="0">
-                <a:solidFill>
-                  <a:srgbClr val="D4D4D4"/>
-                </a:solidFill>
-                <a:latin typeface="Consolas"/>
-              </a:rPr>
-              <a:t> </a:t>
-            </a:r>
-            <a:r>
-              <a:rPr sz="1600" i="0" b="0">
-                <a:solidFill>
-                  <a:srgbClr val="DCDCAA"/>
-                </a:solidFill>
-                <a:latin typeface="Consolas"/>
-              </a:rPr>
-              <a:t>setEdad</a:t>
-            </a:r>
-            <a:r>
-              <a:rPr sz="1600" i="0" b="0">
-                <a:solidFill>
-                  <a:srgbClr val="D4D4D4"/>
-                </a:solidFill>
-                <a:latin typeface="Consolas"/>
-              </a:rPr>
-              <a:t>(</a:t>
-            </a:r>
-            <a:r>
-              <a:rPr sz="1600" i="0" b="0">
-                <a:solidFill>
-                  <a:srgbClr val="4EC9B0"/>
-                </a:solidFill>
-                <a:latin typeface="Consolas"/>
-              </a:rPr>
-              <a:t>int</a:t>
-            </a:r>
-            <a:r>
-              <a:rPr sz="1600" i="0" b="0">
-                <a:solidFill>
-                  <a:srgbClr val="D4D4D4"/>
-                </a:solidFill>
-                <a:latin typeface="Consolas"/>
-              </a:rPr>
-              <a:t> </a:t>
-            </a:r>
-            <a:r>
-              <a:rPr sz="1600" i="0" b="0">
+              <a:t>this</a:t>
+            </a:r>
+            <a:r>
+              <a:rPr sz="1100" i="0" b="0">
+                <a:solidFill>
+                  <a:srgbClr val="D4D4D4"/>
+                </a:solidFill>
+                <a:latin typeface="Consolas"/>
+              </a:rPr>
+              <a:t>.</a:t>
+            </a:r>
+            <a:r>
+              <a:rPr sz="1100" i="0" b="0">
+                <a:solidFill>
+                  <a:srgbClr val="D4D4D4"/>
+                </a:solidFill>
+                <a:latin typeface="Consolas"/>
+              </a:rPr>
+              <a:t>nombre</a:t>
+            </a:r>
+            <a:r>
+              <a:rPr sz="1100" i="0" b="0">
+                <a:solidFill>
+                  <a:srgbClr val="D4D4D4"/>
+                </a:solidFill>
+                <a:latin typeface="Consolas"/>
+              </a:rPr>
+              <a:t> = </a:t>
+            </a:r>
+            <a:r>
+              <a:rPr sz="1100" i="0" b="0">
+                <a:solidFill>
+                  <a:srgbClr val="D4D4D4"/>
+                </a:solidFill>
+                <a:latin typeface="Consolas"/>
+              </a:rPr>
+              <a:t>nombre</a:t>
+            </a:r>
+            <a:r>
+              <a:rPr sz="1100" i="0" b="0">
+                <a:solidFill>
+                  <a:srgbClr val="D4D4D4"/>
+                </a:solidFill>
+                <a:latin typeface="Consolas"/>
+              </a:rPr>
+              <a:t>;</a:t>
+            </a:r>
+          </a:p>
+          <a:p>
+            <a:pPr>
+              <a:spcAft>
+                <a:spcPts val="78"/>
+              </a:spcAft>
+            </a:pPr>
+            <a:r>
+              <a:rPr sz="1100" i="0" b="0">
+                <a:solidFill>
+                  <a:srgbClr val="D4D4D4"/>
+                </a:solidFill>
+                <a:latin typeface="Consolas"/>
+              </a:rPr>
+              <a:t>        </a:t>
+            </a:r>
+            <a:r>
+              <a:rPr sz="1100" i="0" b="0">
+                <a:solidFill>
+                  <a:srgbClr val="569CD6"/>
+                </a:solidFill>
+                <a:latin typeface="Consolas"/>
+              </a:rPr>
+              <a:t>this</a:t>
+            </a:r>
+            <a:r>
+              <a:rPr sz="1100" i="0" b="0">
+                <a:solidFill>
+                  <a:srgbClr val="D4D4D4"/>
+                </a:solidFill>
+                <a:latin typeface="Consolas"/>
+              </a:rPr>
+              <a:t>.</a:t>
+            </a:r>
+            <a:r>
+              <a:rPr sz="1100" i="0" b="0">
                 <a:solidFill>
                   <a:srgbClr val="D4D4D4"/>
                 </a:solidFill>
@@ -5822,307 +7140,47 @@
               <a:t>edad</a:t>
             </a:r>
             <a:r>
-              <a:rPr sz="1600" i="0" b="0">
-                <a:solidFill>
-                  <a:srgbClr val="D4D4D4"/>
-                </a:solidFill>
-                <a:latin typeface="Consolas"/>
-              </a:rPr>
-              <a:t>) {</a:t>
+              <a:rPr sz="1100" i="0" b="0">
+                <a:solidFill>
+                  <a:srgbClr val="D4D4D4"/>
+                </a:solidFill>
+                <a:latin typeface="Consolas"/>
+              </a:rPr>
+              <a:t> = </a:t>
+            </a:r>
+            <a:r>
+              <a:rPr sz="1100" i="0" b="0">
+                <a:solidFill>
+                  <a:srgbClr val="D4D4D4"/>
+                </a:solidFill>
+                <a:latin typeface="Consolas"/>
+              </a:rPr>
+              <a:t>edad</a:t>
+            </a:r>
+            <a:r>
+              <a:rPr sz="1100" i="0" b="0">
+                <a:solidFill>
+                  <a:srgbClr val="D4D4D4"/>
+                </a:solidFill>
+                <a:latin typeface="Consolas"/>
+              </a:rPr>
+              <a:t>;</a:t>
             </a:r>
           </a:p>
           <a:p>
             <a:pPr>
               <a:spcAft>
-                <a:spcPts val="342"/>
-              </a:spcAft>
-            </a:pPr>
-            <a:r>
-              <a:rPr sz="1600" i="0" b="0">
-                <a:solidFill>
-                  <a:srgbClr val="D4D4D4"/>
-                </a:solidFill>
-                <a:latin typeface="Consolas"/>
-              </a:rPr>
-              <a:t>    </a:t>
-            </a:r>
-            <a:r>
-              <a:rPr sz="1600" i="0" b="0">
-                <a:solidFill>
-                  <a:srgbClr val="569CD6"/>
-                </a:solidFill>
-                <a:latin typeface="Consolas"/>
-              </a:rPr>
-              <a:t>if</a:t>
-            </a:r>
-            <a:r>
-              <a:rPr sz="1600" i="0" b="0">
-                <a:solidFill>
-                  <a:srgbClr val="D4D4D4"/>
-                </a:solidFill>
-                <a:latin typeface="Consolas"/>
-              </a:rPr>
-              <a:t> (</a:t>
-            </a:r>
-            <a:r>
-              <a:rPr sz="1600" i="0" b="0">
-                <a:solidFill>
-                  <a:srgbClr val="D4D4D4"/>
-                </a:solidFill>
-                <a:latin typeface="Consolas"/>
-              </a:rPr>
-              <a:t>edad</a:t>
-            </a:r>
-            <a:r>
-              <a:rPr sz="1600" i="0" b="0">
-                <a:solidFill>
-                  <a:srgbClr val="D4D4D4"/>
-                </a:solidFill>
-                <a:latin typeface="Consolas"/>
-              </a:rPr>
-              <a:t> &lt; </a:t>
-            </a:r>
-            <a:r>
-              <a:rPr sz="1600" i="0" b="0">
-                <a:solidFill>
-                  <a:srgbClr val="B5CEA8"/>
-                </a:solidFill>
-                <a:latin typeface="Consolas"/>
-              </a:rPr>
-              <a:t>0</a:t>
-            </a:r>
-            <a:r>
-              <a:rPr sz="1600" i="0" b="0">
-                <a:solidFill>
-                  <a:srgbClr val="D4D4D4"/>
-                </a:solidFill>
-                <a:latin typeface="Consolas"/>
-              </a:rPr>
-              <a:t>) {</a:t>
-            </a:r>
-          </a:p>
-          <a:p>
-            <a:pPr>
-              <a:spcAft>
-                <a:spcPts val="342"/>
-              </a:spcAft>
-            </a:pPr>
-            <a:r>
-              <a:rPr sz="1600" i="0" b="0">
-                <a:solidFill>
-                  <a:srgbClr val="D4D4D4"/>
-                </a:solidFill>
-                <a:latin typeface="Consolas"/>
-              </a:rPr>
-              <a:t>        </a:t>
-            </a:r>
-            <a:r>
-              <a:rPr sz="1600" i="0" b="0">
-                <a:solidFill>
-                  <a:srgbClr val="DCDCAA"/>
-                </a:solidFill>
-                <a:latin typeface="Consolas"/>
-              </a:rPr>
-              <a:t>System.out.println</a:t>
-            </a:r>
-            <a:r>
-              <a:rPr sz="1600" i="0" b="0">
-                <a:solidFill>
-                  <a:srgbClr val="D4D4D4"/>
-                </a:solidFill>
-                <a:latin typeface="Consolas"/>
-              </a:rPr>
-              <a:t>(</a:t>
-            </a:r>
-            <a:r>
-              <a:rPr sz="1600" i="0" b="0">
-                <a:solidFill>
-                  <a:srgbClr val="CE9178"/>
-                </a:solidFill>
-                <a:latin typeface="Consolas"/>
-              </a:rPr>
-              <a:t>"Edad invalida, se conserva la anterior: "</a:t>
-            </a:r>
-            <a:r>
-              <a:rPr sz="1600" i="0" b="0">
-                <a:solidFill>
-                  <a:srgbClr val="D4D4D4"/>
-                </a:solidFill>
-                <a:latin typeface="Consolas"/>
-              </a:rPr>
-              <a:t> + </a:t>
-            </a:r>
-            <a:r>
-              <a:rPr sz="1600" i="0" b="0">
-                <a:solidFill>
-                  <a:srgbClr val="569CD6"/>
-                </a:solidFill>
-                <a:latin typeface="Consolas"/>
-              </a:rPr>
-              <a:t>this</a:t>
-            </a:r>
-            <a:r>
-              <a:rPr sz="1600" i="0" b="0">
-                <a:solidFill>
-                  <a:srgbClr val="D4D4D4"/>
-                </a:solidFill>
-                <a:latin typeface="Consolas"/>
-              </a:rPr>
-              <a:t>.</a:t>
-            </a:r>
-            <a:r>
-              <a:rPr sz="1600" i="0" b="0">
-                <a:solidFill>
-                  <a:srgbClr val="D4D4D4"/>
-                </a:solidFill>
-                <a:latin typeface="Consolas"/>
-              </a:rPr>
-              <a:t>edad</a:t>
-            </a:r>
-            <a:r>
-              <a:rPr sz="1600" i="0" b="0">
-                <a:solidFill>
-                  <a:srgbClr val="D4D4D4"/>
-                </a:solidFill>
-                <a:latin typeface="Consolas"/>
-              </a:rPr>
-              <a:t>);</a:t>
-            </a:r>
-          </a:p>
-          <a:p>
-            <a:pPr>
-              <a:spcAft>
-                <a:spcPts val="342"/>
-              </a:spcAft>
-            </a:pPr>
-            <a:r>
-              <a:rPr sz="1600" i="0" b="0">
-                <a:solidFill>
-                  <a:srgbClr val="D4D4D4"/>
-                </a:solidFill>
-                <a:latin typeface="Consolas"/>
-              </a:rPr>
-              <a:t>        </a:t>
-            </a:r>
-            <a:r>
-              <a:rPr sz="1600" i="0" b="0">
-                <a:solidFill>
-                  <a:srgbClr val="569CD6"/>
-                </a:solidFill>
-                <a:latin typeface="Consolas"/>
-              </a:rPr>
-              <a:t>return</a:t>
-            </a:r>
-            <a:r>
-              <a:rPr sz="1600" i="0" b="0">
-                <a:solidFill>
-                  <a:srgbClr val="D4D4D4"/>
-                </a:solidFill>
-                <a:latin typeface="Consolas"/>
-              </a:rPr>
-              <a:t>;</a:t>
-            </a:r>
-          </a:p>
-          <a:p>
-            <a:pPr>
-              <a:spcAft>
-                <a:spcPts val="342"/>
-              </a:spcAft>
-            </a:pPr>
-            <a:r>
-              <a:rPr sz="1600" i="0" b="0">
+                <a:spcPts val="78"/>
+              </a:spcAft>
+            </a:pPr>
+            <a:r>
+              <a:rPr sz="1100" i="0" b="0">
                 <a:solidFill>
                   <a:srgbClr val="D4D4D4"/>
                 </a:solidFill>
                 <a:latin typeface="Consolas"/>
               </a:rPr>
               <a:t>    }</a:t>
-            </a:r>
-          </a:p>
-          <a:p>
-            <a:pPr>
-              <a:spcAft>
-                <a:spcPts val="342"/>
-              </a:spcAft>
-            </a:pPr>
-            <a:r>
-              <a:rPr sz="1600" i="0" b="0">
-                <a:solidFill>
-                  <a:srgbClr val="D4D4D4"/>
-                </a:solidFill>
-                <a:latin typeface="Consolas"/>
-              </a:rPr>
-              <a:t>    </a:t>
-            </a:r>
-            <a:r>
-              <a:rPr sz="1600" i="0" b="0">
-                <a:solidFill>
-                  <a:srgbClr val="569CD6"/>
-                </a:solidFill>
-                <a:latin typeface="Consolas"/>
-              </a:rPr>
-              <a:t>this</a:t>
-            </a:r>
-            <a:r>
-              <a:rPr sz="1600" i="0" b="0">
-                <a:solidFill>
-                  <a:srgbClr val="D4D4D4"/>
-                </a:solidFill>
-                <a:latin typeface="Consolas"/>
-              </a:rPr>
-              <a:t>.</a:t>
-            </a:r>
-            <a:r>
-              <a:rPr sz="1600" i="0" b="0">
-                <a:solidFill>
-                  <a:srgbClr val="D4D4D4"/>
-                </a:solidFill>
-                <a:latin typeface="Consolas"/>
-              </a:rPr>
-              <a:t>edad</a:t>
-            </a:r>
-            <a:r>
-              <a:rPr sz="1600" i="0" b="0">
-                <a:solidFill>
-                  <a:srgbClr val="D4D4D4"/>
-                </a:solidFill>
-                <a:latin typeface="Consolas"/>
-              </a:rPr>
-              <a:t> = </a:t>
-            </a:r>
-            <a:r>
-              <a:rPr sz="1600" i="0" b="0">
-                <a:solidFill>
-                  <a:srgbClr val="D4D4D4"/>
-                </a:solidFill>
-                <a:latin typeface="Consolas"/>
-              </a:rPr>
-              <a:t>edad</a:t>
-            </a:r>
-            <a:r>
-              <a:rPr sz="1600" i="0" b="0">
-                <a:solidFill>
-                  <a:srgbClr val="D4D4D4"/>
-                </a:solidFill>
-                <a:latin typeface="Consolas"/>
-              </a:rPr>
-              <a:t>;</a:t>
-            </a:r>
-          </a:p>
-          <a:p>
-            <a:pPr>
-              <a:spcAft>
-                <a:spcPts val="342"/>
-              </a:spcAft>
-            </a:pPr>
-            <a:r>
-              <a:rPr sz="1600" i="0" b="0">
-                <a:solidFill>
-                  <a:srgbClr val="D4D4D4"/>
-                </a:solidFill>
-                <a:latin typeface="Consolas"/>
-              </a:rPr>
-              <a:t>}</a:t>
             </a:r>
           </a:p>
         </p:txBody>
@@ -6135,8 +7193,8 @@
         </p:nvSpPr>
         <p:spPr>
           <a:xfrm>
-            <a:off x="457200" y="6035040"/>
-            <a:ext cx="11277295" cy="365760"/>
+            <a:off x="6210147" y="1719072"/>
+            <a:ext cx="502920" cy="4498848"/>
           </a:xfrm>
           <a:prstGeom prst="rect">
             <a:avLst/>
@@ -6149,15 +7207,259 @@
           </a:bodyPr>
           <a:lstStyle/>
           <a:p>
-            <a:pPr algn="ctr"/>
-            <a:r>
-              <a:rPr sz="1300" b="0" i="1">
-                <a:solidFill>
-                  <a:srgbClr val="666666"/>
-                </a:solidFill>
-                <a:latin typeface="Calibri"/>
-              </a:rPr>
-              <a:t>De Mascota.java</a:t>
+            <a:pPr algn="r">
+              <a:spcAft>
+                <a:spcPts val="78"/>
+              </a:spcAft>
+            </a:pPr>
+            <a:r>
+              <a:rPr sz="1100" i="0" b="0">
+                <a:solidFill>
+                  <a:srgbClr val="858585"/>
+                </a:solidFill>
+                <a:latin typeface="Consolas"/>
+              </a:rPr>
+              <a:t>19</a:t>
+            </a:r>
+          </a:p>
+          <a:p>
+            <a:pPr algn="r">
+              <a:spcAft>
+                <a:spcPts val="78"/>
+              </a:spcAft>
+            </a:pPr>
+            <a:r>
+              <a:rPr sz="1100" i="0" b="0">
+                <a:solidFill>
+                  <a:srgbClr val="858585"/>
+                </a:solidFill>
+                <a:latin typeface="Consolas"/>
+              </a:rPr>
+              <a:t>20</a:t>
+            </a:r>
+          </a:p>
+          <a:p>
+            <a:pPr algn="r">
+              <a:spcAft>
+                <a:spcPts val="78"/>
+              </a:spcAft>
+            </a:pPr>
+            <a:r>
+              <a:rPr sz="1100" i="0" b="0">
+                <a:solidFill>
+                  <a:srgbClr val="858585"/>
+                </a:solidFill>
+                <a:latin typeface="Consolas"/>
+              </a:rPr>
+              <a:t>21</a:t>
+            </a:r>
+          </a:p>
+          <a:p>
+            <a:pPr algn="r">
+              <a:spcAft>
+                <a:spcPts val="78"/>
+              </a:spcAft>
+            </a:pPr>
+            <a:r>
+              <a:rPr sz="1100" i="0" b="0">
+                <a:solidFill>
+                  <a:srgbClr val="858585"/>
+                </a:solidFill>
+                <a:latin typeface="Consolas"/>
+              </a:rPr>
+              <a:t>22</a:t>
+            </a:r>
+          </a:p>
+          <a:p>
+            <a:pPr algn="r">
+              <a:spcAft>
+                <a:spcPts val="78"/>
+              </a:spcAft>
+            </a:pPr>
+            <a:r>
+              <a:rPr sz="1100" i="0" b="0">
+                <a:solidFill>
+                  <a:srgbClr val="858585"/>
+                </a:solidFill>
+                <a:latin typeface="Consolas"/>
+              </a:rPr>
+              <a:t>23</a:t>
+            </a:r>
+          </a:p>
+          <a:p>
+            <a:pPr algn="r">
+              <a:spcAft>
+                <a:spcPts val="78"/>
+              </a:spcAft>
+            </a:pPr>
+            <a:r>
+              <a:rPr sz="1100" i="0" b="0">
+                <a:solidFill>
+                  <a:srgbClr val="858585"/>
+                </a:solidFill>
+                <a:latin typeface="Consolas"/>
+              </a:rPr>
+              <a:t>24</a:t>
+            </a:r>
+          </a:p>
+          <a:p>
+            <a:pPr algn="r">
+              <a:spcAft>
+                <a:spcPts val="78"/>
+              </a:spcAft>
+            </a:pPr>
+            <a:r>
+              <a:rPr sz="1100" i="0" b="0">
+                <a:solidFill>
+                  <a:srgbClr val="858585"/>
+                </a:solidFill>
+                <a:latin typeface="Consolas"/>
+              </a:rPr>
+              <a:t>25</a:t>
+            </a:r>
+          </a:p>
+          <a:p>
+            <a:pPr algn="r">
+              <a:spcAft>
+                <a:spcPts val="78"/>
+              </a:spcAft>
+            </a:pPr>
+            <a:r>
+              <a:rPr sz="1100" i="0" b="0">
+                <a:solidFill>
+                  <a:srgbClr val="858585"/>
+                </a:solidFill>
+                <a:latin typeface="Consolas"/>
+              </a:rPr>
+              <a:t>26</a:t>
+            </a:r>
+          </a:p>
+          <a:p>
+            <a:pPr algn="r">
+              <a:spcAft>
+                <a:spcPts val="78"/>
+              </a:spcAft>
+            </a:pPr>
+            <a:r>
+              <a:rPr sz="1100" i="0" b="0">
+                <a:solidFill>
+                  <a:srgbClr val="858585"/>
+                </a:solidFill>
+                <a:latin typeface="Consolas"/>
+              </a:rPr>
+              <a:t>27</a:t>
+            </a:r>
+          </a:p>
+          <a:p>
+            <a:pPr algn="r">
+              <a:spcAft>
+                <a:spcPts val="78"/>
+              </a:spcAft>
+            </a:pPr>
+            <a:r>
+              <a:rPr sz="1100" i="0" b="0">
+                <a:solidFill>
+                  <a:srgbClr val="858585"/>
+                </a:solidFill>
+                <a:latin typeface="Consolas"/>
+              </a:rPr>
+              <a:t>28</a:t>
+            </a:r>
+          </a:p>
+          <a:p>
+            <a:pPr algn="r">
+              <a:spcAft>
+                <a:spcPts val="78"/>
+              </a:spcAft>
+            </a:pPr>
+            <a:r>
+              <a:rPr sz="1100" i="0" b="0">
+                <a:solidFill>
+                  <a:srgbClr val="858585"/>
+                </a:solidFill>
+                <a:latin typeface="Consolas"/>
+              </a:rPr>
+              <a:t>29</a:t>
+            </a:r>
+          </a:p>
+          <a:p>
+            <a:pPr algn="r">
+              <a:spcAft>
+                <a:spcPts val="78"/>
+              </a:spcAft>
+            </a:pPr>
+            <a:r>
+              <a:rPr sz="1100" i="0" b="0">
+                <a:solidFill>
+                  <a:srgbClr val="858585"/>
+                </a:solidFill>
+                <a:latin typeface="Consolas"/>
+              </a:rPr>
+              <a:t>30</a:t>
+            </a:r>
+          </a:p>
+          <a:p>
+            <a:pPr algn="r">
+              <a:spcAft>
+                <a:spcPts val="78"/>
+              </a:spcAft>
+            </a:pPr>
+            <a:r>
+              <a:rPr sz="1100" i="0" b="0">
+                <a:solidFill>
+                  <a:srgbClr val="858585"/>
+                </a:solidFill>
+                <a:latin typeface="Consolas"/>
+              </a:rPr>
+              <a:t>31</a:t>
+            </a:r>
+          </a:p>
+          <a:p>
+            <a:pPr algn="r">
+              <a:spcAft>
+                <a:spcPts val="78"/>
+              </a:spcAft>
+            </a:pPr>
+            <a:r>
+              <a:rPr sz="1100" i="0" b="0">
+                <a:solidFill>
+                  <a:srgbClr val="858585"/>
+                </a:solidFill>
+                <a:latin typeface="Consolas"/>
+              </a:rPr>
+              <a:t>32</a:t>
+            </a:r>
+          </a:p>
+          <a:p>
+            <a:pPr algn="r">
+              <a:spcAft>
+                <a:spcPts val="78"/>
+              </a:spcAft>
+            </a:pPr>
+            <a:r>
+              <a:rPr sz="1100" i="0" b="0">
+                <a:solidFill>
+                  <a:srgbClr val="858585"/>
+                </a:solidFill>
+                <a:latin typeface="Consolas"/>
+              </a:rPr>
+              <a:t>33</a:t>
+            </a:r>
+          </a:p>
+          <a:p>
+            <a:pPr algn="r">
+              <a:spcAft>
+                <a:spcPts val="78"/>
+              </a:spcAft>
+            </a:pPr>
+            <a:r>
+              <a:rPr sz="1100" i="0" b="0">
+                <a:solidFill>
+                  <a:srgbClr val="858585"/>
+                </a:solidFill>
+                <a:latin typeface="Consolas"/>
+              </a:rPr>
+              <a:t>34</a:t>
             </a:r>
           </a:p>
         </p:txBody>
@@ -6165,6 +7467,735 @@
       <p:sp>
         <p:nvSpPr>
           <p:cNvPr id="14" name="TextBox 13"/>
+          <p:cNvSpPr txBox="1"/>
+          <p:nvPr/>
+        </p:nvSpPr>
+        <p:spPr>
+          <a:xfrm>
+            <a:off x="6713067" y="1719072"/>
+            <a:ext cx="4747107" cy="4498848"/>
+          </a:xfrm>
+          <a:prstGeom prst="rect">
+            <a:avLst/>
+          </a:prstGeom>
+          <a:noFill/>
+        </p:spPr>
+        <p:txBody>
+          <a:bodyPr wrap="square">
+            <a:spAutoFit/>
+          </a:bodyPr>
+          <a:lstStyle/>
+          <a:p>
+            <a:pPr>
+              <a:spcAft>
+                <a:spcPts val="78"/>
+              </a:spcAft>
+            </a:pPr>
+            <a:r>
+              <a:rPr sz="1100" i="0" b="0">
+                <a:solidFill>
+                  <a:srgbClr val="D4D4D4"/>
+                </a:solidFill>
+                <a:latin typeface="Consolas"/>
+              </a:rPr>
+              <a:t>    </a:t>
+            </a:r>
+            <a:r>
+              <a:rPr sz="1100" i="1" b="0">
+                <a:solidFill>
+                  <a:srgbClr val="6A9955"/>
+                </a:solidFill>
+                <a:latin typeface="Consolas"/>
+              </a:rPr>
+              <a:t>/** El objeto se defiende: una edad negativa no tiene</a:t>
+            </a:r>
+          </a:p>
+          <a:p>
+            <a:pPr>
+              <a:spcAft>
+                <a:spcPts val="78"/>
+              </a:spcAft>
+            </a:pPr>
+            <a:r>
+              <a:rPr sz="1100" i="0" b="0">
+                <a:solidFill>
+                  <a:srgbClr val="D4D4D4"/>
+                </a:solidFill>
+                <a:latin typeface="Consolas"/>
+              </a:rPr>
+              <a:t>     </a:t>
+            </a:r>
+            <a:r>
+              <a:rPr sz="1100" i="1" b="0">
+                <a:solidFill>
+                  <a:srgbClr val="6A9955"/>
+                </a:solidFill>
+                <a:latin typeface="Consolas"/>
+              </a:rPr>
+              <a:t>*  sentido en el dominio. */</a:t>
+            </a:r>
+          </a:p>
+          <a:p>
+            <a:pPr>
+              <a:spcAft>
+                <a:spcPts val="78"/>
+              </a:spcAft>
+            </a:pPr>
+            <a:r>
+              <a:rPr sz="1100" i="0" b="0">
+                <a:solidFill>
+                  <a:srgbClr val="D4D4D4"/>
+                </a:solidFill>
+                <a:latin typeface="Consolas"/>
+              </a:rPr>
+              <a:t>    </a:t>
+            </a:r>
+            <a:r>
+              <a:rPr sz="1100" i="0" b="0">
+                <a:solidFill>
+                  <a:srgbClr val="569CD6"/>
+                </a:solidFill>
+                <a:latin typeface="Consolas"/>
+              </a:rPr>
+              <a:t>public</a:t>
+            </a:r>
+            <a:r>
+              <a:rPr sz="1100" i="0" b="0">
+                <a:solidFill>
+                  <a:srgbClr val="D4D4D4"/>
+                </a:solidFill>
+                <a:latin typeface="Consolas"/>
+              </a:rPr>
+              <a:t> </a:t>
+            </a:r>
+            <a:r>
+              <a:rPr sz="1100" i="0" b="0">
+                <a:solidFill>
+                  <a:srgbClr val="569CD6"/>
+                </a:solidFill>
+                <a:latin typeface="Consolas"/>
+              </a:rPr>
+              <a:t>void</a:t>
+            </a:r>
+            <a:r>
+              <a:rPr sz="1100" i="0" b="0">
+                <a:solidFill>
+                  <a:srgbClr val="D4D4D4"/>
+                </a:solidFill>
+                <a:latin typeface="Consolas"/>
+              </a:rPr>
+              <a:t> </a:t>
+            </a:r>
+            <a:r>
+              <a:rPr sz="1100" i="0" b="0">
+                <a:solidFill>
+                  <a:srgbClr val="DCDCAA"/>
+                </a:solidFill>
+                <a:latin typeface="Consolas"/>
+              </a:rPr>
+              <a:t>setEdad</a:t>
+            </a:r>
+            <a:r>
+              <a:rPr sz="1100" i="0" b="0">
+                <a:solidFill>
+                  <a:srgbClr val="D4D4D4"/>
+                </a:solidFill>
+                <a:latin typeface="Consolas"/>
+              </a:rPr>
+              <a:t>(</a:t>
+            </a:r>
+            <a:r>
+              <a:rPr sz="1100" i="0" b="0">
+                <a:solidFill>
+                  <a:srgbClr val="4EC9B0"/>
+                </a:solidFill>
+                <a:latin typeface="Consolas"/>
+              </a:rPr>
+              <a:t>int</a:t>
+            </a:r>
+            <a:r>
+              <a:rPr sz="1100" i="0" b="0">
+                <a:solidFill>
+                  <a:srgbClr val="D4D4D4"/>
+                </a:solidFill>
+                <a:latin typeface="Consolas"/>
+              </a:rPr>
+              <a:t> </a:t>
+            </a:r>
+            <a:r>
+              <a:rPr sz="1100" i="0" b="0">
+                <a:solidFill>
+                  <a:srgbClr val="D4D4D4"/>
+                </a:solidFill>
+                <a:latin typeface="Consolas"/>
+              </a:rPr>
+              <a:t>edad</a:t>
+            </a:r>
+            <a:r>
+              <a:rPr sz="1100" i="0" b="0">
+                <a:solidFill>
+                  <a:srgbClr val="D4D4D4"/>
+                </a:solidFill>
+                <a:latin typeface="Consolas"/>
+              </a:rPr>
+              <a:t>) {</a:t>
+            </a:r>
+          </a:p>
+          <a:p>
+            <a:pPr>
+              <a:spcAft>
+                <a:spcPts val="78"/>
+              </a:spcAft>
+            </a:pPr>
+            <a:r>
+              <a:rPr sz="1100" i="0" b="0">
+                <a:solidFill>
+                  <a:srgbClr val="D4D4D4"/>
+                </a:solidFill>
+                <a:latin typeface="Consolas"/>
+              </a:rPr>
+              <a:t>        </a:t>
+            </a:r>
+            <a:r>
+              <a:rPr sz="1100" i="0" b="0">
+                <a:solidFill>
+                  <a:srgbClr val="569CD6"/>
+                </a:solidFill>
+                <a:latin typeface="Consolas"/>
+              </a:rPr>
+              <a:t>if</a:t>
+            </a:r>
+            <a:r>
+              <a:rPr sz="1100" i="0" b="0">
+                <a:solidFill>
+                  <a:srgbClr val="D4D4D4"/>
+                </a:solidFill>
+                <a:latin typeface="Consolas"/>
+              </a:rPr>
+              <a:t> (</a:t>
+            </a:r>
+            <a:r>
+              <a:rPr sz="1100" i="0" b="0">
+                <a:solidFill>
+                  <a:srgbClr val="D4D4D4"/>
+                </a:solidFill>
+                <a:latin typeface="Consolas"/>
+              </a:rPr>
+              <a:t>edad</a:t>
+            </a:r>
+            <a:r>
+              <a:rPr sz="1100" i="0" b="0">
+                <a:solidFill>
+                  <a:srgbClr val="D4D4D4"/>
+                </a:solidFill>
+                <a:latin typeface="Consolas"/>
+              </a:rPr>
+              <a:t> &lt; </a:t>
+            </a:r>
+            <a:r>
+              <a:rPr sz="1100" i="0" b="0">
+                <a:solidFill>
+                  <a:srgbClr val="B5CEA8"/>
+                </a:solidFill>
+                <a:latin typeface="Consolas"/>
+              </a:rPr>
+              <a:t>0</a:t>
+            </a:r>
+            <a:r>
+              <a:rPr sz="1100" i="0" b="0">
+                <a:solidFill>
+                  <a:srgbClr val="D4D4D4"/>
+                </a:solidFill>
+                <a:latin typeface="Consolas"/>
+              </a:rPr>
+              <a:t>) {</a:t>
+            </a:r>
+          </a:p>
+          <a:p>
+            <a:pPr>
+              <a:spcAft>
+                <a:spcPts val="78"/>
+              </a:spcAft>
+            </a:pPr>
+            <a:r>
+              <a:rPr sz="1100" i="0" b="0">
+                <a:solidFill>
+                  <a:srgbClr val="D4D4D4"/>
+                </a:solidFill>
+                <a:latin typeface="Consolas"/>
+              </a:rPr>
+              <a:t>            </a:t>
+            </a:r>
+            <a:r>
+              <a:rPr sz="1100" i="0" b="0">
+                <a:solidFill>
+                  <a:srgbClr val="DCDCAA"/>
+                </a:solidFill>
+                <a:latin typeface="Consolas"/>
+              </a:rPr>
+              <a:t>System.out.println</a:t>
+            </a:r>
+            <a:r>
+              <a:rPr sz="1100" i="0" b="0">
+                <a:solidFill>
+                  <a:srgbClr val="D4D4D4"/>
+                </a:solidFill>
+                <a:latin typeface="Consolas"/>
+              </a:rPr>
+              <a:t>(</a:t>
+            </a:r>
+            <a:r>
+              <a:rPr sz="1100" i="0" b="0">
+                <a:solidFill>
+                  <a:srgbClr val="CE9178"/>
+                </a:solidFill>
+                <a:latin typeface="Consolas"/>
+              </a:rPr>
+              <a:t>"Edad invalida, sigue en "</a:t>
+            </a:r>
+          </a:p>
+          <a:p>
+            <a:pPr>
+              <a:spcAft>
+                <a:spcPts val="78"/>
+              </a:spcAft>
+            </a:pPr>
+            <a:r>
+              <a:rPr sz="1100" i="0" b="0">
+                <a:solidFill>
+                  <a:srgbClr val="D4D4D4"/>
+                </a:solidFill>
+                <a:latin typeface="Consolas"/>
+              </a:rPr>
+              <a:t>                    + </a:t>
+            </a:r>
+            <a:r>
+              <a:rPr sz="1100" i="0" b="0">
+                <a:solidFill>
+                  <a:srgbClr val="569CD6"/>
+                </a:solidFill>
+                <a:latin typeface="Consolas"/>
+              </a:rPr>
+              <a:t>this</a:t>
+            </a:r>
+            <a:r>
+              <a:rPr sz="1100" i="0" b="0">
+                <a:solidFill>
+                  <a:srgbClr val="D4D4D4"/>
+                </a:solidFill>
+                <a:latin typeface="Consolas"/>
+              </a:rPr>
+              <a:t>.</a:t>
+            </a:r>
+            <a:r>
+              <a:rPr sz="1100" i="0" b="0">
+                <a:solidFill>
+                  <a:srgbClr val="D4D4D4"/>
+                </a:solidFill>
+                <a:latin typeface="Consolas"/>
+              </a:rPr>
+              <a:t>edad</a:t>
+            </a:r>
+            <a:r>
+              <a:rPr sz="1100" i="0" b="0">
+                <a:solidFill>
+                  <a:srgbClr val="D4D4D4"/>
+                </a:solidFill>
+                <a:latin typeface="Consolas"/>
+              </a:rPr>
+              <a:t>);</a:t>
+            </a:r>
+          </a:p>
+          <a:p>
+            <a:pPr>
+              <a:spcAft>
+                <a:spcPts val="78"/>
+              </a:spcAft>
+            </a:pPr>
+            <a:r>
+              <a:rPr sz="1100" i="0" b="0">
+                <a:solidFill>
+                  <a:srgbClr val="D4D4D4"/>
+                </a:solidFill>
+                <a:latin typeface="Consolas"/>
+              </a:rPr>
+              <a:t>            </a:t>
+            </a:r>
+            <a:r>
+              <a:rPr sz="1100" i="0" b="0">
+                <a:solidFill>
+                  <a:srgbClr val="569CD6"/>
+                </a:solidFill>
+                <a:latin typeface="Consolas"/>
+              </a:rPr>
+              <a:t>return</a:t>
+            </a:r>
+            <a:r>
+              <a:rPr sz="1100" i="0" b="0">
+                <a:solidFill>
+                  <a:srgbClr val="D4D4D4"/>
+                </a:solidFill>
+                <a:latin typeface="Consolas"/>
+              </a:rPr>
+              <a:t>;</a:t>
+            </a:r>
+          </a:p>
+          <a:p>
+            <a:pPr>
+              <a:spcAft>
+                <a:spcPts val="78"/>
+              </a:spcAft>
+            </a:pPr>
+            <a:r>
+              <a:rPr sz="1100" i="0" b="0">
+                <a:solidFill>
+                  <a:srgbClr val="D4D4D4"/>
+                </a:solidFill>
+                <a:latin typeface="Consolas"/>
+              </a:rPr>
+              <a:t>        }</a:t>
+            </a:r>
+          </a:p>
+          <a:p>
+            <a:pPr>
+              <a:spcAft>
+                <a:spcPts val="78"/>
+              </a:spcAft>
+            </a:pPr>
+            <a:r>
+              <a:rPr sz="1100" i="0" b="0">
+                <a:solidFill>
+                  <a:srgbClr val="D4D4D4"/>
+                </a:solidFill>
+                <a:latin typeface="Consolas"/>
+              </a:rPr>
+              <a:t>        </a:t>
+            </a:r>
+            <a:r>
+              <a:rPr sz="1100" i="0" b="0">
+                <a:solidFill>
+                  <a:srgbClr val="569CD6"/>
+                </a:solidFill>
+                <a:latin typeface="Consolas"/>
+              </a:rPr>
+              <a:t>this</a:t>
+            </a:r>
+            <a:r>
+              <a:rPr sz="1100" i="0" b="0">
+                <a:solidFill>
+                  <a:srgbClr val="D4D4D4"/>
+                </a:solidFill>
+                <a:latin typeface="Consolas"/>
+              </a:rPr>
+              <a:t>.</a:t>
+            </a:r>
+            <a:r>
+              <a:rPr sz="1100" i="0" b="0">
+                <a:solidFill>
+                  <a:srgbClr val="D4D4D4"/>
+                </a:solidFill>
+                <a:latin typeface="Consolas"/>
+              </a:rPr>
+              <a:t>edad</a:t>
+            </a:r>
+            <a:r>
+              <a:rPr sz="1100" i="0" b="0">
+                <a:solidFill>
+                  <a:srgbClr val="D4D4D4"/>
+                </a:solidFill>
+                <a:latin typeface="Consolas"/>
+              </a:rPr>
+              <a:t> = </a:t>
+            </a:r>
+            <a:r>
+              <a:rPr sz="1100" i="0" b="0">
+                <a:solidFill>
+                  <a:srgbClr val="D4D4D4"/>
+                </a:solidFill>
+                <a:latin typeface="Consolas"/>
+              </a:rPr>
+              <a:t>edad</a:t>
+            </a:r>
+            <a:r>
+              <a:rPr sz="1100" i="0" b="0">
+                <a:solidFill>
+                  <a:srgbClr val="D4D4D4"/>
+                </a:solidFill>
+                <a:latin typeface="Consolas"/>
+              </a:rPr>
+              <a:t>;</a:t>
+            </a:r>
+          </a:p>
+          <a:p>
+            <a:pPr>
+              <a:spcAft>
+                <a:spcPts val="78"/>
+              </a:spcAft>
+            </a:pPr>
+            <a:r>
+              <a:rPr sz="1100" i="0" b="0">
+                <a:solidFill>
+                  <a:srgbClr val="D4D4D4"/>
+                </a:solidFill>
+                <a:latin typeface="Consolas"/>
+              </a:rPr>
+              <a:t>    }</a:t>
+            </a:r>
+          </a:p>
+          <a:p>
+            <a:pPr>
+              <a:spcAft>
+                <a:spcPts val="78"/>
+              </a:spcAft>
+            </a:pPr>
+            <a:r>
+              <a:rPr sz="1100" i="0" b="0">
+                <a:solidFill>
+                  <a:srgbClr val="D4D4D4"/>
+                </a:solidFill>
+                <a:latin typeface="Consolas"/>
+              </a:rPr>
+              <a:t/>
+            </a:r>
+          </a:p>
+          <a:p>
+            <a:pPr>
+              <a:spcAft>
+                <a:spcPts val="78"/>
+              </a:spcAft>
+            </a:pPr>
+            <a:r>
+              <a:rPr sz="1100" i="0" b="0">
+                <a:solidFill>
+                  <a:srgbClr val="D4D4D4"/>
+                </a:solidFill>
+                <a:latin typeface="Consolas"/>
+              </a:rPr>
+              <a:t>    @</a:t>
+            </a:r>
+            <a:r>
+              <a:rPr sz="1100" i="0" b="0">
+                <a:solidFill>
+                  <a:srgbClr val="D4D4D4"/>
+                </a:solidFill>
+                <a:latin typeface="Consolas"/>
+              </a:rPr>
+              <a:t>Override</a:t>
+            </a:r>
+          </a:p>
+          <a:p>
+            <a:pPr>
+              <a:spcAft>
+                <a:spcPts val="78"/>
+              </a:spcAft>
+            </a:pPr>
+            <a:r>
+              <a:rPr sz="1100" i="0" b="0">
+                <a:solidFill>
+                  <a:srgbClr val="D4D4D4"/>
+                </a:solidFill>
+                <a:latin typeface="Consolas"/>
+              </a:rPr>
+              <a:t>    </a:t>
+            </a:r>
+            <a:r>
+              <a:rPr sz="1100" i="0" b="0">
+                <a:solidFill>
+                  <a:srgbClr val="569CD6"/>
+                </a:solidFill>
+                <a:latin typeface="Consolas"/>
+              </a:rPr>
+              <a:t>public</a:t>
+            </a:r>
+            <a:r>
+              <a:rPr sz="1100" i="0" b="0">
+                <a:solidFill>
+                  <a:srgbClr val="D4D4D4"/>
+                </a:solidFill>
+                <a:latin typeface="Consolas"/>
+              </a:rPr>
+              <a:t> </a:t>
+            </a:r>
+            <a:r>
+              <a:rPr sz="1100" i="0" b="0">
+                <a:solidFill>
+                  <a:srgbClr val="4EC9B0"/>
+                </a:solidFill>
+                <a:latin typeface="Consolas"/>
+              </a:rPr>
+              <a:t>String</a:t>
+            </a:r>
+            <a:r>
+              <a:rPr sz="1100" i="0" b="0">
+                <a:solidFill>
+                  <a:srgbClr val="D4D4D4"/>
+                </a:solidFill>
+                <a:latin typeface="Consolas"/>
+              </a:rPr>
+              <a:t> </a:t>
+            </a:r>
+            <a:r>
+              <a:rPr sz="1100" i="0" b="0">
+                <a:solidFill>
+                  <a:srgbClr val="DCDCAA"/>
+                </a:solidFill>
+                <a:latin typeface="Consolas"/>
+              </a:rPr>
+              <a:t>toString</a:t>
+            </a:r>
+            <a:r>
+              <a:rPr sz="1100" i="0" b="0">
+                <a:solidFill>
+                  <a:srgbClr val="D4D4D4"/>
+                </a:solidFill>
+                <a:latin typeface="Consolas"/>
+              </a:rPr>
+              <a:t>() {</a:t>
+            </a:r>
+          </a:p>
+          <a:p>
+            <a:pPr>
+              <a:spcAft>
+                <a:spcPts val="78"/>
+              </a:spcAft>
+            </a:pPr>
+            <a:r>
+              <a:rPr sz="1100" i="0" b="0">
+                <a:solidFill>
+                  <a:srgbClr val="D4D4D4"/>
+                </a:solidFill>
+                <a:latin typeface="Consolas"/>
+              </a:rPr>
+              <a:t>        </a:t>
+            </a:r>
+            <a:r>
+              <a:rPr sz="1100" i="0" b="0">
+                <a:solidFill>
+                  <a:srgbClr val="569CD6"/>
+                </a:solidFill>
+                <a:latin typeface="Consolas"/>
+              </a:rPr>
+              <a:t>return</a:t>
+            </a:r>
+            <a:r>
+              <a:rPr sz="1100" i="0" b="0">
+                <a:solidFill>
+                  <a:srgbClr val="D4D4D4"/>
+                </a:solidFill>
+                <a:latin typeface="Consolas"/>
+              </a:rPr>
+              <a:t> </a:t>
+            </a:r>
+            <a:r>
+              <a:rPr sz="1100" i="0" b="0">
+                <a:solidFill>
+                  <a:srgbClr val="D4D4D4"/>
+                </a:solidFill>
+                <a:latin typeface="Consolas"/>
+              </a:rPr>
+              <a:t>nombre</a:t>
+            </a:r>
+            <a:r>
+              <a:rPr sz="1100" i="0" b="0">
+                <a:solidFill>
+                  <a:srgbClr val="D4D4D4"/>
+                </a:solidFill>
+                <a:latin typeface="Consolas"/>
+              </a:rPr>
+              <a:t> + </a:t>
+            </a:r>
+            <a:r>
+              <a:rPr sz="1100" i="0" b="0">
+                <a:solidFill>
+                  <a:srgbClr val="CE9178"/>
+                </a:solidFill>
+                <a:latin typeface="Consolas"/>
+              </a:rPr>
+              <a:t>" ("</a:t>
+            </a:r>
+            <a:r>
+              <a:rPr sz="1100" i="0" b="0">
+                <a:solidFill>
+                  <a:srgbClr val="D4D4D4"/>
+                </a:solidFill>
+                <a:latin typeface="Consolas"/>
+              </a:rPr>
+              <a:t> + </a:t>
+            </a:r>
+            <a:r>
+              <a:rPr sz="1100" i="0" b="0">
+                <a:solidFill>
+                  <a:srgbClr val="D4D4D4"/>
+                </a:solidFill>
+                <a:latin typeface="Consolas"/>
+              </a:rPr>
+              <a:t>edad</a:t>
+            </a:r>
+            <a:r>
+              <a:rPr sz="1100" i="0" b="0">
+                <a:solidFill>
+                  <a:srgbClr val="D4D4D4"/>
+                </a:solidFill>
+                <a:latin typeface="Consolas"/>
+              </a:rPr>
+              <a:t> + </a:t>
+            </a:r>
+            <a:r>
+              <a:rPr sz="1100" i="0" b="0">
+                <a:solidFill>
+                  <a:srgbClr val="CE9178"/>
+                </a:solidFill>
+                <a:latin typeface="Consolas"/>
+              </a:rPr>
+              <a:t>" anios)"</a:t>
+            </a:r>
+            <a:r>
+              <a:rPr sz="1100" i="0" b="0">
+                <a:solidFill>
+                  <a:srgbClr val="D4D4D4"/>
+                </a:solidFill>
+                <a:latin typeface="Consolas"/>
+              </a:rPr>
+              <a:t>;</a:t>
+            </a:r>
+          </a:p>
+          <a:p>
+            <a:pPr>
+              <a:spcAft>
+                <a:spcPts val="78"/>
+              </a:spcAft>
+            </a:pPr>
+            <a:r>
+              <a:rPr sz="1100" i="0" b="0">
+                <a:solidFill>
+                  <a:srgbClr val="D4D4D4"/>
+                </a:solidFill>
+                <a:latin typeface="Consolas"/>
+              </a:rPr>
+              <a:t>    }</a:t>
+            </a:r>
+          </a:p>
+          <a:p>
+            <a:pPr>
+              <a:spcAft>
+                <a:spcPts val="78"/>
+              </a:spcAft>
+            </a:pPr>
+            <a:r>
+              <a:rPr sz="1100" i="0" b="0">
+                <a:solidFill>
+                  <a:srgbClr val="D4D4D4"/>
+                </a:solidFill>
+                <a:latin typeface="Consolas"/>
+              </a:rPr>
+              <a:t>}</a:t>
+            </a:r>
+          </a:p>
+        </p:txBody>
+      </p:sp>
+      <p:sp>
+        <p:nvSpPr>
+          <p:cNvPr id="15" name="TextBox 14"/>
           <p:cNvSpPr txBox="1"/>
           <p:nvPr/>
         </p:nvSpPr>
@@ -7448,7 +9479,7 @@
         <p:spPr>
           <a:xfrm>
             <a:off x="457200" y="1261872"/>
-            <a:ext cx="11277295" cy="4398352"/>
+            <a:ext cx="11277295" cy="5093208"/>
           </a:xfrm>
           <a:prstGeom prst="roundRect">
             <a:avLst>
@@ -7684,7 +9715,7 @@
                 </a:solidFill>
                 <a:latin typeface="Calibri"/>
               </a:rPr>
-              <a:t>Java</a:t>
+              <a:t>Main.java</a:t>
             </a:r>
           </a:p>
         </p:txBody>
@@ -7698,7 +9729,7 @@
         <p:spPr>
           <a:xfrm>
             <a:off x="685800" y="1719072"/>
-            <a:ext cx="502920" cy="3803992"/>
+            <a:ext cx="502920" cy="4498848"/>
           </a:xfrm>
           <a:prstGeom prst="rect">
             <a:avLst/>
@@ -7713,11 +9744,11 @@
           <a:p>
             <a:pPr algn="r">
               <a:spcAft>
-                <a:spcPts val="407"/>
-              </a:spcAft>
-            </a:pPr>
-            <a:r>
-              <a:rPr sz="1900" i="0" b="0">
+                <a:spcPts val="71"/>
+              </a:spcAft>
+            </a:pPr>
+            <a:r>
+              <a:rPr sz="1000" i="0" b="0">
                 <a:solidFill>
                   <a:srgbClr val="858585"/>
                 </a:solidFill>
@@ -7729,11 +9760,11 @@
           <a:p>
             <a:pPr algn="r">
               <a:spcAft>
-                <a:spcPts val="407"/>
-              </a:spcAft>
-            </a:pPr>
-            <a:r>
-              <a:rPr sz="1900" i="0" b="0">
+                <a:spcPts val="71"/>
+              </a:spcAft>
+            </a:pPr>
+            <a:r>
+              <a:rPr sz="1000" i="0" b="0">
                 <a:solidFill>
                   <a:srgbClr val="858585"/>
                 </a:solidFill>
@@ -7745,11 +9776,11 @@
           <a:p>
             <a:pPr algn="r">
               <a:spcAft>
-                <a:spcPts val="407"/>
-              </a:spcAft>
-            </a:pPr>
-            <a:r>
-              <a:rPr sz="1900" i="0" b="0">
+                <a:spcPts val="71"/>
+              </a:spcAft>
+            </a:pPr>
+            <a:r>
+              <a:rPr sz="1000" i="0" b="0">
                 <a:solidFill>
                   <a:srgbClr val="858585"/>
                 </a:solidFill>
@@ -7761,11 +9792,11 @@
           <a:p>
             <a:pPr algn="r">
               <a:spcAft>
-                <a:spcPts val="407"/>
-              </a:spcAft>
-            </a:pPr>
-            <a:r>
-              <a:rPr sz="1900" i="0" b="0">
+                <a:spcPts val="71"/>
+              </a:spcAft>
+            </a:pPr>
+            <a:r>
+              <a:rPr sz="1000" i="0" b="0">
                 <a:solidFill>
                   <a:srgbClr val="858585"/>
                 </a:solidFill>
@@ -7777,11 +9808,11 @@
           <a:p>
             <a:pPr algn="r">
               <a:spcAft>
-                <a:spcPts val="407"/>
-              </a:spcAft>
-            </a:pPr>
-            <a:r>
-              <a:rPr sz="1900" i="0" b="0">
+                <a:spcPts val="71"/>
+              </a:spcAft>
+            </a:pPr>
+            <a:r>
+              <a:rPr sz="1000" i="0" b="0">
                 <a:solidFill>
                   <a:srgbClr val="858585"/>
                 </a:solidFill>
@@ -7793,11 +9824,11 @@
           <a:p>
             <a:pPr algn="r">
               <a:spcAft>
-                <a:spcPts val="407"/>
-              </a:spcAft>
-            </a:pPr>
-            <a:r>
-              <a:rPr sz="1900" i="0" b="0">
+                <a:spcPts val="71"/>
+              </a:spcAft>
+            </a:pPr>
+            <a:r>
+              <a:rPr sz="1000" i="0" b="0">
                 <a:solidFill>
                   <a:srgbClr val="858585"/>
                 </a:solidFill>
@@ -7809,11 +9840,11 @@
           <a:p>
             <a:pPr algn="r">
               <a:spcAft>
-                <a:spcPts val="407"/>
-              </a:spcAft>
-            </a:pPr>
-            <a:r>
-              <a:rPr sz="1900" i="0" b="0">
+                <a:spcPts val="71"/>
+              </a:spcAft>
+            </a:pPr>
+            <a:r>
+              <a:rPr sz="1000" i="0" b="0">
                 <a:solidFill>
                   <a:srgbClr val="858585"/>
                 </a:solidFill>
@@ -7825,11 +9856,11 @@
           <a:p>
             <a:pPr algn="r">
               <a:spcAft>
-                <a:spcPts val="407"/>
-              </a:spcAft>
-            </a:pPr>
-            <a:r>
-              <a:rPr sz="1900" i="0" b="0">
+                <a:spcPts val="71"/>
+              </a:spcAft>
+            </a:pPr>
+            <a:r>
+              <a:rPr sz="1000" i="0" b="0">
                 <a:solidFill>
                   <a:srgbClr val="858585"/>
                 </a:solidFill>
@@ -7841,11 +9872,11 @@
           <a:p>
             <a:pPr algn="r">
               <a:spcAft>
-                <a:spcPts val="407"/>
-              </a:spcAft>
-            </a:pPr>
-            <a:r>
-              <a:rPr sz="1900" i="0" b="0">
+                <a:spcPts val="71"/>
+              </a:spcAft>
+            </a:pPr>
+            <a:r>
+              <a:rPr sz="1000" i="0" b="0">
                 <a:solidFill>
                   <a:srgbClr val="858585"/>
                 </a:solidFill>
@@ -7857,11 +9888,11 @@
           <a:p>
             <a:pPr algn="r">
               <a:spcAft>
-                <a:spcPts val="407"/>
-              </a:spcAft>
-            </a:pPr>
-            <a:r>
-              <a:rPr sz="1900" i="0" b="0">
+                <a:spcPts val="71"/>
+              </a:spcAft>
+            </a:pPr>
+            <a:r>
+              <a:rPr sz="1000" i="0" b="0">
                 <a:solidFill>
                   <a:srgbClr val="858585"/>
                 </a:solidFill>
@@ -7873,17 +9904,81 @@
           <a:p>
             <a:pPr algn="r">
               <a:spcAft>
-                <a:spcPts val="407"/>
-              </a:spcAft>
-            </a:pPr>
-            <a:r>
-              <a:rPr sz="1900" i="0" b="0">
+                <a:spcPts val="71"/>
+              </a:spcAft>
+            </a:pPr>
+            <a:r>
+              <a:rPr sz="1000" i="0" b="0">
                 <a:solidFill>
                   <a:srgbClr val="858585"/>
                 </a:solidFill>
                 <a:latin typeface="Consolas"/>
               </a:rPr>
               <a:t>11</a:t>
+            </a:r>
+          </a:p>
+          <a:p>
+            <a:pPr algn="r">
+              <a:spcAft>
+                <a:spcPts val="71"/>
+              </a:spcAft>
+            </a:pPr>
+            <a:r>
+              <a:rPr sz="1000" i="0" b="0">
+                <a:solidFill>
+                  <a:srgbClr val="858585"/>
+                </a:solidFill>
+                <a:latin typeface="Consolas"/>
+              </a:rPr>
+              <a:t>12</a:t>
+            </a:r>
+          </a:p>
+          <a:p>
+            <a:pPr algn="r">
+              <a:spcAft>
+                <a:spcPts val="71"/>
+              </a:spcAft>
+            </a:pPr>
+            <a:r>
+              <a:rPr sz="1000" i="0" b="0">
+                <a:solidFill>
+                  <a:srgbClr val="858585"/>
+                </a:solidFill>
+                <a:latin typeface="Consolas"/>
+              </a:rPr>
+              <a:t>13</a:t>
+            </a:r>
+          </a:p>
+          <a:p>
+            <a:pPr algn="r">
+              <a:spcAft>
+                <a:spcPts val="71"/>
+              </a:spcAft>
+            </a:pPr>
+            <a:r>
+              <a:rPr sz="1000" i="0" b="0">
+                <a:solidFill>
+                  <a:srgbClr val="858585"/>
+                </a:solidFill>
+                <a:latin typeface="Consolas"/>
+              </a:rPr>
+              <a:t>14</a:t>
+            </a:r>
+          </a:p>
+          <a:p>
+            <a:pPr algn="r">
+              <a:spcAft>
+                <a:spcPts val="71"/>
+              </a:spcAft>
+            </a:pPr>
+            <a:r>
+              <a:rPr sz="1000" i="0" b="0">
+                <a:solidFill>
+                  <a:srgbClr val="858585"/>
+                </a:solidFill>
+                <a:latin typeface="Consolas"/>
+              </a:rPr>
+              <a:t>15</a:t>
             </a:r>
           </a:p>
         </p:txBody>
@@ -7897,7 +9992,7 @@
         <p:spPr>
           <a:xfrm>
             <a:off x="1188720" y="1719072"/>
-            <a:ext cx="10271455" cy="3803992"/>
+            <a:ext cx="4747107" cy="4498848"/>
           </a:xfrm>
           <a:prstGeom prst="rect">
             <a:avLst/>
@@ -7912,20 +10007,601 @@
           <a:p>
             <a:pPr>
               <a:spcAft>
-                <a:spcPts val="407"/>
-              </a:spcAft>
-            </a:pPr>
-            <a:r>
-              <a:rPr sz="1900" i="0" b="0">
+                <a:spcPts val="71"/>
+              </a:spcAft>
+            </a:pPr>
+            <a:r>
+              <a:rPr sz="1000" i="0" b="0">
                 <a:solidFill>
                   <a:srgbClr val="569CD6"/>
                 </a:solidFill>
                 <a:latin typeface="Consolas"/>
               </a:rPr>
+              <a:t>class</a:t>
+            </a:r>
+            <a:r>
+              <a:rPr sz="1000" i="0" b="0">
+                <a:solidFill>
+                  <a:srgbClr val="D4D4D4"/>
+                </a:solidFill>
+                <a:latin typeface="Consolas"/>
+              </a:rPr>
+              <a:t> </a:t>
+            </a:r>
+            <a:r>
+              <a:rPr sz="1000" i="0" b="0">
+                <a:solidFill>
+                  <a:srgbClr val="4EC9B0"/>
+                </a:solidFill>
+                <a:latin typeface="Consolas"/>
+              </a:rPr>
+              <a:t>Main</a:t>
+            </a:r>
+            <a:r>
+              <a:rPr sz="1000" i="0" b="0">
+                <a:solidFill>
+                  <a:srgbClr val="D4D4D4"/>
+                </a:solidFill>
+                <a:latin typeface="Consolas"/>
+              </a:rPr>
+              <a:t> {</a:t>
+            </a:r>
+          </a:p>
+          <a:p>
+            <a:pPr>
+              <a:spcAft>
+                <a:spcPts val="71"/>
+              </a:spcAft>
+            </a:pPr>
+            <a:r>
+              <a:rPr sz="1000" i="0" b="0">
+                <a:solidFill>
+                  <a:srgbClr val="D4D4D4"/>
+                </a:solidFill>
+                <a:latin typeface="Consolas"/>
+              </a:rPr>
+              <a:t>    </a:t>
+            </a:r>
+            <a:r>
+              <a:rPr sz="1000" i="0" b="0">
+                <a:solidFill>
+                  <a:srgbClr val="569CD6"/>
+                </a:solidFill>
+                <a:latin typeface="Consolas"/>
+              </a:rPr>
+              <a:t>public</a:t>
+            </a:r>
+            <a:r>
+              <a:rPr sz="1000" i="0" b="0">
+                <a:solidFill>
+                  <a:srgbClr val="D4D4D4"/>
+                </a:solidFill>
+                <a:latin typeface="Consolas"/>
+              </a:rPr>
+              <a:t> </a:t>
+            </a:r>
+            <a:r>
+              <a:rPr sz="1000" i="0" b="0">
+                <a:solidFill>
+                  <a:srgbClr val="569CD6"/>
+                </a:solidFill>
+                <a:latin typeface="Consolas"/>
+              </a:rPr>
+              <a:t>static</a:t>
+            </a:r>
+            <a:r>
+              <a:rPr sz="1000" i="0" b="0">
+                <a:solidFill>
+                  <a:srgbClr val="D4D4D4"/>
+                </a:solidFill>
+                <a:latin typeface="Consolas"/>
+              </a:rPr>
+              <a:t> </a:t>
+            </a:r>
+            <a:r>
+              <a:rPr sz="1000" i="0" b="0">
+                <a:solidFill>
+                  <a:srgbClr val="569CD6"/>
+                </a:solidFill>
+                <a:latin typeface="Consolas"/>
+              </a:rPr>
+              <a:t>void</a:t>
+            </a:r>
+            <a:r>
+              <a:rPr sz="1000" i="0" b="0">
+                <a:solidFill>
+                  <a:srgbClr val="D4D4D4"/>
+                </a:solidFill>
+                <a:latin typeface="Consolas"/>
+              </a:rPr>
+              <a:t> </a:t>
+            </a:r>
+            <a:r>
+              <a:rPr sz="1000" i="0" b="0">
+                <a:solidFill>
+                  <a:srgbClr val="DCDCAA"/>
+                </a:solidFill>
+                <a:latin typeface="Consolas"/>
+              </a:rPr>
+              <a:t>main</a:t>
+            </a:r>
+            <a:r>
+              <a:rPr sz="1000" i="0" b="0">
+                <a:solidFill>
+                  <a:srgbClr val="D4D4D4"/>
+                </a:solidFill>
+                <a:latin typeface="Consolas"/>
+              </a:rPr>
+              <a:t>(</a:t>
+            </a:r>
+            <a:r>
+              <a:rPr sz="1000" i="0" b="0">
+                <a:solidFill>
+                  <a:srgbClr val="4EC9B0"/>
+                </a:solidFill>
+                <a:latin typeface="Consolas"/>
+              </a:rPr>
+              <a:t>String</a:t>
+            </a:r>
+            <a:r>
+              <a:rPr sz="1000" i="0" b="0">
+                <a:solidFill>
+                  <a:srgbClr val="D4D4D4"/>
+                </a:solidFill>
+                <a:latin typeface="Consolas"/>
+              </a:rPr>
+              <a:t>[] </a:t>
+            </a:r>
+            <a:r>
+              <a:rPr sz="1000" i="0" b="0">
+                <a:solidFill>
+                  <a:srgbClr val="D4D4D4"/>
+                </a:solidFill>
+                <a:latin typeface="Consolas"/>
+              </a:rPr>
+              <a:t>args</a:t>
+            </a:r>
+            <a:r>
+              <a:rPr sz="1000" i="0" b="0">
+                <a:solidFill>
+                  <a:srgbClr val="D4D4D4"/>
+                </a:solidFill>
+                <a:latin typeface="Consolas"/>
+              </a:rPr>
+              <a:t>) {</a:t>
+            </a:r>
+          </a:p>
+          <a:p>
+            <a:pPr>
+              <a:spcAft>
+                <a:spcPts val="71"/>
+              </a:spcAft>
+            </a:pPr>
+            <a:r>
+              <a:rPr sz="1000" i="0" b="0">
+                <a:solidFill>
+                  <a:srgbClr val="D4D4D4"/>
+                </a:solidFill>
+                <a:latin typeface="Consolas"/>
+              </a:rPr>
+              <a:t>        </a:t>
+            </a:r>
+            <a:r>
+              <a:rPr sz="1000" i="0" b="0">
+                <a:solidFill>
+                  <a:srgbClr val="D4D4D4"/>
+                </a:solidFill>
+                <a:latin typeface="Consolas"/>
+              </a:rPr>
+              <a:t>Mascota</a:t>
+            </a:r>
+            <a:r>
+              <a:rPr sz="1000" i="0" b="0">
+                <a:solidFill>
+                  <a:srgbClr val="D4D4D4"/>
+                </a:solidFill>
+                <a:latin typeface="Consolas"/>
+              </a:rPr>
+              <a:t> </a:t>
+            </a:r>
+            <a:r>
+              <a:rPr sz="1000" i="0" b="0">
+                <a:solidFill>
+                  <a:srgbClr val="D4D4D4"/>
+                </a:solidFill>
+                <a:latin typeface="Consolas"/>
+              </a:rPr>
+              <a:t>rocky</a:t>
+            </a:r>
+            <a:r>
+              <a:rPr sz="1000" i="0" b="0">
+                <a:solidFill>
+                  <a:srgbClr val="D4D4D4"/>
+                </a:solidFill>
+                <a:latin typeface="Consolas"/>
+              </a:rPr>
+              <a:t> =</a:t>
+            </a:r>
+          </a:p>
+          <a:p>
+            <a:pPr>
+              <a:spcAft>
+                <a:spcPts val="71"/>
+              </a:spcAft>
+            </a:pPr>
+            <a:r>
+              <a:rPr sz="1000" i="0" b="0">
+                <a:solidFill>
+                  <a:srgbClr val="D4D4D4"/>
+                </a:solidFill>
+                <a:latin typeface="Consolas"/>
+              </a:rPr>
+              <a:t>                </a:t>
+            </a:r>
+            <a:r>
+              <a:rPr sz="1000" i="0" b="0">
+                <a:solidFill>
+                  <a:srgbClr val="569CD6"/>
+                </a:solidFill>
+                <a:latin typeface="Consolas"/>
+              </a:rPr>
+              <a:t>new</a:t>
+            </a:r>
+            <a:r>
+              <a:rPr sz="1000" i="0" b="0">
+                <a:solidFill>
+                  <a:srgbClr val="D4D4D4"/>
+                </a:solidFill>
+                <a:latin typeface="Consolas"/>
+              </a:rPr>
+              <a:t> </a:t>
+            </a:r>
+            <a:r>
+              <a:rPr sz="1000" i="0" b="0">
+                <a:solidFill>
+                  <a:srgbClr val="4EC9B0"/>
+                </a:solidFill>
+                <a:latin typeface="Consolas"/>
+              </a:rPr>
+              <a:t>Mascota</a:t>
+            </a:r>
+            <a:r>
+              <a:rPr sz="1000" i="0" b="0">
+                <a:solidFill>
+                  <a:srgbClr val="D4D4D4"/>
+                </a:solidFill>
+                <a:latin typeface="Consolas"/>
+              </a:rPr>
+              <a:t>(</a:t>
+            </a:r>
+            <a:r>
+              <a:rPr sz="1000" i="0" b="0">
+                <a:solidFill>
+                  <a:srgbClr val="CE9178"/>
+                </a:solidFill>
+                <a:latin typeface="Consolas"/>
+              </a:rPr>
+              <a:t>"M-003"</a:t>
+            </a:r>
+            <a:r>
+              <a:rPr sz="1000" i="0" b="0">
+                <a:solidFill>
+                  <a:srgbClr val="D4D4D4"/>
+                </a:solidFill>
+                <a:latin typeface="Consolas"/>
+              </a:rPr>
+              <a:t>, </a:t>
+            </a:r>
+            <a:r>
+              <a:rPr sz="1000" i="0" b="0">
+                <a:solidFill>
+                  <a:srgbClr val="CE9178"/>
+                </a:solidFill>
+                <a:latin typeface="Consolas"/>
+              </a:rPr>
+              <a:t>"Rocky"</a:t>
+            </a:r>
+            <a:r>
+              <a:rPr sz="1000" i="0" b="0">
+                <a:solidFill>
+                  <a:srgbClr val="D4D4D4"/>
+                </a:solidFill>
+                <a:latin typeface="Consolas"/>
+              </a:rPr>
+              <a:t>, </a:t>
+            </a:r>
+            <a:r>
+              <a:rPr sz="1000" i="0" b="0">
+                <a:solidFill>
+                  <a:srgbClr val="CE9178"/>
+                </a:solidFill>
+                <a:latin typeface="Consolas"/>
+              </a:rPr>
+              <a:t>"Canino"</a:t>
+            </a:r>
+            <a:r>
+              <a:rPr sz="1000" i="0" b="0">
+                <a:solidFill>
+                  <a:srgbClr val="D4D4D4"/>
+                </a:solidFill>
+                <a:latin typeface="Consolas"/>
+              </a:rPr>
+              <a:t>, </a:t>
+            </a:r>
+            <a:r>
+              <a:rPr sz="1000" i="0" b="0">
+                <a:solidFill>
+                  <a:srgbClr val="B5CEA8"/>
+                </a:solidFill>
+                <a:latin typeface="Consolas"/>
+              </a:rPr>
+              <a:t>9</a:t>
+            </a:r>
+            <a:r>
+              <a:rPr sz="1000" i="0" b="0">
+                <a:solidFill>
+                  <a:srgbClr val="D4D4D4"/>
+                </a:solidFill>
+                <a:latin typeface="Consolas"/>
+              </a:rPr>
+              <a:t>);</a:t>
+            </a:r>
+          </a:p>
+          <a:p>
+            <a:pPr>
+              <a:spcAft>
+                <a:spcPts val="71"/>
+              </a:spcAft>
+            </a:pPr>
+            <a:r>
+              <a:rPr sz="1000" i="0" b="0">
+                <a:solidFill>
+                  <a:srgbClr val="D4D4D4"/>
+                </a:solidFill>
+                <a:latin typeface="Consolas"/>
+              </a:rPr>
+              <a:t>        </a:t>
+            </a:r>
+            <a:r>
+              <a:rPr sz="1000" i="1" b="0">
+                <a:solidFill>
+                  <a:srgbClr val="6A9955"/>
+                </a:solidFill>
+                <a:latin typeface="Consolas"/>
+              </a:rPr>
+              <a:t>// rocky.edad = -5;  no compila: edad es private</a:t>
+            </a:r>
+          </a:p>
+          <a:p>
+            <a:pPr>
+              <a:spcAft>
+                <a:spcPts val="71"/>
+              </a:spcAft>
+            </a:pPr>
+            <a:r>
+              <a:rPr sz="1000" i="0" b="0">
+                <a:solidFill>
+                  <a:srgbClr val="D4D4D4"/>
+                </a:solidFill>
+                <a:latin typeface="Consolas"/>
+              </a:rPr>
+              <a:t>        </a:t>
+            </a:r>
+            <a:r>
+              <a:rPr sz="1000" i="0" b="0">
+                <a:solidFill>
+                  <a:srgbClr val="DCDCAA"/>
+                </a:solidFill>
+                <a:latin typeface="Consolas"/>
+              </a:rPr>
+              <a:t>System.out.println</a:t>
+            </a:r>
+            <a:r>
+              <a:rPr sz="1000" i="0" b="0">
+                <a:solidFill>
+                  <a:srgbClr val="D4D4D4"/>
+                </a:solidFill>
+                <a:latin typeface="Consolas"/>
+              </a:rPr>
+              <a:t>(</a:t>
+            </a:r>
+            <a:r>
+              <a:rPr sz="1000" i="0" b="0">
+                <a:solidFill>
+                  <a:srgbClr val="DCDCAA"/>
+                </a:solidFill>
+                <a:latin typeface="Consolas"/>
+              </a:rPr>
+              <a:t>rocky.getNombre</a:t>
+            </a:r>
+            <a:r>
+              <a:rPr sz="1000" i="0" b="0">
+                <a:solidFill>
+                  <a:srgbClr val="D4D4D4"/>
+                </a:solidFill>
+                <a:latin typeface="Consolas"/>
+              </a:rPr>
+              <a:t>() + </a:t>
+            </a:r>
+            <a:r>
+              <a:rPr sz="1000" i="0" b="0">
+                <a:solidFill>
+                  <a:srgbClr val="CE9178"/>
+                </a:solidFill>
+                <a:latin typeface="Consolas"/>
+              </a:rPr>
+              <a:t>" tiene "</a:t>
+            </a:r>
+          </a:p>
+          <a:p>
+            <a:pPr>
+              <a:spcAft>
+                <a:spcPts val="71"/>
+              </a:spcAft>
+            </a:pPr>
+            <a:r>
+              <a:rPr sz="1000" i="0" b="0">
+                <a:solidFill>
+                  <a:srgbClr val="D4D4D4"/>
+                </a:solidFill>
+                <a:latin typeface="Consolas"/>
+              </a:rPr>
+              <a:t>                + </a:t>
+            </a:r>
+            <a:r>
+              <a:rPr sz="1000" i="0" b="0">
+                <a:solidFill>
+                  <a:srgbClr val="DCDCAA"/>
+                </a:solidFill>
+                <a:latin typeface="Consolas"/>
+              </a:rPr>
+              <a:t>rocky.getEdad</a:t>
+            </a:r>
+            <a:r>
+              <a:rPr sz="1000" i="0" b="0">
+                <a:solidFill>
+                  <a:srgbClr val="D4D4D4"/>
+                </a:solidFill>
+                <a:latin typeface="Consolas"/>
+              </a:rPr>
+              <a:t>() + </a:t>
+            </a:r>
+            <a:r>
+              <a:rPr sz="1000" i="0" b="0">
+                <a:solidFill>
+                  <a:srgbClr val="CE9178"/>
+                </a:solidFill>
+                <a:latin typeface="Consolas"/>
+              </a:rPr>
+              <a:t>" anios"</a:t>
+            </a:r>
+            <a:r>
+              <a:rPr sz="1000" i="0" b="0">
+                <a:solidFill>
+                  <a:srgbClr val="D4D4D4"/>
+                </a:solidFill>
+                <a:latin typeface="Consolas"/>
+              </a:rPr>
+              <a:t>);</a:t>
+            </a:r>
+          </a:p>
+          <a:p>
+            <a:pPr>
+              <a:spcAft>
+                <a:spcPts val="71"/>
+              </a:spcAft>
+            </a:pPr>
+            <a:r>
+              <a:rPr sz="1000" i="0" b="0">
+                <a:solidFill>
+                  <a:srgbClr val="D4D4D4"/>
+                </a:solidFill>
+                <a:latin typeface="Consolas"/>
+              </a:rPr>
+              <a:t>    }</a:t>
+            </a:r>
+          </a:p>
+          <a:p>
+            <a:pPr>
+              <a:spcAft>
+                <a:spcPts val="71"/>
+              </a:spcAft>
+            </a:pPr>
+            <a:r>
+              <a:rPr sz="1000" i="0" b="0">
+                <a:solidFill>
+                  <a:srgbClr val="D4D4D4"/>
+                </a:solidFill>
+                <a:latin typeface="Consolas"/>
+              </a:rPr>
+              <a:t>}</a:t>
+            </a:r>
+          </a:p>
+          <a:p>
+            <a:pPr>
+              <a:spcAft>
+                <a:spcPts val="71"/>
+              </a:spcAft>
+            </a:pPr>
+            <a:r>
+              <a:rPr sz="1000" i="0" b="0">
+                <a:solidFill>
+                  <a:srgbClr val="D4D4D4"/>
+                </a:solidFill>
+                <a:latin typeface="Consolas"/>
+              </a:rPr>
+              <a:t/>
+            </a:r>
+          </a:p>
+          <a:p>
+            <a:pPr>
+              <a:spcAft>
+                <a:spcPts val="71"/>
+              </a:spcAft>
+            </a:pPr>
+            <a:r>
+              <a:rPr sz="1000" i="0" b="0">
+                <a:solidFill>
+                  <a:srgbClr val="569CD6"/>
+                </a:solidFill>
+                <a:latin typeface="Consolas"/>
+              </a:rPr>
+              <a:t>class</a:t>
+            </a:r>
+            <a:r>
+              <a:rPr sz="1000" i="0" b="0">
+                <a:solidFill>
+                  <a:srgbClr val="D4D4D4"/>
+                </a:solidFill>
+                <a:latin typeface="Consolas"/>
+              </a:rPr>
+              <a:t> </a:t>
+            </a:r>
+            <a:r>
+              <a:rPr sz="1000" i="0" b="0">
+                <a:solidFill>
+                  <a:srgbClr val="4EC9B0"/>
+                </a:solidFill>
+                <a:latin typeface="Consolas"/>
+              </a:rPr>
+              <a:t>Mascota</a:t>
+            </a:r>
+            <a:r>
+              <a:rPr sz="1000" i="0" b="0">
+                <a:solidFill>
+                  <a:srgbClr val="D4D4D4"/>
+                </a:solidFill>
+                <a:latin typeface="Consolas"/>
+              </a:rPr>
+              <a:t> {</a:t>
+            </a:r>
+          </a:p>
+          <a:p>
+            <a:pPr>
+              <a:spcAft>
+                <a:spcPts val="71"/>
+              </a:spcAft>
+            </a:pPr>
+            <a:r>
+              <a:rPr sz="1000" i="0" b="0">
+                <a:solidFill>
+                  <a:srgbClr val="D4D4D4"/>
+                </a:solidFill>
+                <a:latin typeface="Consolas"/>
+              </a:rPr>
+              <a:t>    </a:t>
+            </a:r>
+            <a:r>
+              <a:rPr sz="1000" i="0" b="0">
+                <a:solidFill>
+                  <a:srgbClr val="569CD6"/>
+                </a:solidFill>
+                <a:latin typeface="Consolas"/>
+              </a:rPr>
               <a:t>private</a:t>
             </a:r>
             <a:r>
-              <a:rPr sz="1900" i="0" b="0">
+              <a:rPr sz="1000" i="0" b="0">
                 <a:solidFill>
                   <a:srgbClr val="D4D4D4"/>
                 </a:solidFill>
@@ -7934,7 +10610,7 @@
               <a:t> </a:t>
             </a:r>
             <a:r>
-              <a:rPr sz="1900" i="0" b="0">
+              <a:rPr sz="1000" i="0" b="0">
                 <a:solidFill>
                   <a:srgbClr val="4EC9B0"/>
                 </a:solidFill>
@@ -7943,7 +10619,7 @@
               <a:t>String</a:t>
             </a:r>
             <a:r>
-              <a:rPr sz="1900" i="0" b="0">
+              <a:rPr sz="1000" i="0" b="0">
                 <a:solidFill>
                   <a:srgbClr val="D4D4D4"/>
                 </a:solidFill>
@@ -7952,7 +10628,7 @@
               <a:t> </a:t>
             </a:r>
             <a:r>
-              <a:rPr sz="1900" i="0" b="0">
+              <a:rPr sz="1000" i="0" b="0">
                 <a:solidFill>
                   <a:srgbClr val="D4D4D4"/>
                 </a:solidFill>
@@ -7961,7 +10637,86 @@
               <a:t>id</a:t>
             </a:r>
             <a:r>
-              <a:rPr sz="1900" i="0" b="0">
+              <a:rPr sz="1000" i="0" b="0">
+                <a:solidFill>
+                  <a:srgbClr val="D4D4D4"/>
+                </a:solidFill>
+                <a:latin typeface="Consolas"/>
+              </a:rPr>
+              <a:t>;      </a:t>
+            </a:r>
+            <a:r>
+              <a:rPr sz="1000" i="1" b="0">
+                <a:solidFill>
+                  <a:srgbClr val="6A9955"/>
+                </a:solidFill>
+                <a:latin typeface="Consolas"/>
+              </a:rPr>
+              <a:t>// nadie lo toca desde afuera</a:t>
+            </a:r>
+          </a:p>
+          <a:p>
+            <a:pPr>
+              <a:spcAft>
+                <a:spcPts val="71"/>
+              </a:spcAft>
+            </a:pPr>
+            <a:r>
+              <a:rPr sz="1000" i="0" b="0">
+                <a:solidFill>
+                  <a:srgbClr val="D4D4D4"/>
+                </a:solidFill>
+                <a:latin typeface="Consolas"/>
+              </a:rPr>
+              <a:t>    </a:t>
+            </a:r>
+            <a:r>
+              <a:rPr sz="1000" i="0" b="0">
+                <a:solidFill>
+                  <a:srgbClr val="569CD6"/>
+                </a:solidFill>
+                <a:latin typeface="Consolas"/>
+              </a:rPr>
+              <a:t>private</a:t>
+            </a:r>
+            <a:r>
+              <a:rPr sz="1000" i="0" b="0">
+                <a:solidFill>
+                  <a:srgbClr val="D4D4D4"/>
+                </a:solidFill>
+                <a:latin typeface="Consolas"/>
+              </a:rPr>
+              <a:t> </a:t>
+            </a:r>
+            <a:r>
+              <a:rPr sz="1000" i="0" b="0">
+                <a:solidFill>
+                  <a:srgbClr val="4EC9B0"/>
+                </a:solidFill>
+                <a:latin typeface="Consolas"/>
+              </a:rPr>
+              <a:t>String</a:t>
+            </a:r>
+            <a:r>
+              <a:rPr sz="1000" i="0" b="0">
+                <a:solidFill>
+                  <a:srgbClr val="D4D4D4"/>
+                </a:solidFill>
+                <a:latin typeface="Consolas"/>
+              </a:rPr>
+              <a:t> </a:t>
+            </a:r>
+            <a:r>
+              <a:rPr sz="1000" i="0" b="0">
+                <a:solidFill>
+                  <a:srgbClr val="D4D4D4"/>
+                </a:solidFill>
+                <a:latin typeface="Consolas"/>
+              </a:rPr>
+              <a:t>nombre</a:t>
+            </a:r>
+            <a:r>
+              <a:rPr sz="1000" i="0" b="0">
                 <a:solidFill>
                   <a:srgbClr val="D4D4D4"/>
                 </a:solidFill>
@@ -7973,11 +10728,20 @@
           <a:p>
             <a:pPr>
               <a:spcAft>
-                <a:spcPts val="407"/>
-              </a:spcAft>
-            </a:pPr>
-            <a:r>
-              <a:rPr sz="1900" i="0" b="0">
+                <a:spcPts val="71"/>
+              </a:spcAft>
+            </a:pPr>
+            <a:r>
+              <a:rPr sz="1000" i="0" b="0">
+                <a:solidFill>
+                  <a:srgbClr val="D4D4D4"/>
+                </a:solidFill>
+                <a:latin typeface="Consolas"/>
+              </a:rPr>
+              <a:t>    </a:t>
+            </a:r>
+            <a:r>
+              <a:rPr sz="1000" i="0" b="0">
                 <a:solidFill>
                   <a:srgbClr val="569CD6"/>
                 </a:solidFill>
@@ -7986,7 +10750,7 @@
               <a:t>private</a:t>
             </a:r>
             <a:r>
-              <a:rPr sz="1900" i="0" b="0">
+              <a:rPr sz="1000" i="0" b="0">
                 <a:solidFill>
                   <a:srgbClr val="D4D4D4"/>
                 </a:solidFill>
@@ -7995,7 +10759,7 @@
               <a:t> </a:t>
             </a:r>
             <a:r>
-              <a:rPr sz="1900" i="0" b="0">
+              <a:rPr sz="1000" i="0" b="0">
                 <a:solidFill>
                   <a:srgbClr val="4EC9B0"/>
                 </a:solidFill>
@@ -8004,7 +10768,7 @@
               <a:t>String</a:t>
             </a:r>
             <a:r>
-              <a:rPr sz="1900" i="0" b="0">
+              <a:rPr sz="1000" i="0" b="0">
                 <a:solidFill>
                   <a:srgbClr val="D4D4D4"/>
                 </a:solidFill>
@@ -8013,16 +10777,16 @@
               <a:t> </a:t>
             </a:r>
             <a:r>
-              <a:rPr sz="1900" i="0" b="0">
-                <a:solidFill>
-                  <a:srgbClr val="D4D4D4"/>
-                </a:solidFill>
-                <a:latin typeface="Consolas"/>
-              </a:rPr>
-              <a:t>nombre</a:t>
-            </a:r>
-            <a:r>
-              <a:rPr sz="1900" i="0" b="0">
+              <a:rPr sz="1000" i="0" b="0">
+                <a:solidFill>
+                  <a:srgbClr val="D4D4D4"/>
+                </a:solidFill>
+                <a:latin typeface="Consolas"/>
+              </a:rPr>
+              <a:t>especie</a:t>
+            </a:r>
+            <a:r>
+              <a:rPr sz="1000" i="0" b="0">
                 <a:solidFill>
                   <a:srgbClr val="D4D4D4"/>
                 </a:solidFill>
@@ -8034,11 +10798,20 @@
           <a:p>
             <a:pPr>
               <a:spcAft>
-                <a:spcPts val="407"/>
-              </a:spcAft>
-            </a:pPr>
-            <a:r>
-              <a:rPr sz="1900" i="0" b="0">
+                <a:spcPts val="71"/>
+              </a:spcAft>
+            </a:pPr>
+            <a:r>
+              <a:rPr sz="1000" i="0" b="0">
+                <a:solidFill>
+                  <a:srgbClr val="D4D4D4"/>
+                </a:solidFill>
+                <a:latin typeface="Consolas"/>
+              </a:rPr>
+              <a:t>    </a:t>
+            </a:r>
+            <a:r>
+              <a:rPr sz="1000" i="0" b="0">
                 <a:solidFill>
                   <a:srgbClr val="569CD6"/>
                 </a:solidFill>
@@ -8047,7 +10820,7 @@
               <a:t>private</a:t>
             </a:r>
             <a:r>
-              <a:rPr sz="1900" i="0" b="0">
+              <a:rPr sz="1000" i="0" b="0">
                 <a:solidFill>
                   <a:srgbClr val="D4D4D4"/>
                 </a:solidFill>
@@ -8056,16 +10829,16 @@
               <a:t> </a:t>
             </a:r>
             <a:r>
-              <a:rPr sz="1900" i="0" b="0">
+              <a:rPr sz="1000" i="0" b="0">
                 <a:solidFill>
                   <a:srgbClr val="4EC9B0"/>
                 </a:solidFill>
                 <a:latin typeface="Consolas"/>
               </a:rPr>
-              <a:t>String</a:t>
-            </a:r>
-            <a:r>
-              <a:rPr sz="1900" i="0" b="0">
+              <a:t>int</a:t>
+            </a:r>
+            <a:r>
+              <a:rPr sz="1000" i="0" b="0">
                 <a:solidFill>
                   <a:srgbClr val="D4D4D4"/>
                 </a:solidFill>
@@ -8074,582 +10847,22 @@
               <a:t> </a:t>
             </a:r>
             <a:r>
-              <a:rPr sz="1900" i="0" b="0">
-                <a:solidFill>
-                  <a:srgbClr val="D4D4D4"/>
-                </a:solidFill>
-                <a:latin typeface="Consolas"/>
-              </a:rPr>
-              <a:t>especie</a:t>
-            </a:r>
-            <a:r>
-              <a:rPr sz="1900" i="0" b="0">
+              <a:rPr sz="1000" i="0" b="0">
+                <a:solidFill>
+                  <a:srgbClr val="D4D4D4"/>
+                </a:solidFill>
+                <a:latin typeface="Consolas"/>
+              </a:rPr>
+              <a:t>edad</a:t>
+            </a:r>
+            <a:r>
+              <a:rPr sz="1000" i="0" b="0">
                 <a:solidFill>
                   <a:srgbClr val="D4D4D4"/>
                 </a:solidFill>
                 <a:latin typeface="Consolas"/>
               </a:rPr>
               <a:t>;</a:t>
-            </a:r>
-          </a:p>
-          <a:p>
-            <a:pPr>
-              <a:spcAft>
-                <a:spcPts val="407"/>
-              </a:spcAft>
-            </a:pPr>
-            <a:r>
-              <a:rPr sz="1900" i="0" b="0">
-                <a:solidFill>
-                  <a:srgbClr val="569CD6"/>
-                </a:solidFill>
-                <a:latin typeface="Consolas"/>
-              </a:rPr>
-              <a:t>private</a:t>
-            </a:r>
-            <a:r>
-              <a:rPr sz="1900" i="0" b="0">
-                <a:solidFill>
-                  <a:srgbClr val="D4D4D4"/>
-                </a:solidFill>
-                <a:latin typeface="Consolas"/>
-              </a:rPr>
-              <a:t> </a:t>
-            </a:r>
-            <a:r>
-              <a:rPr sz="1900" i="0" b="0">
-                <a:solidFill>
-                  <a:srgbClr val="4EC9B0"/>
-                </a:solidFill>
-                <a:latin typeface="Consolas"/>
-              </a:rPr>
-              <a:t>int</a:t>
-            </a:r>
-            <a:r>
-              <a:rPr sz="1900" i="0" b="0">
-                <a:solidFill>
-                  <a:srgbClr val="D4D4D4"/>
-                </a:solidFill>
-                <a:latin typeface="Consolas"/>
-              </a:rPr>
-              <a:t> </a:t>
-            </a:r>
-            <a:r>
-              <a:rPr sz="1900" i="0" b="0">
-                <a:solidFill>
-                  <a:srgbClr val="D4D4D4"/>
-                </a:solidFill>
-                <a:latin typeface="Consolas"/>
-              </a:rPr>
-              <a:t>edad</a:t>
-            </a:r>
-            <a:r>
-              <a:rPr sz="1900" i="0" b="0">
-                <a:solidFill>
-                  <a:srgbClr val="D4D4D4"/>
-                </a:solidFill>
-                <a:latin typeface="Consolas"/>
-              </a:rPr>
-              <a:t>;</a:t>
-            </a:r>
-          </a:p>
-          <a:p>
-            <a:pPr>
-              <a:spcAft>
-                <a:spcPts val="407"/>
-              </a:spcAft>
-            </a:pPr>
-            <a:r>
-              <a:rPr sz="1900" i="0" b="0">
-                <a:solidFill>
-                  <a:srgbClr val="D4D4D4"/>
-                </a:solidFill>
-                <a:latin typeface="Consolas"/>
-              </a:rPr>
-              <a:t/>
-            </a:r>
-          </a:p>
-          <a:p>
-            <a:pPr>
-              <a:spcAft>
-                <a:spcPts val="407"/>
-              </a:spcAft>
-            </a:pPr>
-            <a:r>
-              <a:rPr sz="1900" i="0" b="0">
-                <a:solidFill>
-                  <a:srgbClr val="569CD6"/>
-                </a:solidFill>
-                <a:latin typeface="Consolas"/>
-              </a:rPr>
-              <a:t>public</a:t>
-            </a:r>
-            <a:r>
-              <a:rPr sz="1900" i="0" b="0">
-                <a:solidFill>
-                  <a:srgbClr val="D4D4D4"/>
-                </a:solidFill>
-                <a:latin typeface="Consolas"/>
-              </a:rPr>
-              <a:t> </a:t>
-            </a:r>
-            <a:r>
-              <a:rPr sz="1900" i="0" b="0">
-                <a:solidFill>
-                  <a:srgbClr val="DCDCAA"/>
-                </a:solidFill>
-                <a:latin typeface="Consolas"/>
-              </a:rPr>
-              <a:t>Mascota</a:t>
-            </a:r>
-            <a:r>
-              <a:rPr sz="1900" i="0" b="0">
-                <a:solidFill>
-                  <a:srgbClr val="D4D4D4"/>
-                </a:solidFill>
-                <a:latin typeface="Consolas"/>
-              </a:rPr>
-              <a:t>(</a:t>
-            </a:r>
-            <a:r>
-              <a:rPr sz="1900" i="0" b="0">
-                <a:solidFill>
-                  <a:srgbClr val="4EC9B0"/>
-                </a:solidFill>
-                <a:latin typeface="Consolas"/>
-              </a:rPr>
-              <a:t>String</a:t>
-            </a:r>
-            <a:r>
-              <a:rPr sz="1900" i="0" b="0">
-                <a:solidFill>
-                  <a:srgbClr val="D4D4D4"/>
-                </a:solidFill>
-                <a:latin typeface="Consolas"/>
-              </a:rPr>
-              <a:t> </a:t>
-            </a:r>
-            <a:r>
-              <a:rPr sz="1900" i="0" b="0">
-                <a:solidFill>
-                  <a:srgbClr val="D4D4D4"/>
-                </a:solidFill>
-                <a:latin typeface="Consolas"/>
-              </a:rPr>
-              <a:t>id</a:t>
-            </a:r>
-            <a:r>
-              <a:rPr sz="1900" i="0" b="0">
-                <a:solidFill>
-                  <a:srgbClr val="D4D4D4"/>
-                </a:solidFill>
-                <a:latin typeface="Consolas"/>
-              </a:rPr>
-              <a:t>, </a:t>
-            </a:r>
-            <a:r>
-              <a:rPr sz="1900" i="0" b="0">
-                <a:solidFill>
-                  <a:srgbClr val="4EC9B0"/>
-                </a:solidFill>
-                <a:latin typeface="Consolas"/>
-              </a:rPr>
-              <a:t>String</a:t>
-            </a:r>
-            <a:r>
-              <a:rPr sz="1900" i="0" b="0">
-                <a:solidFill>
-                  <a:srgbClr val="D4D4D4"/>
-                </a:solidFill>
-                <a:latin typeface="Consolas"/>
-              </a:rPr>
-              <a:t> </a:t>
-            </a:r>
-            <a:r>
-              <a:rPr sz="1900" i="0" b="0">
-                <a:solidFill>
-                  <a:srgbClr val="D4D4D4"/>
-                </a:solidFill>
-                <a:latin typeface="Consolas"/>
-              </a:rPr>
-              <a:t>nombre</a:t>
-            </a:r>
-            <a:r>
-              <a:rPr sz="1900" i="0" b="0">
-                <a:solidFill>
-                  <a:srgbClr val="D4D4D4"/>
-                </a:solidFill>
-                <a:latin typeface="Consolas"/>
-              </a:rPr>
-              <a:t>, </a:t>
-            </a:r>
-            <a:r>
-              <a:rPr sz="1900" i="0" b="0">
-                <a:solidFill>
-                  <a:srgbClr val="4EC9B0"/>
-                </a:solidFill>
-                <a:latin typeface="Consolas"/>
-              </a:rPr>
-              <a:t>String</a:t>
-            </a:r>
-            <a:r>
-              <a:rPr sz="1900" i="0" b="0">
-                <a:solidFill>
-                  <a:srgbClr val="D4D4D4"/>
-                </a:solidFill>
-                <a:latin typeface="Consolas"/>
-              </a:rPr>
-              <a:t> </a:t>
-            </a:r>
-            <a:r>
-              <a:rPr sz="1900" i="0" b="0">
-                <a:solidFill>
-                  <a:srgbClr val="D4D4D4"/>
-                </a:solidFill>
-                <a:latin typeface="Consolas"/>
-              </a:rPr>
-              <a:t>especie</a:t>
-            </a:r>
-            <a:r>
-              <a:rPr sz="1900" i="0" b="0">
-                <a:solidFill>
-                  <a:srgbClr val="D4D4D4"/>
-                </a:solidFill>
-                <a:latin typeface="Consolas"/>
-              </a:rPr>
-              <a:t>, </a:t>
-            </a:r>
-            <a:r>
-              <a:rPr sz="1900" i="0" b="0">
-                <a:solidFill>
-                  <a:srgbClr val="4EC9B0"/>
-                </a:solidFill>
-                <a:latin typeface="Consolas"/>
-              </a:rPr>
-              <a:t>int</a:t>
-            </a:r>
-            <a:r>
-              <a:rPr sz="1900" i="0" b="0">
-                <a:solidFill>
-                  <a:srgbClr val="D4D4D4"/>
-                </a:solidFill>
-                <a:latin typeface="Consolas"/>
-              </a:rPr>
-              <a:t> </a:t>
-            </a:r>
-            <a:r>
-              <a:rPr sz="1900" i="0" b="0">
-                <a:solidFill>
-                  <a:srgbClr val="D4D4D4"/>
-                </a:solidFill>
-                <a:latin typeface="Consolas"/>
-              </a:rPr>
-              <a:t>edad</a:t>
-            </a:r>
-            <a:r>
-              <a:rPr sz="1900" i="0" b="0">
-                <a:solidFill>
-                  <a:srgbClr val="D4D4D4"/>
-                </a:solidFill>
-                <a:latin typeface="Consolas"/>
-              </a:rPr>
-              <a:t>) {</a:t>
-            </a:r>
-          </a:p>
-          <a:p>
-            <a:pPr>
-              <a:spcAft>
-                <a:spcPts val="407"/>
-              </a:spcAft>
-            </a:pPr>
-            <a:r>
-              <a:rPr sz="1900" i="0" b="0">
-                <a:solidFill>
-                  <a:srgbClr val="D4D4D4"/>
-                </a:solidFill>
-                <a:latin typeface="Consolas"/>
-              </a:rPr>
-              <a:t>    </a:t>
-            </a:r>
-            <a:r>
-              <a:rPr sz="1900" i="0" b="0">
-                <a:solidFill>
-                  <a:srgbClr val="569CD6"/>
-                </a:solidFill>
-                <a:latin typeface="Consolas"/>
-              </a:rPr>
-              <a:t>this</a:t>
-            </a:r>
-            <a:r>
-              <a:rPr sz="1900" i="0" b="0">
-                <a:solidFill>
-                  <a:srgbClr val="D4D4D4"/>
-                </a:solidFill>
-                <a:latin typeface="Consolas"/>
-              </a:rPr>
-              <a:t>.</a:t>
-            </a:r>
-            <a:r>
-              <a:rPr sz="1900" i="0" b="0">
-                <a:solidFill>
-                  <a:srgbClr val="D4D4D4"/>
-                </a:solidFill>
-                <a:latin typeface="Consolas"/>
-              </a:rPr>
-              <a:t>id</a:t>
-            </a:r>
-            <a:r>
-              <a:rPr sz="1900" i="0" b="0">
-                <a:solidFill>
-                  <a:srgbClr val="D4D4D4"/>
-                </a:solidFill>
-                <a:latin typeface="Consolas"/>
-              </a:rPr>
-              <a:t> = </a:t>
-            </a:r>
-            <a:r>
-              <a:rPr sz="1900" i="0" b="0">
-                <a:solidFill>
-                  <a:srgbClr val="D4D4D4"/>
-                </a:solidFill>
-                <a:latin typeface="Consolas"/>
-              </a:rPr>
-              <a:t>id</a:t>
-            </a:r>
-            <a:r>
-              <a:rPr sz="1900" i="0" b="0">
-                <a:solidFill>
-                  <a:srgbClr val="D4D4D4"/>
-                </a:solidFill>
-                <a:latin typeface="Consolas"/>
-              </a:rPr>
-              <a:t>;</a:t>
-            </a:r>
-          </a:p>
-          <a:p>
-            <a:pPr>
-              <a:spcAft>
-                <a:spcPts val="407"/>
-              </a:spcAft>
-            </a:pPr>
-            <a:r>
-              <a:rPr sz="1900" i="0" b="0">
-                <a:solidFill>
-                  <a:srgbClr val="D4D4D4"/>
-                </a:solidFill>
-                <a:latin typeface="Consolas"/>
-              </a:rPr>
-              <a:t>    </a:t>
-            </a:r>
-            <a:r>
-              <a:rPr sz="1900" i="0" b="0">
-                <a:solidFill>
-                  <a:srgbClr val="569CD6"/>
-                </a:solidFill>
-                <a:latin typeface="Consolas"/>
-              </a:rPr>
-              <a:t>this</a:t>
-            </a:r>
-            <a:r>
-              <a:rPr sz="1900" i="0" b="0">
-                <a:solidFill>
-                  <a:srgbClr val="D4D4D4"/>
-                </a:solidFill>
-                <a:latin typeface="Consolas"/>
-              </a:rPr>
-              <a:t>.</a:t>
-            </a:r>
-            <a:r>
-              <a:rPr sz="1900" i="0" b="0">
-                <a:solidFill>
-                  <a:srgbClr val="D4D4D4"/>
-                </a:solidFill>
-                <a:latin typeface="Consolas"/>
-              </a:rPr>
-              <a:t>nombre</a:t>
-            </a:r>
-            <a:r>
-              <a:rPr sz="1900" i="0" b="0">
-                <a:solidFill>
-                  <a:srgbClr val="D4D4D4"/>
-                </a:solidFill>
-                <a:latin typeface="Consolas"/>
-              </a:rPr>
-              <a:t> = </a:t>
-            </a:r>
-            <a:r>
-              <a:rPr sz="1900" i="0" b="0">
-                <a:solidFill>
-                  <a:srgbClr val="D4D4D4"/>
-                </a:solidFill>
-                <a:latin typeface="Consolas"/>
-              </a:rPr>
-              <a:t>nombre</a:t>
-            </a:r>
-            <a:r>
-              <a:rPr sz="1900" i="0" b="0">
-                <a:solidFill>
-                  <a:srgbClr val="D4D4D4"/>
-                </a:solidFill>
-                <a:latin typeface="Consolas"/>
-              </a:rPr>
-              <a:t>;</a:t>
-            </a:r>
-          </a:p>
-          <a:p>
-            <a:pPr>
-              <a:spcAft>
-                <a:spcPts val="407"/>
-              </a:spcAft>
-            </a:pPr>
-            <a:r>
-              <a:rPr sz="1900" i="0" b="0">
-                <a:solidFill>
-                  <a:srgbClr val="D4D4D4"/>
-                </a:solidFill>
-                <a:latin typeface="Consolas"/>
-              </a:rPr>
-              <a:t>    </a:t>
-            </a:r>
-            <a:r>
-              <a:rPr sz="1900" i="0" b="0">
-                <a:solidFill>
-                  <a:srgbClr val="569CD6"/>
-                </a:solidFill>
-                <a:latin typeface="Consolas"/>
-              </a:rPr>
-              <a:t>this</a:t>
-            </a:r>
-            <a:r>
-              <a:rPr sz="1900" i="0" b="0">
-                <a:solidFill>
-                  <a:srgbClr val="D4D4D4"/>
-                </a:solidFill>
-                <a:latin typeface="Consolas"/>
-              </a:rPr>
-              <a:t>.</a:t>
-            </a:r>
-            <a:r>
-              <a:rPr sz="1900" i="0" b="0">
-                <a:solidFill>
-                  <a:srgbClr val="D4D4D4"/>
-                </a:solidFill>
-                <a:latin typeface="Consolas"/>
-              </a:rPr>
-              <a:t>especie</a:t>
-            </a:r>
-            <a:r>
-              <a:rPr sz="1900" i="0" b="0">
-                <a:solidFill>
-                  <a:srgbClr val="D4D4D4"/>
-                </a:solidFill>
-                <a:latin typeface="Consolas"/>
-              </a:rPr>
-              <a:t> = </a:t>
-            </a:r>
-            <a:r>
-              <a:rPr sz="1900" i="0" b="0">
-                <a:solidFill>
-                  <a:srgbClr val="D4D4D4"/>
-                </a:solidFill>
-                <a:latin typeface="Consolas"/>
-              </a:rPr>
-              <a:t>especie</a:t>
-            </a:r>
-            <a:r>
-              <a:rPr sz="1900" i="0" b="0">
-                <a:solidFill>
-                  <a:srgbClr val="D4D4D4"/>
-                </a:solidFill>
-                <a:latin typeface="Consolas"/>
-              </a:rPr>
-              <a:t>;</a:t>
-            </a:r>
-          </a:p>
-          <a:p>
-            <a:pPr>
-              <a:spcAft>
-                <a:spcPts val="407"/>
-              </a:spcAft>
-            </a:pPr>
-            <a:r>
-              <a:rPr sz="1900" i="0" b="0">
-                <a:solidFill>
-                  <a:srgbClr val="D4D4D4"/>
-                </a:solidFill>
-                <a:latin typeface="Consolas"/>
-              </a:rPr>
-              <a:t>    </a:t>
-            </a:r>
-            <a:r>
-              <a:rPr sz="1900" i="0" b="0">
-                <a:solidFill>
-                  <a:srgbClr val="569CD6"/>
-                </a:solidFill>
-                <a:latin typeface="Consolas"/>
-              </a:rPr>
-              <a:t>this</a:t>
-            </a:r>
-            <a:r>
-              <a:rPr sz="1900" i="0" b="0">
-                <a:solidFill>
-                  <a:srgbClr val="D4D4D4"/>
-                </a:solidFill>
-                <a:latin typeface="Consolas"/>
-              </a:rPr>
-              <a:t>.</a:t>
-            </a:r>
-            <a:r>
-              <a:rPr sz="1900" i="0" b="0">
-                <a:solidFill>
-                  <a:srgbClr val="D4D4D4"/>
-                </a:solidFill>
-                <a:latin typeface="Consolas"/>
-              </a:rPr>
-              <a:t>edad</a:t>
-            </a:r>
-            <a:r>
-              <a:rPr sz="1900" i="0" b="0">
-                <a:solidFill>
-                  <a:srgbClr val="D4D4D4"/>
-                </a:solidFill>
-                <a:latin typeface="Consolas"/>
-              </a:rPr>
-              <a:t> = </a:t>
-            </a:r>
-            <a:r>
-              <a:rPr sz="1900" i="0" b="0">
-                <a:solidFill>
-                  <a:srgbClr val="D4D4D4"/>
-                </a:solidFill>
-                <a:latin typeface="Consolas"/>
-              </a:rPr>
-              <a:t>edad</a:t>
-            </a:r>
-            <a:r>
-              <a:rPr sz="1900" i="0" b="0">
-                <a:solidFill>
-                  <a:srgbClr val="D4D4D4"/>
-                </a:solidFill>
-                <a:latin typeface="Consolas"/>
-              </a:rPr>
-              <a:t>;</a:t>
-            </a:r>
-          </a:p>
-          <a:p>
-            <a:pPr>
-              <a:spcAft>
-                <a:spcPts val="407"/>
-              </a:spcAft>
-            </a:pPr>
-            <a:r>
-              <a:rPr sz="1900" i="0" b="0">
-                <a:solidFill>
-                  <a:srgbClr val="D4D4D4"/>
-                </a:solidFill>
-                <a:latin typeface="Consolas"/>
-              </a:rPr>
-              <a:t>}</a:t>
             </a:r>
           </a:p>
         </p:txBody>
@@ -8662,8 +10875,8 @@
         </p:nvSpPr>
         <p:spPr>
           <a:xfrm>
-            <a:off x="457200" y="6035040"/>
-            <a:ext cx="11277295" cy="365760"/>
+            <a:off x="6210147" y="1719072"/>
+            <a:ext cx="502920" cy="4498848"/>
           </a:xfrm>
           <a:prstGeom prst="rect">
             <a:avLst/>
@@ -8676,15 +10889,211 @@
           </a:bodyPr>
           <a:lstStyle/>
           <a:p>
-            <a:pPr algn="ctr"/>
-            <a:r>
-              <a:rPr sz="1300" b="0" i="1">
-                <a:solidFill>
-                  <a:srgbClr val="666666"/>
-                </a:solidFill>
-                <a:latin typeface="Calibri"/>
-              </a:rPr>
-              <a:t>De Mascota.java</a:t>
+            <a:pPr algn="r">
+              <a:spcAft>
+                <a:spcPts val="71"/>
+              </a:spcAft>
+            </a:pPr>
+            <a:r>
+              <a:rPr sz="1000" i="0" b="0">
+                <a:solidFill>
+                  <a:srgbClr val="858585"/>
+                </a:solidFill>
+                <a:latin typeface="Consolas"/>
+              </a:rPr>
+              <a:t>16</a:t>
+            </a:r>
+          </a:p>
+          <a:p>
+            <a:pPr algn="r">
+              <a:spcAft>
+                <a:spcPts val="71"/>
+              </a:spcAft>
+            </a:pPr>
+            <a:r>
+              <a:rPr sz="1000" i="0" b="0">
+                <a:solidFill>
+                  <a:srgbClr val="858585"/>
+                </a:solidFill>
+                <a:latin typeface="Consolas"/>
+              </a:rPr>
+              <a:t>17</a:t>
+            </a:r>
+          </a:p>
+          <a:p>
+            <a:pPr algn="r">
+              <a:spcAft>
+                <a:spcPts val="71"/>
+              </a:spcAft>
+            </a:pPr>
+            <a:r>
+              <a:rPr sz="1000" i="0" b="0">
+                <a:solidFill>
+                  <a:srgbClr val="858585"/>
+                </a:solidFill>
+                <a:latin typeface="Consolas"/>
+              </a:rPr>
+              <a:t>18</a:t>
+            </a:r>
+          </a:p>
+          <a:p>
+            <a:pPr algn="r">
+              <a:spcAft>
+                <a:spcPts val="71"/>
+              </a:spcAft>
+            </a:pPr>
+            <a:r>
+              <a:rPr sz="1000" i="0" b="0">
+                <a:solidFill>
+                  <a:srgbClr val="858585"/>
+                </a:solidFill>
+                <a:latin typeface="Consolas"/>
+              </a:rPr>
+              <a:t>19</a:t>
+            </a:r>
+          </a:p>
+          <a:p>
+            <a:pPr algn="r">
+              <a:spcAft>
+                <a:spcPts val="71"/>
+              </a:spcAft>
+            </a:pPr>
+            <a:r>
+              <a:rPr sz="1000" i="0" b="0">
+                <a:solidFill>
+                  <a:srgbClr val="858585"/>
+                </a:solidFill>
+                <a:latin typeface="Consolas"/>
+              </a:rPr>
+              <a:t>20</a:t>
+            </a:r>
+          </a:p>
+          <a:p>
+            <a:pPr algn="r">
+              <a:spcAft>
+                <a:spcPts val="71"/>
+              </a:spcAft>
+            </a:pPr>
+            <a:r>
+              <a:rPr sz="1000" i="0" b="0">
+                <a:solidFill>
+                  <a:srgbClr val="858585"/>
+                </a:solidFill>
+                <a:latin typeface="Consolas"/>
+              </a:rPr>
+              <a:t>21</a:t>
+            </a:r>
+          </a:p>
+          <a:p>
+            <a:pPr algn="r">
+              <a:spcAft>
+                <a:spcPts val="71"/>
+              </a:spcAft>
+            </a:pPr>
+            <a:r>
+              <a:rPr sz="1000" i="0" b="0">
+                <a:solidFill>
+                  <a:srgbClr val="858585"/>
+                </a:solidFill>
+                <a:latin typeface="Consolas"/>
+              </a:rPr>
+              <a:t>22</a:t>
+            </a:r>
+          </a:p>
+          <a:p>
+            <a:pPr algn="r">
+              <a:spcAft>
+                <a:spcPts val="71"/>
+              </a:spcAft>
+            </a:pPr>
+            <a:r>
+              <a:rPr sz="1000" i="0" b="0">
+                <a:solidFill>
+                  <a:srgbClr val="858585"/>
+                </a:solidFill>
+                <a:latin typeface="Consolas"/>
+              </a:rPr>
+              <a:t>23</a:t>
+            </a:r>
+          </a:p>
+          <a:p>
+            <a:pPr algn="r">
+              <a:spcAft>
+                <a:spcPts val="71"/>
+              </a:spcAft>
+            </a:pPr>
+            <a:r>
+              <a:rPr sz="1000" i="0" b="0">
+                <a:solidFill>
+                  <a:srgbClr val="858585"/>
+                </a:solidFill>
+                <a:latin typeface="Consolas"/>
+              </a:rPr>
+              <a:t>24</a:t>
+            </a:r>
+          </a:p>
+          <a:p>
+            <a:pPr algn="r">
+              <a:spcAft>
+                <a:spcPts val="71"/>
+              </a:spcAft>
+            </a:pPr>
+            <a:r>
+              <a:rPr sz="1000" i="0" b="0">
+                <a:solidFill>
+                  <a:srgbClr val="858585"/>
+                </a:solidFill>
+                <a:latin typeface="Consolas"/>
+              </a:rPr>
+              <a:t>25</a:t>
+            </a:r>
+          </a:p>
+          <a:p>
+            <a:pPr algn="r">
+              <a:spcAft>
+                <a:spcPts val="71"/>
+              </a:spcAft>
+            </a:pPr>
+            <a:r>
+              <a:rPr sz="1000" i="0" b="0">
+                <a:solidFill>
+                  <a:srgbClr val="858585"/>
+                </a:solidFill>
+                <a:latin typeface="Consolas"/>
+              </a:rPr>
+              <a:t>26</a:t>
+            </a:r>
+          </a:p>
+          <a:p>
+            <a:pPr algn="r">
+              <a:spcAft>
+                <a:spcPts val="71"/>
+              </a:spcAft>
+            </a:pPr>
+            <a:r>
+              <a:rPr sz="1000" i="0" b="0">
+                <a:solidFill>
+                  <a:srgbClr val="858585"/>
+                </a:solidFill>
+                <a:latin typeface="Consolas"/>
+              </a:rPr>
+              <a:t>27</a:t>
+            </a:r>
+          </a:p>
+          <a:p>
+            <a:pPr algn="r">
+              <a:spcAft>
+                <a:spcPts val="71"/>
+              </a:spcAft>
+            </a:pPr>
+            <a:r>
+              <a:rPr sz="1000" i="0" b="0">
+                <a:solidFill>
+                  <a:srgbClr val="858585"/>
+                </a:solidFill>
+                <a:latin typeface="Consolas"/>
+              </a:rPr>
+              <a:t>28</a:t>
             </a:r>
           </a:p>
         </p:txBody>
@@ -8692,6 +11101,1002 @@
       <p:sp>
         <p:nvSpPr>
           <p:cNvPr id="14" name="TextBox 13"/>
+          <p:cNvSpPr txBox="1"/>
+          <p:nvPr/>
+        </p:nvSpPr>
+        <p:spPr>
+          <a:xfrm>
+            <a:off x="6713067" y="1719072"/>
+            <a:ext cx="4747107" cy="4498848"/>
+          </a:xfrm>
+          <a:prstGeom prst="rect">
+            <a:avLst/>
+          </a:prstGeom>
+          <a:noFill/>
+        </p:spPr>
+        <p:txBody>
+          <a:bodyPr wrap="square">
+            <a:spAutoFit/>
+          </a:bodyPr>
+          <a:lstStyle/>
+          <a:p>
+            <a:pPr>
+              <a:spcAft>
+                <a:spcPts val="71"/>
+              </a:spcAft>
+            </a:pPr>
+            <a:r>
+              <a:rPr sz="1000" i="0" b="0">
+                <a:solidFill>
+                  <a:srgbClr val="D4D4D4"/>
+                </a:solidFill>
+                <a:latin typeface="Consolas"/>
+              </a:rPr>
+              <a:t>    </a:t>
+            </a:r>
+            <a:r>
+              <a:rPr sz="1000" i="0" b="0">
+                <a:solidFill>
+                  <a:srgbClr val="569CD6"/>
+                </a:solidFill>
+                <a:latin typeface="Consolas"/>
+              </a:rPr>
+              <a:t>public</a:t>
+            </a:r>
+            <a:r>
+              <a:rPr sz="1000" i="0" b="0">
+                <a:solidFill>
+                  <a:srgbClr val="D4D4D4"/>
+                </a:solidFill>
+                <a:latin typeface="Consolas"/>
+              </a:rPr>
+              <a:t> </a:t>
+            </a:r>
+            <a:r>
+              <a:rPr sz="1000" i="0" b="0">
+                <a:solidFill>
+                  <a:srgbClr val="DCDCAA"/>
+                </a:solidFill>
+                <a:latin typeface="Consolas"/>
+              </a:rPr>
+              <a:t>Mascota</a:t>
+            </a:r>
+            <a:r>
+              <a:rPr sz="1000" i="0" b="0">
+                <a:solidFill>
+                  <a:srgbClr val="D4D4D4"/>
+                </a:solidFill>
+                <a:latin typeface="Consolas"/>
+              </a:rPr>
+              <a:t>(</a:t>
+            </a:r>
+            <a:r>
+              <a:rPr sz="1000" i="0" b="0">
+                <a:solidFill>
+                  <a:srgbClr val="4EC9B0"/>
+                </a:solidFill>
+                <a:latin typeface="Consolas"/>
+              </a:rPr>
+              <a:t>String</a:t>
+            </a:r>
+            <a:r>
+              <a:rPr sz="1000" i="0" b="0">
+                <a:solidFill>
+                  <a:srgbClr val="D4D4D4"/>
+                </a:solidFill>
+                <a:latin typeface="Consolas"/>
+              </a:rPr>
+              <a:t> </a:t>
+            </a:r>
+            <a:r>
+              <a:rPr sz="1000" i="0" b="0">
+                <a:solidFill>
+                  <a:srgbClr val="D4D4D4"/>
+                </a:solidFill>
+                <a:latin typeface="Consolas"/>
+              </a:rPr>
+              <a:t>id</a:t>
+            </a:r>
+            <a:r>
+              <a:rPr sz="1000" i="0" b="0">
+                <a:solidFill>
+                  <a:srgbClr val="D4D4D4"/>
+                </a:solidFill>
+                <a:latin typeface="Consolas"/>
+              </a:rPr>
+              <a:t>, </a:t>
+            </a:r>
+            <a:r>
+              <a:rPr sz="1000" i="0" b="0">
+                <a:solidFill>
+                  <a:srgbClr val="4EC9B0"/>
+                </a:solidFill>
+                <a:latin typeface="Consolas"/>
+              </a:rPr>
+              <a:t>String</a:t>
+            </a:r>
+            <a:r>
+              <a:rPr sz="1000" i="0" b="0">
+                <a:solidFill>
+                  <a:srgbClr val="D4D4D4"/>
+                </a:solidFill>
+                <a:latin typeface="Consolas"/>
+              </a:rPr>
+              <a:t> </a:t>
+            </a:r>
+            <a:r>
+              <a:rPr sz="1000" i="0" b="0">
+                <a:solidFill>
+                  <a:srgbClr val="D4D4D4"/>
+                </a:solidFill>
+                <a:latin typeface="Consolas"/>
+              </a:rPr>
+              <a:t>nombre</a:t>
+            </a:r>
+            <a:r>
+              <a:rPr sz="1000" i="0" b="0">
+                <a:solidFill>
+                  <a:srgbClr val="D4D4D4"/>
+                </a:solidFill>
+                <a:latin typeface="Consolas"/>
+              </a:rPr>
+              <a:t>, </a:t>
+            </a:r>
+            <a:r>
+              <a:rPr sz="1000" i="0" b="0">
+                <a:solidFill>
+                  <a:srgbClr val="4EC9B0"/>
+                </a:solidFill>
+                <a:latin typeface="Consolas"/>
+              </a:rPr>
+              <a:t>String</a:t>
+            </a:r>
+            <a:r>
+              <a:rPr sz="1000" i="0" b="0">
+                <a:solidFill>
+                  <a:srgbClr val="D4D4D4"/>
+                </a:solidFill>
+                <a:latin typeface="Consolas"/>
+              </a:rPr>
+              <a:t> </a:t>
+            </a:r>
+            <a:r>
+              <a:rPr sz="1000" i="0" b="0">
+                <a:solidFill>
+                  <a:srgbClr val="D4D4D4"/>
+                </a:solidFill>
+                <a:latin typeface="Consolas"/>
+              </a:rPr>
+              <a:t>especie</a:t>
+            </a:r>
+            <a:r>
+              <a:rPr sz="1000" i="0" b="0">
+                <a:solidFill>
+                  <a:srgbClr val="D4D4D4"/>
+                </a:solidFill>
+                <a:latin typeface="Consolas"/>
+              </a:rPr>
+              <a:t>,</a:t>
+            </a:r>
+          </a:p>
+          <a:p>
+            <a:pPr>
+              <a:spcAft>
+                <a:spcPts val="71"/>
+              </a:spcAft>
+            </a:pPr>
+            <a:r>
+              <a:rPr sz="1000" i="0" b="0">
+                <a:solidFill>
+                  <a:srgbClr val="D4D4D4"/>
+                </a:solidFill>
+                <a:latin typeface="Consolas"/>
+              </a:rPr>
+              <a:t>                   </a:t>
+            </a:r>
+            <a:r>
+              <a:rPr sz="1000" i="0" b="0">
+                <a:solidFill>
+                  <a:srgbClr val="4EC9B0"/>
+                </a:solidFill>
+                <a:latin typeface="Consolas"/>
+              </a:rPr>
+              <a:t>int</a:t>
+            </a:r>
+            <a:r>
+              <a:rPr sz="1000" i="0" b="0">
+                <a:solidFill>
+                  <a:srgbClr val="D4D4D4"/>
+                </a:solidFill>
+                <a:latin typeface="Consolas"/>
+              </a:rPr>
+              <a:t> </a:t>
+            </a:r>
+            <a:r>
+              <a:rPr sz="1000" i="0" b="0">
+                <a:solidFill>
+                  <a:srgbClr val="D4D4D4"/>
+                </a:solidFill>
+                <a:latin typeface="Consolas"/>
+              </a:rPr>
+              <a:t>edad</a:t>
+            </a:r>
+            <a:r>
+              <a:rPr sz="1000" i="0" b="0">
+                <a:solidFill>
+                  <a:srgbClr val="D4D4D4"/>
+                </a:solidFill>
+                <a:latin typeface="Consolas"/>
+              </a:rPr>
+              <a:t>) {</a:t>
+            </a:r>
+          </a:p>
+          <a:p>
+            <a:pPr>
+              <a:spcAft>
+                <a:spcPts val="71"/>
+              </a:spcAft>
+            </a:pPr>
+            <a:r>
+              <a:rPr sz="1000" i="0" b="0">
+                <a:solidFill>
+                  <a:srgbClr val="D4D4D4"/>
+                </a:solidFill>
+                <a:latin typeface="Consolas"/>
+              </a:rPr>
+              <a:t>        </a:t>
+            </a:r>
+            <a:r>
+              <a:rPr sz="1000" i="0" b="0">
+                <a:solidFill>
+                  <a:srgbClr val="569CD6"/>
+                </a:solidFill>
+                <a:latin typeface="Consolas"/>
+              </a:rPr>
+              <a:t>this</a:t>
+            </a:r>
+            <a:r>
+              <a:rPr sz="1000" i="0" b="0">
+                <a:solidFill>
+                  <a:srgbClr val="D4D4D4"/>
+                </a:solidFill>
+                <a:latin typeface="Consolas"/>
+              </a:rPr>
+              <a:t>.</a:t>
+            </a:r>
+            <a:r>
+              <a:rPr sz="1000" i="0" b="0">
+                <a:solidFill>
+                  <a:srgbClr val="D4D4D4"/>
+                </a:solidFill>
+                <a:latin typeface="Consolas"/>
+              </a:rPr>
+              <a:t>id</a:t>
+            </a:r>
+            <a:r>
+              <a:rPr sz="1000" i="0" b="0">
+                <a:solidFill>
+                  <a:srgbClr val="D4D4D4"/>
+                </a:solidFill>
+                <a:latin typeface="Consolas"/>
+              </a:rPr>
+              <a:t> = </a:t>
+            </a:r>
+            <a:r>
+              <a:rPr sz="1000" i="0" b="0">
+                <a:solidFill>
+                  <a:srgbClr val="D4D4D4"/>
+                </a:solidFill>
+                <a:latin typeface="Consolas"/>
+              </a:rPr>
+              <a:t>id</a:t>
+            </a:r>
+            <a:r>
+              <a:rPr sz="1000" i="0" b="0">
+                <a:solidFill>
+                  <a:srgbClr val="D4D4D4"/>
+                </a:solidFill>
+                <a:latin typeface="Consolas"/>
+              </a:rPr>
+              <a:t>;   </a:t>
+            </a:r>
+            <a:r>
+              <a:rPr sz="1000" i="1" b="0">
+                <a:solidFill>
+                  <a:srgbClr val="6A9955"/>
+                </a:solidFill>
+                <a:latin typeface="Consolas"/>
+              </a:rPr>
+              <a:t>// this.id es el atributo</a:t>
+            </a:r>
+          </a:p>
+          <a:p>
+            <a:pPr>
+              <a:spcAft>
+                <a:spcPts val="71"/>
+              </a:spcAft>
+            </a:pPr>
+            <a:r>
+              <a:rPr sz="1000" i="0" b="0">
+                <a:solidFill>
+                  <a:srgbClr val="D4D4D4"/>
+                </a:solidFill>
+                <a:latin typeface="Consolas"/>
+              </a:rPr>
+              <a:t>        </a:t>
+            </a:r>
+            <a:r>
+              <a:rPr sz="1000" i="0" b="0">
+                <a:solidFill>
+                  <a:srgbClr val="569CD6"/>
+                </a:solidFill>
+                <a:latin typeface="Consolas"/>
+              </a:rPr>
+              <a:t>this</a:t>
+            </a:r>
+            <a:r>
+              <a:rPr sz="1000" i="0" b="0">
+                <a:solidFill>
+                  <a:srgbClr val="D4D4D4"/>
+                </a:solidFill>
+                <a:latin typeface="Consolas"/>
+              </a:rPr>
+              <a:t>.</a:t>
+            </a:r>
+            <a:r>
+              <a:rPr sz="1000" i="0" b="0">
+                <a:solidFill>
+                  <a:srgbClr val="D4D4D4"/>
+                </a:solidFill>
+                <a:latin typeface="Consolas"/>
+              </a:rPr>
+              <a:t>nombre</a:t>
+            </a:r>
+            <a:r>
+              <a:rPr sz="1000" i="0" b="0">
+                <a:solidFill>
+                  <a:srgbClr val="D4D4D4"/>
+                </a:solidFill>
+                <a:latin typeface="Consolas"/>
+              </a:rPr>
+              <a:t> = </a:t>
+            </a:r>
+            <a:r>
+              <a:rPr sz="1000" i="0" b="0">
+                <a:solidFill>
+                  <a:srgbClr val="D4D4D4"/>
+                </a:solidFill>
+                <a:latin typeface="Consolas"/>
+              </a:rPr>
+              <a:t>nombre</a:t>
+            </a:r>
+            <a:r>
+              <a:rPr sz="1000" i="0" b="0">
+                <a:solidFill>
+                  <a:srgbClr val="D4D4D4"/>
+                </a:solidFill>
+                <a:latin typeface="Consolas"/>
+              </a:rPr>
+              <a:t>;</a:t>
+            </a:r>
+          </a:p>
+          <a:p>
+            <a:pPr>
+              <a:spcAft>
+                <a:spcPts val="71"/>
+              </a:spcAft>
+            </a:pPr>
+            <a:r>
+              <a:rPr sz="1000" i="0" b="0">
+                <a:solidFill>
+                  <a:srgbClr val="D4D4D4"/>
+                </a:solidFill>
+                <a:latin typeface="Consolas"/>
+              </a:rPr>
+              <a:t>        </a:t>
+            </a:r>
+            <a:r>
+              <a:rPr sz="1000" i="0" b="0">
+                <a:solidFill>
+                  <a:srgbClr val="569CD6"/>
+                </a:solidFill>
+                <a:latin typeface="Consolas"/>
+              </a:rPr>
+              <a:t>this</a:t>
+            </a:r>
+            <a:r>
+              <a:rPr sz="1000" i="0" b="0">
+                <a:solidFill>
+                  <a:srgbClr val="D4D4D4"/>
+                </a:solidFill>
+                <a:latin typeface="Consolas"/>
+              </a:rPr>
+              <a:t>.</a:t>
+            </a:r>
+            <a:r>
+              <a:rPr sz="1000" i="0" b="0">
+                <a:solidFill>
+                  <a:srgbClr val="D4D4D4"/>
+                </a:solidFill>
+                <a:latin typeface="Consolas"/>
+              </a:rPr>
+              <a:t>especie</a:t>
+            </a:r>
+            <a:r>
+              <a:rPr sz="1000" i="0" b="0">
+                <a:solidFill>
+                  <a:srgbClr val="D4D4D4"/>
+                </a:solidFill>
+                <a:latin typeface="Consolas"/>
+              </a:rPr>
+              <a:t> = </a:t>
+            </a:r>
+            <a:r>
+              <a:rPr sz="1000" i="0" b="0">
+                <a:solidFill>
+                  <a:srgbClr val="D4D4D4"/>
+                </a:solidFill>
+                <a:latin typeface="Consolas"/>
+              </a:rPr>
+              <a:t>especie</a:t>
+            </a:r>
+            <a:r>
+              <a:rPr sz="1000" i="0" b="0">
+                <a:solidFill>
+                  <a:srgbClr val="D4D4D4"/>
+                </a:solidFill>
+                <a:latin typeface="Consolas"/>
+              </a:rPr>
+              <a:t>;</a:t>
+            </a:r>
+          </a:p>
+          <a:p>
+            <a:pPr>
+              <a:spcAft>
+                <a:spcPts val="71"/>
+              </a:spcAft>
+            </a:pPr>
+            <a:r>
+              <a:rPr sz="1000" i="0" b="0">
+                <a:solidFill>
+                  <a:srgbClr val="D4D4D4"/>
+                </a:solidFill>
+                <a:latin typeface="Consolas"/>
+              </a:rPr>
+              <a:t>        </a:t>
+            </a:r>
+            <a:r>
+              <a:rPr sz="1000" i="0" b="0">
+                <a:solidFill>
+                  <a:srgbClr val="569CD6"/>
+                </a:solidFill>
+                <a:latin typeface="Consolas"/>
+              </a:rPr>
+              <a:t>this</a:t>
+            </a:r>
+            <a:r>
+              <a:rPr sz="1000" i="0" b="0">
+                <a:solidFill>
+                  <a:srgbClr val="D4D4D4"/>
+                </a:solidFill>
+                <a:latin typeface="Consolas"/>
+              </a:rPr>
+              <a:t>.</a:t>
+            </a:r>
+            <a:r>
+              <a:rPr sz="1000" i="0" b="0">
+                <a:solidFill>
+                  <a:srgbClr val="D4D4D4"/>
+                </a:solidFill>
+                <a:latin typeface="Consolas"/>
+              </a:rPr>
+              <a:t>edad</a:t>
+            </a:r>
+            <a:r>
+              <a:rPr sz="1000" i="0" b="0">
+                <a:solidFill>
+                  <a:srgbClr val="D4D4D4"/>
+                </a:solidFill>
+                <a:latin typeface="Consolas"/>
+              </a:rPr>
+              <a:t> = </a:t>
+            </a:r>
+            <a:r>
+              <a:rPr sz="1000" i="0" b="0">
+                <a:solidFill>
+                  <a:srgbClr val="D4D4D4"/>
+                </a:solidFill>
+                <a:latin typeface="Consolas"/>
+              </a:rPr>
+              <a:t>edad</a:t>
+            </a:r>
+            <a:r>
+              <a:rPr sz="1000" i="0" b="0">
+                <a:solidFill>
+                  <a:srgbClr val="D4D4D4"/>
+                </a:solidFill>
+                <a:latin typeface="Consolas"/>
+              </a:rPr>
+              <a:t>;</a:t>
+            </a:r>
+          </a:p>
+          <a:p>
+            <a:pPr>
+              <a:spcAft>
+                <a:spcPts val="71"/>
+              </a:spcAft>
+            </a:pPr>
+            <a:r>
+              <a:rPr sz="1000" i="0" b="0">
+                <a:solidFill>
+                  <a:srgbClr val="D4D4D4"/>
+                </a:solidFill>
+                <a:latin typeface="Consolas"/>
+              </a:rPr>
+              <a:t>    }</a:t>
+            </a:r>
+          </a:p>
+          <a:p>
+            <a:pPr>
+              <a:spcAft>
+                <a:spcPts val="71"/>
+              </a:spcAft>
+            </a:pPr>
+            <a:r>
+              <a:rPr sz="1000" i="0" b="0">
+                <a:solidFill>
+                  <a:srgbClr val="D4D4D4"/>
+                </a:solidFill>
+                <a:latin typeface="Consolas"/>
+              </a:rPr>
+              <a:t/>
+            </a:r>
+          </a:p>
+          <a:p>
+            <a:pPr>
+              <a:spcAft>
+                <a:spcPts val="71"/>
+              </a:spcAft>
+            </a:pPr>
+            <a:r>
+              <a:rPr sz="1000" i="0" b="0">
+                <a:solidFill>
+                  <a:srgbClr val="D4D4D4"/>
+                </a:solidFill>
+                <a:latin typeface="Consolas"/>
+              </a:rPr>
+              <a:t>    </a:t>
+            </a:r>
+            <a:r>
+              <a:rPr sz="1000" i="0" b="0">
+                <a:solidFill>
+                  <a:srgbClr val="569CD6"/>
+                </a:solidFill>
+                <a:latin typeface="Consolas"/>
+              </a:rPr>
+              <a:t>public</a:t>
+            </a:r>
+            <a:r>
+              <a:rPr sz="1000" i="0" b="0">
+                <a:solidFill>
+                  <a:srgbClr val="D4D4D4"/>
+                </a:solidFill>
+                <a:latin typeface="Consolas"/>
+              </a:rPr>
+              <a:t> </a:t>
+            </a:r>
+            <a:r>
+              <a:rPr sz="1000" i="0" b="0">
+                <a:solidFill>
+                  <a:srgbClr val="4EC9B0"/>
+                </a:solidFill>
+                <a:latin typeface="Consolas"/>
+              </a:rPr>
+              <a:t>String</a:t>
+            </a:r>
+            <a:r>
+              <a:rPr sz="1000" i="0" b="0">
+                <a:solidFill>
+                  <a:srgbClr val="D4D4D4"/>
+                </a:solidFill>
+                <a:latin typeface="Consolas"/>
+              </a:rPr>
+              <a:t> </a:t>
+            </a:r>
+            <a:r>
+              <a:rPr sz="1000" i="0" b="0">
+                <a:solidFill>
+                  <a:srgbClr val="DCDCAA"/>
+                </a:solidFill>
+                <a:latin typeface="Consolas"/>
+              </a:rPr>
+              <a:t>getId</a:t>
+            </a:r>
+            <a:r>
+              <a:rPr sz="1000" i="0" b="0">
+                <a:solidFill>
+                  <a:srgbClr val="D4D4D4"/>
+                </a:solidFill>
+                <a:latin typeface="Consolas"/>
+              </a:rPr>
+              <a:t>() { </a:t>
+            </a:r>
+            <a:r>
+              <a:rPr sz="1000" i="0" b="0">
+                <a:solidFill>
+                  <a:srgbClr val="569CD6"/>
+                </a:solidFill>
+                <a:latin typeface="Consolas"/>
+              </a:rPr>
+              <a:t>return</a:t>
+            </a:r>
+            <a:r>
+              <a:rPr sz="1000" i="0" b="0">
+                <a:solidFill>
+                  <a:srgbClr val="D4D4D4"/>
+                </a:solidFill>
+                <a:latin typeface="Consolas"/>
+              </a:rPr>
+              <a:t> </a:t>
+            </a:r>
+            <a:r>
+              <a:rPr sz="1000" i="0" b="0">
+                <a:solidFill>
+                  <a:srgbClr val="D4D4D4"/>
+                </a:solidFill>
+                <a:latin typeface="Consolas"/>
+              </a:rPr>
+              <a:t>id</a:t>
+            </a:r>
+            <a:r>
+              <a:rPr sz="1000" i="0" b="0">
+                <a:solidFill>
+                  <a:srgbClr val="D4D4D4"/>
+                </a:solidFill>
+                <a:latin typeface="Consolas"/>
+              </a:rPr>
+              <a:t>; }</a:t>
+            </a:r>
+          </a:p>
+          <a:p>
+            <a:pPr>
+              <a:spcAft>
+                <a:spcPts val="71"/>
+              </a:spcAft>
+            </a:pPr>
+            <a:r>
+              <a:rPr sz="1000" i="0" b="0">
+                <a:solidFill>
+                  <a:srgbClr val="D4D4D4"/>
+                </a:solidFill>
+                <a:latin typeface="Consolas"/>
+              </a:rPr>
+              <a:t>    </a:t>
+            </a:r>
+            <a:r>
+              <a:rPr sz="1000" i="0" b="0">
+                <a:solidFill>
+                  <a:srgbClr val="569CD6"/>
+                </a:solidFill>
+                <a:latin typeface="Consolas"/>
+              </a:rPr>
+              <a:t>public</a:t>
+            </a:r>
+            <a:r>
+              <a:rPr sz="1000" i="0" b="0">
+                <a:solidFill>
+                  <a:srgbClr val="D4D4D4"/>
+                </a:solidFill>
+                <a:latin typeface="Consolas"/>
+              </a:rPr>
+              <a:t> </a:t>
+            </a:r>
+            <a:r>
+              <a:rPr sz="1000" i="0" b="0">
+                <a:solidFill>
+                  <a:srgbClr val="4EC9B0"/>
+                </a:solidFill>
+                <a:latin typeface="Consolas"/>
+              </a:rPr>
+              <a:t>String</a:t>
+            </a:r>
+            <a:r>
+              <a:rPr sz="1000" i="0" b="0">
+                <a:solidFill>
+                  <a:srgbClr val="D4D4D4"/>
+                </a:solidFill>
+                <a:latin typeface="Consolas"/>
+              </a:rPr>
+              <a:t> </a:t>
+            </a:r>
+            <a:r>
+              <a:rPr sz="1000" i="0" b="0">
+                <a:solidFill>
+                  <a:srgbClr val="DCDCAA"/>
+                </a:solidFill>
+                <a:latin typeface="Consolas"/>
+              </a:rPr>
+              <a:t>getNombre</a:t>
+            </a:r>
+            <a:r>
+              <a:rPr sz="1000" i="0" b="0">
+                <a:solidFill>
+                  <a:srgbClr val="D4D4D4"/>
+                </a:solidFill>
+                <a:latin typeface="Consolas"/>
+              </a:rPr>
+              <a:t>() { </a:t>
+            </a:r>
+            <a:r>
+              <a:rPr sz="1000" i="0" b="0">
+                <a:solidFill>
+                  <a:srgbClr val="569CD6"/>
+                </a:solidFill>
+                <a:latin typeface="Consolas"/>
+              </a:rPr>
+              <a:t>return</a:t>
+            </a:r>
+            <a:r>
+              <a:rPr sz="1000" i="0" b="0">
+                <a:solidFill>
+                  <a:srgbClr val="D4D4D4"/>
+                </a:solidFill>
+                <a:latin typeface="Consolas"/>
+              </a:rPr>
+              <a:t> </a:t>
+            </a:r>
+            <a:r>
+              <a:rPr sz="1000" i="0" b="0">
+                <a:solidFill>
+                  <a:srgbClr val="D4D4D4"/>
+                </a:solidFill>
+                <a:latin typeface="Consolas"/>
+              </a:rPr>
+              <a:t>nombre</a:t>
+            </a:r>
+            <a:r>
+              <a:rPr sz="1000" i="0" b="0">
+                <a:solidFill>
+                  <a:srgbClr val="D4D4D4"/>
+                </a:solidFill>
+                <a:latin typeface="Consolas"/>
+              </a:rPr>
+              <a:t>; }</a:t>
+            </a:r>
+          </a:p>
+          <a:p>
+            <a:pPr>
+              <a:spcAft>
+                <a:spcPts val="71"/>
+              </a:spcAft>
+            </a:pPr>
+            <a:r>
+              <a:rPr sz="1000" i="0" b="0">
+                <a:solidFill>
+                  <a:srgbClr val="D4D4D4"/>
+                </a:solidFill>
+                <a:latin typeface="Consolas"/>
+              </a:rPr>
+              <a:t>    </a:t>
+            </a:r>
+            <a:r>
+              <a:rPr sz="1000" i="0" b="0">
+                <a:solidFill>
+                  <a:srgbClr val="569CD6"/>
+                </a:solidFill>
+                <a:latin typeface="Consolas"/>
+              </a:rPr>
+              <a:t>public</a:t>
+            </a:r>
+            <a:r>
+              <a:rPr sz="1000" i="0" b="0">
+                <a:solidFill>
+                  <a:srgbClr val="D4D4D4"/>
+                </a:solidFill>
+                <a:latin typeface="Consolas"/>
+              </a:rPr>
+              <a:t> </a:t>
+            </a:r>
+            <a:r>
+              <a:rPr sz="1000" i="0" b="0">
+                <a:solidFill>
+                  <a:srgbClr val="4EC9B0"/>
+                </a:solidFill>
+                <a:latin typeface="Consolas"/>
+              </a:rPr>
+              <a:t>String</a:t>
+            </a:r>
+            <a:r>
+              <a:rPr sz="1000" i="0" b="0">
+                <a:solidFill>
+                  <a:srgbClr val="D4D4D4"/>
+                </a:solidFill>
+                <a:latin typeface="Consolas"/>
+              </a:rPr>
+              <a:t> </a:t>
+            </a:r>
+            <a:r>
+              <a:rPr sz="1000" i="0" b="0">
+                <a:solidFill>
+                  <a:srgbClr val="DCDCAA"/>
+                </a:solidFill>
+                <a:latin typeface="Consolas"/>
+              </a:rPr>
+              <a:t>getEspecie</a:t>
+            </a:r>
+            <a:r>
+              <a:rPr sz="1000" i="0" b="0">
+                <a:solidFill>
+                  <a:srgbClr val="D4D4D4"/>
+                </a:solidFill>
+                <a:latin typeface="Consolas"/>
+              </a:rPr>
+              <a:t>() { </a:t>
+            </a:r>
+            <a:r>
+              <a:rPr sz="1000" i="0" b="0">
+                <a:solidFill>
+                  <a:srgbClr val="569CD6"/>
+                </a:solidFill>
+                <a:latin typeface="Consolas"/>
+              </a:rPr>
+              <a:t>return</a:t>
+            </a:r>
+            <a:r>
+              <a:rPr sz="1000" i="0" b="0">
+                <a:solidFill>
+                  <a:srgbClr val="D4D4D4"/>
+                </a:solidFill>
+                <a:latin typeface="Consolas"/>
+              </a:rPr>
+              <a:t> </a:t>
+            </a:r>
+            <a:r>
+              <a:rPr sz="1000" i="0" b="0">
+                <a:solidFill>
+                  <a:srgbClr val="D4D4D4"/>
+                </a:solidFill>
+                <a:latin typeface="Consolas"/>
+              </a:rPr>
+              <a:t>especie</a:t>
+            </a:r>
+            <a:r>
+              <a:rPr sz="1000" i="0" b="0">
+                <a:solidFill>
+                  <a:srgbClr val="D4D4D4"/>
+                </a:solidFill>
+                <a:latin typeface="Consolas"/>
+              </a:rPr>
+              <a:t>; }</a:t>
+            </a:r>
+          </a:p>
+          <a:p>
+            <a:pPr>
+              <a:spcAft>
+                <a:spcPts val="71"/>
+              </a:spcAft>
+            </a:pPr>
+            <a:r>
+              <a:rPr sz="1000" i="0" b="0">
+                <a:solidFill>
+                  <a:srgbClr val="D4D4D4"/>
+                </a:solidFill>
+                <a:latin typeface="Consolas"/>
+              </a:rPr>
+              <a:t>    </a:t>
+            </a:r>
+            <a:r>
+              <a:rPr sz="1000" i="0" b="0">
+                <a:solidFill>
+                  <a:srgbClr val="569CD6"/>
+                </a:solidFill>
+                <a:latin typeface="Consolas"/>
+              </a:rPr>
+              <a:t>public</a:t>
+            </a:r>
+            <a:r>
+              <a:rPr sz="1000" i="0" b="0">
+                <a:solidFill>
+                  <a:srgbClr val="D4D4D4"/>
+                </a:solidFill>
+                <a:latin typeface="Consolas"/>
+              </a:rPr>
+              <a:t> </a:t>
+            </a:r>
+            <a:r>
+              <a:rPr sz="1000" i="0" b="0">
+                <a:solidFill>
+                  <a:srgbClr val="4EC9B0"/>
+                </a:solidFill>
+                <a:latin typeface="Consolas"/>
+              </a:rPr>
+              <a:t>int</a:t>
+            </a:r>
+            <a:r>
+              <a:rPr sz="1000" i="0" b="0">
+                <a:solidFill>
+                  <a:srgbClr val="D4D4D4"/>
+                </a:solidFill>
+                <a:latin typeface="Consolas"/>
+              </a:rPr>
+              <a:t> </a:t>
+            </a:r>
+            <a:r>
+              <a:rPr sz="1000" i="0" b="0">
+                <a:solidFill>
+                  <a:srgbClr val="DCDCAA"/>
+                </a:solidFill>
+                <a:latin typeface="Consolas"/>
+              </a:rPr>
+              <a:t>getEdad</a:t>
+            </a:r>
+            <a:r>
+              <a:rPr sz="1000" i="0" b="0">
+                <a:solidFill>
+                  <a:srgbClr val="D4D4D4"/>
+                </a:solidFill>
+                <a:latin typeface="Consolas"/>
+              </a:rPr>
+              <a:t>() { </a:t>
+            </a:r>
+            <a:r>
+              <a:rPr sz="1000" i="0" b="0">
+                <a:solidFill>
+                  <a:srgbClr val="569CD6"/>
+                </a:solidFill>
+                <a:latin typeface="Consolas"/>
+              </a:rPr>
+              <a:t>return</a:t>
+            </a:r>
+            <a:r>
+              <a:rPr sz="1000" i="0" b="0">
+                <a:solidFill>
+                  <a:srgbClr val="D4D4D4"/>
+                </a:solidFill>
+                <a:latin typeface="Consolas"/>
+              </a:rPr>
+              <a:t> </a:t>
+            </a:r>
+            <a:r>
+              <a:rPr sz="1000" i="0" b="0">
+                <a:solidFill>
+                  <a:srgbClr val="D4D4D4"/>
+                </a:solidFill>
+                <a:latin typeface="Consolas"/>
+              </a:rPr>
+              <a:t>edad</a:t>
+            </a:r>
+            <a:r>
+              <a:rPr sz="1000" i="0" b="0">
+                <a:solidFill>
+                  <a:srgbClr val="D4D4D4"/>
+                </a:solidFill>
+                <a:latin typeface="Consolas"/>
+              </a:rPr>
+              <a:t>; }</a:t>
+            </a:r>
+          </a:p>
+          <a:p>
+            <a:pPr>
+              <a:spcAft>
+                <a:spcPts val="71"/>
+              </a:spcAft>
+            </a:pPr>
+            <a:r>
+              <a:rPr sz="1000" i="0" b="0">
+                <a:solidFill>
+                  <a:srgbClr val="D4D4D4"/>
+                </a:solidFill>
+                <a:latin typeface="Consolas"/>
+              </a:rPr>
+              <a:t>}</a:t>
+            </a:r>
+          </a:p>
+        </p:txBody>
+      </p:sp>
+      <p:sp>
+        <p:nvSpPr>
+          <p:cNvPr id="15" name="TextBox 14"/>
           <p:cNvSpPr txBox="1"/>
           <p:nvPr/>
         </p:nvSpPr>
@@ -12606,7 +16011,7 @@
         <p:spPr>
           <a:xfrm>
             <a:off x="457200" y="1261872"/>
-            <a:ext cx="11277295" cy="3524408"/>
+            <a:ext cx="11277295" cy="5093208"/>
           </a:xfrm>
           <a:prstGeom prst="roundRect">
             <a:avLst>
@@ -12842,7 +16247,7 @@
                 </a:solidFill>
                 <a:latin typeface="Calibri"/>
               </a:rPr>
-              <a:t>Java</a:t>
+              <a:t>Main.java</a:t>
             </a:r>
           </a:p>
         </p:txBody>
@@ -12856,7 +16261,7 @@
         <p:spPr>
           <a:xfrm>
             <a:off x="685800" y="1719072"/>
-            <a:ext cx="502920" cy="2930048"/>
+            <a:ext cx="502920" cy="4498848"/>
           </a:xfrm>
           <a:prstGeom prst="rect">
             <a:avLst/>
@@ -12871,11 +16276,11 @@
           <a:p>
             <a:pPr algn="r">
               <a:spcAft>
-                <a:spcPts val="428"/>
-              </a:spcAft>
-            </a:pPr>
-            <a:r>
-              <a:rPr sz="2000" i="0" b="0">
+                <a:spcPts val="71"/>
+              </a:spcAft>
+            </a:pPr>
+            <a:r>
+              <a:rPr sz="1000" i="0" b="0">
                 <a:solidFill>
                   <a:srgbClr val="858585"/>
                 </a:solidFill>
@@ -12887,11 +16292,11 @@
           <a:p>
             <a:pPr algn="r">
               <a:spcAft>
-                <a:spcPts val="428"/>
-              </a:spcAft>
-            </a:pPr>
-            <a:r>
-              <a:rPr sz="2000" i="0" b="0">
+                <a:spcPts val="71"/>
+              </a:spcAft>
+            </a:pPr>
+            <a:r>
+              <a:rPr sz="1000" i="0" b="0">
                 <a:solidFill>
                   <a:srgbClr val="858585"/>
                 </a:solidFill>
@@ -12903,11 +16308,11 @@
           <a:p>
             <a:pPr algn="r">
               <a:spcAft>
-                <a:spcPts val="428"/>
-              </a:spcAft>
-            </a:pPr>
-            <a:r>
-              <a:rPr sz="2000" i="0" b="0">
+                <a:spcPts val="71"/>
+              </a:spcAft>
+            </a:pPr>
+            <a:r>
+              <a:rPr sz="1000" i="0" b="0">
                 <a:solidFill>
                   <a:srgbClr val="858585"/>
                 </a:solidFill>
@@ -12919,11 +16324,11 @@
           <a:p>
             <a:pPr algn="r">
               <a:spcAft>
-                <a:spcPts val="428"/>
-              </a:spcAft>
-            </a:pPr>
-            <a:r>
-              <a:rPr sz="2000" i="0" b="0">
+                <a:spcPts val="71"/>
+              </a:spcAft>
+            </a:pPr>
+            <a:r>
+              <a:rPr sz="1000" i="0" b="0">
                 <a:solidFill>
                   <a:srgbClr val="858585"/>
                 </a:solidFill>
@@ -12935,11 +16340,11 @@
           <a:p>
             <a:pPr algn="r">
               <a:spcAft>
-                <a:spcPts val="428"/>
-              </a:spcAft>
-            </a:pPr>
-            <a:r>
-              <a:rPr sz="2000" i="0" b="0">
+                <a:spcPts val="71"/>
+              </a:spcAft>
+            </a:pPr>
+            <a:r>
+              <a:rPr sz="1000" i="0" b="0">
                 <a:solidFill>
                   <a:srgbClr val="858585"/>
                 </a:solidFill>
@@ -12951,11 +16356,11 @@
           <a:p>
             <a:pPr algn="r">
               <a:spcAft>
-                <a:spcPts val="428"/>
-              </a:spcAft>
-            </a:pPr>
-            <a:r>
-              <a:rPr sz="2000" i="0" b="0">
+                <a:spcPts val="71"/>
+              </a:spcAft>
+            </a:pPr>
+            <a:r>
+              <a:rPr sz="1000" i="0" b="0">
                 <a:solidFill>
                   <a:srgbClr val="858585"/>
                 </a:solidFill>
@@ -12967,11 +16372,11 @@
           <a:p>
             <a:pPr algn="r">
               <a:spcAft>
-                <a:spcPts val="428"/>
-              </a:spcAft>
-            </a:pPr>
-            <a:r>
-              <a:rPr sz="2000" i="0" b="0">
+                <a:spcPts val="71"/>
+              </a:spcAft>
+            </a:pPr>
+            <a:r>
+              <a:rPr sz="1000" i="0" b="0">
                 <a:solidFill>
                   <a:srgbClr val="858585"/>
                 </a:solidFill>
@@ -12983,17 +16388,177 @@
           <a:p>
             <a:pPr algn="r">
               <a:spcAft>
-                <a:spcPts val="428"/>
-              </a:spcAft>
-            </a:pPr>
-            <a:r>
-              <a:rPr sz="2000" i="0" b="0">
+                <a:spcPts val="71"/>
+              </a:spcAft>
+            </a:pPr>
+            <a:r>
+              <a:rPr sz="1000" i="0" b="0">
                 <a:solidFill>
                   <a:srgbClr val="858585"/>
                 </a:solidFill>
                 <a:latin typeface="Consolas"/>
               </a:rPr>
               <a:t>8</a:t>
+            </a:r>
+          </a:p>
+          <a:p>
+            <a:pPr algn="r">
+              <a:spcAft>
+                <a:spcPts val="71"/>
+              </a:spcAft>
+            </a:pPr>
+            <a:r>
+              <a:rPr sz="1000" i="0" b="0">
+                <a:solidFill>
+                  <a:srgbClr val="858585"/>
+                </a:solidFill>
+                <a:latin typeface="Consolas"/>
+              </a:rPr>
+              <a:t>9</a:t>
+            </a:r>
+          </a:p>
+          <a:p>
+            <a:pPr algn="r">
+              <a:spcAft>
+                <a:spcPts val="71"/>
+              </a:spcAft>
+            </a:pPr>
+            <a:r>
+              <a:rPr sz="1000" i="0" b="0">
+                <a:solidFill>
+                  <a:srgbClr val="858585"/>
+                </a:solidFill>
+                <a:latin typeface="Consolas"/>
+              </a:rPr>
+              <a:t>10</a:t>
+            </a:r>
+          </a:p>
+          <a:p>
+            <a:pPr algn="r">
+              <a:spcAft>
+                <a:spcPts val="71"/>
+              </a:spcAft>
+            </a:pPr>
+            <a:r>
+              <a:rPr sz="1000" i="0" b="0">
+                <a:solidFill>
+                  <a:srgbClr val="858585"/>
+                </a:solidFill>
+                <a:latin typeface="Consolas"/>
+              </a:rPr>
+              <a:t>11</a:t>
+            </a:r>
+          </a:p>
+          <a:p>
+            <a:pPr algn="r">
+              <a:spcAft>
+                <a:spcPts val="71"/>
+              </a:spcAft>
+            </a:pPr>
+            <a:r>
+              <a:rPr sz="1000" i="0" b="0">
+                <a:solidFill>
+                  <a:srgbClr val="858585"/>
+                </a:solidFill>
+                <a:latin typeface="Consolas"/>
+              </a:rPr>
+              <a:t>12</a:t>
+            </a:r>
+          </a:p>
+          <a:p>
+            <a:pPr algn="r">
+              <a:spcAft>
+                <a:spcPts val="71"/>
+              </a:spcAft>
+            </a:pPr>
+            <a:r>
+              <a:rPr sz="1000" i="0" b="0">
+                <a:solidFill>
+                  <a:srgbClr val="858585"/>
+                </a:solidFill>
+                <a:latin typeface="Consolas"/>
+              </a:rPr>
+              <a:t>13</a:t>
+            </a:r>
+          </a:p>
+          <a:p>
+            <a:pPr algn="r">
+              <a:spcAft>
+                <a:spcPts val="71"/>
+              </a:spcAft>
+            </a:pPr>
+            <a:r>
+              <a:rPr sz="1000" i="0" b="0">
+                <a:solidFill>
+                  <a:srgbClr val="858585"/>
+                </a:solidFill>
+                <a:latin typeface="Consolas"/>
+              </a:rPr>
+              <a:t>14</a:t>
+            </a:r>
+          </a:p>
+          <a:p>
+            <a:pPr algn="r">
+              <a:spcAft>
+                <a:spcPts val="71"/>
+              </a:spcAft>
+            </a:pPr>
+            <a:r>
+              <a:rPr sz="1000" i="0" b="0">
+                <a:solidFill>
+                  <a:srgbClr val="858585"/>
+                </a:solidFill>
+                <a:latin typeface="Consolas"/>
+              </a:rPr>
+              <a:t>15</a:t>
+            </a:r>
+          </a:p>
+          <a:p>
+            <a:pPr algn="r">
+              <a:spcAft>
+                <a:spcPts val="71"/>
+              </a:spcAft>
+            </a:pPr>
+            <a:r>
+              <a:rPr sz="1000" i="0" b="0">
+                <a:solidFill>
+                  <a:srgbClr val="858585"/>
+                </a:solidFill>
+                <a:latin typeface="Consolas"/>
+              </a:rPr>
+              <a:t>16</a:t>
+            </a:r>
+          </a:p>
+          <a:p>
+            <a:pPr algn="r">
+              <a:spcAft>
+                <a:spcPts val="71"/>
+              </a:spcAft>
+            </a:pPr>
+            <a:r>
+              <a:rPr sz="1000" i="0" b="0">
+                <a:solidFill>
+                  <a:srgbClr val="858585"/>
+                </a:solidFill>
+                <a:latin typeface="Consolas"/>
+              </a:rPr>
+              <a:t>17</a:t>
+            </a:r>
+          </a:p>
+          <a:p>
+            <a:pPr algn="r">
+              <a:spcAft>
+                <a:spcPts val="71"/>
+              </a:spcAft>
+            </a:pPr>
+            <a:r>
+              <a:rPr sz="1000" i="0" b="0">
+                <a:solidFill>
+                  <a:srgbClr val="858585"/>
+                </a:solidFill>
+                <a:latin typeface="Consolas"/>
+              </a:rPr>
+              <a:t>18</a:t>
             </a:r>
           </a:p>
         </p:txBody>
@@ -13007,7 +16572,7 @@
         <p:spPr>
           <a:xfrm>
             <a:off x="1188720" y="1719072"/>
-            <a:ext cx="10271455" cy="2930048"/>
+            <a:ext cx="4747107" cy="4498848"/>
           </a:xfrm>
           <a:prstGeom prst="rect">
             <a:avLst/>
@@ -13022,20 +16587,72 @@
           <a:p>
             <a:pPr>
               <a:spcAft>
-                <a:spcPts val="428"/>
-              </a:spcAft>
-            </a:pPr>
-            <a:r>
-              <a:rPr sz="2000" i="0" b="0">
+                <a:spcPts val="71"/>
+              </a:spcAft>
+            </a:pPr>
+            <a:r>
+              <a:rPr sz="1000" i="0" b="0">
                 <a:solidFill>
                   <a:srgbClr val="569CD6"/>
                 </a:solidFill>
                 <a:latin typeface="Consolas"/>
               </a:rPr>
+              <a:t>class</a:t>
+            </a:r>
+            <a:r>
+              <a:rPr sz="1000" i="0" b="0">
+                <a:solidFill>
+                  <a:srgbClr val="D4D4D4"/>
+                </a:solidFill>
+                <a:latin typeface="Consolas"/>
+              </a:rPr>
+              <a:t> </a:t>
+            </a:r>
+            <a:r>
+              <a:rPr sz="1000" i="0" b="0">
+                <a:solidFill>
+                  <a:srgbClr val="4EC9B0"/>
+                </a:solidFill>
+                <a:latin typeface="Consolas"/>
+              </a:rPr>
+              <a:t>Main</a:t>
+            </a:r>
+            <a:r>
+              <a:rPr sz="1000" i="0" b="0">
+                <a:solidFill>
+                  <a:srgbClr val="D4D4D4"/>
+                </a:solidFill>
+                <a:latin typeface="Consolas"/>
+              </a:rPr>
+              <a:t> {</a:t>
+            </a:r>
+          </a:p>
+          <a:p>
+            <a:pPr>
+              <a:spcAft>
+                <a:spcPts val="71"/>
+              </a:spcAft>
+            </a:pPr>
+            <a:r>
+              <a:rPr sz="1000" i="0" b="0">
+                <a:solidFill>
+                  <a:srgbClr val="D4D4D4"/>
+                </a:solidFill>
+                <a:latin typeface="Consolas"/>
+              </a:rPr>
+              <a:t>    </a:t>
+            </a:r>
+            <a:r>
+              <a:rPr sz="1000" i="0" b="0">
+                <a:solidFill>
+                  <a:srgbClr val="569CD6"/>
+                </a:solidFill>
+                <a:latin typeface="Consolas"/>
+              </a:rPr>
               <a:t>public</a:t>
             </a:r>
             <a:r>
-              <a:rPr sz="2000" i="0" b="0">
+              <a:rPr sz="1000" i="0" b="0">
                 <a:solidFill>
                   <a:srgbClr val="D4D4D4"/>
                 </a:solidFill>
@@ -13044,7 +16661,7 @@
               <a:t> </a:t>
             </a:r>
             <a:r>
-              <a:rPr sz="2000" i="0" b="0">
+              <a:rPr sz="1000" i="0" b="0">
                 <a:solidFill>
                   <a:srgbClr val="569CD6"/>
                 </a:solidFill>
@@ -13053,7 +16670,7 @@
               <a:t>static</a:t>
             </a:r>
             <a:r>
-              <a:rPr sz="2000" i="0" b="0">
+              <a:rPr sz="1000" i="0" b="0">
                 <a:solidFill>
                   <a:srgbClr val="D4D4D4"/>
                 </a:solidFill>
@@ -13062,7 +16679,7 @@
               <a:t> </a:t>
             </a:r>
             <a:r>
-              <a:rPr sz="2000" i="0" b="0">
+              <a:rPr sz="1000" i="0" b="0">
                 <a:solidFill>
                   <a:srgbClr val="569CD6"/>
                 </a:solidFill>
@@ -13071,7 +16688,7 @@
               <a:t>void</a:t>
             </a:r>
             <a:r>
-              <a:rPr sz="2000" i="0" b="0">
+              <a:rPr sz="1000" i="0" b="0">
                 <a:solidFill>
                   <a:srgbClr val="D4D4D4"/>
                 </a:solidFill>
@@ -13080,7 +16697,7 @@
               <a:t> </a:t>
             </a:r>
             <a:r>
-              <a:rPr sz="2000" i="0" b="0">
+              <a:rPr sz="1000" i="0" b="0">
                 <a:solidFill>
                   <a:srgbClr val="DCDCAA"/>
                 </a:solidFill>
@@ -13089,7 +16706,7 @@
               <a:t>main</a:t>
             </a:r>
             <a:r>
-              <a:rPr sz="2000" i="0" b="0">
+              <a:rPr sz="1000" i="0" b="0">
                 <a:solidFill>
                   <a:srgbClr val="D4D4D4"/>
                 </a:solidFill>
@@ -13098,7 +16715,7 @@
               <a:t>(</a:t>
             </a:r>
             <a:r>
-              <a:rPr sz="2000" i="0" b="0">
+              <a:rPr sz="1000" i="0" b="0">
                 <a:solidFill>
                   <a:srgbClr val="4EC9B0"/>
                 </a:solidFill>
@@ -13107,7 +16724,7 @@
               <a:t>String</a:t>
             </a:r>
             <a:r>
-              <a:rPr sz="2000" i="0" b="0">
+              <a:rPr sz="1000" i="0" b="0">
                 <a:solidFill>
                   <a:srgbClr val="D4D4D4"/>
                 </a:solidFill>
@@ -13116,7 +16733,7 @@
               <a:t>[] </a:t>
             </a:r>
             <a:r>
-              <a:rPr sz="2000" i="0" b="0">
+              <a:rPr sz="1000" i="0" b="0">
                 <a:solidFill>
                   <a:srgbClr val="D4D4D4"/>
                 </a:solidFill>
@@ -13125,7 +16742,7 @@
               <a:t>args</a:t>
             </a:r>
             <a:r>
-              <a:rPr sz="2000" i="0" b="0">
+              <a:rPr sz="1000" i="0" b="0">
                 <a:solidFill>
                   <a:srgbClr val="D4D4D4"/>
                 </a:solidFill>
@@ -13137,11 +16754,644 @@
           <a:p>
             <a:pPr>
               <a:spcAft>
-                <a:spcPts val="428"/>
-              </a:spcAft>
-            </a:pPr>
-            <a:r>
-              <a:rPr sz="2000" i="0" b="0">
+                <a:spcPts val="71"/>
+              </a:spcAft>
+            </a:pPr>
+            <a:r>
+              <a:rPr sz="1000" i="0" b="0">
+                <a:solidFill>
+                  <a:srgbClr val="D4D4D4"/>
+                </a:solidFill>
+                <a:latin typeface="Consolas"/>
+              </a:rPr>
+              <a:t>        </a:t>
+            </a:r>
+            <a:r>
+              <a:rPr sz="1000" i="1" b="0">
+                <a:solidFill>
+                  <a:srgbClr val="6A9955"/>
+                </a:solidFill>
+                <a:latin typeface="Consolas"/>
+              </a:rPr>
+              <a:t>// new crea el objeto y llama al constructor</a:t>
+            </a:r>
+          </a:p>
+          <a:p>
+            <a:pPr>
+              <a:spcAft>
+                <a:spcPts val="71"/>
+              </a:spcAft>
+            </a:pPr>
+            <a:r>
+              <a:rPr sz="1000" i="0" b="0">
+                <a:solidFill>
+                  <a:srgbClr val="D4D4D4"/>
+                </a:solidFill>
+                <a:latin typeface="Consolas"/>
+              </a:rPr>
+              <a:t>        </a:t>
+            </a:r>
+            <a:r>
+              <a:rPr sz="1000" i="0" b="0">
+                <a:solidFill>
+                  <a:srgbClr val="D4D4D4"/>
+                </a:solidFill>
+                <a:latin typeface="Consolas"/>
+              </a:rPr>
+              <a:t>Mascota</a:t>
+            </a:r>
+            <a:r>
+              <a:rPr sz="1000" i="0" b="0">
+                <a:solidFill>
+                  <a:srgbClr val="D4D4D4"/>
+                </a:solidFill>
+                <a:latin typeface="Consolas"/>
+              </a:rPr>
+              <a:t> </a:t>
+            </a:r>
+            <a:r>
+              <a:rPr sz="1000" i="0" b="0">
+                <a:solidFill>
+                  <a:srgbClr val="D4D4D4"/>
+                </a:solidFill>
+                <a:latin typeface="Consolas"/>
+              </a:rPr>
+              <a:t>luna</a:t>
+            </a:r>
+            <a:r>
+              <a:rPr sz="1000" i="0" b="0">
+                <a:solidFill>
+                  <a:srgbClr val="D4D4D4"/>
+                </a:solidFill>
+                <a:latin typeface="Consolas"/>
+              </a:rPr>
+              <a:t> =</a:t>
+            </a:r>
+          </a:p>
+          <a:p>
+            <a:pPr>
+              <a:spcAft>
+                <a:spcPts val="71"/>
+              </a:spcAft>
+            </a:pPr>
+            <a:r>
+              <a:rPr sz="1000" i="0" b="0">
+                <a:solidFill>
+                  <a:srgbClr val="D4D4D4"/>
+                </a:solidFill>
+                <a:latin typeface="Consolas"/>
+              </a:rPr>
+              <a:t>                </a:t>
+            </a:r>
+            <a:r>
+              <a:rPr sz="1000" i="0" b="0">
+                <a:solidFill>
+                  <a:srgbClr val="569CD6"/>
+                </a:solidFill>
+                <a:latin typeface="Consolas"/>
+              </a:rPr>
+              <a:t>new</a:t>
+            </a:r>
+            <a:r>
+              <a:rPr sz="1000" i="0" b="0">
+                <a:solidFill>
+                  <a:srgbClr val="D4D4D4"/>
+                </a:solidFill>
+                <a:latin typeface="Consolas"/>
+              </a:rPr>
+              <a:t> </a:t>
+            </a:r>
+            <a:r>
+              <a:rPr sz="1000" i="0" b="0">
+                <a:solidFill>
+                  <a:srgbClr val="4EC9B0"/>
+                </a:solidFill>
+                <a:latin typeface="Consolas"/>
+              </a:rPr>
+              <a:t>Mascota</a:t>
+            </a:r>
+            <a:r>
+              <a:rPr sz="1000" i="0" b="0">
+                <a:solidFill>
+                  <a:srgbClr val="D4D4D4"/>
+                </a:solidFill>
+                <a:latin typeface="Consolas"/>
+              </a:rPr>
+              <a:t>(</a:t>
+            </a:r>
+            <a:r>
+              <a:rPr sz="1000" i="0" b="0">
+                <a:solidFill>
+                  <a:srgbClr val="CE9178"/>
+                </a:solidFill>
+                <a:latin typeface="Consolas"/>
+              </a:rPr>
+              <a:t>"M-001"</a:t>
+            </a:r>
+            <a:r>
+              <a:rPr sz="1000" i="0" b="0">
+                <a:solidFill>
+                  <a:srgbClr val="D4D4D4"/>
+                </a:solidFill>
+                <a:latin typeface="Consolas"/>
+              </a:rPr>
+              <a:t>, </a:t>
+            </a:r>
+            <a:r>
+              <a:rPr sz="1000" i="0" b="0">
+                <a:solidFill>
+                  <a:srgbClr val="CE9178"/>
+                </a:solidFill>
+                <a:latin typeface="Consolas"/>
+              </a:rPr>
+              <a:t>"Luna"</a:t>
+            </a:r>
+            <a:r>
+              <a:rPr sz="1000" i="0" b="0">
+                <a:solidFill>
+                  <a:srgbClr val="D4D4D4"/>
+                </a:solidFill>
+                <a:latin typeface="Consolas"/>
+              </a:rPr>
+              <a:t>, </a:t>
+            </a:r>
+            <a:r>
+              <a:rPr sz="1000" i="0" b="0">
+                <a:solidFill>
+                  <a:srgbClr val="CE9178"/>
+                </a:solidFill>
+                <a:latin typeface="Consolas"/>
+              </a:rPr>
+              <a:t>"Canino"</a:t>
+            </a:r>
+            <a:r>
+              <a:rPr sz="1000" i="0" b="0">
+                <a:solidFill>
+                  <a:srgbClr val="D4D4D4"/>
+                </a:solidFill>
+                <a:latin typeface="Consolas"/>
+              </a:rPr>
+              <a:t>, </a:t>
+            </a:r>
+            <a:r>
+              <a:rPr sz="1000" i="0" b="0">
+                <a:solidFill>
+                  <a:srgbClr val="B5CEA8"/>
+                </a:solidFill>
+                <a:latin typeface="Consolas"/>
+              </a:rPr>
+              <a:t>3</a:t>
+            </a:r>
+            <a:r>
+              <a:rPr sz="1000" i="0" b="0">
+                <a:solidFill>
+                  <a:srgbClr val="D4D4D4"/>
+                </a:solidFill>
+                <a:latin typeface="Consolas"/>
+              </a:rPr>
+              <a:t>);</a:t>
+            </a:r>
+          </a:p>
+          <a:p>
+            <a:pPr>
+              <a:spcAft>
+                <a:spcPts val="71"/>
+              </a:spcAft>
+            </a:pPr>
+            <a:r>
+              <a:rPr sz="1000" i="0" b="0">
+                <a:solidFill>
+                  <a:srgbClr val="D4D4D4"/>
+                </a:solidFill>
+                <a:latin typeface="Consolas"/>
+              </a:rPr>
+              <a:t>        </a:t>
+            </a:r>
+            <a:r>
+              <a:rPr sz="1000" i="0" b="0">
+                <a:solidFill>
+                  <a:srgbClr val="D4D4D4"/>
+                </a:solidFill>
+                <a:latin typeface="Consolas"/>
+              </a:rPr>
+              <a:t>Mascota</a:t>
+            </a:r>
+            <a:r>
+              <a:rPr sz="1000" i="0" b="0">
+                <a:solidFill>
+                  <a:srgbClr val="D4D4D4"/>
+                </a:solidFill>
+                <a:latin typeface="Consolas"/>
+              </a:rPr>
+              <a:t> </a:t>
+            </a:r>
+            <a:r>
+              <a:rPr sz="1000" i="0" b="0">
+                <a:solidFill>
+                  <a:srgbClr val="D4D4D4"/>
+                </a:solidFill>
+                <a:latin typeface="Consolas"/>
+              </a:rPr>
+              <a:t>michi</a:t>
+            </a:r>
+            <a:r>
+              <a:rPr sz="1000" i="0" b="0">
+                <a:solidFill>
+                  <a:srgbClr val="D4D4D4"/>
+                </a:solidFill>
+                <a:latin typeface="Consolas"/>
+              </a:rPr>
+              <a:t> =</a:t>
+            </a:r>
+          </a:p>
+          <a:p>
+            <a:pPr>
+              <a:spcAft>
+                <a:spcPts val="71"/>
+              </a:spcAft>
+            </a:pPr>
+            <a:r>
+              <a:rPr sz="1000" i="0" b="0">
+                <a:solidFill>
+                  <a:srgbClr val="D4D4D4"/>
+                </a:solidFill>
+                <a:latin typeface="Consolas"/>
+              </a:rPr>
+              <a:t>                </a:t>
+            </a:r>
+            <a:r>
+              <a:rPr sz="1000" i="0" b="0">
+                <a:solidFill>
+                  <a:srgbClr val="569CD6"/>
+                </a:solidFill>
+                <a:latin typeface="Consolas"/>
+              </a:rPr>
+              <a:t>new</a:t>
+            </a:r>
+            <a:r>
+              <a:rPr sz="1000" i="0" b="0">
+                <a:solidFill>
+                  <a:srgbClr val="D4D4D4"/>
+                </a:solidFill>
+                <a:latin typeface="Consolas"/>
+              </a:rPr>
+              <a:t> </a:t>
+            </a:r>
+            <a:r>
+              <a:rPr sz="1000" i="0" b="0">
+                <a:solidFill>
+                  <a:srgbClr val="4EC9B0"/>
+                </a:solidFill>
+                <a:latin typeface="Consolas"/>
+              </a:rPr>
+              <a:t>Mascota</a:t>
+            </a:r>
+            <a:r>
+              <a:rPr sz="1000" i="0" b="0">
+                <a:solidFill>
+                  <a:srgbClr val="D4D4D4"/>
+                </a:solidFill>
+                <a:latin typeface="Consolas"/>
+              </a:rPr>
+              <a:t>(</a:t>
+            </a:r>
+            <a:r>
+              <a:rPr sz="1000" i="0" b="0">
+                <a:solidFill>
+                  <a:srgbClr val="CE9178"/>
+                </a:solidFill>
+                <a:latin typeface="Consolas"/>
+              </a:rPr>
+              <a:t>"M-002"</a:t>
+            </a:r>
+            <a:r>
+              <a:rPr sz="1000" i="0" b="0">
+                <a:solidFill>
+                  <a:srgbClr val="D4D4D4"/>
+                </a:solidFill>
+                <a:latin typeface="Consolas"/>
+              </a:rPr>
+              <a:t>, </a:t>
+            </a:r>
+            <a:r>
+              <a:rPr sz="1000" i="0" b="0">
+                <a:solidFill>
+                  <a:srgbClr val="CE9178"/>
+                </a:solidFill>
+                <a:latin typeface="Consolas"/>
+              </a:rPr>
+              <a:t>"Michi"</a:t>
+            </a:r>
+            <a:r>
+              <a:rPr sz="1000" i="0" b="0">
+                <a:solidFill>
+                  <a:srgbClr val="D4D4D4"/>
+                </a:solidFill>
+                <a:latin typeface="Consolas"/>
+              </a:rPr>
+              <a:t>, </a:t>
+            </a:r>
+            <a:r>
+              <a:rPr sz="1000" i="0" b="0">
+                <a:solidFill>
+                  <a:srgbClr val="CE9178"/>
+                </a:solidFill>
+                <a:latin typeface="Consolas"/>
+              </a:rPr>
+              <a:t>"Felino"</a:t>
+            </a:r>
+            <a:r>
+              <a:rPr sz="1000" i="0" b="0">
+                <a:solidFill>
+                  <a:srgbClr val="D4D4D4"/>
+                </a:solidFill>
+                <a:latin typeface="Consolas"/>
+              </a:rPr>
+              <a:t>, </a:t>
+            </a:r>
+            <a:r>
+              <a:rPr sz="1000" i="0" b="0">
+                <a:solidFill>
+                  <a:srgbClr val="B5CEA8"/>
+                </a:solidFill>
+                <a:latin typeface="Consolas"/>
+              </a:rPr>
+              <a:t>5</a:t>
+            </a:r>
+            <a:r>
+              <a:rPr sz="1000" i="0" b="0">
+                <a:solidFill>
+                  <a:srgbClr val="D4D4D4"/>
+                </a:solidFill>
+                <a:latin typeface="Consolas"/>
+              </a:rPr>
+              <a:t>);</a:t>
+            </a:r>
+          </a:p>
+          <a:p>
+            <a:pPr>
+              <a:spcAft>
+                <a:spcPts val="71"/>
+              </a:spcAft>
+            </a:pPr>
+            <a:r>
+              <a:rPr sz="1000" i="0" b="0">
+                <a:solidFill>
+                  <a:srgbClr val="D4D4D4"/>
+                </a:solidFill>
+                <a:latin typeface="Consolas"/>
+              </a:rPr>
+              <a:t>        </a:t>
+            </a:r>
+            <a:r>
+              <a:rPr sz="1000" i="0" b="0">
+                <a:solidFill>
+                  <a:srgbClr val="DCDCAA"/>
+                </a:solidFill>
+                <a:latin typeface="Consolas"/>
+              </a:rPr>
+              <a:t>System.out.println</a:t>
+            </a:r>
+            <a:r>
+              <a:rPr sz="1000" i="0" b="0">
+                <a:solidFill>
+                  <a:srgbClr val="D4D4D4"/>
+                </a:solidFill>
+                <a:latin typeface="Consolas"/>
+              </a:rPr>
+              <a:t>(</a:t>
+            </a:r>
+            <a:r>
+              <a:rPr sz="1000" i="0" b="0">
+                <a:solidFill>
+                  <a:srgbClr val="CE9178"/>
+                </a:solidFill>
+                <a:latin typeface="Consolas"/>
+              </a:rPr>
+              <a:t>"Pacientes registrados hoy:"</a:t>
+            </a:r>
+            <a:r>
+              <a:rPr sz="1000" i="0" b="0">
+                <a:solidFill>
+                  <a:srgbClr val="D4D4D4"/>
+                </a:solidFill>
+                <a:latin typeface="Consolas"/>
+              </a:rPr>
+              <a:t>);</a:t>
+            </a:r>
+          </a:p>
+          <a:p>
+            <a:pPr>
+              <a:spcAft>
+                <a:spcPts val="71"/>
+              </a:spcAft>
+            </a:pPr>
+            <a:r>
+              <a:rPr sz="1000" i="0" b="0">
+                <a:solidFill>
+                  <a:srgbClr val="D4D4D4"/>
+                </a:solidFill>
+                <a:latin typeface="Consolas"/>
+              </a:rPr>
+              <a:t>        </a:t>
+            </a:r>
+            <a:r>
+              <a:rPr sz="1000" i="0" b="0">
+                <a:solidFill>
+                  <a:srgbClr val="DCDCAA"/>
+                </a:solidFill>
+                <a:latin typeface="Consolas"/>
+              </a:rPr>
+              <a:t>System.out.println</a:t>
+            </a:r>
+            <a:r>
+              <a:rPr sz="1000" i="0" b="0">
+                <a:solidFill>
+                  <a:srgbClr val="D4D4D4"/>
+                </a:solidFill>
+                <a:latin typeface="Consolas"/>
+              </a:rPr>
+              <a:t>(</a:t>
+            </a:r>
+            <a:r>
+              <a:rPr sz="1000" i="0" b="0">
+                <a:solidFill>
+                  <a:srgbClr val="D4D4D4"/>
+                </a:solidFill>
+                <a:latin typeface="Consolas"/>
+              </a:rPr>
+              <a:t>luna</a:t>
+            </a:r>
+            <a:r>
+              <a:rPr sz="1000" i="0" b="0">
+                <a:solidFill>
+                  <a:srgbClr val="D4D4D4"/>
+                </a:solidFill>
+                <a:latin typeface="Consolas"/>
+              </a:rPr>
+              <a:t>);  </a:t>
+            </a:r>
+            <a:r>
+              <a:rPr sz="1000" i="1" b="0">
+                <a:solidFill>
+                  <a:srgbClr val="6A9955"/>
+                </a:solidFill>
+                <a:latin typeface="Consolas"/>
+              </a:rPr>
+              <a:t>// usa toString()</a:t>
+            </a:r>
+          </a:p>
+          <a:p>
+            <a:pPr>
+              <a:spcAft>
+                <a:spcPts val="71"/>
+              </a:spcAft>
+            </a:pPr>
+            <a:r>
+              <a:rPr sz="1000" i="0" b="0">
+                <a:solidFill>
+                  <a:srgbClr val="D4D4D4"/>
+                </a:solidFill>
+                <a:latin typeface="Consolas"/>
+              </a:rPr>
+              <a:t>        </a:t>
+            </a:r>
+            <a:r>
+              <a:rPr sz="1000" i="0" b="0">
+                <a:solidFill>
+                  <a:srgbClr val="DCDCAA"/>
+                </a:solidFill>
+                <a:latin typeface="Consolas"/>
+              </a:rPr>
+              <a:t>System.out.println</a:t>
+            </a:r>
+            <a:r>
+              <a:rPr sz="1000" i="0" b="0">
+                <a:solidFill>
+                  <a:srgbClr val="D4D4D4"/>
+                </a:solidFill>
+                <a:latin typeface="Consolas"/>
+              </a:rPr>
+              <a:t>(</a:t>
+            </a:r>
+            <a:r>
+              <a:rPr sz="1000" i="0" b="0">
+                <a:solidFill>
+                  <a:srgbClr val="D4D4D4"/>
+                </a:solidFill>
+                <a:latin typeface="Consolas"/>
+              </a:rPr>
+              <a:t>michi</a:t>
+            </a:r>
+            <a:r>
+              <a:rPr sz="1000" i="0" b="0">
+                <a:solidFill>
+                  <a:srgbClr val="D4D4D4"/>
+                </a:solidFill>
+                <a:latin typeface="Consolas"/>
+              </a:rPr>
+              <a:t>);</a:t>
+            </a:r>
+          </a:p>
+          <a:p>
+            <a:pPr>
+              <a:spcAft>
+                <a:spcPts val="71"/>
+              </a:spcAft>
+            </a:pPr>
+            <a:r>
+              <a:rPr sz="1000" i="0" b="0">
+                <a:solidFill>
+                  <a:srgbClr val="D4D4D4"/>
+                </a:solidFill>
+                <a:latin typeface="Consolas"/>
+              </a:rPr>
+              <a:t>    }</a:t>
+            </a:r>
+          </a:p>
+          <a:p>
+            <a:pPr>
+              <a:spcAft>
+                <a:spcPts val="71"/>
+              </a:spcAft>
+            </a:pPr>
+            <a:r>
+              <a:rPr sz="1000" i="0" b="0">
+                <a:solidFill>
+                  <a:srgbClr val="D4D4D4"/>
+                </a:solidFill>
+                <a:latin typeface="Consolas"/>
+              </a:rPr>
+              <a:t>}</a:t>
+            </a:r>
+          </a:p>
+          <a:p>
+            <a:pPr>
+              <a:spcAft>
+                <a:spcPts val="71"/>
+              </a:spcAft>
+            </a:pPr>
+            <a:r>
+              <a:rPr sz="1000" i="0" b="0">
+                <a:solidFill>
+                  <a:srgbClr val="D4D4D4"/>
+                </a:solidFill>
+                <a:latin typeface="Consolas"/>
+              </a:rPr>
+              <a:t/>
+            </a:r>
+          </a:p>
+          <a:p>
+            <a:pPr>
+              <a:spcAft>
+                <a:spcPts val="71"/>
+              </a:spcAft>
+            </a:pPr>
+            <a:r>
+              <a:rPr sz="1000" i="0" b="0">
+                <a:solidFill>
+                  <a:srgbClr val="569CD6"/>
+                </a:solidFill>
+                <a:latin typeface="Consolas"/>
+              </a:rPr>
+              <a:t>class</a:t>
+            </a:r>
+            <a:r>
+              <a:rPr sz="1000" i="0" b="0">
+                <a:solidFill>
+                  <a:srgbClr val="D4D4D4"/>
+                </a:solidFill>
+                <a:latin typeface="Consolas"/>
+              </a:rPr>
+              <a:t> </a:t>
+            </a:r>
+            <a:r>
+              <a:rPr sz="1000" i="0" b="0">
+                <a:solidFill>
+                  <a:srgbClr val="4EC9B0"/>
+                </a:solidFill>
+                <a:latin typeface="Consolas"/>
+              </a:rPr>
+              <a:t>Mascota</a:t>
+            </a:r>
+            <a:r>
+              <a:rPr sz="1000" i="0" b="0">
+                <a:solidFill>
+                  <a:srgbClr val="D4D4D4"/>
+                </a:solidFill>
+                <a:latin typeface="Consolas"/>
+              </a:rPr>
+              <a:t> {</a:t>
+            </a:r>
+          </a:p>
+          <a:p>
+            <a:pPr>
+              <a:spcAft>
+                <a:spcPts val="71"/>
+              </a:spcAft>
+            </a:pPr>
+            <a:r>
+              <a:rPr sz="1000" i="0" b="0">
                 <a:solidFill>
                   <a:srgbClr val="D4D4D4"/>
                 </a:solidFill>
@@ -13150,16 +17400,16 @@
               <a:t>    </a:t>
             </a:r>
             <a:r>
-              <a:rPr sz="2000" i="0" b="0">
-                <a:solidFill>
-                  <a:srgbClr val="D4D4D4"/>
-                </a:solidFill>
-                <a:latin typeface="Consolas"/>
-              </a:rPr>
-              <a:t>Mascota</a:t>
-            </a:r>
-            <a:r>
-              <a:rPr sz="2000" i="0" b="0">
+              <a:rPr sz="1000" i="0" b="0">
+                <a:solidFill>
+                  <a:srgbClr val="569CD6"/>
+                </a:solidFill>
+                <a:latin typeface="Consolas"/>
+              </a:rPr>
+              <a:t>private</a:t>
+            </a:r>
+            <a:r>
+              <a:rPr sz="1000" i="0" b="0">
                 <a:solidFill>
                   <a:srgbClr val="D4D4D4"/>
                 </a:solidFill>
@@ -13168,34 +17418,68 @@
               <a:t> </a:t>
             </a:r>
             <a:r>
-              <a:rPr sz="2000" i="0" b="0">
-                <a:solidFill>
-                  <a:srgbClr val="D4D4D4"/>
-                </a:solidFill>
-                <a:latin typeface="Consolas"/>
-              </a:rPr>
-              <a:t>luna</a:t>
-            </a:r>
-            <a:r>
-              <a:rPr sz="2000" i="0" b="0">
-                <a:solidFill>
-                  <a:srgbClr val="D4D4D4"/>
-                </a:solidFill>
-                <a:latin typeface="Consolas"/>
-              </a:rPr>
-              <a:t> = </a:t>
-            </a:r>
-            <a:r>
-              <a:rPr sz="2000" i="0" b="0">
+              <a:rPr sz="1000" i="0" b="0">
+                <a:solidFill>
+                  <a:srgbClr val="4EC9B0"/>
+                </a:solidFill>
+                <a:latin typeface="Consolas"/>
+              </a:rPr>
+              <a:t>String</a:t>
+            </a:r>
+            <a:r>
+              <a:rPr sz="1000" i="0" b="0">
+                <a:solidFill>
+                  <a:srgbClr val="D4D4D4"/>
+                </a:solidFill>
+                <a:latin typeface="Consolas"/>
+              </a:rPr>
+              <a:t> </a:t>
+            </a:r>
+            <a:r>
+              <a:rPr sz="1000" i="0" b="0">
+                <a:solidFill>
+                  <a:srgbClr val="D4D4D4"/>
+                </a:solidFill>
+                <a:latin typeface="Consolas"/>
+              </a:rPr>
+              <a:t>id</a:t>
+            </a:r>
+            <a:r>
+              <a:rPr sz="1000" i="0" b="0">
+                <a:solidFill>
+                  <a:srgbClr val="D4D4D4"/>
+                </a:solidFill>
+                <a:latin typeface="Consolas"/>
+              </a:rPr>
+              <a:t>;</a:t>
+            </a:r>
+          </a:p>
+          <a:p>
+            <a:pPr>
+              <a:spcAft>
+                <a:spcPts val="71"/>
+              </a:spcAft>
+            </a:pPr>
+            <a:r>
+              <a:rPr sz="1000" i="0" b="0">
+                <a:solidFill>
+                  <a:srgbClr val="D4D4D4"/>
+                </a:solidFill>
+                <a:latin typeface="Consolas"/>
+              </a:rPr>
+              <a:t>    </a:t>
+            </a:r>
+            <a:r>
+              <a:rPr sz="1000" i="0" b="0">
                 <a:solidFill>
                   <a:srgbClr val="569CD6"/>
                 </a:solidFill>
                 <a:latin typeface="Consolas"/>
               </a:rPr>
-              <a:t>new</a:t>
-            </a:r>
-            <a:r>
-              <a:rPr sz="2000" i="0" b="0">
+              <a:t>private</a:t>
+            </a:r>
+            <a:r>
+              <a:rPr sz="1000" i="0" b="0">
                 <a:solidFill>
                   <a:srgbClr val="D4D4D4"/>
                 </a:solidFill>
@@ -13204,104 +17488,50 @@
               <a:t> </a:t>
             </a:r>
             <a:r>
-              <a:rPr sz="2000" i="0" b="0">
+              <a:rPr sz="1000" i="0" b="0">
                 <a:solidFill>
                   <a:srgbClr val="4EC9B0"/>
                 </a:solidFill>
                 <a:latin typeface="Consolas"/>
               </a:rPr>
-              <a:t>Mascota</a:t>
-            </a:r>
-            <a:r>
-              <a:rPr sz="2000" i="0" b="0">
-                <a:solidFill>
-                  <a:srgbClr val="D4D4D4"/>
-                </a:solidFill>
-                <a:latin typeface="Consolas"/>
-              </a:rPr>
-              <a:t>(</a:t>
-            </a:r>
-            <a:r>
-              <a:rPr sz="2000" i="0" b="0">
-                <a:solidFill>
-                  <a:srgbClr val="CE9178"/>
-                </a:solidFill>
-                <a:latin typeface="Consolas"/>
-              </a:rPr>
-              <a:t>"M-001"</a:t>
-            </a:r>
-            <a:r>
-              <a:rPr sz="2000" i="0" b="0">
-                <a:solidFill>
-                  <a:srgbClr val="D4D4D4"/>
-                </a:solidFill>
-                <a:latin typeface="Consolas"/>
-              </a:rPr>
-              <a:t>, </a:t>
-            </a:r>
-            <a:r>
-              <a:rPr sz="2000" i="0" b="0">
-                <a:solidFill>
-                  <a:srgbClr val="CE9178"/>
-                </a:solidFill>
-                <a:latin typeface="Consolas"/>
-              </a:rPr>
-              <a:t>"Luna"</a:t>
-            </a:r>
-            <a:r>
-              <a:rPr sz="2000" i="0" b="0">
-                <a:solidFill>
-                  <a:srgbClr val="D4D4D4"/>
-                </a:solidFill>
-                <a:latin typeface="Consolas"/>
-              </a:rPr>
-              <a:t>, </a:t>
-            </a:r>
-            <a:r>
-              <a:rPr sz="2000" i="0" b="0">
-                <a:solidFill>
-                  <a:srgbClr val="CE9178"/>
-                </a:solidFill>
-                <a:latin typeface="Consolas"/>
-              </a:rPr>
-              <a:t>"Canino"</a:t>
-            </a:r>
-            <a:r>
-              <a:rPr sz="2000" i="0" b="0">
-                <a:solidFill>
-                  <a:srgbClr val="D4D4D4"/>
-                </a:solidFill>
-                <a:latin typeface="Consolas"/>
-              </a:rPr>
-              <a:t>, </a:t>
-            </a:r>
-            <a:r>
-              <a:rPr sz="2000" i="0" b="0">
-                <a:solidFill>
-                  <a:srgbClr val="B5CEA8"/>
-                </a:solidFill>
-                <a:latin typeface="Consolas"/>
-              </a:rPr>
-              <a:t>3</a:t>
-            </a:r>
-            <a:r>
-              <a:rPr sz="2000" i="0" b="0">
-                <a:solidFill>
-                  <a:srgbClr val="D4D4D4"/>
-                </a:solidFill>
-                <a:latin typeface="Consolas"/>
-              </a:rPr>
-              <a:t>);</a:t>
+              <a:t>String</a:t>
+            </a:r>
+            <a:r>
+              <a:rPr sz="1000" i="0" b="0">
+                <a:solidFill>
+                  <a:srgbClr val="D4D4D4"/>
+                </a:solidFill>
+                <a:latin typeface="Consolas"/>
+              </a:rPr>
+              <a:t> </a:t>
+            </a:r>
+            <a:r>
+              <a:rPr sz="1000" i="0" b="0">
+                <a:solidFill>
+                  <a:srgbClr val="D4D4D4"/>
+                </a:solidFill>
+                <a:latin typeface="Consolas"/>
+              </a:rPr>
+              <a:t>nombre</a:t>
+            </a:r>
+            <a:r>
+              <a:rPr sz="1000" i="0" b="0">
+                <a:solidFill>
+                  <a:srgbClr val="D4D4D4"/>
+                </a:solidFill>
+                <a:latin typeface="Consolas"/>
+              </a:rPr>
+              <a:t>;</a:t>
             </a:r>
           </a:p>
           <a:p>
             <a:pPr>
               <a:spcAft>
-                <a:spcPts val="428"/>
-              </a:spcAft>
-            </a:pPr>
-            <a:r>
-              <a:rPr sz="2000" i="0" b="0">
+                <a:spcPts val="71"/>
+              </a:spcAft>
+            </a:pPr>
+            <a:r>
+              <a:rPr sz="1000" i="0" b="0">
                 <a:solidFill>
                   <a:srgbClr val="D4D4D4"/>
                 </a:solidFill>
@@ -13310,16 +17540,16 @@
               <a:t>    </a:t>
             </a:r>
             <a:r>
-              <a:rPr sz="2000" i="0" b="0">
-                <a:solidFill>
-                  <a:srgbClr val="D4D4D4"/>
-                </a:solidFill>
-                <a:latin typeface="Consolas"/>
-              </a:rPr>
-              <a:t>Mascota</a:t>
-            </a:r>
-            <a:r>
-              <a:rPr sz="2000" i="0" b="0">
+              <a:rPr sz="1000" i="0" b="0">
+                <a:solidFill>
+                  <a:srgbClr val="569CD6"/>
+                </a:solidFill>
+                <a:latin typeface="Consolas"/>
+              </a:rPr>
+              <a:t>private</a:t>
+            </a:r>
+            <a:r>
+              <a:rPr sz="1000" i="0" b="0">
                 <a:solidFill>
                   <a:srgbClr val="D4D4D4"/>
                 </a:solidFill>
@@ -13328,34 +17558,68 @@
               <a:t> </a:t>
             </a:r>
             <a:r>
-              <a:rPr sz="2000" i="0" b="0">
-                <a:solidFill>
-                  <a:srgbClr val="D4D4D4"/>
-                </a:solidFill>
-                <a:latin typeface="Consolas"/>
-              </a:rPr>
-              <a:t>michi</a:t>
-            </a:r>
-            <a:r>
-              <a:rPr sz="2000" i="0" b="0">
-                <a:solidFill>
-                  <a:srgbClr val="D4D4D4"/>
-                </a:solidFill>
-                <a:latin typeface="Consolas"/>
-              </a:rPr>
-              <a:t> = </a:t>
-            </a:r>
-            <a:r>
-              <a:rPr sz="2000" i="0" b="0">
+              <a:rPr sz="1000" i="0" b="0">
+                <a:solidFill>
+                  <a:srgbClr val="4EC9B0"/>
+                </a:solidFill>
+                <a:latin typeface="Consolas"/>
+              </a:rPr>
+              <a:t>String</a:t>
+            </a:r>
+            <a:r>
+              <a:rPr sz="1000" i="0" b="0">
+                <a:solidFill>
+                  <a:srgbClr val="D4D4D4"/>
+                </a:solidFill>
+                <a:latin typeface="Consolas"/>
+              </a:rPr>
+              <a:t> </a:t>
+            </a:r>
+            <a:r>
+              <a:rPr sz="1000" i="0" b="0">
+                <a:solidFill>
+                  <a:srgbClr val="D4D4D4"/>
+                </a:solidFill>
+                <a:latin typeface="Consolas"/>
+              </a:rPr>
+              <a:t>especie</a:t>
+            </a:r>
+            <a:r>
+              <a:rPr sz="1000" i="0" b="0">
+                <a:solidFill>
+                  <a:srgbClr val="D4D4D4"/>
+                </a:solidFill>
+                <a:latin typeface="Consolas"/>
+              </a:rPr>
+              <a:t>;</a:t>
+            </a:r>
+          </a:p>
+          <a:p>
+            <a:pPr>
+              <a:spcAft>
+                <a:spcPts val="71"/>
+              </a:spcAft>
+            </a:pPr>
+            <a:r>
+              <a:rPr sz="1000" i="0" b="0">
+                <a:solidFill>
+                  <a:srgbClr val="D4D4D4"/>
+                </a:solidFill>
+                <a:latin typeface="Consolas"/>
+              </a:rPr>
+              <a:t>    </a:t>
+            </a:r>
+            <a:r>
+              <a:rPr sz="1000" i="0" b="0">
                 <a:solidFill>
                   <a:srgbClr val="569CD6"/>
                 </a:solidFill>
                 <a:latin typeface="Consolas"/>
               </a:rPr>
-              <a:t>new</a:t>
-            </a:r>
-            <a:r>
-              <a:rPr sz="2000" i="0" b="0">
+              <a:t>private</a:t>
+            </a:r>
+            <a:r>
+              <a:rPr sz="1000" i="0" b="0">
                 <a:solidFill>
                   <a:srgbClr val="D4D4D4"/>
                 </a:solidFill>
@@ -13364,318 +17628,40 @@
               <a:t> </a:t>
             </a:r>
             <a:r>
-              <a:rPr sz="2000" i="0" b="0">
+              <a:rPr sz="1000" i="0" b="0">
                 <a:solidFill>
                   <a:srgbClr val="4EC9B0"/>
                 </a:solidFill>
                 <a:latin typeface="Consolas"/>
               </a:rPr>
-              <a:t>Mascota</a:t>
-            </a:r>
-            <a:r>
-              <a:rPr sz="2000" i="0" b="0">
-                <a:solidFill>
-                  <a:srgbClr val="D4D4D4"/>
-                </a:solidFill>
-                <a:latin typeface="Consolas"/>
-              </a:rPr>
-              <a:t>(</a:t>
-            </a:r>
-            <a:r>
-              <a:rPr sz="2000" i="0" b="0">
-                <a:solidFill>
-                  <a:srgbClr val="CE9178"/>
-                </a:solidFill>
-                <a:latin typeface="Consolas"/>
-              </a:rPr>
-              <a:t>"M-002"</a:t>
-            </a:r>
-            <a:r>
-              <a:rPr sz="2000" i="0" b="0">
-                <a:solidFill>
-                  <a:srgbClr val="D4D4D4"/>
-                </a:solidFill>
-                <a:latin typeface="Consolas"/>
-              </a:rPr>
-              <a:t>, </a:t>
-            </a:r>
-            <a:r>
-              <a:rPr sz="2000" i="0" b="0">
-                <a:solidFill>
-                  <a:srgbClr val="CE9178"/>
-                </a:solidFill>
-                <a:latin typeface="Consolas"/>
-              </a:rPr>
-              <a:t>"Michi"</a:t>
-            </a:r>
-            <a:r>
-              <a:rPr sz="2000" i="0" b="0">
-                <a:solidFill>
-                  <a:srgbClr val="D4D4D4"/>
-                </a:solidFill>
-                <a:latin typeface="Consolas"/>
-              </a:rPr>
-              <a:t>, </a:t>
-            </a:r>
-            <a:r>
-              <a:rPr sz="2000" i="0" b="0">
-                <a:solidFill>
-                  <a:srgbClr val="CE9178"/>
-                </a:solidFill>
-                <a:latin typeface="Consolas"/>
-              </a:rPr>
-              <a:t>"Felino"</a:t>
-            </a:r>
-            <a:r>
-              <a:rPr sz="2000" i="0" b="0">
-                <a:solidFill>
-                  <a:srgbClr val="D4D4D4"/>
-                </a:solidFill>
-                <a:latin typeface="Consolas"/>
-              </a:rPr>
-              <a:t>, </a:t>
-            </a:r>
-            <a:r>
-              <a:rPr sz="2000" i="0" b="0">
-                <a:solidFill>
-                  <a:srgbClr val="B5CEA8"/>
-                </a:solidFill>
-                <a:latin typeface="Consolas"/>
-              </a:rPr>
-              <a:t>5</a:t>
-            </a:r>
-            <a:r>
-              <a:rPr sz="2000" i="0" b="0">
-                <a:solidFill>
-                  <a:srgbClr val="D4D4D4"/>
-                </a:solidFill>
-                <a:latin typeface="Consolas"/>
-              </a:rPr>
-              <a:t>);</a:t>
-            </a:r>
-          </a:p>
-          <a:p>
-            <a:pPr>
-              <a:spcAft>
-                <a:spcPts val="428"/>
-              </a:spcAft>
-            </a:pPr>
-            <a:r>
-              <a:rPr sz="2000" i="0" b="0">
-                <a:solidFill>
-                  <a:srgbClr val="D4D4D4"/>
-                </a:solidFill>
-                <a:latin typeface="Consolas"/>
-              </a:rPr>
-              <a:t>    </a:t>
-            </a:r>
-            <a:r>
-              <a:rPr sz="2000" i="0" b="0">
-                <a:solidFill>
-                  <a:srgbClr val="DCDCAA"/>
-                </a:solidFill>
-                <a:latin typeface="Consolas"/>
-              </a:rPr>
-              <a:t>System.out.println</a:t>
-            </a:r>
-            <a:r>
-              <a:rPr sz="2000" i="0" b="0">
-                <a:solidFill>
-                  <a:srgbClr val="D4D4D4"/>
-                </a:solidFill>
-                <a:latin typeface="Consolas"/>
-              </a:rPr>
-              <a:t>(</a:t>
-            </a:r>
-            <a:r>
-              <a:rPr sz="2000" i="0" b="0">
-                <a:solidFill>
-                  <a:srgbClr val="CE9178"/>
-                </a:solidFill>
-                <a:latin typeface="Consolas"/>
-              </a:rPr>
-              <a:t>"Pacientes registrados hoy en la clinica:"</a:t>
-            </a:r>
-            <a:r>
-              <a:rPr sz="2000" i="0" b="0">
-                <a:solidFill>
-                  <a:srgbClr val="D4D4D4"/>
-                </a:solidFill>
-                <a:latin typeface="Consolas"/>
-              </a:rPr>
-              <a:t>);</a:t>
-            </a:r>
-          </a:p>
-          <a:p>
-            <a:pPr>
-              <a:spcAft>
-                <a:spcPts val="428"/>
-              </a:spcAft>
-            </a:pPr>
-            <a:r>
-              <a:rPr sz="2000" i="0" b="0">
-                <a:solidFill>
-                  <a:srgbClr val="D4D4D4"/>
-                </a:solidFill>
-                <a:latin typeface="Consolas"/>
-              </a:rPr>
-              <a:t>    </a:t>
-            </a:r>
-            <a:r>
-              <a:rPr sz="2000" i="0" b="0">
-                <a:solidFill>
-                  <a:srgbClr val="DCDCAA"/>
-                </a:solidFill>
-                <a:latin typeface="Consolas"/>
-              </a:rPr>
-              <a:t>System.out.println</a:t>
-            </a:r>
-            <a:r>
-              <a:rPr sz="2000" i="0" b="0">
-                <a:solidFill>
-                  <a:srgbClr val="D4D4D4"/>
-                </a:solidFill>
-                <a:latin typeface="Consolas"/>
-              </a:rPr>
-              <a:t>(</a:t>
-            </a:r>
-            <a:r>
-              <a:rPr sz="2000" i="0" b="0">
-                <a:solidFill>
-                  <a:srgbClr val="D4D4D4"/>
-                </a:solidFill>
-                <a:latin typeface="Consolas"/>
-              </a:rPr>
-              <a:t>luna</a:t>
-            </a:r>
-            <a:r>
-              <a:rPr sz="2000" i="0" b="0">
-                <a:solidFill>
-                  <a:srgbClr val="D4D4D4"/>
-                </a:solidFill>
-                <a:latin typeface="Consolas"/>
-              </a:rPr>
-              <a:t>);</a:t>
-            </a:r>
-          </a:p>
-          <a:p>
-            <a:pPr>
-              <a:spcAft>
-                <a:spcPts val="428"/>
-              </a:spcAft>
-            </a:pPr>
-            <a:r>
-              <a:rPr sz="2000" i="0" b="0">
-                <a:solidFill>
-                  <a:srgbClr val="D4D4D4"/>
-                </a:solidFill>
-                <a:latin typeface="Consolas"/>
-              </a:rPr>
-              <a:t>    </a:t>
-            </a:r>
-            <a:r>
-              <a:rPr sz="2000" i="0" b="0">
-                <a:solidFill>
-                  <a:srgbClr val="DCDCAA"/>
-                </a:solidFill>
-                <a:latin typeface="Consolas"/>
-              </a:rPr>
-              <a:t>System.out.println</a:t>
-            </a:r>
-            <a:r>
-              <a:rPr sz="2000" i="0" b="0">
-                <a:solidFill>
-                  <a:srgbClr val="D4D4D4"/>
-                </a:solidFill>
-                <a:latin typeface="Consolas"/>
-              </a:rPr>
-              <a:t>(</a:t>
-            </a:r>
-            <a:r>
-              <a:rPr sz="2000" i="0" b="0">
-                <a:solidFill>
-                  <a:srgbClr val="D4D4D4"/>
-                </a:solidFill>
-                <a:latin typeface="Consolas"/>
-              </a:rPr>
-              <a:t>michi</a:t>
-            </a:r>
-            <a:r>
-              <a:rPr sz="2000" i="0" b="0">
-                <a:solidFill>
-                  <a:srgbClr val="D4D4D4"/>
-                </a:solidFill>
-                <a:latin typeface="Consolas"/>
-              </a:rPr>
-              <a:t>);</a:t>
-            </a:r>
-          </a:p>
-          <a:p>
-            <a:pPr>
-              <a:spcAft>
-                <a:spcPts val="428"/>
-              </a:spcAft>
-            </a:pPr>
-            <a:r>
-              <a:rPr sz="2000" i="0" b="0">
-                <a:solidFill>
-                  <a:srgbClr val="D4D4D4"/>
-                </a:solidFill>
-                <a:latin typeface="Consolas"/>
-              </a:rPr>
-              <a:t>    </a:t>
-            </a:r>
-            <a:r>
-              <a:rPr sz="2000" i="0" b="0">
-                <a:solidFill>
-                  <a:srgbClr val="DCDCAA"/>
-                </a:solidFill>
-                <a:latin typeface="Consolas"/>
-              </a:rPr>
-              <a:t>luna.setEdad</a:t>
-            </a:r>
-            <a:r>
-              <a:rPr sz="2000" i="0" b="0">
-                <a:solidFill>
-                  <a:srgbClr val="D4D4D4"/>
-                </a:solidFill>
-                <a:latin typeface="Consolas"/>
-              </a:rPr>
-              <a:t>(-</a:t>
-            </a:r>
-            <a:r>
-              <a:rPr sz="2000" i="0" b="0">
-                <a:solidFill>
-                  <a:srgbClr val="B5CEA8"/>
-                </a:solidFill>
-                <a:latin typeface="Consolas"/>
-              </a:rPr>
-              <a:t>2</a:t>
-            </a:r>
-            <a:r>
-              <a:rPr sz="2000" i="0" b="0">
-                <a:solidFill>
-                  <a:srgbClr val="D4D4D4"/>
-                </a:solidFill>
-                <a:latin typeface="Consolas"/>
-              </a:rPr>
-              <a:t>);</a:t>
-            </a:r>
-          </a:p>
-          <a:p>
-            <a:pPr>
-              <a:spcAft>
-                <a:spcPts val="428"/>
-              </a:spcAft>
-            </a:pPr>
-            <a:r>
-              <a:rPr sz="2000" i="0" b="0">
-                <a:solidFill>
-                  <a:srgbClr val="D4D4D4"/>
-                </a:solidFill>
-                <a:latin typeface="Consolas"/>
-              </a:rPr>
-              <a:t>}</a:t>
+              <a:t>int</a:t>
+            </a:r>
+            <a:r>
+              <a:rPr sz="1000" i="0" b="0">
+                <a:solidFill>
+                  <a:srgbClr val="D4D4D4"/>
+                </a:solidFill>
+                <a:latin typeface="Consolas"/>
+              </a:rPr>
+              <a:t> </a:t>
+            </a:r>
+            <a:r>
+              <a:rPr sz="1000" i="0" b="0">
+                <a:solidFill>
+                  <a:srgbClr val="D4D4D4"/>
+                </a:solidFill>
+                <a:latin typeface="Consolas"/>
+              </a:rPr>
+              <a:t>edad</a:t>
+            </a:r>
+            <a:r>
+              <a:rPr sz="1000" i="0" b="0">
+                <a:solidFill>
+                  <a:srgbClr val="D4D4D4"/>
+                </a:solidFill>
+                <a:latin typeface="Consolas"/>
+              </a:rPr>
+              <a:t>;</a:t>
             </a:r>
           </a:p>
         </p:txBody>
@@ -13688,8 +17674,8 @@
         </p:nvSpPr>
         <p:spPr>
           <a:xfrm>
-            <a:off x="457200" y="6035040"/>
-            <a:ext cx="11277295" cy="365760"/>
+            <a:off x="6210147" y="1719072"/>
+            <a:ext cx="502920" cy="4498848"/>
           </a:xfrm>
           <a:prstGeom prst="rect">
             <a:avLst/>
@@ -13702,15 +17688,227 @@
           </a:bodyPr>
           <a:lstStyle/>
           <a:p>
-            <a:pPr algn="ctr"/>
-            <a:r>
-              <a:rPr sz="1300" b="0" i="1">
-                <a:solidFill>
-                  <a:srgbClr val="666666"/>
-                </a:solidFill>
-                <a:latin typeface="Calibri"/>
-              </a:rPr>
-              <a:t>De Mascota.java</a:t>
+            <a:pPr algn="r">
+              <a:spcAft>
+                <a:spcPts val="71"/>
+              </a:spcAft>
+            </a:pPr>
+            <a:r>
+              <a:rPr sz="1000" i="0" b="0">
+                <a:solidFill>
+                  <a:srgbClr val="858585"/>
+                </a:solidFill>
+                <a:latin typeface="Consolas"/>
+              </a:rPr>
+              <a:t>19</a:t>
+            </a:r>
+          </a:p>
+          <a:p>
+            <a:pPr algn="r">
+              <a:spcAft>
+                <a:spcPts val="71"/>
+              </a:spcAft>
+            </a:pPr>
+            <a:r>
+              <a:rPr sz="1000" i="0" b="0">
+                <a:solidFill>
+                  <a:srgbClr val="858585"/>
+                </a:solidFill>
+                <a:latin typeface="Consolas"/>
+              </a:rPr>
+              <a:t>20</a:t>
+            </a:r>
+          </a:p>
+          <a:p>
+            <a:pPr algn="r">
+              <a:spcAft>
+                <a:spcPts val="71"/>
+              </a:spcAft>
+            </a:pPr>
+            <a:r>
+              <a:rPr sz="1000" i="0" b="0">
+                <a:solidFill>
+                  <a:srgbClr val="858585"/>
+                </a:solidFill>
+                <a:latin typeface="Consolas"/>
+              </a:rPr>
+              <a:t>21</a:t>
+            </a:r>
+          </a:p>
+          <a:p>
+            <a:pPr algn="r">
+              <a:spcAft>
+                <a:spcPts val="71"/>
+              </a:spcAft>
+            </a:pPr>
+            <a:r>
+              <a:rPr sz="1000" i="0" b="0">
+                <a:solidFill>
+                  <a:srgbClr val="858585"/>
+                </a:solidFill>
+                <a:latin typeface="Consolas"/>
+              </a:rPr>
+              <a:t>22</a:t>
+            </a:r>
+          </a:p>
+          <a:p>
+            <a:pPr algn="r">
+              <a:spcAft>
+                <a:spcPts val="71"/>
+              </a:spcAft>
+            </a:pPr>
+            <a:r>
+              <a:rPr sz="1000" i="0" b="0">
+                <a:solidFill>
+                  <a:srgbClr val="858585"/>
+                </a:solidFill>
+                <a:latin typeface="Consolas"/>
+              </a:rPr>
+              <a:t>23</a:t>
+            </a:r>
+          </a:p>
+          <a:p>
+            <a:pPr algn="r">
+              <a:spcAft>
+                <a:spcPts val="71"/>
+              </a:spcAft>
+            </a:pPr>
+            <a:r>
+              <a:rPr sz="1000" i="0" b="0">
+                <a:solidFill>
+                  <a:srgbClr val="858585"/>
+                </a:solidFill>
+                <a:latin typeface="Consolas"/>
+              </a:rPr>
+              <a:t>24</a:t>
+            </a:r>
+          </a:p>
+          <a:p>
+            <a:pPr algn="r">
+              <a:spcAft>
+                <a:spcPts val="71"/>
+              </a:spcAft>
+            </a:pPr>
+            <a:r>
+              <a:rPr sz="1000" i="0" b="0">
+                <a:solidFill>
+                  <a:srgbClr val="858585"/>
+                </a:solidFill>
+                <a:latin typeface="Consolas"/>
+              </a:rPr>
+              <a:t>25</a:t>
+            </a:r>
+          </a:p>
+          <a:p>
+            <a:pPr algn="r">
+              <a:spcAft>
+                <a:spcPts val="71"/>
+              </a:spcAft>
+            </a:pPr>
+            <a:r>
+              <a:rPr sz="1000" i="0" b="0">
+                <a:solidFill>
+                  <a:srgbClr val="858585"/>
+                </a:solidFill>
+                <a:latin typeface="Consolas"/>
+              </a:rPr>
+              <a:t>26</a:t>
+            </a:r>
+          </a:p>
+          <a:p>
+            <a:pPr algn="r">
+              <a:spcAft>
+                <a:spcPts val="71"/>
+              </a:spcAft>
+            </a:pPr>
+            <a:r>
+              <a:rPr sz="1000" i="0" b="0">
+                <a:solidFill>
+                  <a:srgbClr val="858585"/>
+                </a:solidFill>
+                <a:latin typeface="Consolas"/>
+              </a:rPr>
+              <a:t>27</a:t>
+            </a:r>
+          </a:p>
+          <a:p>
+            <a:pPr algn="r">
+              <a:spcAft>
+                <a:spcPts val="71"/>
+              </a:spcAft>
+            </a:pPr>
+            <a:r>
+              <a:rPr sz="1000" i="0" b="0">
+                <a:solidFill>
+                  <a:srgbClr val="858585"/>
+                </a:solidFill>
+                <a:latin typeface="Consolas"/>
+              </a:rPr>
+              <a:t>28</a:t>
+            </a:r>
+          </a:p>
+          <a:p>
+            <a:pPr algn="r">
+              <a:spcAft>
+                <a:spcPts val="71"/>
+              </a:spcAft>
+            </a:pPr>
+            <a:r>
+              <a:rPr sz="1000" i="0" b="0">
+                <a:solidFill>
+                  <a:srgbClr val="858585"/>
+                </a:solidFill>
+                <a:latin typeface="Consolas"/>
+              </a:rPr>
+              <a:t>29</a:t>
+            </a:r>
+          </a:p>
+          <a:p>
+            <a:pPr algn="r">
+              <a:spcAft>
+                <a:spcPts val="71"/>
+              </a:spcAft>
+            </a:pPr>
+            <a:r>
+              <a:rPr sz="1000" i="0" b="0">
+                <a:solidFill>
+                  <a:srgbClr val="858585"/>
+                </a:solidFill>
+                <a:latin typeface="Consolas"/>
+              </a:rPr>
+              <a:t>30</a:t>
+            </a:r>
+          </a:p>
+          <a:p>
+            <a:pPr algn="r">
+              <a:spcAft>
+                <a:spcPts val="71"/>
+              </a:spcAft>
+            </a:pPr>
+            <a:r>
+              <a:rPr sz="1000" i="0" b="0">
+                <a:solidFill>
+                  <a:srgbClr val="858585"/>
+                </a:solidFill>
+                <a:latin typeface="Consolas"/>
+              </a:rPr>
+              <a:t>31</a:t>
+            </a:r>
+          </a:p>
+          <a:p>
+            <a:pPr algn="r">
+              <a:spcAft>
+                <a:spcPts val="71"/>
+              </a:spcAft>
+            </a:pPr>
+            <a:r>
+              <a:rPr sz="1000" i="0" b="0">
+                <a:solidFill>
+                  <a:srgbClr val="858585"/>
+                </a:solidFill>
+                <a:latin typeface="Consolas"/>
+              </a:rPr>
+              <a:t>32</a:t>
             </a:r>
           </a:p>
         </p:txBody>
@@ -13718,6 +17916,865 @@
       <p:sp>
         <p:nvSpPr>
           <p:cNvPr id="14" name="TextBox 13"/>
+          <p:cNvSpPr txBox="1"/>
+          <p:nvPr/>
+        </p:nvSpPr>
+        <p:spPr>
+          <a:xfrm>
+            <a:off x="6713067" y="1719072"/>
+            <a:ext cx="4747107" cy="4498848"/>
+          </a:xfrm>
+          <a:prstGeom prst="rect">
+            <a:avLst/>
+          </a:prstGeom>
+          <a:noFill/>
+        </p:spPr>
+        <p:txBody>
+          <a:bodyPr wrap="square">
+            <a:spAutoFit/>
+          </a:bodyPr>
+          <a:lstStyle/>
+          <a:p>
+            <a:pPr>
+              <a:spcAft>
+                <a:spcPts val="71"/>
+              </a:spcAft>
+            </a:pPr>
+            <a:r>
+              <a:rPr sz="1000" i="0" b="0">
+                <a:solidFill>
+                  <a:srgbClr val="D4D4D4"/>
+                </a:solidFill>
+                <a:latin typeface="Consolas"/>
+              </a:rPr>
+              <a:t>    </a:t>
+            </a:r>
+            <a:r>
+              <a:rPr sz="1000" i="0" b="0">
+                <a:solidFill>
+                  <a:srgbClr val="569CD6"/>
+                </a:solidFill>
+                <a:latin typeface="Consolas"/>
+              </a:rPr>
+              <a:t>public</a:t>
+            </a:r>
+            <a:r>
+              <a:rPr sz="1000" i="0" b="0">
+                <a:solidFill>
+                  <a:srgbClr val="D4D4D4"/>
+                </a:solidFill>
+                <a:latin typeface="Consolas"/>
+              </a:rPr>
+              <a:t> </a:t>
+            </a:r>
+            <a:r>
+              <a:rPr sz="1000" i="0" b="0">
+                <a:solidFill>
+                  <a:srgbClr val="DCDCAA"/>
+                </a:solidFill>
+                <a:latin typeface="Consolas"/>
+              </a:rPr>
+              <a:t>Mascota</a:t>
+            </a:r>
+            <a:r>
+              <a:rPr sz="1000" i="0" b="0">
+                <a:solidFill>
+                  <a:srgbClr val="D4D4D4"/>
+                </a:solidFill>
+                <a:latin typeface="Consolas"/>
+              </a:rPr>
+              <a:t>(</a:t>
+            </a:r>
+            <a:r>
+              <a:rPr sz="1000" i="0" b="0">
+                <a:solidFill>
+                  <a:srgbClr val="4EC9B0"/>
+                </a:solidFill>
+                <a:latin typeface="Consolas"/>
+              </a:rPr>
+              <a:t>String</a:t>
+            </a:r>
+            <a:r>
+              <a:rPr sz="1000" i="0" b="0">
+                <a:solidFill>
+                  <a:srgbClr val="D4D4D4"/>
+                </a:solidFill>
+                <a:latin typeface="Consolas"/>
+              </a:rPr>
+              <a:t> </a:t>
+            </a:r>
+            <a:r>
+              <a:rPr sz="1000" i="0" b="0">
+                <a:solidFill>
+                  <a:srgbClr val="D4D4D4"/>
+                </a:solidFill>
+                <a:latin typeface="Consolas"/>
+              </a:rPr>
+              <a:t>id</a:t>
+            </a:r>
+            <a:r>
+              <a:rPr sz="1000" i="0" b="0">
+                <a:solidFill>
+                  <a:srgbClr val="D4D4D4"/>
+                </a:solidFill>
+                <a:latin typeface="Consolas"/>
+              </a:rPr>
+              <a:t>, </a:t>
+            </a:r>
+            <a:r>
+              <a:rPr sz="1000" i="0" b="0">
+                <a:solidFill>
+                  <a:srgbClr val="4EC9B0"/>
+                </a:solidFill>
+                <a:latin typeface="Consolas"/>
+              </a:rPr>
+              <a:t>String</a:t>
+            </a:r>
+            <a:r>
+              <a:rPr sz="1000" i="0" b="0">
+                <a:solidFill>
+                  <a:srgbClr val="D4D4D4"/>
+                </a:solidFill>
+                <a:latin typeface="Consolas"/>
+              </a:rPr>
+              <a:t> </a:t>
+            </a:r>
+            <a:r>
+              <a:rPr sz="1000" i="0" b="0">
+                <a:solidFill>
+                  <a:srgbClr val="D4D4D4"/>
+                </a:solidFill>
+                <a:latin typeface="Consolas"/>
+              </a:rPr>
+              <a:t>nombre</a:t>
+            </a:r>
+            <a:r>
+              <a:rPr sz="1000" i="0" b="0">
+                <a:solidFill>
+                  <a:srgbClr val="D4D4D4"/>
+                </a:solidFill>
+                <a:latin typeface="Consolas"/>
+              </a:rPr>
+              <a:t>, </a:t>
+            </a:r>
+            <a:r>
+              <a:rPr sz="1000" i="0" b="0">
+                <a:solidFill>
+                  <a:srgbClr val="4EC9B0"/>
+                </a:solidFill>
+                <a:latin typeface="Consolas"/>
+              </a:rPr>
+              <a:t>String</a:t>
+            </a:r>
+            <a:r>
+              <a:rPr sz="1000" i="0" b="0">
+                <a:solidFill>
+                  <a:srgbClr val="D4D4D4"/>
+                </a:solidFill>
+                <a:latin typeface="Consolas"/>
+              </a:rPr>
+              <a:t> </a:t>
+            </a:r>
+            <a:r>
+              <a:rPr sz="1000" i="0" b="0">
+                <a:solidFill>
+                  <a:srgbClr val="D4D4D4"/>
+                </a:solidFill>
+                <a:latin typeface="Consolas"/>
+              </a:rPr>
+              <a:t>especie</a:t>
+            </a:r>
+            <a:r>
+              <a:rPr sz="1000" i="0" b="0">
+                <a:solidFill>
+                  <a:srgbClr val="D4D4D4"/>
+                </a:solidFill>
+                <a:latin typeface="Consolas"/>
+              </a:rPr>
+              <a:t>,</a:t>
+            </a:r>
+          </a:p>
+          <a:p>
+            <a:pPr>
+              <a:spcAft>
+                <a:spcPts val="71"/>
+              </a:spcAft>
+            </a:pPr>
+            <a:r>
+              <a:rPr sz="1000" i="0" b="0">
+                <a:solidFill>
+                  <a:srgbClr val="D4D4D4"/>
+                </a:solidFill>
+                <a:latin typeface="Consolas"/>
+              </a:rPr>
+              <a:t>                   </a:t>
+            </a:r>
+            <a:r>
+              <a:rPr sz="1000" i="0" b="0">
+                <a:solidFill>
+                  <a:srgbClr val="4EC9B0"/>
+                </a:solidFill>
+                <a:latin typeface="Consolas"/>
+              </a:rPr>
+              <a:t>int</a:t>
+            </a:r>
+            <a:r>
+              <a:rPr sz="1000" i="0" b="0">
+                <a:solidFill>
+                  <a:srgbClr val="D4D4D4"/>
+                </a:solidFill>
+                <a:latin typeface="Consolas"/>
+              </a:rPr>
+              <a:t> </a:t>
+            </a:r>
+            <a:r>
+              <a:rPr sz="1000" i="0" b="0">
+                <a:solidFill>
+                  <a:srgbClr val="D4D4D4"/>
+                </a:solidFill>
+                <a:latin typeface="Consolas"/>
+              </a:rPr>
+              <a:t>edad</a:t>
+            </a:r>
+            <a:r>
+              <a:rPr sz="1000" i="0" b="0">
+                <a:solidFill>
+                  <a:srgbClr val="D4D4D4"/>
+                </a:solidFill>
+                <a:latin typeface="Consolas"/>
+              </a:rPr>
+              <a:t>) {</a:t>
+            </a:r>
+          </a:p>
+          <a:p>
+            <a:pPr>
+              <a:spcAft>
+                <a:spcPts val="71"/>
+              </a:spcAft>
+            </a:pPr>
+            <a:r>
+              <a:rPr sz="1000" i="0" b="0">
+                <a:solidFill>
+                  <a:srgbClr val="D4D4D4"/>
+                </a:solidFill>
+                <a:latin typeface="Consolas"/>
+              </a:rPr>
+              <a:t>        </a:t>
+            </a:r>
+            <a:r>
+              <a:rPr sz="1000" i="0" b="0">
+                <a:solidFill>
+                  <a:srgbClr val="569CD6"/>
+                </a:solidFill>
+                <a:latin typeface="Consolas"/>
+              </a:rPr>
+              <a:t>this</a:t>
+            </a:r>
+            <a:r>
+              <a:rPr sz="1000" i="0" b="0">
+                <a:solidFill>
+                  <a:srgbClr val="D4D4D4"/>
+                </a:solidFill>
+                <a:latin typeface="Consolas"/>
+              </a:rPr>
+              <a:t>.</a:t>
+            </a:r>
+            <a:r>
+              <a:rPr sz="1000" i="0" b="0">
+                <a:solidFill>
+                  <a:srgbClr val="D4D4D4"/>
+                </a:solidFill>
+                <a:latin typeface="Consolas"/>
+              </a:rPr>
+              <a:t>id</a:t>
+            </a:r>
+            <a:r>
+              <a:rPr sz="1000" i="0" b="0">
+                <a:solidFill>
+                  <a:srgbClr val="D4D4D4"/>
+                </a:solidFill>
+                <a:latin typeface="Consolas"/>
+              </a:rPr>
+              <a:t> = </a:t>
+            </a:r>
+            <a:r>
+              <a:rPr sz="1000" i="0" b="0">
+                <a:solidFill>
+                  <a:srgbClr val="D4D4D4"/>
+                </a:solidFill>
+                <a:latin typeface="Consolas"/>
+              </a:rPr>
+              <a:t>id</a:t>
+            </a:r>
+            <a:r>
+              <a:rPr sz="1000" i="0" b="0">
+                <a:solidFill>
+                  <a:srgbClr val="D4D4D4"/>
+                </a:solidFill>
+                <a:latin typeface="Consolas"/>
+              </a:rPr>
+              <a:t>;</a:t>
+            </a:r>
+          </a:p>
+          <a:p>
+            <a:pPr>
+              <a:spcAft>
+                <a:spcPts val="71"/>
+              </a:spcAft>
+            </a:pPr>
+            <a:r>
+              <a:rPr sz="1000" i="0" b="0">
+                <a:solidFill>
+                  <a:srgbClr val="D4D4D4"/>
+                </a:solidFill>
+                <a:latin typeface="Consolas"/>
+              </a:rPr>
+              <a:t>        </a:t>
+            </a:r>
+            <a:r>
+              <a:rPr sz="1000" i="0" b="0">
+                <a:solidFill>
+                  <a:srgbClr val="569CD6"/>
+                </a:solidFill>
+                <a:latin typeface="Consolas"/>
+              </a:rPr>
+              <a:t>this</a:t>
+            </a:r>
+            <a:r>
+              <a:rPr sz="1000" i="0" b="0">
+                <a:solidFill>
+                  <a:srgbClr val="D4D4D4"/>
+                </a:solidFill>
+                <a:latin typeface="Consolas"/>
+              </a:rPr>
+              <a:t>.</a:t>
+            </a:r>
+            <a:r>
+              <a:rPr sz="1000" i="0" b="0">
+                <a:solidFill>
+                  <a:srgbClr val="D4D4D4"/>
+                </a:solidFill>
+                <a:latin typeface="Consolas"/>
+              </a:rPr>
+              <a:t>nombre</a:t>
+            </a:r>
+            <a:r>
+              <a:rPr sz="1000" i="0" b="0">
+                <a:solidFill>
+                  <a:srgbClr val="D4D4D4"/>
+                </a:solidFill>
+                <a:latin typeface="Consolas"/>
+              </a:rPr>
+              <a:t> = </a:t>
+            </a:r>
+            <a:r>
+              <a:rPr sz="1000" i="0" b="0">
+                <a:solidFill>
+                  <a:srgbClr val="D4D4D4"/>
+                </a:solidFill>
+                <a:latin typeface="Consolas"/>
+              </a:rPr>
+              <a:t>nombre</a:t>
+            </a:r>
+            <a:r>
+              <a:rPr sz="1000" i="0" b="0">
+                <a:solidFill>
+                  <a:srgbClr val="D4D4D4"/>
+                </a:solidFill>
+                <a:latin typeface="Consolas"/>
+              </a:rPr>
+              <a:t>;</a:t>
+            </a:r>
+          </a:p>
+          <a:p>
+            <a:pPr>
+              <a:spcAft>
+                <a:spcPts val="71"/>
+              </a:spcAft>
+            </a:pPr>
+            <a:r>
+              <a:rPr sz="1000" i="0" b="0">
+                <a:solidFill>
+                  <a:srgbClr val="D4D4D4"/>
+                </a:solidFill>
+                <a:latin typeface="Consolas"/>
+              </a:rPr>
+              <a:t>        </a:t>
+            </a:r>
+            <a:r>
+              <a:rPr sz="1000" i="0" b="0">
+                <a:solidFill>
+                  <a:srgbClr val="569CD6"/>
+                </a:solidFill>
+                <a:latin typeface="Consolas"/>
+              </a:rPr>
+              <a:t>this</a:t>
+            </a:r>
+            <a:r>
+              <a:rPr sz="1000" i="0" b="0">
+                <a:solidFill>
+                  <a:srgbClr val="D4D4D4"/>
+                </a:solidFill>
+                <a:latin typeface="Consolas"/>
+              </a:rPr>
+              <a:t>.</a:t>
+            </a:r>
+            <a:r>
+              <a:rPr sz="1000" i="0" b="0">
+                <a:solidFill>
+                  <a:srgbClr val="D4D4D4"/>
+                </a:solidFill>
+                <a:latin typeface="Consolas"/>
+              </a:rPr>
+              <a:t>especie</a:t>
+            </a:r>
+            <a:r>
+              <a:rPr sz="1000" i="0" b="0">
+                <a:solidFill>
+                  <a:srgbClr val="D4D4D4"/>
+                </a:solidFill>
+                <a:latin typeface="Consolas"/>
+              </a:rPr>
+              <a:t> = </a:t>
+            </a:r>
+            <a:r>
+              <a:rPr sz="1000" i="0" b="0">
+                <a:solidFill>
+                  <a:srgbClr val="D4D4D4"/>
+                </a:solidFill>
+                <a:latin typeface="Consolas"/>
+              </a:rPr>
+              <a:t>especie</a:t>
+            </a:r>
+            <a:r>
+              <a:rPr sz="1000" i="0" b="0">
+                <a:solidFill>
+                  <a:srgbClr val="D4D4D4"/>
+                </a:solidFill>
+                <a:latin typeface="Consolas"/>
+              </a:rPr>
+              <a:t>;</a:t>
+            </a:r>
+          </a:p>
+          <a:p>
+            <a:pPr>
+              <a:spcAft>
+                <a:spcPts val="71"/>
+              </a:spcAft>
+            </a:pPr>
+            <a:r>
+              <a:rPr sz="1000" i="0" b="0">
+                <a:solidFill>
+                  <a:srgbClr val="D4D4D4"/>
+                </a:solidFill>
+                <a:latin typeface="Consolas"/>
+              </a:rPr>
+              <a:t>        </a:t>
+            </a:r>
+            <a:r>
+              <a:rPr sz="1000" i="0" b="0">
+                <a:solidFill>
+                  <a:srgbClr val="569CD6"/>
+                </a:solidFill>
+                <a:latin typeface="Consolas"/>
+              </a:rPr>
+              <a:t>this</a:t>
+            </a:r>
+            <a:r>
+              <a:rPr sz="1000" i="0" b="0">
+                <a:solidFill>
+                  <a:srgbClr val="D4D4D4"/>
+                </a:solidFill>
+                <a:latin typeface="Consolas"/>
+              </a:rPr>
+              <a:t>.</a:t>
+            </a:r>
+            <a:r>
+              <a:rPr sz="1000" i="0" b="0">
+                <a:solidFill>
+                  <a:srgbClr val="D4D4D4"/>
+                </a:solidFill>
+                <a:latin typeface="Consolas"/>
+              </a:rPr>
+              <a:t>edad</a:t>
+            </a:r>
+            <a:r>
+              <a:rPr sz="1000" i="0" b="0">
+                <a:solidFill>
+                  <a:srgbClr val="D4D4D4"/>
+                </a:solidFill>
+                <a:latin typeface="Consolas"/>
+              </a:rPr>
+              <a:t> = </a:t>
+            </a:r>
+            <a:r>
+              <a:rPr sz="1000" i="0" b="0">
+                <a:solidFill>
+                  <a:srgbClr val="D4D4D4"/>
+                </a:solidFill>
+                <a:latin typeface="Consolas"/>
+              </a:rPr>
+              <a:t>edad</a:t>
+            </a:r>
+            <a:r>
+              <a:rPr sz="1000" i="0" b="0">
+                <a:solidFill>
+                  <a:srgbClr val="D4D4D4"/>
+                </a:solidFill>
+                <a:latin typeface="Consolas"/>
+              </a:rPr>
+              <a:t>;</a:t>
+            </a:r>
+          </a:p>
+          <a:p>
+            <a:pPr>
+              <a:spcAft>
+                <a:spcPts val="71"/>
+              </a:spcAft>
+            </a:pPr>
+            <a:r>
+              <a:rPr sz="1000" i="0" b="0">
+                <a:solidFill>
+                  <a:srgbClr val="D4D4D4"/>
+                </a:solidFill>
+                <a:latin typeface="Consolas"/>
+              </a:rPr>
+              <a:t>    }</a:t>
+            </a:r>
+          </a:p>
+          <a:p>
+            <a:pPr>
+              <a:spcAft>
+                <a:spcPts val="71"/>
+              </a:spcAft>
+            </a:pPr>
+            <a:r>
+              <a:rPr sz="1000" i="0" b="0">
+                <a:solidFill>
+                  <a:srgbClr val="D4D4D4"/>
+                </a:solidFill>
+                <a:latin typeface="Consolas"/>
+              </a:rPr>
+              <a:t/>
+            </a:r>
+          </a:p>
+          <a:p>
+            <a:pPr>
+              <a:spcAft>
+                <a:spcPts val="71"/>
+              </a:spcAft>
+            </a:pPr>
+            <a:r>
+              <a:rPr sz="1000" i="0" b="0">
+                <a:solidFill>
+                  <a:srgbClr val="D4D4D4"/>
+                </a:solidFill>
+                <a:latin typeface="Consolas"/>
+              </a:rPr>
+              <a:t>    @</a:t>
+            </a:r>
+            <a:r>
+              <a:rPr sz="1000" i="0" b="0">
+                <a:solidFill>
+                  <a:srgbClr val="D4D4D4"/>
+                </a:solidFill>
+                <a:latin typeface="Consolas"/>
+              </a:rPr>
+              <a:t>Override</a:t>
+            </a:r>
+          </a:p>
+          <a:p>
+            <a:pPr>
+              <a:spcAft>
+                <a:spcPts val="71"/>
+              </a:spcAft>
+            </a:pPr>
+            <a:r>
+              <a:rPr sz="1000" i="0" b="0">
+                <a:solidFill>
+                  <a:srgbClr val="D4D4D4"/>
+                </a:solidFill>
+                <a:latin typeface="Consolas"/>
+              </a:rPr>
+              <a:t>    </a:t>
+            </a:r>
+            <a:r>
+              <a:rPr sz="1000" i="0" b="0">
+                <a:solidFill>
+                  <a:srgbClr val="569CD6"/>
+                </a:solidFill>
+                <a:latin typeface="Consolas"/>
+              </a:rPr>
+              <a:t>public</a:t>
+            </a:r>
+            <a:r>
+              <a:rPr sz="1000" i="0" b="0">
+                <a:solidFill>
+                  <a:srgbClr val="D4D4D4"/>
+                </a:solidFill>
+                <a:latin typeface="Consolas"/>
+              </a:rPr>
+              <a:t> </a:t>
+            </a:r>
+            <a:r>
+              <a:rPr sz="1000" i="0" b="0">
+                <a:solidFill>
+                  <a:srgbClr val="4EC9B0"/>
+                </a:solidFill>
+                <a:latin typeface="Consolas"/>
+              </a:rPr>
+              <a:t>String</a:t>
+            </a:r>
+            <a:r>
+              <a:rPr sz="1000" i="0" b="0">
+                <a:solidFill>
+                  <a:srgbClr val="D4D4D4"/>
+                </a:solidFill>
+                <a:latin typeface="Consolas"/>
+              </a:rPr>
+              <a:t> </a:t>
+            </a:r>
+            <a:r>
+              <a:rPr sz="1000" i="0" b="0">
+                <a:solidFill>
+                  <a:srgbClr val="DCDCAA"/>
+                </a:solidFill>
+                <a:latin typeface="Consolas"/>
+              </a:rPr>
+              <a:t>toString</a:t>
+            </a:r>
+            <a:r>
+              <a:rPr sz="1000" i="0" b="0">
+                <a:solidFill>
+                  <a:srgbClr val="D4D4D4"/>
+                </a:solidFill>
+                <a:latin typeface="Consolas"/>
+              </a:rPr>
+              <a:t>() {</a:t>
+            </a:r>
+          </a:p>
+          <a:p>
+            <a:pPr>
+              <a:spcAft>
+                <a:spcPts val="71"/>
+              </a:spcAft>
+            </a:pPr>
+            <a:r>
+              <a:rPr sz="1000" i="0" b="0">
+                <a:solidFill>
+                  <a:srgbClr val="D4D4D4"/>
+                </a:solidFill>
+                <a:latin typeface="Consolas"/>
+              </a:rPr>
+              <a:t>        </a:t>
+            </a:r>
+            <a:r>
+              <a:rPr sz="1000" i="0" b="0">
+                <a:solidFill>
+                  <a:srgbClr val="569CD6"/>
+                </a:solidFill>
+                <a:latin typeface="Consolas"/>
+              </a:rPr>
+              <a:t>return</a:t>
+            </a:r>
+            <a:r>
+              <a:rPr sz="1000" i="0" b="0">
+                <a:solidFill>
+                  <a:srgbClr val="D4D4D4"/>
+                </a:solidFill>
+                <a:latin typeface="Consolas"/>
+              </a:rPr>
+              <a:t> </a:t>
+            </a:r>
+            <a:r>
+              <a:rPr sz="1000" i="0" b="0">
+                <a:solidFill>
+                  <a:srgbClr val="D4D4D4"/>
+                </a:solidFill>
+                <a:latin typeface="Consolas"/>
+              </a:rPr>
+              <a:t>id</a:t>
+            </a:r>
+            <a:r>
+              <a:rPr sz="1000" i="0" b="0">
+                <a:solidFill>
+                  <a:srgbClr val="D4D4D4"/>
+                </a:solidFill>
+                <a:latin typeface="Consolas"/>
+              </a:rPr>
+              <a:t> + </a:t>
+            </a:r>
+            <a:r>
+              <a:rPr sz="1000" i="0" b="0">
+                <a:solidFill>
+                  <a:srgbClr val="CE9178"/>
+                </a:solidFill>
+                <a:latin typeface="Consolas"/>
+              </a:rPr>
+              <a:t>" - "</a:t>
+            </a:r>
+            <a:r>
+              <a:rPr sz="1000" i="0" b="0">
+                <a:solidFill>
+                  <a:srgbClr val="D4D4D4"/>
+                </a:solidFill>
+                <a:latin typeface="Consolas"/>
+              </a:rPr>
+              <a:t> + </a:t>
+            </a:r>
+            <a:r>
+              <a:rPr sz="1000" i="0" b="0">
+                <a:solidFill>
+                  <a:srgbClr val="D4D4D4"/>
+                </a:solidFill>
+                <a:latin typeface="Consolas"/>
+              </a:rPr>
+              <a:t>nombre</a:t>
+            </a:r>
+            <a:r>
+              <a:rPr sz="1000" i="0" b="0">
+                <a:solidFill>
+                  <a:srgbClr val="D4D4D4"/>
+                </a:solidFill>
+                <a:latin typeface="Consolas"/>
+              </a:rPr>
+              <a:t> + </a:t>
+            </a:r>
+            <a:r>
+              <a:rPr sz="1000" i="0" b="0">
+                <a:solidFill>
+                  <a:srgbClr val="CE9178"/>
+                </a:solidFill>
+                <a:latin typeface="Consolas"/>
+              </a:rPr>
+              <a:t>" ("</a:t>
+            </a:r>
+            <a:r>
+              <a:rPr sz="1000" i="0" b="0">
+                <a:solidFill>
+                  <a:srgbClr val="D4D4D4"/>
+                </a:solidFill>
+                <a:latin typeface="Consolas"/>
+              </a:rPr>
+              <a:t> + </a:t>
+            </a:r>
+            <a:r>
+              <a:rPr sz="1000" i="0" b="0">
+                <a:solidFill>
+                  <a:srgbClr val="D4D4D4"/>
+                </a:solidFill>
+                <a:latin typeface="Consolas"/>
+              </a:rPr>
+              <a:t>especie</a:t>
+            </a:r>
+            <a:r>
+              <a:rPr sz="1000" i="0" b="0">
+                <a:solidFill>
+                  <a:srgbClr val="D4D4D4"/>
+                </a:solidFill>
+                <a:latin typeface="Consolas"/>
+              </a:rPr>
+              <a:t> + </a:t>
+            </a:r>
+            <a:r>
+              <a:rPr sz="1000" i="0" b="0">
+                <a:solidFill>
+                  <a:srgbClr val="CE9178"/>
+                </a:solidFill>
+                <a:latin typeface="Consolas"/>
+              </a:rPr>
+              <a:t>", "</a:t>
+            </a:r>
+          </a:p>
+          <a:p>
+            <a:pPr>
+              <a:spcAft>
+                <a:spcPts val="71"/>
+              </a:spcAft>
+            </a:pPr>
+            <a:r>
+              <a:rPr sz="1000" i="0" b="0">
+                <a:solidFill>
+                  <a:srgbClr val="D4D4D4"/>
+                </a:solidFill>
+                <a:latin typeface="Consolas"/>
+              </a:rPr>
+              <a:t>                + </a:t>
+            </a:r>
+            <a:r>
+              <a:rPr sz="1000" i="0" b="0">
+                <a:solidFill>
+                  <a:srgbClr val="D4D4D4"/>
+                </a:solidFill>
+                <a:latin typeface="Consolas"/>
+              </a:rPr>
+              <a:t>edad</a:t>
+            </a:r>
+            <a:r>
+              <a:rPr sz="1000" i="0" b="0">
+                <a:solidFill>
+                  <a:srgbClr val="D4D4D4"/>
+                </a:solidFill>
+                <a:latin typeface="Consolas"/>
+              </a:rPr>
+              <a:t> + </a:t>
+            </a:r>
+            <a:r>
+              <a:rPr sz="1000" i="0" b="0">
+                <a:solidFill>
+                  <a:srgbClr val="CE9178"/>
+                </a:solidFill>
+                <a:latin typeface="Consolas"/>
+              </a:rPr>
+              <a:t>" anios)"</a:t>
+            </a:r>
+            <a:r>
+              <a:rPr sz="1000" i="0" b="0">
+                <a:solidFill>
+                  <a:srgbClr val="D4D4D4"/>
+                </a:solidFill>
+                <a:latin typeface="Consolas"/>
+              </a:rPr>
+              <a:t>;</a:t>
+            </a:r>
+          </a:p>
+          <a:p>
+            <a:pPr>
+              <a:spcAft>
+                <a:spcPts val="71"/>
+              </a:spcAft>
+            </a:pPr>
+            <a:r>
+              <a:rPr sz="1000" i="0" b="0">
+                <a:solidFill>
+                  <a:srgbClr val="D4D4D4"/>
+                </a:solidFill>
+                <a:latin typeface="Consolas"/>
+              </a:rPr>
+              <a:t>    }</a:t>
+            </a:r>
+          </a:p>
+          <a:p>
+            <a:pPr>
+              <a:spcAft>
+                <a:spcPts val="71"/>
+              </a:spcAft>
+            </a:pPr>
+            <a:r>
+              <a:rPr sz="1000" i="0" b="0">
+                <a:solidFill>
+                  <a:srgbClr val="D4D4D4"/>
+                </a:solidFill>
+                <a:latin typeface="Consolas"/>
+              </a:rPr>
+              <a:t>}</a:t>
+            </a:r>
+          </a:p>
+        </p:txBody>
+      </p:sp>
+      <p:sp>
+        <p:nvSpPr>
+          <p:cNvPr id="15" name="TextBox 14"/>
           <p:cNvSpPr txBox="1"/>
           <p:nvPr/>
         </p:nvSpPr>
